--- a/downloads/presentations/modules/gov-300.pptx
+++ b/downloads/presentations/modules/gov-300.pptx
@@ -615,7 +615,8 @@
               <a:rPr lang="en-US" dirty="0"/>
               <a:t>Public Health Example
 A public health program may use an AI assistant to summarize uploaded partner reports. One report could contain hidden or visible instructions telling the AI to ignore prior rules and reveal confidential information. If the assistant treats the report content as instructions rather than data, it may produce unsafe outputs or attempt unauthorized actions.
-A secure workflow would use an approved tool, restrict the assistant’s access, treat uploaded content as untrusted, disable unnecessary tool actions, log activity, and require human review before any output is shared. Staff should be trained to recognize suspicious instructions embedded in documents or outputs.</a:t>
+A secure workflow would use an approved tool, restrict the assistant’s access, treat uploaded content as untrusted, disable unnecessary tool actions, log activity, and require human review before any output is shared. Staff should be trained to recognize suspicious instructions embedded in documents or outputs.
+Application guidance: Identify what could go wrong, who could be affected, what safeguards are needed, and what evidence should be reviewed before use expands.</a:t>
             </a:r>
             <a:endParaRPr lang="en-US" dirty="0"/>
           </a:p>
@@ -706,7 +707,8 @@
               <a:t>Technical Deep Dive
 AI security begins with use-case classification. A low-risk training exercise using public documents requires different controls than a tool connected to case records or document repositories. Agencies should classify AI uses by data sensitivity, system access, autonomy, public-facing impact, and consequence of error.
 Access control is central. AI tools should not have broad access to systems simply because broad access is convenient. Each integration should specify what the tool can read, write, update, send, or delete. Read-only access is safer than write access, but read-only access can still expose sensitive information if permissions are weak.
-Prompt injection defenses should include system-level protections, content handling, tool restrictions, and user training. External content should be treated as data, not instruction. Tools should not follow directions found inside documents, emails, or web pages unless those directions come from an authorized user in the correct workflow. Agentic systems should require additional approval before taking consequential actions.</a:t>
+Prompt injection defenses should include system-level protections, content handling, tool restrictions, and user training. External content should be treated as data, not instruction. Tools should not follow directions found inside documents, emails, or web pages unless those directions come from an authorized user in the correct workflow. Agentic systems should require additional approval before taking consequential actions.
+Application guidance: Identify what could go wrong, who could be affected, what safeguards are needed, and what evidence should be reviewed before use expands.</a:t>
             </a:r>
             <a:endParaRPr lang="en-US" dirty="0"/>
           </a:p>
@@ -796,7 +798,8 @@
               <a:rPr lang="en-US" dirty="0"/>
               <a:t>Technical Deep Dive
 Output handling matters because AI outputs may be copied into reports, emails, code, dashboards, or scripts. Insecure output handling can lead to misinformation, broken code, malicious links, or inappropriate disclosure. Outputs should be validated before downstream use, especially when they affect systems, public communications, or records.
-Incident response should include AI-specific triggers. Examples include unauthorized data exposure, unexpected tool use, prompt injection attempt, repeated unsafe output, model misuse, credential exposure, or vendor security incident. Logs should support investigation of prompts, inputs, retrieved sources, outputs, tool calls, users, and actions.</a:t>
+Incident response should include AI-specific triggers. Examples include unauthorized data exposure, unexpected tool use, prompt injection attempt, repeated unsafe output, model misuse, credential exposure, or vendor security incident. Logs should support investigation of prompts, inputs, retrieved sources, outputs, tool calls, users, and actions.
+Application guidance: Identify what could go wrong, who could be affected, what safeguards are needed, and what evidence should be reviewed before use expands.</a:t>
             </a:r>
             <a:endParaRPr lang="en-US" dirty="0"/>
           </a:p>
@@ -887,7 +890,8 @@
               <a:t>Risks, Failure Modes, and Guardrails
 Prompt injection. Untrusted content may override instructions. Guardrails include treating external content as data, restricting tools, and testing with adversarial examples.
 Sensitive information disclosure. AI may reveal information outside user permissions. Guardrails include access controls, data minimization, redaction, and audit logs.
-Excessive agency. Tools may have more capability than needed. Guardrails include least privilege, approval gates, and prohibited-action lists.</a:t>
+Excessive agency. Tools may have more capability than needed. Guardrails include least privilege, approval gates, and prohibited-action lists.
+Application guidance: Identify what could go wrong, who could be affected, what safeguards are needed, and what evidence should be reviewed before use expands.</a:t>
             </a:r>
             <a:endParaRPr lang="en-US" dirty="0"/>
           </a:p>
@@ -976,7 +980,8 @@
             <a:r>
               <a:rPr lang="en-US" dirty="0"/>
               <a:t>Risks, Failure Modes, and Guardrails
-Supply chain risk. AI tools may depend on vendors, plugins, models, or libraries with vulnerabilities. Guardrails include vendor review, security documentation, patching, and contract requirements.</a:t>
+Supply chain risk. AI tools may depend on vendors, plugins, models, or libraries with vulnerabilities. Guardrails include vendor review, security documentation, patching, and contract requirements.
+Application guidance: Identify what could go wrong, who could be affected, what safeguards are needed, and what evidence should be reviewed before use expands.</a:t>
             </a:r>
             <a:endParaRPr lang="en-US" dirty="0"/>
           </a:p>
@@ -1066,7 +1071,8 @@
               <a:rPr lang="en-US" dirty="0"/>
               <a:t>Application to AI-Supported Workflows
 AI security applies to generative AI, RAG, NLP, APIs, and agentic workflows. RAG systems need document-level permissions and protections against unauthorized retrieval. Agentic systems need tool restrictions and action approval. Prompt templates should include data boundaries, and technical implementations should enforce those boundaries rather than relying on user behavior alone.
-Security should be designed as part of the workflow. Public health users should know which tools are approved, what data may be used, what outputs require review, and how to report suspicious or unsafe behavior.</a:t>
+Security should be designed as part of the workflow. Public health users should know which tools are approved, what data may be used, what outputs require review, and how to report suspicious or unsafe behavior.
+Application guidance: Identify what could go wrong, who could be affected, what safeguards are needed, and what evidence should be reviewed before use expands.</a:t>
             </a:r>
             <a:endParaRPr lang="en-US" dirty="0"/>
           </a:p>
@@ -1157,7 +1163,8 @@
               <a:t>Reflection Questions
 What sensitive data or systems would the AI workflow touch?
 Could the AI tool access more information or actions than necessary?
-What untrusted content might the tool process?</a:t>
+What untrusted content might the tool process?
+Application guidance: Identify what could go wrong, who could be affected, what safeguards are needed, and what evidence should be reviewed before use expands.</a:t>
             </a:r>
             <a:endParaRPr lang="en-US" dirty="0"/>
           </a:p>
@@ -1247,7 +1254,8 @@
               <a:rPr lang="en-US" dirty="0"/>
               <a:t>Reflection Questions
 How will prompt injection attempts or unsafe outputs be detected?
-What logs and incident response steps are required?</a:t>
+What logs and incident response steps are required?
+Application guidance: Identify what could go wrong, who could be affected, what safeguards are needed, and what evidence should be reviewed before use expands.</a:t>
             </a:r>
             <a:endParaRPr lang="en-US" dirty="0"/>
           </a:p>
@@ -1337,7 +1345,8 @@
               <a:rPr lang="en-US" dirty="0"/>
               <a:t>Practical Exercise
 Create a secure AI workflow checklist for one public health use case. Include data sensitivity, approved tools, access controls, least-privilege review, prompt injection risk, output handling, logging, vendor security questions, incident triggers, and escalation process.
-The checklist should identify which controls must be in place before pilot testing and which controls must be monitored after launch.</a:t>
+The checklist should identify which controls must be in place before pilot testing and which controls must be monitored after launch.
+Application guidance: Use the assignment to test whether you can explain the concept, apply it to a realistic public health situation, and identify what would need review before the work moves forward.</a:t>
             </a:r>
             <a:endParaRPr lang="en-US" dirty="0"/>
           </a:p>
@@ -1428,7 +1437,8 @@
               <a:t>Expected Artifact or Evidence
 Secure AI workflow checklist
 Vendor and implementation security questions
-Prompt injection risk notes</a:t>
+Prompt injection risk notes
+Application guidance: Identify what could go wrong, who could be affected, what safeguards are needed, and what evidence should be reviewed before use expands.</a:t>
             </a:r>
             <a:endParaRPr lang="en-US" dirty="0"/>
           </a:p>
@@ -1609,7 +1619,8 @@
             <a:r>
               <a:rPr lang="en-US" dirty="0"/>
               <a:t>Expected Artifact or Evidence
-AI incident trigger and escalation plan</a:t>
+AI incident trigger and escalation plan
+Application guidance: Identify what could go wrong, who could be affected, what safeguards are needed, and what evidence should be reviewed before use expands.</a:t>
             </a:r>
             <a:endParaRPr lang="en-US" dirty="0"/>
           </a:p>
@@ -1701,7 +1712,8 @@
 Secure AI workflow checklist
 Vendor and implementation security questions
 Prompt injection risk notes
-AI incident trigger and escalation plan</a:t>
+AI incident trigger and escalation plan
+Application guidance: Use the assignment to test whether you can explain the concept, apply it to a realistic public health situation, and identify what would need review before the work moves forward.</a:t>
             </a:r>
             <a:endParaRPr lang="en-US" dirty="0"/>
           </a:p>
@@ -1794,7 +1806,8 @@
 2. What does least privilege mean?
 3. Why does agentic AI increase security risk?
 4. Which control helps investigate AI-related incidents?
-5. What is strong completion evidence for this module?</a:t>
+5. What is strong completion evidence for this module?
+Application guidance: Use the assignment to test whether you can explain the concept, apply it to a realistic public health situation, and identify what would need review before the work moves forward.</a:t>
             </a:r>
             <a:endParaRPr lang="en-US" dirty="0"/>
           </a:p>
@@ -1887,7 +1900,8 @@
 NIST Artificial Intelligence Risk Management Framework: https://www.nist.gov/itl/ai-risk-management-framework
 NIST AI RMF Generative AI Profile: https://www.nist.gov/publications/artificial-intelligence-risk-management-framework-generative-artificial-intelligence
 NIST Privacy Framework: https://www.nist.gov/privacy-framework
-Agency cybersecurity, identity/access management, privacy, procurement, and incident response policies</a:t>
+Agency cybersecurity, identity/access management, privacy, procurement, and incident response policies
+Application guidance: Identify what could go wrong, who could be affected, what safeguards are needed, and what evidence should be reviewed before use expands.</a:t>
             </a:r>
             <a:endParaRPr lang="en-US" dirty="0"/>
           </a:p>
@@ -2166,7 +2180,8 @@
 Identify prompt injection, data leakage, sensitive information disclosure, insecure output handling, excessive agency, and supply chain risks.
 Explain why RAG, plugins, APIs, and agentic workflows increase the need for security controls.
 Apply least privilege, approved-tool use, access controls, logging, testing, and incident response to AI workflows.
-Develop security questions for AI procurement, implementation, and monitoring.</a:t>
+Develop security questions for AI procurement, implementation, and monitoring.
+Application guidance: Use the assignment to test whether you can explain the concept, apply it to a realistic public health situation, and identify what would need review before the work moves forward.</a:t>
             </a:r>
             <a:endParaRPr lang="en-US" dirty="0"/>
           </a:p>
@@ -2255,7 +2270,8 @@
             <a:r>
               <a:rPr lang="en-US" dirty="0"/>
               <a:t>Learning Objectives
-Produce a secure AI workflow checklist.</a:t>
+Produce a secure AI workflow checklist.
+Application guidance: Use the assignment to test whether you can explain the concept, apply it to a realistic public health situation, and identify what would need review before the work moves forward.</a:t>
             </a:r>
             <a:endParaRPr lang="en-US" dirty="0"/>
           </a:p>
@@ -2346,7 +2362,8 @@
               <a:t>Module Overview
 AI security focuses on protecting AI systems, integrations, prompts, outputs, data, users, and connected tools from misuse, unauthorized access, manipulation, and exposure. Public health agencies handle sensitive health, demographic, legal, operational, and community information. AI security is therefore a core public health safeguard, not only an IT responsibility.
 This module introduces security risks that are especially relevant to generative AI, RAG systems, and agentic workflows. These risks include prompt injection, sensitive information disclosure, insecure output handling, excessive agency, insecure plugins, supply chain vulnerabilities, data poisoning, and credential exposure. Learners will connect these risks to practical public health workflows.
-By the end of the module, learners should be able to identify AI security risks, ask stronger vendor and implementation questions, and create a secure AI use checklist for a public health workflow.</a:t>
+By the end of the module, learners should be able to identify AI security risks, ask stronger vendor and implementation questions, and create a secure AI use checklist for a public health workflow.
+Application guidance: Identify what could go wrong, who could be affected, what safeguards are needed, and what evidence should be reviewed before use expands.</a:t>
             </a:r>
             <a:endParaRPr lang="en-US" dirty="0"/>
           </a:p>
@@ -2435,7 +2452,8 @@
             <a:r>
               <a:rPr lang="en-US" dirty="0"/>
               <a:t>Jurisdiction and Agency Policy Note
-This module provides national-level training guidance for public health agencies and partners. It is not legal advice and does not replace review by agency legal counsel, privacy officers, procurement officials, civil rights staff, records officers, or other authorized decision-makers. Requirements may vary by state, locality, territory, Tribe, agency, funding source, data-sharing agreement, emergency authority, and organizational policy. Learners should use this module to identify the issues that require review and should confirm applicable requirements before approving, procuring, deploying, or publicly communicating about AI-supported work.</a:t>
+This module provides national-level training guidance for public health agencies and partners. It is not legal advice and does not replace review by agency legal counsel, privacy officers, procurement officials, civil rights staff, records officers, or other authorized decision-makers. Requirements may vary by state, locality, territory, Tribe, agency, funding source, data-sharing agreement, emergency authority, and organizational policy. Learners should use this module to identify the issues that require review and should confirm applicable requirements before approving, procuring, deploying, or publicly communicating about AI-supported work.
+Application guidance: Translate this concept into clear decision rights, review steps, documentation expectations, and escalation paths before an AI-supported workflow is approved.</a:t>
             </a:r>
             <a:endParaRPr lang="en-US" dirty="0"/>
           </a:p>
@@ -2526,7 +2544,8 @@
               <a:t>Why This Topic Matters for Public Health AI
 AI security matters because public health AI tools may process sensitive records, internal protocols, draft communications, credentials, contracts, emergency plans, and partner information. The risks increase when AI tools are connected to email, calendars, case systems, data warehouses, document repositories, APIs, or messaging platforms. A security weakness can become a privacy breach, operational disruption, public trust problem, or legal issue.
 Prompt injection is particularly important for public health because staff may ask AI tools to process external documents, emails, web pages, public comments, complaints, or uploaded files. Those materials may contain instructions designed to manipulate the AI system. If the AI tool has access to sensitive data or actions, prompt injection can become a pathway to data exposure or unauthorized activity.
-Security controls should be built into governance and procurement. Agencies should require information about data handling, retention, encryption, access controls, audit logs, model training use, third-party services, incident notification, vulnerability management, and secure configuration. Security review should happen before deployment and continue after launch.</a:t>
+Security controls should be built into governance and procurement. Agencies should require information about data handling, retention, encryption, access controls, audit logs, model training use, third-party services, incident notification, vulnerability management, and secure configuration. Security review should happen before deployment and continue after launch.
+Application guidance: Identify what could go wrong, who could be affected, what safeguards are needed, and what evidence should be reviewed before use expands.</a:t>
             </a:r>
             <a:endParaRPr lang="en-US" dirty="0"/>
           </a:p>
@@ -3297,8 +3316,8 @@
         </p:nvSpPr>
         <p:spPr>
           <a:xfrm>
-            <a:off x="9966960" y="6537960"/>
-            <a:ext cx="1645920" cy="201168"/>
+            <a:off x="9646920" y="6537960"/>
+            <a:ext cx="1965960" cy="201168"/>
           </a:xfrm>
           <a:prstGeom prst="rect">
             <a:avLst/>
@@ -3322,7 +3341,7 @@
                 <a:ea typeface="Aptos" pitchFamily="34" charset="-122"/>
                 <a:cs typeface="Aptos" pitchFamily="34" charset="-120"/>
               </a:rPr>
-              <a:t>Â© Paula Soper</a:t>
+              <a:t>Copyright Paula Soper</a:t>
             </a:r>
             <a:endParaRPr lang="en-US" sz="800" dirty="0"/>
           </a:p>
@@ -3369,77 +3388,13 @@
       </p:sp>
       <p:sp>
         <p:nvSpPr>
-          <p:cNvPr id="8" name="Shape 6"/>
+          <p:cNvPr id="8" name="Text 6"/>
           <p:cNvSpPr/>
           <p:nvPr/>
         </p:nvSpPr>
         <p:spPr>
           <a:xfrm>
             <a:off x="640080" y="658368"/>
-            <a:ext cx="420624" cy="420624"/>
-          </a:xfrm>
-          <a:prstGeom prst="ellipse">
-            <a:avLst/>
-          </a:prstGeom>
-          <a:solidFill>
-            <a:srgbClr val="0068B7"/>
-          </a:solidFill>
-          <a:ln w="12700">
-            <a:solidFill>
-              <a:srgbClr val="0068B7"/>
-            </a:solidFill>
-            <a:prstDash val="solid"/>
-          </a:ln>
-        </p:spPr>
-      </p:sp>
-      <p:sp>
-        <p:nvSpPr>
-          <p:cNvPr id="9" name="Text 7"/>
-          <p:cNvSpPr/>
-          <p:nvPr/>
-        </p:nvSpPr>
-        <p:spPr>
-          <a:xfrm>
-            <a:off x="640080" y="731520"/>
-            <a:ext cx="420624" cy="164592"/>
-          </a:xfrm>
-          <a:prstGeom prst="rect">
-            <a:avLst/>
-          </a:prstGeom>
-          <a:noFill/>
-          <a:ln/>
-        </p:spPr>
-        <p:txBody>
-          <a:bodyPr wrap="square" lIns="0" tIns="0" rIns="0" bIns="0" rtlCol="0" anchor="ctr"/>
-          <a:lstStyle/>
-          <a:p>
-            <a:pPr algn="ctr" indent="0" marL="0">
-              <a:buNone/>
-            </a:pPr>
-            <a:r>
-              <a:rPr lang="en-US" sz="1100" b="1" dirty="0">
-                <a:solidFill>
-                  <a:srgbClr val="FFFFFF"/>
-                </a:solidFill>
-                <a:latin typeface="Aptos" pitchFamily="34" charset="0"/>
-                <a:ea typeface="Aptos" pitchFamily="34" charset="-122"/>
-                <a:cs typeface="Aptos" pitchFamily="34" charset="-120"/>
-              </a:rPr>
-              <a:t>5</a:t>
-            </a:r>
-            <a:endParaRPr lang="en-US" sz="1100" dirty="0"/>
-          </a:p>
-        </p:txBody>
-      </p:sp>
-      <p:sp>
-        <p:nvSpPr>
-          <p:cNvPr id="10" name="Text 8"/>
-          <p:cNvSpPr/>
-          <p:nvPr/>
-        </p:nvSpPr>
-        <p:spPr>
-          <a:xfrm>
-            <a:off x="640080" y="621792"/>
             <a:ext cx="10881360" cy="713232"/>
           </a:xfrm>
           <a:prstGeom prst="rect">
@@ -3474,14 +3429,14 @@
       </p:sp>
       <p:sp>
         <p:nvSpPr>
-          <p:cNvPr id="11" name="Text 9"/>
+          <p:cNvPr id="9" name="Text 7"/>
           <p:cNvSpPr/>
           <p:nvPr/>
         </p:nvSpPr>
         <p:spPr>
           <a:xfrm>
             <a:off x="868680" y="1508760"/>
-            <a:ext cx="6537960" cy="4160520"/>
+            <a:ext cx="6309360" cy="4160520"/>
           </a:xfrm>
           <a:prstGeom prst="rect">
             <a:avLst/>
@@ -3540,18 +3495,18 @@
       </p:sp>
       <p:sp>
         <p:nvSpPr>
-          <p:cNvPr id="12" name="Shape 10"/>
-          <p:cNvSpPr/>
-          <p:nvPr/>
-        </p:nvSpPr>
-        <p:spPr>
-          <a:xfrm>
-            <a:off x="7909560" y="1417320"/>
-            <a:ext cx="3154680" cy="1828800"/>
+          <p:cNvPr id="10" name="Shape 8"/>
+          <p:cNvSpPr/>
+          <p:nvPr/>
+        </p:nvSpPr>
+        <p:spPr>
+          <a:xfrm>
+            <a:off x="7635240" y="1325880"/>
+            <a:ext cx="3474720" cy="1325880"/>
           </a:xfrm>
           <a:prstGeom prst="roundRect">
             <a:avLst>
-              <a:gd name="adj" fmla="val 6000"/>
+              <a:gd name="adj" fmla="val 8276"/>
             </a:avLst>
           </a:prstGeom>
           <a:solidFill>
@@ -3567,14 +3522,14 @@
       </p:sp>
       <p:sp>
         <p:nvSpPr>
-          <p:cNvPr id="13" name="Text 11"/>
-          <p:cNvSpPr/>
-          <p:nvPr/>
-        </p:nvSpPr>
-        <p:spPr>
-          <a:xfrm>
-            <a:off x="8074152" y="1563624"/>
-            <a:ext cx="2825496" cy="256032"/>
+          <p:cNvPr id="11" name="Text 9"/>
+          <p:cNvSpPr/>
+          <p:nvPr/>
+        </p:nvSpPr>
+        <p:spPr>
+          <a:xfrm>
+            <a:off x="7799832" y="1472184"/>
+            <a:ext cx="3145536" cy="256032"/>
           </a:xfrm>
           <a:prstGeom prst="rect">
             <a:avLst/>
@@ -3598,7 +3553,7 @@
                 <a:ea typeface="Aptos" pitchFamily="34" charset="-122"/>
                 <a:cs typeface="Aptos" pitchFamily="34" charset="-120"/>
               </a:rPr>
-              <a:t>Key idea</a:t>
+              <a:t>Risk check</a:t>
             </a:r>
             <a:endParaRPr lang="en-US" sz="1300" dirty="0"/>
           </a:p>
@@ -3606,14 +3561,14 @@
       </p:sp>
       <p:sp>
         <p:nvSpPr>
-          <p:cNvPr id="14" name="Text 12"/>
-          <p:cNvSpPr/>
-          <p:nvPr/>
-        </p:nvSpPr>
-        <p:spPr>
-          <a:xfrm>
-            <a:off x="8074152" y="1920240"/>
-            <a:ext cx="2825496" cy="1188720"/>
+          <p:cNvPr id="12" name="Text 10"/>
+          <p:cNvSpPr/>
+          <p:nvPr/>
+        </p:nvSpPr>
+        <p:spPr>
+          <a:xfrm>
+            <a:off x="7799832" y="1828800"/>
+            <a:ext cx="3145536" cy="685800"/>
           </a:xfrm>
           <a:prstGeom prst="rect">
             <a:avLst/>
@@ -3647,18 +3602,171 @@
       </p:sp>
       <p:sp>
         <p:nvSpPr>
-          <p:cNvPr id="15" name="Shape 13"/>
-          <p:cNvSpPr/>
-          <p:nvPr/>
-        </p:nvSpPr>
-        <p:spPr>
-          <a:xfrm>
-            <a:off x="7909560" y="3520440"/>
-            <a:ext cx="3154680" cy="1737360"/>
+          <p:cNvPr id="13" name="Shape 11"/>
+          <p:cNvSpPr/>
+          <p:nvPr/>
+        </p:nvSpPr>
+        <p:spPr>
+          <a:xfrm>
+            <a:off x="7635240" y="2788920"/>
+            <a:ext cx="3474720" cy="1536192"/>
           </a:xfrm>
           <a:prstGeom prst="roundRect">
             <a:avLst>
-              <a:gd name="adj" fmla="val 6316"/>
+              <a:gd name="adj" fmla="val 7143"/>
+            </a:avLst>
+          </a:prstGeom>
+          <a:solidFill>
+            <a:srgbClr val="FFFFFF">
+              <a:alpha val="88000"/>
+            </a:srgbClr>
+          </a:solidFill>
+          <a:ln w="12700">
+            <a:solidFill>
+              <a:srgbClr val="D6E8F2"/>
+            </a:solidFill>
+            <a:prstDash val="solid"/>
+          </a:ln>
+        </p:spPr>
+      </p:sp>
+      <p:sp>
+        <p:nvSpPr>
+          <p:cNvPr id="14" name="Shape 12"/>
+          <p:cNvSpPr/>
+          <p:nvPr/>
+        </p:nvSpPr>
+        <p:spPr>
+          <a:xfrm>
+            <a:off x="8046720" y="3108960"/>
+            <a:ext cx="2651760" cy="896112"/>
+          </a:xfrm>
+          <a:prstGeom prst="arc">
+            <a:avLst/>
+          </a:prstGeom>
+          <a:noFill/>
+          <a:ln w="25400">
+            <a:solidFill>
+              <a:srgbClr val="0068B7"/>
+            </a:solidFill>
+            <a:prstDash val="solid"/>
+          </a:ln>
+        </p:spPr>
+      </p:sp>
+      <p:sp>
+        <p:nvSpPr>
+          <p:cNvPr id="15" name="Text 13"/>
+          <p:cNvSpPr/>
+          <p:nvPr/>
+        </p:nvSpPr>
+        <p:spPr>
+          <a:xfrm>
+            <a:off x="7909560" y="3099816"/>
+            <a:ext cx="2926080" cy="256032"/>
+          </a:xfrm>
+          <a:prstGeom prst="rect">
+            <a:avLst/>
+          </a:prstGeom>
+          <a:noFill/>
+          <a:ln/>
+        </p:spPr>
+        <p:txBody>
+          <a:bodyPr wrap="square" lIns="0" tIns="0" rIns="0" bIns="0" rtlCol="0" anchor="ctr"/>
+          <a:lstStyle/>
+          <a:p>
+            <a:pPr algn="ctr" indent="0" marL="0">
+              <a:buNone/>
+            </a:pPr>
+            <a:r>
+              <a:rPr lang="en-US" sz="1500" b="1" dirty="0">
+                <a:solidFill>
+                  <a:srgbClr val="003A63"/>
+                </a:solidFill>
+                <a:latin typeface="Aptos" pitchFamily="34" charset="0"/>
+                <a:ea typeface="Aptos" pitchFamily="34" charset="-122"/>
+                <a:cs typeface="Aptos" pitchFamily="34" charset="-120"/>
+              </a:rPr>
+              <a:t>Risk</a:t>
+            </a:r>
+            <a:endParaRPr lang="en-US" sz="1500" dirty="0"/>
+          </a:p>
+        </p:txBody>
+      </p:sp>
+      <p:sp>
+        <p:nvSpPr>
+          <p:cNvPr id="16" name="Shape 14"/>
+          <p:cNvSpPr/>
+          <p:nvPr/>
+        </p:nvSpPr>
+        <p:spPr>
+          <a:xfrm>
+            <a:off x="8366760" y="3639312"/>
+            <a:ext cx="2011680" cy="0"/>
+          </a:xfrm>
+          <a:prstGeom prst="line">
+            <a:avLst/>
+          </a:prstGeom>
+          <a:noFill/>
+          <a:ln w="63500">
+            <a:solidFill>
+              <a:srgbClr val="2F8A28"/>
+            </a:solidFill>
+            <a:prstDash val="solid"/>
+          </a:ln>
+        </p:spPr>
+      </p:sp>
+      <p:sp>
+        <p:nvSpPr>
+          <p:cNvPr id="17" name="Text 15"/>
+          <p:cNvSpPr/>
+          <p:nvPr/>
+        </p:nvSpPr>
+        <p:spPr>
+          <a:xfrm>
+            <a:off x="7909560" y="3849624"/>
+            <a:ext cx="2926080" cy="164592"/>
+          </a:xfrm>
+          <a:prstGeom prst="rect">
+            <a:avLst/>
+          </a:prstGeom>
+          <a:noFill/>
+          <a:ln/>
+        </p:spPr>
+        <p:txBody>
+          <a:bodyPr wrap="square" lIns="0" tIns="0" rIns="0" bIns="0" rtlCol="0" anchor="ctr"/>
+          <a:lstStyle/>
+          <a:p>
+            <a:pPr algn="ctr" indent="0" marL="0">
+              <a:buNone/>
+            </a:pPr>
+            <a:r>
+              <a:rPr lang="en-US" sz="900" dirty="0">
+                <a:solidFill>
+                  <a:srgbClr val="003A63"/>
+                </a:solidFill>
+                <a:latin typeface="Aptos" pitchFamily="34" charset="0"/>
+                <a:ea typeface="Aptos" pitchFamily="34" charset="-122"/>
+                <a:cs typeface="Aptos" pitchFamily="34" charset="-120"/>
+              </a:rPr>
+              <a:t>Human review</a:t>
+            </a:r>
+            <a:endParaRPr lang="en-US" sz="900" dirty="0"/>
+          </a:p>
+        </p:txBody>
+      </p:sp>
+      <p:sp>
+        <p:nvSpPr>
+          <p:cNvPr id="18" name="Shape 16"/>
+          <p:cNvSpPr/>
+          <p:nvPr/>
+        </p:nvSpPr>
+        <p:spPr>
+          <a:xfrm>
+            <a:off x="7635240" y="4498848"/>
+            <a:ext cx="3474720" cy="1143000"/>
+          </a:xfrm>
+          <a:prstGeom prst="roundRect">
+            <a:avLst>
+              <a:gd name="adj" fmla="val 9600"/>
             </a:avLst>
           </a:prstGeom>
           <a:solidFill>
@@ -3674,14 +3782,14 @@
       </p:sp>
       <p:sp>
         <p:nvSpPr>
-          <p:cNvPr id="16" name="Text 14"/>
-          <p:cNvSpPr/>
-          <p:nvPr/>
-        </p:nvSpPr>
-        <p:spPr>
-          <a:xfrm>
-            <a:off x="8074152" y="3666744"/>
-            <a:ext cx="2825496" cy="256032"/>
+          <p:cNvPr id="19" name="Text 17"/>
+          <p:cNvSpPr/>
+          <p:nvPr/>
+        </p:nvSpPr>
+        <p:spPr>
+          <a:xfrm>
+            <a:off x="7799832" y="4645152"/>
+            <a:ext cx="3145536" cy="256032"/>
           </a:xfrm>
           <a:prstGeom prst="rect">
             <a:avLst/>
@@ -3705,7 +3813,7 @@
                 <a:ea typeface="Aptos" pitchFamily="34" charset="-122"/>
                 <a:cs typeface="Aptos" pitchFamily="34" charset="-120"/>
               </a:rPr>
-              <a:t>Use this for</a:t>
+              <a:t>Safeguard to plan</a:t>
             </a:r>
             <a:endParaRPr lang="en-US" sz="1300" dirty="0"/>
           </a:p>
@@ -3713,14 +3821,14 @@
       </p:sp>
       <p:sp>
         <p:nvSpPr>
-          <p:cNvPr id="17" name="Text 15"/>
-          <p:cNvSpPr/>
-          <p:nvPr/>
-        </p:nvSpPr>
-        <p:spPr>
-          <a:xfrm>
-            <a:off x="8074152" y="4023360"/>
-            <a:ext cx="2825496" cy="1097280"/>
+          <p:cNvPr id="20" name="Text 18"/>
+          <p:cNvSpPr/>
+          <p:nvPr/>
+        </p:nvSpPr>
+        <p:spPr>
+          <a:xfrm>
+            <a:off x="7799832" y="5001768"/>
+            <a:ext cx="3145536" cy="502920"/>
           </a:xfrm>
           <a:prstGeom prst="rect">
             <a:avLst/>
@@ -3746,7 +3854,7 @@
                 <a:ea typeface="Aptos" pitchFamily="34" charset="-122"/>
                 <a:cs typeface="Aptos" pitchFamily="34" charset="-120"/>
               </a:rPr>
-              <a:t>Connect the concept to public health decisions, safeguards, documentation, or implementation work.</a:t>
+              <a:t>Identify what could go wrong, who could be affected, what safeguards are needed, and what evidence should be reviewed before use expands.</a:t>
             </a:r>
             <a:endParaRPr lang="en-US" sz="1550" dirty="0"/>
           </a:p>
@@ -3920,8 +4028,8 @@
         </p:nvSpPr>
         <p:spPr>
           <a:xfrm>
-            <a:off x="9966960" y="6537960"/>
-            <a:ext cx="1645920" cy="201168"/>
+            <a:off x="9646920" y="6537960"/>
+            <a:ext cx="1965960" cy="201168"/>
           </a:xfrm>
           <a:prstGeom prst="rect">
             <a:avLst/>
@@ -3945,7 +4053,7 @@
                 <a:ea typeface="Aptos" pitchFamily="34" charset="-122"/>
                 <a:cs typeface="Aptos" pitchFamily="34" charset="-120"/>
               </a:rPr>
-              <a:t>Â© Paula Soper</a:t>
+              <a:t>Copyright Paula Soper</a:t>
             </a:r>
             <a:endParaRPr lang="en-US" sz="800" dirty="0"/>
           </a:p>
@@ -3992,77 +4100,13 @@
       </p:sp>
       <p:sp>
         <p:nvSpPr>
-          <p:cNvPr id="8" name="Shape 6"/>
+          <p:cNvPr id="8" name="Text 6"/>
           <p:cNvSpPr/>
           <p:nvPr/>
         </p:nvSpPr>
         <p:spPr>
           <a:xfrm>
             <a:off x="640080" y="658368"/>
-            <a:ext cx="420624" cy="420624"/>
-          </a:xfrm>
-          <a:prstGeom prst="ellipse">
-            <a:avLst/>
-          </a:prstGeom>
-          <a:solidFill>
-            <a:srgbClr val="0068B7"/>
-          </a:solidFill>
-          <a:ln w="12700">
-            <a:solidFill>
-              <a:srgbClr val="0068B7"/>
-            </a:solidFill>
-            <a:prstDash val="solid"/>
-          </a:ln>
-        </p:spPr>
-      </p:sp>
-      <p:sp>
-        <p:nvSpPr>
-          <p:cNvPr id="9" name="Text 7"/>
-          <p:cNvSpPr/>
-          <p:nvPr/>
-        </p:nvSpPr>
-        <p:spPr>
-          <a:xfrm>
-            <a:off x="640080" y="731520"/>
-            <a:ext cx="420624" cy="164592"/>
-          </a:xfrm>
-          <a:prstGeom prst="rect">
-            <a:avLst/>
-          </a:prstGeom>
-          <a:noFill/>
-          <a:ln/>
-        </p:spPr>
-        <p:txBody>
-          <a:bodyPr wrap="square" lIns="0" tIns="0" rIns="0" bIns="0" rtlCol="0" anchor="ctr"/>
-          <a:lstStyle/>
-          <a:p>
-            <a:pPr algn="ctr" indent="0" marL="0">
-              <a:buNone/>
-            </a:pPr>
-            <a:r>
-              <a:rPr lang="en-US" sz="1100" b="1" dirty="0">
-                <a:solidFill>
-                  <a:srgbClr val="FFFFFF"/>
-                </a:solidFill>
-                <a:latin typeface="Aptos" pitchFamily="34" charset="0"/>
-                <a:ea typeface="Aptos" pitchFamily="34" charset="-122"/>
-                <a:cs typeface="Aptos" pitchFamily="34" charset="-120"/>
-              </a:rPr>
-              <a:t>6</a:t>
-            </a:r>
-            <a:endParaRPr lang="en-US" sz="1100" dirty="0"/>
-          </a:p>
-        </p:txBody>
-      </p:sp>
-      <p:sp>
-        <p:nvSpPr>
-          <p:cNvPr id="10" name="Text 8"/>
-          <p:cNvSpPr/>
-          <p:nvPr/>
-        </p:nvSpPr>
-        <p:spPr>
-          <a:xfrm>
-            <a:off x="640080" y="621792"/>
             <a:ext cx="10881360" cy="713232"/>
           </a:xfrm>
           <a:prstGeom prst="rect">
@@ -4097,14 +4141,14 @@
       </p:sp>
       <p:sp>
         <p:nvSpPr>
-          <p:cNvPr id="11" name="Text 9"/>
+          <p:cNvPr id="9" name="Text 7"/>
           <p:cNvSpPr/>
           <p:nvPr/>
         </p:nvSpPr>
         <p:spPr>
           <a:xfrm>
             <a:off x="868680" y="1508760"/>
-            <a:ext cx="6537960" cy="4160520"/>
+            <a:ext cx="6309360" cy="4160520"/>
           </a:xfrm>
           <a:prstGeom prst="rect">
             <a:avLst/>
@@ -4163,18 +4207,18 @@
       </p:sp>
       <p:sp>
         <p:nvSpPr>
-          <p:cNvPr id="12" name="Shape 10"/>
-          <p:cNvSpPr/>
-          <p:nvPr/>
-        </p:nvSpPr>
-        <p:spPr>
-          <a:xfrm>
-            <a:off x="7909560" y="1417320"/>
-            <a:ext cx="3154680" cy="1828800"/>
+          <p:cNvPr id="10" name="Shape 8"/>
+          <p:cNvSpPr/>
+          <p:nvPr/>
+        </p:nvSpPr>
+        <p:spPr>
+          <a:xfrm>
+            <a:off x="7635240" y="1325880"/>
+            <a:ext cx="3474720" cy="1325880"/>
           </a:xfrm>
           <a:prstGeom prst="roundRect">
             <a:avLst>
-              <a:gd name="adj" fmla="val 6000"/>
+              <a:gd name="adj" fmla="val 8276"/>
             </a:avLst>
           </a:prstGeom>
           <a:solidFill>
@@ -4190,14 +4234,14 @@
       </p:sp>
       <p:sp>
         <p:nvSpPr>
-          <p:cNvPr id="13" name="Text 11"/>
-          <p:cNvSpPr/>
-          <p:nvPr/>
-        </p:nvSpPr>
-        <p:spPr>
-          <a:xfrm>
-            <a:off x="8074152" y="1563624"/>
-            <a:ext cx="2825496" cy="256032"/>
+          <p:cNvPr id="11" name="Text 9"/>
+          <p:cNvSpPr/>
+          <p:nvPr/>
+        </p:nvSpPr>
+        <p:spPr>
+          <a:xfrm>
+            <a:off x="7799832" y="1472184"/>
+            <a:ext cx="3145536" cy="256032"/>
           </a:xfrm>
           <a:prstGeom prst="rect">
             <a:avLst/>
@@ -4221,7 +4265,7 @@
                 <a:ea typeface="Aptos" pitchFamily="34" charset="-122"/>
                 <a:cs typeface="Aptos" pitchFamily="34" charset="-120"/>
               </a:rPr>
-              <a:t>Key idea</a:t>
+              <a:t>Risk check</a:t>
             </a:r>
             <a:endParaRPr lang="en-US" sz="1300" dirty="0"/>
           </a:p>
@@ -4229,14 +4273,14 @@
       </p:sp>
       <p:sp>
         <p:nvSpPr>
-          <p:cNvPr id="14" name="Text 12"/>
-          <p:cNvSpPr/>
-          <p:nvPr/>
-        </p:nvSpPr>
-        <p:spPr>
-          <a:xfrm>
-            <a:off x="8074152" y="1920240"/>
-            <a:ext cx="2825496" cy="1188720"/>
+          <p:cNvPr id="12" name="Text 10"/>
+          <p:cNvSpPr/>
+          <p:nvPr/>
+        </p:nvSpPr>
+        <p:spPr>
+          <a:xfrm>
+            <a:off x="7799832" y="1828800"/>
+            <a:ext cx="3145536" cy="685800"/>
           </a:xfrm>
           <a:prstGeom prst="rect">
             <a:avLst/>
@@ -4270,18 +4314,171 @@
       </p:sp>
       <p:sp>
         <p:nvSpPr>
-          <p:cNvPr id="15" name="Shape 13"/>
-          <p:cNvSpPr/>
-          <p:nvPr/>
-        </p:nvSpPr>
-        <p:spPr>
-          <a:xfrm>
-            <a:off x="7909560" y="3520440"/>
-            <a:ext cx="3154680" cy="1737360"/>
+          <p:cNvPr id="13" name="Shape 11"/>
+          <p:cNvSpPr/>
+          <p:nvPr/>
+        </p:nvSpPr>
+        <p:spPr>
+          <a:xfrm>
+            <a:off x="7635240" y="2788920"/>
+            <a:ext cx="3474720" cy="1536192"/>
           </a:xfrm>
           <a:prstGeom prst="roundRect">
             <a:avLst>
-              <a:gd name="adj" fmla="val 6316"/>
+              <a:gd name="adj" fmla="val 7143"/>
+            </a:avLst>
+          </a:prstGeom>
+          <a:solidFill>
+            <a:srgbClr val="FFFFFF">
+              <a:alpha val="88000"/>
+            </a:srgbClr>
+          </a:solidFill>
+          <a:ln w="12700">
+            <a:solidFill>
+              <a:srgbClr val="D6E8F2"/>
+            </a:solidFill>
+            <a:prstDash val="solid"/>
+          </a:ln>
+        </p:spPr>
+      </p:sp>
+      <p:sp>
+        <p:nvSpPr>
+          <p:cNvPr id="14" name="Shape 12"/>
+          <p:cNvSpPr/>
+          <p:nvPr/>
+        </p:nvSpPr>
+        <p:spPr>
+          <a:xfrm>
+            <a:off x="8046720" y="3108960"/>
+            <a:ext cx="2651760" cy="896112"/>
+          </a:xfrm>
+          <a:prstGeom prst="arc">
+            <a:avLst/>
+          </a:prstGeom>
+          <a:noFill/>
+          <a:ln w="25400">
+            <a:solidFill>
+              <a:srgbClr val="0068B7"/>
+            </a:solidFill>
+            <a:prstDash val="solid"/>
+          </a:ln>
+        </p:spPr>
+      </p:sp>
+      <p:sp>
+        <p:nvSpPr>
+          <p:cNvPr id="15" name="Text 13"/>
+          <p:cNvSpPr/>
+          <p:nvPr/>
+        </p:nvSpPr>
+        <p:spPr>
+          <a:xfrm>
+            <a:off x="7909560" y="3099816"/>
+            <a:ext cx="2926080" cy="256032"/>
+          </a:xfrm>
+          <a:prstGeom prst="rect">
+            <a:avLst/>
+          </a:prstGeom>
+          <a:noFill/>
+          <a:ln/>
+        </p:spPr>
+        <p:txBody>
+          <a:bodyPr wrap="square" lIns="0" tIns="0" rIns="0" bIns="0" rtlCol="0" anchor="ctr"/>
+          <a:lstStyle/>
+          <a:p>
+            <a:pPr algn="ctr" indent="0" marL="0">
+              <a:buNone/>
+            </a:pPr>
+            <a:r>
+              <a:rPr lang="en-US" sz="1500" b="1" dirty="0">
+                <a:solidFill>
+                  <a:srgbClr val="003A63"/>
+                </a:solidFill>
+                <a:latin typeface="Aptos" pitchFamily="34" charset="0"/>
+                <a:ea typeface="Aptos" pitchFamily="34" charset="-122"/>
+                <a:cs typeface="Aptos" pitchFamily="34" charset="-120"/>
+              </a:rPr>
+              <a:t>Risk</a:t>
+            </a:r>
+            <a:endParaRPr lang="en-US" sz="1500" dirty="0"/>
+          </a:p>
+        </p:txBody>
+      </p:sp>
+      <p:sp>
+        <p:nvSpPr>
+          <p:cNvPr id="16" name="Shape 14"/>
+          <p:cNvSpPr/>
+          <p:nvPr/>
+        </p:nvSpPr>
+        <p:spPr>
+          <a:xfrm>
+            <a:off x="8366760" y="3639312"/>
+            <a:ext cx="2011680" cy="0"/>
+          </a:xfrm>
+          <a:prstGeom prst="line">
+            <a:avLst/>
+          </a:prstGeom>
+          <a:noFill/>
+          <a:ln w="63500">
+            <a:solidFill>
+              <a:srgbClr val="2F8A28"/>
+            </a:solidFill>
+            <a:prstDash val="solid"/>
+          </a:ln>
+        </p:spPr>
+      </p:sp>
+      <p:sp>
+        <p:nvSpPr>
+          <p:cNvPr id="17" name="Text 15"/>
+          <p:cNvSpPr/>
+          <p:nvPr/>
+        </p:nvSpPr>
+        <p:spPr>
+          <a:xfrm>
+            <a:off x="7909560" y="3849624"/>
+            <a:ext cx="2926080" cy="164592"/>
+          </a:xfrm>
+          <a:prstGeom prst="rect">
+            <a:avLst/>
+          </a:prstGeom>
+          <a:noFill/>
+          <a:ln/>
+        </p:spPr>
+        <p:txBody>
+          <a:bodyPr wrap="square" lIns="0" tIns="0" rIns="0" bIns="0" rtlCol="0" anchor="ctr"/>
+          <a:lstStyle/>
+          <a:p>
+            <a:pPr algn="ctr" indent="0" marL="0">
+              <a:buNone/>
+            </a:pPr>
+            <a:r>
+              <a:rPr lang="en-US" sz="900" dirty="0">
+                <a:solidFill>
+                  <a:srgbClr val="003A63"/>
+                </a:solidFill>
+                <a:latin typeface="Aptos" pitchFamily="34" charset="0"/>
+                <a:ea typeface="Aptos" pitchFamily="34" charset="-122"/>
+                <a:cs typeface="Aptos" pitchFamily="34" charset="-120"/>
+              </a:rPr>
+              <a:t>Human review</a:t>
+            </a:r>
+            <a:endParaRPr lang="en-US" sz="900" dirty="0"/>
+          </a:p>
+        </p:txBody>
+      </p:sp>
+      <p:sp>
+        <p:nvSpPr>
+          <p:cNvPr id="18" name="Shape 16"/>
+          <p:cNvSpPr/>
+          <p:nvPr/>
+        </p:nvSpPr>
+        <p:spPr>
+          <a:xfrm>
+            <a:off x="7635240" y="4498848"/>
+            <a:ext cx="3474720" cy="1143000"/>
+          </a:xfrm>
+          <a:prstGeom prst="roundRect">
+            <a:avLst>
+              <a:gd name="adj" fmla="val 9600"/>
             </a:avLst>
           </a:prstGeom>
           <a:solidFill>
@@ -4297,14 +4494,14 @@
       </p:sp>
       <p:sp>
         <p:nvSpPr>
-          <p:cNvPr id="16" name="Text 14"/>
-          <p:cNvSpPr/>
-          <p:nvPr/>
-        </p:nvSpPr>
-        <p:spPr>
-          <a:xfrm>
-            <a:off x="8074152" y="3666744"/>
-            <a:ext cx="2825496" cy="256032"/>
+          <p:cNvPr id="19" name="Text 17"/>
+          <p:cNvSpPr/>
+          <p:nvPr/>
+        </p:nvSpPr>
+        <p:spPr>
+          <a:xfrm>
+            <a:off x="7799832" y="4645152"/>
+            <a:ext cx="3145536" cy="256032"/>
           </a:xfrm>
           <a:prstGeom prst="rect">
             <a:avLst/>
@@ -4328,7 +4525,7 @@
                 <a:ea typeface="Aptos" pitchFamily="34" charset="-122"/>
                 <a:cs typeface="Aptos" pitchFamily="34" charset="-120"/>
               </a:rPr>
-              <a:t>Use this for</a:t>
+              <a:t>Safeguard to plan</a:t>
             </a:r>
             <a:endParaRPr lang="en-US" sz="1300" dirty="0"/>
           </a:p>
@@ -4336,14 +4533,14 @@
       </p:sp>
       <p:sp>
         <p:nvSpPr>
-          <p:cNvPr id="17" name="Text 15"/>
-          <p:cNvSpPr/>
-          <p:nvPr/>
-        </p:nvSpPr>
-        <p:spPr>
-          <a:xfrm>
-            <a:off x="8074152" y="4023360"/>
-            <a:ext cx="2825496" cy="1097280"/>
+          <p:cNvPr id="20" name="Text 18"/>
+          <p:cNvSpPr/>
+          <p:nvPr/>
+        </p:nvSpPr>
+        <p:spPr>
+          <a:xfrm>
+            <a:off x="7799832" y="5001768"/>
+            <a:ext cx="3145536" cy="502920"/>
           </a:xfrm>
           <a:prstGeom prst="rect">
             <a:avLst/>
@@ -4369,7 +4566,7 @@
                 <a:ea typeface="Aptos" pitchFamily="34" charset="-122"/>
                 <a:cs typeface="Aptos" pitchFamily="34" charset="-120"/>
               </a:rPr>
-              <a:t>Connect the concept to public health decisions, safeguards, documentation, or implementation work.</a:t>
+              <a:t>Identify what could go wrong, who could be affected, what safeguards are needed, and what evidence should be reviewed before use expands.</a:t>
             </a:r>
             <a:endParaRPr lang="en-US" sz="1550" dirty="0"/>
           </a:p>
@@ -4543,8 +4740,8 @@
         </p:nvSpPr>
         <p:spPr>
           <a:xfrm>
-            <a:off x="9966960" y="6537960"/>
-            <a:ext cx="1645920" cy="201168"/>
+            <a:off x="9646920" y="6537960"/>
+            <a:ext cx="1965960" cy="201168"/>
           </a:xfrm>
           <a:prstGeom prst="rect">
             <a:avLst/>
@@ -4568,7 +4765,7 @@
                 <a:ea typeface="Aptos" pitchFamily="34" charset="-122"/>
                 <a:cs typeface="Aptos" pitchFamily="34" charset="-120"/>
               </a:rPr>
-              <a:t>Â© Paula Soper</a:t>
+              <a:t>Copyright Paula Soper</a:t>
             </a:r>
             <a:endParaRPr lang="en-US" sz="800" dirty="0"/>
           </a:p>
@@ -4663,7 +4860,7 @@
         <p:spPr>
           <a:xfrm>
             <a:off x="868680" y="1508760"/>
-            <a:ext cx="6537960" cy="4160520"/>
+            <a:ext cx="6309360" cy="4160520"/>
           </a:xfrm>
           <a:prstGeom prst="rect">
             <a:avLst/>
@@ -4728,12 +4925,12 @@
         </p:nvSpPr>
         <p:spPr>
           <a:xfrm>
-            <a:off x="7909560" y="1417320"/>
-            <a:ext cx="3154680" cy="1828800"/>
+            <a:off x="7635240" y="1325880"/>
+            <a:ext cx="3474720" cy="1325880"/>
           </a:xfrm>
           <a:prstGeom prst="roundRect">
             <a:avLst>
-              <a:gd name="adj" fmla="val 6000"/>
+              <a:gd name="adj" fmla="val 8276"/>
             </a:avLst>
           </a:prstGeom>
           <a:solidFill>
@@ -4755,8 +4952,8 @@
         </p:nvSpPr>
         <p:spPr>
           <a:xfrm>
-            <a:off x="8074152" y="1563624"/>
-            <a:ext cx="2825496" cy="256032"/>
+            <a:off x="7799832" y="1472184"/>
+            <a:ext cx="3145536" cy="256032"/>
           </a:xfrm>
           <a:prstGeom prst="rect">
             <a:avLst/>
@@ -4780,7 +4977,7 @@
                 <a:ea typeface="Aptos" pitchFamily="34" charset="-122"/>
                 <a:cs typeface="Aptos" pitchFamily="34" charset="-120"/>
               </a:rPr>
-              <a:t>Key idea</a:t>
+              <a:t>Risk check</a:t>
             </a:r>
             <a:endParaRPr lang="en-US" sz="1300" dirty="0"/>
           </a:p>
@@ -4794,8 +4991,8 @@
         </p:nvSpPr>
         <p:spPr>
           <a:xfrm>
-            <a:off x="8074152" y="1920240"/>
-            <a:ext cx="2825496" cy="1188720"/>
+            <a:off x="7799832" y="1828800"/>
+            <a:ext cx="3145536" cy="685800"/>
           </a:xfrm>
           <a:prstGeom prst="rect">
             <a:avLst/>
@@ -4835,12 +5032,165 @@
         </p:nvSpPr>
         <p:spPr>
           <a:xfrm>
-            <a:off x="7909560" y="3520440"/>
-            <a:ext cx="3154680" cy="1737360"/>
+            <a:off x="7635240" y="2788920"/>
+            <a:ext cx="3474720" cy="1536192"/>
           </a:xfrm>
           <a:prstGeom prst="roundRect">
             <a:avLst>
-              <a:gd name="adj" fmla="val 6316"/>
+              <a:gd name="adj" fmla="val 7143"/>
+            </a:avLst>
+          </a:prstGeom>
+          <a:solidFill>
+            <a:srgbClr val="FFFFFF">
+              <a:alpha val="88000"/>
+            </a:srgbClr>
+          </a:solidFill>
+          <a:ln w="12700">
+            <a:solidFill>
+              <a:srgbClr val="D6E8F2"/>
+            </a:solidFill>
+            <a:prstDash val="solid"/>
+          </a:ln>
+        </p:spPr>
+      </p:sp>
+      <p:sp>
+        <p:nvSpPr>
+          <p:cNvPr id="14" name="Shape 12"/>
+          <p:cNvSpPr/>
+          <p:nvPr/>
+        </p:nvSpPr>
+        <p:spPr>
+          <a:xfrm>
+            <a:off x="8046720" y="3108960"/>
+            <a:ext cx="2651760" cy="896112"/>
+          </a:xfrm>
+          <a:prstGeom prst="arc">
+            <a:avLst/>
+          </a:prstGeom>
+          <a:noFill/>
+          <a:ln w="25400">
+            <a:solidFill>
+              <a:srgbClr val="0068B7"/>
+            </a:solidFill>
+            <a:prstDash val="solid"/>
+          </a:ln>
+        </p:spPr>
+      </p:sp>
+      <p:sp>
+        <p:nvSpPr>
+          <p:cNvPr id="15" name="Text 13"/>
+          <p:cNvSpPr/>
+          <p:nvPr/>
+        </p:nvSpPr>
+        <p:spPr>
+          <a:xfrm>
+            <a:off x="7909560" y="3099816"/>
+            <a:ext cx="2926080" cy="256032"/>
+          </a:xfrm>
+          <a:prstGeom prst="rect">
+            <a:avLst/>
+          </a:prstGeom>
+          <a:noFill/>
+          <a:ln/>
+        </p:spPr>
+        <p:txBody>
+          <a:bodyPr wrap="square" lIns="0" tIns="0" rIns="0" bIns="0" rtlCol="0" anchor="ctr"/>
+          <a:lstStyle/>
+          <a:p>
+            <a:pPr algn="ctr" indent="0" marL="0">
+              <a:buNone/>
+            </a:pPr>
+            <a:r>
+              <a:rPr lang="en-US" sz="1500" b="1" dirty="0">
+                <a:solidFill>
+                  <a:srgbClr val="003A63"/>
+                </a:solidFill>
+                <a:latin typeface="Aptos" pitchFamily="34" charset="0"/>
+                <a:ea typeface="Aptos" pitchFamily="34" charset="-122"/>
+                <a:cs typeface="Aptos" pitchFamily="34" charset="-120"/>
+              </a:rPr>
+              <a:t>Risk</a:t>
+            </a:r>
+            <a:endParaRPr lang="en-US" sz="1500" dirty="0"/>
+          </a:p>
+        </p:txBody>
+      </p:sp>
+      <p:sp>
+        <p:nvSpPr>
+          <p:cNvPr id="16" name="Shape 14"/>
+          <p:cNvSpPr/>
+          <p:nvPr/>
+        </p:nvSpPr>
+        <p:spPr>
+          <a:xfrm>
+            <a:off x="8366760" y="3639312"/>
+            <a:ext cx="2011680" cy="0"/>
+          </a:xfrm>
+          <a:prstGeom prst="line">
+            <a:avLst/>
+          </a:prstGeom>
+          <a:noFill/>
+          <a:ln w="63500">
+            <a:solidFill>
+              <a:srgbClr val="2F8A28"/>
+            </a:solidFill>
+            <a:prstDash val="solid"/>
+          </a:ln>
+        </p:spPr>
+      </p:sp>
+      <p:sp>
+        <p:nvSpPr>
+          <p:cNvPr id="17" name="Text 15"/>
+          <p:cNvSpPr/>
+          <p:nvPr/>
+        </p:nvSpPr>
+        <p:spPr>
+          <a:xfrm>
+            <a:off x="7909560" y="3849624"/>
+            <a:ext cx="2926080" cy="164592"/>
+          </a:xfrm>
+          <a:prstGeom prst="rect">
+            <a:avLst/>
+          </a:prstGeom>
+          <a:noFill/>
+          <a:ln/>
+        </p:spPr>
+        <p:txBody>
+          <a:bodyPr wrap="square" lIns="0" tIns="0" rIns="0" bIns="0" rtlCol="0" anchor="ctr"/>
+          <a:lstStyle/>
+          <a:p>
+            <a:pPr algn="ctr" indent="0" marL="0">
+              <a:buNone/>
+            </a:pPr>
+            <a:r>
+              <a:rPr lang="en-US" sz="900" dirty="0">
+                <a:solidFill>
+                  <a:srgbClr val="003A63"/>
+                </a:solidFill>
+                <a:latin typeface="Aptos" pitchFamily="34" charset="0"/>
+                <a:ea typeface="Aptos" pitchFamily="34" charset="-122"/>
+                <a:cs typeface="Aptos" pitchFamily="34" charset="-120"/>
+              </a:rPr>
+              <a:t>Human review</a:t>
+            </a:r>
+            <a:endParaRPr lang="en-US" sz="900" dirty="0"/>
+          </a:p>
+        </p:txBody>
+      </p:sp>
+      <p:sp>
+        <p:nvSpPr>
+          <p:cNvPr id="18" name="Shape 16"/>
+          <p:cNvSpPr/>
+          <p:nvPr/>
+        </p:nvSpPr>
+        <p:spPr>
+          <a:xfrm>
+            <a:off x="7635240" y="4498848"/>
+            <a:ext cx="3474720" cy="1143000"/>
+          </a:xfrm>
+          <a:prstGeom prst="roundRect">
+            <a:avLst>
+              <a:gd name="adj" fmla="val 9600"/>
             </a:avLst>
           </a:prstGeom>
           <a:solidFill>
@@ -4856,14 +5206,14 @@
       </p:sp>
       <p:sp>
         <p:nvSpPr>
-          <p:cNvPr id="14" name="Text 12"/>
-          <p:cNvSpPr/>
-          <p:nvPr/>
-        </p:nvSpPr>
-        <p:spPr>
-          <a:xfrm>
-            <a:off x="8074152" y="3666744"/>
-            <a:ext cx="2825496" cy="256032"/>
+          <p:cNvPr id="19" name="Text 17"/>
+          <p:cNvSpPr/>
+          <p:nvPr/>
+        </p:nvSpPr>
+        <p:spPr>
+          <a:xfrm>
+            <a:off x="7799832" y="4645152"/>
+            <a:ext cx="3145536" cy="256032"/>
           </a:xfrm>
           <a:prstGeom prst="rect">
             <a:avLst/>
@@ -4887,7 +5237,7 @@
                 <a:ea typeface="Aptos" pitchFamily="34" charset="-122"/>
                 <a:cs typeface="Aptos" pitchFamily="34" charset="-120"/>
               </a:rPr>
-              <a:t>Use this for</a:t>
+              <a:t>Safeguard to plan</a:t>
             </a:r>
             <a:endParaRPr lang="en-US" sz="1300" dirty="0"/>
           </a:p>
@@ -4895,14 +5245,14 @@
       </p:sp>
       <p:sp>
         <p:nvSpPr>
-          <p:cNvPr id="15" name="Text 13"/>
-          <p:cNvSpPr/>
-          <p:nvPr/>
-        </p:nvSpPr>
-        <p:spPr>
-          <a:xfrm>
-            <a:off x="8074152" y="4023360"/>
-            <a:ext cx="2825496" cy="1097280"/>
+          <p:cNvPr id="20" name="Text 18"/>
+          <p:cNvSpPr/>
+          <p:nvPr/>
+        </p:nvSpPr>
+        <p:spPr>
+          <a:xfrm>
+            <a:off x="7799832" y="5001768"/>
+            <a:ext cx="3145536" cy="502920"/>
           </a:xfrm>
           <a:prstGeom prst="rect">
             <a:avLst/>
@@ -4928,7 +5278,7 @@
                 <a:ea typeface="Aptos" pitchFamily="34" charset="-122"/>
                 <a:cs typeface="Aptos" pitchFamily="34" charset="-120"/>
               </a:rPr>
-              <a:t>Connect the concept to public health decisions, safeguards, documentation, or implementation work.</a:t>
+              <a:t>Identify what could go wrong, who could be affected, what safeguards are needed, and what evidence should be reviewed before use expands.</a:t>
             </a:r>
             <a:endParaRPr lang="en-US" sz="1550" dirty="0"/>
           </a:p>
@@ -5102,8 +5452,8 @@
         </p:nvSpPr>
         <p:spPr>
           <a:xfrm>
-            <a:off x="9966960" y="6537960"/>
-            <a:ext cx="1645920" cy="201168"/>
+            <a:off x="9646920" y="6537960"/>
+            <a:ext cx="1965960" cy="201168"/>
           </a:xfrm>
           <a:prstGeom prst="rect">
             <a:avLst/>
@@ -5127,7 +5477,7 @@
                 <a:ea typeface="Aptos" pitchFamily="34" charset="-122"/>
                 <a:cs typeface="Aptos" pitchFamily="34" charset="-120"/>
               </a:rPr>
-              <a:t>Â© Paula Soper</a:t>
+              <a:t>Copyright Paula Soper</a:t>
             </a:r>
             <a:endParaRPr lang="en-US" sz="800" dirty="0"/>
           </a:p>
@@ -5174,77 +5524,13 @@
       </p:sp>
       <p:sp>
         <p:nvSpPr>
-          <p:cNvPr id="8" name="Shape 6"/>
+          <p:cNvPr id="8" name="Text 6"/>
           <p:cNvSpPr/>
           <p:nvPr/>
         </p:nvSpPr>
         <p:spPr>
           <a:xfrm>
             <a:off x="640080" y="658368"/>
-            <a:ext cx="420624" cy="420624"/>
-          </a:xfrm>
-          <a:prstGeom prst="ellipse">
-            <a:avLst/>
-          </a:prstGeom>
-          <a:solidFill>
-            <a:srgbClr val="0068B7"/>
-          </a:solidFill>
-          <a:ln w="12700">
-            <a:solidFill>
-              <a:srgbClr val="0068B7"/>
-            </a:solidFill>
-            <a:prstDash val="solid"/>
-          </a:ln>
-        </p:spPr>
-      </p:sp>
-      <p:sp>
-        <p:nvSpPr>
-          <p:cNvPr id="9" name="Text 7"/>
-          <p:cNvSpPr/>
-          <p:nvPr/>
-        </p:nvSpPr>
-        <p:spPr>
-          <a:xfrm>
-            <a:off x="640080" y="731520"/>
-            <a:ext cx="420624" cy="164592"/>
-          </a:xfrm>
-          <a:prstGeom prst="rect">
-            <a:avLst/>
-          </a:prstGeom>
-          <a:noFill/>
-          <a:ln/>
-        </p:spPr>
-        <p:txBody>
-          <a:bodyPr wrap="square" lIns="0" tIns="0" rIns="0" bIns="0" rtlCol="0" anchor="ctr"/>
-          <a:lstStyle/>
-          <a:p>
-            <a:pPr algn="ctr" indent="0" marL="0">
-              <a:buNone/>
-            </a:pPr>
-            <a:r>
-              <a:rPr lang="en-US" sz="1100" b="1" dirty="0">
-                <a:solidFill>
-                  <a:srgbClr val="FFFFFF"/>
-                </a:solidFill>
-                <a:latin typeface="Aptos" pitchFamily="34" charset="0"/>
-                <a:ea typeface="Aptos" pitchFamily="34" charset="-122"/>
-                <a:cs typeface="Aptos" pitchFamily="34" charset="-120"/>
-              </a:rPr>
-              <a:t>7</a:t>
-            </a:r>
-            <a:endParaRPr lang="en-US" sz="1100" dirty="0"/>
-          </a:p>
-        </p:txBody>
-      </p:sp>
-      <p:sp>
-        <p:nvSpPr>
-          <p:cNvPr id="10" name="Text 8"/>
-          <p:cNvSpPr/>
-          <p:nvPr/>
-        </p:nvSpPr>
-        <p:spPr>
-          <a:xfrm>
-            <a:off x="640080" y="621792"/>
             <a:ext cx="10881360" cy="713232"/>
           </a:xfrm>
           <a:prstGeom prst="rect">
@@ -5279,14 +5565,14 @@
       </p:sp>
       <p:sp>
         <p:nvSpPr>
-          <p:cNvPr id="11" name="Text 9"/>
+          <p:cNvPr id="9" name="Text 7"/>
           <p:cNvSpPr/>
           <p:nvPr/>
         </p:nvSpPr>
         <p:spPr>
           <a:xfrm>
             <a:off x="868680" y="1508760"/>
-            <a:ext cx="6537960" cy="4160520"/>
+            <a:ext cx="6309360" cy="4160520"/>
           </a:xfrm>
           <a:prstGeom prst="rect">
             <a:avLst/>
@@ -5345,18 +5631,18 @@
       </p:sp>
       <p:sp>
         <p:nvSpPr>
-          <p:cNvPr id="12" name="Shape 10"/>
-          <p:cNvSpPr/>
-          <p:nvPr/>
-        </p:nvSpPr>
-        <p:spPr>
-          <a:xfrm>
-            <a:off x="7909560" y="1417320"/>
-            <a:ext cx="3154680" cy="1828800"/>
+          <p:cNvPr id="10" name="Shape 8"/>
+          <p:cNvSpPr/>
+          <p:nvPr/>
+        </p:nvSpPr>
+        <p:spPr>
+          <a:xfrm>
+            <a:off x="7635240" y="1325880"/>
+            <a:ext cx="3474720" cy="1325880"/>
           </a:xfrm>
           <a:prstGeom prst="roundRect">
             <a:avLst>
-              <a:gd name="adj" fmla="val 6000"/>
+              <a:gd name="adj" fmla="val 8276"/>
             </a:avLst>
           </a:prstGeom>
           <a:solidFill>
@@ -5372,14 +5658,14 @@
       </p:sp>
       <p:sp>
         <p:nvSpPr>
-          <p:cNvPr id="13" name="Text 11"/>
-          <p:cNvSpPr/>
-          <p:nvPr/>
-        </p:nvSpPr>
-        <p:spPr>
-          <a:xfrm>
-            <a:off x="8074152" y="1563624"/>
-            <a:ext cx="2825496" cy="256032"/>
+          <p:cNvPr id="11" name="Text 9"/>
+          <p:cNvSpPr/>
+          <p:nvPr/>
+        </p:nvSpPr>
+        <p:spPr>
+          <a:xfrm>
+            <a:off x="7799832" y="1472184"/>
+            <a:ext cx="3145536" cy="256032"/>
           </a:xfrm>
           <a:prstGeom prst="rect">
             <a:avLst/>
@@ -5403,7 +5689,7 @@
                 <a:ea typeface="Aptos" pitchFamily="34" charset="-122"/>
                 <a:cs typeface="Aptos" pitchFamily="34" charset="-120"/>
               </a:rPr>
-              <a:t>Key idea</a:t>
+              <a:t>Risk check</a:t>
             </a:r>
             <a:endParaRPr lang="en-US" sz="1300" dirty="0"/>
           </a:p>
@@ -5411,14 +5697,14 @@
       </p:sp>
       <p:sp>
         <p:nvSpPr>
-          <p:cNvPr id="14" name="Text 12"/>
-          <p:cNvSpPr/>
-          <p:nvPr/>
-        </p:nvSpPr>
-        <p:spPr>
-          <a:xfrm>
-            <a:off x="8074152" y="1920240"/>
-            <a:ext cx="2825496" cy="1188720"/>
+          <p:cNvPr id="12" name="Text 10"/>
+          <p:cNvSpPr/>
+          <p:nvPr/>
+        </p:nvSpPr>
+        <p:spPr>
+          <a:xfrm>
+            <a:off x="7799832" y="1828800"/>
+            <a:ext cx="3145536" cy="685800"/>
           </a:xfrm>
           <a:prstGeom prst="rect">
             <a:avLst/>
@@ -5452,18 +5738,171 @@
       </p:sp>
       <p:sp>
         <p:nvSpPr>
-          <p:cNvPr id="15" name="Shape 13"/>
-          <p:cNvSpPr/>
-          <p:nvPr/>
-        </p:nvSpPr>
-        <p:spPr>
-          <a:xfrm>
-            <a:off x="7909560" y="3520440"/>
-            <a:ext cx="3154680" cy="1737360"/>
+          <p:cNvPr id="13" name="Shape 11"/>
+          <p:cNvSpPr/>
+          <p:nvPr/>
+        </p:nvSpPr>
+        <p:spPr>
+          <a:xfrm>
+            <a:off x="7635240" y="2788920"/>
+            <a:ext cx="3474720" cy="1536192"/>
           </a:xfrm>
           <a:prstGeom prst="roundRect">
             <a:avLst>
-              <a:gd name="adj" fmla="val 6316"/>
+              <a:gd name="adj" fmla="val 7143"/>
+            </a:avLst>
+          </a:prstGeom>
+          <a:solidFill>
+            <a:srgbClr val="FFFFFF">
+              <a:alpha val="88000"/>
+            </a:srgbClr>
+          </a:solidFill>
+          <a:ln w="12700">
+            <a:solidFill>
+              <a:srgbClr val="D6E8F2"/>
+            </a:solidFill>
+            <a:prstDash val="solid"/>
+          </a:ln>
+        </p:spPr>
+      </p:sp>
+      <p:sp>
+        <p:nvSpPr>
+          <p:cNvPr id="14" name="Shape 12"/>
+          <p:cNvSpPr/>
+          <p:nvPr/>
+        </p:nvSpPr>
+        <p:spPr>
+          <a:xfrm>
+            <a:off x="8046720" y="3108960"/>
+            <a:ext cx="2651760" cy="896112"/>
+          </a:xfrm>
+          <a:prstGeom prst="arc">
+            <a:avLst/>
+          </a:prstGeom>
+          <a:noFill/>
+          <a:ln w="25400">
+            <a:solidFill>
+              <a:srgbClr val="0068B7"/>
+            </a:solidFill>
+            <a:prstDash val="solid"/>
+          </a:ln>
+        </p:spPr>
+      </p:sp>
+      <p:sp>
+        <p:nvSpPr>
+          <p:cNvPr id="15" name="Text 13"/>
+          <p:cNvSpPr/>
+          <p:nvPr/>
+        </p:nvSpPr>
+        <p:spPr>
+          <a:xfrm>
+            <a:off x="7909560" y="3099816"/>
+            <a:ext cx="2926080" cy="256032"/>
+          </a:xfrm>
+          <a:prstGeom prst="rect">
+            <a:avLst/>
+          </a:prstGeom>
+          <a:noFill/>
+          <a:ln/>
+        </p:spPr>
+        <p:txBody>
+          <a:bodyPr wrap="square" lIns="0" tIns="0" rIns="0" bIns="0" rtlCol="0" anchor="ctr"/>
+          <a:lstStyle/>
+          <a:p>
+            <a:pPr algn="ctr" indent="0" marL="0">
+              <a:buNone/>
+            </a:pPr>
+            <a:r>
+              <a:rPr lang="en-US" sz="1500" b="1" dirty="0">
+                <a:solidFill>
+                  <a:srgbClr val="003A63"/>
+                </a:solidFill>
+                <a:latin typeface="Aptos" pitchFamily="34" charset="0"/>
+                <a:ea typeface="Aptos" pitchFamily="34" charset="-122"/>
+                <a:cs typeface="Aptos" pitchFamily="34" charset="-120"/>
+              </a:rPr>
+              <a:t>Risk</a:t>
+            </a:r>
+            <a:endParaRPr lang="en-US" sz="1500" dirty="0"/>
+          </a:p>
+        </p:txBody>
+      </p:sp>
+      <p:sp>
+        <p:nvSpPr>
+          <p:cNvPr id="16" name="Shape 14"/>
+          <p:cNvSpPr/>
+          <p:nvPr/>
+        </p:nvSpPr>
+        <p:spPr>
+          <a:xfrm>
+            <a:off x="8366760" y="3639312"/>
+            <a:ext cx="2011680" cy="0"/>
+          </a:xfrm>
+          <a:prstGeom prst="line">
+            <a:avLst/>
+          </a:prstGeom>
+          <a:noFill/>
+          <a:ln w="63500">
+            <a:solidFill>
+              <a:srgbClr val="2F8A28"/>
+            </a:solidFill>
+            <a:prstDash val="solid"/>
+          </a:ln>
+        </p:spPr>
+      </p:sp>
+      <p:sp>
+        <p:nvSpPr>
+          <p:cNvPr id="17" name="Text 15"/>
+          <p:cNvSpPr/>
+          <p:nvPr/>
+        </p:nvSpPr>
+        <p:spPr>
+          <a:xfrm>
+            <a:off x="7909560" y="3849624"/>
+            <a:ext cx="2926080" cy="164592"/>
+          </a:xfrm>
+          <a:prstGeom prst="rect">
+            <a:avLst/>
+          </a:prstGeom>
+          <a:noFill/>
+          <a:ln/>
+        </p:spPr>
+        <p:txBody>
+          <a:bodyPr wrap="square" lIns="0" tIns="0" rIns="0" bIns="0" rtlCol="0" anchor="ctr"/>
+          <a:lstStyle/>
+          <a:p>
+            <a:pPr algn="ctr" indent="0" marL="0">
+              <a:buNone/>
+            </a:pPr>
+            <a:r>
+              <a:rPr lang="en-US" sz="900" dirty="0">
+                <a:solidFill>
+                  <a:srgbClr val="003A63"/>
+                </a:solidFill>
+                <a:latin typeface="Aptos" pitchFamily="34" charset="0"/>
+                <a:ea typeface="Aptos" pitchFamily="34" charset="-122"/>
+                <a:cs typeface="Aptos" pitchFamily="34" charset="-120"/>
+              </a:rPr>
+              <a:t>Human review</a:t>
+            </a:r>
+            <a:endParaRPr lang="en-US" sz="900" dirty="0"/>
+          </a:p>
+        </p:txBody>
+      </p:sp>
+      <p:sp>
+        <p:nvSpPr>
+          <p:cNvPr id="18" name="Shape 16"/>
+          <p:cNvSpPr/>
+          <p:nvPr/>
+        </p:nvSpPr>
+        <p:spPr>
+          <a:xfrm>
+            <a:off x="7635240" y="4498848"/>
+            <a:ext cx="3474720" cy="1143000"/>
+          </a:xfrm>
+          <a:prstGeom prst="roundRect">
+            <a:avLst>
+              <a:gd name="adj" fmla="val 9600"/>
             </a:avLst>
           </a:prstGeom>
           <a:solidFill>
@@ -5479,14 +5918,14 @@
       </p:sp>
       <p:sp>
         <p:nvSpPr>
-          <p:cNvPr id="16" name="Text 14"/>
-          <p:cNvSpPr/>
-          <p:nvPr/>
-        </p:nvSpPr>
-        <p:spPr>
-          <a:xfrm>
-            <a:off x="8074152" y="3666744"/>
-            <a:ext cx="2825496" cy="256032"/>
+          <p:cNvPr id="19" name="Text 17"/>
+          <p:cNvSpPr/>
+          <p:nvPr/>
+        </p:nvSpPr>
+        <p:spPr>
+          <a:xfrm>
+            <a:off x="7799832" y="4645152"/>
+            <a:ext cx="3145536" cy="256032"/>
           </a:xfrm>
           <a:prstGeom prst="rect">
             <a:avLst/>
@@ -5510,7 +5949,7 @@
                 <a:ea typeface="Aptos" pitchFamily="34" charset="-122"/>
                 <a:cs typeface="Aptos" pitchFamily="34" charset="-120"/>
               </a:rPr>
-              <a:t>Use this for</a:t>
+              <a:t>Safeguard to plan</a:t>
             </a:r>
             <a:endParaRPr lang="en-US" sz="1300" dirty="0"/>
           </a:p>
@@ -5518,14 +5957,14 @@
       </p:sp>
       <p:sp>
         <p:nvSpPr>
-          <p:cNvPr id="17" name="Text 15"/>
-          <p:cNvSpPr/>
-          <p:nvPr/>
-        </p:nvSpPr>
-        <p:spPr>
-          <a:xfrm>
-            <a:off x="8074152" y="4023360"/>
-            <a:ext cx="2825496" cy="1097280"/>
+          <p:cNvPr id="20" name="Text 18"/>
+          <p:cNvSpPr/>
+          <p:nvPr/>
+        </p:nvSpPr>
+        <p:spPr>
+          <a:xfrm>
+            <a:off x="7799832" y="5001768"/>
+            <a:ext cx="3145536" cy="502920"/>
           </a:xfrm>
           <a:prstGeom prst="rect">
             <a:avLst/>
@@ -5551,7 +5990,7 @@
                 <a:ea typeface="Aptos" pitchFamily="34" charset="-122"/>
                 <a:cs typeface="Aptos" pitchFamily="34" charset="-120"/>
               </a:rPr>
-              <a:t>Connect the concept to public health decisions, safeguards, documentation, or implementation work.</a:t>
+              <a:t>Identify what could go wrong, who could be affected, what safeguards are needed, and what evidence should be reviewed before use expands.</a:t>
             </a:r>
             <a:endParaRPr lang="en-US" sz="1550" dirty="0"/>
           </a:p>
@@ -5725,8 +6164,8 @@
         </p:nvSpPr>
         <p:spPr>
           <a:xfrm>
-            <a:off x="9966960" y="6537960"/>
-            <a:ext cx="1645920" cy="201168"/>
+            <a:off x="9646920" y="6537960"/>
+            <a:ext cx="1965960" cy="201168"/>
           </a:xfrm>
           <a:prstGeom prst="rect">
             <a:avLst/>
@@ -5750,7 +6189,7 @@
                 <a:ea typeface="Aptos" pitchFamily="34" charset="-122"/>
                 <a:cs typeface="Aptos" pitchFamily="34" charset="-120"/>
               </a:rPr>
-              <a:t>Â© Paula Soper</a:t>
+              <a:t>Copyright Paula Soper</a:t>
             </a:r>
             <a:endParaRPr lang="en-US" sz="800" dirty="0"/>
           </a:p>
@@ -5845,7 +6284,7 @@
         <p:spPr>
           <a:xfrm>
             <a:off x="868680" y="1508760"/>
-            <a:ext cx="6537960" cy="4160520"/>
+            <a:ext cx="6309360" cy="4160520"/>
           </a:xfrm>
           <a:prstGeom prst="rect">
             <a:avLst/>
@@ -5910,12 +6349,12 @@
         </p:nvSpPr>
         <p:spPr>
           <a:xfrm>
-            <a:off x="7909560" y="1417320"/>
-            <a:ext cx="3154680" cy="1828800"/>
+            <a:off x="7635240" y="1325880"/>
+            <a:ext cx="3474720" cy="1325880"/>
           </a:xfrm>
           <a:prstGeom prst="roundRect">
             <a:avLst>
-              <a:gd name="adj" fmla="val 6000"/>
+              <a:gd name="adj" fmla="val 8276"/>
             </a:avLst>
           </a:prstGeom>
           <a:solidFill>
@@ -5937,8 +6376,8 @@
         </p:nvSpPr>
         <p:spPr>
           <a:xfrm>
-            <a:off x="8074152" y="1563624"/>
-            <a:ext cx="2825496" cy="256032"/>
+            <a:off x="7799832" y="1472184"/>
+            <a:ext cx="3145536" cy="256032"/>
           </a:xfrm>
           <a:prstGeom prst="rect">
             <a:avLst/>
@@ -5962,7 +6401,7 @@
                 <a:ea typeface="Aptos" pitchFamily="34" charset="-122"/>
                 <a:cs typeface="Aptos" pitchFamily="34" charset="-120"/>
               </a:rPr>
-              <a:t>Key idea</a:t>
+              <a:t>Risk check</a:t>
             </a:r>
             <a:endParaRPr lang="en-US" sz="1300" dirty="0"/>
           </a:p>
@@ -5976,8 +6415,8 @@
         </p:nvSpPr>
         <p:spPr>
           <a:xfrm>
-            <a:off x="8074152" y="1920240"/>
-            <a:ext cx="2825496" cy="1188720"/>
+            <a:off x="7799832" y="1828800"/>
+            <a:ext cx="3145536" cy="685800"/>
           </a:xfrm>
           <a:prstGeom prst="rect">
             <a:avLst/>
@@ -6017,12 +6456,165 @@
         </p:nvSpPr>
         <p:spPr>
           <a:xfrm>
-            <a:off x="7909560" y="3520440"/>
-            <a:ext cx="3154680" cy="1737360"/>
+            <a:off x="7635240" y="2788920"/>
+            <a:ext cx="3474720" cy="1536192"/>
           </a:xfrm>
           <a:prstGeom prst="roundRect">
             <a:avLst>
-              <a:gd name="adj" fmla="val 6316"/>
+              <a:gd name="adj" fmla="val 7143"/>
+            </a:avLst>
+          </a:prstGeom>
+          <a:solidFill>
+            <a:srgbClr val="FFFFFF">
+              <a:alpha val="88000"/>
+            </a:srgbClr>
+          </a:solidFill>
+          <a:ln w="12700">
+            <a:solidFill>
+              <a:srgbClr val="D6E8F2"/>
+            </a:solidFill>
+            <a:prstDash val="solid"/>
+          </a:ln>
+        </p:spPr>
+      </p:sp>
+      <p:sp>
+        <p:nvSpPr>
+          <p:cNvPr id="14" name="Shape 12"/>
+          <p:cNvSpPr/>
+          <p:nvPr/>
+        </p:nvSpPr>
+        <p:spPr>
+          <a:xfrm>
+            <a:off x="8046720" y="3108960"/>
+            <a:ext cx="2651760" cy="896112"/>
+          </a:xfrm>
+          <a:prstGeom prst="arc">
+            <a:avLst/>
+          </a:prstGeom>
+          <a:noFill/>
+          <a:ln w="25400">
+            <a:solidFill>
+              <a:srgbClr val="0068B7"/>
+            </a:solidFill>
+            <a:prstDash val="solid"/>
+          </a:ln>
+        </p:spPr>
+      </p:sp>
+      <p:sp>
+        <p:nvSpPr>
+          <p:cNvPr id="15" name="Text 13"/>
+          <p:cNvSpPr/>
+          <p:nvPr/>
+        </p:nvSpPr>
+        <p:spPr>
+          <a:xfrm>
+            <a:off x="7909560" y="3099816"/>
+            <a:ext cx="2926080" cy="256032"/>
+          </a:xfrm>
+          <a:prstGeom prst="rect">
+            <a:avLst/>
+          </a:prstGeom>
+          <a:noFill/>
+          <a:ln/>
+        </p:spPr>
+        <p:txBody>
+          <a:bodyPr wrap="square" lIns="0" tIns="0" rIns="0" bIns="0" rtlCol="0" anchor="ctr"/>
+          <a:lstStyle/>
+          <a:p>
+            <a:pPr algn="ctr" indent="0" marL="0">
+              <a:buNone/>
+            </a:pPr>
+            <a:r>
+              <a:rPr lang="en-US" sz="1500" b="1" dirty="0">
+                <a:solidFill>
+                  <a:srgbClr val="003A63"/>
+                </a:solidFill>
+                <a:latin typeface="Aptos" pitchFamily="34" charset="0"/>
+                <a:ea typeface="Aptos" pitchFamily="34" charset="-122"/>
+                <a:cs typeface="Aptos" pitchFamily="34" charset="-120"/>
+              </a:rPr>
+              <a:t>Risk</a:t>
+            </a:r>
+            <a:endParaRPr lang="en-US" sz="1500" dirty="0"/>
+          </a:p>
+        </p:txBody>
+      </p:sp>
+      <p:sp>
+        <p:nvSpPr>
+          <p:cNvPr id="16" name="Shape 14"/>
+          <p:cNvSpPr/>
+          <p:nvPr/>
+        </p:nvSpPr>
+        <p:spPr>
+          <a:xfrm>
+            <a:off x="8366760" y="3639312"/>
+            <a:ext cx="2011680" cy="0"/>
+          </a:xfrm>
+          <a:prstGeom prst="line">
+            <a:avLst/>
+          </a:prstGeom>
+          <a:noFill/>
+          <a:ln w="63500">
+            <a:solidFill>
+              <a:srgbClr val="2F8A28"/>
+            </a:solidFill>
+            <a:prstDash val="solid"/>
+          </a:ln>
+        </p:spPr>
+      </p:sp>
+      <p:sp>
+        <p:nvSpPr>
+          <p:cNvPr id="17" name="Text 15"/>
+          <p:cNvSpPr/>
+          <p:nvPr/>
+        </p:nvSpPr>
+        <p:spPr>
+          <a:xfrm>
+            <a:off x="7909560" y="3849624"/>
+            <a:ext cx="2926080" cy="164592"/>
+          </a:xfrm>
+          <a:prstGeom prst="rect">
+            <a:avLst/>
+          </a:prstGeom>
+          <a:noFill/>
+          <a:ln/>
+        </p:spPr>
+        <p:txBody>
+          <a:bodyPr wrap="square" lIns="0" tIns="0" rIns="0" bIns="0" rtlCol="0" anchor="ctr"/>
+          <a:lstStyle/>
+          <a:p>
+            <a:pPr algn="ctr" indent="0" marL="0">
+              <a:buNone/>
+            </a:pPr>
+            <a:r>
+              <a:rPr lang="en-US" sz="900" dirty="0">
+                <a:solidFill>
+                  <a:srgbClr val="003A63"/>
+                </a:solidFill>
+                <a:latin typeface="Aptos" pitchFamily="34" charset="0"/>
+                <a:ea typeface="Aptos" pitchFamily="34" charset="-122"/>
+                <a:cs typeface="Aptos" pitchFamily="34" charset="-120"/>
+              </a:rPr>
+              <a:t>Human review</a:t>
+            </a:r>
+            <a:endParaRPr lang="en-US" sz="900" dirty="0"/>
+          </a:p>
+        </p:txBody>
+      </p:sp>
+      <p:sp>
+        <p:nvSpPr>
+          <p:cNvPr id="18" name="Shape 16"/>
+          <p:cNvSpPr/>
+          <p:nvPr/>
+        </p:nvSpPr>
+        <p:spPr>
+          <a:xfrm>
+            <a:off x="7635240" y="4498848"/>
+            <a:ext cx="3474720" cy="1143000"/>
+          </a:xfrm>
+          <a:prstGeom prst="roundRect">
+            <a:avLst>
+              <a:gd name="adj" fmla="val 9600"/>
             </a:avLst>
           </a:prstGeom>
           <a:solidFill>
@@ -6038,14 +6630,14 @@
       </p:sp>
       <p:sp>
         <p:nvSpPr>
-          <p:cNvPr id="14" name="Text 12"/>
-          <p:cNvSpPr/>
-          <p:nvPr/>
-        </p:nvSpPr>
-        <p:spPr>
-          <a:xfrm>
-            <a:off x="8074152" y="3666744"/>
-            <a:ext cx="2825496" cy="256032"/>
+          <p:cNvPr id="19" name="Text 17"/>
+          <p:cNvSpPr/>
+          <p:nvPr/>
+        </p:nvSpPr>
+        <p:spPr>
+          <a:xfrm>
+            <a:off x="7799832" y="4645152"/>
+            <a:ext cx="3145536" cy="256032"/>
           </a:xfrm>
           <a:prstGeom prst="rect">
             <a:avLst/>
@@ -6069,7 +6661,7 @@
                 <a:ea typeface="Aptos" pitchFamily="34" charset="-122"/>
                 <a:cs typeface="Aptos" pitchFamily="34" charset="-120"/>
               </a:rPr>
-              <a:t>Use this for</a:t>
+              <a:t>Safeguard to plan</a:t>
             </a:r>
             <a:endParaRPr lang="en-US" sz="1300" dirty="0"/>
           </a:p>
@@ -6077,14 +6669,14 @@
       </p:sp>
       <p:sp>
         <p:nvSpPr>
-          <p:cNvPr id="15" name="Text 13"/>
-          <p:cNvSpPr/>
-          <p:nvPr/>
-        </p:nvSpPr>
-        <p:spPr>
-          <a:xfrm>
-            <a:off x="8074152" y="4023360"/>
-            <a:ext cx="2825496" cy="1097280"/>
+          <p:cNvPr id="20" name="Text 18"/>
+          <p:cNvSpPr/>
+          <p:nvPr/>
+        </p:nvSpPr>
+        <p:spPr>
+          <a:xfrm>
+            <a:off x="7799832" y="5001768"/>
+            <a:ext cx="3145536" cy="502920"/>
           </a:xfrm>
           <a:prstGeom prst="rect">
             <a:avLst/>
@@ -6110,7 +6702,7 @@
                 <a:ea typeface="Aptos" pitchFamily="34" charset="-122"/>
                 <a:cs typeface="Aptos" pitchFamily="34" charset="-120"/>
               </a:rPr>
-              <a:t>Connect the concept to public health decisions, safeguards, documentation, or implementation work.</a:t>
+              <a:t>Identify what could go wrong, who could be affected, what safeguards are needed, and what evidence should be reviewed before use expands.</a:t>
             </a:r>
             <a:endParaRPr lang="en-US" sz="1550" dirty="0"/>
           </a:p>
@@ -6284,8 +6876,8 @@
         </p:nvSpPr>
         <p:spPr>
           <a:xfrm>
-            <a:off x="9966960" y="6537960"/>
-            <a:ext cx="1645920" cy="201168"/>
+            <a:off x="9646920" y="6537960"/>
+            <a:ext cx="1965960" cy="201168"/>
           </a:xfrm>
           <a:prstGeom prst="rect">
             <a:avLst/>
@@ -6309,7 +6901,7 @@
                 <a:ea typeface="Aptos" pitchFamily="34" charset="-122"/>
                 <a:cs typeface="Aptos" pitchFamily="34" charset="-120"/>
               </a:rPr>
-              <a:t>Â© Paula Soper</a:t>
+              <a:t>Copyright Paula Soper</a:t>
             </a:r>
             <a:endParaRPr lang="en-US" sz="800" dirty="0"/>
           </a:p>
@@ -6356,77 +6948,13 @@
       </p:sp>
       <p:sp>
         <p:nvSpPr>
-          <p:cNvPr id="8" name="Shape 6"/>
+          <p:cNvPr id="8" name="Text 6"/>
           <p:cNvSpPr/>
           <p:nvPr/>
         </p:nvSpPr>
         <p:spPr>
           <a:xfrm>
             <a:off x="640080" y="658368"/>
-            <a:ext cx="420624" cy="420624"/>
-          </a:xfrm>
-          <a:prstGeom prst="ellipse">
-            <a:avLst/>
-          </a:prstGeom>
-          <a:solidFill>
-            <a:srgbClr val="0068B7"/>
-          </a:solidFill>
-          <a:ln w="12700">
-            <a:solidFill>
-              <a:srgbClr val="0068B7"/>
-            </a:solidFill>
-            <a:prstDash val="solid"/>
-          </a:ln>
-        </p:spPr>
-      </p:sp>
-      <p:sp>
-        <p:nvSpPr>
-          <p:cNvPr id="9" name="Text 7"/>
-          <p:cNvSpPr/>
-          <p:nvPr/>
-        </p:nvSpPr>
-        <p:spPr>
-          <a:xfrm>
-            <a:off x="640080" y="731520"/>
-            <a:ext cx="420624" cy="164592"/>
-          </a:xfrm>
-          <a:prstGeom prst="rect">
-            <a:avLst/>
-          </a:prstGeom>
-          <a:noFill/>
-          <a:ln/>
-        </p:spPr>
-        <p:txBody>
-          <a:bodyPr wrap="square" lIns="0" tIns="0" rIns="0" bIns="0" rtlCol="0" anchor="ctr"/>
-          <a:lstStyle/>
-          <a:p>
-            <a:pPr algn="ctr" indent="0" marL="0">
-              <a:buNone/>
-            </a:pPr>
-            <a:r>
-              <a:rPr lang="en-US" sz="1100" b="1" dirty="0">
-                <a:solidFill>
-                  <a:srgbClr val="FFFFFF"/>
-                </a:solidFill>
-                <a:latin typeface="Aptos" pitchFamily="34" charset="0"/>
-                <a:ea typeface="Aptos" pitchFamily="34" charset="-122"/>
-                <a:cs typeface="Aptos" pitchFamily="34" charset="-120"/>
-              </a:rPr>
-              <a:t>8</a:t>
-            </a:r>
-            <a:endParaRPr lang="en-US" sz="1100" dirty="0"/>
-          </a:p>
-        </p:txBody>
-      </p:sp>
-      <p:sp>
-        <p:nvSpPr>
-          <p:cNvPr id="10" name="Text 8"/>
-          <p:cNvSpPr/>
-          <p:nvPr/>
-        </p:nvSpPr>
-        <p:spPr>
-          <a:xfrm>
-            <a:off x="640080" y="621792"/>
             <a:ext cx="10881360" cy="713232"/>
           </a:xfrm>
           <a:prstGeom prst="rect">
@@ -6461,14 +6989,14 @@
       </p:sp>
       <p:sp>
         <p:nvSpPr>
-          <p:cNvPr id="11" name="Text 9"/>
+          <p:cNvPr id="9" name="Text 7"/>
           <p:cNvSpPr/>
           <p:nvPr/>
         </p:nvSpPr>
         <p:spPr>
           <a:xfrm>
             <a:off x="868680" y="1508760"/>
-            <a:ext cx="6537960" cy="4160520"/>
+            <a:ext cx="6309360" cy="4160520"/>
           </a:xfrm>
           <a:prstGeom prst="rect">
             <a:avLst/>
@@ -6527,18 +7055,18 @@
       </p:sp>
       <p:sp>
         <p:nvSpPr>
-          <p:cNvPr id="12" name="Shape 10"/>
-          <p:cNvSpPr/>
-          <p:nvPr/>
-        </p:nvSpPr>
-        <p:spPr>
-          <a:xfrm>
-            <a:off x="7909560" y="1417320"/>
-            <a:ext cx="3154680" cy="1828800"/>
+          <p:cNvPr id="10" name="Shape 8"/>
+          <p:cNvSpPr/>
+          <p:nvPr/>
+        </p:nvSpPr>
+        <p:spPr>
+          <a:xfrm>
+            <a:off x="7635240" y="1325880"/>
+            <a:ext cx="3474720" cy="1325880"/>
           </a:xfrm>
           <a:prstGeom prst="roundRect">
             <a:avLst>
-              <a:gd name="adj" fmla="val 6000"/>
+              <a:gd name="adj" fmla="val 8276"/>
             </a:avLst>
           </a:prstGeom>
           <a:solidFill>
@@ -6554,14 +7082,14 @@
       </p:sp>
       <p:sp>
         <p:nvSpPr>
-          <p:cNvPr id="13" name="Text 11"/>
-          <p:cNvSpPr/>
-          <p:nvPr/>
-        </p:nvSpPr>
-        <p:spPr>
-          <a:xfrm>
-            <a:off x="8074152" y="1563624"/>
-            <a:ext cx="2825496" cy="256032"/>
+          <p:cNvPr id="11" name="Text 9"/>
+          <p:cNvSpPr/>
+          <p:nvPr/>
+        </p:nvSpPr>
+        <p:spPr>
+          <a:xfrm>
+            <a:off x="7799832" y="1472184"/>
+            <a:ext cx="3145536" cy="256032"/>
           </a:xfrm>
           <a:prstGeom prst="rect">
             <a:avLst/>
@@ -6585,7 +7113,7 @@
                 <a:ea typeface="Aptos" pitchFamily="34" charset="-122"/>
                 <a:cs typeface="Aptos" pitchFamily="34" charset="-120"/>
               </a:rPr>
-              <a:t>Key idea</a:t>
+              <a:t>Risk check</a:t>
             </a:r>
             <a:endParaRPr lang="en-US" sz="1300" dirty="0"/>
           </a:p>
@@ -6593,14 +7121,14 @@
       </p:sp>
       <p:sp>
         <p:nvSpPr>
-          <p:cNvPr id="14" name="Text 12"/>
-          <p:cNvSpPr/>
-          <p:nvPr/>
-        </p:nvSpPr>
-        <p:spPr>
-          <a:xfrm>
-            <a:off x="8074152" y="1920240"/>
-            <a:ext cx="2825496" cy="1188720"/>
+          <p:cNvPr id="12" name="Text 10"/>
+          <p:cNvSpPr/>
+          <p:nvPr/>
+        </p:nvSpPr>
+        <p:spPr>
+          <a:xfrm>
+            <a:off x="7799832" y="1828800"/>
+            <a:ext cx="3145536" cy="685800"/>
           </a:xfrm>
           <a:prstGeom prst="rect">
             <a:avLst/>
@@ -6634,18 +7162,171 @@
       </p:sp>
       <p:sp>
         <p:nvSpPr>
-          <p:cNvPr id="15" name="Shape 13"/>
-          <p:cNvSpPr/>
-          <p:nvPr/>
-        </p:nvSpPr>
-        <p:spPr>
-          <a:xfrm>
-            <a:off x="7909560" y="3520440"/>
-            <a:ext cx="3154680" cy="1737360"/>
+          <p:cNvPr id="13" name="Shape 11"/>
+          <p:cNvSpPr/>
+          <p:nvPr/>
+        </p:nvSpPr>
+        <p:spPr>
+          <a:xfrm>
+            <a:off x="7635240" y="2788920"/>
+            <a:ext cx="3474720" cy="1536192"/>
           </a:xfrm>
           <a:prstGeom prst="roundRect">
             <a:avLst>
-              <a:gd name="adj" fmla="val 6316"/>
+              <a:gd name="adj" fmla="val 7143"/>
+            </a:avLst>
+          </a:prstGeom>
+          <a:solidFill>
+            <a:srgbClr val="FFFFFF">
+              <a:alpha val="88000"/>
+            </a:srgbClr>
+          </a:solidFill>
+          <a:ln w="12700">
+            <a:solidFill>
+              <a:srgbClr val="D6E8F2"/>
+            </a:solidFill>
+            <a:prstDash val="solid"/>
+          </a:ln>
+        </p:spPr>
+      </p:sp>
+      <p:sp>
+        <p:nvSpPr>
+          <p:cNvPr id="14" name="Shape 12"/>
+          <p:cNvSpPr/>
+          <p:nvPr/>
+        </p:nvSpPr>
+        <p:spPr>
+          <a:xfrm>
+            <a:off x="8046720" y="3108960"/>
+            <a:ext cx="2651760" cy="896112"/>
+          </a:xfrm>
+          <a:prstGeom prst="arc">
+            <a:avLst/>
+          </a:prstGeom>
+          <a:noFill/>
+          <a:ln w="25400">
+            <a:solidFill>
+              <a:srgbClr val="0068B7"/>
+            </a:solidFill>
+            <a:prstDash val="solid"/>
+          </a:ln>
+        </p:spPr>
+      </p:sp>
+      <p:sp>
+        <p:nvSpPr>
+          <p:cNvPr id="15" name="Text 13"/>
+          <p:cNvSpPr/>
+          <p:nvPr/>
+        </p:nvSpPr>
+        <p:spPr>
+          <a:xfrm>
+            <a:off x="7909560" y="3099816"/>
+            <a:ext cx="2926080" cy="256032"/>
+          </a:xfrm>
+          <a:prstGeom prst="rect">
+            <a:avLst/>
+          </a:prstGeom>
+          <a:noFill/>
+          <a:ln/>
+        </p:spPr>
+        <p:txBody>
+          <a:bodyPr wrap="square" lIns="0" tIns="0" rIns="0" bIns="0" rtlCol="0" anchor="ctr"/>
+          <a:lstStyle/>
+          <a:p>
+            <a:pPr algn="ctr" indent="0" marL="0">
+              <a:buNone/>
+            </a:pPr>
+            <a:r>
+              <a:rPr lang="en-US" sz="1500" b="1" dirty="0">
+                <a:solidFill>
+                  <a:srgbClr val="003A63"/>
+                </a:solidFill>
+                <a:latin typeface="Aptos" pitchFamily="34" charset="0"/>
+                <a:ea typeface="Aptos" pitchFamily="34" charset="-122"/>
+                <a:cs typeface="Aptos" pitchFamily="34" charset="-120"/>
+              </a:rPr>
+              <a:t>Risk</a:t>
+            </a:r>
+            <a:endParaRPr lang="en-US" sz="1500" dirty="0"/>
+          </a:p>
+        </p:txBody>
+      </p:sp>
+      <p:sp>
+        <p:nvSpPr>
+          <p:cNvPr id="16" name="Shape 14"/>
+          <p:cNvSpPr/>
+          <p:nvPr/>
+        </p:nvSpPr>
+        <p:spPr>
+          <a:xfrm>
+            <a:off x="8366760" y="3639312"/>
+            <a:ext cx="2011680" cy="0"/>
+          </a:xfrm>
+          <a:prstGeom prst="line">
+            <a:avLst/>
+          </a:prstGeom>
+          <a:noFill/>
+          <a:ln w="63500">
+            <a:solidFill>
+              <a:srgbClr val="2F8A28"/>
+            </a:solidFill>
+            <a:prstDash val="solid"/>
+          </a:ln>
+        </p:spPr>
+      </p:sp>
+      <p:sp>
+        <p:nvSpPr>
+          <p:cNvPr id="17" name="Text 15"/>
+          <p:cNvSpPr/>
+          <p:nvPr/>
+        </p:nvSpPr>
+        <p:spPr>
+          <a:xfrm>
+            <a:off x="7909560" y="3849624"/>
+            <a:ext cx="2926080" cy="164592"/>
+          </a:xfrm>
+          <a:prstGeom prst="rect">
+            <a:avLst/>
+          </a:prstGeom>
+          <a:noFill/>
+          <a:ln/>
+        </p:spPr>
+        <p:txBody>
+          <a:bodyPr wrap="square" lIns="0" tIns="0" rIns="0" bIns="0" rtlCol="0" anchor="ctr"/>
+          <a:lstStyle/>
+          <a:p>
+            <a:pPr algn="ctr" indent="0" marL="0">
+              <a:buNone/>
+            </a:pPr>
+            <a:r>
+              <a:rPr lang="en-US" sz="900" dirty="0">
+                <a:solidFill>
+                  <a:srgbClr val="003A63"/>
+                </a:solidFill>
+                <a:latin typeface="Aptos" pitchFamily="34" charset="0"/>
+                <a:ea typeface="Aptos" pitchFamily="34" charset="-122"/>
+                <a:cs typeface="Aptos" pitchFamily="34" charset="-120"/>
+              </a:rPr>
+              <a:t>Human review</a:t>
+            </a:r>
+            <a:endParaRPr lang="en-US" sz="900" dirty="0"/>
+          </a:p>
+        </p:txBody>
+      </p:sp>
+      <p:sp>
+        <p:nvSpPr>
+          <p:cNvPr id="18" name="Shape 16"/>
+          <p:cNvSpPr/>
+          <p:nvPr/>
+        </p:nvSpPr>
+        <p:spPr>
+          <a:xfrm>
+            <a:off x="7635240" y="4498848"/>
+            <a:ext cx="3474720" cy="1143000"/>
+          </a:xfrm>
+          <a:prstGeom prst="roundRect">
+            <a:avLst>
+              <a:gd name="adj" fmla="val 9600"/>
             </a:avLst>
           </a:prstGeom>
           <a:solidFill>
@@ -6661,14 +7342,14 @@
       </p:sp>
       <p:sp>
         <p:nvSpPr>
-          <p:cNvPr id="16" name="Text 14"/>
-          <p:cNvSpPr/>
-          <p:nvPr/>
-        </p:nvSpPr>
-        <p:spPr>
-          <a:xfrm>
-            <a:off x="8074152" y="3666744"/>
-            <a:ext cx="2825496" cy="256032"/>
+          <p:cNvPr id="19" name="Text 17"/>
+          <p:cNvSpPr/>
+          <p:nvPr/>
+        </p:nvSpPr>
+        <p:spPr>
+          <a:xfrm>
+            <a:off x="7799832" y="4645152"/>
+            <a:ext cx="3145536" cy="256032"/>
           </a:xfrm>
           <a:prstGeom prst="rect">
             <a:avLst/>
@@ -6692,7 +7373,7 @@
                 <a:ea typeface="Aptos" pitchFamily="34" charset="-122"/>
                 <a:cs typeface="Aptos" pitchFamily="34" charset="-120"/>
               </a:rPr>
-              <a:t>Use this for</a:t>
+              <a:t>Safeguard to plan</a:t>
             </a:r>
             <a:endParaRPr lang="en-US" sz="1300" dirty="0"/>
           </a:p>
@@ -6700,14 +7381,14 @@
       </p:sp>
       <p:sp>
         <p:nvSpPr>
-          <p:cNvPr id="17" name="Text 15"/>
-          <p:cNvSpPr/>
-          <p:nvPr/>
-        </p:nvSpPr>
-        <p:spPr>
-          <a:xfrm>
-            <a:off x="8074152" y="4023360"/>
-            <a:ext cx="2825496" cy="1097280"/>
+          <p:cNvPr id="20" name="Text 18"/>
+          <p:cNvSpPr/>
+          <p:nvPr/>
+        </p:nvSpPr>
+        <p:spPr>
+          <a:xfrm>
+            <a:off x="7799832" y="5001768"/>
+            <a:ext cx="3145536" cy="502920"/>
           </a:xfrm>
           <a:prstGeom prst="rect">
             <a:avLst/>
@@ -6733,7 +7414,7 @@
                 <a:ea typeface="Aptos" pitchFamily="34" charset="-122"/>
                 <a:cs typeface="Aptos" pitchFamily="34" charset="-120"/>
               </a:rPr>
-              <a:t>Connect the concept to public health decisions, safeguards, documentation, or implementation work.</a:t>
+              <a:t>Identify what could go wrong, who could be affected, what safeguards are needed, and what evidence should be reviewed before use expands.</a:t>
             </a:r>
             <a:endParaRPr lang="en-US" sz="1550" dirty="0"/>
           </a:p>
@@ -6907,8 +7588,8 @@
         </p:nvSpPr>
         <p:spPr>
           <a:xfrm>
-            <a:off x="9966960" y="6537960"/>
-            <a:ext cx="1645920" cy="201168"/>
+            <a:off x="9646920" y="6537960"/>
+            <a:ext cx="1965960" cy="201168"/>
           </a:xfrm>
           <a:prstGeom prst="rect">
             <a:avLst/>
@@ -6932,7 +7613,7 @@
                 <a:ea typeface="Aptos" pitchFamily="34" charset="-122"/>
                 <a:cs typeface="Aptos" pitchFamily="34" charset="-120"/>
               </a:rPr>
-              <a:t>Â© Paula Soper</a:t>
+              <a:t>Copyright Paula Soper</a:t>
             </a:r>
             <a:endParaRPr lang="en-US" sz="800" dirty="0"/>
           </a:p>
@@ -6979,77 +7660,13 @@
       </p:sp>
       <p:sp>
         <p:nvSpPr>
-          <p:cNvPr id="8" name="Shape 6"/>
+          <p:cNvPr id="8" name="Text 6"/>
           <p:cNvSpPr/>
           <p:nvPr/>
         </p:nvSpPr>
         <p:spPr>
           <a:xfrm>
             <a:off x="640080" y="658368"/>
-            <a:ext cx="420624" cy="420624"/>
-          </a:xfrm>
-          <a:prstGeom prst="ellipse">
-            <a:avLst/>
-          </a:prstGeom>
-          <a:solidFill>
-            <a:srgbClr val="0068B7"/>
-          </a:solidFill>
-          <a:ln w="12700">
-            <a:solidFill>
-              <a:srgbClr val="0068B7"/>
-            </a:solidFill>
-            <a:prstDash val="solid"/>
-          </a:ln>
-        </p:spPr>
-      </p:sp>
-      <p:sp>
-        <p:nvSpPr>
-          <p:cNvPr id="9" name="Text 7"/>
-          <p:cNvSpPr/>
-          <p:nvPr/>
-        </p:nvSpPr>
-        <p:spPr>
-          <a:xfrm>
-            <a:off x="640080" y="731520"/>
-            <a:ext cx="420624" cy="164592"/>
-          </a:xfrm>
-          <a:prstGeom prst="rect">
-            <a:avLst/>
-          </a:prstGeom>
-          <a:noFill/>
-          <a:ln/>
-        </p:spPr>
-        <p:txBody>
-          <a:bodyPr wrap="square" lIns="0" tIns="0" rIns="0" bIns="0" rtlCol="0" anchor="ctr"/>
-          <a:lstStyle/>
-          <a:p>
-            <a:pPr algn="ctr" indent="0" marL="0">
-              <a:buNone/>
-            </a:pPr>
-            <a:r>
-              <a:rPr lang="en-US" sz="1100" b="1" dirty="0">
-                <a:solidFill>
-                  <a:srgbClr val="FFFFFF"/>
-                </a:solidFill>
-                <a:latin typeface="Aptos" pitchFamily="34" charset="0"/>
-                <a:ea typeface="Aptos" pitchFamily="34" charset="-122"/>
-                <a:cs typeface="Aptos" pitchFamily="34" charset="-120"/>
-              </a:rPr>
-              <a:t>9</a:t>
-            </a:r>
-            <a:endParaRPr lang="en-US" sz="1100" dirty="0"/>
-          </a:p>
-        </p:txBody>
-      </p:sp>
-      <p:sp>
-        <p:nvSpPr>
-          <p:cNvPr id="10" name="Text 8"/>
-          <p:cNvSpPr/>
-          <p:nvPr/>
-        </p:nvSpPr>
-        <p:spPr>
-          <a:xfrm>
-            <a:off x="640080" y="621792"/>
             <a:ext cx="10881360" cy="713232"/>
           </a:xfrm>
           <a:prstGeom prst="rect">
@@ -7084,14 +7701,14 @@
       </p:sp>
       <p:sp>
         <p:nvSpPr>
-          <p:cNvPr id="11" name="Text 9"/>
+          <p:cNvPr id="9" name="Text 7"/>
           <p:cNvSpPr/>
           <p:nvPr/>
         </p:nvSpPr>
         <p:spPr>
           <a:xfrm>
             <a:off x="868680" y="1508760"/>
-            <a:ext cx="6537960" cy="4160520"/>
+            <a:ext cx="6309360" cy="4160520"/>
           </a:xfrm>
           <a:prstGeom prst="rect">
             <a:avLst/>
@@ -7150,18 +7767,18 @@
       </p:sp>
       <p:sp>
         <p:nvSpPr>
-          <p:cNvPr id="12" name="Shape 10"/>
-          <p:cNvSpPr/>
-          <p:nvPr/>
-        </p:nvSpPr>
-        <p:spPr>
-          <a:xfrm>
-            <a:off x="7909560" y="1417320"/>
-            <a:ext cx="3154680" cy="1828800"/>
+          <p:cNvPr id="10" name="Shape 8"/>
+          <p:cNvSpPr/>
+          <p:nvPr/>
+        </p:nvSpPr>
+        <p:spPr>
+          <a:xfrm>
+            <a:off x="7635240" y="1325880"/>
+            <a:ext cx="3474720" cy="1325880"/>
           </a:xfrm>
           <a:prstGeom prst="roundRect">
             <a:avLst>
-              <a:gd name="adj" fmla="val 6000"/>
+              <a:gd name="adj" fmla="val 8276"/>
             </a:avLst>
           </a:prstGeom>
           <a:solidFill>
@@ -7177,14 +7794,14 @@
       </p:sp>
       <p:sp>
         <p:nvSpPr>
-          <p:cNvPr id="13" name="Text 11"/>
-          <p:cNvSpPr/>
-          <p:nvPr/>
-        </p:nvSpPr>
-        <p:spPr>
-          <a:xfrm>
-            <a:off x="8074152" y="1563624"/>
-            <a:ext cx="2825496" cy="256032"/>
+          <p:cNvPr id="11" name="Text 9"/>
+          <p:cNvSpPr/>
+          <p:nvPr/>
+        </p:nvSpPr>
+        <p:spPr>
+          <a:xfrm>
+            <a:off x="7799832" y="1472184"/>
+            <a:ext cx="3145536" cy="256032"/>
           </a:xfrm>
           <a:prstGeom prst="rect">
             <a:avLst/>
@@ -7208,7 +7825,7 @@
                 <a:ea typeface="Aptos" pitchFamily="34" charset="-122"/>
                 <a:cs typeface="Aptos" pitchFamily="34" charset="-120"/>
               </a:rPr>
-              <a:t>Key idea</a:t>
+              <a:t>Risk check</a:t>
             </a:r>
             <a:endParaRPr lang="en-US" sz="1300" dirty="0"/>
           </a:p>
@@ -7216,14 +7833,14 @@
       </p:sp>
       <p:sp>
         <p:nvSpPr>
-          <p:cNvPr id="14" name="Text 12"/>
-          <p:cNvSpPr/>
-          <p:nvPr/>
-        </p:nvSpPr>
-        <p:spPr>
-          <a:xfrm>
-            <a:off x="8074152" y="1920240"/>
-            <a:ext cx="2825496" cy="1188720"/>
+          <p:cNvPr id="12" name="Text 10"/>
+          <p:cNvSpPr/>
+          <p:nvPr/>
+        </p:nvSpPr>
+        <p:spPr>
+          <a:xfrm>
+            <a:off x="7799832" y="1828800"/>
+            <a:ext cx="3145536" cy="685800"/>
           </a:xfrm>
           <a:prstGeom prst="rect">
             <a:avLst/>
@@ -7257,18 +7874,171 @@
       </p:sp>
       <p:sp>
         <p:nvSpPr>
-          <p:cNvPr id="15" name="Shape 13"/>
-          <p:cNvSpPr/>
-          <p:nvPr/>
-        </p:nvSpPr>
-        <p:spPr>
-          <a:xfrm>
-            <a:off x="7909560" y="3520440"/>
-            <a:ext cx="3154680" cy="1737360"/>
+          <p:cNvPr id="13" name="Shape 11"/>
+          <p:cNvSpPr/>
+          <p:nvPr/>
+        </p:nvSpPr>
+        <p:spPr>
+          <a:xfrm>
+            <a:off x="7635240" y="2788920"/>
+            <a:ext cx="3474720" cy="1536192"/>
           </a:xfrm>
           <a:prstGeom prst="roundRect">
             <a:avLst>
-              <a:gd name="adj" fmla="val 6316"/>
+              <a:gd name="adj" fmla="val 7143"/>
+            </a:avLst>
+          </a:prstGeom>
+          <a:solidFill>
+            <a:srgbClr val="FFFFFF">
+              <a:alpha val="88000"/>
+            </a:srgbClr>
+          </a:solidFill>
+          <a:ln w="12700">
+            <a:solidFill>
+              <a:srgbClr val="D6E8F2"/>
+            </a:solidFill>
+            <a:prstDash val="solid"/>
+          </a:ln>
+        </p:spPr>
+      </p:sp>
+      <p:sp>
+        <p:nvSpPr>
+          <p:cNvPr id="14" name="Shape 12"/>
+          <p:cNvSpPr/>
+          <p:nvPr/>
+        </p:nvSpPr>
+        <p:spPr>
+          <a:xfrm>
+            <a:off x="8046720" y="3108960"/>
+            <a:ext cx="2651760" cy="896112"/>
+          </a:xfrm>
+          <a:prstGeom prst="arc">
+            <a:avLst/>
+          </a:prstGeom>
+          <a:noFill/>
+          <a:ln w="25400">
+            <a:solidFill>
+              <a:srgbClr val="0068B7"/>
+            </a:solidFill>
+            <a:prstDash val="solid"/>
+          </a:ln>
+        </p:spPr>
+      </p:sp>
+      <p:sp>
+        <p:nvSpPr>
+          <p:cNvPr id="15" name="Text 13"/>
+          <p:cNvSpPr/>
+          <p:nvPr/>
+        </p:nvSpPr>
+        <p:spPr>
+          <a:xfrm>
+            <a:off x="7909560" y="3099816"/>
+            <a:ext cx="2926080" cy="256032"/>
+          </a:xfrm>
+          <a:prstGeom prst="rect">
+            <a:avLst/>
+          </a:prstGeom>
+          <a:noFill/>
+          <a:ln/>
+        </p:spPr>
+        <p:txBody>
+          <a:bodyPr wrap="square" lIns="0" tIns="0" rIns="0" bIns="0" rtlCol="0" anchor="ctr"/>
+          <a:lstStyle/>
+          <a:p>
+            <a:pPr algn="ctr" indent="0" marL="0">
+              <a:buNone/>
+            </a:pPr>
+            <a:r>
+              <a:rPr lang="en-US" sz="1500" b="1" dirty="0">
+                <a:solidFill>
+                  <a:srgbClr val="003A63"/>
+                </a:solidFill>
+                <a:latin typeface="Aptos" pitchFamily="34" charset="0"/>
+                <a:ea typeface="Aptos" pitchFamily="34" charset="-122"/>
+                <a:cs typeface="Aptos" pitchFamily="34" charset="-120"/>
+              </a:rPr>
+              <a:t>Risk</a:t>
+            </a:r>
+            <a:endParaRPr lang="en-US" sz="1500" dirty="0"/>
+          </a:p>
+        </p:txBody>
+      </p:sp>
+      <p:sp>
+        <p:nvSpPr>
+          <p:cNvPr id="16" name="Shape 14"/>
+          <p:cNvSpPr/>
+          <p:nvPr/>
+        </p:nvSpPr>
+        <p:spPr>
+          <a:xfrm>
+            <a:off x="8366760" y="3639312"/>
+            <a:ext cx="2011680" cy="0"/>
+          </a:xfrm>
+          <a:prstGeom prst="line">
+            <a:avLst/>
+          </a:prstGeom>
+          <a:noFill/>
+          <a:ln w="63500">
+            <a:solidFill>
+              <a:srgbClr val="2F8A28"/>
+            </a:solidFill>
+            <a:prstDash val="solid"/>
+          </a:ln>
+        </p:spPr>
+      </p:sp>
+      <p:sp>
+        <p:nvSpPr>
+          <p:cNvPr id="17" name="Text 15"/>
+          <p:cNvSpPr/>
+          <p:nvPr/>
+        </p:nvSpPr>
+        <p:spPr>
+          <a:xfrm>
+            <a:off x="7909560" y="3849624"/>
+            <a:ext cx="2926080" cy="164592"/>
+          </a:xfrm>
+          <a:prstGeom prst="rect">
+            <a:avLst/>
+          </a:prstGeom>
+          <a:noFill/>
+          <a:ln/>
+        </p:spPr>
+        <p:txBody>
+          <a:bodyPr wrap="square" lIns="0" tIns="0" rIns="0" bIns="0" rtlCol="0" anchor="ctr"/>
+          <a:lstStyle/>
+          <a:p>
+            <a:pPr algn="ctr" indent="0" marL="0">
+              <a:buNone/>
+            </a:pPr>
+            <a:r>
+              <a:rPr lang="en-US" sz="900" dirty="0">
+                <a:solidFill>
+                  <a:srgbClr val="003A63"/>
+                </a:solidFill>
+                <a:latin typeface="Aptos" pitchFamily="34" charset="0"/>
+                <a:ea typeface="Aptos" pitchFamily="34" charset="-122"/>
+                <a:cs typeface="Aptos" pitchFamily="34" charset="-120"/>
+              </a:rPr>
+              <a:t>Human review</a:t>
+            </a:r>
+            <a:endParaRPr lang="en-US" sz="900" dirty="0"/>
+          </a:p>
+        </p:txBody>
+      </p:sp>
+      <p:sp>
+        <p:nvSpPr>
+          <p:cNvPr id="18" name="Shape 16"/>
+          <p:cNvSpPr/>
+          <p:nvPr/>
+        </p:nvSpPr>
+        <p:spPr>
+          <a:xfrm>
+            <a:off x="7635240" y="4498848"/>
+            <a:ext cx="3474720" cy="1143000"/>
+          </a:xfrm>
+          <a:prstGeom prst="roundRect">
+            <a:avLst>
+              <a:gd name="adj" fmla="val 9600"/>
             </a:avLst>
           </a:prstGeom>
           <a:solidFill>
@@ -7284,14 +8054,14 @@
       </p:sp>
       <p:sp>
         <p:nvSpPr>
-          <p:cNvPr id="16" name="Text 14"/>
-          <p:cNvSpPr/>
-          <p:nvPr/>
-        </p:nvSpPr>
-        <p:spPr>
-          <a:xfrm>
-            <a:off x="8074152" y="3666744"/>
-            <a:ext cx="2825496" cy="256032"/>
+          <p:cNvPr id="19" name="Text 17"/>
+          <p:cNvSpPr/>
+          <p:nvPr/>
+        </p:nvSpPr>
+        <p:spPr>
+          <a:xfrm>
+            <a:off x="7799832" y="4645152"/>
+            <a:ext cx="3145536" cy="256032"/>
           </a:xfrm>
           <a:prstGeom prst="rect">
             <a:avLst/>
@@ -7315,7 +8085,7 @@
                 <a:ea typeface="Aptos" pitchFamily="34" charset="-122"/>
                 <a:cs typeface="Aptos" pitchFamily="34" charset="-120"/>
               </a:rPr>
-              <a:t>Use this for</a:t>
+              <a:t>Safeguard to plan</a:t>
             </a:r>
             <a:endParaRPr lang="en-US" sz="1300" dirty="0"/>
           </a:p>
@@ -7323,14 +8093,14 @@
       </p:sp>
       <p:sp>
         <p:nvSpPr>
-          <p:cNvPr id="17" name="Text 15"/>
-          <p:cNvSpPr/>
-          <p:nvPr/>
-        </p:nvSpPr>
-        <p:spPr>
-          <a:xfrm>
-            <a:off x="8074152" y="4023360"/>
-            <a:ext cx="2825496" cy="1097280"/>
+          <p:cNvPr id="20" name="Text 18"/>
+          <p:cNvSpPr/>
+          <p:nvPr/>
+        </p:nvSpPr>
+        <p:spPr>
+          <a:xfrm>
+            <a:off x="7799832" y="5001768"/>
+            <a:ext cx="3145536" cy="502920"/>
           </a:xfrm>
           <a:prstGeom prst="rect">
             <a:avLst/>
@@ -7356,7 +8126,7 @@
                 <a:ea typeface="Aptos" pitchFamily="34" charset="-122"/>
                 <a:cs typeface="Aptos" pitchFamily="34" charset="-120"/>
               </a:rPr>
-              <a:t>Connect the concept to public health decisions, safeguards, documentation, or implementation work.</a:t>
+              <a:t>Identify what could go wrong, who could be affected, what safeguards are needed, and what evidence should be reviewed before use expands.</a:t>
             </a:r>
             <a:endParaRPr lang="en-US" sz="1550" dirty="0"/>
           </a:p>
@@ -7530,8 +8300,8 @@
         </p:nvSpPr>
         <p:spPr>
           <a:xfrm>
-            <a:off x="9966960" y="6537960"/>
-            <a:ext cx="1645920" cy="201168"/>
+            <a:off x="9646920" y="6537960"/>
+            <a:ext cx="1965960" cy="201168"/>
           </a:xfrm>
           <a:prstGeom prst="rect">
             <a:avLst/>
@@ -7555,7 +8325,7 @@
                 <a:ea typeface="Aptos" pitchFamily="34" charset="-122"/>
                 <a:cs typeface="Aptos" pitchFamily="34" charset="-120"/>
               </a:rPr>
-              <a:t>Â© Paula Soper</a:t>
+              <a:t>Copyright Paula Soper</a:t>
             </a:r>
             <a:endParaRPr lang="en-US" sz="800" dirty="0"/>
           </a:p>
@@ -7650,7 +8420,7 @@
         <p:spPr>
           <a:xfrm>
             <a:off x="868680" y="1508760"/>
-            <a:ext cx="6537960" cy="4160520"/>
+            <a:ext cx="6309360" cy="4160520"/>
           </a:xfrm>
           <a:prstGeom prst="rect">
             <a:avLst/>
@@ -7701,12 +8471,12 @@
         </p:nvSpPr>
         <p:spPr>
           <a:xfrm>
-            <a:off x="7909560" y="1417320"/>
-            <a:ext cx="3154680" cy="1828800"/>
+            <a:off x="7635240" y="1325880"/>
+            <a:ext cx="3474720" cy="1325880"/>
           </a:xfrm>
           <a:prstGeom prst="roundRect">
             <a:avLst>
-              <a:gd name="adj" fmla="val 6000"/>
+              <a:gd name="adj" fmla="val 8276"/>
             </a:avLst>
           </a:prstGeom>
           <a:solidFill>
@@ -7728,8 +8498,8 @@
         </p:nvSpPr>
         <p:spPr>
           <a:xfrm>
-            <a:off x="8074152" y="1563624"/>
-            <a:ext cx="2825496" cy="256032"/>
+            <a:off x="7799832" y="1472184"/>
+            <a:ext cx="3145536" cy="256032"/>
           </a:xfrm>
           <a:prstGeom prst="rect">
             <a:avLst/>
@@ -7753,7 +8523,7 @@
                 <a:ea typeface="Aptos" pitchFamily="34" charset="-122"/>
                 <a:cs typeface="Aptos" pitchFamily="34" charset="-120"/>
               </a:rPr>
-              <a:t>Key idea</a:t>
+              <a:t>Risk check</a:t>
             </a:r>
             <a:endParaRPr lang="en-US" sz="1300" dirty="0"/>
           </a:p>
@@ -7767,8 +8537,8 @@
         </p:nvSpPr>
         <p:spPr>
           <a:xfrm>
-            <a:off x="8074152" y="1920240"/>
-            <a:ext cx="2825496" cy="1188720"/>
+            <a:off x="7799832" y="1828800"/>
+            <a:ext cx="3145536" cy="685800"/>
           </a:xfrm>
           <a:prstGeom prst="rect">
             <a:avLst/>
@@ -7808,12 +8578,165 @@
         </p:nvSpPr>
         <p:spPr>
           <a:xfrm>
-            <a:off x="7909560" y="3520440"/>
-            <a:ext cx="3154680" cy="1737360"/>
+            <a:off x="7635240" y="2788920"/>
+            <a:ext cx="3474720" cy="1536192"/>
           </a:xfrm>
           <a:prstGeom prst="roundRect">
             <a:avLst>
-              <a:gd name="adj" fmla="val 6316"/>
+              <a:gd name="adj" fmla="val 7143"/>
+            </a:avLst>
+          </a:prstGeom>
+          <a:solidFill>
+            <a:srgbClr val="FFFFFF">
+              <a:alpha val="88000"/>
+            </a:srgbClr>
+          </a:solidFill>
+          <a:ln w="12700">
+            <a:solidFill>
+              <a:srgbClr val="D6E8F2"/>
+            </a:solidFill>
+            <a:prstDash val="solid"/>
+          </a:ln>
+        </p:spPr>
+      </p:sp>
+      <p:sp>
+        <p:nvSpPr>
+          <p:cNvPr id="14" name="Shape 12"/>
+          <p:cNvSpPr/>
+          <p:nvPr/>
+        </p:nvSpPr>
+        <p:spPr>
+          <a:xfrm>
+            <a:off x="8046720" y="3108960"/>
+            <a:ext cx="2651760" cy="896112"/>
+          </a:xfrm>
+          <a:prstGeom prst="arc">
+            <a:avLst/>
+          </a:prstGeom>
+          <a:noFill/>
+          <a:ln w="25400">
+            <a:solidFill>
+              <a:srgbClr val="0068B7"/>
+            </a:solidFill>
+            <a:prstDash val="solid"/>
+          </a:ln>
+        </p:spPr>
+      </p:sp>
+      <p:sp>
+        <p:nvSpPr>
+          <p:cNvPr id="15" name="Text 13"/>
+          <p:cNvSpPr/>
+          <p:nvPr/>
+        </p:nvSpPr>
+        <p:spPr>
+          <a:xfrm>
+            <a:off x="7909560" y="3099816"/>
+            <a:ext cx="2926080" cy="256032"/>
+          </a:xfrm>
+          <a:prstGeom prst="rect">
+            <a:avLst/>
+          </a:prstGeom>
+          <a:noFill/>
+          <a:ln/>
+        </p:spPr>
+        <p:txBody>
+          <a:bodyPr wrap="square" lIns="0" tIns="0" rIns="0" bIns="0" rtlCol="0" anchor="ctr"/>
+          <a:lstStyle/>
+          <a:p>
+            <a:pPr algn="ctr" indent="0" marL="0">
+              <a:buNone/>
+            </a:pPr>
+            <a:r>
+              <a:rPr lang="en-US" sz="1500" b="1" dirty="0">
+                <a:solidFill>
+                  <a:srgbClr val="003A63"/>
+                </a:solidFill>
+                <a:latin typeface="Aptos" pitchFamily="34" charset="0"/>
+                <a:ea typeface="Aptos" pitchFamily="34" charset="-122"/>
+                <a:cs typeface="Aptos" pitchFamily="34" charset="-120"/>
+              </a:rPr>
+              <a:t>Risk</a:t>
+            </a:r>
+            <a:endParaRPr lang="en-US" sz="1500" dirty="0"/>
+          </a:p>
+        </p:txBody>
+      </p:sp>
+      <p:sp>
+        <p:nvSpPr>
+          <p:cNvPr id="16" name="Shape 14"/>
+          <p:cNvSpPr/>
+          <p:nvPr/>
+        </p:nvSpPr>
+        <p:spPr>
+          <a:xfrm>
+            <a:off x="8366760" y="3639312"/>
+            <a:ext cx="2011680" cy="0"/>
+          </a:xfrm>
+          <a:prstGeom prst="line">
+            <a:avLst/>
+          </a:prstGeom>
+          <a:noFill/>
+          <a:ln w="63500">
+            <a:solidFill>
+              <a:srgbClr val="2F8A28"/>
+            </a:solidFill>
+            <a:prstDash val="solid"/>
+          </a:ln>
+        </p:spPr>
+      </p:sp>
+      <p:sp>
+        <p:nvSpPr>
+          <p:cNvPr id="17" name="Text 15"/>
+          <p:cNvSpPr/>
+          <p:nvPr/>
+        </p:nvSpPr>
+        <p:spPr>
+          <a:xfrm>
+            <a:off x="7909560" y="3849624"/>
+            <a:ext cx="2926080" cy="164592"/>
+          </a:xfrm>
+          <a:prstGeom prst="rect">
+            <a:avLst/>
+          </a:prstGeom>
+          <a:noFill/>
+          <a:ln/>
+        </p:spPr>
+        <p:txBody>
+          <a:bodyPr wrap="square" lIns="0" tIns="0" rIns="0" bIns="0" rtlCol="0" anchor="ctr"/>
+          <a:lstStyle/>
+          <a:p>
+            <a:pPr algn="ctr" indent="0" marL="0">
+              <a:buNone/>
+            </a:pPr>
+            <a:r>
+              <a:rPr lang="en-US" sz="900" dirty="0">
+                <a:solidFill>
+                  <a:srgbClr val="003A63"/>
+                </a:solidFill>
+                <a:latin typeface="Aptos" pitchFamily="34" charset="0"/>
+                <a:ea typeface="Aptos" pitchFamily="34" charset="-122"/>
+                <a:cs typeface="Aptos" pitchFamily="34" charset="-120"/>
+              </a:rPr>
+              <a:t>Human review</a:t>
+            </a:r>
+            <a:endParaRPr lang="en-US" sz="900" dirty="0"/>
+          </a:p>
+        </p:txBody>
+      </p:sp>
+      <p:sp>
+        <p:nvSpPr>
+          <p:cNvPr id="18" name="Shape 16"/>
+          <p:cNvSpPr/>
+          <p:nvPr/>
+        </p:nvSpPr>
+        <p:spPr>
+          <a:xfrm>
+            <a:off x="7635240" y="4498848"/>
+            <a:ext cx="3474720" cy="1143000"/>
+          </a:xfrm>
+          <a:prstGeom prst="roundRect">
+            <a:avLst>
+              <a:gd name="adj" fmla="val 9600"/>
             </a:avLst>
           </a:prstGeom>
           <a:solidFill>
@@ -7829,14 +8752,14 @@
       </p:sp>
       <p:sp>
         <p:nvSpPr>
-          <p:cNvPr id="14" name="Text 12"/>
-          <p:cNvSpPr/>
-          <p:nvPr/>
-        </p:nvSpPr>
-        <p:spPr>
-          <a:xfrm>
-            <a:off x="8074152" y="3666744"/>
-            <a:ext cx="2825496" cy="256032"/>
+          <p:cNvPr id="19" name="Text 17"/>
+          <p:cNvSpPr/>
+          <p:nvPr/>
+        </p:nvSpPr>
+        <p:spPr>
+          <a:xfrm>
+            <a:off x="7799832" y="4645152"/>
+            <a:ext cx="3145536" cy="256032"/>
           </a:xfrm>
           <a:prstGeom prst="rect">
             <a:avLst/>
@@ -7860,7 +8783,7 @@
                 <a:ea typeface="Aptos" pitchFamily="34" charset="-122"/>
                 <a:cs typeface="Aptos" pitchFamily="34" charset="-120"/>
               </a:rPr>
-              <a:t>Use this for</a:t>
+              <a:t>Safeguard to plan</a:t>
             </a:r>
             <a:endParaRPr lang="en-US" sz="1300" dirty="0"/>
           </a:p>
@@ -7868,14 +8791,14 @@
       </p:sp>
       <p:sp>
         <p:nvSpPr>
-          <p:cNvPr id="15" name="Text 13"/>
-          <p:cNvSpPr/>
-          <p:nvPr/>
-        </p:nvSpPr>
-        <p:spPr>
-          <a:xfrm>
-            <a:off x="8074152" y="4023360"/>
-            <a:ext cx="2825496" cy="1097280"/>
+          <p:cNvPr id="20" name="Text 18"/>
+          <p:cNvSpPr/>
+          <p:nvPr/>
+        </p:nvSpPr>
+        <p:spPr>
+          <a:xfrm>
+            <a:off x="7799832" y="5001768"/>
+            <a:ext cx="3145536" cy="502920"/>
           </a:xfrm>
           <a:prstGeom prst="rect">
             <a:avLst/>
@@ -7901,7 +8824,7 @@
                 <a:ea typeface="Aptos" pitchFamily="34" charset="-122"/>
                 <a:cs typeface="Aptos" pitchFamily="34" charset="-120"/>
               </a:rPr>
-              <a:t>Connect the concept to public health decisions, safeguards, documentation, or implementation work.</a:t>
+              <a:t>Identify what could go wrong, who could be affected, what safeguards are needed, and what evidence should be reviewed before use expands.</a:t>
             </a:r>
             <a:endParaRPr lang="en-US" sz="1550" dirty="0"/>
           </a:p>
@@ -8075,8 +8998,8 @@
         </p:nvSpPr>
         <p:spPr>
           <a:xfrm>
-            <a:off x="9966960" y="6537960"/>
-            <a:ext cx="1645920" cy="201168"/>
+            <a:off x="9646920" y="6537960"/>
+            <a:ext cx="1965960" cy="201168"/>
           </a:xfrm>
           <a:prstGeom prst="rect">
             <a:avLst/>
@@ -8100,7 +9023,7 @@
                 <a:ea typeface="Aptos" pitchFamily="34" charset="-122"/>
                 <a:cs typeface="Aptos" pitchFamily="34" charset="-120"/>
               </a:rPr>
-              <a:t>Â© Paula Soper</a:t>
+              <a:t>Copyright Paula Soper</a:t>
             </a:r>
             <a:endParaRPr lang="en-US" sz="800" dirty="0"/>
           </a:p>
@@ -8147,77 +9070,13 @@
       </p:sp>
       <p:sp>
         <p:nvSpPr>
-          <p:cNvPr id="8" name="Shape 6"/>
+          <p:cNvPr id="8" name="Text 6"/>
           <p:cNvSpPr/>
           <p:nvPr/>
         </p:nvSpPr>
         <p:spPr>
           <a:xfrm>
             <a:off x="640080" y="658368"/>
-            <a:ext cx="420624" cy="420624"/>
-          </a:xfrm>
-          <a:prstGeom prst="ellipse">
-            <a:avLst/>
-          </a:prstGeom>
-          <a:solidFill>
-            <a:srgbClr val="0068B7"/>
-          </a:solidFill>
-          <a:ln w="12700">
-            <a:solidFill>
-              <a:srgbClr val="0068B7"/>
-            </a:solidFill>
-            <a:prstDash val="solid"/>
-          </a:ln>
-        </p:spPr>
-      </p:sp>
-      <p:sp>
-        <p:nvSpPr>
-          <p:cNvPr id="9" name="Text 7"/>
-          <p:cNvSpPr/>
-          <p:nvPr/>
-        </p:nvSpPr>
-        <p:spPr>
-          <a:xfrm>
-            <a:off x="640080" y="731520"/>
-            <a:ext cx="420624" cy="164592"/>
-          </a:xfrm>
-          <a:prstGeom prst="rect">
-            <a:avLst/>
-          </a:prstGeom>
-          <a:noFill/>
-          <a:ln/>
-        </p:spPr>
-        <p:txBody>
-          <a:bodyPr wrap="square" lIns="0" tIns="0" rIns="0" bIns="0" rtlCol="0" anchor="ctr"/>
-          <a:lstStyle/>
-          <a:p>
-            <a:pPr algn="ctr" indent="0" marL="0">
-              <a:buNone/>
-            </a:pPr>
-            <a:r>
-              <a:rPr lang="en-US" sz="1100" b="1" dirty="0">
-                <a:solidFill>
-                  <a:srgbClr val="FFFFFF"/>
-                </a:solidFill>
-                <a:latin typeface="Aptos" pitchFamily="34" charset="0"/>
-                <a:ea typeface="Aptos" pitchFamily="34" charset="-122"/>
-                <a:cs typeface="Aptos" pitchFamily="34" charset="-120"/>
-              </a:rPr>
-              <a:t>10</a:t>
-            </a:r>
-            <a:endParaRPr lang="en-US" sz="1100" dirty="0"/>
-          </a:p>
-        </p:txBody>
-      </p:sp>
-      <p:sp>
-        <p:nvSpPr>
-          <p:cNvPr id="10" name="Text 8"/>
-          <p:cNvSpPr/>
-          <p:nvPr/>
-        </p:nvSpPr>
-        <p:spPr>
-          <a:xfrm>
-            <a:off x="640080" y="621792"/>
             <a:ext cx="10881360" cy="713232"/>
           </a:xfrm>
           <a:prstGeom prst="rect">
@@ -8252,14 +9111,14 @@
       </p:sp>
       <p:sp>
         <p:nvSpPr>
-          <p:cNvPr id="11" name="Text 9"/>
+          <p:cNvPr id="9" name="Text 7"/>
           <p:cNvSpPr/>
           <p:nvPr/>
         </p:nvSpPr>
         <p:spPr>
           <a:xfrm>
             <a:off x="868680" y="1508760"/>
-            <a:ext cx="6537960" cy="4160520"/>
+            <a:ext cx="6309360" cy="4160520"/>
           </a:xfrm>
           <a:prstGeom prst="rect">
             <a:avLst/>
@@ -8318,18 +9177,18 @@
       </p:sp>
       <p:sp>
         <p:nvSpPr>
-          <p:cNvPr id="12" name="Shape 10"/>
-          <p:cNvSpPr/>
-          <p:nvPr/>
-        </p:nvSpPr>
-        <p:spPr>
-          <a:xfrm>
-            <a:off x="7909560" y="1417320"/>
-            <a:ext cx="3154680" cy="1828800"/>
+          <p:cNvPr id="10" name="Shape 8"/>
+          <p:cNvSpPr/>
+          <p:nvPr/>
+        </p:nvSpPr>
+        <p:spPr>
+          <a:xfrm>
+            <a:off x="7635240" y="1325880"/>
+            <a:ext cx="3474720" cy="1325880"/>
           </a:xfrm>
           <a:prstGeom prst="roundRect">
             <a:avLst>
-              <a:gd name="adj" fmla="val 6000"/>
+              <a:gd name="adj" fmla="val 8276"/>
             </a:avLst>
           </a:prstGeom>
           <a:solidFill>
@@ -8345,14 +9204,14 @@
       </p:sp>
       <p:sp>
         <p:nvSpPr>
-          <p:cNvPr id="13" name="Text 11"/>
-          <p:cNvSpPr/>
-          <p:nvPr/>
-        </p:nvSpPr>
-        <p:spPr>
-          <a:xfrm>
-            <a:off x="8074152" y="1563624"/>
-            <a:ext cx="2825496" cy="256032"/>
+          <p:cNvPr id="11" name="Text 9"/>
+          <p:cNvSpPr/>
+          <p:nvPr/>
+        </p:nvSpPr>
+        <p:spPr>
+          <a:xfrm>
+            <a:off x="7799832" y="1472184"/>
+            <a:ext cx="3145536" cy="256032"/>
           </a:xfrm>
           <a:prstGeom prst="rect">
             <a:avLst/>
@@ -8376,7 +9235,7 @@
                 <a:ea typeface="Aptos" pitchFamily="34" charset="-122"/>
                 <a:cs typeface="Aptos" pitchFamily="34" charset="-120"/>
               </a:rPr>
-              <a:t>Key idea</a:t>
+              <a:t>Risk check</a:t>
             </a:r>
             <a:endParaRPr lang="en-US" sz="1300" dirty="0"/>
           </a:p>
@@ -8384,14 +9243,14 @@
       </p:sp>
       <p:sp>
         <p:nvSpPr>
-          <p:cNvPr id="14" name="Text 12"/>
-          <p:cNvSpPr/>
-          <p:nvPr/>
-        </p:nvSpPr>
-        <p:spPr>
-          <a:xfrm>
-            <a:off x="8074152" y="1920240"/>
-            <a:ext cx="2825496" cy="1188720"/>
+          <p:cNvPr id="12" name="Text 10"/>
+          <p:cNvSpPr/>
+          <p:nvPr/>
+        </p:nvSpPr>
+        <p:spPr>
+          <a:xfrm>
+            <a:off x="7799832" y="1828800"/>
+            <a:ext cx="3145536" cy="685800"/>
           </a:xfrm>
           <a:prstGeom prst="rect">
             <a:avLst/>
@@ -8425,18 +9284,171 @@
       </p:sp>
       <p:sp>
         <p:nvSpPr>
-          <p:cNvPr id="15" name="Shape 13"/>
-          <p:cNvSpPr/>
-          <p:nvPr/>
-        </p:nvSpPr>
-        <p:spPr>
-          <a:xfrm>
-            <a:off x="7909560" y="3520440"/>
-            <a:ext cx="3154680" cy="1737360"/>
+          <p:cNvPr id="13" name="Shape 11"/>
+          <p:cNvSpPr/>
+          <p:nvPr/>
+        </p:nvSpPr>
+        <p:spPr>
+          <a:xfrm>
+            <a:off x="7635240" y="2788920"/>
+            <a:ext cx="3474720" cy="1536192"/>
           </a:xfrm>
           <a:prstGeom prst="roundRect">
             <a:avLst>
-              <a:gd name="adj" fmla="val 6316"/>
+              <a:gd name="adj" fmla="val 7143"/>
+            </a:avLst>
+          </a:prstGeom>
+          <a:solidFill>
+            <a:srgbClr val="FFFFFF">
+              <a:alpha val="88000"/>
+            </a:srgbClr>
+          </a:solidFill>
+          <a:ln w="12700">
+            <a:solidFill>
+              <a:srgbClr val="D6E8F2"/>
+            </a:solidFill>
+            <a:prstDash val="solid"/>
+          </a:ln>
+        </p:spPr>
+      </p:sp>
+      <p:sp>
+        <p:nvSpPr>
+          <p:cNvPr id="14" name="Shape 12"/>
+          <p:cNvSpPr/>
+          <p:nvPr/>
+        </p:nvSpPr>
+        <p:spPr>
+          <a:xfrm>
+            <a:off x="8046720" y="3108960"/>
+            <a:ext cx="2651760" cy="896112"/>
+          </a:xfrm>
+          <a:prstGeom prst="arc">
+            <a:avLst/>
+          </a:prstGeom>
+          <a:noFill/>
+          <a:ln w="25400">
+            <a:solidFill>
+              <a:srgbClr val="0068B7"/>
+            </a:solidFill>
+            <a:prstDash val="solid"/>
+          </a:ln>
+        </p:spPr>
+      </p:sp>
+      <p:sp>
+        <p:nvSpPr>
+          <p:cNvPr id="15" name="Text 13"/>
+          <p:cNvSpPr/>
+          <p:nvPr/>
+        </p:nvSpPr>
+        <p:spPr>
+          <a:xfrm>
+            <a:off x="7909560" y="3099816"/>
+            <a:ext cx="2926080" cy="256032"/>
+          </a:xfrm>
+          <a:prstGeom prst="rect">
+            <a:avLst/>
+          </a:prstGeom>
+          <a:noFill/>
+          <a:ln/>
+        </p:spPr>
+        <p:txBody>
+          <a:bodyPr wrap="square" lIns="0" tIns="0" rIns="0" bIns="0" rtlCol="0" anchor="ctr"/>
+          <a:lstStyle/>
+          <a:p>
+            <a:pPr algn="ctr" indent="0" marL="0">
+              <a:buNone/>
+            </a:pPr>
+            <a:r>
+              <a:rPr lang="en-US" sz="1500" b="1" dirty="0">
+                <a:solidFill>
+                  <a:srgbClr val="003A63"/>
+                </a:solidFill>
+                <a:latin typeface="Aptos" pitchFamily="34" charset="0"/>
+                <a:ea typeface="Aptos" pitchFamily="34" charset="-122"/>
+                <a:cs typeface="Aptos" pitchFamily="34" charset="-120"/>
+              </a:rPr>
+              <a:t>Risk</a:t>
+            </a:r>
+            <a:endParaRPr lang="en-US" sz="1500" dirty="0"/>
+          </a:p>
+        </p:txBody>
+      </p:sp>
+      <p:sp>
+        <p:nvSpPr>
+          <p:cNvPr id="16" name="Shape 14"/>
+          <p:cNvSpPr/>
+          <p:nvPr/>
+        </p:nvSpPr>
+        <p:spPr>
+          <a:xfrm>
+            <a:off x="8366760" y="3639312"/>
+            <a:ext cx="2011680" cy="0"/>
+          </a:xfrm>
+          <a:prstGeom prst="line">
+            <a:avLst/>
+          </a:prstGeom>
+          <a:noFill/>
+          <a:ln w="63500">
+            <a:solidFill>
+              <a:srgbClr val="2F8A28"/>
+            </a:solidFill>
+            <a:prstDash val="solid"/>
+          </a:ln>
+        </p:spPr>
+      </p:sp>
+      <p:sp>
+        <p:nvSpPr>
+          <p:cNvPr id="17" name="Text 15"/>
+          <p:cNvSpPr/>
+          <p:nvPr/>
+        </p:nvSpPr>
+        <p:spPr>
+          <a:xfrm>
+            <a:off x="7909560" y="3849624"/>
+            <a:ext cx="2926080" cy="164592"/>
+          </a:xfrm>
+          <a:prstGeom prst="rect">
+            <a:avLst/>
+          </a:prstGeom>
+          <a:noFill/>
+          <a:ln/>
+        </p:spPr>
+        <p:txBody>
+          <a:bodyPr wrap="square" lIns="0" tIns="0" rIns="0" bIns="0" rtlCol="0" anchor="ctr"/>
+          <a:lstStyle/>
+          <a:p>
+            <a:pPr algn="ctr" indent="0" marL="0">
+              <a:buNone/>
+            </a:pPr>
+            <a:r>
+              <a:rPr lang="en-US" sz="900" dirty="0">
+                <a:solidFill>
+                  <a:srgbClr val="003A63"/>
+                </a:solidFill>
+                <a:latin typeface="Aptos" pitchFamily="34" charset="0"/>
+                <a:ea typeface="Aptos" pitchFamily="34" charset="-122"/>
+                <a:cs typeface="Aptos" pitchFamily="34" charset="-120"/>
+              </a:rPr>
+              <a:t>Human review</a:t>
+            </a:r>
+            <a:endParaRPr lang="en-US" sz="900" dirty="0"/>
+          </a:p>
+        </p:txBody>
+      </p:sp>
+      <p:sp>
+        <p:nvSpPr>
+          <p:cNvPr id="18" name="Shape 16"/>
+          <p:cNvSpPr/>
+          <p:nvPr/>
+        </p:nvSpPr>
+        <p:spPr>
+          <a:xfrm>
+            <a:off x="7635240" y="4498848"/>
+            <a:ext cx="3474720" cy="1143000"/>
+          </a:xfrm>
+          <a:prstGeom prst="roundRect">
+            <a:avLst>
+              <a:gd name="adj" fmla="val 9600"/>
             </a:avLst>
           </a:prstGeom>
           <a:solidFill>
@@ -8452,14 +9464,14 @@
       </p:sp>
       <p:sp>
         <p:nvSpPr>
-          <p:cNvPr id="16" name="Text 14"/>
-          <p:cNvSpPr/>
-          <p:nvPr/>
-        </p:nvSpPr>
-        <p:spPr>
-          <a:xfrm>
-            <a:off x="8074152" y="3666744"/>
-            <a:ext cx="2825496" cy="256032"/>
+          <p:cNvPr id="19" name="Text 17"/>
+          <p:cNvSpPr/>
+          <p:nvPr/>
+        </p:nvSpPr>
+        <p:spPr>
+          <a:xfrm>
+            <a:off x="7799832" y="4645152"/>
+            <a:ext cx="3145536" cy="256032"/>
           </a:xfrm>
           <a:prstGeom prst="rect">
             <a:avLst/>
@@ -8483,7 +9495,7 @@
                 <a:ea typeface="Aptos" pitchFamily="34" charset="-122"/>
                 <a:cs typeface="Aptos" pitchFamily="34" charset="-120"/>
               </a:rPr>
-              <a:t>Use this for</a:t>
+              <a:t>Safeguard to plan</a:t>
             </a:r>
             <a:endParaRPr lang="en-US" sz="1300" dirty="0"/>
           </a:p>
@@ -8491,14 +9503,14 @@
       </p:sp>
       <p:sp>
         <p:nvSpPr>
-          <p:cNvPr id="17" name="Text 15"/>
-          <p:cNvSpPr/>
-          <p:nvPr/>
-        </p:nvSpPr>
-        <p:spPr>
-          <a:xfrm>
-            <a:off x="8074152" y="4023360"/>
-            <a:ext cx="2825496" cy="1097280"/>
+          <p:cNvPr id="20" name="Text 18"/>
+          <p:cNvSpPr/>
+          <p:nvPr/>
+        </p:nvSpPr>
+        <p:spPr>
+          <a:xfrm>
+            <a:off x="7799832" y="5001768"/>
+            <a:ext cx="3145536" cy="502920"/>
           </a:xfrm>
           <a:prstGeom prst="rect">
             <a:avLst/>
@@ -8524,7 +9536,7 @@
                 <a:ea typeface="Aptos" pitchFamily="34" charset="-122"/>
                 <a:cs typeface="Aptos" pitchFamily="34" charset="-120"/>
               </a:rPr>
-              <a:t>Connect the concept to public health decisions, safeguards, documentation, or implementation work.</a:t>
+              <a:t>Use the assignment to test whether you can explain the concept, apply it to a realistic public health situation, and identify what would need review before the work moves forward.</a:t>
             </a:r>
             <a:endParaRPr lang="en-US" sz="1550" dirty="0"/>
           </a:p>
@@ -8698,8 +9710,8 @@
         </p:nvSpPr>
         <p:spPr>
           <a:xfrm>
-            <a:off x="9966960" y="6537960"/>
-            <a:ext cx="1645920" cy="201168"/>
+            <a:off x="9646920" y="6537960"/>
+            <a:ext cx="1965960" cy="201168"/>
           </a:xfrm>
           <a:prstGeom prst="rect">
             <a:avLst/>
@@ -8723,7 +9735,7 @@
                 <a:ea typeface="Aptos" pitchFamily="34" charset="-122"/>
                 <a:cs typeface="Aptos" pitchFamily="34" charset="-120"/>
               </a:rPr>
-              <a:t>Â© Paula Soper</a:t>
+              <a:t>Copyright Paula Soper</a:t>
             </a:r>
             <a:endParaRPr lang="en-US" sz="800" dirty="0"/>
           </a:p>
@@ -8770,77 +9782,13 @@
       </p:sp>
       <p:sp>
         <p:nvSpPr>
-          <p:cNvPr id="8" name="Shape 6"/>
+          <p:cNvPr id="8" name="Text 6"/>
           <p:cNvSpPr/>
           <p:nvPr/>
         </p:nvSpPr>
         <p:spPr>
           <a:xfrm>
             <a:off x="640080" y="658368"/>
-            <a:ext cx="420624" cy="420624"/>
-          </a:xfrm>
-          <a:prstGeom prst="ellipse">
-            <a:avLst/>
-          </a:prstGeom>
-          <a:solidFill>
-            <a:srgbClr val="0068B7"/>
-          </a:solidFill>
-          <a:ln w="12700">
-            <a:solidFill>
-              <a:srgbClr val="0068B7"/>
-            </a:solidFill>
-            <a:prstDash val="solid"/>
-          </a:ln>
-        </p:spPr>
-      </p:sp>
-      <p:sp>
-        <p:nvSpPr>
-          <p:cNvPr id="9" name="Text 7"/>
-          <p:cNvSpPr/>
-          <p:nvPr/>
-        </p:nvSpPr>
-        <p:spPr>
-          <a:xfrm>
-            <a:off x="640080" y="731520"/>
-            <a:ext cx="420624" cy="164592"/>
-          </a:xfrm>
-          <a:prstGeom prst="rect">
-            <a:avLst/>
-          </a:prstGeom>
-          <a:noFill/>
-          <a:ln/>
-        </p:spPr>
-        <p:txBody>
-          <a:bodyPr wrap="square" lIns="0" tIns="0" rIns="0" bIns="0" rtlCol="0" anchor="ctr"/>
-          <a:lstStyle/>
-          <a:p>
-            <a:pPr algn="ctr" indent="0" marL="0">
-              <a:buNone/>
-            </a:pPr>
-            <a:r>
-              <a:rPr lang="en-US" sz="1100" b="1" dirty="0">
-                <a:solidFill>
-                  <a:srgbClr val="FFFFFF"/>
-                </a:solidFill>
-                <a:latin typeface="Aptos" pitchFamily="34" charset="0"/>
-                <a:ea typeface="Aptos" pitchFamily="34" charset="-122"/>
-                <a:cs typeface="Aptos" pitchFamily="34" charset="-120"/>
-              </a:rPr>
-              <a:t>11</a:t>
-            </a:r>
-            <a:endParaRPr lang="en-US" sz="1100" dirty="0"/>
-          </a:p>
-        </p:txBody>
-      </p:sp>
-      <p:sp>
-        <p:nvSpPr>
-          <p:cNvPr id="10" name="Text 8"/>
-          <p:cNvSpPr/>
-          <p:nvPr/>
-        </p:nvSpPr>
-        <p:spPr>
-          <a:xfrm>
-            <a:off x="640080" y="621792"/>
             <a:ext cx="10881360" cy="713232"/>
           </a:xfrm>
           <a:prstGeom prst="rect">
@@ -8875,14 +9823,14 @@
       </p:sp>
       <p:sp>
         <p:nvSpPr>
-          <p:cNvPr id="11" name="Text 9"/>
+          <p:cNvPr id="9" name="Text 7"/>
           <p:cNvSpPr/>
           <p:nvPr/>
         </p:nvSpPr>
         <p:spPr>
           <a:xfrm>
             <a:off x="868680" y="1508760"/>
-            <a:ext cx="6537960" cy="4160520"/>
+            <a:ext cx="6309360" cy="4160520"/>
           </a:xfrm>
           <a:prstGeom prst="rect">
             <a:avLst/>
@@ -8941,18 +9889,18 @@
       </p:sp>
       <p:sp>
         <p:nvSpPr>
-          <p:cNvPr id="12" name="Shape 10"/>
-          <p:cNvSpPr/>
-          <p:nvPr/>
-        </p:nvSpPr>
-        <p:spPr>
-          <a:xfrm>
-            <a:off x="7909560" y="1417320"/>
-            <a:ext cx="3154680" cy="1828800"/>
+          <p:cNvPr id="10" name="Shape 8"/>
+          <p:cNvSpPr/>
+          <p:nvPr/>
+        </p:nvSpPr>
+        <p:spPr>
+          <a:xfrm>
+            <a:off x="7635240" y="1325880"/>
+            <a:ext cx="3474720" cy="1325880"/>
           </a:xfrm>
           <a:prstGeom prst="roundRect">
             <a:avLst>
-              <a:gd name="adj" fmla="val 6000"/>
+              <a:gd name="adj" fmla="val 8276"/>
             </a:avLst>
           </a:prstGeom>
           <a:solidFill>
@@ -8968,14 +9916,14 @@
       </p:sp>
       <p:sp>
         <p:nvSpPr>
-          <p:cNvPr id="13" name="Text 11"/>
-          <p:cNvSpPr/>
-          <p:nvPr/>
-        </p:nvSpPr>
-        <p:spPr>
-          <a:xfrm>
-            <a:off x="8074152" y="1563624"/>
-            <a:ext cx="2825496" cy="256032"/>
+          <p:cNvPr id="11" name="Text 9"/>
+          <p:cNvSpPr/>
+          <p:nvPr/>
+        </p:nvSpPr>
+        <p:spPr>
+          <a:xfrm>
+            <a:off x="7799832" y="1472184"/>
+            <a:ext cx="3145536" cy="256032"/>
           </a:xfrm>
           <a:prstGeom prst="rect">
             <a:avLst/>
@@ -8999,7 +9947,7 @@
                 <a:ea typeface="Aptos" pitchFamily="34" charset="-122"/>
                 <a:cs typeface="Aptos" pitchFamily="34" charset="-120"/>
               </a:rPr>
-              <a:t>Key idea</a:t>
+              <a:t>Risk check</a:t>
             </a:r>
             <a:endParaRPr lang="en-US" sz="1300" dirty="0"/>
           </a:p>
@@ -9007,14 +9955,14 @@
       </p:sp>
       <p:sp>
         <p:nvSpPr>
-          <p:cNvPr id="14" name="Text 12"/>
-          <p:cNvSpPr/>
-          <p:nvPr/>
-        </p:nvSpPr>
-        <p:spPr>
-          <a:xfrm>
-            <a:off x="8074152" y="1920240"/>
-            <a:ext cx="2825496" cy="1188720"/>
+          <p:cNvPr id="12" name="Text 10"/>
+          <p:cNvSpPr/>
+          <p:nvPr/>
+        </p:nvSpPr>
+        <p:spPr>
+          <a:xfrm>
+            <a:off x="7799832" y="1828800"/>
+            <a:ext cx="3145536" cy="685800"/>
           </a:xfrm>
           <a:prstGeom prst="rect">
             <a:avLst/>
@@ -9048,18 +9996,171 @@
       </p:sp>
       <p:sp>
         <p:nvSpPr>
-          <p:cNvPr id="15" name="Shape 13"/>
-          <p:cNvSpPr/>
-          <p:nvPr/>
-        </p:nvSpPr>
-        <p:spPr>
-          <a:xfrm>
-            <a:off x="7909560" y="3520440"/>
-            <a:ext cx="3154680" cy="1737360"/>
+          <p:cNvPr id="13" name="Shape 11"/>
+          <p:cNvSpPr/>
+          <p:nvPr/>
+        </p:nvSpPr>
+        <p:spPr>
+          <a:xfrm>
+            <a:off x="7635240" y="2788920"/>
+            <a:ext cx="3474720" cy="1536192"/>
           </a:xfrm>
           <a:prstGeom prst="roundRect">
             <a:avLst>
-              <a:gd name="adj" fmla="val 6316"/>
+              <a:gd name="adj" fmla="val 7143"/>
+            </a:avLst>
+          </a:prstGeom>
+          <a:solidFill>
+            <a:srgbClr val="FFFFFF">
+              <a:alpha val="88000"/>
+            </a:srgbClr>
+          </a:solidFill>
+          <a:ln w="12700">
+            <a:solidFill>
+              <a:srgbClr val="D6E8F2"/>
+            </a:solidFill>
+            <a:prstDash val="solid"/>
+          </a:ln>
+        </p:spPr>
+      </p:sp>
+      <p:sp>
+        <p:nvSpPr>
+          <p:cNvPr id="14" name="Shape 12"/>
+          <p:cNvSpPr/>
+          <p:nvPr/>
+        </p:nvSpPr>
+        <p:spPr>
+          <a:xfrm>
+            <a:off x="8046720" y="3108960"/>
+            <a:ext cx="2651760" cy="896112"/>
+          </a:xfrm>
+          <a:prstGeom prst="arc">
+            <a:avLst/>
+          </a:prstGeom>
+          <a:noFill/>
+          <a:ln w="25400">
+            <a:solidFill>
+              <a:srgbClr val="0068B7"/>
+            </a:solidFill>
+            <a:prstDash val="solid"/>
+          </a:ln>
+        </p:spPr>
+      </p:sp>
+      <p:sp>
+        <p:nvSpPr>
+          <p:cNvPr id="15" name="Text 13"/>
+          <p:cNvSpPr/>
+          <p:nvPr/>
+        </p:nvSpPr>
+        <p:spPr>
+          <a:xfrm>
+            <a:off x="7909560" y="3099816"/>
+            <a:ext cx="2926080" cy="256032"/>
+          </a:xfrm>
+          <a:prstGeom prst="rect">
+            <a:avLst/>
+          </a:prstGeom>
+          <a:noFill/>
+          <a:ln/>
+        </p:spPr>
+        <p:txBody>
+          <a:bodyPr wrap="square" lIns="0" tIns="0" rIns="0" bIns="0" rtlCol="0" anchor="ctr"/>
+          <a:lstStyle/>
+          <a:p>
+            <a:pPr algn="ctr" indent="0" marL="0">
+              <a:buNone/>
+            </a:pPr>
+            <a:r>
+              <a:rPr lang="en-US" sz="1500" b="1" dirty="0">
+                <a:solidFill>
+                  <a:srgbClr val="003A63"/>
+                </a:solidFill>
+                <a:latin typeface="Aptos" pitchFamily="34" charset="0"/>
+                <a:ea typeface="Aptos" pitchFamily="34" charset="-122"/>
+                <a:cs typeface="Aptos" pitchFamily="34" charset="-120"/>
+              </a:rPr>
+              <a:t>Risk</a:t>
+            </a:r>
+            <a:endParaRPr lang="en-US" sz="1500" dirty="0"/>
+          </a:p>
+        </p:txBody>
+      </p:sp>
+      <p:sp>
+        <p:nvSpPr>
+          <p:cNvPr id="16" name="Shape 14"/>
+          <p:cNvSpPr/>
+          <p:nvPr/>
+        </p:nvSpPr>
+        <p:spPr>
+          <a:xfrm>
+            <a:off x="8366760" y="3639312"/>
+            <a:ext cx="2011680" cy="0"/>
+          </a:xfrm>
+          <a:prstGeom prst="line">
+            <a:avLst/>
+          </a:prstGeom>
+          <a:noFill/>
+          <a:ln w="63500">
+            <a:solidFill>
+              <a:srgbClr val="2F8A28"/>
+            </a:solidFill>
+            <a:prstDash val="solid"/>
+          </a:ln>
+        </p:spPr>
+      </p:sp>
+      <p:sp>
+        <p:nvSpPr>
+          <p:cNvPr id="17" name="Text 15"/>
+          <p:cNvSpPr/>
+          <p:nvPr/>
+        </p:nvSpPr>
+        <p:spPr>
+          <a:xfrm>
+            <a:off x="7909560" y="3849624"/>
+            <a:ext cx="2926080" cy="164592"/>
+          </a:xfrm>
+          <a:prstGeom prst="rect">
+            <a:avLst/>
+          </a:prstGeom>
+          <a:noFill/>
+          <a:ln/>
+        </p:spPr>
+        <p:txBody>
+          <a:bodyPr wrap="square" lIns="0" tIns="0" rIns="0" bIns="0" rtlCol="0" anchor="ctr"/>
+          <a:lstStyle/>
+          <a:p>
+            <a:pPr algn="ctr" indent="0" marL="0">
+              <a:buNone/>
+            </a:pPr>
+            <a:r>
+              <a:rPr lang="en-US" sz="900" dirty="0">
+                <a:solidFill>
+                  <a:srgbClr val="003A63"/>
+                </a:solidFill>
+                <a:latin typeface="Aptos" pitchFamily="34" charset="0"/>
+                <a:ea typeface="Aptos" pitchFamily="34" charset="-122"/>
+                <a:cs typeface="Aptos" pitchFamily="34" charset="-120"/>
+              </a:rPr>
+              <a:t>Human review</a:t>
+            </a:r>
+            <a:endParaRPr lang="en-US" sz="900" dirty="0"/>
+          </a:p>
+        </p:txBody>
+      </p:sp>
+      <p:sp>
+        <p:nvSpPr>
+          <p:cNvPr id="18" name="Shape 16"/>
+          <p:cNvSpPr/>
+          <p:nvPr/>
+        </p:nvSpPr>
+        <p:spPr>
+          <a:xfrm>
+            <a:off x="7635240" y="4498848"/>
+            <a:ext cx="3474720" cy="1143000"/>
+          </a:xfrm>
+          <a:prstGeom prst="roundRect">
+            <a:avLst>
+              <a:gd name="adj" fmla="val 9600"/>
             </a:avLst>
           </a:prstGeom>
           <a:solidFill>
@@ -9075,14 +10176,14 @@
       </p:sp>
       <p:sp>
         <p:nvSpPr>
-          <p:cNvPr id="16" name="Text 14"/>
-          <p:cNvSpPr/>
-          <p:nvPr/>
-        </p:nvSpPr>
-        <p:spPr>
-          <a:xfrm>
-            <a:off x="8074152" y="3666744"/>
-            <a:ext cx="2825496" cy="256032"/>
+          <p:cNvPr id="19" name="Text 17"/>
+          <p:cNvSpPr/>
+          <p:nvPr/>
+        </p:nvSpPr>
+        <p:spPr>
+          <a:xfrm>
+            <a:off x="7799832" y="4645152"/>
+            <a:ext cx="3145536" cy="256032"/>
           </a:xfrm>
           <a:prstGeom prst="rect">
             <a:avLst/>
@@ -9106,7 +10207,7 @@
                 <a:ea typeface="Aptos" pitchFamily="34" charset="-122"/>
                 <a:cs typeface="Aptos" pitchFamily="34" charset="-120"/>
               </a:rPr>
-              <a:t>Use this for</a:t>
+              <a:t>Safeguard to plan</a:t>
             </a:r>
             <a:endParaRPr lang="en-US" sz="1300" dirty="0"/>
           </a:p>
@@ -9114,14 +10215,14 @@
       </p:sp>
       <p:sp>
         <p:nvSpPr>
-          <p:cNvPr id="17" name="Text 15"/>
-          <p:cNvSpPr/>
-          <p:nvPr/>
-        </p:nvSpPr>
-        <p:spPr>
-          <a:xfrm>
-            <a:off x="8074152" y="4023360"/>
-            <a:ext cx="2825496" cy="1097280"/>
+          <p:cNvPr id="20" name="Text 18"/>
+          <p:cNvSpPr/>
+          <p:nvPr/>
+        </p:nvSpPr>
+        <p:spPr>
+          <a:xfrm>
+            <a:off x="7799832" y="5001768"/>
+            <a:ext cx="3145536" cy="502920"/>
           </a:xfrm>
           <a:prstGeom prst="rect">
             <a:avLst/>
@@ -9147,7 +10248,7 @@
                 <a:ea typeface="Aptos" pitchFamily="34" charset="-122"/>
                 <a:cs typeface="Aptos" pitchFamily="34" charset="-120"/>
               </a:rPr>
-              <a:t>Connect the concept to public health decisions, safeguards, documentation, or implementation work.</a:t>
+              <a:t>Identify what could go wrong, who could be affected, what safeguards are needed, and what evidence should be reviewed before use expands.</a:t>
             </a:r>
             <a:endParaRPr lang="en-US" sz="1550" dirty="0"/>
           </a:p>
@@ -9321,8 +10422,8 @@
         </p:nvSpPr>
         <p:spPr>
           <a:xfrm>
-            <a:off x="9966960" y="6537960"/>
-            <a:ext cx="1645920" cy="201168"/>
+            <a:off x="9646920" y="6537960"/>
+            <a:ext cx="1965960" cy="201168"/>
           </a:xfrm>
           <a:prstGeom prst="rect">
             <a:avLst/>
@@ -9346,7 +10447,7 @@
                 <a:ea typeface="Aptos" pitchFamily="34" charset="-122"/>
                 <a:cs typeface="Aptos" pitchFamily="34" charset="-120"/>
               </a:rPr>
-              <a:t>Â© Paula Soper</a:t>
+              <a:t>Copyright Paula Soper</a:t>
             </a:r>
             <a:endParaRPr lang="en-US" sz="800" dirty="0"/>
           </a:p>
@@ -9709,46 +10810,7 @@
       </p:sp>
       <p:sp>
         <p:nvSpPr>
-          <p:cNvPr id="15" name="Text 13"/>
-          <p:cNvSpPr/>
-          <p:nvPr/>
-        </p:nvSpPr>
-        <p:spPr>
-          <a:xfrm>
-            <a:off x="8695944" y="3941064"/>
-            <a:ext cx="201168" cy="256032"/>
-          </a:xfrm>
-          <a:prstGeom prst="rect">
-            <a:avLst/>
-          </a:prstGeom>
-          <a:noFill/>
-          <a:ln/>
-        </p:spPr>
-        <p:txBody>
-          <a:bodyPr wrap="square" lIns="0" tIns="0" rIns="0" bIns="0" rtlCol="0" anchor="ctr"/>
-          <a:lstStyle/>
-          <a:p>
-            <a:pPr algn="ctr" indent="0" marL="0">
-              <a:buNone/>
-            </a:pPr>
-            <a:r>
-              <a:rPr lang="en-US" sz="1800" b="1" dirty="0">
-                <a:solidFill>
-                  <a:srgbClr val="0068B7"/>
-                </a:solidFill>
-                <a:latin typeface="Aptos" pitchFamily="34" charset="0"/>
-                <a:ea typeface="Aptos" pitchFamily="34" charset="-122"/>
-                <a:cs typeface="Aptos" pitchFamily="34" charset="-120"/>
-              </a:rPr>
-              <a:t>â†’</a:t>
-            </a:r>
-            <a:endParaRPr lang="en-US" sz="1800" dirty="0"/>
-          </a:p>
-        </p:txBody>
-      </p:sp>
-      <p:sp>
-        <p:nvSpPr>
-          <p:cNvPr id="16" name="Shape 14"/>
+          <p:cNvPr id="15" name="Shape 13"/>
           <p:cNvSpPr/>
           <p:nvPr/>
         </p:nvSpPr>
@@ -9775,7 +10837,7 @@
       </p:sp>
       <p:sp>
         <p:nvSpPr>
-          <p:cNvPr id="17" name="Text 15"/>
+          <p:cNvPr id="16" name="Text 14"/>
           <p:cNvSpPr/>
           <p:nvPr/>
         </p:nvSpPr>
@@ -9816,46 +10878,7 @@
       </p:sp>
       <p:sp>
         <p:nvSpPr>
-          <p:cNvPr id="18" name="Text 16"/>
-          <p:cNvSpPr/>
-          <p:nvPr/>
-        </p:nvSpPr>
-        <p:spPr>
-          <a:xfrm>
-            <a:off x="9985248" y="3941064"/>
-            <a:ext cx="201168" cy="256032"/>
-          </a:xfrm>
-          <a:prstGeom prst="rect">
-            <a:avLst/>
-          </a:prstGeom>
-          <a:noFill/>
-          <a:ln/>
-        </p:spPr>
-        <p:txBody>
-          <a:bodyPr wrap="square" lIns="0" tIns="0" rIns="0" bIns="0" rtlCol="0" anchor="ctr"/>
-          <a:lstStyle/>
-          <a:p>
-            <a:pPr algn="ctr" indent="0" marL="0">
-              <a:buNone/>
-            </a:pPr>
-            <a:r>
-              <a:rPr lang="en-US" sz="1800" b="1" dirty="0">
-                <a:solidFill>
-                  <a:srgbClr val="0068B7"/>
-                </a:solidFill>
-                <a:latin typeface="Aptos" pitchFamily="34" charset="0"/>
-                <a:ea typeface="Aptos" pitchFamily="34" charset="-122"/>
-                <a:cs typeface="Aptos" pitchFamily="34" charset="-120"/>
-              </a:rPr>
-              <a:t>â†’</a:t>
-            </a:r>
-            <a:endParaRPr lang="en-US" sz="1800" dirty="0"/>
-          </a:p>
-        </p:txBody>
-      </p:sp>
-      <p:sp>
-        <p:nvSpPr>
-          <p:cNvPr id="19" name="Shape 17"/>
+          <p:cNvPr id="17" name="Shape 15"/>
           <p:cNvSpPr/>
           <p:nvPr/>
         </p:nvSpPr>
@@ -9882,7 +10905,7 @@
       </p:sp>
       <p:sp>
         <p:nvSpPr>
-          <p:cNvPr id="20" name="Text 18"/>
+          <p:cNvPr id="18" name="Text 16"/>
           <p:cNvSpPr/>
           <p:nvPr/>
         </p:nvSpPr>
@@ -10089,8 +11112,8 @@
         </p:nvSpPr>
         <p:spPr>
           <a:xfrm>
-            <a:off x="9966960" y="6537960"/>
-            <a:ext cx="1645920" cy="201168"/>
+            <a:off x="9646920" y="6537960"/>
+            <a:ext cx="1965960" cy="201168"/>
           </a:xfrm>
           <a:prstGeom prst="rect">
             <a:avLst/>
@@ -10114,7 +11137,7 @@
                 <a:ea typeface="Aptos" pitchFamily="34" charset="-122"/>
                 <a:cs typeface="Aptos" pitchFamily="34" charset="-120"/>
               </a:rPr>
-              <a:t>Â© Paula Soper</a:t>
+              <a:t>Copyright Paula Soper</a:t>
             </a:r>
             <a:endParaRPr lang="en-US" sz="800" dirty="0"/>
           </a:p>
@@ -10209,7 +11232,7 @@
         <p:spPr>
           <a:xfrm>
             <a:off x="868680" y="1508760"/>
-            <a:ext cx="6537960" cy="4160520"/>
+            <a:ext cx="6309360" cy="4160520"/>
           </a:xfrm>
           <a:prstGeom prst="rect">
             <a:avLst/>
@@ -10246,12 +11269,12 @@
         </p:nvSpPr>
         <p:spPr>
           <a:xfrm>
-            <a:off x="7909560" y="1417320"/>
-            <a:ext cx="3154680" cy="1828800"/>
+            <a:off x="7635240" y="1325880"/>
+            <a:ext cx="3474720" cy="1325880"/>
           </a:xfrm>
           <a:prstGeom prst="roundRect">
             <a:avLst>
-              <a:gd name="adj" fmla="val 6000"/>
+              <a:gd name="adj" fmla="val 8276"/>
             </a:avLst>
           </a:prstGeom>
           <a:solidFill>
@@ -10273,8 +11296,8 @@
         </p:nvSpPr>
         <p:spPr>
           <a:xfrm>
-            <a:off x="8074152" y="1563624"/>
-            <a:ext cx="2825496" cy="256032"/>
+            <a:off x="7799832" y="1472184"/>
+            <a:ext cx="3145536" cy="256032"/>
           </a:xfrm>
           <a:prstGeom prst="rect">
             <a:avLst/>
@@ -10298,7 +11321,7 @@
                 <a:ea typeface="Aptos" pitchFamily="34" charset="-122"/>
                 <a:cs typeface="Aptos" pitchFamily="34" charset="-120"/>
               </a:rPr>
-              <a:t>Key idea</a:t>
+              <a:t>Risk check</a:t>
             </a:r>
             <a:endParaRPr lang="en-US" sz="1300" dirty="0"/>
           </a:p>
@@ -10312,8 +11335,8 @@
         </p:nvSpPr>
         <p:spPr>
           <a:xfrm>
-            <a:off x="8074152" y="1920240"/>
-            <a:ext cx="2825496" cy="1188720"/>
+            <a:off x="7799832" y="1828800"/>
+            <a:ext cx="3145536" cy="685800"/>
           </a:xfrm>
           <a:prstGeom prst="rect">
             <a:avLst/>
@@ -10353,12 +11376,165 @@
         </p:nvSpPr>
         <p:spPr>
           <a:xfrm>
-            <a:off x="7909560" y="3520440"/>
-            <a:ext cx="3154680" cy="1737360"/>
+            <a:off x="7635240" y="2788920"/>
+            <a:ext cx="3474720" cy="1536192"/>
           </a:xfrm>
           <a:prstGeom prst="roundRect">
             <a:avLst>
-              <a:gd name="adj" fmla="val 6316"/>
+              <a:gd name="adj" fmla="val 7143"/>
+            </a:avLst>
+          </a:prstGeom>
+          <a:solidFill>
+            <a:srgbClr val="FFFFFF">
+              <a:alpha val="88000"/>
+            </a:srgbClr>
+          </a:solidFill>
+          <a:ln w="12700">
+            <a:solidFill>
+              <a:srgbClr val="D6E8F2"/>
+            </a:solidFill>
+            <a:prstDash val="solid"/>
+          </a:ln>
+        </p:spPr>
+      </p:sp>
+      <p:sp>
+        <p:nvSpPr>
+          <p:cNvPr id="14" name="Shape 12"/>
+          <p:cNvSpPr/>
+          <p:nvPr/>
+        </p:nvSpPr>
+        <p:spPr>
+          <a:xfrm>
+            <a:off x="8046720" y="3108960"/>
+            <a:ext cx="2651760" cy="896112"/>
+          </a:xfrm>
+          <a:prstGeom prst="arc">
+            <a:avLst/>
+          </a:prstGeom>
+          <a:noFill/>
+          <a:ln w="25400">
+            <a:solidFill>
+              <a:srgbClr val="0068B7"/>
+            </a:solidFill>
+            <a:prstDash val="solid"/>
+          </a:ln>
+        </p:spPr>
+      </p:sp>
+      <p:sp>
+        <p:nvSpPr>
+          <p:cNvPr id="15" name="Text 13"/>
+          <p:cNvSpPr/>
+          <p:nvPr/>
+        </p:nvSpPr>
+        <p:spPr>
+          <a:xfrm>
+            <a:off x="7909560" y="3099816"/>
+            <a:ext cx="2926080" cy="256032"/>
+          </a:xfrm>
+          <a:prstGeom prst="rect">
+            <a:avLst/>
+          </a:prstGeom>
+          <a:noFill/>
+          <a:ln/>
+        </p:spPr>
+        <p:txBody>
+          <a:bodyPr wrap="square" lIns="0" tIns="0" rIns="0" bIns="0" rtlCol="0" anchor="ctr"/>
+          <a:lstStyle/>
+          <a:p>
+            <a:pPr algn="ctr" indent="0" marL="0">
+              <a:buNone/>
+            </a:pPr>
+            <a:r>
+              <a:rPr lang="en-US" sz="1500" b="1" dirty="0">
+                <a:solidFill>
+                  <a:srgbClr val="003A63"/>
+                </a:solidFill>
+                <a:latin typeface="Aptos" pitchFamily="34" charset="0"/>
+                <a:ea typeface="Aptos" pitchFamily="34" charset="-122"/>
+                <a:cs typeface="Aptos" pitchFamily="34" charset="-120"/>
+              </a:rPr>
+              <a:t>Risk</a:t>
+            </a:r>
+            <a:endParaRPr lang="en-US" sz="1500" dirty="0"/>
+          </a:p>
+        </p:txBody>
+      </p:sp>
+      <p:sp>
+        <p:nvSpPr>
+          <p:cNvPr id="16" name="Shape 14"/>
+          <p:cNvSpPr/>
+          <p:nvPr/>
+        </p:nvSpPr>
+        <p:spPr>
+          <a:xfrm>
+            <a:off x="8366760" y="3639312"/>
+            <a:ext cx="2011680" cy="0"/>
+          </a:xfrm>
+          <a:prstGeom prst="line">
+            <a:avLst/>
+          </a:prstGeom>
+          <a:noFill/>
+          <a:ln w="63500">
+            <a:solidFill>
+              <a:srgbClr val="2F8A28"/>
+            </a:solidFill>
+            <a:prstDash val="solid"/>
+          </a:ln>
+        </p:spPr>
+      </p:sp>
+      <p:sp>
+        <p:nvSpPr>
+          <p:cNvPr id="17" name="Text 15"/>
+          <p:cNvSpPr/>
+          <p:nvPr/>
+        </p:nvSpPr>
+        <p:spPr>
+          <a:xfrm>
+            <a:off x="7909560" y="3849624"/>
+            <a:ext cx="2926080" cy="164592"/>
+          </a:xfrm>
+          <a:prstGeom prst="rect">
+            <a:avLst/>
+          </a:prstGeom>
+          <a:noFill/>
+          <a:ln/>
+        </p:spPr>
+        <p:txBody>
+          <a:bodyPr wrap="square" lIns="0" tIns="0" rIns="0" bIns="0" rtlCol="0" anchor="ctr"/>
+          <a:lstStyle/>
+          <a:p>
+            <a:pPr algn="ctr" indent="0" marL="0">
+              <a:buNone/>
+            </a:pPr>
+            <a:r>
+              <a:rPr lang="en-US" sz="900" dirty="0">
+                <a:solidFill>
+                  <a:srgbClr val="003A63"/>
+                </a:solidFill>
+                <a:latin typeface="Aptos" pitchFamily="34" charset="0"/>
+                <a:ea typeface="Aptos" pitchFamily="34" charset="-122"/>
+                <a:cs typeface="Aptos" pitchFamily="34" charset="-120"/>
+              </a:rPr>
+              <a:t>Human review</a:t>
+            </a:r>
+            <a:endParaRPr lang="en-US" sz="900" dirty="0"/>
+          </a:p>
+        </p:txBody>
+      </p:sp>
+      <p:sp>
+        <p:nvSpPr>
+          <p:cNvPr id="18" name="Shape 16"/>
+          <p:cNvSpPr/>
+          <p:nvPr/>
+        </p:nvSpPr>
+        <p:spPr>
+          <a:xfrm>
+            <a:off x="7635240" y="4498848"/>
+            <a:ext cx="3474720" cy="1143000"/>
+          </a:xfrm>
+          <a:prstGeom prst="roundRect">
+            <a:avLst>
+              <a:gd name="adj" fmla="val 9600"/>
             </a:avLst>
           </a:prstGeom>
           <a:solidFill>
@@ -10374,14 +11550,14 @@
       </p:sp>
       <p:sp>
         <p:nvSpPr>
-          <p:cNvPr id="14" name="Text 12"/>
-          <p:cNvSpPr/>
-          <p:nvPr/>
-        </p:nvSpPr>
-        <p:spPr>
-          <a:xfrm>
-            <a:off x="8074152" y="3666744"/>
-            <a:ext cx="2825496" cy="256032"/>
+          <p:cNvPr id="19" name="Text 17"/>
+          <p:cNvSpPr/>
+          <p:nvPr/>
+        </p:nvSpPr>
+        <p:spPr>
+          <a:xfrm>
+            <a:off x="7799832" y="4645152"/>
+            <a:ext cx="3145536" cy="256032"/>
           </a:xfrm>
           <a:prstGeom prst="rect">
             <a:avLst/>
@@ -10405,7 +11581,7 @@
                 <a:ea typeface="Aptos" pitchFamily="34" charset="-122"/>
                 <a:cs typeface="Aptos" pitchFamily="34" charset="-120"/>
               </a:rPr>
-              <a:t>Use this for</a:t>
+              <a:t>Safeguard to plan</a:t>
             </a:r>
             <a:endParaRPr lang="en-US" sz="1300" dirty="0"/>
           </a:p>
@@ -10413,14 +11589,14 @@
       </p:sp>
       <p:sp>
         <p:nvSpPr>
-          <p:cNvPr id="15" name="Text 13"/>
-          <p:cNvSpPr/>
-          <p:nvPr/>
-        </p:nvSpPr>
-        <p:spPr>
-          <a:xfrm>
-            <a:off x="8074152" y="4023360"/>
-            <a:ext cx="2825496" cy="1097280"/>
+          <p:cNvPr id="20" name="Text 18"/>
+          <p:cNvSpPr/>
+          <p:nvPr/>
+        </p:nvSpPr>
+        <p:spPr>
+          <a:xfrm>
+            <a:off x="7799832" y="5001768"/>
+            <a:ext cx="3145536" cy="502920"/>
           </a:xfrm>
           <a:prstGeom prst="rect">
             <a:avLst/>
@@ -10446,7 +11622,7 @@
                 <a:ea typeface="Aptos" pitchFamily="34" charset="-122"/>
                 <a:cs typeface="Aptos" pitchFamily="34" charset="-120"/>
               </a:rPr>
-              <a:t>Connect the concept to public health decisions, safeguards, documentation, or implementation work.</a:t>
+              <a:t>Identify what could go wrong, who could be affected, what safeguards are needed, and what evidence should be reviewed before use expands.</a:t>
             </a:r>
             <a:endParaRPr lang="en-US" sz="1550" dirty="0"/>
           </a:p>
@@ -10620,8 +11796,8 @@
         </p:nvSpPr>
         <p:spPr>
           <a:xfrm>
-            <a:off x="9966960" y="6537960"/>
-            <a:ext cx="1645920" cy="201168"/>
+            <a:off x="9646920" y="6537960"/>
+            <a:ext cx="1965960" cy="201168"/>
           </a:xfrm>
           <a:prstGeom prst="rect">
             <a:avLst/>
@@ -10645,7 +11821,7 @@
                 <a:ea typeface="Aptos" pitchFamily="34" charset="-122"/>
                 <a:cs typeface="Aptos" pitchFamily="34" charset="-120"/>
               </a:rPr>
-              <a:t>Â© Paula Soper</a:t>
+              <a:t>Copyright Paula Soper</a:t>
             </a:r>
             <a:endParaRPr lang="en-US" sz="800" dirty="0"/>
           </a:p>
@@ -10692,77 +11868,13 @@
       </p:sp>
       <p:sp>
         <p:nvSpPr>
-          <p:cNvPr id="8" name="Shape 6"/>
+          <p:cNvPr id="8" name="Text 6"/>
           <p:cNvSpPr/>
           <p:nvPr/>
         </p:nvSpPr>
         <p:spPr>
           <a:xfrm>
             <a:off x="640080" y="658368"/>
-            <a:ext cx="420624" cy="420624"/>
-          </a:xfrm>
-          <a:prstGeom prst="ellipse">
-            <a:avLst/>
-          </a:prstGeom>
-          <a:solidFill>
-            <a:srgbClr val="0068B7"/>
-          </a:solidFill>
-          <a:ln w="12700">
-            <a:solidFill>
-              <a:srgbClr val="0068B7"/>
-            </a:solidFill>
-            <a:prstDash val="solid"/>
-          </a:ln>
-        </p:spPr>
-      </p:sp>
-      <p:sp>
-        <p:nvSpPr>
-          <p:cNvPr id="9" name="Text 7"/>
-          <p:cNvSpPr/>
-          <p:nvPr/>
-        </p:nvSpPr>
-        <p:spPr>
-          <a:xfrm>
-            <a:off x="640080" y="731520"/>
-            <a:ext cx="420624" cy="164592"/>
-          </a:xfrm>
-          <a:prstGeom prst="rect">
-            <a:avLst/>
-          </a:prstGeom>
-          <a:noFill/>
-          <a:ln/>
-        </p:spPr>
-        <p:txBody>
-          <a:bodyPr wrap="square" lIns="0" tIns="0" rIns="0" bIns="0" rtlCol="0" anchor="ctr"/>
-          <a:lstStyle/>
-          <a:p>
-            <a:pPr algn="ctr" indent="0" marL="0">
-              <a:buNone/>
-            </a:pPr>
-            <a:r>
-              <a:rPr lang="en-US" sz="1100" b="1" dirty="0">
-                <a:solidFill>
-                  <a:srgbClr val="FFFFFF"/>
-                </a:solidFill>
-                <a:latin typeface="Aptos" pitchFamily="34" charset="0"/>
-                <a:ea typeface="Aptos" pitchFamily="34" charset="-122"/>
-                <a:cs typeface="Aptos" pitchFamily="34" charset="-120"/>
-              </a:rPr>
-              <a:t>12</a:t>
-            </a:r>
-            <a:endParaRPr lang="en-US" sz="1100" dirty="0"/>
-          </a:p>
-        </p:txBody>
-      </p:sp>
-      <p:sp>
-        <p:nvSpPr>
-          <p:cNvPr id="10" name="Text 8"/>
-          <p:cNvSpPr/>
-          <p:nvPr/>
-        </p:nvSpPr>
-        <p:spPr>
-          <a:xfrm>
-            <a:off x="640080" y="621792"/>
             <a:ext cx="10881360" cy="713232"/>
           </a:xfrm>
           <a:prstGeom prst="rect">
@@ -10797,14 +11909,14 @@
       </p:sp>
       <p:sp>
         <p:nvSpPr>
-          <p:cNvPr id="11" name="Text 9"/>
+          <p:cNvPr id="9" name="Text 7"/>
           <p:cNvSpPr/>
           <p:nvPr/>
         </p:nvSpPr>
         <p:spPr>
           <a:xfrm>
             <a:off x="868680" y="1508760"/>
-            <a:ext cx="6537960" cy="4160520"/>
+            <a:ext cx="6309360" cy="4160520"/>
           </a:xfrm>
           <a:prstGeom prst="rect">
             <a:avLst/>
@@ -10863,18 +11975,18 @@
       </p:sp>
       <p:sp>
         <p:nvSpPr>
-          <p:cNvPr id="12" name="Shape 10"/>
-          <p:cNvSpPr/>
-          <p:nvPr/>
-        </p:nvSpPr>
-        <p:spPr>
-          <a:xfrm>
-            <a:off x="7909560" y="1417320"/>
-            <a:ext cx="3154680" cy="1828800"/>
+          <p:cNvPr id="10" name="Shape 8"/>
+          <p:cNvSpPr/>
+          <p:nvPr/>
+        </p:nvSpPr>
+        <p:spPr>
+          <a:xfrm>
+            <a:off x="7635240" y="1325880"/>
+            <a:ext cx="3474720" cy="1325880"/>
           </a:xfrm>
           <a:prstGeom prst="roundRect">
             <a:avLst>
-              <a:gd name="adj" fmla="val 6000"/>
+              <a:gd name="adj" fmla="val 8276"/>
             </a:avLst>
           </a:prstGeom>
           <a:solidFill>
@@ -10890,14 +12002,14 @@
       </p:sp>
       <p:sp>
         <p:nvSpPr>
-          <p:cNvPr id="13" name="Text 11"/>
-          <p:cNvSpPr/>
-          <p:nvPr/>
-        </p:nvSpPr>
-        <p:spPr>
-          <a:xfrm>
-            <a:off x="8074152" y="1563624"/>
-            <a:ext cx="2825496" cy="256032"/>
+          <p:cNvPr id="11" name="Text 9"/>
+          <p:cNvSpPr/>
+          <p:nvPr/>
+        </p:nvSpPr>
+        <p:spPr>
+          <a:xfrm>
+            <a:off x="7799832" y="1472184"/>
+            <a:ext cx="3145536" cy="256032"/>
           </a:xfrm>
           <a:prstGeom prst="rect">
             <a:avLst/>
@@ -10921,7 +12033,7 @@
                 <a:ea typeface="Aptos" pitchFamily="34" charset="-122"/>
                 <a:cs typeface="Aptos" pitchFamily="34" charset="-120"/>
               </a:rPr>
-              <a:t>Key idea</a:t>
+              <a:t>Risk check</a:t>
             </a:r>
             <a:endParaRPr lang="en-US" sz="1300" dirty="0"/>
           </a:p>
@@ -10929,14 +12041,14 @@
       </p:sp>
       <p:sp>
         <p:nvSpPr>
-          <p:cNvPr id="14" name="Text 12"/>
-          <p:cNvSpPr/>
-          <p:nvPr/>
-        </p:nvSpPr>
-        <p:spPr>
-          <a:xfrm>
-            <a:off x="8074152" y="1920240"/>
-            <a:ext cx="2825496" cy="1188720"/>
+          <p:cNvPr id="12" name="Text 10"/>
+          <p:cNvSpPr/>
+          <p:nvPr/>
+        </p:nvSpPr>
+        <p:spPr>
+          <a:xfrm>
+            <a:off x="7799832" y="1828800"/>
+            <a:ext cx="3145536" cy="685800"/>
           </a:xfrm>
           <a:prstGeom prst="rect">
             <a:avLst/>
@@ -10970,18 +12082,171 @@
       </p:sp>
       <p:sp>
         <p:nvSpPr>
-          <p:cNvPr id="15" name="Shape 13"/>
-          <p:cNvSpPr/>
-          <p:nvPr/>
-        </p:nvSpPr>
-        <p:spPr>
-          <a:xfrm>
-            <a:off x="7909560" y="3520440"/>
-            <a:ext cx="3154680" cy="1737360"/>
+          <p:cNvPr id="13" name="Shape 11"/>
+          <p:cNvSpPr/>
+          <p:nvPr/>
+        </p:nvSpPr>
+        <p:spPr>
+          <a:xfrm>
+            <a:off x="7635240" y="2788920"/>
+            <a:ext cx="3474720" cy="1536192"/>
           </a:xfrm>
           <a:prstGeom prst="roundRect">
             <a:avLst>
-              <a:gd name="adj" fmla="val 6316"/>
+              <a:gd name="adj" fmla="val 7143"/>
+            </a:avLst>
+          </a:prstGeom>
+          <a:solidFill>
+            <a:srgbClr val="FFFFFF">
+              <a:alpha val="88000"/>
+            </a:srgbClr>
+          </a:solidFill>
+          <a:ln w="12700">
+            <a:solidFill>
+              <a:srgbClr val="D6E8F2"/>
+            </a:solidFill>
+            <a:prstDash val="solid"/>
+          </a:ln>
+        </p:spPr>
+      </p:sp>
+      <p:sp>
+        <p:nvSpPr>
+          <p:cNvPr id="14" name="Shape 12"/>
+          <p:cNvSpPr/>
+          <p:nvPr/>
+        </p:nvSpPr>
+        <p:spPr>
+          <a:xfrm>
+            <a:off x="8046720" y="3108960"/>
+            <a:ext cx="2651760" cy="896112"/>
+          </a:xfrm>
+          <a:prstGeom prst="arc">
+            <a:avLst/>
+          </a:prstGeom>
+          <a:noFill/>
+          <a:ln w="25400">
+            <a:solidFill>
+              <a:srgbClr val="0068B7"/>
+            </a:solidFill>
+            <a:prstDash val="solid"/>
+          </a:ln>
+        </p:spPr>
+      </p:sp>
+      <p:sp>
+        <p:nvSpPr>
+          <p:cNvPr id="15" name="Text 13"/>
+          <p:cNvSpPr/>
+          <p:nvPr/>
+        </p:nvSpPr>
+        <p:spPr>
+          <a:xfrm>
+            <a:off x="7909560" y="3099816"/>
+            <a:ext cx="2926080" cy="256032"/>
+          </a:xfrm>
+          <a:prstGeom prst="rect">
+            <a:avLst/>
+          </a:prstGeom>
+          <a:noFill/>
+          <a:ln/>
+        </p:spPr>
+        <p:txBody>
+          <a:bodyPr wrap="square" lIns="0" tIns="0" rIns="0" bIns="0" rtlCol="0" anchor="ctr"/>
+          <a:lstStyle/>
+          <a:p>
+            <a:pPr algn="ctr" indent="0" marL="0">
+              <a:buNone/>
+            </a:pPr>
+            <a:r>
+              <a:rPr lang="en-US" sz="1500" b="1" dirty="0">
+                <a:solidFill>
+                  <a:srgbClr val="003A63"/>
+                </a:solidFill>
+                <a:latin typeface="Aptos" pitchFamily="34" charset="0"/>
+                <a:ea typeface="Aptos" pitchFamily="34" charset="-122"/>
+                <a:cs typeface="Aptos" pitchFamily="34" charset="-120"/>
+              </a:rPr>
+              <a:t>Risk</a:t>
+            </a:r>
+            <a:endParaRPr lang="en-US" sz="1500" dirty="0"/>
+          </a:p>
+        </p:txBody>
+      </p:sp>
+      <p:sp>
+        <p:nvSpPr>
+          <p:cNvPr id="16" name="Shape 14"/>
+          <p:cNvSpPr/>
+          <p:nvPr/>
+        </p:nvSpPr>
+        <p:spPr>
+          <a:xfrm>
+            <a:off x="8366760" y="3639312"/>
+            <a:ext cx="2011680" cy="0"/>
+          </a:xfrm>
+          <a:prstGeom prst="line">
+            <a:avLst/>
+          </a:prstGeom>
+          <a:noFill/>
+          <a:ln w="63500">
+            <a:solidFill>
+              <a:srgbClr val="2F8A28"/>
+            </a:solidFill>
+            <a:prstDash val="solid"/>
+          </a:ln>
+        </p:spPr>
+      </p:sp>
+      <p:sp>
+        <p:nvSpPr>
+          <p:cNvPr id="17" name="Text 15"/>
+          <p:cNvSpPr/>
+          <p:nvPr/>
+        </p:nvSpPr>
+        <p:spPr>
+          <a:xfrm>
+            <a:off x="7909560" y="3849624"/>
+            <a:ext cx="2926080" cy="164592"/>
+          </a:xfrm>
+          <a:prstGeom prst="rect">
+            <a:avLst/>
+          </a:prstGeom>
+          <a:noFill/>
+          <a:ln/>
+        </p:spPr>
+        <p:txBody>
+          <a:bodyPr wrap="square" lIns="0" tIns="0" rIns="0" bIns="0" rtlCol="0" anchor="ctr"/>
+          <a:lstStyle/>
+          <a:p>
+            <a:pPr algn="ctr" indent="0" marL="0">
+              <a:buNone/>
+            </a:pPr>
+            <a:r>
+              <a:rPr lang="en-US" sz="900" dirty="0">
+                <a:solidFill>
+                  <a:srgbClr val="003A63"/>
+                </a:solidFill>
+                <a:latin typeface="Aptos" pitchFamily="34" charset="0"/>
+                <a:ea typeface="Aptos" pitchFamily="34" charset="-122"/>
+                <a:cs typeface="Aptos" pitchFamily="34" charset="-120"/>
+              </a:rPr>
+              <a:t>Human review</a:t>
+            </a:r>
+            <a:endParaRPr lang="en-US" sz="900" dirty="0"/>
+          </a:p>
+        </p:txBody>
+      </p:sp>
+      <p:sp>
+        <p:nvSpPr>
+          <p:cNvPr id="18" name="Shape 16"/>
+          <p:cNvSpPr/>
+          <p:nvPr/>
+        </p:nvSpPr>
+        <p:spPr>
+          <a:xfrm>
+            <a:off x="7635240" y="4498848"/>
+            <a:ext cx="3474720" cy="1143000"/>
+          </a:xfrm>
+          <a:prstGeom prst="roundRect">
+            <a:avLst>
+              <a:gd name="adj" fmla="val 9600"/>
             </a:avLst>
           </a:prstGeom>
           <a:solidFill>
@@ -10997,14 +12262,14 @@
       </p:sp>
       <p:sp>
         <p:nvSpPr>
-          <p:cNvPr id="16" name="Text 14"/>
-          <p:cNvSpPr/>
-          <p:nvPr/>
-        </p:nvSpPr>
-        <p:spPr>
-          <a:xfrm>
-            <a:off x="8074152" y="3666744"/>
-            <a:ext cx="2825496" cy="256032"/>
+          <p:cNvPr id="19" name="Text 17"/>
+          <p:cNvSpPr/>
+          <p:nvPr/>
+        </p:nvSpPr>
+        <p:spPr>
+          <a:xfrm>
+            <a:off x="7799832" y="4645152"/>
+            <a:ext cx="3145536" cy="256032"/>
           </a:xfrm>
           <a:prstGeom prst="rect">
             <a:avLst/>
@@ -11028,7 +12293,7 @@
                 <a:ea typeface="Aptos" pitchFamily="34" charset="-122"/>
                 <a:cs typeface="Aptos" pitchFamily="34" charset="-120"/>
               </a:rPr>
-              <a:t>Use this for</a:t>
+              <a:t>Safeguard to plan</a:t>
             </a:r>
             <a:endParaRPr lang="en-US" sz="1300" dirty="0"/>
           </a:p>
@@ -11036,14 +12301,14 @@
       </p:sp>
       <p:sp>
         <p:nvSpPr>
-          <p:cNvPr id="17" name="Text 15"/>
-          <p:cNvSpPr/>
-          <p:nvPr/>
-        </p:nvSpPr>
-        <p:spPr>
-          <a:xfrm>
-            <a:off x="8074152" y="4023360"/>
-            <a:ext cx="2825496" cy="1097280"/>
+          <p:cNvPr id="20" name="Text 18"/>
+          <p:cNvSpPr/>
+          <p:nvPr/>
+        </p:nvSpPr>
+        <p:spPr>
+          <a:xfrm>
+            <a:off x="7799832" y="5001768"/>
+            <a:ext cx="3145536" cy="502920"/>
           </a:xfrm>
           <a:prstGeom prst="rect">
             <a:avLst/>
@@ -11069,7 +12334,7 @@
                 <a:ea typeface="Aptos" pitchFamily="34" charset="-122"/>
                 <a:cs typeface="Aptos" pitchFamily="34" charset="-120"/>
               </a:rPr>
-              <a:t>Connect the concept to public health decisions, safeguards, documentation, or implementation work.</a:t>
+              <a:t>Use the assignment to test whether you can explain the concept, apply it to a realistic public health situation, and identify what would need review before the work moves forward.</a:t>
             </a:r>
             <a:endParaRPr lang="en-US" sz="1550" dirty="0"/>
           </a:p>
@@ -11243,8 +12508,8 @@
         </p:nvSpPr>
         <p:spPr>
           <a:xfrm>
-            <a:off x="9966960" y="6537960"/>
-            <a:ext cx="1645920" cy="201168"/>
+            <a:off x="9646920" y="6537960"/>
+            <a:ext cx="1965960" cy="201168"/>
           </a:xfrm>
           <a:prstGeom prst="rect">
             <a:avLst/>
@@ -11268,7 +12533,7 @@
                 <a:ea typeface="Aptos" pitchFamily="34" charset="-122"/>
                 <a:cs typeface="Aptos" pitchFamily="34" charset="-120"/>
               </a:rPr>
-              <a:t>Â© Paula Soper</a:t>
+              <a:t>Copyright Paula Soper</a:t>
             </a:r>
             <a:endParaRPr lang="en-US" sz="800" dirty="0"/>
           </a:p>
@@ -11315,77 +12580,13 @@
       </p:sp>
       <p:sp>
         <p:nvSpPr>
-          <p:cNvPr id="8" name="Shape 6"/>
+          <p:cNvPr id="8" name="Text 6"/>
           <p:cNvSpPr/>
           <p:nvPr/>
         </p:nvSpPr>
         <p:spPr>
           <a:xfrm>
             <a:off x="640080" y="658368"/>
-            <a:ext cx="420624" cy="420624"/>
-          </a:xfrm>
-          <a:prstGeom prst="ellipse">
-            <a:avLst/>
-          </a:prstGeom>
-          <a:solidFill>
-            <a:srgbClr val="0068B7"/>
-          </a:solidFill>
-          <a:ln w="12700">
-            <a:solidFill>
-              <a:srgbClr val="0068B7"/>
-            </a:solidFill>
-            <a:prstDash val="solid"/>
-          </a:ln>
-        </p:spPr>
-      </p:sp>
-      <p:sp>
-        <p:nvSpPr>
-          <p:cNvPr id="9" name="Text 7"/>
-          <p:cNvSpPr/>
-          <p:nvPr/>
-        </p:nvSpPr>
-        <p:spPr>
-          <a:xfrm>
-            <a:off x="640080" y="731520"/>
-            <a:ext cx="420624" cy="164592"/>
-          </a:xfrm>
-          <a:prstGeom prst="rect">
-            <a:avLst/>
-          </a:prstGeom>
-          <a:noFill/>
-          <a:ln/>
-        </p:spPr>
-        <p:txBody>
-          <a:bodyPr wrap="square" lIns="0" tIns="0" rIns="0" bIns="0" rtlCol="0" anchor="ctr"/>
-          <a:lstStyle/>
-          <a:p>
-            <a:pPr algn="ctr" indent="0" marL="0">
-              <a:buNone/>
-            </a:pPr>
-            <a:r>
-              <a:rPr lang="en-US" sz="1100" b="1" dirty="0">
-                <a:solidFill>
-                  <a:srgbClr val="FFFFFF"/>
-                </a:solidFill>
-                <a:latin typeface="Aptos" pitchFamily="34" charset="0"/>
-                <a:ea typeface="Aptos" pitchFamily="34" charset="-122"/>
-                <a:cs typeface="Aptos" pitchFamily="34" charset="-120"/>
-              </a:rPr>
-              <a:t>13</a:t>
-            </a:r>
-            <a:endParaRPr lang="en-US" sz="1100" dirty="0"/>
-          </a:p>
-        </p:txBody>
-      </p:sp>
-      <p:sp>
-        <p:nvSpPr>
-          <p:cNvPr id="10" name="Text 8"/>
-          <p:cNvSpPr/>
-          <p:nvPr/>
-        </p:nvSpPr>
-        <p:spPr>
-          <a:xfrm>
-            <a:off x="640080" y="621792"/>
             <a:ext cx="10881360" cy="713232"/>
           </a:xfrm>
           <a:prstGeom prst="rect">
@@ -11420,14 +12621,14 @@
       </p:sp>
       <p:sp>
         <p:nvSpPr>
-          <p:cNvPr id="11" name="Text 9"/>
+          <p:cNvPr id="9" name="Text 7"/>
           <p:cNvSpPr/>
           <p:nvPr/>
         </p:nvSpPr>
         <p:spPr>
           <a:xfrm>
             <a:off x="868680" y="1508760"/>
-            <a:ext cx="6537960" cy="4160520"/>
+            <a:ext cx="6309360" cy="4160520"/>
           </a:xfrm>
           <a:prstGeom prst="rect">
             <a:avLst/>
@@ -11486,18 +12687,18 @@
       </p:sp>
       <p:sp>
         <p:nvSpPr>
-          <p:cNvPr id="12" name="Shape 10"/>
-          <p:cNvSpPr/>
-          <p:nvPr/>
-        </p:nvSpPr>
-        <p:spPr>
-          <a:xfrm>
-            <a:off x="7909560" y="1417320"/>
-            <a:ext cx="3154680" cy="1828800"/>
+          <p:cNvPr id="10" name="Shape 8"/>
+          <p:cNvSpPr/>
+          <p:nvPr/>
+        </p:nvSpPr>
+        <p:spPr>
+          <a:xfrm>
+            <a:off x="7635240" y="1325880"/>
+            <a:ext cx="3474720" cy="1325880"/>
           </a:xfrm>
           <a:prstGeom prst="roundRect">
             <a:avLst>
-              <a:gd name="adj" fmla="val 6000"/>
+              <a:gd name="adj" fmla="val 8276"/>
             </a:avLst>
           </a:prstGeom>
           <a:solidFill>
@@ -11513,14 +12714,14 @@
       </p:sp>
       <p:sp>
         <p:nvSpPr>
-          <p:cNvPr id="13" name="Text 11"/>
-          <p:cNvSpPr/>
-          <p:nvPr/>
-        </p:nvSpPr>
-        <p:spPr>
-          <a:xfrm>
-            <a:off x="8074152" y="1563624"/>
-            <a:ext cx="2825496" cy="256032"/>
+          <p:cNvPr id="11" name="Text 9"/>
+          <p:cNvSpPr/>
+          <p:nvPr/>
+        </p:nvSpPr>
+        <p:spPr>
+          <a:xfrm>
+            <a:off x="7799832" y="1472184"/>
+            <a:ext cx="3145536" cy="256032"/>
           </a:xfrm>
           <a:prstGeom prst="rect">
             <a:avLst/>
@@ -11544,7 +12745,7 @@
                 <a:ea typeface="Aptos" pitchFamily="34" charset="-122"/>
                 <a:cs typeface="Aptos" pitchFamily="34" charset="-120"/>
               </a:rPr>
-              <a:t>Key idea</a:t>
+              <a:t>Risk check</a:t>
             </a:r>
             <a:endParaRPr lang="en-US" sz="1300" dirty="0"/>
           </a:p>
@@ -11552,14 +12753,14 @@
       </p:sp>
       <p:sp>
         <p:nvSpPr>
-          <p:cNvPr id="14" name="Text 12"/>
-          <p:cNvSpPr/>
-          <p:nvPr/>
-        </p:nvSpPr>
-        <p:spPr>
-          <a:xfrm>
-            <a:off x="8074152" y="1920240"/>
-            <a:ext cx="2825496" cy="1188720"/>
+          <p:cNvPr id="12" name="Text 10"/>
+          <p:cNvSpPr/>
+          <p:nvPr/>
+        </p:nvSpPr>
+        <p:spPr>
+          <a:xfrm>
+            <a:off x="7799832" y="1828800"/>
+            <a:ext cx="3145536" cy="685800"/>
           </a:xfrm>
           <a:prstGeom prst="rect">
             <a:avLst/>
@@ -11593,18 +12794,171 @@
       </p:sp>
       <p:sp>
         <p:nvSpPr>
-          <p:cNvPr id="15" name="Shape 13"/>
-          <p:cNvSpPr/>
-          <p:nvPr/>
-        </p:nvSpPr>
-        <p:spPr>
-          <a:xfrm>
-            <a:off x="7909560" y="3520440"/>
-            <a:ext cx="3154680" cy="1737360"/>
+          <p:cNvPr id="13" name="Shape 11"/>
+          <p:cNvSpPr/>
+          <p:nvPr/>
+        </p:nvSpPr>
+        <p:spPr>
+          <a:xfrm>
+            <a:off x="7635240" y="2788920"/>
+            <a:ext cx="3474720" cy="1536192"/>
           </a:xfrm>
           <a:prstGeom prst="roundRect">
             <a:avLst>
-              <a:gd name="adj" fmla="val 6316"/>
+              <a:gd name="adj" fmla="val 7143"/>
+            </a:avLst>
+          </a:prstGeom>
+          <a:solidFill>
+            <a:srgbClr val="FFFFFF">
+              <a:alpha val="88000"/>
+            </a:srgbClr>
+          </a:solidFill>
+          <a:ln w="12700">
+            <a:solidFill>
+              <a:srgbClr val="D6E8F2"/>
+            </a:solidFill>
+            <a:prstDash val="solid"/>
+          </a:ln>
+        </p:spPr>
+      </p:sp>
+      <p:sp>
+        <p:nvSpPr>
+          <p:cNvPr id="14" name="Shape 12"/>
+          <p:cNvSpPr/>
+          <p:nvPr/>
+        </p:nvSpPr>
+        <p:spPr>
+          <a:xfrm>
+            <a:off x="8046720" y="3108960"/>
+            <a:ext cx="2651760" cy="896112"/>
+          </a:xfrm>
+          <a:prstGeom prst="arc">
+            <a:avLst/>
+          </a:prstGeom>
+          <a:noFill/>
+          <a:ln w="25400">
+            <a:solidFill>
+              <a:srgbClr val="0068B7"/>
+            </a:solidFill>
+            <a:prstDash val="solid"/>
+          </a:ln>
+        </p:spPr>
+      </p:sp>
+      <p:sp>
+        <p:nvSpPr>
+          <p:cNvPr id="15" name="Text 13"/>
+          <p:cNvSpPr/>
+          <p:nvPr/>
+        </p:nvSpPr>
+        <p:spPr>
+          <a:xfrm>
+            <a:off x="7909560" y="3099816"/>
+            <a:ext cx="2926080" cy="256032"/>
+          </a:xfrm>
+          <a:prstGeom prst="rect">
+            <a:avLst/>
+          </a:prstGeom>
+          <a:noFill/>
+          <a:ln/>
+        </p:spPr>
+        <p:txBody>
+          <a:bodyPr wrap="square" lIns="0" tIns="0" rIns="0" bIns="0" rtlCol="0" anchor="ctr"/>
+          <a:lstStyle/>
+          <a:p>
+            <a:pPr algn="ctr" indent="0" marL="0">
+              <a:buNone/>
+            </a:pPr>
+            <a:r>
+              <a:rPr lang="en-US" sz="1500" b="1" dirty="0">
+                <a:solidFill>
+                  <a:srgbClr val="003A63"/>
+                </a:solidFill>
+                <a:latin typeface="Aptos" pitchFamily="34" charset="0"/>
+                <a:ea typeface="Aptos" pitchFamily="34" charset="-122"/>
+                <a:cs typeface="Aptos" pitchFamily="34" charset="-120"/>
+              </a:rPr>
+              <a:t>Risk</a:t>
+            </a:r>
+            <a:endParaRPr lang="en-US" sz="1500" dirty="0"/>
+          </a:p>
+        </p:txBody>
+      </p:sp>
+      <p:sp>
+        <p:nvSpPr>
+          <p:cNvPr id="16" name="Shape 14"/>
+          <p:cNvSpPr/>
+          <p:nvPr/>
+        </p:nvSpPr>
+        <p:spPr>
+          <a:xfrm>
+            <a:off x="8366760" y="3639312"/>
+            <a:ext cx="2011680" cy="0"/>
+          </a:xfrm>
+          <a:prstGeom prst="line">
+            <a:avLst/>
+          </a:prstGeom>
+          <a:noFill/>
+          <a:ln w="63500">
+            <a:solidFill>
+              <a:srgbClr val="2F8A28"/>
+            </a:solidFill>
+            <a:prstDash val="solid"/>
+          </a:ln>
+        </p:spPr>
+      </p:sp>
+      <p:sp>
+        <p:nvSpPr>
+          <p:cNvPr id="17" name="Text 15"/>
+          <p:cNvSpPr/>
+          <p:nvPr/>
+        </p:nvSpPr>
+        <p:spPr>
+          <a:xfrm>
+            <a:off x="7909560" y="3849624"/>
+            <a:ext cx="2926080" cy="164592"/>
+          </a:xfrm>
+          <a:prstGeom prst="rect">
+            <a:avLst/>
+          </a:prstGeom>
+          <a:noFill/>
+          <a:ln/>
+        </p:spPr>
+        <p:txBody>
+          <a:bodyPr wrap="square" lIns="0" tIns="0" rIns="0" bIns="0" rtlCol="0" anchor="ctr"/>
+          <a:lstStyle/>
+          <a:p>
+            <a:pPr algn="ctr" indent="0" marL="0">
+              <a:buNone/>
+            </a:pPr>
+            <a:r>
+              <a:rPr lang="en-US" sz="900" dirty="0">
+                <a:solidFill>
+                  <a:srgbClr val="003A63"/>
+                </a:solidFill>
+                <a:latin typeface="Aptos" pitchFamily="34" charset="0"/>
+                <a:ea typeface="Aptos" pitchFamily="34" charset="-122"/>
+                <a:cs typeface="Aptos" pitchFamily="34" charset="-120"/>
+              </a:rPr>
+              <a:t>Human review</a:t>
+            </a:r>
+            <a:endParaRPr lang="en-US" sz="900" dirty="0"/>
+          </a:p>
+        </p:txBody>
+      </p:sp>
+      <p:sp>
+        <p:nvSpPr>
+          <p:cNvPr id="18" name="Shape 16"/>
+          <p:cNvSpPr/>
+          <p:nvPr/>
+        </p:nvSpPr>
+        <p:spPr>
+          <a:xfrm>
+            <a:off x="7635240" y="4498848"/>
+            <a:ext cx="3474720" cy="1143000"/>
+          </a:xfrm>
+          <a:prstGeom prst="roundRect">
+            <a:avLst>
+              <a:gd name="adj" fmla="val 9600"/>
             </a:avLst>
           </a:prstGeom>
           <a:solidFill>
@@ -11620,14 +12974,14 @@
       </p:sp>
       <p:sp>
         <p:nvSpPr>
-          <p:cNvPr id="16" name="Text 14"/>
-          <p:cNvSpPr/>
-          <p:nvPr/>
-        </p:nvSpPr>
-        <p:spPr>
-          <a:xfrm>
-            <a:off x="8074152" y="3666744"/>
-            <a:ext cx="2825496" cy="256032"/>
+          <p:cNvPr id="19" name="Text 17"/>
+          <p:cNvSpPr/>
+          <p:nvPr/>
+        </p:nvSpPr>
+        <p:spPr>
+          <a:xfrm>
+            <a:off x="7799832" y="4645152"/>
+            <a:ext cx="3145536" cy="256032"/>
           </a:xfrm>
           <a:prstGeom prst="rect">
             <a:avLst/>
@@ -11651,7 +13005,7 @@
                 <a:ea typeface="Aptos" pitchFamily="34" charset="-122"/>
                 <a:cs typeface="Aptos" pitchFamily="34" charset="-120"/>
               </a:rPr>
-              <a:t>Use this for</a:t>
+              <a:t>Safeguard to plan</a:t>
             </a:r>
             <a:endParaRPr lang="en-US" sz="1300" dirty="0"/>
           </a:p>
@@ -11659,14 +13013,14 @@
       </p:sp>
       <p:sp>
         <p:nvSpPr>
-          <p:cNvPr id="17" name="Text 15"/>
-          <p:cNvSpPr/>
-          <p:nvPr/>
-        </p:nvSpPr>
-        <p:spPr>
-          <a:xfrm>
-            <a:off x="8074152" y="4023360"/>
-            <a:ext cx="2825496" cy="1097280"/>
+          <p:cNvPr id="20" name="Text 18"/>
+          <p:cNvSpPr/>
+          <p:nvPr/>
+        </p:nvSpPr>
+        <p:spPr>
+          <a:xfrm>
+            <a:off x="7799832" y="5001768"/>
+            <a:ext cx="3145536" cy="502920"/>
           </a:xfrm>
           <a:prstGeom prst="rect">
             <a:avLst/>
@@ -11692,7 +13046,7 @@
                 <a:ea typeface="Aptos" pitchFamily="34" charset="-122"/>
                 <a:cs typeface="Aptos" pitchFamily="34" charset="-120"/>
               </a:rPr>
-              <a:t>Connect the concept to public health decisions, safeguards, documentation, or implementation work.</a:t>
+              <a:t>Use the assignment to test whether you can explain the concept, apply it to a realistic public health situation, and identify what would need review before the work moves forward.</a:t>
             </a:r>
             <a:endParaRPr lang="en-US" sz="1550" dirty="0"/>
           </a:p>
@@ -11866,8 +13220,8 @@
         </p:nvSpPr>
         <p:spPr>
           <a:xfrm>
-            <a:off x="9966960" y="6537960"/>
-            <a:ext cx="1645920" cy="201168"/>
+            <a:off x="9646920" y="6537960"/>
+            <a:ext cx="1965960" cy="201168"/>
           </a:xfrm>
           <a:prstGeom prst="rect">
             <a:avLst/>
@@ -11891,7 +13245,7 @@
                 <a:ea typeface="Aptos" pitchFamily="34" charset="-122"/>
                 <a:cs typeface="Aptos" pitchFamily="34" charset="-120"/>
               </a:rPr>
-              <a:t>Â© Paula Soper</a:t>
+              <a:t>Copyright Paula Soper</a:t>
             </a:r>
             <a:endParaRPr lang="en-US" sz="800" dirty="0"/>
           </a:p>
@@ -11938,77 +13292,13 @@
       </p:sp>
       <p:sp>
         <p:nvSpPr>
-          <p:cNvPr id="8" name="Shape 6"/>
+          <p:cNvPr id="8" name="Text 6"/>
           <p:cNvSpPr/>
           <p:nvPr/>
         </p:nvSpPr>
         <p:spPr>
           <a:xfrm>
             <a:off x="640080" y="658368"/>
-            <a:ext cx="420624" cy="420624"/>
-          </a:xfrm>
-          <a:prstGeom prst="ellipse">
-            <a:avLst/>
-          </a:prstGeom>
-          <a:solidFill>
-            <a:srgbClr val="0068B7"/>
-          </a:solidFill>
-          <a:ln w="12700">
-            <a:solidFill>
-              <a:srgbClr val="0068B7"/>
-            </a:solidFill>
-            <a:prstDash val="solid"/>
-          </a:ln>
-        </p:spPr>
-      </p:sp>
-      <p:sp>
-        <p:nvSpPr>
-          <p:cNvPr id="9" name="Text 7"/>
-          <p:cNvSpPr/>
-          <p:nvPr/>
-        </p:nvSpPr>
-        <p:spPr>
-          <a:xfrm>
-            <a:off x="640080" y="731520"/>
-            <a:ext cx="420624" cy="164592"/>
-          </a:xfrm>
-          <a:prstGeom prst="rect">
-            <a:avLst/>
-          </a:prstGeom>
-          <a:noFill/>
-          <a:ln/>
-        </p:spPr>
-        <p:txBody>
-          <a:bodyPr wrap="square" lIns="0" tIns="0" rIns="0" bIns="0" rtlCol="0" anchor="ctr"/>
-          <a:lstStyle/>
-          <a:p>
-            <a:pPr algn="ctr" indent="0" marL="0">
-              <a:buNone/>
-            </a:pPr>
-            <a:r>
-              <a:rPr lang="en-US" sz="1100" b="1" dirty="0">
-                <a:solidFill>
-                  <a:srgbClr val="FFFFFF"/>
-                </a:solidFill>
-                <a:latin typeface="Aptos" pitchFamily="34" charset="0"/>
-                <a:ea typeface="Aptos" pitchFamily="34" charset="-122"/>
-                <a:cs typeface="Aptos" pitchFamily="34" charset="-120"/>
-              </a:rPr>
-              <a:t>14</a:t>
-            </a:r>
-            <a:endParaRPr lang="en-US" sz="1100" dirty="0"/>
-          </a:p>
-        </p:txBody>
-      </p:sp>
-      <p:sp>
-        <p:nvSpPr>
-          <p:cNvPr id="10" name="Text 8"/>
-          <p:cNvSpPr/>
-          <p:nvPr/>
-        </p:nvSpPr>
-        <p:spPr>
-          <a:xfrm>
-            <a:off x="640080" y="621792"/>
             <a:ext cx="10881360" cy="713232"/>
           </a:xfrm>
           <a:prstGeom prst="rect">
@@ -12043,14 +13333,14 @@
       </p:sp>
       <p:sp>
         <p:nvSpPr>
-          <p:cNvPr id="11" name="Text 9"/>
+          <p:cNvPr id="9" name="Text 7"/>
           <p:cNvSpPr/>
           <p:nvPr/>
         </p:nvSpPr>
         <p:spPr>
           <a:xfrm>
             <a:off x="868680" y="1508760"/>
-            <a:ext cx="6537960" cy="4160520"/>
+            <a:ext cx="6309360" cy="4160520"/>
           </a:xfrm>
           <a:prstGeom prst="rect">
             <a:avLst/>
@@ -12109,18 +13399,18 @@
       </p:sp>
       <p:sp>
         <p:nvSpPr>
-          <p:cNvPr id="12" name="Shape 10"/>
-          <p:cNvSpPr/>
-          <p:nvPr/>
-        </p:nvSpPr>
-        <p:spPr>
-          <a:xfrm>
-            <a:off x="7909560" y="1417320"/>
-            <a:ext cx="3154680" cy="1828800"/>
+          <p:cNvPr id="10" name="Shape 8"/>
+          <p:cNvSpPr/>
+          <p:nvPr/>
+        </p:nvSpPr>
+        <p:spPr>
+          <a:xfrm>
+            <a:off x="7635240" y="1325880"/>
+            <a:ext cx="3474720" cy="1325880"/>
           </a:xfrm>
           <a:prstGeom prst="roundRect">
             <a:avLst>
-              <a:gd name="adj" fmla="val 6000"/>
+              <a:gd name="adj" fmla="val 8276"/>
             </a:avLst>
           </a:prstGeom>
           <a:solidFill>
@@ -12136,14 +13426,14 @@
       </p:sp>
       <p:sp>
         <p:nvSpPr>
-          <p:cNvPr id="13" name="Text 11"/>
-          <p:cNvSpPr/>
-          <p:nvPr/>
-        </p:nvSpPr>
-        <p:spPr>
-          <a:xfrm>
-            <a:off x="8074152" y="1563624"/>
-            <a:ext cx="2825496" cy="256032"/>
+          <p:cNvPr id="11" name="Text 9"/>
+          <p:cNvSpPr/>
+          <p:nvPr/>
+        </p:nvSpPr>
+        <p:spPr>
+          <a:xfrm>
+            <a:off x="7799832" y="1472184"/>
+            <a:ext cx="3145536" cy="256032"/>
           </a:xfrm>
           <a:prstGeom prst="rect">
             <a:avLst/>
@@ -12167,7 +13457,7 @@
                 <a:ea typeface="Aptos" pitchFamily="34" charset="-122"/>
                 <a:cs typeface="Aptos" pitchFamily="34" charset="-120"/>
               </a:rPr>
-              <a:t>Key idea</a:t>
+              <a:t>Risk check</a:t>
             </a:r>
             <a:endParaRPr lang="en-US" sz="1300" dirty="0"/>
           </a:p>
@@ -12175,14 +13465,14 @@
       </p:sp>
       <p:sp>
         <p:nvSpPr>
-          <p:cNvPr id="14" name="Text 12"/>
-          <p:cNvSpPr/>
-          <p:nvPr/>
-        </p:nvSpPr>
-        <p:spPr>
-          <a:xfrm>
-            <a:off x="8074152" y="1920240"/>
-            <a:ext cx="2825496" cy="1188720"/>
+          <p:cNvPr id="12" name="Text 10"/>
+          <p:cNvSpPr/>
+          <p:nvPr/>
+        </p:nvSpPr>
+        <p:spPr>
+          <a:xfrm>
+            <a:off x="7799832" y="1828800"/>
+            <a:ext cx="3145536" cy="685800"/>
           </a:xfrm>
           <a:prstGeom prst="rect">
             <a:avLst/>
@@ -12216,18 +13506,171 @@
       </p:sp>
       <p:sp>
         <p:nvSpPr>
-          <p:cNvPr id="15" name="Shape 13"/>
-          <p:cNvSpPr/>
-          <p:nvPr/>
-        </p:nvSpPr>
-        <p:spPr>
-          <a:xfrm>
-            <a:off x="7909560" y="3520440"/>
-            <a:ext cx="3154680" cy="1737360"/>
+          <p:cNvPr id="13" name="Shape 11"/>
+          <p:cNvSpPr/>
+          <p:nvPr/>
+        </p:nvSpPr>
+        <p:spPr>
+          <a:xfrm>
+            <a:off x="7635240" y="2788920"/>
+            <a:ext cx="3474720" cy="1536192"/>
           </a:xfrm>
           <a:prstGeom prst="roundRect">
             <a:avLst>
-              <a:gd name="adj" fmla="val 6316"/>
+              <a:gd name="adj" fmla="val 7143"/>
+            </a:avLst>
+          </a:prstGeom>
+          <a:solidFill>
+            <a:srgbClr val="FFFFFF">
+              <a:alpha val="88000"/>
+            </a:srgbClr>
+          </a:solidFill>
+          <a:ln w="12700">
+            <a:solidFill>
+              <a:srgbClr val="D6E8F2"/>
+            </a:solidFill>
+            <a:prstDash val="solid"/>
+          </a:ln>
+        </p:spPr>
+      </p:sp>
+      <p:sp>
+        <p:nvSpPr>
+          <p:cNvPr id="14" name="Shape 12"/>
+          <p:cNvSpPr/>
+          <p:nvPr/>
+        </p:nvSpPr>
+        <p:spPr>
+          <a:xfrm>
+            <a:off x="8046720" y="3108960"/>
+            <a:ext cx="2651760" cy="896112"/>
+          </a:xfrm>
+          <a:prstGeom prst="arc">
+            <a:avLst/>
+          </a:prstGeom>
+          <a:noFill/>
+          <a:ln w="25400">
+            <a:solidFill>
+              <a:srgbClr val="0068B7"/>
+            </a:solidFill>
+            <a:prstDash val="solid"/>
+          </a:ln>
+        </p:spPr>
+      </p:sp>
+      <p:sp>
+        <p:nvSpPr>
+          <p:cNvPr id="15" name="Text 13"/>
+          <p:cNvSpPr/>
+          <p:nvPr/>
+        </p:nvSpPr>
+        <p:spPr>
+          <a:xfrm>
+            <a:off x="7909560" y="3099816"/>
+            <a:ext cx="2926080" cy="256032"/>
+          </a:xfrm>
+          <a:prstGeom prst="rect">
+            <a:avLst/>
+          </a:prstGeom>
+          <a:noFill/>
+          <a:ln/>
+        </p:spPr>
+        <p:txBody>
+          <a:bodyPr wrap="square" lIns="0" tIns="0" rIns="0" bIns="0" rtlCol="0" anchor="ctr"/>
+          <a:lstStyle/>
+          <a:p>
+            <a:pPr algn="ctr" indent="0" marL="0">
+              <a:buNone/>
+            </a:pPr>
+            <a:r>
+              <a:rPr lang="en-US" sz="1500" b="1" dirty="0">
+                <a:solidFill>
+                  <a:srgbClr val="003A63"/>
+                </a:solidFill>
+                <a:latin typeface="Aptos" pitchFamily="34" charset="0"/>
+                <a:ea typeface="Aptos" pitchFamily="34" charset="-122"/>
+                <a:cs typeface="Aptos" pitchFamily="34" charset="-120"/>
+              </a:rPr>
+              <a:t>Risk</a:t>
+            </a:r>
+            <a:endParaRPr lang="en-US" sz="1500" dirty="0"/>
+          </a:p>
+        </p:txBody>
+      </p:sp>
+      <p:sp>
+        <p:nvSpPr>
+          <p:cNvPr id="16" name="Shape 14"/>
+          <p:cNvSpPr/>
+          <p:nvPr/>
+        </p:nvSpPr>
+        <p:spPr>
+          <a:xfrm>
+            <a:off x="8366760" y="3639312"/>
+            <a:ext cx="2011680" cy="0"/>
+          </a:xfrm>
+          <a:prstGeom prst="line">
+            <a:avLst/>
+          </a:prstGeom>
+          <a:noFill/>
+          <a:ln w="63500">
+            <a:solidFill>
+              <a:srgbClr val="2F8A28"/>
+            </a:solidFill>
+            <a:prstDash val="solid"/>
+          </a:ln>
+        </p:spPr>
+      </p:sp>
+      <p:sp>
+        <p:nvSpPr>
+          <p:cNvPr id="17" name="Text 15"/>
+          <p:cNvSpPr/>
+          <p:nvPr/>
+        </p:nvSpPr>
+        <p:spPr>
+          <a:xfrm>
+            <a:off x="7909560" y="3849624"/>
+            <a:ext cx="2926080" cy="164592"/>
+          </a:xfrm>
+          <a:prstGeom prst="rect">
+            <a:avLst/>
+          </a:prstGeom>
+          <a:noFill/>
+          <a:ln/>
+        </p:spPr>
+        <p:txBody>
+          <a:bodyPr wrap="square" lIns="0" tIns="0" rIns="0" bIns="0" rtlCol="0" anchor="ctr"/>
+          <a:lstStyle/>
+          <a:p>
+            <a:pPr algn="ctr" indent="0" marL="0">
+              <a:buNone/>
+            </a:pPr>
+            <a:r>
+              <a:rPr lang="en-US" sz="900" dirty="0">
+                <a:solidFill>
+                  <a:srgbClr val="003A63"/>
+                </a:solidFill>
+                <a:latin typeface="Aptos" pitchFamily="34" charset="0"/>
+                <a:ea typeface="Aptos" pitchFamily="34" charset="-122"/>
+                <a:cs typeface="Aptos" pitchFamily="34" charset="-120"/>
+              </a:rPr>
+              <a:t>Human review</a:t>
+            </a:r>
+            <a:endParaRPr lang="en-US" sz="900" dirty="0"/>
+          </a:p>
+        </p:txBody>
+      </p:sp>
+      <p:sp>
+        <p:nvSpPr>
+          <p:cNvPr id="18" name="Shape 16"/>
+          <p:cNvSpPr/>
+          <p:nvPr/>
+        </p:nvSpPr>
+        <p:spPr>
+          <a:xfrm>
+            <a:off x="7635240" y="4498848"/>
+            <a:ext cx="3474720" cy="1143000"/>
+          </a:xfrm>
+          <a:prstGeom prst="roundRect">
+            <a:avLst>
+              <a:gd name="adj" fmla="val 9600"/>
             </a:avLst>
           </a:prstGeom>
           <a:solidFill>
@@ -12243,14 +13686,14 @@
       </p:sp>
       <p:sp>
         <p:nvSpPr>
-          <p:cNvPr id="16" name="Text 14"/>
-          <p:cNvSpPr/>
-          <p:nvPr/>
-        </p:nvSpPr>
-        <p:spPr>
-          <a:xfrm>
-            <a:off x="8074152" y="3666744"/>
-            <a:ext cx="2825496" cy="256032"/>
+          <p:cNvPr id="19" name="Text 17"/>
+          <p:cNvSpPr/>
+          <p:nvPr/>
+        </p:nvSpPr>
+        <p:spPr>
+          <a:xfrm>
+            <a:off x="7799832" y="4645152"/>
+            <a:ext cx="3145536" cy="256032"/>
           </a:xfrm>
           <a:prstGeom prst="rect">
             <a:avLst/>
@@ -12274,7 +13717,7 @@
                 <a:ea typeface="Aptos" pitchFamily="34" charset="-122"/>
                 <a:cs typeface="Aptos" pitchFamily="34" charset="-120"/>
               </a:rPr>
-              <a:t>Use this for</a:t>
+              <a:t>Safeguard to plan</a:t>
             </a:r>
             <a:endParaRPr lang="en-US" sz="1300" dirty="0"/>
           </a:p>
@@ -12282,14 +13725,14 @@
       </p:sp>
       <p:sp>
         <p:nvSpPr>
-          <p:cNvPr id="17" name="Text 15"/>
-          <p:cNvSpPr/>
-          <p:nvPr/>
-        </p:nvSpPr>
-        <p:spPr>
-          <a:xfrm>
-            <a:off x="8074152" y="4023360"/>
-            <a:ext cx="2825496" cy="1097280"/>
+          <p:cNvPr id="20" name="Text 18"/>
+          <p:cNvSpPr/>
+          <p:nvPr/>
+        </p:nvSpPr>
+        <p:spPr>
+          <a:xfrm>
+            <a:off x="7799832" y="5001768"/>
+            <a:ext cx="3145536" cy="502920"/>
           </a:xfrm>
           <a:prstGeom prst="rect">
             <a:avLst/>
@@ -12315,7 +13758,7 @@
                 <a:ea typeface="Aptos" pitchFamily="34" charset="-122"/>
                 <a:cs typeface="Aptos" pitchFamily="34" charset="-120"/>
               </a:rPr>
-              <a:t>Connect the concept to public health decisions, safeguards, documentation, or implementation work.</a:t>
+              <a:t>Identify what could go wrong, who could be affected, what safeguards are needed, and what evidence should be reviewed before use expands.</a:t>
             </a:r>
             <a:endParaRPr lang="en-US" sz="1550" dirty="0"/>
           </a:p>
@@ -12489,8 +13932,8 @@
         </p:nvSpPr>
         <p:spPr>
           <a:xfrm>
-            <a:off x="9966960" y="6537960"/>
-            <a:ext cx="1645920" cy="201168"/>
+            <a:off x="9646920" y="6537960"/>
+            <a:ext cx="1965960" cy="201168"/>
           </a:xfrm>
           <a:prstGeom prst="rect">
             <a:avLst/>
@@ -12514,7 +13957,7 @@
                 <a:ea typeface="Aptos" pitchFamily="34" charset="-122"/>
                 <a:cs typeface="Aptos" pitchFamily="34" charset="-120"/>
               </a:rPr>
-              <a:t>Â© Paula Soper</a:t>
+              <a:t>Copyright Paula Soper</a:t>
             </a:r>
             <a:endParaRPr lang="en-US" sz="800" dirty="0"/>
           </a:p>
@@ -12857,46 +14300,7 @@
       </p:sp>
       <p:sp>
         <p:nvSpPr>
-          <p:cNvPr id="15" name="Text 13"/>
-          <p:cNvSpPr/>
-          <p:nvPr/>
-        </p:nvSpPr>
-        <p:spPr>
-          <a:xfrm>
-            <a:off x="8817864" y="4187952"/>
-            <a:ext cx="201168" cy="256032"/>
-          </a:xfrm>
-          <a:prstGeom prst="rect">
-            <a:avLst/>
-          </a:prstGeom>
-          <a:noFill/>
-          <a:ln/>
-        </p:spPr>
-        <p:txBody>
-          <a:bodyPr wrap="square" lIns="0" tIns="0" rIns="0" bIns="0" rtlCol="0" anchor="ctr"/>
-          <a:lstStyle/>
-          <a:p>
-            <a:pPr algn="ctr" indent="0" marL="0">
-              <a:buNone/>
-            </a:pPr>
-            <a:r>
-              <a:rPr lang="en-US" sz="1800" b="1" dirty="0">
-                <a:solidFill>
-                  <a:srgbClr val="0068B7"/>
-                </a:solidFill>
-                <a:latin typeface="Aptos" pitchFamily="34" charset="0"/>
-                <a:ea typeface="Aptos" pitchFamily="34" charset="-122"/>
-                <a:cs typeface="Aptos" pitchFamily="34" charset="-120"/>
-              </a:rPr>
-              <a:t>â†’</a:t>
-            </a:r>
-            <a:endParaRPr lang="en-US" sz="1800" dirty="0"/>
-          </a:p>
-        </p:txBody>
-      </p:sp>
-      <p:sp>
-        <p:nvSpPr>
-          <p:cNvPr id="16" name="Shape 14"/>
+          <p:cNvPr id="15" name="Shape 13"/>
           <p:cNvSpPr/>
           <p:nvPr/>
         </p:nvSpPr>
@@ -12923,7 +14327,7 @@
       </p:sp>
       <p:sp>
         <p:nvSpPr>
-          <p:cNvPr id="17" name="Text 15"/>
+          <p:cNvPr id="16" name="Text 14"/>
           <p:cNvSpPr/>
           <p:nvPr/>
         </p:nvSpPr>
@@ -12964,46 +14368,7 @@
       </p:sp>
       <p:sp>
         <p:nvSpPr>
-          <p:cNvPr id="18" name="Text 16"/>
-          <p:cNvSpPr/>
-          <p:nvPr/>
-        </p:nvSpPr>
-        <p:spPr>
-          <a:xfrm>
-            <a:off x="10046208" y="4187952"/>
-            <a:ext cx="201168" cy="256032"/>
-          </a:xfrm>
-          <a:prstGeom prst="rect">
-            <a:avLst/>
-          </a:prstGeom>
-          <a:noFill/>
-          <a:ln/>
-        </p:spPr>
-        <p:txBody>
-          <a:bodyPr wrap="square" lIns="0" tIns="0" rIns="0" bIns="0" rtlCol="0" anchor="ctr"/>
-          <a:lstStyle/>
-          <a:p>
-            <a:pPr algn="ctr" indent="0" marL="0">
-              <a:buNone/>
-            </a:pPr>
-            <a:r>
-              <a:rPr lang="en-US" sz="1800" b="1" dirty="0">
-                <a:solidFill>
-                  <a:srgbClr val="0068B7"/>
-                </a:solidFill>
-                <a:latin typeface="Aptos" pitchFamily="34" charset="0"/>
-                <a:ea typeface="Aptos" pitchFamily="34" charset="-122"/>
-                <a:cs typeface="Aptos" pitchFamily="34" charset="-120"/>
-              </a:rPr>
-              <a:t>â†’</a:t>
-            </a:r>
-            <a:endParaRPr lang="en-US" sz="1800" dirty="0"/>
-          </a:p>
-        </p:txBody>
-      </p:sp>
-      <p:sp>
-        <p:nvSpPr>
-          <p:cNvPr id="19" name="Shape 17"/>
+          <p:cNvPr id="17" name="Shape 15"/>
           <p:cNvSpPr/>
           <p:nvPr/>
         </p:nvSpPr>
@@ -13030,7 +14395,7 @@
       </p:sp>
       <p:sp>
         <p:nvSpPr>
-          <p:cNvPr id="20" name="Text 18"/>
+          <p:cNvPr id="18" name="Text 16"/>
           <p:cNvSpPr/>
           <p:nvPr/>
         </p:nvSpPr>
@@ -13237,8 +14602,8 @@
         </p:nvSpPr>
         <p:spPr>
           <a:xfrm>
-            <a:off x="9966960" y="6537960"/>
-            <a:ext cx="1645920" cy="201168"/>
+            <a:off x="9646920" y="6537960"/>
+            <a:ext cx="1965960" cy="201168"/>
           </a:xfrm>
           <a:prstGeom prst="rect">
             <a:avLst/>
@@ -13262,7 +14627,7 @@
                 <a:ea typeface="Aptos" pitchFamily="34" charset="-122"/>
                 <a:cs typeface="Aptos" pitchFamily="34" charset="-120"/>
               </a:rPr>
-              <a:t>Â© Paula Soper</a:t>
+              <a:t>Copyright Paula Soper</a:t>
             </a:r>
             <a:endParaRPr lang="en-US" sz="800" dirty="0"/>
           </a:p>
@@ -13605,46 +14970,7 @@
       </p:sp>
       <p:sp>
         <p:nvSpPr>
-          <p:cNvPr id="15" name="Text 13"/>
-          <p:cNvSpPr/>
-          <p:nvPr/>
-        </p:nvSpPr>
-        <p:spPr>
-          <a:xfrm>
-            <a:off x="8817864" y="4187952"/>
-            <a:ext cx="201168" cy="256032"/>
-          </a:xfrm>
-          <a:prstGeom prst="rect">
-            <a:avLst/>
-          </a:prstGeom>
-          <a:noFill/>
-          <a:ln/>
-        </p:spPr>
-        <p:txBody>
-          <a:bodyPr wrap="square" lIns="0" tIns="0" rIns="0" bIns="0" rtlCol="0" anchor="ctr"/>
-          <a:lstStyle/>
-          <a:p>
-            <a:pPr algn="ctr" indent="0" marL="0">
-              <a:buNone/>
-            </a:pPr>
-            <a:r>
-              <a:rPr lang="en-US" sz="1800" b="1" dirty="0">
-                <a:solidFill>
-                  <a:srgbClr val="0068B7"/>
-                </a:solidFill>
-                <a:latin typeface="Aptos" pitchFamily="34" charset="0"/>
-                <a:ea typeface="Aptos" pitchFamily="34" charset="-122"/>
-                <a:cs typeface="Aptos" pitchFamily="34" charset="-120"/>
-              </a:rPr>
-              <a:t>â†’</a:t>
-            </a:r>
-            <a:endParaRPr lang="en-US" sz="1800" dirty="0"/>
-          </a:p>
-        </p:txBody>
-      </p:sp>
-      <p:sp>
-        <p:nvSpPr>
-          <p:cNvPr id="16" name="Shape 14"/>
+          <p:cNvPr id="15" name="Shape 13"/>
           <p:cNvSpPr/>
           <p:nvPr/>
         </p:nvSpPr>
@@ -13671,7 +14997,7 @@
       </p:sp>
       <p:sp>
         <p:nvSpPr>
-          <p:cNvPr id="17" name="Text 15"/>
+          <p:cNvPr id="16" name="Text 14"/>
           <p:cNvSpPr/>
           <p:nvPr/>
         </p:nvSpPr>
@@ -13712,46 +15038,7 @@
       </p:sp>
       <p:sp>
         <p:nvSpPr>
-          <p:cNvPr id="18" name="Text 16"/>
-          <p:cNvSpPr/>
-          <p:nvPr/>
-        </p:nvSpPr>
-        <p:spPr>
-          <a:xfrm>
-            <a:off x="10046208" y="4187952"/>
-            <a:ext cx="201168" cy="256032"/>
-          </a:xfrm>
-          <a:prstGeom prst="rect">
-            <a:avLst/>
-          </a:prstGeom>
-          <a:noFill/>
-          <a:ln/>
-        </p:spPr>
-        <p:txBody>
-          <a:bodyPr wrap="square" lIns="0" tIns="0" rIns="0" bIns="0" rtlCol="0" anchor="ctr"/>
-          <a:lstStyle/>
-          <a:p>
-            <a:pPr algn="ctr" indent="0" marL="0">
-              <a:buNone/>
-            </a:pPr>
-            <a:r>
-              <a:rPr lang="en-US" sz="1800" b="1" dirty="0">
-                <a:solidFill>
-                  <a:srgbClr val="0068B7"/>
-                </a:solidFill>
-                <a:latin typeface="Aptos" pitchFamily="34" charset="0"/>
-                <a:ea typeface="Aptos" pitchFamily="34" charset="-122"/>
-                <a:cs typeface="Aptos" pitchFamily="34" charset="-120"/>
-              </a:rPr>
-              <a:t>â†’</a:t>
-            </a:r>
-            <a:endParaRPr lang="en-US" sz="1800" dirty="0"/>
-          </a:p>
-        </p:txBody>
-      </p:sp>
-      <p:sp>
-        <p:nvSpPr>
-          <p:cNvPr id="19" name="Shape 17"/>
+          <p:cNvPr id="17" name="Shape 15"/>
           <p:cNvSpPr/>
           <p:nvPr/>
         </p:nvSpPr>
@@ -13778,7 +15065,7 @@
       </p:sp>
       <p:sp>
         <p:nvSpPr>
-          <p:cNvPr id="20" name="Text 18"/>
+          <p:cNvPr id="18" name="Text 16"/>
           <p:cNvSpPr/>
           <p:nvPr/>
         </p:nvSpPr>
@@ -13985,8 +15272,8 @@
         </p:nvSpPr>
         <p:spPr>
           <a:xfrm>
-            <a:off x="9966960" y="6537960"/>
-            <a:ext cx="1645920" cy="201168"/>
+            <a:off x="9646920" y="6537960"/>
+            <a:ext cx="1965960" cy="201168"/>
           </a:xfrm>
           <a:prstGeom prst="rect">
             <a:avLst/>
@@ -14010,7 +15297,7 @@
                 <a:ea typeface="Aptos" pitchFamily="34" charset="-122"/>
                 <a:cs typeface="Aptos" pitchFamily="34" charset="-120"/>
               </a:rPr>
-              <a:t>Â© Paula Soper</a:t>
+              <a:t>Copyright Paula Soper</a:t>
             </a:r>
             <a:endParaRPr lang="en-US" sz="800" dirty="0"/>
           </a:p>
@@ -14057,77 +15344,13 @@
       </p:sp>
       <p:sp>
         <p:nvSpPr>
-          <p:cNvPr id="8" name="Shape 6"/>
+          <p:cNvPr id="8" name="Text 6"/>
           <p:cNvSpPr/>
           <p:nvPr/>
         </p:nvSpPr>
         <p:spPr>
           <a:xfrm>
             <a:off x="640080" y="658368"/>
-            <a:ext cx="420624" cy="420624"/>
-          </a:xfrm>
-          <a:prstGeom prst="ellipse">
-            <a:avLst/>
-          </a:prstGeom>
-          <a:solidFill>
-            <a:srgbClr val="0068B7"/>
-          </a:solidFill>
-          <a:ln w="12700">
-            <a:solidFill>
-              <a:srgbClr val="0068B7"/>
-            </a:solidFill>
-            <a:prstDash val="solid"/>
-          </a:ln>
-        </p:spPr>
-      </p:sp>
-      <p:sp>
-        <p:nvSpPr>
-          <p:cNvPr id="9" name="Text 7"/>
-          <p:cNvSpPr/>
-          <p:nvPr/>
-        </p:nvSpPr>
-        <p:spPr>
-          <a:xfrm>
-            <a:off x="640080" y="731520"/>
-            <a:ext cx="420624" cy="164592"/>
-          </a:xfrm>
-          <a:prstGeom prst="rect">
-            <a:avLst/>
-          </a:prstGeom>
-          <a:noFill/>
-          <a:ln/>
-        </p:spPr>
-        <p:txBody>
-          <a:bodyPr wrap="square" lIns="0" tIns="0" rIns="0" bIns="0" rtlCol="0" anchor="ctr"/>
-          <a:lstStyle/>
-          <a:p>
-            <a:pPr algn="ctr" indent="0" marL="0">
-              <a:buNone/>
-            </a:pPr>
-            <a:r>
-              <a:rPr lang="en-US" sz="1100" b="1" dirty="0">
-                <a:solidFill>
-                  <a:srgbClr val="FFFFFF"/>
-                </a:solidFill>
-                <a:latin typeface="Aptos" pitchFamily="34" charset="0"/>
-                <a:ea typeface="Aptos" pitchFamily="34" charset="-122"/>
-                <a:cs typeface="Aptos" pitchFamily="34" charset="-120"/>
-              </a:rPr>
-              <a:t>1</a:t>
-            </a:r>
-            <a:endParaRPr lang="en-US" sz="1100" dirty="0"/>
-          </a:p>
-        </p:txBody>
-      </p:sp>
-      <p:sp>
-        <p:nvSpPr>
-          <p:cNvPr id="10" name="Text 8"/>
-          <p:cNvSpPr/>
-          <p:nvPr/>
-        </p:nvSpPr>
-        <p:spPr>
-          <a:xfrm>
-            <a:off x="640080" y="621792"/>
             <a:ext cx="10881360" cy="713232"/>
           </a:xfrm>
           <a:prstGeom prst="rect">
@@ -14162,14 +15385,14 @@
       </p:sp>
       <p:sp>
         <p:nvSpPr>
-          <p:cNvPr id="11" name="Text 9"/>
+          <p:cNvPr id="9" name="Text 7"/>
           <p:cNvSpPr/>
           <p:nvPr/>
         </p:nvSpPr>
         <p:spPr>
           <a:xfrm>
             <a:off x="868680" y="1508760"/>
-            <a:ext cx="6537960" cy="4160520"/>
+            <a:ext cx="6309360" cy="4160520"/>
           </a:xfrm>
           <a:prstGeom prst="rect">
             <a:avLst/>
@@ -14228,18 +15451,18 @@
       </p:sp>
       <p:sp>
         <p:nvSpPr>
-          <p:cNvPr id="12" name="Shape 10"/>
-          <p:cNvSpPr/>
-          <p:nvPr/>
-        </p:nvSpPr>
-        <p:spPr>
-          <a:xfrm>
-            <a:off x="7909560" y="1417320"/>
-            <a:ext cx="3154680" cy="1828800"/>
+          <p:cNvPr id="10" name="Shape 8"/>
+          <p:cNvSpPr/>
+          <p:nvPr/>
+        </p:nvSpPr>
+        <p:spPr>
+          <a:xfrm>
+            <a:off x="7635240" y="1325880"/>
+            <a:ext cx="3474720" cy="1325880"/>
           </a:xfrm>
           <a:prstGeom prst="roundRect">
             <a:avLst>
-              <a:gd name="adj" fmla="val 6000"/>
+              <a:gd name="adj" fmla="val 8276"/>
             </a:avLst>
           </a:prstGeom>
           <a:solidFill>
@@ -14255,14 +15478,14 @@
       </p:sp>
       <p:sp>
         <p:nvSpPr>
-          <p:cNvPr id="13" name="Text 11"/>
-          <p:cNvSpPr/>
-          <p:nvPr/>
-        </p:nvSpPr>
-        <p:spPr>
-          <a:xfrm>
-            <a:off x="8074152" y="1563624"/>
-            <a:ext cx="2825496" cy="256032"/>
+          <p:cNvPr id="11" name="Text 9"/>
+          <p:cNvSpPr/>
+          <p:nvPr/>
+        </p:nvSpPr>
+        <p:spPr>
+          <a:xfrm>
+            <a:off x="7799832" y="1472184"/>
+            <a:ext cx="3145536" cy="256032"/>
           </a:xfrm>
           <a:prstGeom prst="rect">
             <a:avLst/>
@@ -14286,7 +15509,7 @@
                 <a:ea typeface="Aptos" pitchFamily="34" charset="-122"/>
                 <a:cs typeface="Aptos" pitchFamily="34" charset="-120"/>
               </a:rPr>
-              <a:t>Key idea</a:t>
+              <a:t>Risk check</a:t>
             </a:r>
             <a:endParaRPr lang="en-US" sz="1300" dirty="0"/>
           </a:p>
@@ -14294,14 +15517,14 @@
       </p:sp>
       <p:sp>
         <p:nvSpPr>
-          <p:cNvPr id="14" name="Text 12"/>
-          <p:cNvSpPr/>
-          <p:nvPr/>
-        </p:nvSpPr>
-        <p:spPr>
-          <a:xfrm>
-            <a:off x="8074152" y="1920240"/>
-            <a:ext cx="2825496" cy="1188720"/>
+          <p:cNvPr id="12" name="Text 10"/>
+          <p:cNvSpPr/>
+          <p:nvPr/>
+        </p:nvSpPr>
+        <p:spPr>
+          <a:xfrm>
+            <a:off x="7799832" y="1828800"/>
+            <a:ext cx="3145536" cy="685800"/>
           </a:xfrm>
           <a:prstGeom prst="rect">
             <a:avLst/>
@@ -14335,18 +15558,171 @@
       </p:sp>
       <p:sp>
         <p:nvSpPr>
-          <p:cNvPr id="15" name="Shape 13"/>
-          <p:cNvSpPr/>
-          <p:nvPr/>
-        </p:nvSpPr>
-        <p:spPr>
-          <a:xfrm>
-            <a:off x="7909560" y="3520440"/>
-            <a:ext cx="3154680" cy="1737360"/>
+          <p:cNvPr id="13" name="Shape 11"/>
+          <p:cNvSpPr/>
+          <p:nvPr/>
+        </p:nvSpPr>
+        <p:spPr>
+          <a:xfrm>
+            <a:off x="7635240" y="2788920"/>
+            <a:ext cx="3474720" cy="1536192"/>
           </a:xfrm>
           <a:prstGeom prst="roundRect">
             <a:avLst>
-              <a:gd name="adj" fmla="val 6316"/>
+              <a:gd name="adj" fmla="val 7143"/>
+            </a:avLst>
+          </a:prstGeom>
+          <a:solidFill>
+            <a:srgbClr val="FFFFFF">
+              <a:alpha val="88000"/>
+            </a:srgbClr>
+          </a:solidFill>
+          <a:ln w="12700">
+            <a:solidFill>
+              <a:srgbClr val="D6E8F2"/>
+            </a:solidFill>
+            <a:prstDash val="solid"/>
+          </a:ln>
+        </p:spPr>
+      </p:sp>
+      <p:sp>
+        <p:nvSpPr>
+          <p:cNvPr id="14" name="Shape 12"/>
+          <p:cNvSpPr/>
+          <p:nvPr/>
+        </p:nvSpPr>
+        <p:spPr>
+          <a:xfrm>
+            <a:off x="8046720" y="3108960"/>
+            <a:ext cx="2651760" cy="896112"/>
+          </a:xfrm>
+          <a:prstGeom prst="arc">
+            <a:avLst/>
+          </a:prstGeom>
+          <a:noFill/>
+          <a:ln w="25400">
+            <a:solidFill>
+              <a:srgbClr val="0068B7"/>
+            </a:solidFill>
+            <a:prstDash val="solid"/>
+          </a:ln>
+        </p:spPr>
+      </p:sp>
+      <p:sp>
+        <p:nvSpPr>
+          <p:cNvPr id="15" name="Text 13"/>
+          <p:cNvSpPr/>
+          <p:nvPr/>
+        </p:nvSpPr>
+        <p:spPr>
+          <a:xfrm>
+            <a:off x="7909560" y="3099816"/>
+            <a:ext cx="2926080" cy="256032"/>
+          </a:xfrm>
+          <a:prstGeom prst="rect">
+            <a:avLst/>
+          </a:prstGeom>
+          <a:noFill/>
+          <a:ln/>
+        </p:spPr>
+        <p:txBody>
+          <a:bodyPr wrap="square" lIns="0" tIns="0" rIns="0" bIns="0" rtlCol="0" anchor="ctr"/>
+          <a:lstStyle/>
+          <a:p>
+            <a:pPr algn="ctr" indent="0" marL="0">
+              <a:buNone/>
+            </a:pPr>
+            <a:r>
+              <a:rPr lang="en-US" sz="1500" b="1" dirty="0">
+                <a:solidFill>
+                  <a:srgbClr val="003A63"/>
+                </a:solidFill>
+                <a:latin typeface="Aptos" pitchFamily="34" charset="0"/>
+                <a:ea typeface="Aptos" pitchFamily="34" charset="-122"/>
+                <a:cs typeface="Aptos" pitchFamily="34" charset="-120"/>
+              </a:rPr>
+              <a:t>Risk</a:t>
+            </a:r>
+            <a:endParaRPr lang="en-US" sz="1500" dirty="0"/>
+          </a:p>
+        </p:txBody>
+      </p:sp>
+      <p:sp>
+        <p:nvSpPr>
+          <p:cNvPr id="16" name="Shape 14"/>
+          <p:cNvSpPr/>
+          <p:nvPr/>
+        </p:nvSpPr>
+        <p:spPr>
+          <a:xfrm>
+            <a:off x="8366760" y="3639312"/>
+            <a:ext cx="2011680" cy="0"/>
+          </a:xfrm>
+          <a:prstGeom prst="line">
+            <a:avLst/>
+          </a:prstGeom>
+          <a:noFill/>
+          <a:ln w="63500">
+            <a:solidFill>
+              <a:srgbClr val="2F8A28"/>
+            </a:solidFill>
+            <a:prstDash val="solid"/>
+          </a:ln>
+        </p:spPr>
+      </p:sp>
+      <p:sp>
+        <p:nvSpPr>
+          <p:cNvPr id="17" name="Text 15"/>
+          <p:cNvSpPr/>
+          <p:nvPr/>
+        </p:nvSpPr>
+        <p:spPr>
+          <a:xfrm>
+            <a:off x="7909560" y="3849624"/>
+            <a:ext cx="2926080" cy="164592"/>
+          </a:xfrm>
+          <a:prstGeom prst="rect">
+            <a:avLst/>
+          </a:prstGeom>
+          <a:noFill/>
+          <a:ln/>
+        </p:spPr>
+        <p:txBody>
+          <a:bodyPr wrap="square" lIns="0" tIns="0" rIns="0" bIns="0" rtlCol="0" anchor="ctr"/>
+          <a:lstStyle/>
+          <a:p>
+            <a:pPr algn="ctr" indent="0" marL="0">
+              <a:buNone/>
+            </a:pPr>
+            <a:r>
+              <a:rPr lang="en-US" sz="900" dirty="0">
+                <a:solidFill>
+                  <a:srgbClr val="003A63"/>
+                </a:solidFill>
+                <a:latin typeface="Aptos" pitchFamily="34" charset="0"/>
+                <a:ea typeface="Aptos" pitchFamily="34" charset="-122"/>
+                <a:cs typeface="Aptos" pitchFamily="34" charset="-120"/>
+              </a:rPr>
+              <a:t>Human review</a:t>
+            </a:r>
+            <a:endParaRPr lang="en-US" sz="900" dirty="0"/>
+          </a:p>
+        </p:txBody>
+      </p:sp>
+      <p:sp>
+        <p:nvSpPr>
+          <p:cNvPr id="18" name="Shape 16"/>
+          <p:cNvSpPr/>
+          <p:nvPr/>
+        </p:nvSpPr>
+        <p:spPr>
+          <a:xfrm>
+            <a:off x="7635240" y="4498848"/>
+            <a:ext cx="3474720" cy="1143000"/>
+          </a:xfrm>
+          <a:prstGeom prst="roundRect">
+            <a:avLst>
+              <a:gd name="adj" fmla="val 9600"/>
             </a:avLst>
           </a:prstGeom>
           <a:solidFill>
@@ -14362,14 +15738,14 @@
       </p:sp>
       <p:sp>
         <p:nvSpPr>
-          <p:cNvPr id="16" name="Text 14"/>
-          <p:cNvSpPr/>
-          <p:nvPr/>
-        </p:nvSpPr>
-        <p:spPr>
-          <a:xfrm>
-            <a:off x="8074152" y="3666744"/>
-            <a:ext cx="2825496" cy="256032"/>
+          <p:cNvPr id="19" name="Text 17"/>
+          <p:cNvSpPr/>
+          <p:nvPr/>
+        </p:nvSpPr>
+        <p:spPr>
+          <a:xfrm>
+            <a:off x="7799832" y="4645152"/>
+            <a:ext cx="3145536" cy="256032"/>
           </a:xfrm>
           <a:prstGeom prst="rect">
             <a:avLst/>
@@ -14393,7 +15769,7 @@
                 <a:ea typeface="Aptos" pitchFamily="34" charset="-122"/>
                 <a:cs typeface="Aptos" pitchFamily="34" charset="-120"/>
               </a:rPr>
-              <a:t>Use this for</a:t>
+              <a:t>Safeguard to plan</a:t>
             </a:r>
             <a:endParaRPr lang="en-US" sz="1300" dirty="0"/>
           </a:p>
@@ -14401,14 +15777,14 @@
       </p:sp>
       <p:sp>
         <p:nvSpPr>
-          <p:cNvPr id="17" name="Text 15"/>
-          <p:cNvSpPr/>
-          <p:nvPr/>
-        </p:nvSpPr>
-        <p:spPr>
-          <a:xfrm>
-            <a:off x="8074152" y="4023360"/>
-            <a:ext cx="2825496" cy="1097280"/>
+          <p:cNvPr id="20" name="Text 18"/>
+          <p:cNvSpPr/>
+          <p:nvPr/>
+        </p:nvSpPr>
+        <p:spPr>
+          <a:xfrm>
+            <a:off x="7799832" y="5001768"/>
+            <a:ext cx="3145536" cy="502920"/>
           </a:xfrm>
           <a:prstGeom prst="rect">
             <a:avLst/>
@@ -14434,7 +15810,7 @@
                 <a:ea typeface="Aptos" pitchFamily="34" charset="-122"/>
                 <a:cs typeface="Aptos" pitchFamily="34" charset="-120"/>
               </a:rPr>
-              <a:t>Connect the concept to public health decisions, safeguards, documentation, or implementation work.</a:t>
+              <a:t>Use the assignment to test whether you can explain the concept, apply it to a realistic public health situation, and identify what would need review before the work moves forward.</a:t>
             </a:r>
             <a:endParaRPr lang="en-US" sz="1550" dirty="0"/>
           </a:p>
@@ -14608,8 +15984,8 @@
         </p:nvSpPr>
         <p:spPr>
           <a:xfrm>
-            <a:off x="9966960" y="6537960"/>
-            <a:ext cx="1645920" cy="201168"/>
+            <a:off x="9646920" y="6537960"/>
+            <a:ext cx="1965960" cy="201168"/>
           </a:xfrm>
           <a:prstGeom prst="rect">
             <a:avLst/>
@@ -14633,7 +16009,7 @@
                 <a:ea typeface="Aptos" pitchFamily="34" charset="-122"/>
                 <a:cs typeface="Aptos" pitchFamily="34" charset="-120"/>
               </a:rPr>
-              <a:t>Â© Paula Soper</a:t>
+              <a:t>Copyright Paula Soper</a:t>
             </a:r>
             <a:endParaRPr lang="en-US" sz="800" dirty="0"/>
           </a:p>
@@ -14728,7 +16104,7 @@
         <p:spPr>
           <a:xfrm>
             <a:off x="868680" y="1508760"/>
-            <a:ext cx="6537960" cy="4160520"/>
+            <a:ext cx="6309360" cy="4160520"/>
           </a:xfrm>
           <a:prstGeom prst="rect">
             <a:avLst/>
@@ -14765,12 +16141,12 @@
         </p:nvSpPr>
         <p:spPr>
           <a:xfrm>
-            <a:off x="7909560" y="1417320"/>
-            <a:ext cx="3154680" cy="1828800"/>
+            <a:off x="7635240" y="1325880"/>
+            <a:ext cx="3474720" cy="1325880"/>
           </a:xfrm>
           <a:prstGeom prst="roundRect">
             <a:avLst>
-              <a:gd name="adj" fmla="val 6000"/>
+              <a:gd name="adj" fmla="val 8276"/>
             </a:avLst>
           </a:prstGeom>
           <a:solidFill>
@@ -14792,8 +16168,8 @@
         </p:nvSpPr>
         <p:spPr>
           <a:xfrm>
-            <a:off x="8074152" y="1563624"/>
-            <a:ext cx="2825496" cy="256032"/>
+            <a:off x="7799832" y="1472184"/>
+            <a:ext cx="3145536" cy="256032"/>
           </a:xfrm>
           <a:prstGeom prst="rect">
             <a:avLst/>
@@ -14817,7 +16193,7 @@
                 <a:ea typeface="Aptos" pitchFamily="34" charset="-122"/>
                 <a:cs typeface="Aptos" pitchFamily="34" charset="-120"/>
               </a:rPr>
-              <a:t>Key idea</a:t>
+              <a:t>Risk check</a:t>
             </a:r>
             <a:endParaRPr lang="en-US" sz="1300" dirty="0"/>
           </a:p>
@@ -14831,8 +16207,8 @@
         </p:nvSpPr>
         <p:spPr>
           <a:xfrm>
-            <a:off x="8074152" y="1920240"/>
-            <a:ext cx="2825496" cy="1188720"/>
+            <a:off x="7799832" y="1828800"/>
+            <a:ext cx="3145536" cy="685800"/>
           </a:xfrm>
           <a:prstGeom prst="rect">
             <a:avLst/>
@@ -14872,12 +16248,165 @@
         </p:nvSpPr>
         <p:spPr>
           <a:xfrm>
-            <a:off x="7909560" y="3520440"/>
-            <a:ext cx="3154680" cy="1737360"/>
+            <a:off x="7635240" y="2788920"/>
+            <a:ext cx="3474720" cy="1536192"/>
           </a:xfrm>
           <a:prstGeom prst="roundRect">
             <a:avLst>
-              <a:gd name="adj" fmla="val 6316"/>
+              <a:gd name="adj" fmla="val 7143"/>
+            </a:avLst>
+          </a:prstGeom>
+          <a:solidFill>
+            <a:srgbClr val="FFFFFF">
+              <a:alpha val="88000"/>
+            </a:srgbClr>
+          </a:solidFill>
+          <a:ln w="12700">
+            <a:solidFill>
+              <a:srgbClr val="D6E8F2"/>
+            </a:solidFill>
+            <a:prstDash val="solid"/>
+          </a:ln>
+        </p:spPr>
+      </p:sp>
+      <p:sp>
+        <p:nvSpPr>
+          <p:cNvPr id="14" name="Shape 12"/>
+          <p:cNvSpPr/>
+          <p:nvPr/>
+        </p:nvSpPr>
+        <p:spPr>
+          <a:xfrm>
+            <a:off x="8046720" y="3108960"/>
+            <a:ext cx="2651760" cy="896112"/>
+          </a:xfrm>
+          <a:prstGeom prst="arc">
+            <a:avLst/>
+          </a:prstGeom>
+          <a:noFill/>
+          <a:ln w="25400">
+            <a:solidFill>
+              <a:srgbClr val="0068B7"/>
+            </a:solidFill>
+            <a:prstDash val="solid"/>
+          </a:ln>
+        </p:spPr>
+      </p:sp>
+      <p:sp>
+        <p:nvSpPr>
+          <p:cNvPr id="15" name="Text 13"/>
+          <p:cNvSpPr/>
+          <p:nvPr/>
+        </p:nvSpPr>
+        <p:spPr>
+          <a:xfrm>
+            <a:off x="7909560" y="3099816"/>
+            <a:ext cx="2926080" cy="256032"/>
+          </a:xfrm>
+          <a:prstGeom prst="rect">
+            <a:avLst/>
+          </a:prstGeom>
+          <a:noFill/>
+          <a:ln/>
+        </p:spPr>
+        <p:txBody>
+          <a:bodyPr wrap="square" lIns="0" tIns="0" rIns="0" bIns="0" rtlCol="0" anchor="ctr"/>
+          <a:lstStyle/>
+          <a:p>
+            <a:pPr algn="ctr" indent="0" marL="0">
+              <a:buNone/>
+            </a:pPr>
+            <a:r>
+              <a:rPr lang="en-US" sz="1500" b="1" dirty="0">
+                <a:solidFill>
+                  <a:srgbClr val="003A63"/>
+                </a:solidFill>
+                <a:latin typeface="Aptos" pitchFamily="34" charset="0"/>
+                <a:ea typeface="Aptos" pitchFamily="34" charset="-122"/>
+                <a:cs typeface="Aptos" pitchFamily="34" charset="-120"/>
+              </a:rPr>
+              <a:t>Risk</a:t>
+            </a:r>
+            <a:endParaRPr lang="en-US" sz="1500" dirty="0"/>
+          </a:p>
+        </p:txBody>
+      </p:sp>
+      <p:sp>
+        <p:nvSpPr>
+          <p:cNvPr id="16" name="Shape 14"/>
+          <p:cNvSpPr/>
+          <p:nvPr/>
+        </p:nvSpPr>
+        <p:spPr>
+          <a:xfrm>
+            <a:off x="8366760" y="3639312"/>
+            <a:ext cx="2011680" cy="0"/>
+          </a:xfrm>
+          <a:prstGeom prst="line">
+            <a:avLst/>
+          </a:prstGeom>
+          <a:noFill/>
+          <a:ln w="63500">
+            <a:solidFill>
+              <a:srgbClr val="2F8A28"/>
+            </a:solidFill>
+            <a:prstDash val="solid"/>
+          </a:ln>
+        </p:spPr>
+      </p:sp>
+      <p:sp>
+        <p:nvSpPr>
+          <p:cNvPr id="17" name="Text 15"/>
+          <p:cNvSpPr/>
+          <p:nvPr/>
+        </p:nvSpPr>
+        <p:spPr>
+          <a:xfrm>
+            <a:off x="7909560" y="3849624"/>
+            <a:ext cx="2926080" cy="164592"/>
+          </a:xfrm>
+          <a:prstGeom prst="rect">
+            <a:avLst/>
+          </a:prstGeom>
+          <a:noFill/>
+          <a:ln/>
+        </p:spPr>
+        <p:txBody>
+          <a:bodyPr wrap="square" lIns="0" tIns="0" rIns="0" bIns="0" rtlCol="0" anchor="ctr"/>
+          <a:lstStyle/>
+          <a:p>
+            <a:pPr algn="ctr" indent="0" marL="0">
+              <a:buNone/>
+            </a:pPr>
+            <a:r>
+              <a:rPr lang="en-US" sz="900" dirty="0">
+                <a:solidFill>
+                  <a:srgbClr val="003A63"/>
+                </a:solidFill>
+                <a:latin typeface="Aptos" pitchFamily="34" charset="0"/>
+                <a:ea typeface="Aptos" pitchFamily="34" charset="-122"/>
+                <a:cs typeface="Aptos" pitchFamily="34" charset="-120"/>
+              </a:rPr>
+              <a:t>Human review</a:t>
+            </a:r>
+            <a:endParaRPr lang="en-US" sz="900" dirty="0"/>
+          </a:p>
+        </p:txBody>
+      </p:sp>
+      <p:sp>
+        <p:nvSpPr>
+          <p:cNvPr id="18" name="Shape 16"/>
+          <p:cNvSpPr/>
+          <p:nvPr/>
+        </p:nvSpPr>
+        <p:spPr>
+          <a:xfrm>
+            <a:off x="7635240" y="4498848"/>
+            <a:ext cx="3474720" cy="1143000"/>
+          </a:xfrm>
+          <a:prstGeom prst="roundRect">
+            <a:avLst>
+              <a:gd name="adj" fmla="val 9600"/>
             </a:avLst>
           </a:prstGeom>
           <a:solidFill>
@@ -14893,14 +16422,14 @@
       </p:sp>
       <p:sp>
         <p:nvSpPr>
-          <p:cNvPr id="14" name="Text 12"/>
-          <p:cNvSpPr/>
-          <p:nvPr/>
-        </p:nvSpPr>
-        <p:spPr>
-          <a:xfrm>
-            <a:off x="8074152" y="3666744"/>
-            <a:ext cx="2825496" cy="256032"/>
+          <p:cNvPr id="19" name="Text 17"/>
+          <p:cNvSpPr/>
+          <p:nvPr/>
+        </p:nvSpPr>
+        <p:spPr>
+          <a:xfrm>
+            <a:off x="7799832" y="4645152"/>
+            <a:ext cx="3145536" cy="256032"/>
           </a:xfrm>
           <a:prstGeom prst="rect">
             <a:avLst/>
@@ -14924,7 +16453,7 @@
                 <a:ea typeface="Aptos" pitchFamily="34" charset="-122"/>
                 <a:cs typeface="Aptos" pitchFamily="34" charset="-120"/>
               </a:rPr>
-              <a:t>Use this for</a:t>
+              <a:t>Safeguard to plan</a:t>
             </a:r>
             <a:endParaRPr lang="en-US" sz="1300" dirty="0"/>
           </a:p>
@@ -14932,14 +16461,14 @@
       </p:sp>
       <p:sp>
         <p:nvSpPr>
-          <p:cNvPr id="15" name="Text 13"/>
-          <p:cNvSpPr/>
-          <p:nvPr/>
-        </p:nvSpPr>
-        <p:spPr>
-          <a:xfrm>
-            <a:off x="8074152" y="4023360"/>
-            <a:ext cx="2825496" cy="1097280"/>
+          <p:cNvPr id="20" name="Text 18"/>
+          <p:cNvSpPr/>
+          <p:nvPr/>
+        </p:nvSpPr>
+        <p:spPr>
+          <a:xfrm>
+            <a:off x="7799832" y="5001768"/>
+            <a:ext cx="3145536" cy="502920"/>
           </a:xfrm>
           <a:prstGeom prst="rect">
             <a:avLst/>
@@ -14965,7 +16494,7 @@
                 <a:ea typeface="Aptos" pitchFamily="34" charset="-122"/>
                 <a:cs typeface="Aptos" pitchFamily="34" charset="-120"/>
               </a:rPr>
-              <a:t>Connect the concept to public health decisions, safeguards, documentation, or implementation work.</a:t>
+              <a:t>Use the assignment to test whether you can explain the concept, apply it to a realistic public health situation, and identify what would need review before the work moves forward.</a:t>
             </a:r>
             <a:endParaRPr lang="en-US" sz="1550" dirty="0"/>
           </a:p>
@@ -15139,8 +16668,8 @@
         </p:nvSpPr>
         <p:spPr>
           <a:xfrm>
-            <a:off x="9966960" y="6537960"/>
-            <a:ext cx="1645920" cy="201168"/>
+            <a:off x="9646920" y="6537960"/>
+            <a:ext cx="1965960" cy="201168"/>
           </a:xfrm>
           <a:prstGeom prst="rect">
             <a:avLst/>
@@ -15164,7 +16693,7 @@
                 <a:ea typeface="Aptos" pitchFamily="34" charset="-122"/>
                 <a:cs typeface="Aptos" pitchFamily="34" charset="-120"/>
               </a:rPr>
-              <a:t>Â© Paula Soper</a:t>
+              <a:t>Copyright Paula Soper</a:t>
             </a:r>
             <a:endParaRPr lang="en-US" sz="800" dirty="0"/>
           </a:p>
@@ -15211,77 +16740,13 @@
       </p:sp>
       <p:sp>
         <p:nvSpPr>
-          <p:cNvPr id="8" name="Shape 6"/>
+          <p:cNvPr id="8" name="Text 6"/>
           <p:cNvSpPr/>
           <p:nvPr/>
         </p:nvSpPr>
         <p:spPr>
           <a:xfrm>
             <a:off x="640080" y="658368"/>
-            <a:ext cx="420624" cy="420624"/>
-          </a:xfrm>
-          <a:prstGeom prst="ellipse">
-            <a:avLst/>
-          </a:prstGeom>
-          <a:solidFill>
-            <a:srgbClr val="0068B7"/>
-          </a:solidFill>
-          <a:ln w="12700">
-            <a:solidFill>
-              <a:srgbClr val="0068B7"/>
-            </a:solidFill>
-            <a:prstDash val="solid"/>
-          </a:ln>
-        </p:spPr>
-      </p:sp>
-      <p:sp>
-        <p:nvSpPr>
-          <p:cNvPr id="9" name="Text 7"/>
-          <p:cNvSpPr/>
-          <p:nvPr/>
-        </p:nvSpPr>
-        <p:spPr>
-          <a:xfrm>
-            <a:off x="640080" y="731520"/>
-            <a:ext cx="420624" cy="164592"/>
-          </a:xfrm>
-          <a:prstGeom prst="rect">
-            <a:avLst/>
-          </a:prstGeom>
-          <a:noFill/>
-          <a:ln/>
-        </p:spPr>
-        <p:txBody>
-          <a:bodyPr wrap="square" lIns="0" tIns="0" rIns="0" bIns="0" rtlCol="0" anchor="ctr"/>
-          <a:lstStyle/>
-          <a:p>
-            <a:pPr algn="ctr" indent="0" marL="0">
-              <a:buNone/>
-            </a:pPr>
-            <a:r>
-              <a:rPr lang="en-US" sz="1100" b="1" dirty="0">
-                <a:solidFill>
-                  <a:srgbClr val="FFFFFF"/>
-                </a:solidFill>
-                <a:latin typeface="Aptos" pitchFamily="34" charset="0"/>
-                <a:ea typeface="Aptos" pitchFamily="34" charset="-122"/>
-                <a:cs typeface="Aptos" pitchFamily="34" charset="-120"/>
-              </a:rPr>
-              <a:t>2</a:t>
-            </a:r>
-            <a:endParaRPr lang="en-US" sz="1100" dirty="0"/>
-          </a:p>
-        </p:txBody>
-      </p:sp>
-      <p:sp>
-        <p:nvSpPr>
-          <p:cNvPr id="10" name="Text 8"/>
-          <p:cNvSpPr/>
-          <p:nvPr/>
-        </p:nvSpPr>
-        <p:spPr>
-          <a:xfrm>
-            <a:off x="640080" y="621792"/>
             <a:ext cx="10881360" cy="713232"/>
           </a:xfrm>
           <a:prstGeom prst="rect">
@@ -15316,14 +16781,14 @@
       </p:sp>
       <p:sp>
         <p:nvSpPr>
-          <p:cNvPr id="11" name="Text 9"/>
+          <p:cNvPr id="9" name="Text 7"/>
           <p:cNvSpPr/>
           <p:nvPr/>
         </p:nvSpPr>
         <p:spPr>
           <a:xfrm>
             <a:off x="868680" y="1508760"/>
-            <a:ext cx="6537960" cy="4160520"/>
+            <a:ext cx="6309360" cy="4160520"/>
           </a:xfrm>
           <a:prstGeom prst="rect">
             <a:avLst/>
@@ -15382,18 +16847,18 @@
       </p:sp>
       <p:sp>
         <p:nvSpPr>
-          <p:cNvPr id="12" name="Shape 10"/>
-          <p:cNvSpPr/>
-          <p:nvPr/>
-        </p:nvSpPr>
-        <p:spPr>
-          <a:xfrm>
-            <a:off x="7909560" y="1417320"/>
-            <a:ext cx="3154680" cy="1828800"/>
+          <p:cNvPr id="10" name="Shape 8"/>
+          <p:cNvSpPr/>
+          <p:nvPr/>
+        </p:nvSpPr>
+        <p:spPr>
+          <a:xfrm>
+            <a:off x="7635240" y="1325880"/>
+            <a:ext cx="3474720" cy="1325880"/>
           </a:xfrm>
           <a:prstGeom prst="roundRect">
             <a:avLst>
-              <a:gd name="adj" fmla="val 6000"/>
+              <a:gd name="adj" fmla="val 8276"/>
             </a:avLst>
           </a:prstGeom>
           <a:solidFill>
@@ -15409,14 +16874,14 @@
       </p:sp>
       <p:sp>
         <p:nvSpPr>
-          <p:cNvPr id="13" name="Text 11"/>
-          <p:cNvSpPr/>
-          <p:nvPr/>
-        </p:nvSpPr>
-        <p:spPr>
-          <a:xfrm>
-            <a:off x="8074152" y="1563624"/>
-            <a:ext cx="2825496" cy="256032"/>
+          <p:cNvPr id="11" name="Text 9"/>
+          <p:cNvSpPr/>
+          <p:nvPr/>
+        </p:nvSpPr>
+        <p:spPr>
+          <a:xfrm>
+            <a:off x="7799832" y="1472184"/>
+            <a:ext cx="3145536" cy="256032"/>
           </a:xfrm>
           <a:prstGeom prst="rect">
             <a:avLst/>
@@ -15440,7 +16905,7 @@
                 <a:ea typeface="Aptos" pitchFamily="34" charset="-122"/>
                 <a:cs typeface="Aptos" pitchFamily="34" charset="-120"/>
               </a:rPr>
-              <a:t>Key idea</a:t>
+              <a:t>Risk check</a:t>
             </a:r>
             <a:endParaRPr lang="en-US" sz="1300" dirty="0"/>
           </a:p>
@@ -15448,14 +16913,14 @@
       </p:sp>
       <p:sp>
         <p:nvSpPr>
-          <p:cNvPr id="14" name="Text 12"/>
-          <p:cNvSpPr/>
-          <p:nvPr/>
-        </p:nvSpPr>
-        <p:spPr>
-          <a:xfrm>
-            <a:off x="8074152" y="1920240"/>
-            <a:ext cx="2825496" cy="1188720"/>
+          <p:cNvPr id="12" name="Text 10"/>
+          <p:cNvSpPr/>
+          <p:nvPr/>
+        </p:nvSpPr>
+        <p:spPr>
+          <a:xfrm>
+            <a:off x="7799832" y="1828800"/>
+            <a:ext cx="3145536" cy="685800"/>
           </a:xfrm>
           <a:prstGeom prst="rect">
             <a:avLst/>
@@ -15489,18 +16954,171 @@
       </p:sp>
       <p:sp>
         <p:nvSpPr>
-          <p:cNvPr id="15" name="Shape 13"/>
-          <p:cNvSpPr/>
-          <p:nvPr/>
-        </p:nvSpPr>
-        <p:spPr>
-          <a:xfrm>
-            <a:off x="7909560" y="3520440"/>
-            <a:ext cx="3154680" cy="1737360"/>
+          <p:cNvPr id="13" name="Shape 11"/>
+          <p:cNvSpPr/>
+          <p:nvPr/>
+        </p:nvSpPr>
+        <p:spPr>
+          <a:xfrm>
+            <a:off x="7635240" y="2788920"/>
+            <a:ext cx="3474720" cy="1536192"/>
           </a:xfrm>
           <a:prstGeom prst="roundRect">
             <a:avLst>
-              <a:gd name="adj" fmla="val 6316"/>
+              <a:gd name="adj" fmla="val 7143"/>
+            </a:avLst>
+          </a:prstGeom>
+          <a:solidFill>
+            <a:srgbClr val="FFFFFF">
+              <a:alpha val="88000"/>
+            </a:srgbClr>
+          </a:solidFill>
+          <a:ln w="12700">
+            <a:solidFill>
+              <a:srgbClr val="D6E8F2"/>
+            </a:solidFill>
+            <a:prstDash val="solid"/>
+          </a:ln>
+        </p:spPr>
+      </p:sp>
+      <p:sp>
+        <p:nvSpPr>
+          <p:cNvPr id="14" name="Shape 12"/>
+          <p:cNvSpPr/>
+          <p:nvPr/>
+        </p:nvSpPr>
+        <p:spPr>
+          <a:xfrm>
+            <a:off x="8046720" y="3108960"/>
+            <a:ext cx="2651760" cy="896112"/>
+          </a:xfrm>
+          <a:prstGeom prst="arc">
+            <a:avLst/>
+          </a:prstGeom>
+          <a:noFill/>
+          <a:ln w="25400">
+            <a:solidFill>
+              <a:srgbClr val="0068B7"/>
+            </a:solidFill>
+            <a:prstDash val="solid"/>
+          </a:ln>
+        </p:spPr>
+      </p:sp>
+      <p:sp>
+        <p:nvSpPr>
+          <p:cNvPr id="15" name="Text 13"/>
+          <p:cNvSpPr/>
+          <p:nvPr/>
+        </p:nvSpPr>
+        <p:spPr>
+          <a:xfrm>
+            <a:off x="7909560" y="3099816"/>
+            <a:ext cx="2926080" cy="256032"/>
+          </a:xfrm>
+          <a:prstGeom prst="rect">
+            <a:avLst/>
+          </a:prstGeom>
+          <a:noFill/>
+          <a:ln/>
+        </p:spPr>
+        <p:txBody>
+          <a:bodyPr wrap="square" lIns="0" tIns="0" rIns="0" bIns="0" rtlCol="0" anchor="ctr"/>
+          <a:lstStyle/>
+          <a:p>
+            <a:pPr algn="ctr" indent="0" marL="0">
+              <a:buNone/>
+            </a:pPr>
+            <a:r>
+              <a:rPr lang="en-US" sz="1500" b="1" dirty="0">
+                <a:solidFill>
+                  <a:srgbClr val="003A63"/>
+                </a:solidFill>
+                <a:latin typeface="Aptos" pitchFamily="34" charset="0"/>
+                <a:ea typeface="Aptos" pitchFamily="34" charset="-122"/>
+                <a:cs typeface="Aptos" pitchFamily="34" charset="-120"/>
+              </a:rPr>
+              <a:t>Risk</a:t>
+            </a:r>
+            <a:endParaRPr lang="en-US" sz="1500" dirty="0"/>
+          </a:p>
+        </p:txBody>
+      </p:sp>
+      <p:sp>
+        <p:nvSpPr>
+          <p:cNvPr id="16" name="Shape 14"/>
+          <p:cNvSpPr/>
+          <p:nvPr/>
+        </p:nvSpPr>
+        <p:spPr>
+          <a:xfrm>
+            <a:off x="8366760" y="3639312"/>
+            <a:ext cx="2011680" cy="0"/>
+          </a:xfrm>
+          <a:prstGeom prst="line">
+            <a:avLst/>
+          </a:prstGeom>
+          <a:noFill/>
+          <a:ln w="63500">
+            <a:solidFill>
+              <a:srgbClr val="2F8A28"/>
+            </a:solidFill>
+            <a:prstDash val="solid"/>
+          </a:ln>
+        </p:spPr>
+      </p:sp>
+      <p:sp>
+        <p:nvSpPr>
+          <p:cNvPr id="17" name="Text 15"/>
+          <p:cNvSpPr/>
+          <p:nvPr/>
+        </p:nvSpPr>
+        <p:spPr>
+          <a:xfrm>
+            <a:off x="7909560" y="3849624"/>
+            <a:ext cx="2926080" cy="164592"/>
+          </a:xfrm>
+          <a:prstGeom prst="rect">
+            <a:avLst/>
+          </a:prstGeom>
+          <a:noFill/>
+          <a:ln/>
+        </p:spPr>
+        <p:txBody>
+          <a:bodyPr wrap="square" lIns="0" tIns="0" rIns="0" bIns="0" rtlCol="0" anchor="ctr"/>
+          <a:lstStyle/>
+          <a:p>
+            <a:pPr algn="ctr" indent="0" marL="0">
+              <a:buNone/>
+            </a:pPr>
+            <a:r>
+              <a:rPr lang="en-US" sz="900" dirty="0">
+                <a:solidFill>
+                  <a:srgbClr val="003A63"/>
+                </a:solidFill>
+                <a:latin typeface="Aptos" pitchFamily="34" charset="0"/>
+                <a:ea typeface="Aptos" pitchFamily="34" charset="-122"/>
+                <a:cs typeface="Aptos" pitchFamily="34" charset="-120"/>
+              </a:rPr>
+              <a:t>Human review</a:t>
+            </a:r>
+            <a:endParaRPr lang="en-US" sz="900" dirty="0"/>
+          </a:p>
+        </p:txBody>
+      </p:sp>
+      <p:sp>
+        <p:nvSpPr>
+          <p:cNvPr id="18" name="Shape 16"/>
+          <p:cNvSpPr/>
+          <p:nvPr/>
+        </p:nvSpPr>
+        <p:spPr>
+          <a:xfrm>
+            <a:off x="7635240" y="4498848"/>
+            <a:ext cx="3474720" cy="1143000"/>
+          </a:xfrm>
+          <a:prstGeom prst="roundRect">
+            <a:avLst>
+              <a:gd name="adj" fmla="val 9600"/>
             </a:avLst>
           </a:prstGeom>
           <a:solidFill>
@@ -15516,14 +17134,14 @@
       </p:sp>
       <p:sp>
         <p:nvSpPr>
-          <p:cNvPr id="16" name="Text 14"/>
-          <p:cNvSpPr/>
-          <p:nvPr/>
-        </p:nvSpPr>
-        <p:spPr>
-          <a:xfrm>
-            <a:off x="8074152" y="3666744"/>
-            <a:ext cx="2825496" cy="256032"/>
+          <p:cNvPr id="19" name="Text 17"/>
+          <p:cNvSpPr/>
+          <p:nvPr/>
+        </p:nvSpPr>
+        <p:spPr>
+          <a:xfrm>
+            <a:off x="7799832" y="4645152"/>
+            <a:ext cx="3145536" cy="256032"/>
           </a:xfrm>
           <a:prstGeom prst="rect">
             <a:avLst/>
@@ -15547,7 +17165,7 @@
                 <a:ea typeface="Aptos" pitchFamily="34" charset="-122"/>
                 <a:cs typeface="Aptos" pitchFamily="34" charset="-120"/>
               </a:rPr>
-              <a:t>Use this for</a:t>
+              <a:t>Safeguard to plan</a:t>
             </a:r>
             <a:endParaRPr lang="en-US" sz="1300" dirty="0"/>
           </a:p>
@@ -15555,14 +17173,14 @@
       </p:sp>
       <p:sp>
         <p:nvSpPr>
-          <p:cNvPr id="17" name="Text 15"/>
-          <p:cNvSpPr/>
-          <p:nvPr/>
-        </p:nvSpPr>
-        <p:spPr>
-          <a:xfrm>
-            <a:off x="8074152" y="4023360"/>
-            <a:ext cx="2825496" cy="1097280"/>
+          <p:cNvPr id="20" name="Text 18"/>
+          <p:cNvSpPr/>
+          <p:nvPr/>
+        </p:nvSpPr>
+        <p:spPr>
+          <a:xfrm>
+            <a:off x="7799832" y="5001768"/>
+            <a:ext cx="3145536" cy="502920"/>
           </a:xfrm>
           <a:prstGeom prst="rect">
             <a:avLst/>
@@ -15588,7 +17206,7 @@
                 <a:ea typeface="Aptos" pitchFamily="34" charset="-122"/>
                 <a:cs typeface="Aptos" pitchFamily="34" charset="-120"/>
               </a:rPr>
-              <a:t>Connect the concept to public health decisions, safeguards, documentation, or implementation work.</a:t>
+              <a:t>Identify what could go wrong, who could be affected, what safeguards are needed, and what evidence should be reviewed before use expands.</a:t>
             </a:r>
             <a:endParaRPr lang="en-US" sz="1550" dirty="0"/>
           </a:p>
@@ -15762,8 +17380,8 @@
         </p:nvSpPr>
         <p:spPr>
           <a:xfrm>
-            <a:off x="9966960" y="6537960"/>
-            <a:ext cx="1645920" cy="201168"/>
+            <a:off x="9646920" y="6537960"/>
+            <a:ext cx="1965960" cy="201168"/>
           </a:xfrm>
           <a:prstGeom prst="rect">
             <a:avLst/>
@@ -15787,7 +17405,7 @@
                 <a:ea typeface="Aptos" pitchFamily="34" charset="-122"/>
                 <a:cs typeface="Aptos" pitchFamily="34" charset="-120"/>
               </a:rPr>
-              <a:t>Â© Paula Soper</a:t>
+              <a:t>Copyright Paula Soper</a:t>
             </a:r>
             <a:endParaRPr lang="en-US" sz="800" dirty="0"/>
           </a:p>
@@ -15834,14 +17452,257 @@
       </p:sp>
       <p:sp>
         <p:nvSpPr>
-          <p:cNvPr id="8" name="Shape 6"/>
+          <p:cNvPr id="8" name="Text 6"/>
           <p:cNvSpPr/>
           <p:nvPr/>
         </p:nvSpPr>
         <p:spPr>
           <a:xfrm>
             <a:off x="640080" y="658368"/>
-            <a:ext cx="420624" cy="420624"/>
+            <a:ext cx="10881360" cy="713232"/>
+          </a:xfrm>
+          <a:prstGeom prst="rect">
+            <a:avLst/>
+          </a:prstGeom>
+          <a:noFill/>
+          <a:ln/>
+        </p:spPr>
+        <p:txBody>
+          <a:bodyPr wrap="square" lIns="0" tIns="0" rIns="0" bIns="0" rtlCol="0" anchor="ctr">
+            <a:normAutofit/>
+          </a:bodyPr>
+          <a:lstStyle/>
+          <a:p>
+            <a:pPr indent="0" marL="0">
+              <a:buNone/>
+            </a:pPr>
+            <a:r>
+              <a:rPr lang="en-US" sz="3400" b="1" dirty="0">
+                <a:solidFill>
+                  <a:srgbClr val="003A63"/>
+                </a:solidFill>
+                <a:latin typeface="Aptos Display" pitchFamily="34" charset="0"/>
+                <a:ea typeface="Aptos Display" pitchFamily="34" charset="-122"/>
+                <a:cs typeface="Aptos Display" pitchFamily="34" charset="-120"/>
+              </a:rPr>
+              <a:t>Jurisdiction and Agency Policy Note</a:t>
+            </a:r>
+            <a:endParaRPr lang="en-US" sz="3400" dirty="0"/>
+          </a:p>
+        </p:txBody>
+      </p:sp>
+      <p:sp>
+        <p:nvSpPr>
+          <p:cNvPr id="9" name="Text 7"/>
+          <p:cNvSpPr/>
+          <p:nvPr/>
+        </p:nvSpPr>
+        <p:spPr>
+          <a:xfrm>
+            <a:off x="868680" y="1508760"/>
+            <a:ext cx="6309360" cy="4160520"/>
+          </a:xfrm>
+          <a:prstGeom prst="rect">
+            <a:avLst/>
+          </a:prstGeom>
+          <a:noFill/>
+          <a:ln/>
+        </p:spPr>
+        <p:txBody>
+          <a:bodyPr wrap="square" lIns="635" tIns="635" rIns="635" bIns="635" rtlCol="0" anchor="t">
+            <a:normAutofit/>
+          </a:bodyPr>
+          <a:lstStyle/>
+          <a:p>
+            <a:r>
+              <a:rPr lang="en-US" sz="2100" dirty="0">
+                <a:solidFill>
+                  <a:srgbClr val="17364A"/>
+                </a:solidFill>
+                <a:latin typeface="Aptos" pitchFamily="34" charset="0"/>
+                <a:ea typeface="Aptos" pitchFamily="34" charset="-122"/>
+                <a:cs typeface="Aptos" pitchFamily="34" charset="-120"/>
+              </a:rPr>
+              <a:t>This module provides national-level training guidance for public health agencies and partners.</a:t>
+            </a:r>
+            <a:endParaRPr lang="en-US" sz="2100" dirty="0"/>
+          </a:p>
+          <a:p>
+            <a:r>
+              <a:rPr lang="en-US" sz="2100" dirty="0">
+                <a:solidFill>
+                  <a:srgbClr val="17364A"/>
+                </a:solidFill>
+                <a:latin typeface="Aptos" pitchFamily="34" charset="0"/>
+                <a:ea typeface="Aptos" pitchFamily="34" charset="-122"/>
+                <a:cs typeface="Aptos" pitchFamily="34" charset="-120"/>
+              </a:rPr>
+              <a:t>It is not legal advice and does not replace review by agency legal counsel, privacy officers,.</a:t>
+            </a:r>
+            <a:endParaRPr lang="en-US" sz="2100" dirty="0"/>
+          </a:p>
+          <a:p>
+            <a:r>
+              <a:rPr lang="en-US" sz="2100" dirty="0">
+                <a:solidFill>
+                  <a:srgbClr val="17364A"/>
+                </a:solidFill>
+                <a:latin typeface="Aptos" pitchFamily="34" charset="0"/>
+                <a:ea typeface="Aptos" pitchFamily="34" charset="-122"/>
+                <a:cs typeface="Aptos" pitchFamily="34" charset="-120"/>
+              </a:rPr>
+              <a:t>Requirements may vary by state, locality, territory, Tribe, agency, funding source, data-sharing.</a:t>
+            </a:r>
+            <a:endParaRPr lang="en-US" sz="2100" dirty="0"/>
+          </a:p>
+        </p:txBody>
+      </p:sp>
+      <p:sp>
+        <p:nvSpPr>
+          <p:cNvPr id="10" name="Shape 8"/>
+          <p:cNvSpPr/>
+          <p:nvPr/>
+        </p:nvSpPr>
+        <p:spPr>
+          <a:xfrm>
+            <a:off x="7635240" y="1325880"/>
+            <a:ext cx="3474720" cy="1325880"/>
+          </a:xfrm>
+          <a:prstGeom prst="roundRect">
+            <a:avLst>
+              <a:gd name="adj" fmla="val 8276"/>
+            </a:avLst>
+          </a:prstGeom>
+          <a:solidFill>
+            <a:srgbClr val="EEF8ED"/>
+          </a:solidFill>
+          <a:ln w="12700">
+            <a:solidFill>
+              <a:srgbClr val="B9D7E6"/>
+            </a:solidFill>
+            <a:prstDash val="solid"/>
+          </a:ln>
+        </p:spPr>
+      </p:sp>
+      <p:sp>
+        <p:nvSpPr>
+          <p:cNvPr id="11" name="Text 9"/>
+          <p:cNvSpPr/>
+          <p:nvPr/>
+        </p:nvSpPr>
+        <p:spPr>
+          <a:xfrm>
+            <a:off x="7799832" y="1472184"/>
+            <a:ext cx="3145536" cy="256032"/>
+          </a:xfrm>
+          <a:prstGeom prst="rect">
+            <a:avLst/>
+          </a:prstGeom>
+          <a:noFill/>
+          <a:ln/>
+        </p:spPr>
+        <p:txBody>
+          <a:bodyPr wrap="square" lIns="0" tIns="0" rIns="0" bIns="0" rtlCol="0" anchor="ctr"/>
+          <a:lstStyle/>
+          <a:p>
+            <a:pPr indent="0" marL="0">
+              <a:buNone/>
+            </a:pPr>
+            <a:r>
+              <a:rPr lang="en-US" sz="1300" b="1" dirty="0">
+                <a:solidFill>
+                  <a:srgbClr val="0068B7"/>
+                </a:solidFill>
+                <a:latin typeface="Aptos" pitchFamily="34" charset="0"/>
+                <a:ea typeface="Aptos" pitchFamily="34" charset="-122"/>
+                <a:cs typeface="Aptos" pitchFamily="34" charset="-120"/>
+              </a:rPr>
+              <a:t>Governance lens</a:t>
+            </a:r>
+            <a:endParaRPr lang="en-US" sz="1300" dirty="0"/>
+          </a:p>
+        </p:txBody>
+      </p:sp>
+      <p:sp>
+        <p:nvSpPr>
+          <p:cNvPr id="12" name="Text 10"/>
+          <p:cNvSpPr/>
+          <p:nvPr/>
+        </p:nvSpPr>
+        <p:spPr>
+          <a:xfrm>
+            <a:off x="7799832" y="1828800"/>
+            <a:ext cx="3145536" cy="685800"/>
+          </a:xfrm>
+          <a:prstGeom prst="rect">
+            <a:avLst/>
+          </a:prstGeom>
+          <a:noFill/>
+          <a:ln/>
+        </p:spPr>
+        <p:txBody>
+          <a:bodyPr wrap="square" lIns="0" tIns="0" rIns="0" bIns="0" rtlCol="0" anchor="t">
+            <a:normAutofit/>
+          </a:bodyPr>
+          <a:lstStyle/>
+          <a:p>
+            <a:pPr indent="0" marL="0">
+              <a:buNone/>
+            </a:pPr>
+            <a:r>
+              <a:rPr lang="en-US" sz="1550" dirty="0">
+                <a:solidFill>
+                  <a:srgbClr val="17364A"/>
+                </a:solidFill>
+                <a:latin typeface="Aptos" pitchFamily="34" charset="0"/>
+                <a:ea typeface="Aptos" pitchFamily="34" charset="-122"/>
+                <a:cs typeface="Aptos" pitchFamily="34" charset="-120"/>
+              </a:rPr>
+              <a:t>This module provides national-level training guidance for public health agencies and partners.</a:t>
+            </a:r>
+            <a:endParaRPr lang="en-US" sz="1550" dirty="0"/>
+          </a:p>
+        </p:txBody>
+      </p:sp>
+      <p:sp>
+        <p:nvSpPr>
+          <p:cNvPr id="13" name="Shape 11"/>
+          <p:cNvSpPr/>
+          <p:nvPr/>
+        </p:nvSpPr>
+        <p:spPr>
+          <a:xfrm>
+            <a:off x="7635240" y="2788920"/>
+            <a:ext cx="3474720" cy="1536192"/>
+          </a:xfrm>
+          <a:prstGeom prst="roundRect">
+            <a:avLst>
+              <a:gd name="adj" fmla="val 7143"/>
+            </a:avLst>
+          </a:prstGeom>
+          <a:solidFill>
+            <a:srgbClr val="FFFFFF">
+              <a:alpha val="88000"/>
+            </a:srgbClr>
+          </a:solidFill>
+          <a:ln w="12700">
+            <a:solidFill>
+              <a:srgbClr val="D6E8F2"/>
+            </a:solidFill>
+            <a:prstDash val="solid"/>
+          </a:ln>
+        </p:spPr>
+      </p:sp>
+      <p:sp>
+        <p:nvSpPr>
+          <p:cNvPr id="14" name="Shape 12"/>
+          <p:cNvSpPr/>
+          <p:nvPr/>
+        </p:nvSpPr>
+        <p:spPr>
+          <a:xfrm>
+            <a:off x="7891272" y="3108960"/>
+            <a:ext cx="566928" cy="566928"/>
           </a:xfrm>
           <a:prstGeom prst="ellipse">
             <a:avLst/>
@@ -15859,172 +17720,24 @@
       </p:sp>
       <p:sp>
         <p:nvSpPr>
-          <p:cNvPr id="9" name="Text 7"/>
-          <p:cNvSpPr/>
-          <p:nvPr/>
-        </p:nvSpPr>
-        <p:spPr>
-          <a:xfrm>
-            <a:off x="640080" y="731520"/>
-            <a:ext cx="420624" cy="164592"/>
-          </a:xfrm>
-          <a:prstGeom prst="rect">
-            <a:avLst/>
-          </a:prstGeom>
-          <a:noFill/>
-          <a:ln/>
-        </p:spPr>
-        <p:txBody>
-          <a:bodyPr wrap="square" lIns="0" tIns="0" rIns="0" bIns="0" rtlCol="0" anchor="ctr"/>
-          <a:lstStyle/>
-          <a:p>
-            <a:pPr algn="ctr" indent="0" marL="0">
-              <a:buNone/>
-            </a:pPr>
-            <a:r>
-              <a:rPr lang="en-US" sz="1100" b="1" dirty="0">
-                <a:solidFill>
-                  <a:srgbClr val="FFFFFF"/>
-                </a:solidFill>
-                <a:latin typeface="Aptos" pitchFamily="34" charset="0"/>
-                <a:ea typeface="Aptos" pitchFamily="34" charset="-122"/>
-                <a:cs typeface="Aptos" pitchFamily="34" charset="-120"/>
-              </a:rPr>
-              <a:t>3</a:t>
-            </a:r>
-            <a:endParaRPr lang="en-US" sz="1100" dirty="0"/>
-          </a:p>
-        </p:txBody>
-      </p:sp>
-      <p:sp>
-        <p:nvSpPr>
-          <p:cNvPr id="10" name="Text 8"/>
-          <p:cNvSpPr/>
-          <p:nvPr/>
-        </p:nvSpPr>
-        <p:spPr>
-          <a:xfrm>
-            <a:off x="640080" y="621792"/>
-            <a:ext cx="10881360" cy="713232"/>
-          </a:xfrm>
-          <a:prstGeom prst="rect">
-            <a:avLst/>
-          </a:prstGeom>
-          <a:noFill/>
-          <a:ln/>
-        </p:spPr>
-        <p:txBody>
-          <a:bodyPr wrap="square" lIns="0" tIns="0" rIns="0" bIns="0" rtlCol="0" anchor="ctr">
-            <a:normAutofit/>
-          </a:bodyPr>
-          <a:lstStyle/>
-          <a:p>
-            <a:pPr indent="0" marL="0">
-              <a:buNone/>
-            </a:pPr>
-            <a:r>
-              <a:rPr lang="en-US" sz="3400" b="1" dirty="0">
-                <a:solidFill>
-                  <a:srgbClr val="003A63"/>
-                </a:solidFill>
-                <a:latin typeface="Aptos Display" pitchFamily="34" charset="0"/>
-                <a:ea typeface="Aptos Display" pitchFamily="34" charset="-122"/>
-                <a:cs typeface="Aptos Display" pitchFamily="34" charset="-120"/>
-              </a:rPr>
-              <a:t>Jurisdiction and Agency Policy Note</a:t>
-            </a:r>
-            <a:endParaRPr lang="en-US" sz="3400" dirty="0"/>
-          </a:p>
-        </p:txBody>
-      </p:sp>
-      <p:sp>
-        <p:nvSpPr>
-          <p:cNvPr id="11" name="Text 9"/>
-          <p:cNvSpPr/>
-          <p:nvPr/>
-        </p:nvSpPr>
-        <p:spPr>
-          <a:xfrm>
-            <a:off x="868680" y="1508760"/>
-            <a:ext cx="6537960" cy="4160520"/>
-          </a:xfrm>
-          <a:prstGeom prst="rect">
-            <a:avLst/>
-          </a:prstGeom>
-          <a:noFill/>
-          <a:ln/>
-        </p:spPr>
-        <p:txBody>
-          <a:bodyPr wrap="square" lIns="635" tIns="635" rIns="635" bIns="635" rtlCol="0" anchor="t">
-            <a:normAutofit/>
-          </a:bodyPr>
-          <a:lstStyle/>
-          <a:p>
-            <a:r>
-              <a:rPr lang="en-US" sz="2100" dirty="0">
-                <a:solidFill>
-                  <a:srgbClr val="17364A"/>
-                </a:solidFill>
-                <a:latin typeface="Aptos" pitchFamily="34" charset="0"/>
-                <a:ea typeface="Aptos" pitchFamily="34" charset="-122"/>
-                <a:cs typeface="Aptos" pitchFamily="34" charset="-120"/>
-              </a:rPr>
-              <a:t>This module provides national-level training guidance for public health agencies and partners.</a:t>
-            </a:r>
-            <a:endParaRPr lang="en-US" sz="2100" dirty="0"/>
-          </a:p>
-          <a:p>
-            <a:r>
-              <a:rPr lang="en-US" sz="2100" dirty="0">
-                <a:solidFill>
-                  <a:srgbClr val="17364A"/>
-                </a:solidFill>
-                <a:latin typeface="Aptos" pitchFamily="34" charset="0"/>
-                <a:ea typeface="Aptos" pitchFamily="34" charset="-122"/>
-                <a:cs typeface="Aptos" pitchFamily="34" charset="-120"/>
-              </a:rPr>
-              <a:t>It is not legal advice and does not replace review by agency legal counsel, privacy officers,.</a:t>
-            </a:r>
-            <a:endParaRPr lang="en-US" sz="2100" dirty="0"/>
-          </a:p>
-          <a:p>
-            <a:r>
-              <a:rPr lang="en-US" sz="2100" dirty="0">
-                <a:solidFill>
-                  <a:srgbClr val="17364A"/>
-                </a:solidFill>
-                <a:latin typeface="Aptos" pitchFamily="34" charset="0"/>
-                <a:ea typeface="Aptos" pitchFamily="34" charset="-122"/>
-                <a:cs typeface="Aptos" pitchFamily="34" charset="-120"/>
-              </a:rPr>
-              <a:t>Requirements may vary by state, locality, territory, Tribe, agency, funding source, data-sharing.</a:t>
-            </a:r>
-            <a:endParaRPr lang="en-US" sz="2100" dirty="0"/>
-          </a:p>
-        </p:txBody>
-      </p:sp>
-      <p:sp>
-        <p:nvSpPr>
-          <p:cNvPr id="12" name="Shape 10"/>
-          <p:cNvSpPr/>
-          <p:nvPr/>
-        </p:nvSpPr>
-        <p:spPr>
-          <a:xfrm>
-            <a:off x="7909560" y="1417320"/>
-            <a:ext cx="3154680" cy="1828800"/>
-          </a:xfrm>
-          <a:prstGeom prst="roundRect">
-            <a:avLst>
-              <a:gd name="adj" fmla="val 6000"/>
-            </a:avLst>
+          <p:cNvPr id="15" name="Shape 13"/>
+          <p:cNvSpPr/>
+          <p:nvPr/>
+        </p:nvSpPr>
+        <p:spPr>
+          <a:xfrm>
+            <a:off x="10287000" y="3108960"/>
+            <a:ext cx="566928" cy="566928"/>
+          </a:xfrm>
+          <a:prstGeom prst="ellipse">
+            <a:avLst/>
           </a:prstGeom>
           <a:solidFill>
-            <a:srgbClr val="EEF8ED"/>
+            <a:srgbClr val="2F8A28"/>
           </a:solidFill>
           <a:ln w="12700">
             <a:solidFill>
-              <a:srgbClr val="B9D7E6"/>
+              <a:srgbClr val="2F8A28"/>
             </a:solidFill>
             <a:prstDash val="solid"/>
           </a:ln>
@@ -16032,14 +17745,108 @@
       </p:sp>
       <p:sp>
         <p:nvSpPr>
-          <p:cNvPr id="13" name="Text 11"/>
-          <p:cNvSpPr/>
-          <p:nvPr/>
-        </p:nvSpPr>
-        <p:spPr>
-          <a:xfrm>
-            <a:off x="8074152" y="1563624"/>
-            <a:ext cx="2825496" cy="256032"/>
+          <p:cNvPr id="16" name="Shape 14"/>
+          <p:cNvSpPr/>
+          <p:nvPr/>
+        </p:nvSpPr>
+        <p:spPr>
+          <a:xfrm>
+            <a:off x="9089136" y="3456432"/>
+            <a:ext cx="566928" cy="566928"/>
+          </a:xfrm>
+          <a:prstGeom prst="ellipse">
+            <a:avLst/>
+          </a:prstGeom>
+          <a:solidFill>
+            <a:srgbClr val="6A4CA3"/>
+          </a:solidFill>
+          <a:ln w="12700">
+            <a:solidFill>
+              <a:srgbClr val="6A4CA3"/>
+            </a:solidFill>
+            <a:prstDash val="solid"/>
+          </a:ln>
+        </p:spPr>
+      </p:sp>
+      <p:sp>
+        <p:nvSpPr>
+          <p:cNvPr id="17" name="Shape 15"/>
+          <p:cNvSpPr/>
+          <p:nvPr/>
+        </p:nvSpPr>
+        <p:spPr>
+          <a:xfrm>
+            <a:off x="8385048" y="3419856"/>
+            <a:ext cx="1975104" cy="0"/>
+          </a:xfrm>
+          <a:prstGeom prst="line">
+            <a:avLst/>
+          </a:prstGeom>
+          <a:noFill/>
+          <a:ln w="25400">
+            <a:solidFill>
+              <a:srgbClr val="8ABBD8"/>
+            </a:solidFill>
+            <a:prstDash val="solid"/>
+          </a:ln>
+        </p:spPr>
+      </p:sp>
+      <p:sp>
+        <p:nvSpPr>
+          <p:cNvPr id="18" name="Shape 16"/>
+          <p:cNvSpPr/>
+          <p:nvPr/>
+        </p:nvSpPr>
+        <p:spPr>
+          <a:xfrm>
+            <a:off x="8202168" y="3630168"/>
+            <a:ext cx="1170432" cy="118872"/>
+          </a:xfrm>
+          <a:prstGeom prst="line">
+            <a:avLst/>
+          </a:prstGeom>
+          <a:noFill/>
+          <a:ln w="25400">
+            <a:solidFill>
+              <a:srgbClr val="8ABBD8"/>
+            </a:solidFill>
+            <a:prstDash val="solid"/>
+          </a:ln>
+        </p:spPr>
+      </p:sp>
+      <p:sp>
+        <p:nvSpPr>
+          <p:cNvPr id="19" name="Shape 17"/>
+          <p:cNvSpPr/>
+          <p:nvPr/>
+        </p:nvSpPr>
+        <p:spPr>
+          <a:xfrm>
+            <a:off x="10543032" y="3630168"/>
+            <a:ext cx="-1170432" cy="118872"/>
+          </a:xfrm>
+          <a:prstGeom prst="line">
+            <a:avLst/>
+          </a:prstGeom>
+          <a:noFill/>
+          <a:ln w="25400">
+            <a:solidFill>
+              <a:srgbClr val="8ABBD8"/>
+            </a:solidFill>
+            <a:prstDash val="solid"/>
+          </a:ln>
+        </p:spPr>
+      </p:sp>
+      <p:sp>
+        <p:nvSpPr>
+          <p:cNvPr id="20" name="Text 18"/>
+          <p:cNvSpPr/>
+          <p:nvPr/>
+        </p:nvSpPr>
+        <p:spPr>
+          <a:xfrm>
+            <a:off x="7863840" y="4069080"/>
+            <a:ext cx="3017520" cy="164592"/>
           </a:xfrm>
           <a:prstGeom prst="rect">
             <a:avLst/>
@@ -16051,79 +17858,38 @@
           <a:bodyPr wrap="square" lIns="0" tIns="0" rIns="0" bIns="0" rtlCol="0" anchor="ctr"/>
           <a:lstStyle/>
           <a:p>
-            <a:pPr indent="0" marL="0">
-              <a:buNone/>
-            </a:pPr>
-            <a:r>
-              <a:rPr lang="en-US" sz="1300" b="1" dirty="0">
-                <a:solidFill>
-                  <a:srgbClr val="0068B7"/>
-                </a:solidFill>
-                <a:latin typeface="Aptos" pitchFamily="34" charset="0"/>
-                <a:ea typeface="Aptos" pitchFamily="34" charset="-122"/>
-                <a:cs typeface="Aptos" pitchFamily="34" charset="-120"/>
-              </a:rPr>
-              <a:t>Key idea</a:t>
-            </a:r>
-            <a:endParaRPr lang="en-US" sz="1300" dirty="0"/>
-          </a:p>
-        </p:txBody>
-      </p:sp>
-      <p:sp>
-        <p:nvSpPr>
-          <p:cNvPr id="14" name="Text 12"/>
-          <p:cNvSpPr/>
-          <p:nvPr/>
-        </p:nvSpPr>
-        <p:spPr>
-          <a:xfrm>
-            <a:off x="8074152" y="1920240"/>
-            <a:ext cx="2825496" cy="1188720"/>
-          </a:xfrm>
-          <a:prstGeom prst="rect">
-            <a:avLst/>
-          </a:prstGeom>
-          <a:noFill/>
-          <a:ln/>
-        </p:spPr>
-        <p:txBody>
-          <a:bodyPr wrap="square" lIns="0" tIns="0" rIns="0" bIns="0" rtlCol="0" anchor="t">
-            <a:normAutofit/>
-          </a:bodyPr>
-          <a:lstStyle/>
-          <a:p>
-            <a:pPr indent="0" marL="0">
-              <a:buNone/>
-            </a:pPr>
-            <a:r>
-              <a:rPr lang="en-US" sz="1550" dirty="0">
-                <a:solidFill>
-                  <a:srgbClr val="17364A"/>
-                </a:solidFill>
-                <a:latin typeface="Aptos" pitchFamily="34" charset="0"/>
-                <a:ea typeface="Aptos" pitchFamily="34" charset="-122"/>
-                <a:cs typeface="Aptos" pitchFamily="34" charset="-120"/>
-              </a:rPr>
-              <a:t>This module provides national-level training guidance for public health agencies and partners.</a:t>
-            </a:r>
-            <a:endParaRPr lang="en-US" sz="1550" dirty="0"/>
-          </a:p>
-        </p:txBody>
-      </p:sp>
-      <p:sp>
-        <p:nvSpPr>
-          <p:cNvPr id="15" name="Shape 13"/>
-          <p:cNvSpPr/>
-          <p:nvPr/>
-        </p:nvSpPr>
-        <p:spPr>
-          <a:xfrm>
-            <a:off x="7909560" y="3520440"/>
-            <a:ext cx="3154680" cy="1737360"/>
+            <a:pPr algn="ctr" indent="0" marL="0">
+              <a:buNone/>
+            </a:pPr>
+            <a:r>
+              <a:rPr lang="en-US" sz="900" b="1" dirty="0">
+                <a:solidFill>
+                  <a:srgbClr val="003A63"/>
+                </a:solidFill>
+                <a:latin typeface="Aptos" pitchFamily="34" charset="0"/>
+                <a:ea typeface="Aptos" pitchFamily="34" charset="-122"/>
+                <a:cs typeface="Aptos" pitchFamily="34" charset="-120"/>
+              </a:rPr>
+              <a:t>Decision rights</a:t>
+            </a:r>
+            <a:endParaRPr lang="en-US" sz="900" dirty="0"/>
+          </a:p>
+        </p:txBody>
+      </p:sp>
+      <p:sp>
+        <p:nvSpPr>
+          <p:cNvPr id="21" name="Shape 19"/>
+          <p:cNvSpPr/>
+          <p:nvPr/>
+        </p:nvSpPr>
+        <p:spPr>
+          <a:xfrm>
+            <a:off x="7635240" y="4498848"/>
+            <a:ext cx="3474720" cy="1143000"/>
           </a:xfrm>
           <a:prstGeom prst="roundRect">
             <a:avLst>
-              <a:gd name="adj" fmla="val 6316"/>
+              <a:gd name="adj" fmla="val 9600"/>
             </a:avLst>
           </a:prstGeom>
           <a:solidFill>
@@ -16139,14 +17905,14 @@
       </p:sp>
       <p:sp>
         <p:nvSpPr>
-          <p:cNvPr id="16" name="Text 14"/>
-          <p:cNvSpPr/>
-          <p:nvPr/>
-        </p:nvSpPr>
-        <p:spPr>
-          <a:xfrm>
-            <a:off x="8074152" y="3666744"/>
-            <a:ext cx="2825496" cy="256032"/>
+          <p:cNvPr id="22" name="Text 20"/>
+          <p:cNvSpPr/>
+          <p:nvPr/>
+        </p:nvSpPr>
+        <p:spPr>
+          <a:xfrm>
+            <a:off x="7799832" y="4645152"/>
+            <a:ext cx="3145536" cy="256032"/>
           </a:xfrm>
           <a:prstGeom prst="rect">
             <a:avLst/>
@@ -16170,7 +17936,7 @@
                 <a:ea typeface="Aptos" pitchFamily="34" charset="-122"/>
                 <a:cs typeface="Aptos" pitchFamily="34" charset="-120"/>
               </a:rPr>
-              <a:t>Use this for</a:t>
+              <a:t>What to document</a:t>
             </a:r>
             <a:endParaRPr lang="en-US" sz="1300" dirty="0"/>
           </a:p>
@@ -16178,14 +17944,14 @@
       </p:sp>
       <p:sp>
         <p:nvSpPr>
-          <p:cNvPr id="17" name="Text 15"/>
-          <p:cNvSpPr/>
-          <p:nvPr/>
-        </p:nvSpPr>
-        <p:spPr>
-          <a:xfrm>
-            <a:off x="8074152" y="4023360"/>
-            <a:ext cx="2825496" cy="1097280"/>
+          <p:cNvPr id="23" name="Text 21"/>
+          <p:cNvSpPr/>
+          <p:nvPr/>
+        </p:nvSpPr>
+        <p:spPr>
+          <a:xfrm>
+            <a:off x="7799832" y="5001768"/>
+            <a:ext cx="3145536" cy="502920"/>
           </a:xfrm>
           <a:prstGeom prst="rect">
             <a:avLst/>
@@ -16211,7 +17977,7 @@
                 <a:ea typeface="Aptos" pitchFamily="34" charset="-122"/>
                 <a:cs typeface="Aptos" pitchFamily="34" charset="-120"/>
               </a:rPr>
-              <a:t>Connect the concept to public health decisions, safeguards, documentation, or implementation work.</a:t>
+              <a:t>Translate this concept into clear decision rights, review steps, documentation expectations, and escalation paths before an AI-supported workflow is approved.</a:t>
             </a:r>
             <a:endParaRPr lang="en-US" sz="1550" dirty="0"/>
           </a:p>
@@ -16385,8 +18151,8 @@
         </p:nvSpPr>
         <p:spPr>
           <a:xfrm>
-            <a:off x="9966960" y="6537960"/>
-            <a:ext cx="1645920" cy="201168"/>
+            <a:off x="9646920" y="6537960"/>
+            <a:ext cx="1965960" cy="201168"/>
           </a:xfrm>
           <a:prstGeom prst="rect">
             <a:avLst/>
@@ -16410,7 +18176,7 @@
                 <a:ea typeface="Aptos" pitchFamily="34" charset="-122"/>
                 <a:cs typeface="Aptos" pitchFamily="34" charset="-120"/>
               </a:rPr>
-              <a:t>Â© Paula Soper</a:t>
+              <a:t>Copyright Paula Soper</a:t>
             </a:r>
             <a:endParaRPr lang="en-US" sz="800" dirty="0"/>
           </a:p>
@@ -16457,77 +18223,13 @@
       </p:sp>
       <p:sp>
         <p:nvSpPr>
-          <p:cNvPr id="8" name="Shape 6"/>
+          <p:cNvPr id="8" name="Text 6"/>
           <p:cNvSpPr/>
           <p:nvPr/>
         </p:nvSpPr>
         <p:spPr>
           <a:xfrm>
             <a:off x="640080" y="658368"/>
-            <a:ext cx="420624" cy="420624"/>
-          </a:xfrm>
-          <a:prstGeom prst="ellipse">
-            <a:avLst/>
-          </a:prstGeom>
-          <a:solidFill>
-            <a:srgbClr val="0068B7"/>
-          </a:solidFill>
-          <a:ln w="12700">
-            <a:solidFill>
-              <a:srgbClr val="0068B7"/>
-            </a:solidFill>
-            <a:prstDash val="solid"/>
-          </a:ln>
-        </p:spPr>
-      </p:sp>
-      <p:sp>
-        <p:nvSpPr>
-          <p:cNvPr id="9" name="Text 7"/>
-          <p:cNvSpPr/>
-          <p:nvPr/>
-        </p:nvSpPr>
-        <p:spPr>
-          <a:xfrm>
-            <a:off x="640080" y="731520"/>
-            <a:ext cx="420624" cy="164592"/>
-          </a:xfrm>
-          <a:prstGeom prst="rect">
-            <a:avLst/>
-          </a:prstGeom>
-          <a:noFill/>
-          <a:ln/>
-        </p:spPr>
-        <p:txBody>
-          <a:bodyPr wrap="square" lIns="0" tIns="0" rIns="0" bIns="0" rtlCol="0" anchor="ctr"/>
-          <a:lstStyle/>
-          <a:p>
-            <a:pPr algn="ctr" indent="0" marL="0">
-              <a:buNone/>
-            </a:pPr>
-            <a:r>
-              <a:rPr lang="en-US" sz="1100" b="1" dirty="0">
-                <a:solidFill>
-                  <a:srgbClr val="FFFFFF"/>
-                </a:solidFill>
-                <a:latin typeface="Aptos" pitchFamily="34" charset="0"/>
-                <a:ea typeface="Aptos" pitchFamily="34" charset="-122"/>
-                <a:cs typeface="Aptos" pitchFamily="34" charset="-120"/>
-              </a:rPr>
-              <a:t>4</a:t>
-            </a:r>
-            <a:endParaRPr lang="en-US" sz="1100" dirty="0"/>
-          </a:p>
-        </p:txBody>
-      </p:sp>
-      <p:sp>
-        <p:nvSpPr>
-          <p:cNvPr id="10" name="Text 8"/>
-          <p:cNvSpPr/>
-          <p:nvPr/>
-        </p:nvSpPr>
-        <p:spPr>
-          <a:xfrm>
-            <a:off x="640080" y="621792"/>
             <a:ext cx="10881360" cy="713232"/>
           </a:xfrm>
           <a:prstGeom prst="rect">
@@ -16562,14 +18264,14 @@
       </p:sp>
       <p:sp>
         <p:nvSpPr>
-          <p:cNvPr id="11" name="Text 9"/>
+          <p:cNvPr id="9" name="Text 7"/>
           <p:cNvSpPr/>
           <p:nvPr/>
         </p:nvSpPr>
         <p:spPr>
           <a:xfrm>
             <a:off x="868680" y="1508760"/>
-            <a:ext cx="6537960" cy="4160520"/>
+            <a:ext cx="6309360" cy="4160520"/>
           </a:xfrm>
           <a:prstGeom prst="rect">
             <a:avLst/>
@@ -16628,18 +18330,18 @@
       </p:sp>
       <p:sp>
         <p:nvSpPr>
-          <p:cNvPr id="12" name="Shape 10"/>
-          <p:cNvSpPr/>
-          <p:nvPr/>
-        </p:nvSpPr>
-        <p:spPr>
-          <a:xfrm>
-            <a:off x="7909560" y="1417320"/>
-            <a:ext cx="3154680" cy="1828800"/>
+          <p:cNvPr id="10" name="Shape 8"/>
+          <p:cNvSpPr/>
+          <p:nvPr/>
+        </p:nvSpPr>
+        <p:spPr>
+          <a:xfrm>
+            <a:off x="7635240" y="1325880"/>
+            <a:ext cx="3474720" cy="1325880"/>
           </a:xfrm>
           <a:prstGeom prst="roundRect">
             <a:avLst>
-              <a:gd name="adj" fmla="val 6000"/>
+              <a:gd name="adj" fmla="val 8276"/>
             </a:avLst>
           </a:prstGeom>
           <a:solidFill>
@@ -16655,14 +18357,14 @@
       </p:sp>
       <p:sp>
         <p:nvSpPr>
-          <p:cNvPr id="13" name="Text 11"/>
-          <p:cNvSpPr/>
-          <p:nvPr/>
-        </p:nvSpPr>
-        <p:spPr>
-          <a:xfrm>
-            <a:off x="8074152" y="1563624"/>
-            <a:ext cx="2825496" cy="256032"/>
+          <p:cNvPr id="11" name="Text 9"/>
+          <p:cNvSpPr/>
+          <p:nvPr/>
+        </p:nvSpPr>
+        <p:spPr>
+          <a:xfrm>
+            <a:off x="7799832" y="1472184"/>
+            <a:ext cx="3145536" cy="256032"/>
           </a:xfrm>
           <a:prstGeom prst="rect">
             <a:avLst/>
@@ -16686,7 +18388,7 @@
                 <a:ea typeface="Aptos" pitchFamily="34" charset="-122"/>
                 <a:cs typeface="Aptos" pitchFamily="34" charset="-120"/>
               </a:rPr>
-              <a:t>Key idea</a:t>
+              <a:t>Risk check</a:t>
             </a:r>
             <a:endParaRPr lang="en-US" sz="1300" dirty="0"/>
           </a:p>
@@ -16694,14 +18396,14 @@
       </p:sp>
       <p:sp>
         <p:nvSpPr>
-          <p:cNvPr id="14" name="Text 12"/>
-          <p:cNvSpPr/>
-          <p:nvPr/>
-        </p:nvSpPr>
-        <p:spPr>
-          <a:xfrm>
-            <a:off x="8074152" y="1920240"/>
-            <a:ext cx="2825496" cy="1188720"/>
+          <p:cNvPr id="12" name="Text 10"/>
+          <p:cNvSpPr/>
+          <p:nvPr/>
+        </p:nvSpPr>
+        <p:spPr>
+          <a:xfrm>
+            <a:off x="7799832" y="1828800"/>
+            <a:ext cx="3145536" cy="685800"/>
           </a:xfrm>
           <a:prstGeom prst="rect">
             <a:avLst/>
@@ -16735,18 +18437,171 @@
       </p:sp>
       <p:sp>
         <p:nvSpPr>
-          <p:cNvPr id="15" name="Shape 13"/>
-          <p:cNvSpPr/>
-          <p:nvPr/>
-        </p:nvSpPr>
-        <p:spPr>
-          <a:xfrm>
-            <a:off x="7909560" y="3520440"/>
-            <a:ext cx="3154680" cy="1737360"/>
+          <p:cNvPr id="13" name="Shape 11"/>
+          <p:cNvSpPr/>
+          <p:nvPr/>
+        </p:nvSpPr>
+        <p:spPr>
+          <a:xfrm>
+            <a:off x="7635240" y="2788920"/>
+            <a:ext cx="3474720" cy="1536192"/>
           </a:xfrm>
           <a:prstGeom prst="roundRect">
             <a:avLst>
-              <a:gd name="adj" fmla="val 6316"/>
+              <a:gd name="adj" fmla="val 7143"/>
+            </a:avLst>
+          </a:prstGeom>
+          <a:solidFill>
+            <a:srgbClr val="FFFFFF">
+              <a:alpha val="88000"/>
+            </a:srgbClr>
+          </a:solidFill>
+          <a:ln w="12700">
+            <a:solidFill>
+              <a:srgbClr val="D6E8F2"/>
+            </a:solidFill>
+            <a:prstDash val="solid"/>
+          </a:ln>
+        </p:spPr>
+      </p:sp>
+      <p:sp>
+        <p:nvSpPr>
+          <p:cNvPr id="14" name="Shape 12"/>
+          <p:cNvSpPr/>
+          <p:nvPr/>
+        </p:nvSpPr>
+        <p:spPr>
+          <a:xfrm>
+            <a:off x="8046720" y="3108960"/>
+            <a:ext cx="2651760" cy="896112"/>
+          </a:xfrm>
+          <a:prstGeom prst="arc">
+            <a:avLst/>
+          </a:prstGeom>
+          <a:noFill/>
+          <a:ln w="25400">
+            <a:solidFill>
+              <a:srgbClr val="0068B7"/>
+            </a:solidFill>
+            <a:prstDash val="solid"/>
+          </a:ln>
+        </p:spPr>
+      </p:sp>
+      <p:sp>
+        <p:nvSpPr>
+          <p:cNvPr id="15" name="Text 13"/>
+          <p:cNvSpPr/>
+          <p:nvPr/>
+        </p:nvSpPr>
+        <p:spPr>
+          <a:xfrm>
+            <a:off x="7909560" y="3099816"/>
+            <a:ext cx="2926080" cy="256032"/>
+          </a:xfrm>
+          <a:prstGeom prst="rect">
+            <a:avLst/>
+          </a:prstGeom>
+          <a:noFill/>
+          <a:ln/>
+        </p:spPr>
+        <p:txBody>
+          <a:bodyPr wrap="square" lIns="0" tIns="0" rIns="0" bIns="0" rtlCol="0" anchor="ctr"/>
+          <a:lstStyle/>
+          <a:p>
+            <a:pPr algn="ctr" indent="0" marL="0">
+              <a:buNone/>
+            </a:pPr>
+            <a:r>
+              <a:rPr lang="en-US" sz="1500" b="1" dirty="0">
+                <a:solidFill>
+                  <a:srgbClr val="003A63"/>
+                </a:solidFill>
+                <a:latin typeface="Aptos" pitchFamily="34" charset="0"/>
+                <a:ea typeface="Aptos" pitchFamily="34" charset="-122"/>
+                <a:cs typeface="Aptos" pitchFamily="34" charset="-120"/>
+              </a:rPr>
+              <a:t>Risk</a:t>
+            </a:r>
+            <a:endParaRPr lang="en-US" sz="1500" dirty="0"/>
+          </a:p>
+        </p:txBody>
+      </p:sp>
+      <p:sp>
+        <p:nvSpPr>
+          <p:cNvPr id="16" name="Shape 14"/>
+          <p:cNvSpPr/>
+          <p:nvPr/>
+        </p:nvSpPr>
+        <p:spPr>
+          <a:xfrm>
+            <a:off x="8366760" y="3639312"/>
+            <a:ext cx="2011680" cy="0"/>
+          </a:xfrm>
+          <a:prstGeom prst="line">
+            <a:avLst/>
+          </a:prstGeom>
+          <a:noFill/>
+          <a:ln w="63500">
+            <a:solidFill>
+              <a:srgbClr val="2F8A28"/>
+            </a:solidFill>
+            <a:prstDash val="solid"/>
+          </a:ln>
+        </p:spPr>
+      </p:sp>
+      <p:sp>
+        <p:nvSpPr>
+          <p:cNvPr id="17" name="Text 15"/>
+          <p:cNvSpPr/>
+          <p:nvPr/>
+        </p:nvSpPr>
+        <p:spPr>
+          <a:xfrm>
+            <a:off x="7909560" y="3849624"/>
+            <a:ext cx="2926080" cy="164592"/>
+          </a:xfrm>
+          <a:prstGeom prst="rect">
+            <a:avLst/>
+          </a:prstGeom>
+          <a:noFill/>
+          <a:ln/>
+        </p:spPr>
+        <p:txBody>
+          <a:bodyPr wrap="square" lIns="0" tIns="0" rIns="0" bIns="0" rtlCol="0" anchor="ctr"/>
+          <a:lstStyle/>
+          <a:p>
+            <a:pPr algn="ctr" indent="0" marL="0">
+              <a:buNone/>
+            </a:pPr>
+            <a:r>
+              <a:rPr lang="en-US" sz="900" dirty="0">
+                <a:solidFill>
+                  <a:srgbClr val="003A63"/>
+                </a:solidFill>
+                <a:latin typeface="Aptos" pitchFamily="34" charset="0"/>
+                <a:ea typeface="Aptos" pitchFamily="34" charset="-122"/>
+                <a:cs typeface="Aptos" pitchFamily="34" charset="-120"/>
+              </a:rPr>
+              <a:t>Human review</a:t>
+            </a:r>
+            <a:endParaRPr lang="en-US" sz="900" dirty="0"/>
+          </a:p>
+        </p:txBody>
+      </p:sp>
+      <p:sp>
+        <p:nvSpPr>
+          <p:cNvPr id="18" name="Shape 16"/>
+          <p:cNvSpPr/>
+          <p:nvPr/>
+        </p:nvSpPr>
+        <p:spPr>
+          <a:xfrm>
+            <a:off x="7635240" y="4498848"/>
+            <a:ext cx="3474720" cy="1143000"/>
+          </a:xfrm>
+          <a:prstGeom prst="roundRect">
+            <a:avLst>
+              <a:gd name="adj" fmla="val 9600"/>
             </a:avLst>
           </a:prstGeom>
           <a:solidFill>
@@ -16762,14 +18617,14 @@
       </p:sp>
       <p:sp>
         <p:nvSpPr>
-          <p:cNvPr id="16" name="Text 14"/>
-          <p:cNvSpPr/>
-          <p:nvPr/>
-        </p:nvSpPr>
-        <p:spPr>
-          <a:xfrm>
-            <a:off x="8074152" y="3666744"/>
-            <a:ext cx="2825496" cy="256032"/>
+          <p:cNvPr id="19" name="Text 17"/>
+          <p:cNvSpPr/>
+          <p:nvPr/>
+        </p:nvSpPr>
+        <p:spPr>
+          <a:xfrm>
+            <a:off x="7799832" y="4645152"/>
+            <a:ext cx="3145536" cy="256032"/>
           </a:xfrm>
           <a:prstGeom prst="rect">
             <a:avLst/>
@@ -16793,7 +18648,7 @@
                 <a:ea typeface="Aptos" pitchFamily="34" charset="-122"/>
                 <a:cs typeface="Aptos" pitchFamily="34" charset="-120"/>
               </a:rPr>
-              <a:t>Use this for</a:t>
+              <a:t>Safeguard to plan</a:t>
             </a:r>
             <a:endParaRPr lang="en-US" sz="1300" dirty="0"/>
           </a:p>
@@ -16801,14 +18656,14 @@
       </p:sp>
       <p:sp>
         <p:nvSpPr>
-          <p:cNvPr id="17" name="Text 15"/>
-          <p:cNvSpPr/>
-          <p:nvPr/>
-        </p:nvSpPr>
-        <p:spPr>
-          <a:xfrm>
-            <a:off x="8074152" y="4023360"/>
-            <a:ext cx="2825496" cy="1097280"/>
+          <p:cNvPr id="20" name="Text 18"/>
+          <p:cNvSpPr/>
+          <p:nvPr/>
+        </p:nvSpPr>
+        <p:spPr>
+          <a:xfrm>
+            <a:off x="7799832" y="5001768"/>
+            <a:ext cx="3145536" cy="502920"/>
           </a:xfrm>
           <a:prstGeom prst="rect">
             <a:avLst/>
@@ -16834,7 +18689,7 @@
                 <a:ea typeface="Aptos" pitchFamily="34" charset="-122"/>
                 <a:cs typeface="Aptos" pitchFamily="34" charset="-120"/>
               </a:rPr>
-              <a:t>Connect the concept to public health decisions, safeguards, documentation, or implementation work.</a:t>
+              <a:t>Identify what could go wrong, who could be affected, what safeguards are needed, and what evidence should be reviewed before use expands.</a:t>
             </a:r>
             <a:endParaRPr lang="en-US" sz="1550" dirty="0"/>
           </a:p>

--- a/downloads/presentations/modules/gov-300.pptx
+++ b/downloads/presentations/modules/gov-300.pptx
@@ -3617,13 +3617,11 @@
             </a:avLst>
           </a:prstGeom>
           <a:solidFill>
-            <a:srgbClr val="FFFFFF">
-              <a:alpha val="88000"/>
-            </a:srgbClr>
+            <a:srgbClr val="FFFFFF"/>
           </a:solidFill>
           <a:ln w="12700">
             <a:solidFill>
-              <a:srgbClr val="D6E8F2"/>
+              <a:srgbClr val="B9D7E6"/>
             </a:solidFill>
             <a:prstDash val="solid"/>
           </a:ln>
@@ -3631,26 +3629,42 @@
       </p:sp>
       <p:sp>
         <p:nvSpPr>
-          <p:cNvPr id="14" name="Shape 12"/>
-          <p:cNvSpPr/>
-          <p:nvPr/>
-        </p:nvSpPr>
-        <p:spPr>
-          <a:xfrm>
-            <a:off x="8046720" y="3108960"/>
-            <a:ext cx="2651760" cy="896112"/>
-          </a:xfrm>
-          <a:prstGeom prst="arc">
-            <a:avLst/>
-          </a:prstGeom>
-          <a:noFill/>
-          <a:ln w="25400">
-            <a:solidFill>
-              <a:srgbClr val="0068B7"/>
-            </a:solidFill>
-            <a:prstDash val="solid"/>
-          </a:ln>
-        </p:spPr>
+          <p:cNvPr id="14" name="Text 12"/>
+          <p:cNvSpPr/>
+          <p:nvPr/>
+        </p:nvSpPr>
+        <p:spPr>
+          <a:xfrm>
+            <a:off x="7799832" y="2935224"/>
+            <a:ext cx="3145536" cy="256032"/>
+          </a:xfrm>
+          <a:prstGeom prst="rect">
+            <a:avLst/>
+          </a:prstGeom>
+          <a:noFill/>
+          <a:ln/>
+        </p:spPr>
+        <p:txBody>
+          <a:bodyPr wrap="square" lIns="0" tIns="0" rIns="0" bIns="0" rtlCol="0" anchor="ctr"/>
+          <a:lstStyle/>
+          <a:p>
+            <a:pPr indent="0" marL="0">
+              <a:buNone/>
+            </a:pPr>
+            <a:r>
+              <a:rPr lang="en-US" sz="1300" b="1" dirty="0">
+                <a:solidFill>
+                  <a:srgbClr val="0068B7"/>
+                </a:solidFill>
+                <a:latin typeface="Aptos" pitchFamily="34" charset="0"/>
+                <a:ea typeface="Aptos" pitchFamily="34" charset="-122"/>
+                <a:cs typeface="Aptos" pitchFamily="34" charset="-120"/>
+              </a:rPr>
+              <a:t>Concept checkpoints</a:t>
+            </a:r>
+            <a:endParaRPr lang="en-US" sz="1300" dirty="0"/>
+          </a:p>
+        </p:txBody>
       </p:sp>
       <p:sp>
         <p:nvSpPr>
@@ -3660,102 +3674,67 @@
         </p:nvSpPr>
         <p:spPr>
           <a:xfrm>
-            <a:off x="7909560" y="3099816"/>
-            <a:ext cx="2926080" cy="256032"/>
-          </a:xfrm>
-          <a:prstGeom prst="rect">
-            <a:avLst/>
-          </a:prstGeom>
-          <a:noFill/>
-          <a:ln/>
-        </p:spPr>
-        <p:txBody>
-          <a:bodyPr wrap="square" lIns="0" tIns="0" rIns="0" bIns="0" rtlCol="0" anchor="ctr"/>
-          <a:lstStyle/>
-          <a:p>
-            <a:pPr algn="ctr" indent="0" marL="0">
-              <a:buNone/>
-            </a:pPr>
-            <a:r>
-              <a:rPr lang="en-US" sz="1500" b="1" dirty="0">
-                <a:solidFill>
-                  <a:srgbClr val="003A63"/>
-                </a:solidFill>
-                <a:latin typeface="Aptos" pitchFamily="34" charset="0"/>
-                <a:ea typeface="Aptos" pitchFamily="34" charset="-122"/>
-                <a:cs typeface="Aptos" pitchFamily="34" charset="-120"/>
-              </a:rPr>
-              <a:t>Risk</a:t>
-            </a:r>
-            <a:endParaRPr lang="en-US" sz="1500" dirty="0"/>
+            <a:off x="7818120" y="3300984"/>
+            <a:ext cx="3090672" cy="877824"/>
+          </a:xfrm>
+          <a:prstGeom prst="rect">
+            <a:avLst/>
+          </a:prstGeom>
+          <a:noFill/>
+          <a:ln/>
+        </p:spPr>
+        <p:txBody>
+          <a:bodyPr wrap="square" lIns="254" tIns="254" rIns="254" bIns="254" rtlCol="0" anchor="t">
+            <a:normAutofit/>
+          </a:bodyPr>
+          <a:lstStyle/>
+          <a:p>
+            <a:r>
+              <a:rPr lang="en-US" sz="1380" dirty="0">
+                <a:solidFill>
+                  <a:srgbClr val="17364A"/>
+                </a:solidFill>
+                <a:latin typeface="Aptos" pitchFamily="34" charset="0"/>
+                <a:ea typeface="Aptos" pitchFamily="34" charset="-122"/>
+                <a:cs typeface="Aptos" pitchFamily="34" charset="-120"/>
+              </a:rPr>
+              <a:t>One report could contain hidden or visible instructions telling the AI to ignore prior.</a:t>
+            </a:r>
+            <a:endParaRPr lang="en-US" sz="1380" dirty="0"/>
+          </a:p>
+          <a:p>
+            <a:r>
+              <a:rPr lang="en-US" sz="1380" dirty="0">
+                <a:solidFill>
+                  <a:srgbClr val="17364A"/>
+                </a:solidFill>
+                <a:latin typeface="Aptos" pitchFamily="34" charset="0"/>
+                <a:ea typeface="Aptos" pitchFamily="34" charset="-122"/>
+                <a:cs typeface="Aptos" pitchFamily="34" charset="-120"/>
+              </a:rPr>
+              <a:t>If the assistant treats the report content as instructions rather than data, it may.</a:t>
+            </a:r>
+            <a:endParaRPr lang="en-US" sz="1380" dirty="0"/>
+          </a:p>
+          <a:p>
+            <a:r>
+              <a:rPr lang="en-US" sz="1380" dirty="0">
+                <a:solidFill>
+                  <a:srgbClr val="17364A"/>
+                </a:solidFill>
+                <a:latin typeface="Aptos" pitchFamily="34" charset="0"/>
+                <a:ea typeface="Aptos" pitchFamily="34" charset="-122"/>
+                <a:cs typeface="Aptos" pitchFamily="34" charset="-120"/>
+              </a:rPr>
+              <a:t>A secure workflow would use an approved tool, restrict the assistant’s access, treat.</a:t>
+            </a:r>
+            <a:endParaRPr lang="en-US" sz="1380" dirty="0"/>
           </a:p>
         </p:txBody>
       </p:sp>
       <p:sp>
         <p:nvSpPr>
           <p:cNvPr id="16" name="Shape 14"/>
-          <p:cNvSpPr/>
-          <p:nvPr/>
-        </p:nvSpPr>
-        <p:spPr>
-          <a:xfrm>
-            <a:off x="8366760" y="3639312"/>
-            <a:ext cx="2011680" cy="0"/>
-          </a:xfrm>
-          <a:prstGeom prst="line">
-            <a:avLst/>
-          </a:prstGeom>
-          <a:noFill/>
-          <a:ln w="63500">
-            <a:solidFill>
-              <a:srgbClr val="2F8A28"/>
-            </a:solidFill>
-            <a:prstDash val="solid"/>
-          </a:ln>
-        </p:spPr>
-      </p:sp>
-      <p:sp>
-        <p:nvSpPr>
-          <p:cNvPr id="17" name="Text 15"/>
-          <p:cNvSpPr/>
-          <p:nvPr/>
-        </p:nvSpPr>
-        <p:spPr>
-          <a:xfrm>
-            <a:off x="7909560" y="3849624"/>
-            <a:ext cx="2926080" cy="164592"/>
-          </a:xfrm>
-          <a:prstGeom prst="rect">
-            <a:avLst/>
-          </a:prstGeom>
-          <a:noFill/>
-          <a:ln/>
-        </p:spPr>
-        <p:txBody>
-          <a:bodyPr wrap="square" lIns="0" tIns="0" rIns="0" bIns="0" rtlCol="0" anchor="ctr"/>
-          <a:lstStyle/>
-          <a:p>
-            <a:pPr algn="ctr" indent="0" marL="0">
-              <a:buNone/>
-            </a:pPr>
-            <a:r>
-              <a:rPr lang="en-US" sz="900" dirty="0">
-                <a:solidFill>
-                  <a:srgbClr val="003A63"/>
-                </a:solidFill>
-                <a:latin typeface="Aptos" pitchFamily="34" charset="0"/>
-                <a:ea typeface="Aptos" pitchFamily="34" charset="-122"/>
-                <a:cs typeface="Aptos" pitchFamily="34" charset="-120"/>
-              </a:rPr>
-              <a:t>Human review</a:t>
-            </a:r>
-            <a:endParaRPr lang="en-US" sz="900" dirty="0"/>
-          </a:p>
-        </p:txBody>
-      </p:sp>
-      <p:sp>
-        <p:nvSpPr>
-          <p:cNvPr id="18" name="Shape 16"/>
           <p:cNvSpPr/>
           <p:nvPr/>
         </p:nvSpPr>
@@ -3782,7 +3761,7 @@
       </p:sp>
       <p:sp>
         <p:nvSpPr>
-          <p:cNvPr id="19" name="Text 17"/>
+          <p:cNvPr id="17" name="Text 15"/>
           <p:cNvSpPr/>
           <p:nvPr/>
         </p:nvSpPr>
@@ -3821,7 +3800,7 @@
       </p:sp>
       <p:sp>
         <p:nvSpPr>
-          <p:cNvPr id="20" name="Text 18"/>
+          <p:cNvPr id="18" name="Text 16"/>
           <p:cNvSpPr/>
           <p:nvPr/>
         </p:nvSpPr>
@@ -4329,13 +4308,11 @@
             </a:avLst>
           </a:prstGeom>
           <a:solidFill>
-            <a:srgbClr val="FFFFFF">
-              <a:alpha val="88000"/>
-            </a:srgbClr>
+            <a:srgbClr val="FFFFFF"/>
           </a:solidFill>
           <a:ln w="12700">
             <a:solidFill>
-              <a:srgbClr val="D6E8F2"/>
+              <a:srgbClr val="B9D7E6"/>
             </a:solidFill>
             <a:prstDash val="solid"/>
           </a:ln>
@@ -4343,26 +4320,42 @@
       </p:sp>
       <p:sp>
         <p:nvSpPr>
-          <p:cNvPr id="14" name="Shape 12"/>
-          <p:cNvSpPr/>
-          <p:nvPr/>
-        </p:nvSpPr>
-        <p:spPr>
-          <a:xfrm>
-            <a:off x="8046720" y="3108960"/>
-            <a:ext cx="2651760" cy="896112"/>
-          </a:xfrm>
-          <a:prstGeom prst="arc">
-            <a:avLst/>
-          </a:prstGeom>
-          <a:noFill/>
-          <a:ln w="25400">
-            <a:solidFill>
-              <a:srgbClr val="0068B7"/>
-            </a:solidFill>
-            <a:prstDash val="solid"/>
-          </a:ln>
-        </p:spPr>
+          <p:cNvPr id="14" name="Text 12"/>
+          <p:cNvSpPr/>
+          <p:nvPr/>
+        </p:nvSpPr>
+        <p:spPr>
+          <a:xfrm>
+            <a:off x="7799832" y="2935224"/>
+            <a:ext cx="3145536" cy="256032"/>
+          </a:xfrm>
+          <a:prstGeom prst="rect">
+            <a:avLst/>
+          </a:prstGeom>
+          <a:noFill/>
+          <a:ln/>
+        </p:spPr>
+        <p:txBody>
+          <a:bodyPr wrap="square" lIns="0" tIns="0" rIns="0" bIns="0" rtlCol="0" anchor="ctr"/>
+          <a:lstStyle/>
+          <a:p>
+            <a:pPr indent="0" marL="0">
+              <a:buNone/>
+            </a:pPr>
+            <a:r>
+              <a:rPr lang="en-US" sz="1300" b="1" dirty="0">
+                <a:solidFill>
+                  <a:srgbClr val="0068B7"/>
+                </a:solidFill>
+                <a:latin typeface="Aptos" pitchFamily="34" charset="0"/>
+                <a:ea typeface="Aptos" pitchFamily="34" charset="-122"/>
+                <a:cs typeface="Aptos" pitchFamily="34" charset="-120"/>
+              </a:rPr>
+              <a:t>Concept checkpoints</a:t>
+            </a:r>
+            <a:endParaRPr lang="en-US" sz="1300" dirty="0"/>
+          </a:p>
+        </p:txBody>
       </p:sp>
       <p:sp>
         <p:nvSpPr>
@@ -4372,102 +4365,67 @@
         </p:nvSpPr>
         <p:spPr>
           <a:xfrm>
-            <a:off x="7909560" y="3099816"/>
-            <a:ext cx="2926080" cy="256032"/>
-          </a:xfrm>
-          <a:prstGeom prst="rect">
-            <a:avLst/>
-          </a:prstGeom>
-          <a:noFill/>
-          <a:ln/>
-        </p:spPr>
-        <p:txBody>
-          <a:bodyPr wrap="square" lIns="0" tIns="0" rIns="0" bIns="0" rtlCol="0" anchor="ctr"/>
-          <a:lstStyle/>
-          <a:p>
-            <a:pPr algn="ctr" indent="0" marL="0">
-              <a:buNone/>
-            </a:pPr>
-            <a:r>
-              <a:rPr lang="en-US" sz="1500" b="1" dirty="0">
-                <a:solidFill>
-                  <a:srgbClr val="003A63"/>
-                </a:solidFill>
-                <a:latin typeface="Aptos" pitchFamily="34" charset="0"/>
-                <a:ea typeface="Aptos" pitchFamily="34" charset="-122"/>
-                <a:cs typeface="Aptos" pitchFamily="34" charset="-120"/>
-              </a:rPr>
-              <a:t>Risk</a:t>
-            </a:r>
-            <a:endParaRPr lang="en-US" sz="1500" dirty="0"/>
+            <a:off x="7818120" y="3300984"/>
+            <a:ext cx="3090672" cy="877824"/>
+          </a:xfrm>
+          <a:prstGeom prst="rect">
+            <a:avLst/>
+          </a:prstGeom>
+          <a:noFill/>
+          <a:ln/>
+        </p:spPr>
+        <p:txBody>
+          <a:bodyPr wrap="square" lIns="254" tIns="254" rIns="254" bIns="254" rtlCol="0" anchor="t">
+            <a:normAutofit/>
+          </a:bodyPr>
+          <a:lstStyle/>
+          <a:p>
+            <a:r>
+              <a:rPr lang="en-US" sz="1380" dirty="0">
+                <a:solidFill>
+                  <a:srgbClr val="17364A"/>
+                </a:solidFill>
+                <a:latin typeface="Aptos" pitchFamily="34" charset="0"/>
+                <a:ea typeface="Aptos" pitchFamily="34" charset="-122"/>
+                <a:cs typeface="Aptos" pitchFamily="34" charset="-120"/>
+              </a:rPr>
+              <a:t>A low-risk training exercise using public documents requires different controls than a.</a:t>
+            </a:r>
+            <a:endParaRPr lang="en-US" sz="1380" dirty="0"/>
+          </a:p>
+          <a:p>
+            <a:r>
+              <a:rPr lang="en-US" sz="1380" dirty="0">
+                <a:solidFill>
+                  <a:srgbClr val="17364A"/>
+                </a:solidFill>
+                <a:latin typeface="Aptos" pitchFamily="34" charset="0"/>
+                <a:ea typeface="Aptos" pitchFamily="34" charset="-122"/>
+                <a:cs typeface="Aptos" pitchFamily="34" charset="-120"/>
+              </a:rPr>
+              <a:t>Agencies should classify AI uses by data sensitivity, system access, autonomy,.</a:t>
+            </a:r>
+            <a:endParaRPr lang="en-US" sz="1380" dirty="0"/>
+          </a:p>
+          <a:p>
+            <a:r>
+              <a:rPr lang="en-US" sz="1380" dirty="0">
+                <a:solidFill>
+                  <a:srgbClr val="17364A"/>
+                </a:solidFill>
+                <a:latin typeface="Aptos" pitchFamily="34" charset="0"/>
+                <a:ea typeface="Aptos" pitchFamily="34" charset="-122"/>
+                <a:cs typeface="Aptos" pitchFamily="34" charset="-120"/>
+              </a:rPr>
+              <a:t>Access control is central.</a:t>
+            </a:r>
+            <a:endParaRPr lang="en-US" sz="1380" dirty="0"/>
           </a:p>
         </p:txBody>
       </p:sp>
       <p:sp>
         <p:nvSpPr>
           <p:cNvPr id="16" name="Shape 14"/>
-          <p:cNvSpPr/>
-          <p:nvPr/>
-        </p:nvSpPr>
-        <p:spPr>
-          <a:xfrm>
-            <a:off x="8366760" y="3639312"/>
-            <a:ext cx="2011680" cy="0"/>
-          </a:xfrm>
-          <a:prstGeom prst="line">
-            <a:avLst/>
-          </a:prstGeom>
-          <a:noFill/>
-          <a:ln w="63500">
-            <a:solidFill>
-              <a:srgbClr val="2F8A28"/>
-            </a:solidFill>
-            <a:prstDash val="solid"/>
-          </a:ln>
-        </p:spPr>
-      </p:sp>
-      <p:sp>
-        <p:nvSpPr>
-          <p:cNvPr id="17" name="Text 15"/>
-          <p:cNvSpPr/>
-          <p:nvPr/>
-        </p:nvSpPr>
-        <p:spPr>
-          <a:xfrm>
-            <a:off x="7909560" y="3849624"/>
-            <a:ext cx="2926080" cy="164592"/>
-          </a:xfrm>
-          <a:prstGeom prst="rect">
-            <a:avLst/>
-          </a:prstGeom>
-          <a:noFill/>
-          <a:ln/>
-        </p:spPr>
-        <p:txBody>
-          <a:bodyPr wrap="square" lIns="0" tIns="0" rIns="0" bIns="0" rtlCol="0" anchor="ctr"/>
-          <a:lstStyle/>
-          <a:p>
-            <a:pPr algn="ctr" indent="0" marL="0">
-              <a:buNone/>
-            </a:pPr>
-            <a:r>
-              <a:rPr lang="en-US" sz="900" dirty="0">
-                <a:solidFill>
-                  <a:srgbClr val="003A63"/>
-                </a:solidFill>
-                <a:latin typeface="Aptos" pitchFamily="34" charset="0"/>
-                <a:ea typeface="Aptos" pitchFamily="34" charset="-122"/>
-                <a:cs typeface="Aptos" pitchFamily="34" charset="-120"/>
-              </a:rPr>
-              <a:t>Human review</a:t>
-            </a:r>
-            <a:endParaRPr lang="en-US" sz="900" dirty="0"/>
-          </a:p>
-        </p:txBody>
-      </p:sp>
-      <p:sp>
-        <p:nvSpPr>
-          <p:cNvPr id="18" name="Shape 16"/>
           <p:cNvSpPr/>
           <p:nvPr/>
         </p:nvSpPr>
@@ -4494,7 +4452,7 @@
       </p:sp>
       <p:sp>
         <p:nvSpPr>
-          <p:cNvPr id="19" name="Text 17"/>
+          <p:cNvPr id="17" name="Text 15"/>
           <p:cNvSpPr/>
           <p:nvPr/>
         </p:nvSpPr>
@@ -4533,7 +4491,7 @@
       </p:sp>
       <p:sp>
         <p:nvSpPr>
-          <p:cNvPr id="20" name="Text 18"/>
+          <p:cNvPr id="18" name="Text 16"/>
           <p:cNvSpPr/>
           <p:nvPr/>
         </p:nvSpPr>
@@ -5041,13 +4999,11 @@
             </a:avLst>
           </a:prstGeom>
           <a:solidFill>
-            <a:srgbClr val="FFFFFF">
-              <a:alpha val="88000"/>
-            </a:srgbClr>
+            <a:srgbClr val="FFFFFF"/>
           </a:solidFill>
           <a:ln w="12700">
             <a:solidFill>
-              <a:srgbClr val="D6E8F2"/>
+              <a:srgbClr val="B9D7E6"/>
             </a:solidFill>
             <a:prstDash val="solid"/>
           </a:ln>
@@ -5055,26 +5011,42 @@
       </p:sp>
       <p:sp>
         <p:nvSpPr>
-          <p:cNvPr id="14" name="Shape 12"/>
-          <p:cNvSpPr/>
-          <p:nvPr/>
-        </p:nvSpPr>
-        <p:spPr>
-          <a:xfrm>
-            <a:off x="8046720" y="3108960"/>
-            <a:ext cx="2651760" cy="896112"/>
-          </a:xfrm>
-          <a:prstGeom prst="arc">
-            <a:avLst/>
-          </a:prstGeom>
-          <a:noFill/>
-          <a:ln w="25400">
-            <a:solidFill>
-              <a:srgbClr val="0068B7"/>
-            </a:solidFill>
-            <a:prstDash val="solid"/>
-          </a:ln>
-        </p:spPr>
+          <p:cNvPr id="14" name="Text 12"/>
+          <p:cNvSpPr/>
+          <p:nvPr/>
+        </p:nvSpPr>
+        <p:spPr>
+          <a:xfrm>
+            <a:off x="7799832" y="2935224"/>
+            <a:ext cx="3145536" cy="256032"/>
+          </a:xfrm>
+          <a:prstGeom prst="rect">
+            <a:avLst/>
+          </a:prstGeom>
+          <a:noFill/>
+          <a:ln/>
+        </p:spPr>
+        <p:txBody>
+          <a:bodyPr wrap="square" lIns="0" tIns="0" rIns="0" bIns="0" rtlCol="0" anchor="ctr"/>
+          <a:lstStyle/>
+          <a:p>
+            <a:pPr indent="0" marL="0">
+              <a:buNone/>
+            </a:pPr>
+            <a:r>
+              <a:rPr lang="en-US" sz="1300" b="1" dirty="0">
+                <a:solidFill>
+                  <a:srgbClr val="0068B7"/>
+                </a:solidFill>
+                <a:latin typeface="Aptos" pitchFamily="34" charset="0"/>
+                <a:ea typeface="Aptos" pitchFamily="34" charset="-122"/>
+                <a:cs typeface="Aptos" pitchFamily="34" charset="-120"/>
+              </a:rPr>
+              <a:t>Concept checkpoints</a:t>
+            </a:r>
+            <a:endParaRPr lang="en-US" sz="1300" dirty="0"/>
+          </a:p>
+        </p:txBody>
       </p:sp>
       <p:sp>
         <p:nvSpPr>
@@ -5084,102 +5056,67 @@
         </p:nvSpPr>
         <p:spPr>
           <a:xfrm>
-            <a:off x="7909560" y="3099816"/>
-            <a:ext cx="2926080" cy="256032"/>
-          </a:xfrm>
-          <a:prstGeom prst="rect">
-            <a:avLst/>
-          </a:prstGeom>
-          <a:noFill/>
-          <a:ln/>
-        </p:spPr>
-        <p:txBody>
-          <a:bodyPr wrap="square" lIns="0" tIns="0" rIns="0" bIns="0" rtlCol="0" anchor="ctr"/>
-          <a:lstStyle/>
-          <a:p>
-            <a:pPr algn="ctr" indent="0" marL="0">
-              <a:buNone/>
-            </a:pPr>
-            <a:r>
-              <a:rPr lang="en-US" sz="1500" b="1" dirty="0">
-                <a:solidFill>
-                  <a:srgbClr val="003A63"/>
-                </a:solidFill>
-                <a:latin typeface="Aptos" pitchFamily="34" charset="0"/>
-                <a:ea typeface="Aptos" pitchFamily="34" charset="-122"/>
-                <a:cs typeface="Aptos" pitchFamily="34" charset="-120"/>
-              </a:rPr>
-              <a:t>Risk</a:t>
-            </a:r>
-            <a:endParaRPr lang="en-US" sz="1500" dirty="0"/>
+            <a:off x="7818120" y="3300984"/>
+            <a:ext cx="3090672" cy="877824"/>
+          </a:xfrm>
+          <a:prstGeom prst="rect">
+            <a:avLst/>
+          </a:prstGeom>
+          <a:noFill/>
+          <a:ln/>
+        </p:spPr>
+        <p:txBody>
+          <a:bodyPr wrap="square" lIns="254" tIns="254" rIns="254" bIns="254" rtlCol="0" anchor="t">
+            <a:normAutofit/>
+          </a:bodyPr>
+          <a:lstStyle/>
+          <a:p>
+            <a:r>
+              <a:rPr lang="en-US" sz="1380" dirty="0">
+                <a:solidFill>
+                  <a:srgbClr val="17364A"/>
+                </a:solidFill>
+                <a:latin typeface="Aptos" pitchFamily="34" charset="0"/>
+                <a:ea typeface="Aptos" pitchFamily="34" charset="-122"/>
+                <a:cs typeface="Aptos" pitchFamily="34" charset="-120"/>
+              </a:rPr>
+              <a:t>Output handling matters because AI outputs may be copied into reports, emails, code,.</a:t>
+            </a:r>
+            <a:endParaRPr lang="en-US" sz="1380" dirty="0"/>
+          </a:p>
+          <a:p>
+            <a:r>
+              <a:rPr lang="en-US" sz="1380" dirty="0">
+                <a:solidFill>
+                  <a:srgbClr val="17364A"/>
+                </a:solidFill>
+                <a:latin typeface="Aptos" pitchFamily="34" charset="0"/>
+                <a:ea typeface="Aptos" pitchFamily="34" charset="-122"/>
+                <a:cs typeface="Aptos" pitchFamily="34" charset="-120"/>
+              </a:rPr>
+              <a:t>Insecure output handling can lead to misinformation, broken code, malicious links, or.</a:t>
+            </a:r>
+            <a:endParaRPr lang="en-US" sz="1380" dirty="0"/>
+          </a:p>
+          <a:p>
+            <a:r>
+              <a:rPr lang="en-US" sz="1380" dirty="0">
+                <a:solidFill>
+                  <a:srgbClr val="17364A"/>
+                </a:solidFill>
+                <a:latin typeface="Aptos" pitchFamily="34" charset="0"/>
+                <a:ea typeface="Aptos" pitchFamily="34" charset="-122"/>
+                <a:cs typeface="Aptos" pitchFamily="34" charset="-120"/>
+              </a:rPr>
+              <a:t>Outputs should be validated before downstream use, especially when they affect systems,.</a:t>
+            </a:r>
+            <a:endParaRPr lang="en-US" sz="1380" dirty="0"/>
           </a:p>
         </p:txBody>
       </p:sp>
       <p:sp>
         <p:nvSpPr>
           <p:cNvPr id="16" name="Shape 14"/>
-          <p:cNvSpPr/>
-          <p:nvPr/>
-        </p:nvSpPr>
-        <p:spPr>
-          <a:xfrm>
-            <a:off x="8366760" y="3639312"/>
-            <a:ext cx="2011680" cy="0"/>
-          </a:xfrm>
-          <a:prstGeom prst="line">
-            <a:avLst/>
-          </a:prstGeom>
-          <a:noFill/>
-          <a:ln w="63500">
-            <a:solidFill>
-              <a:srgbClr val="2F8A28"/>
-            </a:solidFill>
-            <a:prstDash val="solid"/>
-          </a:ln>
-        </p:spPr>
-      </p:sp>
-      <p:sp>
-        <p:nvSpPr>
-          <p:cNvPr id="17" name="Text 15"/>
-          <p:cNvSpPr/>
-          <p:nvPr/>
-        </p:nvSpPr>
-        <p:spPr>
-          <a:xfrm>
-            <a:off x="7909560" y="3849624"/>
-            <a:ext cx="2926080" cy="164592"/>
-          </a:xfrm>
-          <a:prstGeom prst="rect">
-            <a:avLst/>
-          </a:prstGeom>
-          <a:noFill/>
-          <a:ln/>
-        </p:spPr>
-        <p:txBody>
-          <a:bodyPr wrap="square" lIns="0" tIns="0" rIns="0" bIns="0" rtlCol="0" anchor="ctr"/>
-          <a:lstStyle/>
-          <a:p>
-            <a:pPr algn="ctr" indent="0" marL="0">
-              <a:buNone/>
-            </a:pPr>
-            <a:r>
-              <a:rPr lang="en-US" sz="900" dirty="0">
-                <a:solidFill>
-                  <a:srgbClr val="003A63"/>
-                </a:solidFill>
-                <a:latin typeface="Aptos" pitchFamily="34" charset="0"/>
-                <a:ea typeface="Aptos" pitchFamily="34" charset="-122"/>
-                <a:cs typeface="Aptos" pitchFamily="34" charset="-120"/>
-              </a:rPr>
-              <a:t>Human review</a:t>
-            </a:r>
-            <a:endParaRPr lang="en-US" sz="900" dirty="0"/>
-          </a:p>
-        </p:txBody>
-      </p:sp>
-      <p:sp>
-        <p:nvSpPr>
-          <p:cNvPr id="18" name="Shape 16"/>
           <p:cNvSpPr/>
           <p:nvPr/>
         </p:nvSpPr>
@@ -5206,7 +5143,7 @@
       </p:sp>
       <p:sp>
         <p:nvSpPr>
-          <p:cNvPr id="19" name="Text 17"/>
+          <p:cNvPr id="17" name="Text 15"/>
           <p:cNvSpPr/>
           <p:nvPr/>
         </p:nvSpPr>
@@ -5245,7 +5182,7 @@
       </p:sp>
       <p:sp>
         <p:nvSpPr>
-          <p:cNvPr id="20" name="Text 18"/>
+          <p:cNvPr id="18" name="Text 16"/>
           <p:cNvSpPr/>
           <p:nvPr/>
         </p:nvSpPr>
@@ -5753,13 +5690,11 @@
             </a:avLst>
           </a:prstGeom>
           <a:solidFill>
-            <a:srgbClr val="FFFFFF">
-              <a:alpha val="88000"/>
-            </a:srgbClr>
+            <a:srgbClr val="FFFFFF"/>
           </a:solidFill>
           <a:ln w="12700">
             <a:solidFill>
-              <a:srgbClr val="D6E8F2"/>
+              <a:srgbClr val="B9D7E6"/>
             </a:solidFill>
             <a:prstDash val="solid"/>
           </a:ln>
@@ -5767,26 +5702,42 @@
       </p:sp>
       <p:sp>
         <p:nvSpPr>
-          <p:cNvPr id="14" name="Shape 12"/>
-          <p:cNvSpPr/>
-          <p:nvPr/>
-        </p:nvSpPr>
-        <p:spPr>
-          <a:xfrm>
-            <a:off x="8046720" y="3108960"/>
-            <a:ext cx="2651760" cy="896112"/>
-          </a:xfrm>
-          <a:prstGeom prst="arc">
-            <a:avLst/>
-          </a:prstGeom>
-          <a:noFill/>
-          <a:ln w="25400">
-            <a:solidFill>
-              <a:srgbClr val="0068B7"/>
-            </a:solidFill>
-            <a:prstDash val="solid"/>
-          </a:ln>
-        </p:spPr>
+          <p:cNvPr id="14" name="Text 12"/>
+          <p:cNvSpPr/>
+          <p:nvPr/>
+        </p:nvSpPr>
+        <p:spPr>
+          <a:xfrm>
+            <a:off x="7799832" y="2935224"/>
+            <a:ext cx="3145536" cy="256032"/>
+          </a:xfrm>
+          <a:prstGeom prst="rect">
+            <a:avLst/>
+          </a:prstGeom>
+          <a:noFill/>
+          <a:ln/>
+        </p:spPr>
+        <p:txBody>
+          <a:bodyPr wrap="square" lIns="0" tIns="0" rIns="0" bIns="0" rtlCol="0" anchor="ctr"/>
+          <a:lstStyle/>
+          <a:p>
+            <a:pPr indent="0" marL="0">
+              <a:buNone/>
+            </a:pPr>
+            <a:r>
+              <a:rPr lang="en-US" sz="1300" b="1" dirty="0">
+                <a:solidFill>
+                  <a:srgbClr val="0068B7"/>
+                </a:solidFill>
+                <a:latin typeface="Aptos" pitchFamily="34" charset="0"/>
+                <a:ea typeface="Aptos" pitchFamily="34" charset="-122"/>
+                <a:cs typeface="Aptos" pitchFamily="34" charset="-120"/>
+              </a:rPr>
+              <a:t>Concept checkpoints</a:t>
+            </a:r>
+            <a:endParaRPr lang="en-US" sz="1300" dirty="0"/>
+          </a:p>
+        </p:txBody>
       </p:sp>
       <p:sp>
         <p:nvSpPr>
@@ -5796,102 +5747,67 @@
         </p:nvSpPr>
         <p:spPr>
           <a:xfrm>
-            <a:off x="7909560" y="3099816"/>
-            <a:ext cx="2926080" cy="256032"/>
-          </a:xfrm>
-          <a:prstGeom prst="rect">
-            <a:avLst/>
-          </a:prstGeom>
-          <a:noFill/>
-          <a:ln/>
-        </p:spPr>
-        <p:txBody>
-          <a:bodyPr wrap="square" lIns="0" tIns="0" rIns="0" bIns="0" rtlCol="0" anchor="ctr"/>
-          <a:lstStyle/>
-          <a:p>
-            <a:pPr algn="ctr" indent="0" marL="0">
-              <a:buNone/>
-            </a:pPr>
-            <a:r>
-              <a:rPr lang="en-US" sz="1500" b="1" dirty="0">
-                <a:solidFill>
-                  <a:srgbClr val="003A63"/>
-                </a:solidFill>
-                <a:latin typeface="Aptos" pitchFamily="34" charset="0"/>
-                <a:ea typeface="Aptos" pitchFamily="34" charset="-122"/>
-                <a:cs typeface="Aptos" pitchFamily="34" charset="-120"/>
-              </a:rPr>
-              <a:t>Risk</a:t>
-            </a:r>
-            <a:endParaRPr lang="en-US" sz="1500" dirty="0"/>
+            <a:off x="7818120" y="3300984"/>
+            <a:ext cx="3090672" cy="877824"/>
+          </a:xfrm>
+          <a:prstGeom prst="rect">
+            <a:avLst/>
+          </a:prstGeom>
+          <a:noFill/>
+          <a:ln/>
+        </p:spPr>
+        <p:txBody>
+          <a:bodyPr wrap="square" lIns="254" tIns="254" rIns="254" bIns="254" rtlCol="0" anchor="t">
+            <a:normAutofit/>
+          </a:bodyPr>
+          <a:lstStyle/>
+          <a:p>
+            <a:r>
+              <a:rPr lang="en-US" sz="1380" dirty="0">
+                <a:solidFill>
+                  <a:srgbClr val="17364A"/>
+                </a:solidFill>
+                <a:latin typeface="Aptos" pitchFamily="34" charset="0"/>
+                <a:ea typeface="Aptos" pitchFamily="34" charset="-122"/>
+                <a:cs typeface="Aptos" pitchFamily="34" charset="-120"/>
+              </a:rPr>
+              <a:t>Guardrails include treating external content as data, restricting tools, and testing with.</a:t>
+            </a:r>
+            <a:endParaRPr lang="en-US" sz="1380" dirty="0"/>
+          </a:p>
+          <a:p>
+            <a:r>
+              <a:rPr lang="en-US" sz="1380" dirty="0">
+                <a:solidFill>
+                  <a:srgbClr val="17364A"/>
+                </a:solidFill>
+                <a:latin typeface="Aptos" pitchFamily="34" charset="0"/>
+                <a:ea typeface="Aptos" pitchFamily="34" charset="-122"/>
+                <a:cs typeface="Aptos" pitchFamily="34" charset="-120"/>
+              </a:rPr>
+              <a:t>Sensitive information disclosure.</a:t>
+            </a:r>
+            <a:endParaRPr lang="en-US" sz="1380" dirty="0"/>
+          </a:p>
+          <a:p>
+            <a:r>
+              <a:rPr lang="en-US" sz="1380" dirty="0">
+                <a:solidFill>
+                  <a:srgbClr val="17364A"/>
+                </a:solidFill>
+                <a:latin typeface="Aptos" pitchFamily="34" charset="0"/>
+                <a:ea typeface="Aptos" pitchFamily="34" charset="-122"/>
+                <a:cs typeface="Aptos" pitchFamily="34" charset="-120"/>
+              </a:rPr>
+              <a:t>AI may reveal information outside user permissions.</a:t>
+            </a:r>
+            <a:endParaRPr lang="en-US" sz="1380" dirty="0"/>
           </a:p>
         </p:txBody>
       </p:sp>
       <p:sp>
         <p:nvSpPr>
           <p:cNvPr id="16" name="Shape 14"/>
-          <p:cNvSpPr/>
-          <p:nvPr/>
-        </p:nvSpPr>
-        <p:spPr>
-          <a:xfrm>
-            <a:off x="8366760" y="3639312"/>
-            <a:ext cx="2011680" cy="0"/>
-          </a:xfrm>
-          <a:prstGeom prst="line">
-            <a:avLst/>
-          </a:prstGeom>
-          <a:noFill/>
-          <a:ln w="63500">
-            <a:solidFill>
-              <a:srgbClr val="2F8A28"/>
-            </a:solidFill>
-            <a:prstDash val="solid"/>
-          </a:ln>
-        </p:spPr>
-      </p:sp>
-      <p:sp>
-        <p:nvSpPr>
-          <p:cNvPr id="17" name="Text 15"/>
-          <p:cNvSpPr/>
-          <p:nvPr/>
-        </p:nvSpPr>
-        <p:spPr>
-          <a:xfrm>
-            <a:off x="7909560" y="3849624"/>
-            <a:ext cx="2926080" cy="164592"/>
-          </a:xfrm>
-          <a:prstGeom prst="rect">
-            <a:avLst/>
-          </a:prstGeom>
-          <a:noFill/>
-          <a:ln/>
-        </p:spPr>
-        <p:txBody>
-          <a:bodyPr wrap="square" lIns="0" tIns="0" rIns="0" bIns="0" rtlCol="0" anchor="ctr"/>
-          <a:lstStyle/>
-          <a:p>
-            <a:pPr algn="ctr" indent="0" marL="0">
-              <a:buNone/>
-            </a:pPr>
-            <a:r>
-              <a:rPr lang="en-US" sz="900" dirty="0">
-                <a:solidFill>
-                  <a:srgbClr val="003A63"/>
-                </a:solidFill>
-                <a:latin typeface="Aptos" pitchFamily="34" charset="0"/>
-                <a:ea typeface="Aptos" pitchFamily="34" charset="-122"/>
-                <a:cs typeface="Aptos" pitchFamily="34" charset="-120"/>
-              </a:rPr>
-              <a:t>Human review</a:t>
-            </a:r>
-            <a:endParaRPr lang="en-US" sz="900" dirty="0"/>
-          </a:p>
-        </p:txBody>
-      </p:sp>
-      <p:sp>
-        <p:nvSpPr>
-          <p:cNvPr id="18" name="Shape 16"/>
           <p:cNvSpPr/>
           <p:nvPr/>
         </p:nvSpPr>
@@ -5918,7 +5834,7 @@
       </p:sp>
       <p:sp>
         <p:nvSpPr>
-          <p:cNvPr id="19" name="Text 17"/>
+          <p:cNvPr id="17" name="Text 15"/>
           <p:cNvSpPr/>
           <p:nvPr/>
         </p:nvSpPr>
@@ -5957,7 +5873,7 @@
       </p:sp>
       <p:sp>
         <p:nvSpPr>
-          <p:cNvPr id="20" name="Text 18"/>
+          <p:cNvPr id="18" name="Text 16"/>
           <p:cNvSpPr/>
           <p:nvPr/>
         </p:nvSpPr>
@@ -6465,13 +6381,11 @@
             </a:avLst>
           </a:prstGeom>
           <a:solidFill>
-            <a:srgbClr val="FFFFFF">
-              <a:alpha val="88000"/>
-            </a:srgbClr>
+            <a:srgbClr val="FFFFFF"/>
           </a:solidFill>
           <a:ln w="12700">
             <a:solidFill>
-              <a:srgbClr val="D6E8F2"/>
+              <a:srgbClr val="B9D7E6"/>
             </a:solidFill>
             <a:prstDash val="solid"/>
           </a:ln>
@@ -6479,26 +6393,42 @@
       </p:sp>
       <p:sp>
         <p:nvSpPr>
-          <p:cNvPr id="14" name="Shape 12"/>
-          <p:cNvSpPr/>
-          <p:nvPr/>
-        </p:nvSpPr>
-        <p:spPr>
-          <a:xfrm>
-            <a:off x="8046720" y="3108960"/>
-            <a:ext cx="2651760" cy="896112"/>
-          </a:xfrm>
-          <a:prstGeom prst="arc">
-            <a:avLst/>
-          </a:prstGeom>
-          <a:noFill/>
-          <a:ln w="25400">
-            <a:solidFill>
-              <a:srgbClr val="0068B7"/>
-            </a:solidFill>
-            <a:prstDash val="solid"/>
-          </a:ln>
-        </p:spPr>
+          <p:cNvPr id="14" name="Text 12"/>
+          <p:cNvSpPr/>
+          <p:nvPr/>
+        </p:nvSpPr>
+        <p:spPr>
+          <a:xfrm>
+            <a:off x="7799832" y="2935224"/>
+            <a:ext cx="3145536" cy="256032"/>
+          </a:xfrm>
+          <a:prstGeom prst="rect">
+            <a:avLst/>
+          </a:prstGeom>
+          <a:noFill/>
+          <a:ln/>
+        </p:spPr>
+        <p:txBody>
+          <a:bodyPr wrap="square" lIns="0" tIns="0" rIns="0" bIns="0" rtlCol="0" anchor="ctr"/>
+          <a:lstStyle/>
+          <a:p>
+            <a:pPr indent="0" marL="0">
+              <a:buNone/>
+            </a:pPr>
+            <a:r>
+              <a:rPr lang="en-US" sz="1300" b="1" dirty="0">
+                <a:solidFill>
+                  <a:srgbClr val="0068B7"/>
+                </a:solidFill>
+                <a:latin typeface="Aptos" pitchFamily="34" charset="0"/>
+                <a:ea typeface="Aptos" pitchFamily="34" charset="-122"/>
+                <a:cs typeface="Aptos" pitchFamily="34" charset="-120"/>
+              </a:rPr>
+              <a:t>Concept checkpoints</a:t>
+            </a:r>
+            <a:endParaRPr lang="en-US" sz="1300" dirty="0"/>
+          </a:p>
+        </p:txBody>
       </p:sp>
       <p:sp>
         <p:nvSpPr>
@@ -6508,102 +6438,67 @@
         </p:nvSpPr>
         <p:spPr>
           <a:xfrm>
-            <a:off x="7909560" y="3099816"/>
-            <a:ext cx="2926080" cy="256032"/>
-          </a:xfrm>
-          <a:prstGeom prst="rect">
-            <a:avLst/>
-          </a:prstGeom>
-          <a:noFill/>
-          <a:ln/>
-        </p:spPr>
-        <p:txBody>
-          <a:bodyPr wrap="square" lIns="0" tIns="0" rIns="0" bIns="0" rtlCol="0" anchor="ctr"/>
-          <a:lstStyle/>
-          <a:p>
-            <a:pPr algn="ctr" indent="0" marL="0">
-              <a:buNone/>
-            </a:pPr>
-            <a:r>
-              <a:rPr lang="en-US" sz="1500" b="1" dirty="0">
-                <a:solidFill>
-                  <a:srgbClr val="003A63"/>
-                </a:solidFill>
-                <a:latin typeface="Aptos" pitchFamily="34" charset="0"/>
-                <a:ea typeface="Aptos" pitchFamily="34" charset="-122"/>
-                <a:cs typeface="Aptos" pitchFamily="34" charset="-120"/>
-              </a:rPr>
-              <a:t>Risk</a:t>
-            </a:r>
-            <a:endParaRPr lang="en-US" sz="1500" dirty="0"/>
+            <a:off x="7818120" y="3300984"/>
+            <a:ext cx="3090672" cy="877824"/>
+          </a:xfrm>
+          <a:prstGeom prst="rect">
+            <a:avLst/>
+          </a:prstGeom>
+          <a:noFill/>
+          <a:ln/>
+        </p:spPr>
+        <p:txBody>
+          <a:bodyPr wrap="square" lIns="254" tIns="254" rIns="254" bIns="254" rtlCol="0" anchor="t">
+            <a:normAutofit/>
+          </a:bodyPr>
+          <a:lstStyle/>
+          <a:p>
+            <a:r>
+              <a:rPr lang="en-US" sz="1380" dirty="0">
+                <a:solidFill>
+                  <a:srgbClr val="17364A"/>
+                </a:solidFill>
+                <a:latin typeface="Aptos" pitchFamily="34" charset="0"/>
+                <a:ea typeface="Aptos" pitchFamily="34" charset="-122"/>
+                <a:cs typeface="Aptos" pitchFamily="34" charset="-120"/>
+              </a:rPr>
+              <a:t>Supply chain risk.</a:t>
+            </a:r>
+            <a:endParaRPr lang="en-US" sz="1380" dirty="0"/>
+          </a:p>
+          <a:p>
+            <a:r>
+              <a:rPr lang="en-US" sz="1380" dirty="0">
+                <a:solidFill>
+                  <a:srgbClr val="17364A"/>
+                </a:solidFill>
+                <a:latin typeface="Aptos" pitchFamily="34" charset="0"/>
+                <a:ea typeface="Aptos" pitchFamily="34" charset="-122"/>
+                <a:cs typeface="Aptos" pitchFamily="34" charset="-120"/>
+              </a:rPr>
+              <a:t>AI tools may depend on vendors, plugins, models, or libraries with vulnerabilities.</a:t>
+            </a:r>
+            <a:endParaRPr lang="en-US" sz="1380" dirty="0"/>
+          </a:p>
+          <a:p>
+            <a:r>
+              <a:rPr lang="en-US" sz="1380" dirty="0">
+                <a:solidFill>
+                  <a:srgbClr val="17364A"/>
+                </a:solidFill>
+                <a:latin typeface="Aptos" pitchFamily="34" charset="0"/>
+                <a:ea typeface="Aptos" pitchFamily="34" charset="-122"/>
+                <a:cs typeface="Aptos" pitchFamily="34" charset="-120"/>
+              </a:rPr>
+              <a:t>Guardrails include vendor review, security documentation, patching, and contract.</a:t>
+            </a:r>
+            <a:endParaRPr lang="en-US" sz="1380" dirty="0"/>
           </a:p>
         </p:txBody>
       </p:sp>
       <p:sp>
         <p:nvSpPr>
           <p:cNvPr id="16" name="Shape 14"/>
-          <p:cNvSpPr/>
-          <p:nvPr/>
-        </p:nvSpPr>
-        <p:spPr>
-          <a:xfrm>
-            <a:off x="8366760" y="3639312"/>
-            <a:ext cx="2011680" cy="0"/>
-          </a:xfrm>
-          <a:prstGeom prst="line">
-            <a:avLst/>
-          </a:prstGeom>
-          <a:noFill/>
-          <a:ln w="63500">
-            <a:solidFill>
-              <a:srgbClr val="2F8A28"/>
-            </a:solidFill>
-            <a:prstDash val="solid"/>
-          </a:ln>
-        </p:spPr>
-      </p:sp>
-      <p:sp>
-        <p:nvSpPr>
-          <p:cNvPr id="17" name="Text 15"/>
-          <p:cNvSpPr/>
-          <p:nvPr/>
-        </p:nvSpPr>
-        <p:spPr>
-          <a:xfrm>
-            <a:off x="7909560" y="3849624"/>
-            <a:ext cx="2926080" cy="164592"/>
-          </a:xfrm>
-          <a:prstGeom prst="rect">
-            <a:avLst/>
-          </a:prstGeom>
-          <a:noFill/>
-          <a:ln/>
-        </p:spPr>
-        <p:txBody>
-          <a:bodyPr wrap="square" lIns="0" tIns="0" rIns="0" bIns="0" rtlCol="0" anchor="ctr"/>
-          <a:lstStyle/>
-          <a:p>
-            <a:pPr algn="ctr" indent="0" marL="0">
-              <a:buNone/>
-            </a:pPr>
-            <a:r>
-              <a:rPr lang="en-US" sz="900" dirty="0">
-                <a:solidFill>
-                  <a:srgbClr val="003A63"/>
-                </a:solidFill>
-                <a:latin typeface="Aptos" pitchFamily="34" charset="0"/>
-                <a:ea typeface="Aptos" pitchFamily="34" charset="-122"/>
-                <a:cs typeface="Aptos" pitchFamily="34" charset="-120"/>
-              </a:rPr>
-              <a:t>Human review</a:t>
-            </a:r>
-            <a:endParaRPr lang="en-US" sz="900" dirty="0"/>
-          </a:p>
-        </p:txBody>
-      </p:sp>
-      <p:sp>
-        <p:nvSpPr>
-          <p:cNvPr id="18" name="Shape 16"/>
           <p:cNvSpPr/>
           <p:nvPr/>
         </p:nvSpPr>
@@ -6630,7 +6525,7 @@
       </p:sp>
       <p:sp>
         <p:nvSpPr>
-          <p:cNvPr id="19" name="Text 17"/>
+          <p:cNvPr id="17" name="Text 15"/>
           <p:cNvSpPr/>
           <p:nvPr/>
         </p:nvSpPr>
@@ -6669,7 +6564,7 @@
       </p:sp>
       <p:sp>
         <p:nvSpPr>
-          <p:cNvPr id="20" name="Text 18"/>
+          <p:cNvPr id="18" name="Text 16"/>
           <p:cNvSpPr/>
           <p:nvPr/>
         </p:nvSpPr>
@@ -7177,13 +7072,11 @@
             </a:avLst>
           </a:prstGeom>
           <a:solidFill>
-            <a:srgbClr val="FFFFFF">
-              <a:alpha val="88000"/>
-            </a:srgbClr>
+            <a:srgbClr val="FFFFFF"/>
           </a:solidFill>
           <a:ln w="12700">
             <a:solidFill>
-              <a:srgbClr val="D6E8F2"/>
+              <a:srgbClr val="B9D7E6"/>
             </a:solidFill>
             <a:prstDash val="solid"/>
           </a:ln>
@@ -7191,26 +7084,42 @@
       </p:sp>
       <p:sp>
         <p:nvSpPr>
-          <p:cNvPr id="14" name="Shape 12"/>
-          <p:cNvSpPr/>
-          <p:nvPr/>
-        </p:nvSpPr>
-        <p:spPr>
-          <a:xfrm>
-            <a:off x="8046720" y="3108960"/>
-            <a:ext cx="2651760" cy="896112"/>
-          </a:xfrm>
-          <a:prstGeom prst="arc">
-            <a:avLst/>
-          </a:prstGeom>
-          <a:noFill/>
-          <a:ln w="25400">
-            <a:solidFill>
-              <a:srgbClr val="0068B7"/>
-            </a:solidFill>
-            <a:prstDash val="solid"/>
-          </a:ln>
-        </p:spPr>
+          <p:cNvPr id="14" name="Text 12"/>
+          <p:cNvSpPr/>
+          <p:nvPr/>
+        </p:nvSpPr>
+        <p:spPr>
+          <a:xfrm>
+            <a:off x="7799832" y="2935224"/>
+            <a:ext cx="3145536" cy="256032"/>
+          </a:xfrm>
+          <a:prstGeom prst="rect">
+            <a:avLst/>
+          </a:prstGeom>
+          <a:noFill/>
+          <a:ln/>
+        </p:spPr>
+        <p:txBody>
+          <a:bodyPr wrap="square" lIns="0" tIns="0" rIns="0" bIns="0" rtlCol="0" anchor="ctr"/>
+          <a:lstStyle/>
+          <a:p>
+            <a:pPr indent="0" marL="0">
+              <a:buNone/>
+            </a:pPr>
+            <a:r>
+              <a:rPr lang="en-US" sz="1300" b="1" dirty="0">
+                <a:solidFill>
+                  <a:srgbClr val="0068B7"/>
+                </a:solidFill>
+                <a:latin typeface="Aptos" pitchFamily="34" charset="0"/>
+                <a:ea typeface="Aptos" pitchFamily="34" charset="-122"/>
+                <a:cs typeface="Aptos" pitchFamily="34" charset="-120"/>
+              </a:rPr>
+              <a:t>Concept checkpoints</a:t>
+            </a:r>
+            <a:endParaRPr lang="en-US" sz="1300" dirty="0"/>
+          </a:p>
+        </p:txBody>
       </p:sp>
       <p:sp>
         <p:nvSpPr>
@@ -7220,102 +7129,67 @@
         </p:nvSpPr>
         <p:spPr>
           <a:xfrm>
-            <a:off x="7909560" y="3099816"/>
-            <a:ext cx="2926080" cy="256032"/>
-          </a:xfrm>
-          <a:prstGeom prst="rect">
-            <a:avLst/>
-          </a:prstGeom>
-          <a:noFill/>
-          <a:ln/>
-        </p:spPr>
-        <p:txBody>
-          <a:bodyPr wrap="square" lIns="0" tIns="0" rIns="0" bIns="0" rtlCol="0" anchor="ctr"/>
-          <a:lstStyle/>
-          <a:p>
-            <a:pPr algn="ctr" indent="0" marL="0">
-              <a:buNone/>
-            </a:pPr>
-            <a:r>
-              <a:rPr lang="en-US" sz="1500" b="1" dirty="0">
-                <a:solidFill>
-                  <a:srgbClr val="003A63"/>
-                </a:solidFill>
-                <a:latin typeface="Aptos" pitchFamily="34" charset="0"/>
-                <a:ea typeface="Aptos" pitchFamily="34" charset="-122"/>
-                <a:cs typeface="Aptos" pitchFamily="34" charset="-120"/>
-              </a:rPr>
-              <a:t>Risk</a:t>
-            </a:r>
-            <a:endParaRPr lang="en-US" sz="1500" dirty="0"/>
+            <a:off x="7818120" y="3300984"/>
+            <a:ext cx="3090672" cy="877824"/>
+          </a:xfrm>
+          <a:prstGeom prst="rect">
+            <a:avLst/>
+          </a:prstGeom>
+          <a:noFill/>
+          <a:ln/>
+        </p:spPr>
+        <p:txBody>
+          <a:bodyPr wrap="square" lIns="254" tIns="254" rIns="254" bIns="254" rtlCol="0" anchor="t">
+            <a:normAutofit/>
+          </a:bodyPr>
+          <a:lstStyle/>
+          <a:p>
+            <a:r>
+              <a:rPr lang="en-US" sz="1380" dirty="0">
+                <a:solidFill>
+                  <a:srgbClr val="17364A"/>
+                </a:solidFill>
+                <a:latin typeface="Aptos" pitchFamily="34" charset="0"/>
+                <a:ea typeface="Aptos" pitchFamily="34" charset="-122"/>
+                <a:cs typeface="Aptos" pitchFamily="34" charset="-120"/>
+              </a:rPr>
+              <a:t>Prompt templates should include data boundaries, and technical implementations should.</a:t>
+            </a:r>
+            <a:endParaRPr lang="en-US" sz="1380" dirty="0"/>
+          </a:p>
+          <a:p>
+            <a:r>
+              <a:rPr lang="en-US" sz="1380" dirty="0">
+                <a:solidFill>
+                  <a:srgbClr val="17364A"/>
+                </a:solidFill>
+                <a:latin typeface="Aptos" pitchFamily="34" charset="0"/>
+                <a:ea typeface="Aptos" pitchFamily="34" charset="-122"/>
+                <a:cs typeface="Aptos" pitchFamily="34" charset="-120"/>
+              </a:rPr>
+              <a:t>Security should be designed as part of the workflow.</a:t>
+            </a:r>
+            <a:endParaRPr lang="en-US" sz="1380" dirty="0"/>
+          </a:p>
+          <a:p>
+            <a:r>
+              <a:rPr lang="en-US" sz="1380" dirty="0">
+                <a:solidFill>
+                  <a:srgbClr val="17364A"/>
+                </a:solidFill>
+                <a:latin typeface="Aptos" pitchFamily="34" charset="0"/>
+                <a:ea typeface="Aptos" pitchFamily="34" charset="-122"/>
+                <a:cs typeface="Aptos" pitchFamily="34" charset="-120"/>
+              </a:rPr>
+              <a:t>Public health users should know which tools are approved, what data may be used, what.</a:t>
+            </a:r>
+            <a:endParaRPr lang="en-US" sz="1380" dirty="0"/>
           </a:p>
         </p:txBody>
       </p:sp>
       <p:sp>
         <p:nvSpPr>
           <p:cNvPr id="16" name="Shape 14"/>
-          <p:cNvSpPr/>
-          <p:nvPr/>
-        </p:nvSpPr>
-        <p:spPr>
-          <a:xfrm>
-            <a:off x="8366760" y="3639312"/>
-            <a:ext cx="2011680" cy="0"/>
-          </a:xfrm>
-          <a:prstGeom prst="line">
-            <a:avLst/>
-          </a:prstGeom>
-          <a:noFill/>
-          <a:ln w="63500">
-            <a:solidFill>
-              <a:srgbClr val="2F8A28"/>
-            </a:solidFill>
-            <a:prstDash val="solid"/>
-          </a:ln>
-        </p:spPr>
-      </p:sp>
-      <p:sp>
-        <p:nvSpPr>
-          <p:cNvPr id="17" name="Text 15"/>
-          <p:cNvSpPr/>
-          <p:nvPr/>
-        </p:nvSpPr>
-        <p:spPr>
-          <a:xfrm>
-            <a:off x="7909560" y="3849624"/>
-            <a:ext cx="2926080" cy="164592"/>
-          </a:xfrm>
-          <a:prstGeom prst="rect">
-            <a:avLst/>
-          </a:prstGeom>
-          <a:noFill/>
-          <a:ln/>
-        </p:spPr>
-        <p:txBody>
-          <a:bodyPr wrap="square" lIns="0" tIns="0" rIns="0" bIns="0" rtlCol="0" anchor="ctr"/>
-          <a:lstStyle/>
-          <a:p>
-            <a:pPr algn="ctr" indent="0" marL="0">
-              <a:buNone/>
-            </a:pPr>
-            <a:r>
-              <a:rPr lang="en-US" sz="900" dirty="0">
-                <a:solidFill>
-                  <a:srgbClr val="003A63"/>
-                </a:solidFill>
-                <a:latin typeface="Aptos" pitchFamily="34" charset="0"/>
-                <a:ea typeface="Aptos" pitchFamily="34" charset="-122"/>
-                <a:cs typeface="Aptos" pitchFamily="34" charset="-120"/>
-              </a:rPr>
-              <a:t>Human review</a:t>
-            </a:r>
-            <a:endParaRPr lang="en-US" sz="900" dirty="0"/>
-          </a:p>
-        </p:txBody>
-      </p:sp>
-      <p:sp>
-        <p:nvSpPr>
-          <p:cNvPr id="18" name="Shape 16"/>
           <p:cNvSpPr/>
           <p:nvPr/>
         </p:nvSpPr>
@@ -7342,7 +7216,7 @@
       </p:sp>
       <p:sp>
         <p:nvSpPr>
-          <p:cNvPr id="19" name="Text 17"/>
+          <p:cNvPr id="17" name="Text 15"/>
           <p:cNvSpPr/>
           <p:nvPr/>
         </p:nvSpPr>
@@ -7381,7 +7255,7 @@
       </p:sp>
       <p:sp>
         <p:nvSpPr>
-          <p:cNvPr id="20" name="Text 18"/>
+          <p:cNvPr id="18" name="Text 16"/>
           <p:cNvSpPr/>
           <p:nvPr/>
         </p:nvSpPr>
@@ -7889,13 +7763,11 @@
             </a:avLst>
           </a:prstGeom>
           <a:solidFill>
-            <a:srgbClr val="FFFFFF">
-              <a:alpha val="88000"/>
-            </a:srgbClr>
+            <a:srgbClr val="FFFFFF"/>
           </a:solidFill>
           <a:ln w="12700">
             <a:solidFill>
-              <a:srgbClr val="D6E8F2"/>
+              <a:srgbClr val="B9D7E6"/>
             </a:solidFill>
             <a:prstDash val="solid"/>
           </a:ln>
@@ -7903,26 +7775,42 @@
       </p:sp>
       <p:sp>
         <p:nvSpPr>
-          <p:cNvPr id="14" name="Shape 12"/>
-          <p:cNvSpPr/>
-          <p:nvPr/>
-        </p:nvSpPr>
-        <p:spPr>
-          <a:xfrm>
-            <a:off x="8046720" y="3108960"/>
-            <a:ext cx="2651760" cy="896112"/>
-          </a:xfrm>
-          <a:prstGeom prst="arc">
-            <a:avLst/>
-          </a:prstGeom>
-          <a:noFill/>
-          <a:ln w="25400">
-            <a:solidFill>
-              <a:srgbClr val="0068B7"/>
-            </a:solidFill>
-            <a:prstDash val="solid"/>
-          </a:ln>
-        </p:spPr>
+          <p:cNvPr id="14" name="Text 12"/>
+          <p:cNvSpPr/>
+          <p:nvPr/>
+        </p:nvSpPr>
+        <p:spPr>
+          <a:xfrm>
+            <a:off x="7799832" y="2935224"/>
+            <a:ext cx="3145536" cy="256032"/>
+          </a:xfrm>
+          <a:prstGeom prst="rect">
+            <a:avLst/>
+          </a:prstGeom>
+          <a:noFill/>
+          <a:ln/>
+        </p:spPr>
+        <p:txBody>
+          <a:bodyPr wrap="square" lIns="0" tIns="0" rIns="0" bIns="0" rtlCol="0" anchor="ctr"/>
+          <a:lstStyle/>
+          <a:p>
+            <a:pPr indent="0" marL="0">
+              <a:buNone/>
+            </a:pPr>
+            <a:r>
+              <a:rPr lang="en-US" sz="1300" b="1" dirty="0">
+                <a:solidFill>
+                  <a:srgbClr val="0068B7"/>
+                </a:solidFill>
+                <a:latin typeface="Aptos" pitchFamily="34" charset="0"/>
+                <a:ea typeface="Aptos" pitchFamily="34" charset="-122"/>
+                <a:cs typeface="Aptos" pitchFamily="34" charset="-120"/>
+              </a:rPr>
+              <a:t>Concept checkpoints</a:t>
+            </a:r>
+            <a:endParaRPr lang="en-US" sz="1300" dirty="0"/>
+          </a:p>
+        </p:txBody>
       </p:sp>
       <p:sp>
         <p:nvSpPr>
@@ -7932,102 +7820,67 @@
         </p:nvSpPr>
         <p:spPr>
           <a:xfrm>
-            <a:off x="7909560" y="3099816"/>
-            <a:ext cx="2926080" cy="256032"/>
-          </a:xfrm>
-          <a:prstGeom prst="rect">
-            <a:avLst/>
-          </a:prstGeom>
-          <a:noFill/>
-          <a:ln/>
-        </p:spPr>
-        <p:txBody>
-          <a:bodyPr wrap="square" lIns="0" tIns="0" rIns="0" bIns="0" rtlCol="0" anchor="ctr"/>
-          <a:lstStyle/>
-          <a:p>
-            <a:pPr algn="ctr" indent="0" marL="0">
-              <a:buNone/>
-            </a:pPr>
-            <a:r>
-              <a:rPr lang="en-US" sz="1500" b="1" dirty="0">
-                <a:solidFill>
-                  <a:srgbClr val="003A63"/>
-                </a:solidFill>
-                <a:latin typeface="Aptos" pitchFamily="34" charset="0"/>
-                <a:ea typeface="Aptos" pitchFamily="34" charset="-122"/>
-                <a:cs typeface="Aptos" pitchFamily="34" charset="-120"/>
-              </a:rPr>
-              <a:t>Risk</a:t>
-            </a:r>
-            <a:endParaRPr lang="en-US" sz="1500" dirty="0"/>
+            <a:off x="7818120" y="3300984"/>
+            <a:ext cx="3090672" cy="877824"/>
+          </a:xfrm>
+          <a:prstGeom prst="rect">
+            <a:avLst/>
+          </a:prstGeom>
+          <a:noFill/>
+          <a:ln/>
+        </p:spPr>
+        <p:txBody>
+          <a:bodyPr wrap="square" lIns="254" tIns="254" rIns="254" bIns="254" rtlCol="0" anchor="t">
+            <a:normAutofit/>
+          </a:bodyPr>
+          <a:lstStyle/>
+          <a:p>
+            <a:r>
+              <a:rPr lang="en-US" sz="1380" dirty="0">
+                <a:solidFill>
+                  <a:srgbClr val="17364A"/>
+                </a:solidFill>
+                <a:latin typeface="Aptos" pitchFamily="34" charset="0"/>
+                <a:ea typeface="Aptos" pitchFamily="34" charset="-122"/>
+                <a:cs typeface="Aptos" pitchFamily="34" charset="-120"/>
+              </a:rPr>
+              <a:t>What sensitive data or systems would the AI workflow touch?</a:t>
+            </a:r>
+            <a:endParaRPr lang="en-US" sz="1380" dirty="0"/>
+          </a:p>
+          <a:p>
+            <a:r>
+              <a:rPr lang="en-US" sz="1380" dirty="0">
+                <a:solidFill>
+                  <a:srgbClr val="17364A"/>
+                </a:solidFill>
+                <a:latin typeface="Aptos" pitchFamily="34" charset="0"/>
+                <a:ea typeface="Aptos" pitchFamily="34" charset="-122"/>
+                <a:cs typeface="Aptos" pitchFamily="34" charset="-120"/>
+              </a:rPr>
+              <a:t>Could the AI tool access more information or actions than necessary?</a:t>
+            </a:r>
+            <a:endParaRPr lang="en-US" sz="1380" dirty="0"/>
+          </a:p>
+          <a:p>
+            <a:r>
+              <a:rPr lang="en-US" sz="1380" dirty="0">
+                <a:solidFill>
+                  <a:srgbClr val="17364A"/>
+                </a:solidFill>
+                <a:latin typeface="Aptos" pitchFamily="34" charset="0"/>
+                <a:ea typeface="Aptos" pitchFamily="34" charset="-122"/>
+                <a:cs typeface="Aptos" pitchFamily="34" charset="-120"/>
+              </a:rPr>
+              <a:t>What untrusted content might the tool process?</a:t>
+            </a:r>
+            <a:endParaRPr lang="en-US" sz="1380" dirty="0"/>
           </a:p>
         </p:txBody>
       </p:sp>
       <p:sp>
         <p:nvSpPr>
           <p:cNvPr id="16" name="Shape 14"/>
-          <p:cNvSpPr/>
-          <p:nvPr/>
-        </p:nvSpPr>
-        <p:spPr>
-          <a:xfrm>
-            <a:off x="8366760" y="3639312"/>
-            <a:ext cx="2011680" cy="0"/>
-          </a:xfrm>
-          <a:prstGeom prst="line">
-            <a:avLst/>
-          </a:prstGeom>
-          <a:noFill/>
-          <a:ln w="63500">
-            <a:solidFill>
-              <a:srgbClr val="2F8A28"/>
-            </a:solidFill>
-            <a:prstDash val="solid"/>
-          </a:ln>
-        </p:spPr>
-      </p:sp>
-      <p:sp>
-        <p:nvSpPr>
-          <p:cNvPr id="17" name="Text 15"/>
-          <p:cNvSpPr/>
-          <p:nvPr/>
-        </p:nvSpPr>
-        <p:spPr>
-          <a:xfrm>
-            <a:off x="7909560" y="3849624"/>
-            <a:ext cx="2926080" cy="164592"/>
-          </a:xfrm>
-          <a:prstGeom prst="rect">
-            <a:avLst/>
-          </a:prstGeom>
-          <a:noFill/>
-          <a:ln/>
-        </p:spPr>
-        <p:txBody>
-          <a:bodyPr wrap="square" lIns="0" tIns="0" rIns="0" bIns="0" rtlCol="0" anchor="ctr"/>
-          <a:lstStyle/>
-          <a:p>
-            <a:pPr algn="ctr" indent="0" marL="0">
-              <a:buNone/>
-            </a:pPr>
-            <a:r>
-              <a:rPr lang="en-US" sz="900" dirty="0">
-                <a:solidFill>
-                  <a:srgbClr val="003A63"/>
-                </a:solidFill>
-                <a:latin typeface="Aptos" pitchFamily="34" charset="0"/>
-                <a:ea typeface="Aptos" pitchFamily="34" charset="-122"/>
-                <a:cs typeface="Aptos" pitchFamily="34" charset="-120"/>
-              </a:rPr>
-              <a:t>Human review</a:t>
-            </a:r>
-            <a:endParaRPr lang="en-US" sz="900" dirty="0"/>
-          </a:p>
-        </p:txBody>
-      </p:sp>
-      <p:sp>
-        <p:nvSpPr>
-          <p:cNvPr id="18" name="Shape 16"/>
           <p:cNvSpPr/>
           <p:nvPr/>
         </p:nvSpPr>
@@ -8054,7 +7907,7 @@
       </p:sp>
       <p:sp>
         <p:nvSpPr>
-          <p:cNvPr id="19" name="Text 17"/>
+          <p:cNvPr id="17" name="Text 15"/>
           <p:cNvSpPr/>
           <p:nvPr/>
         </p:nvSpPr>
@@ -8093,7 +7946,7 @@
       </p:sp>
       <p:sp>
         <p:nvSpPr>
-          <p:cNvPr id="20" name="Text 18"/>
+          <p:cNvPr id="18" name="Text 16"/>
           <p:cNvSpPr/>
           <p:nvPr/>
         </p:nvSpPr>
@@ -8587,13 +8440,11 @@
             </a:avLst>
           </a:prstGeom>
           <a:solidFill>
-            <a:srgbClr val="FFFFFF">
-              <a:alpha val="88000"/>
-            </a:srgbClr>
+            <a:srgbClr val="FFFFFF"/>
           </a:solidFill>
           <a:ln w="12700">
             <a:solidFill>
-              <a:srgbClr val="D6E8F2"/>
+              <a:srgbClr val="B9D7E6"/>
             </a:solidFill>
             <a:prstDash val="solid"/>
           </a:ln>
@@ -8601,26 +8452,42 @@
       </p:sp>
       <p:sp>
         <p:nvSpPr>
-          <p:cNvPr id="14" name="Shape 12"/>
-          <p:cNvSpPr/>
-          <p:nvPr/>
-        </p:nvSpPr>
-        <p:spPr>
-          <a:xfrm>
-            <a:off x="8046720" y="3108960"/>
-            <a:ext cx="2651760" cy="896112"/>
-          </a:xfrm>
-          <a:prstGeom prst="arc">
-            <a:avLst/>
-          </a:prstGeom>
-          <a:noFill/>
-          <a:ln w="25400">
-            <a:solidFill>
-              <a:srgbClr val="0068B7"/>
-            </a:solidFill>
-            <a:prstDash val="solid"/>
-          </a:ln>
-        </p:spPr>
+          <p:cNvPr id="14" name="Text 12"/>
+          <p:cNvSpPr/>
+          <p:nvPr/>
+        </p:nvSpPr>
+        <p:spPr>
+          <a:xfrm>
+            <a:off x="7799832" y="2935224"/>
+            <a:ext cx="3145536" cy="256032"/>
+          </a:xfrm>
+          <a:prstGeom prst="rect">
+            <a:avLst/>
+          </a:prstGeom>
+          <a:noFill/>
+          <a:ln/>
+        </p:spPr>
+        <p:txBody>
+          <a:bodyPr wrap="square" lIns="0" tIns="0" rIns="0" bIns="0" rtlCol="0" anchor="ctr"/>
+          <a:lstStyle/>
+          <a:p>
+            <a:pPr indent="0" marL="0">
+              <a:buNone/>
+            </a:pPr>
+            <a:r>
+              <a:rPr lang="en-US" sz="1300" b="1" dirty="0">
+                <a:solidFill>
+                  <a:srgbClr val="0068B7"/>
+                </a:solidFill>
+                <a:latin typeface="Aptos" pitchFamily="34" charset="0"/>
+                <a:ea typeface="Aptos" pitchFamily="34" charset="-122"/>
+                <a:cs typeface="Aptos" pitchFamily="34" charset="-120"/>
+              </a:rPr>
+              <a:t>Concept checkpoints</a:t>
+            </a:r>
+            <a:endParaRPr lang="en-US" sz="1300" dirty="0"/>
+          </a:p>
+        </p:txBody>
       </p:sp>
       <p:sp>
         <p:nvSpPr>
@@ -8630,102 +8497,53 @@
         </p:nvSpPr>
         <p:spPr>
           <a:xfrm>
-            <a:off x="7909560" y="3099816"/>
-            <a:ext cx="2926080" cy="256032"/>
-          </a:xfrm>
-          <a:prstGeom prst="rect">
-            <a:avLst/>
-          </a:prstGeom>
-          <a:noFill/>
-          <a:ln/>
-        </p:spPr>
-        <p:txBody>
-          <a:bodyPr wrap="square" lIns="0" tIns="0" rIns="0" bIns="0" rtlCol="0" anchor="ctr"/>
-          <a:lstStyle/>
-          <a:p>
-            <a:pPr algn="ctr" indent="0" marL="0">
-              <a:buNone/>
-            </a:pPr>
-            <a:r>
-              <a:rPr lang="en-US" sz="1500" b="1" dirty="0">
-                <a:solidFill>
-                  <a:srgbClr val="003A63"/>
-                </a:solidFill>
-                <a:latin typeface="Aptos" pitchFamily="34" charset="0"/>
-                <a:ea typeface="Aptos" pitchFamily="34" charset="-122"/>
-                <a:cs typeface="Aptos" pitchFamily="34" charset="-120"/>
-              </a:rPr>
-              <a:t>Risk</a:t>
-            </a:r>
-            <a:endParaRPr lang="en-US" sz="1500" dirty="0"/>
+            <a:off x="7818120" y="3300984"/>
+            <a:ext cx="3090672" cy="877824"/>
+          </a:xfrm>
+          <a:prstGeom prst="rect">
+            <a:avLst/>
+          </a:prstGeom>
+          <a:noFill/>
+          <a:ln/>
+        </p:spPr>
+        <p:txBody>
+          <a:bodyPr wrap="square" lIns="254" tIns="254" rIns="254" bIns="254" rtlCol="0" anchor="t">
+            <a:normAutofit/>
+          </a:bodyPr>
+          <a:lstStyle/>
+          <a:p>
+            <a:r>
+              <a:rPr lang="en-US" sz="1380" dirty="0">
+                <a:solidFill>
+                  <a:srgbClr val="17364A"/>
+                </a:solidFill>
+                <a:latin typeface="Aptos" pitchFamily="34" charset="0"/>
+                <a:ea typeface="Aptos" pitchFamily="34" charset="-122"/>
+                <a:cs typeface="Aptos" pitchFamily="34" charset="-120"/>
+              </a:rPr>
+              <a:t>How will prompt injection attempts or unsafe outputs be detected?</a:t>
+            </a:r>
+            <a:endParaRPr lang="en-US" sz="1380" dirty="0"/>
+          </a:p>
+          <a:p>
+            <a:r>
+              <a:rPr lang="en-US" sz="1380" dirty="0">
+                <a:solidFill>
+                  <a:srgbClr val="17364A"/>
+                </a:solidFill>
+                <a:latin typeface="Aptos" pitchFamily="34" charset="0"/>
+                <a:ea typeface="Aptos" pitchFamily="34" charset="-122"/>
+                <a:cs typeface="Aptos" pitchFamily="34" charset="-120"/>
+              </a:rPr>
+              <a:t>What logs and incident response steps are required?</a:t>
+            </a:r>
+            <a:endParaRPr lang="en-US" sz="1380" dirty="0"/>
           </a:p>
         </p:txBody>
       </p:sp>
       <p:sp>
         <p:nvSpPr>
           <p:cNvPr id="16" name="Shape 14"/>
-          <p:cNvSpPr/>
-          <p:nvPr/>
-        </p:nvSpPr>
-        <p:spPr>
-          <a:xfrm>
-            <a:off x="8366760" y="3639312"/>
-            <a:ext cx="2011680" cy="0"/>
-          </a:xfrm>
-          <a:prstGeom prst="line">
-            <a:avLst/>
-          </a:prstGeom>
-          <a:noFill/>
-          <a:ln w="63500">
-            <a:solidFill>
-              <a:srgbClr val="2F8A28"/>
-            </a:solidFill>
-            <a:prstDash val="solid"/>
-          </a:ln>
-        </p:spPr>
-      </p:sp>
-      <p:sp>
-        <p:nvSpPr>
-          <p:cNvPr id="17" name="Text 15"/>
-          <p:cNvSpPr/>
-          <p:nvPr/>
-        </p:nvSpPr>
-        <p:spPr>
-          <a:xfrm>
-            <a:off x="7909560" y="3849624"/>
-            <a:ext cx="2926080" cy="164592"/>
-          </a:xfrm>
-          <a:prstGeom prst="rect">
-            <a:avLst/>
-          </a:prstGeom>
-          <a:noFill/>
-          <a:ln/>
-        </p:spPr>
-        <p:txBody>
-          <a:bodyPr wrap="square" lIns="0" tIns="0" rIns="0" bIns="0" rtlCol="0" anchor="ctr"/>
-          <a:lstStyle/>
-          <a:p>
-            <a:pPr algn="ctr" indent="0" marL="0">
-              <a:buNone/>
-            </a:pPr>
-            <a:r>
-              <a:rPr lang="en-US" sz="900" dirty="0">
-                <a:solidFill>
-                  <a:srgbClr val="003A63"/>
-                </a:solidFill>
-                <a:latin typeface="Aptos" pitchFamily="34" charset="0"/>
-                <a:ea typeface="Aptos" pitchFamily="34" charset="-122"/>
-                <a:cs typeface="Aptos" pitchFamily="34" charset="-120"/>
-              </a:rPr>
-              <a:t>Human review</a:t>
-            </a:r>
-            <a:endParaRPr lang="en-US" sz="900" dirty="0"/>
-          </a:p>
-        </p:txBody>
-      </p:sp>
-      <p:sp>
-        <p:nvSpPr>
-          <p:cNvPr id="18" name="Shape 16"/>
           <p:cNvSpPr/>
           <p:nvPr/>
         </p:nvSpPr>
@@ -8752,7 +8570,7 @@
       </p:sp>
       <p:sp>
         <p:nvSpPr>
-          <p:cNvPr id="19" name="Text 17"/>
+          <p:cNvPr id="17" name="Text 15"/>
           <p:cNvSpPr/>
           <p:nvPr/>
         </p:nvSpPr>
@@ -8791,7 +8609,7 @@
       </p:sp>
       <p:sp>
         <p:nvSpPr>
-          <p:cNvPr id="20" name="Text 18"/>
+          <p:cNvPr id="18" name="Text 16"/>
           <p:cNvSpPr/>
           <p:nvPr/>
         </p:nvSpPr>
@@ -9299,13 +9117,11 @@
             </a:avLst>
           </a:prstGeom>
           <a:solidFill>
-            <a:srgbClr val="FFFFFF">
-              <a:alpha val="88000"/>
-            </a:srgbClr>
+            <a:srgbClr val="FFFFFF"/>
           </a:solidFill>
           <a:ln w="12700">
             <a:solidFill>
-              <a:srgbClr val="D6E8F2"/>
+              <a:srgbClr val="B9D7E6"/>
             </a:solidFill>
             <a:prstDash val="solid"/>
           </a:ln>
@@ -9313,26 +9129,42 @@
       </p:sp>
       <p:sp>
         <p:nvSpPr>
-          <p:cNvPr id="14" name="Shape 12"/>
-          <p:cNvSpPr/>
-          <p:nvPr/>
-        </p:nvSpPr>
-        <p:spPr>
-          <a:xfrm>
-            <a:off x="8046720" y="3108960"/>
-            <a:ext cx="2651760" cy="896112"/>
-          </a:xfrm>
-          <a:prstGeom prst="arc">
-            <a:avLst/>
-          </a:prstGeom>
-          <a:noFill/>
-          <a:ln w="25400">
-            <a:solidFill>
-              <a:srgbClr val="0068B7"/>
-            </a:solidFill>
-            <a:prstDash val="solid"/>
-          </a:ln>
-        </p:spPr>
+          <p:cNvPr id="14" name="Text 12"/>
+          <p:cNvSpPr/>
+          <p:nvPr/>
+        </p:nvSpPr>
+        <p:spPr>
+          <a:xfrm>
+            <a:off x="7799832" y="2935224"/>
+            <a:ext cx="3145536" cy="256032"/>
+          </a:xfrm>
+          <a:prstGeom prst="rect">
+            <a:avLst/>
+          </a:prstGeom>
+          <a:noFill/>
+          <a:ln/>
+        </p:spPr>
+        <p:txBody>
+          <a:bodyPr wrap="square" lIns="0" tIns="0" rIns="0" bIns="0" rtlCol="0" anchor="ctr"/>
+          <a:lstStyle/>
+          <a:p>
+            <a:pPr indent="0" marL="0">
+              <a:buNone/>
+            </a:pPr>
+            <a:r>
+              <a:rPr lang="en-US" sz="1300" b="1" dirty="0">
+                <a:solidFill>
+                  <a:srgbClr val="0068B7"/>
+                </a:solidFill>
+                <a:latin typeface="Aptos" pitchFamily="34" charset="0"/>
+                <a:ea typeface="Aptos" pitchFamily="34" charset="-122"/>
+                <a:cs typeface="Aptos" pitchFamily="34" charset="-120"/>
+              </a:rPr>
+              <a:t>Concept checkpoints</a:t>
+            </a:r>
+            <a:endParaRPr lang="en-US" sz="1300" dirty="0"/>
+          </a:p>
+        </p:txBody>
       </p:sp>
       <p:sp>
         <p:nvSpPr>
@@ -9342,102 +9174,53 @@
         </p:nvSpPr>
         <p:spPr>
           <a:xfrm>
-            <a:off x="7909560" y="3099816"/>
-            <a:ext cx="2926080" cy="256032"/>
-          </a:xfrm>
-          <a:prstGeom prst="rect">
-            <a:avLst/>
-          </a:prstGeom>
-          <a:noFill/>
-          <a:ln/>
-        </p:spPr>
-        <p:txBody>
-          <a:bodyPr wrap="square" lIns="0" tIns="0" rIns="0" bIns="0" rtlCol="0" anchor="ctr"/>
-          <a:lstStyle/>
-          <a:p>
-            <a:pPr algn="ctr" indent="0" marL="0">
-              <a:buNone/>
-            </a:pPr>
-            <a:r>
-              <a:rPr lang="en-US" sz="1500" b="1" dirty="0">
-                <a:solidFill>
-                  <a:srgbClr val="003A63"/>
-                </a:solidFill>
-                <a:latin typeface="Aptos" pitchFamily="34" charset="0"/>
-                <a:ea typeface="Aptos" pitchFamily="34" charset="-122"/>
-                <a:cs typeface="Aptos" pitchFamily="34" charset="-120"/>
-              </a:rPr>
-              <a:t>Risk</a:t>
-            </a:r>
-            <a:endParaRPr lang="en-US" sz="1500" dirty="0"/>
+            <a:off x="7818120" y="3300984"/>
+            <a:ext cx="3090672" cy="877824"/>
+          </a:xfrm>
+          <a:prstGeom prst="rect">
+            <a:avLst/>
+          </a:prstGeom>
+          <a:noFill/>
+          <a:ln/>
+        </p:spPr>
+        <p:txBody>
+          <a:bodyPr wrap="square" lIns="254" tIns="254" rIns="254" bIns="254" rtlCol="0" anchor="t">
+            <a:normAutofit/>
+          </a:bodyPr>
+          <a:lstStyle/>
+          <a:p>
+            <a:r>
+              <a:rPr lang="en-US" sz="1380" dirty="0">
+                <a:solidFill>
+                  <a:srgbClr val="17364A"/>
+                </a:solidFill>
+                <a:latin typeface="Aptos" pitchFamily="34" charset="0"/>
+                <a:ea typeface="Aptos" pitchFamily="34" charset="-122"/>
+                <a:cs typeface="Aptos" pitchFamily="34" charset="-120"/>
+              </a:rPr>
+              <a:t>Include data sensitivity, approved tools, access controls, least-privilege review, prompt.</a:t>
+            </a:r>
+            <a:endParaRPr lang="en-US" sz="1380" dirty="0"/>
+          </a:p>
+          <a:p>
+            <a:r>
+              <a:rPr lang="en-US" sz="1380" dirty="0">
+                <a:solidFill>
+                  <a:srgbClr val="17364A"/>
+                </a:solidFill>
+                <a:latin typeface="Aptos" pitchFamily="34" charset="0"/>
+                <a:ea typeface="Aptos" pitchFamily="34" charset="-122"/>
+                <a:cs typeface="Aptos" pitchFamily="34" charset="-120"/>
+              </a:rPr>
+              <a:t>The checklist should identify which controls must be in place before pilot testing and.</a:t>
+            </a:r>
+            <a:endParaRPr lang="en-US" sz="1380" dirty="0"/>
           </a:p>
         </p:txBody>
       </p:sp>
       <p:sp>
         <p:nvSpPr>
           <p:cNvPr id="16" name="Shape 14"/>
-          <p:cNvSpPr/>
-          <p:nvPr/>
-        </p:nvSpPr>
-        <p:spPr>
-          <a:xfrm>
-            <a:off x="8366760" y="3639312"/>
-            <a:ext cx="2011680" cy="0"/>
-          </a:xfrm>
-          <a:prstGeom prst="line">
-            <a:avLst/>
-          </a:prstGeom>
-          <a:noFill/>
-          <a:ln w="63500">
-            <a:solidFill>
-              <a:srgbClr val="2F8A28"/>
-            </a:solidFill>
-            <a:prstDash val="solid"/>
-          </a:ln>
-        </p:spPr>
-      </p:sp>
-      <p:sp>
-        <p:nvSpPr>
-          <p:cNvPr id="17" name="Text 15"/>
-          <p:cNvSpPr/>
-          <p:nvPr/>
-        </p:nvSpPr>
-        <p:spPr>
-          <a:xfrm>
-            <a:off x="7909560" y="3849624"/>
-            <a:ext cx="2926080" cy="164592"/>
-          </a:xfrm>
-          <a:prstGeom prst="rect">
-            <a:avLst/>
-          </a:prstGeom>
-          <a:noFill/>
-          <a:ln/>
-        </p:spPr>
-        <p:txBody>
-          <a:bodyPr wrap="square" lIns="0" tIns="0" rIns="0" bIns="0" rtlCol="0" anchor="ctr"/>
-          <a:lstStyle/>
-          <a:p>
-            <a:pPr algn="ctr" indent="0" marL="0">
-              <a:buNone/>
-            </a:pPr>
-            <a:r>
-              <a:rPr lang="en-US" sz="900" dirty="0">
-                <a:solidFill>
-                  <a:srgbClr val="003A63"/>
-                </a:solidFill>
-                <a:latin typeface="Aptos" pitchFamily="34" charset="0"/>
-                <a:ea typeface="Aptos" pitchFamily="34" charset="-122"/>
-                <a:cs typeface="Aptos" pitchFamily="34" charset="-120"/>
-              </a:rPr>
-              <a:t>Human review</a:t>
-            </a:r>
-            <a:endParaRPr lang="en-US" sz="900" dirty="0"/>
-          </a:p>
-        </p:txBody>
-      </p:sp>
-      <p:sp>
-        <p:nvSpPr>
-          <p:cNvPr id="18" name="Shape 16"/>
           <p:cNvSpPr/>
           <p:nvPr/>
         </p:nvSpPr>
@@ -9464,7 +9247,7 @@
       </p:sp>
       <p:sp>
         <p:nvSpPr>
-          <p:cNvPr id="19" name="Text 17"/>
+          <p:cNvPr id="17" name="Text 15"/>
           <p:cNvSpPr/>
           <p:nvPr/>
         </p:nvSpPr>
@@ -9503,7 +9286,7 @@
       </p:sp>
       <p:sp>
         <p:nvSpPr>
-          <p:cNvPr id="20" name="Text 18"/>
+          <p:cNvPr id="18" name="Text 16"/>
           <p:cNvSpPr/>
           <p:nvPr/>
         </p:nvSpPr>
@@ -10011,13 +9794,11 @@
             </a:avLst>
           </a:prstGeom>
           <a:solidFill>
-            <a:srgbClr val="FFFFFF">
-              <a:alpha val="88000"/>
-            </a:srgbClr>
+            <a:srgbClr val="FFFFFF"/>
           </a:solidFill>
           <a:ln w="12700">
             <a:solidFill>
-              <a:srgbClr val="D6E8F2"/>
+              <a:srgbClr val="B9D7E6"/>
             </a:solidFill>
             <a:prstDash val="solid"/>
           </a:ln>
@@ -10025,26 +9806,42 @@
       </p:sp>
       <p:sp>
         <p:nvSpPr>
-          <p:cNvPr id="14" name="Shape 12"/>
-          <p:cNvSpPr/>
-          <p:nvPr/>
-        </p:nvSpPr>
-        <p:spPr>
-          <a:xfrm>
-            <a:off x="8046720" y="3108960"/>
-            <a:ext cx="2651760" cy="896112"/>
-          </a:xfrm>
-          <a:prstGeom prst="arc">
-            <a:avLst/>
-          </a:prstGeom>
-          <a:noFill/>
-          <a:ln w="25400">
-            <a:solidFill>
-              <a:srgbClr val="0068B7"/>
-            </a:solidFill>
-            <a:prstDash val="solid"/>
-          </a:ln>
-        </p:spPr>
+          <p:cNvPr id="14" name="Text 12"/>
+          <p:cNvSpPr/>
+          <p:nvPr/>
+        </p:nvSpPr>
+        <p:spPr>
+          <a:xfrm>
+            <a:off x="7799832" y="2935224"/>
+            <a:ext cx="3145536" cy="256032"/>
+          </a:xfrm>
+          <a:prstGeom prst="rect">
+            <a:avLst/>
+          </a:prstGeom>
+          <a:noFill/>
+          <a:ln/>
+        </p:spPr>
+        <p:txBody>
+          <a:bodyPr wrap="square" lIns="0" tIns="0" rIns="0" bIns="0" rtlCol="0" anchor="ctr"/>
+          <a:lstStyle/>
+          <a:p>
+            <a:pPr indent="0" marL="0">
+              <a:buNone/>
+            </a:pPr>
+            <a:r>
+              <a:rPr lang="en-US" sz="1300" b="1" dirty="0">
+                <a:solidFill>
+                  <a:srgbClr val="0068B7"/>
+                </a:solidFill>
+                <a:latin typeface="Aptos" pitchFamily="34" charset="0"/>
+                <a:ea typeface="Aptos" pitchFamily="34" charset="-122"/>
+                <a:cs typeface="Aptos" pitchFamily="34" charset="-120"/>
+              </a:rPr>
+              <a:t>Concept checkpoints</a:t>
+            </a:r>
+            <a:endParaRPr lang="en-US" sz="1300" dirty="0"/>
+          </a:p>
+        </p:txBody>
       </p:sp>
       <p:sp>
         <p:nvSpPr>
@@ -10054,102 +9851,67 @@
         </p:nvSpPr>
         <p:spPr>
           <a:xfrm>
-            <a:off x="7909560" y="3099816"/>
-            <a:ext cx="2926080" cy="256032"/>
-          </a:xfrm>
-          <a:prstGeom prst="rect">
-            <a:avLst/>
-          </a:prstGeom>
-          <a:noFill/>
-          <a:ln/>
-        </p:spPr>
-        <p:txBody>
-          <a:bodyPr wrap="square" lIns="0" tIns="0" rIns="0" bIns="0" rtlCol="0" anchor="ctr"/>
-          <a:lstStyle/>
-          <a:p>
-            <a:pPr algn="ctr" indent="0" marL="0">
-              <a:buNone/>
-            </a:pPr>
-            <a:r>
-              <a:rPr lang="en-US" sz="1500" b="1" dirty="0">
-                <a:solidFill>
-                  <a:srgbClr val="003A63"/>
-                </a:solidFill>
-                <a:latin typeface="Aptos" pitchFamily="34" charset="0"/>
-                <a:ea typeface="Aptos" pitchFamily="34" charset="-122"/>
-                <a:cs typeface="Aptos" pitchFamily="34" charset="-120"/>
-              </a:rPr>
-              <a:t>Risk</a:t>
-            </a:r>
-            <a:endParaRPr lang="en-US" sz="1500" dirty="0"/>
+            <a:off x="7818120" y="3300984"/>
+            <a:ext cx="3090672" cy="877824"/>
+          </a:xfrm>
+          <a:prstGeom prst="rect">
+            <a:avLst/>
+          </a:prstGeom>
+          <a:noFill/>
+          <a:ln/>
+        </p:spPr>
+        <p:txBody>
+          <a:bodyPr wrap="square" lIns="254" tIns="254" rIns="254" bIns="254" rtlCol="0" anchor="t">
+            <a:normAutofit/>
+          </a:bodyPr>
+          <a:lstStyle/>
+          <a:p>
+            <a:r>
+              <a:rPr lang="en-US" sz="1380" dirty="0">
+                <a:solidFill>
+                  <a:srgbClr val="17364A"/>
+                </a:solidFill>
+                <a:latin typeface="Aptos" pitchFamily="34" charset="0"/>
+                <a:ea typeface="Aptos" pitchFamily="34" charset="-122"/>
+                <a:cs typeface="Aptos" pitchFamily="34" charset="-120"/>
+              </a:rPr>
+              <a:t>Secure AI workflow checklist</a:t>
+            </a:r>
+            <a:endParaRPr lang="en-US" sz="1380" dirty="0"/>
+          </a:p>
+          <a:p>
+            <a:r>
+              <a:rPr lang="en-US" sz="1380" dirty="0">
+                <a:solidFill>
+                  <a:srgbClr val="17364A"/>
+                </a:solidFill>
+                <a:latin typeface="Aptos" pitchFamily="34" charset="0"/>
+                <a:ea typeface="Aptos" pitchFamily="34" charset="-122"/>
+                <a:cs typeface="Aptos" pitchFamily="34" charset="-120"/>
+              </a:rPr>
+              <a:t>Vendor and implementation security questions</a:t>
+            </a:r>
+            <a:endParaRPr lang="en-US" sz="1380" dirty="0"/>
+          </a:p>
+          <a:p>
+            <a:r>
+              <a:rPr lang="en-US" sz="1380" dirty="0">
+                <a:solidFill>
+                  <a:srgbClr val="17364A"/>
+                </a:solidFill>
+                <a:latin typeface="Aptos" pitchFamily="34" charset="0"/>
+                <a:ea typeface="Aptos" pitchFamily="34" charset="-122"/>
+                <a:cs typeface="Aptos" pitchFamily="34" charset="-120"/>
+              </a:rPr>
+              <a:t>Prompt injection risk notes</a:t>
+            </a:r>
+            <a:endParaRPr lang="en-US" sz="1380" dirty="0"/>
           </a:p>
         </p:txBody>
       </p:sp>
       <p:sp>
         <p:nvSpPr>
           <p:cNvPr id="16" name="Shape 14"/>
-          <p:cNvSpPr/>
-          <p:nvPr/>
-        </p:nvSpPr>
-        <p:spPr>
-          <a:xfrm>
-            <a:off x="8366760" y="3639312"/>
-            <a:ext cx="2011680" cy="0"/>
-          </a:xfrm>
-          <a:prstGeom prst="line">
-            <a:avLst/>
-          </a:prstGeom>
-          <a:noFill/>
-          <a:ln w="63500">
-            <a:solidFill>
-              <a:srgbClr val="2F8A28"/>
-            </a:solidFill>
-            <a:prstDash val="solid"/>
-          </a:ln>
-        </p:spPr>
-      </p:sp>
-      <p:sp>
-        <p:nvSpPr>
-          <p:cNvPr id="17" name="Text 15"/>
-          <p:cNvSpPr/>
-          <p:nvPr/>
-        </p:nvSpPr>
-        <p:spPr>
-          <a:xfrm>
-            <a:off x="7909560" y="3849624"/>
-            <a:ext cx="2926080" cy="164592"/>
-          </a:xfrm>
-          <a:prstGeom prst="rect">
-            <a:avLst/>
-          </a:prstGeom>
-          <a:noFill/>
-          <a:ln/>
-        </p:spPr>
-        <p:txBody>
-          <a:bodyPr wrap="square" lIns="0" tIns="0" rIns="0" bIns="0" rtlCol="0" anchor="ctr"/>
-          <a:lstStyle/>
-          <a:p>
-            <a:pPr algn="ctr" indent="0" marL="0">
-              <a:buNone/>
-            </a:pPr>
-            <a:r>
-              <a:rPr lang="en-US" sz="900" dirty="0">
-                <a:solidFill>
-                  <a:srgbClr val="003A63"/>
-                </a:solidFill>
-                <a:latin typeface="Aptos" pitchFamily="34" charset="0"/>
-                <a:ea typeface="Aptos" pitchFamily="34" charset="-122"/>
-                <a:cs typeface="Aptos" pitchFamily="34" charset="-120"/>
-              </a:rPr>
-              <a:t>Human review</a:t>
-            </a:r>
-            <a:endParaRPr lang="en-US" sz="900" dirty="0"/>
-          </a:p>
-        </p:txBody>
-      </p:sp>
-      <p:sp>
-        <p:nvSpPr>
-          <p:cNvPr id="18" name="Shape 16"/>
           <p:cNvSpPr/>
           <p:nvPr/>
         </p:nvSpPr>
@@ -10176,7 +9938,7 @@
       </p:sp>
       <p:sp>
         <p:nvSpPr>
-          <p:cNvPr id="19" name="Text 17"/>
+          <p:cNvPr id="17" name="Text 15"/>
           <p:cNvSpPr/>
           <p:nvPr/>
         </p:nvSpPr>
@@ -10215,7 +9977,7 @@
       </p:sp>
       <p:sp>
         <p:nvSpPr>
-          <p:cNvPr id="20" name="Text 18"/>
+          <p:cNvPr id="18" name="Text 16"/>
           <p:cNvSpPr/>
           <p:nvPr/>
         </p:nvSpPr>
@@ -10748,20 +10510,20 @@
         </p:nvSpPr>
         <p:spPr>
           <a:xfrm>
-            <a:off x="7635240" y="3730752"/>
-            <a:ext cx="1033272" cy="749808"/>
+            <a:off x="7909560" y="3675888"/>
+            <a:ext cx="3154680" cy="1691640"/>
           </a:xfrm>
           <a:prstGeom prst="roundRect">
             <a:avLst>
-              <a:gd name="adj" fmla="val 14634"/>
+              <a:gd name="adj" fmla="val 6486"/>
             </a:avLst>
           </a:prstGeom>
           <a:solidFill>
-            <a:srgbClr val="0068B7"/>
+            <a:srgbClr val="FFFFFF"/>
           </a:solidFill>
           <a:ln w="12700">
             <a:solidFill>
-              <a:srgbClr val="0068B7"/>
+              <a:srgbClr val="B9D7E6"/>
             </a:solidFill>
             <a:prstDash val="solid"/>
           </a:ln>
@@ -10775,172 +10537,100 @@
         </p:nvSpPr>
         <p:spPr>
           <a:xfrm>
-            <a:off x="7708392" y="3922776"/>
-            <a:ext cx="886968" cy="310896"/>
-          </a:xfrm>
-          <a:prstGeom prst="rect">
-            <a:avLst/>
-          </a:prstGeom>
-          <a:noFill/>
-          <a:ln/>
-        </p:spPr>
-        <p:txBody>
-          <a:bodyPr wrap="square" lIns="0" tIns="0" rIns="0" bIns="0" rtlCol="0" anchor="ctr">
+            <a:off x="8074152" y="3822192"/>
+            <a:ext cx="2825496" cy="256032"/>
+          </a:xfrm>
+          <a:prstGeom prst="rect">
+            <a:avLst/>
+          </a:prstGeom>
+          <a:noFill/>
+          <a:ln/>
+        </p:spPr>
+        <p:txBody>
+          <a:bodyPr wrap="square" lIns="0" tIns="0" rIns="0" bIns="0" rtlCol="0" anchor="ctr"/>
+          <a:lstStyle/>
+          <a:p>
+            <a:pPr indent="0" marL="0">
+              <a:buNone/>
+            </a:pPr>
+            <a:r>
+              <a:rPr lang="en-US" sz="1300" b="1" dirty="0">
+                <a:solidFill>
+                  <a:srgbClr val="0068B7"/>
+                </a:solidFill>
+                <a:latin typeface="Aptos" pitchFamily="34" charset="0"/>
+                <a:ea typeface="Aptos" pitchFamily="34" charset="-122"/>
+                <a:cs typeface="Aptos" pitchFamily="34" charset="-120"/>
+              </a:rPr>
+              <a:t>Learning sequence</a:t>
+            </a:r>
+            <a:endParaRPr lang="en-US" sz="1300" dirty="0"/>
+          </a:p>
+        </p:txBody>
+      </p:sp>
+      <p:sp>
+        <p:nvSpPr>
+          <p:cNvPr id="15" name="Text 13"/>
+          <p:cNvSpPr/>
+          <p:nvPr/>
+        </p:nvSpPr>
+        <p:spPr>
+          <a:xfrm>
+            <a:off x="8092440" y="4187952"/>
+            <a:ext cx="2770632" cy="1033272"/>
+          </a:xfrm>
+          <a:prstGeom prst="rect">
+            <a:avLst/>
+          </a:prstGeom>
+          <a:noFill/>
+          <a:ln/>
+        </p:spPr>
+        <p:txBody>
+          <a:bodyPr wrap="square" lIns="254" tIns="254" rIns="254" bIns="254" rtlCol="0" anchor="t">
             <a:normAutofit/>
           </a:bodyPr>
           <a:lstStyle/>
           <a:p>
-            <a:pPr algn="ctr" indent="0" marL="0">
-              <a:buNone/>
-            </a:pPr>
-            <a:r>
-              <a:rPr lang="en-US" sz="1500" b="1" dirty="0">
-                <a:solidFill>
-                  <a:srgbClr val="FFFFFF"/>
-                </a:solidFill>
-                <a:latin typeface="Aptos" pitchFamily="34" charset="0"/>
-                <a:ea typeface="Aptos" pitchFamily="34" charset="-122"/>
-                <a:cs typeface="Aptos" pitchFamily="34" charset="-120"/>
-              </a:rPr>
-              <a:t>Learn</a:t>
-            </a:r>
-            <a:endParaRPr lang="en-US" sz="1500" dirty="0"/>
-          </a:p>
-        </p:txBody>
-      </p:sp>
-      <p:sp>
-        <p:nvSpPr>
-          <p:cNvPr id="15" name="Shape 13"/>
-          <p:cNvSpPr/>
-          <p:nvPr/>
-        </p:nvSpPr>
-        <p:spPr>
-          <a:xfrm>
-            <a:off x="8924544" y="3730752"/>
-            <a:ext cx="1033272" cy="749808"/>
-          </a:xfrm>
-          <a:prstGeom prst="roundRect">
-            <a:avLst>
-              <a:gd name="adj" fmla="val 14634"/>
-            </a:avLst>
-          </a:prstGeom>
-          <a:solidFill>
-            <a:srgbClr val="2F8A28"/>
-          </a:solidFill>
-          <a:ln w="12700">
-            <a:solidFill>
-              <a:srgbClr val="2F8A28"/>
-            </a:solidFill>
-            <a:prstDash val="solid"/>
-          </a:ln>
-        </p:spPr>
-      </p:sp>
-      <p:sp>
-        <p:nvSpPr>
-          <p:cNvPr id="16" name="Text 14"/>
-          <p:cNvSpPr/>
-          <p:nvPr/>
-        </p:nvSpPr>
-        <p:spPr>
-          <a:xfrm>
-            <a:off x="8997696" y="3922776"/>
-            <a:ext cx="886968" cy="310896"/>
-          </a:xfrm>
-          <a:prstGeom prst="rect">
-            <a:avLst/>
-          </a:prstGeom>
-          <a:noFill/>
-          <a:ln/>
-        </p:spPr>
-        <p:txBody>
-          <a:bodyPr wrap="square" lIns="0" tIns="0" rIns="0" bIns="0" rtlCol="0" anchor="ctr">
-            <a:normAutofit/>
-          </a:bodyPr>
-          <a:lstStyle/>
-          <a:p>
-            <a:pPr algn="ctr" indent="0" marL="0">
-              <a:buNone/>
-            </a:pPr>
-            <a:r>
-              <a:rPr lang="en-US" sz="1500" b="1" dirty="0">
-                <a:solidFill>
-                  <a:srgbClr val="FFFFFF"/>
-                </a:solidFill>
-                <a:latin typeface="Aptos" pitchFamily="34" charset="0"/>
-                <a:ea typeface="Aptos" pitchFamily="34" charset="-122"/>
-                <a:cs typeface="Aptos" pitchFamily="34" charset="-120"/>
-              </a:rPr>
-              <a:t>Apply</a:t>
-            </a:r>
-            <a:endParaRPr lang="en-US" sz="1500" dirty="0"/>
-          </a:p>
-        </p:txBody>
-      </p:sp>
-      <p:sp>
-        <p:nvSpPr>
-          <p:cNvPr id="17" name="Shape 15"/>
-          <p:cNvSpPr/>
-          <p:nvPr/>
-        </p:nvSpPr>
-        <p:spPr>
-          <a:xfrm>
-            <a:off x="10213848" y="3730752"/>
-            <a:ext cx="1033272" cy="749808"/>
-          </a:xfrm>
-          <a:prstGeom prst="roundRect">
-            <a:avLst>
-              <a:gd name="adj" fmla="val 14634"/>
-            </a:avLst>
-          </a:prstGeom>
-          <a:solidFill>
-            <a:srgbClr val="6A4CA3"/>
-          </a:solidFill>
-          <a:ln w="12700">
-            <a:solidFill>
-              <a:srgbClr val="6A4CA3"/>
-            </a:solidFill>
-            <a:prstDash val="solid"/>
-          </a:ln>
-        </p:spPr>
-      </p:sp>
-      <p:sp>
-        <p:nvSpPr>
-          <p:cNvPr id="18" name="Text 16"/>
-          <p:cNvSpPr/>
-          <p:nvPr/>
-        </p:nvSpPr>
-        <p:spPr>
-          <a:xfrm>
-            <a:off x="10287000" y="3922776"/>
-            <a:ext cx="886968" cy="310896"/>
-          </a:xfrm>
-          <a:prstGeom prst="rect">
-            <a:avLst/>
-          </a:prstGeom>
-          <a:noFill/>
-          <a:ln/>
-        </p:spPr>
-        <p:txBody>
-          <a:bodyPr wrap="square" lIns="0" tIns="0" rIns="0" bIns="0" rtlCol="0" anchor="ctr">
-            <a:normAutofit/>
-          </a:bodyPr>
-          <a:lstStyle/>
-          <a:p>
-            <a:pPr algn="ctr" indent="0" marL="0">
-              <a:buNone/>
-            </a:pPr>
-            <a:r>
-              <a:rPr lang="en-US" sz="1500" b="1" dirty="0">
-                <a:solidFill>
-                  <a:srgbClr val="FFFFFF"/>
-                </a:solidFill>
-                <a:latin typeface="Aptos" pitchFamily="34" charset="0"/>
-                <a:ea typeface="Aptos" pitchFamily="34" charset="-122"/>
-                <a:cs typeface="Aptos" pitchFamily="34" charset="-120"/>
-              </a:rPr>
-              <a:t>Document</a:t>
-            </a:r>
-            <a:endParaRPr lang="en-US" sz="1500" dirty="0"/>
+            <a:r>
+              <a:rPr lang="en-US" sz="1380" dirty="0">
+                <a:solidFill>
+                  <a:srgbClr val="17364A"/>
+                </a:solidFill>
+                <a:latin typeface="Aptos" pitchFamily="34" charset="0"/>
+                <a:ea typeface="Aptos" pitchFamily="34" charset="-122"/>
+                <a:cs typeface="Aptos" pitchFamily="34" charset="-120"/>
+              </a:rPr>
+              <a:t>Read the module for shared vocabulary and context.</a:t>
+            </a:r>
+            <a:endParaRPr lang="en-US" sz="1380" dirty="0"/>
+          </a:p>
+          <a:p>
+            <a:r>
+              <a:rPr lang="en-US" sz="1380" dirty="0">
+                <a:solidFill>
+                  <a:srgbClr val="17364A"/>
+                </a:solidFill>
+                <a:latin typeface="Aptos" pitchFamily="34" charset="0"/>
+                <a:ea typeface="Aptos" pitchFamily="34" charset="-122"/>
+                <a:cs typeface="Aptos" pitchFamily="34" charset="-120"/>
+              </a:rPr>
+              <a:t>Complete the practical exercise to apply the concept.</a:t>
+            </a:r>
+            <a:endParaRPr lang="en-US" sz="1380" dirty="0"/>
+          </a:p>
+          <a:p>
+            <a:r>
+              <a:rPr lang="en-US" sz="1380" dirty="0">
+                <a:solidFill>
+                  <a:srgbClr val="17364A"/>
+                </a:solidFill>
+                <a:latin typeface="Aptos" pitchFamily="34" charset="0"/>
+                <a:ea typeface="Aptos" pitchFamily="34" charset="-122"/>
+                <a:cs typeface="Aptos" pitchFamily="34" charset="-120"/>
+              </a:rPr>
+              <a:t>Use the notes and references for deeper review.</a:t>
+            </a:r>
+            <a:endParaRPr lang="en-US" sz="1380" dirty="0"/>
           </a:p>
         </p:txBody>
       </p:sp>
@@ -11385,13 +11075,11 @@
             </a:avLst>
           </a:prstGeom>
           <a:solidFill>
-            <a:srgbClr val="FFFFFF">
-              <a:alpha val="88000"/>
-            </a:srgbClr>
+            <a:srgbClr val="FFFFFF"/>
           </a:solidFill>
           <a:ln w="12700">
             <a:solidFill>
-              <a:srgbClr val="D6E8F2"/>
+              <a:srgbClr val="B9D7E6"/>
             </a:solidFill>
             <a:prstDash val="solid"/>
           </a:ln>
@@ -11399,26 +11087,42 @@
       </p:sp>
       <p:sp>
         <p:nvSpPr>
-          <p:cNvPr id="14" name="Shape 12"/>
-          <p:cNvSpPr/>
-          <p:nvPr/>
-        </p:nvSpPr>
-        <p:spPr>
-          <a:xfrm>
-            <a:off x="8046720" y="3108960"/>
-            <a:ext cx="2651760" cy="896112"/>
-          </a:xfrm>
-          <a:prstGeom prst="arc">
-            <a:avLst/>
-          </a:prstGeom>
-          <a:noFill/>
-          <a:ln w="25400">
-            <a:solidFill>
-              <a:srgbClr val="0068B7"/>
-            </a:solidFill>
-            <a:prstDash val="solid"/>
-          </a:ln>
-        </p:spPr>
+          <p:cNvPr id="14" name="Text 12"/>
+          <p:cNvSpPr/>
+          <p:nvPr/>
+        </p:nvSpPr>
+        <p:spPr>
+          <a:xfrm>
+            <a:off x="7799832" y="2935224"/>
+            <a:ext cx="3145536" cy="256032"/>
+          </a:xfrm>
+          <a:prstGeom prst="rect">
+            <a:avLst/>
+          </a:prstGeom>
+          <a:noFill/>
+          <a:ln/>
+        </p:spPr>
+        <p:txBody>
+          <a:bodyPr wrap="square" lIns="0" tIns="0" rIns="0" bIns="0" rtlCol="0" anchor="ctr"/>
+          <a:lstStyle/>
+          <a:p>
+            <a:pPr indent="0" marL="0">
+              <a:buNone/>
+            </a:pPr>
+            <a:r>
+              <a:rPr lang="en-US" sz="1300" b="1" dirty="0">
+                <a:solidFill>
+                  <a:srgbClr val="0068B7"/>
+                </a:solidFill>
+                <a:latin typeface="Aptos" pitchFamily="34" charset="0"/>
+                <a:ea typeface="Aptos" pitchFamily="34" charset="-122"/>
+                <a:cs typeface="Aptos" pitchFamily="34" charset="-120"/>
+              </a:rPr>
+              <a:t>Concept checkpoints</a:t>
+            </a:r>
+            <a:endParaRPr lang="en-US" sz="1300" dirty="0"/>
+          </a:p>
+        </p:txBody>
       </p:sp>
       <p:sp>
         <p:nvSpPr>
@@ -11428,102 +11132,39 @@
         </p:nvSpPr>
         <p:spPr>
           <a:xfrm>
-            <a:off x="7909560" y="3099816"/>
-            <a:ext cx="2926080" cy="256032"/>
-          </a:xfrm>
-          <a:prstGeom prst="rect">
-            <a:avLst/>
-          </a:prstGeom>
-          <a:noFill/>
-          <a:ln/>
-        </p:spPr>
-        <p:txBody>
-          <a:bodyPr wrap="square" lIns="0" tIns="0" rIns="0" bIns="0" rtlCol="0" anchor="ctr"/>
-          <a:lstStyle/>
-          <a:p>
-            <a:pPr algn="ctr" indent="0" marL="0">
-              <a:buNone/>
-            </a:pPr>
-            <a:r>
-              <a:rPr lang="en-US" sz="1500" b="1" dirty="0">
-                <a:solidFill>
-                  <a:srgbClr val="003A63"/>
-                </a:solidFill>
-                <a:latin typeface="Aptos" pitchFamily="34" charset="0"/>
-                <a:ea typeface="Aptos" pitchFamily="34" charset="-122"/>
-                <a:cs typeface="Aptos" pitchFamily="34" charset="-120"/>
-              </a:rPr>
-              <a:t>Risk</a:t>
-            </a:r>
-            <a:endParaRPr lang="en-US" sz="1500" dirty="0"/>
+            <a:off x="7818120" y="3300984"/>
+            <a:ext cx="3090672" cy="877824"/>
+          </a:xfrm>
+          <a:prstGeom prst="rect">
+            <a:avLst/>
+          </a:prstGeom>
+          <a:noFill/>
+          <a:ln/>
+        </p:spPr>
+        <p:txBody>
+          <a:bodyPr wrap="square" lIns="254" tIns="254" rIns="254" bIns="254" rtlCol="0" anchor="t">
+            <a:normAutofit/>
+          </a:bodyPr>
+          <a:lstStyle/>
+          <a:p>
+            <a:r>
+              <a:rPr lang="en-US" sz="1380" dirty="0">
+                <a:solidFill>
+                  <a:srgbClr val="17364A"/>
+                </a:solidFill>
+                <a:latin typeface="Aptos" pitchFamily="34" charset="0"/>
+                <a:ea typeface="Aptos" pitchFamily="34" charset="-122"/>
+                <a:cs typeface="Aptos" pitchFamily="34" charset="-120"/>
+              </a:rPr>
+              <a:t>AI incident trigger and escalation plan</a:t>
+            </a:r>
+            <a:endParaRPr lang="en-US" sz="1380" dirty="0"/>
           </a:p>
         </p:txBody>
       </p:sp>
       <p:sp>
         <p:nvSpPr>
           <p:cNvPr id="16" name="Shape 14"/>
-          <p:cNvSpPr/>
-          <p:nvPr/>
-        </p:nvSpPr>
-        <p:spPr>
-          <a:xfrm>
-            <a:off x="8366760" y="3639312"/>
-            <a:ext cx="2011680" cy="0"/>
-          </a:xfrm>
-          <a:prstGeom prst="line">
-            <a:avLst/>
-          </a:prstGeom>
-          <a:noFill/>
-          <a:ln w="63500">
-            <a:solidFill>
-              <a:srgbClr val="2F8A28"/>
-            </a:solidFill>
-            <a:prstDash val="solid"/>
-          </a:ln>
-        </p:spPr>
-      </p:sp>
-      <p:sp>
-        <p:nvSpPr>
-          <p:cNvPr id="17" name="Text 15"/>
-          <p:cNvSpPr/>
-          <p:nvPr/>
-        </p:nvSpPr>
-        <p:spPr>
-          <a:xfrm>
-            <a:off x="7909560" y="3849624"/>
-            <a:ext cx="2926080" cy="164592"/>
-          </a:xfrm>
-          <a:prstGeom prst="rect">
-            <a:avLst/>
-          </a:prstGeom>
-          <a:noFill/>
-          <a:ln/>
-        </p:spPr>
-        <p:txBody>
-          <a:bodyPr wrap="square" lIns="0" tIns="0" rIns="0" bIns="0" rtlCol="0" anchor="ctr"/>
-          <a:lstStyle/>
-          <a:p>
-            <a:pPr algn="ctr" indent="0" marL="0">
-              <a:buNone/>
-            </a:pPr>
-            <a:r>
-              <a:rPr lang="en-US" sz="900" dirty="0">
-                <a:solidFill>
-                  <a:srgbClr val="003A63"/>
-                </a:solidFill>
-                <a:latin typeface="Aptos" pitchFamily="34" charset="0"/>
-                <a:ea typeface="Aptos" pitchFamily="34" charset="-122"/>
-                <a:cs typeface="Aptos" pitchFamily="34" charset="-120"/>
-              </a:rPr>
-              <a:t>Human review</a:t>
-            </a:r>
-            <a:endParaRPr lang="en-US" sz="900" dirty="0"/>
-          </a:p>
-        </p:txBody>
-      </p:sp>
-      <p:sp>
-        <p:nvSpPr>
-          <p:cNvPr id="18" name="Shape 16"/>
           <p:cNvSpPr/>
           <p:nvPr/>
         </p:nvSpPr>
@@ -11550,7 +11191,7 @@
       </p:sp>
       <p:sp>
         <p:nvSpPr>
-          <p:cNvPr id="19" name="Text 17"/>
+          <p:cNvPr id="17" name="Text 15"/>
           <p:cNvSpPr/>
           <p:nvPr/>
         </p:nvSpPr>
@@ -11589,7 +11230,7 @@
       </p:sp>
       <p:sp>
         <p:nvSpPr>
-          <p:cNvPr id="20" name="Text 18"/>
+          <p:cNvPr id="18" name="Text 16"/>
           <p:cNvSpPr/>
           <p:nvPr/>
         </p:nvSpPr>
@@ -12097,13 +11738,11 @@
             </a:avLst>
           </a:prstGeom>
           <a:solidFill>
-            <a:srgbClr val="FFFFFF">
-              <a:alpha val="88000"/>
-            </a:srgbClr>
+            <a:srgbClr val="FFFFFF"/>
           </a:solidFill>
           <a:ln w="12700">
             <a:solidFill>
-              <a:srgbClr val="D6E8F2"/>
+              <a:srgbClr val="B9D7E6"/>
             </a:solidFill>
             <a:prstDash val="solid"/>
           </a:ln>
@@ -12111,26 +11750,42 @@
       </p:sp>
       <p:sp>
         <p:nvSpPr>
-          <p:cNvPr id="14" name="Shape 12"/>
-          <p:cNvSpPr/>
-          <p:nvPr/>
-        </p:nvSpPr>
-        <p:spPr>
-          <a:xfrm>
-            <a:off x="8046720" y="3108960"/>
-            <a:ext cx="2651760" cy="896112"/>
-          </a:xfrm>
-          <a:prstGeom prst="arc">
-            <a:avLst/>
-          </a:prstGeom>
-          <a:noFill/>
-          <a:ln w="25400">
-            <a:solidFill>
-              <a:srgbClr val="0068B7"/>
-            </a:solidFill>
-            <a:prstDash val="solid"/>
-          </a:ln>
-        </p:spPr>
+          <p:cNvPr id="14" name="Text 12"/>
+          <p:cNvSpPr/>
+          <p:nvPr/>
+        </p:nvSpPr>
+        <p:spPr>
+          <a:xfrm>
+            <a:off x="7799832" y="2935224"/>
+            <a:ext cx="3145536" cy="256032"/>
+          </a:xfrm>
+          <a:prstGeom prst="rect">
+            <a:avLst/>
+          </a:prstGeom>
+          <a:noFill/>
+          <a:ln/>
+        </p:spPr>
+        <p:txBody>
+          <a:bodyPr wrap="square" lIns="0" tIns="0" rIns="0" bIns="0" rtlCol="0" anchor="ctr"/>
+          <a:lstStyle/>
+          <a:p>
+            <a:pPr indent="0" marL="0">
+              <a:buNone/>
+            </a:pPr>
+            <a:r>
+              <a:rPr lang="en-US" sz="1300" b="1" dirty="0">
+                <a:solidFill>
+                  <a:srgbClr val="0068B7"/>
+                </a:solidFill>
+                <a:latin typeface="Aptos" pitchFamily="34" charset="0"/>
+                <a:ea typeface="Aptos" pitchFamily="34" charset="-122"/>
+                <a:cs typeface="Aptos" pitchFamily="34" charset="-120"/>
+              </a:rPr>
+              <a:t>Concept checkpoints</a:t>
+            </a:r>
+            <a:endParaRPr lang="en-US" sz="1300" dirty="0"/>
+          </a:p>
+        </p:txBody>
       </p:sp>
       <p:sp>
         <p:nvSpPr>
@@ -12140,102 +11795,67 @@
         </p:nvSpPr>
         <p:spPr>
           <a:xfrm>
-            <a:off x="7909560" y="3099816"/>
-            <a:ext cx="2926080" cy="256032"/>
-          </a:xfrm>
-          <a:prstGeom prst="rect">
-            <a:avLst/>
-          </a:prstGeom>
-          <a:noFill/>
-          <a:ln/>
-        </p:spPr>
-        <p:txBody>
-          <a:bodyPr wrap="square" lIns="0" tIns="0" rIns="0" bIns="0" rtlCol="0" anchor="ctr"/>
-          <a:lstStyle/>
-          <a:p>
-            <a:pPr algn="ctr" indent="0" marL="0">
-              <a:buNone/>
-            </a:pPr>
-            <a:r>
-              <a:rPr lang="en-US" sz="1500" b="1" dirty="0">
-                <a:solidFill>
-                  <a:srgbClr val="003A63"/>
-                </a:solidFill>
-                <a:latin typeface="Aptos" pitchFamily="34" charset="0"/>
-                <a:ea typeface="Aptos" pitchFamily="34" charset="-122"/>
-                <a:cs typeface="Aptos" pitchFamily="34" charset="-120"/>
-              </a:rPr>
-              <a:t>Risk</a:t>
-            </a:r>
-            <a:endParaRPr lang="en-US" sz="1500" dirty="0"/>
+            <a:off x="7818120" y="3300984"/>
+            <a:ext cx="3090672" cy="877824"/>
+          </a:xfrm>
+          <a:prstGeom prst="rect">
+            <a:avLst/>
+          </a:prstGeom>
+          <a:noFill/>
+          <a:ln/>
+        </p:spPr>
+        <p:txBody>
+          <a:bodyPr wrap="square" lIns="254" tIns="254" rIns="254" bIns="254" rtlCol="0" anchor="t">
+            <a:normAutofit/>
+          </a:bodyPr>
+          <a:lstStyle/>
+          <a:p>
+            <a:r>
+              <a:rPr lang="en-US" sz="1380" dirty="0">
+                <a:solidFill>
+                  <a:srgbClr val="17364A"/>
+                </a:solidFill>
+                <a:latin typeface="Aptos" pitchFamily="34" charset="0"/>
+                <a:ea typeface="Aptos" pitchFamily="34" charset="-122"/>
+                <a:cs typeface="Aptos" pitchFamily="34" charset="-120"/>
+              </a:rPr>
+              <a:t>Secure AI workflow checklist</a:t>
+            </a:r>
+            <a:endParaRPr lang="en-US" sz="1380" dirty="0"/>
+          </a:p>
+          <a:p>
+            <a:r>
+              <a:rPr lang="en-US" sz="1380" dirty="0">
+                <a:solidFill>
+                  <a:srgbClr val="17364A"/>
+                </a:solidFill>
+                <a:latin typeface="Aptos" pitchFamily="34" charset="0"/>
+                <a:ea typeface="Aptos" pitchFamily="34" charset="-122"/>
+                <a:cs typeface="Aptos" pitchFamily="34" charset="-120"/>
+              </a:rPr>
+              <a:t>Vendor and implementation security questions</a:t>
+            </a:r>
+            <a:endParaRPr lang="en-US" sz="1380" dirty="0"/>
+          </a:p>
+          <a:p>
+            <a:r>
+              <a:rPr lang="en-US" sz="1380" dirty="0">
+                <a:solidFill>
+                  <a:srgbClr val="17364A"/>
+                </a:solidFill>
+                <a:latin typeface="Aptos" pitchFamily="34" charset="0"/>
+                <a:ea typeface="Aptos" pitchFamily="34" charset="-122"/>
+                <a:cs typeface="Aptos" pitchFamily="34" charset="-120"/>
+              </a:rPr>
+              <a:t>Prompt injection risk notes</a:t>
+            </a:r>
+            <a:endParaRPr lang="en-US" sz="1380" dirty="0"/>
           </a:p>
         </p:txBody>
       </p:sp>
       <p:sp>
         <p:nvSpPr>
           <p:cNvPr id="16" name="Shape 14"/>
-          <p:cNvSpPr/>
-          <p:nvPr/>
-        </p:nvSpPr>
-        <p:spPr>
-          <a:xfrm>
-            <a:off x="8366760" y="3639312"/>
-            <a:ext cx="2011680" cy="0"/>
-          </a:xfrm>
-          <a:prstGeom prst="line">
-            <a:avLst/>
-          </a:prstGeom>
-          <a:noFill/>
-          <a:ln w="63500">
-            <a:solidFill>
-              <a:srgbClr val="2F8A28"/>
-            </a:solidFill>
-            <a:prstDash val="solid"/>
-          </a:ln>
-        </p:spPr>
-      </p:sp>
-      <p:sp>
-        <p:nvSpPr>
-          <p:cNvPr id="17" name="Text 15"/>
-          <p:cNvSpPr/>
-          <p:nvPr/>
-        </p:nvSpPr>
-        <p:spPr>
-          <a:xfrm>
-            <a:off x="7909560" y="3849624"/>
-            <a:ext cx="2926080" cy="164592"/>
-          </a:xfrm>
-          <a:prstGeom prst="rect">
-            <a:avLst/>
-          </a:prstGeom>
-          <a:noFill/>
-          <a:ln/>
-        </p:spPr>
-        <p:txBody>
-          <a:bodyPr wrap="square" lIns="0" tIns="0" rIns="0" bIns="0" rtlCol="0" anchor="ctr"/>
-          <a:lstStyle/>
-          <a:p>
-            <a:pPr algn="ctr" indent="0" marL="0">
-              <a:buNone/>
-            </a:pPr>
-            <a:r>
-              <a:rPr lang="en-US" sz="900" dirty="0">
-                <a:solidFill>
-                  <a:srgbClr val="003A63"/>
-                </a:solidFill>
-                <a:latin typeface="Aptos" pitchFamily="34" charset="0"/>
-                <a:ea typeface="Aptos" pitchFamily="34" charset="-122"/>
-                <a:cs typeface="Aptos" pitchFamily="34" charset="-120"/>
-              </a:rPr>
-              <a:t>Human review</a:t>
-            </a:r>
-            <a:endParaRPr lang="en-US" sz="900" dirty="0"/>
-          </a:p>
-        </p:txBody>
-      </p:sp>
-      <p:sp>
-        <p:nvSpPr>
-          <p:cNvPr id="18" name="Shape 16"/>
           <p:cNvSpPr/>
           <p:nvPr/>
         </p:nvSpPr>
@@ -12262,7 +11882,7 @@
       </p:sp>
       <p:sp>
         <p:nvSpPr>
-          <p:cNvPr id="19" name="Text 17"/>
+          <p:cNvPr id="17" name="Text 15"/>
           <p:cNvSpPr/>
           <p:nvPr/>
         </p:nvSpPr>
@@ -12301,7 +11921,7 @@
       </p:sp>
       <p:sp>
         <p:nvSpPr>
-          <p:cNvPr id="20" name="Text 18"/>
+          <p:cNvPr id="18" name="Text 16"/>
           <p:cNvSpPr/>
           <p:nvPr/>
         </p:nvSpPr>
@@ -12809,13 +12429,11 @@
             </a:avLst>
           </a:prstGeom>
           <a:solidFill>
-            <a:srgbClr val="FFFFFF">
-              <a:alpha val="88000"/>
-            </a:srgbClr>
+            <a:srgbClr val="FFFFFF"/>
           </a:solidFill>
           <a:ln w="12700">
             <a:solidFill>
-              <a:srgbClr val="D6E8F2"/>
+              <a:srgbClr val="B9D7E6"/>
             </a:solidFill>
             <a:prstDash val="solid"/>
           </a:ln>
@@ -12823,26 +12441,42 @@
       </p:sp>
       <p:sp>
         <p:nvSpPr>
-          <p:cNvPr id="14" name="Shape 12"/>
-          <p:cNvSpPr/>
-          <p:nvPr/>
-        </p:nvSpPr>
-        <p:spPr>
-          <a:xfrm>
-            <a:off x="8046720" y="3108960"/>
-            <a:ext cx="2651760" cy="896112"/>
-          </a:xfrm>
-          <a:prstGeom prst="arc">
-            <a:avLst/>
-          </a:prstGeom>
-          <a:noFill/>
-          <a:ln w="25400">
-            <a:solidFill>
-              <a:srgbClr val="0068B7"/>
-            </a:solidFill>
-            <a:prstDash val="solid"/>
-          </a:ln>
-        </p:spPr>
+          <p:cNvPr id="14" name="Text 12"/>
+          <p:cNvSpPr/>
+          <p:nvPr/>
+        </p:nvSpPr>
+        <p:spPr>
+          <a:xfrm>
+            <a:off x="7799832" y="2935224"/>
+            <a:ext cx="3145536" cy="256032"/>
+          </a:xfrm>
+          <a:prstGeom prst="rect">
+            <a:avLst/>
+          </a:prstGeom>
+          <a:noFill/>
+          <a:ln/>
+        </p:spPr>
+        <p:txBody>
+          <a:bodyPr wrap="square" lIns="0" tIns="0" rIns="0" bIns="0" rtlCol="0" anchor="ctr"/>
+          <a:lstStyle/>
+          <a:p>
+            <a:pPr indent="0" marL="0">
+              <a:buNone/>
+            </a:pPr>
+            <a:r>
+              <a:rPr lang="en-US" sz="1300" b="1" dirty="0">
+                <a:solidFill>
+                  <a:srgbClr val="0068B7"/>
+                </a:solidFill>
+                <a:latin typeface="Aptos" pitchFamily="34" charset="0"/>
+                <a:ea typeface="Aptos" pitchFamily="34" charset="-122"/>
+                <a:cs typeface="Aptos" pitchFamily="34" charset="-120"/>
+              </a:rPr>
+              <a:t>Concept checkpoints</a:t>
+            </a:r>
+            <a:endParaRPr lang="en-US" sz="1300" dirty="0"/>
+          </a:p>
+        </p:txBody>
       </p:sp>
       <p:sp>
         <p:nvSpPr>
@@ -12852,102 +12486,67 @@
         </p:nvSpPr>
         <p:spPr>
           <a:xfrm>
-            <a:off x="7909560" y="3099816"/>
-            <a:ext cx="2926080" cy="256032"/>
-          </a:xfrm>
-          <a:prstGeom prst="rect">
-            <a:avLst/>
-          </a:prstGeom>
-          <a:noFill/>
-          <a:ln/>
-        </p:spPr>
-        <p:txBody>
-          <a:bodyPr wrap="square" lIns="0" tIns="0" rIns="0" bIns="0" rtlCol="0" anchor="ctr"/>
-          <a:lstStyle/>
-          <a:p>
-            <a:pPr algn="ctr" indent="0" marL="0">
-              <a:buNone/>
-            </a:pPr>
-            <a:r>
-              <a:rPr lang="en-US" sz="1500" b="1" dirty="0">
-                <a:solidFill>
-                  <a:srgbClr val="003A63"/>
-                </a:solidFill>
-                <a:latin typeface="Aptos" pitchFamily="34" charset="0"/>
-                <a:ea typeface="Aptos" pitchFamily="34" charset="-122"/>
-                <a:cs typeface="Aptos" pitchFamily="34" charset="-120"/>
-              </a:rPr>
-              <a:t>Risk</a:t>
-            </a:r>
-            <a:endParaRPr lang="en-US" sz="1500" dirty="0"/>
+            <a:off x="7818120" y="3300984"/>
+            <a:ext cx="3090672" cy="877824"/>
+          </a:xfrm>
+          <a:prstGeom prst="rect">
+            <a:avLst/>
+          </a:prstGeom>
+          <a:noFill/>
+          <a:ln/>
+        </p:spPr>
+        <p:txBody>
+          <a:bodyPr wrap="square" lIns="254" tIns="254" rIns="254" bIns="254" rtlCol="0" anchor="t">
+            <a:normAutofit/>
+          </a:bodyPr>
+          <a:lstStyle/>
+          <a:p>
+            <a:r>
+              <a:rPr lang="en-US" sz="1380" dirty="0">
+                <a:solidFill>
+                  <a:srgbClr val="17364A"/>
+                </a:solidFill>
+                <a:latin typeface="Aptos" pitchFamily="34" charset="0"/>
+                <a:ea typeface="Aptos" pitchFamily="34" charset="-122"/>
+                <a:cs typeface="Aptos" pitchFamily="34" charset="-120"/>
+              </a:rPr>
+              <a:t>1.</a:t>
+            </a:r>
+            <a:endParaRPr lang="en-US" sz="1380" dirty="0"/>
+          </a:p>
+          <a:p>
+            <a:r>
+              <a:rPr lang="en-US" sz="1380" dirty="0">
+                <a:solidFill>
+                  <a:srgbClr val="17364A"/>
+                </a:solidFill>
+                <a:latin typeface="Aptos" pitchFamily="34" charset="0"/>
+                <a:ea typeface="Aptos" pitchFamily="34" charset="-122"/>
+                <a:cs typeface="Aptos" pitchFamily="34" charset="-120"/>
+              </a:rPr>
+              <a:t>What is prompt injection?</a:t>
+            </a:r>
+            <a:endParaRPr lang="en-US" sz="1380" dirty="0"/>
+          </a:p>
+          <a:p>
+            <a:r>
+              <a:rPr lang="en-US" sz="1380" dirty="0">
+                <a:solidFill>
+                  <a:srgbClr val="17364A"/>
+                </a:solidFill>
+                <a:latin typeface="Aptos" pitchFamily="34" charset="0"/>
+                <a:ea typeface="Aptos" pitchFamily="34" charset="-122"/>
+                <a:cs typeface="Aptos" pitchFamily="34" charset="-120"/>
+              </a:rPr>
+              <a:t>2.</a:t>
+            </a:r>
+            <a:endParaRPr lang="en-US" sz="1380" dirty="0"/>
           </a:p>
         </p:txBody>
       </p:sp>
       <p:sp>
         <p:nvSpPr>
           <p:cNvPr id="16" name="Shape 14"/>
-          <p:cNvSpPr/>
-          <p:nvPr/>
-        </p:nvSpPr>
-        <p:spPr>
-          <a:xfrm>
-            <a:off x="8366760" y="3639312"/>
-            <a:ext cx="2011680" cy="0"/>
-          </a:xfrm>
-          <a:prstGeom prst="line">
-            <a:avLst/>
-          </a:prstGeom>
-          <a:noFill/>
-          <a:ln w="63500">
-            <a:solidFill>
-              <a:srgbClr val="2F8A28"/>
-            </a:solidFill>
-            <a:prstDash val="solid"/>
-          </a:ln>
-        </p:spPr>
-      </p:sp>
-      <p:sp>
-        <p:nvSpPr>
-          <p:cNvPr id="17" name="Text 15"/>
-          <p:cNvSpPr/>
-          <p:nvPr/>
-        </p:nvSpPr>
-        <p:spPr>
-          <a:xfrm>
-            <a:off x="7909560" y="3849624"/>
-            <a:ext cx="2926080" cy="164592"/>
-          </a:xfrm>
-          <a:prstGeom prst="rect">
-            <a:avLst/>
-          </a:prstGeom>
-          <a:noFill/>
-          <a:ln/>
-        </p:spPr>
-        <p:txBody>
-          <a:bodyPr wrap="square" lIns="0" tIns="0" rIns="0" bIns="0" rtlCol="0" anchor="ctr"/>
-          <a:lstStyle/>
-          <a:p>
-            <a:pPr algn="ctr" indent="0" marL="0">
-              <a:buNone/>
-            </a:pPr>
-            <a:r>
-              <a:rPr lang="en-US" sz="900" dirty="0">
-                <a:solidFill>
-                  <a:srgbClr val="003A63"/>
-                </a:solidFill>
-                <a:latin typeface="Aptos" pitchFamily="34" charset="0"/>
-                <a:ea typeface="Aptos" pitchFamily="34" charset="-122"/>
-                <a:cs typeface="Aptos" pitchFamily="34" charset="-120"/>
-              </a:rPr>
-              <a:t>Human review</a:t>
-            </a:r>
-            <a:endParaRPr lang="en-US" sz="900" dirty="0"/>
-          </a:p>
-        </p:txBody>
-      </p:sp>
-      <p:sp>
-        <p:nvSpPr>
-          <p:cNvPr id="18" name="Shape 16"/>
           <p:cNvSpPr/>
           <p:nvPr/>
         </p:nvSpPr>
@@ -12974,7 +12573,7 @@
       </p:sp>
       <p:sp>
         <p:nvSpPr>
-          <p:cNvPr id="19" name="Text 17"/>
+          <p:cNvPr id="17" name="Text 15"/>
           <p:cNvSpPr/>
           <p:nvPr/>
         </p:nvSpPr>
@@ -13013,7 +12612,7 @@
       </p:sp>
       <p:sp>
         <p:nvSpPr>
-          <p:cNvPr id="20" name="Text 18"/>
+          <p:cNvPr id="18" name="Text 16"/>
           <p:cNvSpPr/>
           <p:nvPr/>
         </p:nvSpPr>
@@ -13521,13 +13120,11 @@
             </a:avLst>
           </a:prstGeom>
           <a:solidFill>
-            <a:srgbClr val="FFFFFF">
-              <a:alpha val="88000"/>
-            </a:srgbClr>
+            <a:srgbClr val="FFFFFF"/>
           </a:solidFill>
           <a:ln w="12700">
             <a:solidFill>
-              <a:srgbClr val="D6E8F2"/>
+              <a:srgbClr val="B9D7E6"/>
             </a:solidFill>
             <a:prstDash val="solid"/>
           </a:ln>
@@ -13535,26 +13132,42 @@
       </p:sp>
       <p:sp>
         <p:nvSpPr>
-          <p:cNvPr id="14" name="Shape 12"/>
-          <p:cNvSpPr/>
-          <p:nvPr/>
-        </p:nvSpPr>
-        <p:spPr>
-          <a:xfrm>
-            <a:off x="8046720" y="3108960"/>
-            <a:ext cx="2651760" cy="896112"/>
-          </a:xfrm>
-          <a:prstGeom prst="arc">
-            <a:avLst/>
-          </a:prstGeom>
-          <a:noFill/>
-          <a:ln w="25400">
-            <a:solidFill>
-              <a:srgbClr val="0068B7"/>
-            </a:solidFill>
-            <a:prstDash val="solid"/>
-          </a:ln>
-        </p:spPr>
+          <p:cNvPr id="14" name="Text 12"/>
+          <p:cNvSpPr/>
+          <p:nvPr/>
+        </p:nvSpPr>
+        <p:spPr>
+          <a:xfrm>
+            <a:off x="7799832" y="2935224"/>
+            <a:ext cx="3145536" cy="256032"/>
+          </a:xfrm>
+          <a:prstGeom prst="rect">
+            <a:avLst/>
+          </a:prstGeom>
+          <a:noFill/>
+          <a:ln/>
+        </p:spPr>
+        <p:txBody>
+          <a:bodyPr wrap="square" lIns="0" tIns="0" rIns="0" bIns="0" rtlCol="0" anchor="ctr"/>
+          <a:lstStyle/>
+          <a:p>
+            <a:pPr indent="0" marL="0">
+              <a:buNone/>
+            </a:pPr>
+            <a:r>
+              <a:rPr lang="en-US" sz="1300" b="1" dirty="0">
+                <a:solidFill>
+                  <a:srgbClr val="0068B7"/>
+                </a:solidFill>
+                <a:latin typeface="Aptos" pitchFamily="34" charset="0"/>
+                <a:ea typeface="Aptos" pitchFamily="34" charset="-122"/>
+                <a:cs typeface="Aptos" pitchFamily="34" charset="-120"/>
+              </a:rPr>
+              <a:t>Concept checkpoints</a:t>
+            </a:r>
+            <a:endParaRPr lang="en-US" sz="1300" dirty="0"/>
+          </a:p>
+        </p:txBody>
       </p:sp>
       <p:sp>
         <p:nvSpPr>
@@ -13564,102 +13177,67 @@
         </p:nvSpPr>
         <p:spPr>
           <a:xfrm>
-            <a:off x="7909560" y="3099816"/>
-            <a:ext cx="2926080" cy="256032"/>
-          </a:xfrm>
-          <a:prstGeom prst="rect">
-            <a:avLst/>
-          </a:prstGeom>
-          <a:noFill/>
-          <a:ln/>
-        </p:spPr>
-        <p:txBody>
-          <a:bodyPr wrap="square" lIns="0" tIns="0" rIns="0" bIns="0" rtlCol="0" anchor="ctr"/>
-          <a:lstStyle/>
-          <a:p>
-            <a:pPr algn="ctr" indent="0" marL="0">
-              <a:buNone/>
-            </a:pPr>
-            <a:r>
-              <a:rPr lang="en-US" sz="1500" b="1" dirty="0">
-                <a:solidFill>
-                  <a:srgbClr val="003A63"/>
-                </a:solidFill>
-                <a:latin typeface="Aptos" pitchFamily="34" charset="0"/>
-                <a:ea typeface="Aptos" pitchFamily="34" charset="-122"/>
-                <a:cs typeface="Aptos" pitchFamily="34" charset="-120"/>
-              </a:rPr>
-              <a:t>Risk</a:t>
-            </a:r>
-            <a:endParaRPr lang="en-US" sz="1500" dirty="0"/>
+            <a:off x="7818120" y="3300984"/>
+            <a:ext cx="3090672" cy="877824"/>
+          </a:xfrm>
+          <a:prstGeom prst="rect">
+            <a:avLst/>
+          </a:prstGeom>
+          <a:noFill/>
+          <a:ln/>
+        </p:spPr>
+        <p:txBody>
+          <a:bodyPr wrap="square" lIns="254" tIns="254" rIns="254" bIns="254" rtlCol="0" anchor="t">
+            <a:normAutofit/>
+          </a:bodyPr>
+          <a:lstStyle/>
+          <a:p>
+            <a:r>
+              <a:rPr lang="en-US" sz="1380" dirty="0">
+                <a:solidFill>
+                  <a:srgbClr val="17364A"/>
+                </a:solidFill>
+                <a:latin typeface="Aptos" pitchFamily="34" charset="0"/>
+                <a:ea typeface="Aptos" pitchFamily="34" charset="-122"/>
+                <a:cs typeface="Aptos" pitchFamily="34" charset="-120"/>
+              </a:rPr>
+              <a:t>NIST Artificial Intelligence Risk Management Framework:.</a:t>
+            </a:r>
+            <a:endParaRPr lang="en-US" sz="1380" dirty="0"/>
+          </a:p>
+          <a:p>
+            <a:r>
+              <a:rPr lang="en-US" sz="1380" dirty="0">
+                <a:solidFill>
+                  <a:srgbClr val="17364A"/>
+                </a:solidFill>
+                <a:latin typeface="Aptos" pitchFamily="34" charset="0"/>
+                <a:ea typeface="Aptos" pitchFamily="34" charset="-122"/>
+                <a:cs typeface="Aptos" pitchFamily="34" charset="-120"/>
+              </a:rPr>
+              <a:t>NIST Privacy Framework: https://www.nist.gov/privacy-framework</a:t>
+            </a:r>
+            <a:endParaRPr lang="en-US" sz="1380" dirty="0"/>
+          </a:p>
+          <a:p>
+            <a:r>
+              <a:rPr lang="en-US" sz="1380" dirty="0">
+                <a:solidFill>
+                  <a:srgbClr val="17364A"/>
+                </a:solidFill>
+                <a:latin typeface="Aptos" pitchFamily="34" charset="0"/>
+                <a:ea typeface="Aptos" pitchFamily="34" charset="-122"/>
+                <a:cs typeface="Aptos" pitchFamily="34" charset="-120"/>
+              </a:rPr>
+              <a:t>Agency cybersecurity, identity/access management, privacy, procurement, and incident.</a:t>
+            </a:r>
+            <a:endParaRPr lang="en-US" sz="1380" dirty="0"/>
           </a:p>
         </p:txBody>
       </p:sp>
       <p:sp>
         <p:nvSpPr>
           <p:cNvPr id="16" name="Shape 14"/>
-          <p:cNvSpPr/>
-          <p:nvPr/>
-        </p:nvSpPr>
-        <p:spPr>
-          <a:xfrm>
-            <a:off x="8366760" y="3639312"/>
-            <a:ext cx="2011680" cy="0"/>
-          </a:xfrm>
-          <a:prstGeom prst="line">
-            <a:avLst/>
-          </a:prstGeom>
-          <a:noFill/>
-          <a:ln w="63500">
-            <a:solidFill>
-              <a:srgbClr val="2F8A28"/>
-            </a:solidFill>
-            <a:prstDash val="solid"/>
-          </a:ln>
-        </p:spPr>
-      </p:sp>
-      <p:sp>
-        <p:nvSpPr>
-          <p:cNvPr id="17" name="Text 15"/>
-          <p:cNvSpPr/>
-          <p:nvPr/>
-        </p:nvSpPr>
-        <p:spPr>
-          <a:xfrm>
-            <a:off x="7909560" y="3849624"/>
-            <a:ext cx="2926080" cy="164592"/>
-          </a:xfrm>
-          <a:prstGeom prst="rect">
-            <a:avLst/>
-          </a:prstGeom>
-          <a:noFill/>
-          <a:ln/>
-        </p:spPr>
-        <p:txBody>
-          <a:bodyPr wrap="square" lIns="0" tIns="0" rIns="0" bIns="0" rtlCol="0" anchor="ctr"/>
-          <a:lstStyle/>
-          <a:p>
-            <a:pPr algn="ctr" indent="0" marL="0">
-              <a:buNone/>
-            </a:pPr>
-            <a:r>
-              <a:rPr lang="en-US" sz="900" dirty="0">
-                <a:solidFill>
-                  <a:srgbClr val="003A63"/>
-                </a:solidFill>
-                <a:latin typeface="Aptos" pitchFamily="34" charset="0"/>
-                <a:ea typeface="Aptos" pitchFamily="34" charset="-122"/>
-                <a:cs typeface="Aptos" pitchFamily="34" charset="-120"/>
-              </a:rPr>
-              <a:t>Human review</a:t>
-            </a:r>
-            <a:endParaRPr lang="en-US" sz="900" dirty="0"/>
-          </a:p>
-        </p:txBody>
-      </p:sp>
-      <p:sp>
-        <p:nvSpPr>
-          <p:cNvPr id="18" name="Shape 16"/>
           <p:cNvSpPr/>
           <p:nvPr/>
         </p:nvSpPr>
@@ -13686,7 +13264,7 @@
       </p:sp>
       <p:sp>
         <p:nvSpPr>
-          <p:cNvPr id="19" name="Text 17"/>
+          <p:cNvPr id="17" name="Text 15"/>
           <p:cNvSpPr/>
           <p:nvPr/>
         </p:nvSpPr>
@@ -13725,7 +13303,7 @@
       </p:sp>
       <p:sp>
         <p:nvSpPr>
-          <p:cNvPr id="20" name="Text 18"/>
+          <p:cNvPr id="18" name="Text 16"/>
           <p:cNvSpPr/>
           <p:nvPr/>
         </p:nvSpPr>
@@ -14238,20 +13816,20 @@
         </p:nvSpPr>
         <p:spPr>
           <a:xfrm>
-            <a:off x="7818120" y="3977640"/>
-            <a:ext cx="972312" cy="749808"/>
+            <a:off x="8046720" y="3794760"/>
+            <a:ext cx="3063240" cy="1600200"/>
           </a:xfrm>
           <a:prstGeom prst="roundRect">
             <a:avLst>
-              <a:gd name="adj" fmla="val 14634"/>
+              <a:gd name="adj" fmla="val 6857"/>
             </a:avLst>
           </a:prstGeom>
           <a:solidFill>
-            <a:srgbClr val="0068B7"/>
+            <a:srgbClr val="FFFFFF"/>
           </a:solidFill>
           <a:ln w="12700">
             <a:solidFill>
-              <a:srgbClr val="0068B7"/>
+              <a:srgbClr val="B9D7E6"/>
             </a:solidFill>
             <a:prstDash val="solid"/>
           </a:ln>
@@ -14265,172 +13843,100 @@
         </p:nvSpPr>
         <p:spPr>
           <a:xfrm>
-            <a:off x="7891272" y="4169664"/>
-            <a:ext cx="826008" cy="310896"/>
-          </a:xfrm>
-          <a:prstGeom prst="rect">
-            <a:avLst/>
-          </a:prstGeom>
-          <a:noFill/>
-          <a:ln/>
-        </p:spPr>
-        <p:txBody>
-          <a:bodyPr wrap="square" lIns="0" tIns="0" rIns="0" bIns="0" rtlCol="0" anchor="ctr">
+            <a:off x="8211312" y="3941064"/>
+            <a:ext cx="2734056" cy="256032"/>
+          </a:xfrm>
+          <a:prstGeom prst="rect">
+            <a:avLst/>
+          </a:prstGeom>
+          <a:noFill/>
+          <a:ln/>
+        </p:spPr>
+        <p:txBody>
+          <a:bodyPr wrap="square" lIns="0" tIns="0" rIns="0" bIns="0" rtlCol="0" anchor="ctr"/>
+          <a:lstStyle/>
+          <a:p>
+            <a:pPr indent="0" marL="0">
+              <a:buNone/>
+            </a:pPr>
+            <a:r>
+              <a:rPr lang="en-US" sz="1300" b="1" dirty="0">
+                <a:solidFill>
+                  <a:srgbClr val="0068B7"/>
+                </a:solidFill>
+                <a:latin typeface="Aptos" pitchFamily="34" charset="0"/>
+                <a:ea typeface="Aptos" pitchFamily="34" charset="-122"/>
+                <a:cs typeface="Aptos" pitchFamily="34" charset="-120"/>
+              </a:rPr>
+              <a:t>Use the play links to</a:t>
+            </a:r>
+            <a:endParaRPr lang="en-US" sz="1300" dirty="0"/>
+          </a:p>
+        </p:txBody>
+      </p:sp>
+      <p:sp>
+        <p:nvSpPr>
+          <p:cNvPr id="15" name="Text 13"/>
+          <p:cNvSpPr/>
+          <p:nvPr/>
+        </p:nvSpPr>
+        <p:spPr>
+          <a:xfrm>
+            <a:off x="8229600" y="4306824"/>
+            <a:ext cx="2679192" cy="941832"/>
+          </a:xfrm>
+          <a:prstGeom prst="rect">
+            <a:avLst/>
+          </a:prstGeom>
+          <a:noFill/>
+          <a:ln/>
+        </p:spPr>
+        <p:txBody>
+          <a:bodyPr wrap="square" lIns="254" tIns="254" rIns="254" bIns="254" rtlCol="0" anchor="t">
             <a:normAutofit/>
           </a:bodyPr>
           <a:lstStyle/>
           <a:p>
-            <a:pPr algn="ctr" indent="0" marL="0">
-              <a:buNone/>
-            </a:pPr>
-            <a:r>
-              <a:rPr lang="en-US" sz="1500" b="1" dirty="0">
-                <a:solidFill>
-                  <a:srgbClr val="FFFFFF"/>
-                </a:solidFill>
-                <a:latin typeface="Aptos" pitchFamily="34" charset="0"/>
-                <a:ea typeface="Aptos" pitchFamily="34" charset="-122"/>
-                <a:cs typeface="Aptos" pitchFamily="34" charset="-120"/>
-              </a:rPr>
-              <a:t>Lesson</a:t>
-            </a:r>
-            <a:endParaRPr lang="en-US" sz="1500" dirty="0"/>
-          </a:p>
-        </p:txBody>
-      </p:sp>
-      <p:sp>
-        <p:nvSpPr>
-          <p:cNvPr id="15" name="Shape 13"/>
-          <p:cNvSpPr/>
-          <p:nvPr/>
-        </p:nvSpPr>
-        <p:spPr>
-          <a:xfrm>
-            <a:off x="9046464" y="3977640"/>
-            <a:ext cx="972312" cy="749808"/>
-          </a:xfrm>
-          <a:prstGeom prst="roundRect">
-            <a:avLst>
-              <a:gd name="adj" fmla="val 14634"/>
-            </a:avLst>
-          </a:prstGeom>
-          <a:solidFill>
-            <a:srgbClr val="2F8A28"/>
-          </a:solidFill>
-          <a:ln w="12700">
-            <a:solidFill>
-              <a:srgbClr val="2F8A28"/>
-            </a:solidFill>
-            <a:prstDash val="solid"/>
-          </a:ln>
-        </p:spPr>
-      </p:sp>
-      <p:sp>
-        <p:nvSpPr>
-          <p:cNvPr id="16" name="Text 14"/>
-          <p:cNvSpPr/>
-          <p:nvPr/>
-        </p:nvSpPr>
-        <p:spPr>
-          <a:xfrm>
-            <a:off x="9119616" y="4169664"/>
-            <a:ext cx="826008" cy="310896"/>
-          </a:xfrm>
-          <a:prstGeom prst="rect">
-            <a:avLst/>
-          </a:prstGeom>
-          <a:noFill/>
-          <a:ln/>
-        </p:spPr>
-        <p:txBody>
-          <a:bodyPr wrap="square" lIns="0" tIns="0" rIns="0" bIns="0" rtlCol="0" anchor="ctr">
-            <a:normAutofit/>
-          </a:bodyPr>
-          <a:lstStyle/>
-          <a:p>
-            <a:pPr algn="ctr" indent="0" marL="0">
-              <a:buNone/>
-            </a:pPr>
-            <a:r>
-              <a:rPr lang="en-US" sz="1500" b="1" dirty="0">
-                <a:solidFill>
-                  <a:srgbClr val="FFFFFF"/>
-                </a:solidFill>
-                <a:latin typeface="Aptos" pitchFamily="34" charset="0"/>
-                <a:ea typeface="Aptos" pitchFamily="34" charset="-122"/>
-                <a:cs typeface="Aptos" pitchFamily="34" charset="-120"/>
-              </a:rPr>
-              <a:t>Plays</a:t>
-            </a:r>
-            <a:endParaRPr lang="en-US" sz="1500" dirty="0"/>
-          </a:p>
-        </p:txBody>
-      </p:sp>
-      <p:sp>
-        <p:nvSpPr>
-          <p:cNvPr id="17" name="Shape 15"/>
-          <p:cNvSpPr/>
-          <p:nvPr/>
-        </p:nvSpPr>
-        <p:spPr>
-          <a:xfrm>
-            <a:off x="10274808" y="3977640"/>
-            <a:ext cx="972312" cy="749808"/>
-          </a:xfrm>
-          <a:prstGeom prst="roundRect">
-            <a:avLst>
-              <a:gd name="adj" fmla="val 14634"/>
-            </a:avLst>
-          </a:prstGeom>
-          <a:solidFill>
-            <a:srgbClr val="6A4CA3"/>
-          </a:solidFill>
-          <a:ln w="12700">
-            <a:solidFill>
-              <a:srgbClr val="6A4CA3"/>
-            </a:solidFill>
-            <a:prstDash val="solid"/>
-          </a:ln>
-        </p:spPr>
-      </p:sp>
-      <p:sp>
-        <p:nvSpPr>
-          <p:cNvPr id="18" name="Text 16"/>
-          <p:cNvSpPr/>
-          <p:nvPr/>
-        </p:nvSpPr>
-        <p:spPr>
-          <a:xfrm>
-            <a:off x="10347960" y="4169664"/>
-            <a:ext cx="826008" cy="310896"/>
-          </a:xfrm>
-          <a:prstGeom prst="rect">
-            <a:avLst/>
-          </a:prstGeom>
-          <a:noFill/>
-          <a:ln/>
-        </p:spPr>
-        <p:txBody>
-          <a:bodyPr wrap="square" lIns="0" tIns="0" rIns="0" bIns="0" rtlCol="0" anchor="ctr">
-            <a:normAutofit/>
-          </a:bodyPr>
-          <a:lstStyle/>
-          <a:p>
-            <a:pPr algn="ctr" indent="0" marL="0">
-              <a:buNone/>
-            </a:pPr>
-            <a:r>
-              <a:rPr lang="en-US" sz="1500" b="1" dirty="0">
-                <a:solidFill>
-                  <a:srgbClr val="FFFFFF"/>
-                </a:solidFill>
-                <a:latin typeface="Aptos" pitchFamily="34" charset="0"/>
-                <a:ea typeface="Aptos" pitchFamily="34" charset="-122"/>
-                <a:cs typeface="Aptos" pitchFamily="34" charset="-120"/>
-              </a:rPr>
-              <a:t>Action</a:t>
-            </a:r>
-            <a:endParaRPr lang="en-US" sz="1500" dirty="0"/>
+            <a:r>
+              <a:rPr lang="en-US" sz="1380" dirty="0">
+                <a:solidFill>
+                  <a:srgbClr val="17364A"/>
+                </a:solidFill>
+                <a:latin typeface="Aptos" pitchFamily="34" charset="0"/>
+                <a:ea typeface="Aptos" pitchFamily="34" charset="-122"/>
+                <a:cs typeface="Aptos" pitchFamily="34" charset="-120"/>
+              </a:rPr>
+              <a:t>Locate the decision point in the playbook sequence.</a:t>
+            </a:r>
+            <a:endParaRPr lang="en-US" sz="1380" dirty="0"/>
+          </a:p>
+          <a:p>
+            <a:r>
+              <a:rPr lang="en-US" sz="1380" dirty="0">
+                <a:solidFill>
+                  <a:srgbClr val="17364A"/>
+                </a:solidFill>
+                <a:latin typeface="Aptos" pitchFamily="34" charset="0"/>
+                <a:ea typeface="Aptos" pitchFamily="34" charset="-122"/>
+                <a:cs typeface="Aptos" pitchFamily="34" charset="-120"/>
+              </a:rPr>
+              <a:t>Identify who should participate in the work.</a:t>
+            </a:r>
+            <a:endParaRPr lang="en-US" sz="1380" dirty="0"/>
+          </a:p>
+          <a:p>
+            <a:r>
+              <a:rPr lang="en-US" sz="1380" dirty="0">
+                <a:solidFill>
+                  <a:srgbClr val="17364A"/>
+                </a:solidFill>
+                <a:latin typeface="Aptos" pitchFamily="34" charset="0"/>
+                <a:ea typeface="Aptos" pitchFamily="34" charset="-122"/>
+                <a:cs typeface="Aptos" pitchFamily="34" charset="-120"/>
+              </a:rPr>
+              <a:t>Document the review, approval, or implementation step.</a:t>
+            </a:r>
+            <a:endParaRPr lang="en-US" sz="1380" dirty="0"/>
           </a:p>
         </p:txBody>
       </p:sp>
@@ -14908,20 +14414,20 @@
         </p:nvSpPr>
         <p:spPr>
           <a:xfrm>
-            <a:off x="7818120" y="3977640"/>
-            <a:ext cx="972312" cy="749808"/>
+            <a:off x="8046720" y="3794760"/>
+            <a:ext cx="3063240" cy="1600200"/>
           </a:xfrm>
           <a:prstGeom prst="roundRect">
             <a:avLst>
-              <a:gd name="adj" fmla="val 14634"/>
+              <a:gd name="adj" fmla="val 6857"/>
             </a:avLst>
           </a:prstGeom>
           <a:solidFill>
-            <a:srgbClr val="0068B7"/>
+            <a:srgbClr val="FFFFFF"/>
           </a:solidFill>
           <a:ln w="12700">
             <a:solidFill>
-              <a:srgbClr val="0068B7"/>
+              <a:srgbClr val="B9D7E6"/>
             </a:solidFill>
             <a:prstDash val="solid"/>
           </a:ln>
@@ -14935,172 +14441,100 @@
         </p:nvSpPr>
         <p:spPr>
           <a:xfrm>
-            <a:off x="7891272" y="4169664"/>
-            <a:ext cx="826008" cy="310896"/>
-          </a:xfrm>
-          <a:prstGeom prst="rect">
-            <a:avLst/>
-          </a:prstGeom>
-          <a:noFill/>
-          <a:ln/>
-        </p:spPr>
-        <p:txBody>
-          <a:bodyPr wrap="square" lIns="0" tIns="0" rIns="0" bIns="0" rtlCol="0" anchor="ctr">
+            <a:off x="8211312" y="3941064"/>
+            <a:ext cx="2734056" cy="256032"/>
+          </a:xfrm>
+          <a:prstGeom prst="rect">
+            <a:avLst/>
+          </a:prstGeom>
+          <a:noFill/>
+          <a:ln/>
+        </p:spPr>
+        <p:txBody>
+          <a:bodyPr wrap="square" lIns="0" tIns="0" rIns="0" bIns="0" rtlCol="0" anchor="ctr"/>
+          <a:lstStyle/>
+          <a:p>
+            <a:pPr indent="0" marL="0">
+              <a:buNone/>
+            </a:pPr>
+            <a:r>
+              <a:rPr lang="en-US" sz="1300" b="1" dirty="0">
+                <a:solidFill>
+                  <a:srgbClr val="0068B7"/>
+                </a:solidFill>
+                <a:latin typeface="Aptos" pitchFamily="34" charset="0"/>
+                <a:ea typeface="Aptos" pitchFamily="34" charset="-122"/>
+                <a:cs typeface="Aptos" pitchFamily="34" charset="-120"/>
+              </a:rPr>
+              <a:t>Tool selection cues</a:t>
+            </a:r>
+            <a:endParaRPr lang="en-US" sz="1300" dirty="0"/>
+          </a:p>
+        </p:txBody>
+      </p:sp>
+      <p:sp>
+        <p:nvSpPr>
+          <p:cNvPr id="15" name="Text 13"/>
+          <p:cNvSpPr/>
+          <p:nvPr/>
+        </p:nvSpPr>
+        <p:spPr>
+          <a:xfrm>
+            <a:off x="8229600" y="4306824"/>
+            <a:ext cx="2679192" cy="941832"/>
+          </a:xfrm>
+          <a:prstGeom prst="rect">
+            <a:avLst/>
+          </a:prstGeom>
+          <a:noFill/>
+          <a:ln/>
+        </p:spPr>
+        <p:txBody>
+          <a:bodyPr wrap="square" lIns="254" tIns="254" rIns="254" bIns="254" rtlCol="0" anchor="t">
             <a:normAutofit/>
           </a:bodyPr>
           <a:lstStyle/>
           <a:p>
-            <a:pPr algn="ctr" indent="0" marL="0">
-              <a:buNone/>
-            </a:pPr>
-            <a:r>
-              <a:rPr lang="en-US" sz="1500" b="1" dirty="0">
-                <a:solidFill>
-                  <a:srgbClr val="FFFFFF"/>
-                </a:solidFill>
-                <a:latin typeface="Aptos" pitchFamily="34" charset="0"/>
-                <a:ea typeface="Aptos" pitchFamily="34" charset="-122"/>
-                <a:cs typeface="Aptos" pitchFamily="34" charset="-120"/>
-              </a:rPr>
-              <a:t>Concept</a:t>
-            </a:r>
-            <a:endParaRPr lang="en-US" sz="1500" dirty="0"/>
-          </a:p>
-        </p:txBody>
-      </p:sp>
-      <p:sp>
-        <p:nvSpPr>
-          <p:cNvPr id="15" name="Shape 13"/>
-          <p:cNvSpPr/>
-          <p:nvPr/>
-        </p:nvSpPr>
-        <p:spPr>
-          <a:xfrm>
-            <a:off x="9046464" y="3977640"/>
-            <a:ext cx="972312" cy="749808"/>
-          </a:xfrm>
-          <a:prstGeom prst="roundRect">
-            <a:avLst>
-              <a:gd name="adj" fmla="val 14634"/>
-            </a:avLst>
-          </a:prstGeom>
-          <a:solidFill>
-            <a:srgbClr val="2F8A28"/>
-          </a:solidFill>
-          <a:ln w="12700">
-            <a:solidFill>
-              <a:srgbClr val="2F8A28"/>
-            </a:solidFill>
-            <a:prstDash val="solid"/>
-          </a:ln>
-        </p:spPr>
-      </p:sp>
-      <p:sp>
-        <p:nvSpPr>
-          <p:cNvPr id="16" name="Text 14"/>
-          <p:cNvSpPr/>
-          <p:nvPr/>
-        </p:nvSpPr>
-        <p:spPr>
-          <a:xfrm>
-            <a:off x="9119616" y="4169664"/>
-            <a:ext cx="826008" cy="310896"/>
-          </a:xfrm>
-          <a:prstGeom prst="rect">
-            <a:avLst/>
-          </a:prstGeom>
-          <a:noFill/>
-          <a:ln/>
-        </p:spPr>
-        <p:txBody>
-          <a:bodyPr wrap="square" lIns="0" tIns="0" rIns="0" bIns="0" rtlCol="0" anchor="ctr">
-            <a:normAutofit/>
-          </a:bodyPr>
-          <a:lstStyle/>
-          <a:p>
-            <a:pPr algn="ctr" indent="0" marL="0">
-              <a:buNone/>
-            </a:pPr>
-            <a:r>
-              <a:rPr lang="en-US" sz="1500" b="1" dirty="0">
-                <a:solidFill>
-                  <a:srgbClr val="FFFFFF"/>
-                </a:solidFill>
-                <a:latin typeface="Aptos" pitchFamily="34" charset="0"/>
-                <a:ea typeface="Aptos" pitchFamily="34" charset="-122"/>
-                <a:cs typeface="Aptos" pitchFamily="34" charset="-120"/>
-              </a:rPr>
-              <a:t>Tool</a:t>
-            </a:r>
-            <a:endParaRPr lang="en-US" sz="1500" dirty="0"/>
-          </a:p>
-        </p:txBody>
-      </p:sp>
-      <p:sp>
-        <p:nvSpPr>
-          <p:cNvPr id="17" name="Shape 15"/>
-          <p:cNvSpPr/>
-          <p:nvPr/>
-        </p:nvSpPr>
-        <p:spPr>
-          <a:xfrm>
-            <a:off x="10274808" y="3977640"/>
-            <a:ext cx="972312" cy="749808"/>
-          </a:xfrm>
-          <a:prstGeom prst="roundRect">
-            <a:avLst>
-              <a:gd name="adj" fmla="val 14634"/>
-            </a:avLst>
-          </a:prstGeom>
-          <a:solidFill>
-            <a:srgbClr val="D69A2D"/>
-          </a:solidFill>
-          <a:ln w="12700">
-            <a:solidFill>
-              <a:srgbClr val="D69A2D"/>
-            </a:solidFill>
-            <a:prstDash val="solid"/>
-          </a:ln>
-        </p:spPr>
-      </p:sp>
-      <p:sp>
-        <p:nvSpPr>
-          <p:cNvPr id="18" name="Text 16"/>
-          <p:cNvSpPr/>
-          <p:nvPr/>
-        </p:nvSpPr>
-        <p:spPr>
-          <a:xfrm>
-            <a:off x="10347960" y="4169664"/>
-            <a:ext cx="826008" cy="310896"/>
-          </a:xfrm>
-          <a:prstGeom prst="rect">
-            <a:avLst/>
-          </a:prstGeom>
-          <a:noFill/>
-          <a:ln/>
-        </p:spPr>
-        <p:txBody>
-          <a:bodyPr wrap="square" lIns="0" tIns="0" rIns="0" bIns="0" rtlCol="0" anchor="ctr">
-            <a:normAutofit/>
-          </a:bodyPr>
-          <a:lstStyle/>
-          <a:p>
-            <a:pPr algn="ctr" indent="0" marL="0">
-              <a:buNone/>
-            </a:pPr>
-            <a:r>
-              <a:rPr lang="en-US" sz="1500" b="1" dirty="0">
-                <a:solidFill>
-                  <a:srgbClr val="FFFFFF"/>
-                </a:solidFill>
-                <a:latin typeface="Aptos" pitchFamily="34" charset="0"/>
-                <a:ea typeface="Aptos" pitchFamily="34" charset="-122"/>
-                <a:cs typeface="Aptos" pitchFamily="34" charset="-120"/>
-              </a:rPr>
-              <a:t>Artifact</a:t>
-            </a:r>
-            <a:endParaRPr lang="en-US" sz="1500" dirty="0"/>
+            <a:r>
+              <a:rPr lang="en-US" sz="1380" dirty="0">
+                <a:solidFill>
+                  <a:srgbClr val="17364A"/>
+                </a:solidFill>
+                <a:latin typeface="Aptos" pitchFamily="34" charset="0"/>
+                <a:ea typeface="Aptos" pitchFamily="34" charset="-122"/>
+                <a:cs typeface="Aptos" pitchFamily="34" charset="-120"/>
+              </a:rPr>
+              <a:t>Use a tool when no comparable local process exists.</a:t>
+            </a:r>
+            <a:endParaRPr lang="en-US" sz="1380" dirty="0"/>
+          </a:p>
+          <a:p>
+            <a:r>
+              <a:rPr lang="en-US" sz="1380" dirty="0">
+                <a:solidFill>
+                  <a:srgbClr val="17364A"/>
+                </a:solidFill>
+                <a:latin typeface="Aptos" pitchFamily="34" charset="0"/>
+                <a:ea typeface="Aptos" pitchFamily="34" charset="-122"/>
+                <a:cs typeface="Aptos" pitchFamily="34" charset="-120"/>
+              </a:rPr>
+              <a:t>Adapt existing department templates when they already fit the purpose.</a:t>
+            </a:r>
+            <a:endParaRPr lang="en-US" sz="1380" dirty="0"/>
+          </a:p>
+          <a:p>
+            <a:r>
+              <a:rPr lang="en-US" sz="1380" dirty="0">
+                <a:solidFill>
+                  <a:srgbClr val="17364A"/>
+                </a:solidFill>
+                <a:latin typeface="Aptos" pitchFamily="34" charset="0"/>
+                <a:ea typeface="Aptos" pitchFamily="34" charset="-122"/>
+                <a:cs typeface="Aptos" pitchFamily="34" charset="-120"/>
+              </a:rPr>
+              <a:t>Save the completed artifact as evidence of the decision.</a:t>
+            </a:r>
+            <a:endParaRPr lang="en-US" sz="1380" dirty="0"/>
           </a:p>
         </p:txBody>
       </p:sp>
@@ -15573,13 +15007,11 @@
             </a:avLst>
           </a:prstGeom>
           <a:solidFill>
-            <a:srgbClr val="FFFFFF">
-              <a:alpha val="88000"/>
-            </a:srgbClr>
+            <a:srgbClr val="FFFFFF"/>
           </a:solidFill>
           <a:ln w="12700">
             <a:solidFill>
-              <a:srgbClr val="D6E8F2"/>
+              <a:srgbClr val="B9D7E6"/>
             </a:solidFill>
             <a:prstDash val="solid"/>
           </a:ln>
@@ -15587,26 +15019,42 @@
       </p:sp>
       <p:sp>
         <p:nvSpPr>
-          <p:cNvPr id="14" name="Shape 12"/>
-          <p:cNvSpPr/>
-          <p:nvPr/>
-        </p:nvSpPr>
-        <p:spPr>
-          <a:xfrm>
-            <a:off x="8046720" y="3108960"/>
-            <a:ext cx="2651760" cy="896112"/>
-          </a:xfrm>
-          <a:prstGeom prst="arc">
-            <a:avLst/>
-          </a:prstGeom>
-          <a:noFill/>
-          <a:ln w="25400">
-            <a:solidFill>
-              <a:srgbClr val="0068B7"/>
-            </a:solidFill>
-            <a:prstDash val="solid"/>
-          </a:ln>
-        </p:spPr>
+          <p:cNvPr id="14" name="Text 12"/>
+          <p:cNvSpPr/>
+          <p:nvPr/>
+        </p:nvSpPr>
+        <p:spPr>
+          <a:xfrm>
+            <a:off x="7799832" y="2935224"/>
+            <a:ext cx="3145536" cy="256032"/>
+          </a:xfrm>
+          <a:prstGeom prst="rect">
+            <a:avLst/>
+          </a:prstGeom>
+          <a:noFill/>
+          <a:ln/>
+        </p:spPr>
+        <p:txBody>
+          <a:bodyPr wrap="square" lIns="0" tIns="0" rIns="0" bIns="0" rtlCol="0" anchor="ctr"/>
+          <a:lstStyle/>
+          <a:p>
+            <a:pPr indent="0" marL="0">
+              <a:buNone/>
+            </a:pPr>
+            <a:r>
+              <a:rPr lang="en-US" sz="1300" b="1" dirty="0">
+                <a:solidFill>
+                  <a:srgbClr val="0068B7"/>
+                </a:solidFill>
+                <a:latin typeface="Aptos" pitchFamily="34" charset="0"/>
+                <a:ea typeface="Aptos" pitchFamily="34" charset="-122"/>
+                <a:cs typeface="Aptos" pitchFamily="34" charset="-120"/>
+              </a:rPr>
+              <a:t>Concept checkpoints</a:t>
+            </a:r>
+            <a:endParaRPr lang="en-US" sz="1300" dirty="0"/>
+          </a:p>
+        </p:txBody>
       </p:sp>
       <p:sp>
         <p:nvSpPr>
@@ -15616,102 +15064,67 @@
         </p:nvSpPr>
         <p:spPr>
           <a:xfrm>
-            <a:off x="7909560" y="3099816"/>
-            <a:ext cx="2926080" cy="256032"/>
-          </a:xfrm>
-          <a:prstGeom prst="rect">
-            <a:avLst/>
-          </a:prstGeom>
-          <a:noFill/>
-          <a:ln/>
-        </p:spPr>
-        <p:txBody>
-          <a:bodyPr wrap="square" lIns="0" tIns="0" rIns="0" bIns="0" rtlCol="0" anchor="ctr"/>
-          <a:lstStyle/>
-          <a:p>
-            <a:pPr algn="ctr" indent="0" marL="0">
-              <a:buNone/>
-            </a:pPr>
-            <a:r>
-              <a:rPr lang="en-US" sz="1500" b="1" dirty="0">
-                <a:solidFill>
-                  <a:srgbClr val="003A63"/>
-                </a:solidFill>
-                <a:latin typeface="Aptos" pitchFamily="34" charset="0"/>
-                <a:ea typeface="Aptos" pitchFamily="34" charset="-122"/>
-                <a:cs typeface="Aptos" pitchFamily="34" charset="-120"/>
-              </a:rPr>
-              <a:t>Risk</a:t>
-            </a:r>
-            <a:endParaRPr lang="en-US" sz="1500" dirty="0"/>
+            <a:off x="7818120" y="3300984"/>
+            <a:ext cx="3090672" cy="877824"/>
+          </a:xfrm>
+          <a:prstGeom prst="rect">
+            <a:avLst/>
+          </a:prstGeom>
+          <a:noFill/>
+          <a:ln/>
+        </p:spPr>
+        <p:txBody>
+          <a:bodyPr wrap="square" lIns="254" tIns="254" rIns="254" bIns="254" rtlCol="0" anchor="t">
+            <a:normAutofit/>
+          </a:bodyPr>
+          <a:lstStyle/>
+          <a:p>
+            <a:r>
+              <a:rPr lang="en-US" sz="1380" dirty="0">
+                <a:solidFill>
+                  <a:srgbClr val="17364A"/>
+                </a:solidFill>
+                <a:latin typeface="Aptos" pitchFamily="34" charset="0"/>
+                <a:ea typeface="Aptos" pitchFamily="34" charset="-122"/>
+                <a:cs typeface="Aptos" pitchFamily="34" charset="-120"/>
+              </a:rPr>
+              <a:t>Identify prompt injection, data leakage, sensitive information disclosure, insecure output.</a:t>
+            </a:r>
+            <a:endParaRPr lang="en-US" sz="1380" dirty="0"/>
+          </a:p>
+          <a:p>
+            <a:r>
+              <a:rPr lang="en-US" sz="1380" dirty="0">
+                <a:solidFill>
+                  <a:srgbClr val="17364A"/>
+                </a:solidFill>
+                <a:latin typeface="Aptos" pitchFamily="34" charset="0"/>
+                <a:ea typeface="Aptos" pitchFamily="34" charset="-122"/>
+                <a:cs typeface="Aptos" pitchFamily="34" charset="-120"/>
+              </a:rPr>
+              <a:t>Apply least privilege, approved-tool use, access controls, logging, testing, and incident.</a:t>
+            </a:r>
+            <a:endParaRPr lang="en-US" sz="1380" dirty="0"/>
+          </a:p>
+          <a:p>
+            <a:r>
+              <a:rPr lang="en-US" sz="1380" dirty="0">
+                <a:solidFill>
+                  <a:srgbClr val="17364A"/>
+                </a:solidFill>
+                <a:latin typeface="Aptos" pitchFamily="34" charset="0"/>
+                <a:ea typeface="Aptos" pitchFamily="34" charset="-122"/>
+                <a:cs typeface="Aptos" pitchFamily="34" charset="-120"/>
+              </a:rPr>
+              <a:t>Develop security questions for AI procurement, implementation, and monitoring.</a:t>
+            </a:r>
+            <a:endParaRPr lang="en-US" sz="1380" dirty="0"/>
           </a:p>
         </p:txBody>
       </p:sp>
       <p:sp>
         <p:nvSpPr>
           <p:cNvPr id="16" name="Shape 14"/>
-          <p:cNvSpPr/>
-          <p:nvPr/>
-        </p:nvSpPr>
-        <p:spPr>
-          <a:xfrm>
-            <a:off x="8366760" y="3639312"/>
-            <a:ext cx="2011680" cy="0"/>
-          </a:xfrm>
-          <a:prstGeom prst="line">
-            <a:avLst/>
-          </a:prstGeom>
-          <a:noFill/>
-          <a:ln w="63500">
-            <a:solidFill>
-              <a:srgbClr val="2F8A28"/>
-            </a:solidFill>
-            <a:prstDash val="solid"/>
-          </a:ln>
-        </p:spPr>
-      </p:sp>
-      <p:sp>
-        <p:nvSpPr>
-          <p:cNvPr id="17" name="Text 15"/>
-          <p:cNvSpPr/>
-          <p:nvPr/>
-        </p:nvSpPr>
-        <p:spPr>
-          <a:xfrm>
-            <a:off x="7909560" y="3849624"/>
-            <a:ext cx="2926080" cy="164592"/>
-          </a:xfrm>
-          <a:prstGeom prst="rect">
-            <a:avLst/>
-          </a:prstGeom>
-          <a:noFill/>
-          <a:ln/>
-        </p:spPr>
-        <p:txBody>
-          <a:bodyPr wrap="square" lIns="0" tIns="0" rIns="0" bIns="0" rtlCol="0" anchor="ctr"/>
-          <a:lstStyle/>
-          <a:p>
-            <a:pPr algn="ctr" indent="0" marL="0">
-              <a:buNone/>
-            </a:pPr>
-            <a:r>
-              <a:rPr lang="en-US" sz="900" dirty="0">
-                <a:solidFill>
-                  <a:srgbClr val="003A63"/>
-                </a:solidFill>
-                <a:latin typeface="Aptos" pitchFamily="34" charset="0"/>
-                <a:ea typeface="Aptos" pitchFamily="34" charset="-122"/>
-                <a:cs typeface="Aptos" pitchFamily="34" charset="-120"/>
-              </a:rPr>
-              <a:t>Human review</a:t>
-            </a:r>
-            <a:endParaRPr lang="en-US" sz="900" dirty="0"/>
-          </a:p>
-        </p:txBody>
-      </p:sp>
-      <p:sp>
-        <p:nvSpPr>
-          <p:cNvPr id="18" name="Shape 16"/>
           <p:cNvSpPr/>
           <p:nvPr/>
         </p:nvSpPr>
@@ -15738,7 +15151,7 @@
       </p:sp>
       <p:sp>
         <p:nvSpPr>
-          <p:cNvPr id="19" name="Text 17"/>
+          <p:cNvPr id="17" name="Text 15"/>
           <p:cNvSpPr/>
           <p:nvPr/>
         </p:nvSpPr>
@@ -15777,7 +15190,7 @@
       </p:sp>
       <p:sp>
         <p:nvSpPr>
-          <p:cNvPr id="20" name="Text 18"/>
+          <p:cNvPr id="18" name="Text 16"/>
           <p:cNvSpPr/>
           <p:nvPr/>
         </p:nvSpPr>
@@ -16257,13 +15670,11 @@
             </a:avLst>
           </a:prstGeom>
           <a:solidFill>
-            <a:srgbClr val="FFFFFF">
-              <a:alpha val="88000"/>
-            </a:srgbClr>
+            <a:srgbClr val="FFFFFF"/>
           </a:solidFill>
           <a:ln w="12700">
             <a:solidFill>
-              <a:srgbClr val="D6E8F2"/>
+              <a:srgbClr val="B9D7E6"/>
             </a:solidFill>
             <a:prstDash val="solid"/>
           </a:ln>
@@ -16271,26 +15682,42 @@
       </p:sp>
       <p:sp>
         <p:nvSpPr>
-          <p:cNvPr id="14" name="Shape 12"/>
-          <p:cNvSpPr/>
-          <p:nvPr/>
-        </p:nvSpPr>
-        <p:spPr>
-          <a:xfrm>
-            <a:off x="8046720" y="3108960"/>
-            <a:ext cx="2651760" cy="896112"/>
-          </a:xfrm>
-          <a:prstGeom prst="arc">
-            <a:avLst/>
-          </a:prstGeom>
-          <a:noFill/>
-          <a:ln w="25400">
-            <a:solidFill>
-              <a:srgbClr val="0068B7"/>
-            </a:solidFill>
-            <a:prstDash val="solid"/>
-          </a:ln>
-        </p:spPr>
+          <p:cNvPr id="14" name="Text 12"/>
+          <p:cNvSpPr/>
+          <p:nvPr/>
+        </p:nvSpPr>
+        <p:spPr>
+          <a:xfrm>
+            <a:off x="7799832" y="2935224"/>
+            <a:ext cx="3145536" cy="256032"/>
+          </a:xfrm>
+          <a:prstGeom prst="rect">
+            <a:avLst/>
+          </a:prstGeom>
+          <a:noFill/>
+          <a:ln/>
+        </p:spPr>
+        <p:txBody>
+          <a:bodyPr wrap="square" lIns="0" tIns="0" rIns="0" bIns="0" rtlCol="0" anchor="ctr"/>
+          <a:lstStyle/>
+          <a:p>
+            <a:pPr indent="0" marL="0">
+              <a:buNone/>
+            </a:pPr>
+            <a:r>
+              <a:rPr lang="en-US" sz="1300" b="1" dirty="0">
+                <a:solidFill>
+                  <a:srgbClr val="0068B7"/>
+                </a:solidFill>
+                <a:latin typeface="Aptos" pitchFamily="34" charset="0"/>
+                <a:ea typeface="Aptos" pitchFamily="34" charset="-122"/>
+                <a:cs typeface="Aptos" pitchFamily="34" charset="-120"/>
+              </a:rPr>
+              <a:t>Concept checkpoints</a:t>
+            </a:r>
+            <a:endParaRPr lang="en-US" sz="1300" dirty="0"/>
+          </a:p>
+        </p:txBody>
       </p:sp>
       <p:sp>
         <p:nvSpPr>
@@ -16300,102 +15727,39 @@
         </p:nvSpPr>
         <p:spPr>
           <a:xfrm>
-            <a:off x="7909560" y="3099816"/>
-            <a:ext cx="2926080" cy="256032"/>
-          </a:xfrm>
-          <a:prstGeom prst="rect">
-            <a:avLst/>
-          </a:prstGeom>
-          <a:noFill/>
-          <a:ln/>
-        </p:spPr>
-        <p:txBody>
-          <a:bodyPr wrap="square" lIns="0" tIns="0" rIns="0" bIns="0" rtlCol="0" anchor="ctr"/>
-          <a:lstStyle/>
-          <a:p>
-            <a:pPr algn="ctr" indent="0" marL="0">
-              <a:buNone/>
-            </a:pPr>
-            <a:r>
-              <a:rPr lang="en-US" sz="1500" b="1" dirty="0">
-                <a:solidFill>
-                  <a:srgbClr val="003A63"/>
-                </a:solidFill>
-                <a:latin typeface="Aptos" pitchFamily="34" charset="0"/>
-                <a:ea typeface="Aptos" pitchFamily="34" charset="-122"/>
-                <a:cs typeface="Aptos" pitchFamily="34" charset="-120"/>
-              </a:rPr>
-              <a:t>Risk</a:t>
-            </a:r>
-            <a:endParaRPr lang="en-US" sz="1500" dirty="0"/>
+            <a:off x="7818120" y="3300984"/>
+            <a:ext cx="3090672" cy="877824"/>
+          </a:xfrm>
+          <a:prstGeom prst="rect">
+            <a:avLst/>
+          </a:prstGeom>
+          <a:noFill/>
+          <a:ln/>
+        </p:spPr>
+        <p:txBody>
+          <a:bodyPr wrap="square" lIns="254" tIns="254" rIns="254" bIns="254" rtlCol="0" anchor="t">
+            <a:normAutofit/>
+          </a:bodyPr>
+          <a:lstStyle/>
+          <a:p>
+            <a:r>
+              <a:rPr lang="en-US" sz="1380" dirty="0">
+                <a:solidFill>
+                  <a:srgbClr val="17364A"/>
+                </a:solidFill>
+                <a:latin typeface="Aptos" pitchFamily="34" charset="0"/>
+                <a:ea typeface="Aptos" pitchFamily="34" charset="-122"/>
+                <a:cs typeface="Aptos" pitchFamily="34" charset="-120"/>
+              </a:rPr>
+              <a:t>Produce a secure AI workflow checklist.</a:t>
+            </a:r>
+            <a:endParaRPr lang="en-US" sz="1380" dirty="0"/>
           </a:p>
         </p:txBody>
       </p:sp>
       <p:sp>
         <p:nvSpPr>
           <p:cNvPr id="16" name="Shape 14"/>
-          <p:cNvSpPr/>
-          <p:nvPr/>
-        </p:nvSpPr>
-        <p:spPr>
-          <a:xfrm>
-            <a:off x="8366760" y="3639312"/>
-            <a:ext cx="2011680" cy="0"/>
-          </a:xfrm>
-          <a:prstGeom prst="line">
-            <a:avLst/>
-          </a:prstGeom>
-          <a:noFill/>
-          <a:ln w="63500">
-            <a:solidFill>
-              <a:srgbClr val="2F8A28"/>
-            </a:solidFill>
-            <a:prstDash val="solid"/>
-          </a:ln>
-        </p:spPr>
-      </p:sp>
-      <p:sp>
-        <p:nvSpPr>
-          <p:cNvPr id="17" name="Text 15"/>
-          <p:cNvSpPr/>
-          <p:nvPr/>
-        </p:nvSpPr>
-        <p:spPr>
-          <a:xfrm>
-            <a:off x="7909560" y="3849624"/>
-            <a:ext cx="2926080" cy="164592"/>
-          </a:xfrm>
-          <a:prstGeom prst="rect">
-            <a:avLst/>
-          </a:prstGeom>
-          <a:noFill/>
-          <a:ln/>
-        </p:spPr>
-        <p:txBody>
-          <a:bodyPr wrap="square" lIns="0" tIns="0" rIns="0" bIns="0" rtlCol="0" anchor="ctr"/>
-          <a:lstStyle/>
-          <a:p>
-            <a:pPr algn="ctr" indent="0" marL="0">
-              <a:buNone/>
-            </a:pPr>
-            <a:r>
-              <a:rPr lang="en-US" sz="900" dirty="0">
-                <a:solidFill>
-                  <a:srgbClr val="003A63"/>
-                </a:solidFill>
-                <a:latin typeface="Aptos" pitchFamily="34" charset="0"/>
-                <a:ea typeface="Aptos" pitchFamily="34" charset="-122"/>
-                <a:cs typeface="Aptos" pitchFamily="34" charset="-120"/>
-              </a:rPr>
-              <a:t>Human review</a:t>
-            </a:r>
-            <a:endParaRPr lang="en-US" sz="900" dirty="0"/>
-          </a:p>
-        </p:txBody>
-      </p:sp>
-      <p:sp>
-        <p:nvSpPr>
-          <p:cNvPr id="18" name="Shape 16"/>
           <p:cNvSpPr/>
           <p:nvPr/>
         </p:nvSpPr>
@@ -16422,7 +15786,7 @@
       </p:sp>
       <p:sp>
         <p:nvSpPr>
-          <p:cNvPr id="19" name="Text 17"/>
+          <p:cNvPr id="17" name="Text 15"/>
           <p:cNvSpPr/>
           <p:nvPr/>
         </p:nvSpPr>
@@ -16461,7 +15825,7 @@
       </p:sp>
       <p:sp>
         <p:nvSpPr>
-          <p:cNvPr id="20" name="Text 18"/>
+          <p:cNvPr id="18" name="Text 16"/>
           <p:cNvSpPr/>
           <p:nvPr/>
         </p:nvSpPr>
@@ -16969,13 +16333,11 @@
             </a:avLst>
           </a:prstGeom>
           <a:solidFill>
-            <a:srgbClr val="FFFFFF">
-              <a:alpha val="88000"/>
-            </a:srgbClr>
+            <a:srgbClr val="FFFFFF"/>
           </a:solidFill>
           <a:ln w="12700">
             <a:solidFill>
-              <a:srgbClr val="D6E8F2"/>
+              <a:srgbClr val="B9D7E6"/>
             </a:solidFill>
             <a:prstDash val="solid"/>
           </a:ln>
@@ -16983,26 +16345,42 @@
       </p:sp>
       <p:sp>
         <p:nvSpPr>
-          <p:cNvPr id="14" name="Shape 12"/>
-          <p:cNvSpPr/>
-          <p:nvPr/>
-        </p:nvSpPr>
-        <p:spPr>
-          <a:xfrm>
-            <a:off x="8046720" y="3108960"/>
-            <a:ext cx="2651760" cy="896112"/>
-          </a:xfrm>
-          <a:prstGeom prst="arc">
-            <a:avLst/>
-          </a:prstGeom>
-          <a:noFill/>
-          <a:ln w="25400">
-            <a:solidFill>
-              <a:srgbClr val="0068B7"/>
-            </a:solidFill>
-            <a:prstDash val="solid"/>
-          </a:ln>
-        </p:spPr>
+          <p:cNvPr id="14" name="Text 12"/>
+          <p:cNvSpPr/>
+          <p:nvPr/>
+        </p:nvSpPr>
+        <p:spPr>
+          <a:xfrm>
+            <a:off x="7799832" y="2935224"/>
+            <a:ext cx="3145536" cy="256032"/>
+          </a:xfrm>
+          <a:prstGeom prst="rect">
+            <a:avLst/>
+          </a:prstGeom>
+          <a:noFill/>
+          <a:ln/>
+        </p:spPr>
+        <p:txBody>
+          <a:bodyPr wrap="square" lIns="0" tIns="0" rIns="0" bIns="0" rtlCol="0" anchor="ctr"/>
+          <a:lstStyle/>
+          <a:p>
+            <a:pPr indent="0" marL="0">
+              <a:buNone/>
+            </a:pPr>
+            <a:r>
+              <a:rPr lang="en-US" sz="1300" b="1" dirty="0">
+                <a:solidFill>
+                  <a:srgbClr val="0068B7"/>
+                </a:solidFill>
+                <a:latin typeface="Aptos" pitchFamily="34" charset="0"/>
+                <a:ea typeface="Aptos" pitchFamily="34" charset="-122"/>
+                <a:cs typeface="Aptos" pitchFamily="34" charset="-120"/>
+              </a:rPr>
+              <a:t>Concept checkpoints</a:t>
+            </a:r>
+            <a:endParaRPr lang="en-US" sz="1300" dirty="0"/>
+          </a:p>
+        </p:txBody>
       </p:sp>
       <p:sp>
         <p:nvSpPr>
@@ -17012,102 +16390,67 @@
         </p:nvSpPr>
         <p:spPr>
           <a:xfrm>
-            <a:off x="7909560" y="3099816"/>
-            <a:ext cx="2926080" cy="256032"/>
-          </a:xfrm>
-          <a:prstGeom prst="rect">
-            <a:avLst/>
-          </a:prstGeom>
-          <a:noFill/>
-          <a:ln/>
-        </p:spPr>
-        <p:txBody>
-          <a:bodyPr wrap="square" lIns="0" tIns="0" rIns="0" bIns="0" rtlCol="0" anchor="ctr"/>
-          <a:lstStyle/>
-          <a:p>
-            <a:pPr algn="ctr" indent="0" marL="0">
-              <a:buNone/>
-            </a:pPr>
-            <a:r>
-              <a:rPr lang="en-US" sz="1500" b="1" dirty="0">
-                <a:solidFill>
-                  <a:srgbClr val="003A63"/>
-                </a:solidFill>
-                <a:latin typeface="Aptos" pitchFamily="34" charset="0"/>
-                <a:ea typeface="Aptos" pitchFamily="34" charset="-122"/>
-                <a:cs typeface="Aptos" pitchFamily="34" charset="-120"/>
-              </a:rPr>
-              <a:t>Risk</a:t>
-            </a:r>
-            <a:endParaRPr lang="en-US" sz="1500" dirty="0"/>
+            <a:off x="7818120" y="3300984"/>
+            <a:ext cx="3090672" cy="877824"/>
+          </a:xfrm>
+          <a:prstGeom prst="rect">
+            <a:avLst/>
+          </a:prstGeom>
+          <a:noFill/>
+          <a:ln/>
+        </p:spPr>
+        <p:txBody>
+          <a:bodyPr wrap="square" lIns="254" tIns="254" rIns="254" bIns="254" rtlCol="0" anchor="t">
+            <a:normAutofit/>
+          </a:bodyPr>
+          <a:lstStyle/>
+          <a:p>
+            <a:r>
+              <a:rPr lang="en-US" sz="1380" dirty="0">
+                <a:solidFill>
+                  <a:srgbClr val="17364A"/>
+                </a:solidFill>
+                <a:latin typeface="Aptos" pitchFamily="34" charset="0"/>
+                <a:ea typeface="Aptos" pitchFamily="34" charset="-122"/>
+                <a:cs typeface="Aptos" pitchFamily="34" charset="-120"/>
+              </a:rPr>
+              <a:t>AI security focuses on protecting AI systems, integrations, prompts, outputs, data, users,.</a:t>
+            </a:r>
+            <a:endParaRPr lang="en-US" sz="1380" dirty="0"/>
+          </a:p>
+          <a:p>
+            <a:r>
+              <a:rPr lang="en-US" sz="1380" dirty="0">
+                <a:solidFill>
+                  <a:srgbClr val="17364A"/>
+                </a:solidFill>
+                <a:latin typeface="Aptos" pitchFamily="34" charset="0"/>
+                <a:ea typeface="Aptos" pitchFamily="34" charset="-122"/>
+                <a:cs typeface="Aptos" pitchFamily="34" charset="-120"/>
+              </a:rPr>
+              <a:t>Public health agencies handle sensitive health, demographic, legal, operational, and.</a:t>
+            </a:r>
+            <a:endParaRPr lang="en-US" sz="1380" dirty="0"/>
+          </a:p>
+          <a:p>
+            <a:r>
+              <a:rPr lang="en-US" sz="1380" dirty="0">
+                <a:solidFill>
+                  <a:srgbClr val="17364A"/>
+                </a:solidFill>
+                <a:latin typeface="Aptos" pitchFamily="34" charset="0"/>
+                <a:ea typeface="Aptos" pitchFamily="34" charset="-122"/>
+                <a:cs typeface="Aptos" pitchFamily="34" charset="-120"/>
+              </a:rPr>
+              <a:t>This module introduces security risks that are especially relevant to generative AI, RAG.</a:t>
+            </a:r>
+            <a:endParaRPr lang="en-US" sz="1380" dirty="0"/>
           </a:p>
         </p:txBody>
       </p:sp>
       <p:sp>
         <p:nvSpPr>
           <p:cNvPr id="16" name="Shape 14"/>
-          <p:cNvSpPr/>
-          <p:nvPr/>
-        </p:nvSpPr>
-        <p:spPr>
-          <a:xfrm>
-            <a:off x="8366760" y="3639312"/>
-            <a:ext cx="2011680" cy="0"/>
-          </a:xfrm>
-          <a:prstGeom prst="line">
-            <a:avLst/>
-          </a:prstGeom>
-          <a:noFill/>
-          <a:ln w="63500">
-            <a:solidFill>
-              <a:srgbClr val="2F8A28"/>
-            </a:solidFill>
-            <a:prstDash val="solid"/>
-          </a:ln>
-        </p:spPr>
-      </p:sp>
-      <p:sp>
-        <p:nvSpPr>
-          <p:cNvPr id="17" name="Text 15"/>
-          <p:cNvSpPr/>
-          <p:nvPr/>
-        </p:nvSpPr>
-        <p:spPr>
-          <a:xfrm>
-            <a:off x="7909560" y="3849624"/>
-            <a:ext cx="2926080" cy="164592"/>
-          </a:xfrm>
-          <a:prstGeom prst="rect">
-            <a:avLst/>
-          </a:prstGeom>
-          <a:noFill/>
-          <a:ln/>
-        </p:spPr>
-        <p:txBody>
-          <a:bodyPr wrap="square" lIns="0" tIns="0" rIns="0" bIns="0" rtlCol="0" anchor="ctr"/>
-          <a:lstStyle/>
-          <a:p>
-            <a:pPr algn="ctr" indent="0" marL="0">
-              <a:buNone/>
-            </a:pPr>
-            <a:r>
-              <a:rPr lang="en-US" sz="900" dirty="0">
-                <a:solidFill>
-                  <a:srgbClr val="003A63"/>
-                </a:solidFill>
-                <a:latin typeface="Aptos" pitchFamily="34" charset="0"/>
-                <a:ea typeface="Aptos" pitchFamily="34" charset="-122"/>
-                <a:cs typeface="Aptos" pitchFamily="34" charset="-120"/>
-              </a:rPr>
-              <a:t>Human review</a:t>
-            </a:r>
-            <a:endParaRPr lang="en-US" sz="900" dirty="0"/>
-          </a:p>
-        </p:txBody>
-      </p:sp>
-      <p:sp>
-        <p:nvSpPr>
-          <p:cNvPr id="18" name="Shape 16"/>
           <p:cNvSpPr/>
           <p:nvPr/>
         </p:nvSpPr>
@@ -17134,7 +16477,7 @@
       </p:sp>
       <p:sp>
         <p:nvSpPr>
-          <p:cNvPr id="19" name="Text 17"/>
+          <p:cNvPr id="17" name="Text 15"/>
           <p:cNvSpPr/>
           <p:nvPr/>
         </p:nvSpPr>
@@ -17173,7 +16516,7 @@
       </p:sp>
       <p:sp>
         <p:nvSpPr>
-          <p:cNvPr id="20" name="Text 18"/>
+          <p:cNvPr id="18" name="Text 16"/>
           <p:cNvSpPr/>
           <p:nvPr/>
         </p:nvSpPr>
@@ -17681,13 +17024,11 @@
             </a:avLst>
           </a:prstGeom>
           <a:solidFill>
-            <a:srgbClr val="FFFFFF">
-              <a:alpha val="88000"/>
-            </a:srgbClr>
+            <a:srgbClr val="FFFFFF"/>
           </a:solidFill>
           <a:ln w="12700">
             <a:solidFill>
-              <a:srgbClr val="D6E8F2"/>
+              <a:srgbClr val="B9D7E6"/>
             </a:solidFill>
             <a:prstDash val="solid"/>
           </a:ln>
@@ -17695,190 +17036,112 @@
       </p:sp>
       <p:sp>
         <p:nvSpPr>
-          <p:cNvPr id="14" name="Shape 12"/>
-          <p:cNvSpPr/>
-          <p:nvPr/>
-        </p:nvSpPr>
-        <p:spPr>
-          <a:xfrm>
-            <a:off x="7891272" y="3108960"/>
-            <a:ext cx="566928" cy="566928"/>
-          </a:xfrm>
-          <a:prstGeom prst="ellipse">
-            <a:avLst/>
-          </a:prstGeom>
-          <a:solidFill>
-            <a:srgbClr val="0068B7"/>
-          </a:solidFill>
-          <a:ln w="12700">
-            <a:solidFill>
-              <a:srgbClr val="0068B7"/>
-            </a:solidFill>
-            <a:prstDash val="solid"/>
-          </a:ln>
-        </p:spPr>
-      </p:sp>
-      <p:sp>
-        <p:nvSpPr>
-          <p:cNvPr id="15" name="Shape 13"/>
-          <p:cNvSpPr/>
-          <p:nvPr/>
-        </p:nvSpPr>
-        <p:spPr>
-          <a:xfrm>
-            <a:off x="10287000" y="3108960"/>
-            <a:ext cx="566928" cy="566928"/>
-          </a:xfrm>
-          <a:prstGeom prst="ellipse">
-            <a:avLst/>
-          </a:prstGeom>
-          <a:solidFill>
-            <a:srgbClr val="2F8A28"/>
-          </a:solidFill>
-          <a:ln w="12700">
-            <a:solidFill>
-              <a:srgbClr val="2F8A28"/>
-            </a:solidFill>
-            <a:prstDash val="solid"/>
-          </a:ln>
-        </p:spPr>
+          <p:cNvPr id="14" name="Text 12"/>
+          <p:cNvSpPr/>
+          <p:nvPr/>
+        </p:nvSpPr>
+        <p:spPr>
+          <a:xfrm>
+            <a:off x="7799832" y="2935224"/>
+            <a:ext cx="3145536" cy="256032"/>
+          </a:xfrm>
+          <a:prstGeom prst="rect">
+            <a:avLst/>
+          </a:prstGeom>
+          <a:noFill/>
+          <a:ln/>
+        </p:spPr>
+        <p:txBody>
+          <a:bodyPr wrap="square" lIns="0" tIns="0" rIns="0" bIns="0" rtlCol="0" anchor="ctr"/>
+          <a:lstStyle/>
+          <a:p>
+            <a:pPr indent="0" marL="0">
+              <a:buNone/>
+            </a:pPr>
+            <a:r>
+              <a:rPr lang="en-US" sz="1300" b="1" dirty="0">
+                <a:solidFill>
+                  <a:srgbClr val="0068B7"/>
+                </a:solidFill>
+                <a:latin typeface="Aptos" pitchFamily="34" charset="0"/>
+                <a:ea typeface="Aptos" pitchFamily="34" charset="-122"/>
+                <a:cs typeface="Aptos" pitchFamily="34" charset="-120"/>
+              </a:rPr>
+              <a:t>Concept checkpoints</a:t>
+            </a:r>
+            <a:endParaRPr lang="en-US" sz="1300" dirty="0"/>
+          </a:p>
+        </p:txBody>
+      </p:sp>
+      <p:sp>
+        <p:nvSpPr>
+          <p:cNvPr id="15" name="Text 13"/>
+          <p:cNvSpPr/>
+          <p:nvPr/>
+        </p:nvSpPr>
+        <p:spPr>
+          <a:xfrm>
+            <a:off x="7818120" y="3300984"/>
+            <a:ext cx="3090672" cy="877824"/>
+          </a:xfrm>
+          <a:prstGeom prst="rect">
+            <a:avLst/>
+          </a:prstGeom>
+          <a:noFill/>
+          <a:ln/>
+        </p:spPr>
+        <p:txBody>
+          <a:bodyPr wrap="square" lIns="254" tIns="254" rIns="254" bIns="254" rtlCol="0" anchor="t">
+            <a:normAutofit/>
+          </a:bodyPr>
+          <a:lstStyle/>
+          <a:p>
+            <a:r>
+              <a:rPr lang="en-US" sz="1380" dirty="0">
+                <a:solidFill>
+                  <a:srgbClr val="17364A"/>
+                </a:solidFill>
+                <a:latin typeface="Aptos" pitchFamily="34" charset="0"/>
+                <a:ea typeface="Aptos" pitchFamily="34" charset="-122"/>
+                <a:cs typeface="Aptos" pitchFamily="34" charset="-120"/>
+              </a:rPr>
+              <a:t>It is not legal advice and does not replace review by agency legal counsel, privacy.</a:t>
+            </a:r>
+            <a:endParaRPr lang="en-US" sz="1380" dirty="0"/>
+          </a:p>
+          <a:p>
+            <a:r>
+              <a:rPr lang="en-US" sz="1380" dirty="0">
+                <a:solidFill>
+                  <a:srgbClr val="17364A"/>
+                </a:solidFill>
+                <a:latin typeface="Aptos" pitchFamily="34" charset="0"/>
+                <a:ea typeface="Aptos" pitchFamily="34" charset="-122"/>
+                <a:cs typeface="Aptos" pitchFamily="34" charset="-120"/>
+              </a:rPr>
+              <a:t>Requirements may vary by state, locality, territory, Tribe, agency, funding source,.</a:t>
+            </a:r>
+            <a:endParaRPr lang="en-US" sz="1380" dirty="0"/>
+          </a:p>
+          <a:p>
+            <a:r>
+              <a:rPr lang="en-US" sz="1380" dirty="0">
+                <a:solidFill>
+                  <a:srgbClr val="17364A"/>
+                </a:solidFill>
+                <a:latin typeface="Aptos" pitchFamily="34" charset="0"/>
+                <a:ea typeface="Aptos" pitchFamily="34" charset="-122"/>
+                <a:cs typeface="Aptos" pitchFamily="34" charset="-120"/>
+              </a:rPr>
+              <a:t>Learners should use this module to identify the issues that require review and should.</a:t>
+            </a:r>
+            <a:endParaRPr lang="en-US" sz="1380" dirty="0"/>
+          </a:p>
+        </p:txBody>
       </p:sp>
       <p:sp>
         <p:nvSpPr>
           <p:cNvPr id="16" name="Shape 14"/>
-          <p:cNvSpPr/>
-          <p:nvPr/>
-        </p:nvSpPr>
-        <p:spPr>
-          <a:xfrm>
-            <a:off x="9089136" y="3456432"/>
-            <a:ext cx="566928" cy="566928"/>
-          </a:xfrm>
-          <a:prstGeom prst="ellipse">
-            <a:avLst/>
-          </a:prstGeom>
-          <a:solidFill>
-            <a:srgbClr val="6A4CA3"/>
-          </a:solidFill>
-          <a:ln w="12700">
-            <a:solidFill>
-              <a:srgbClr val="6A4CA3"/>
-            </a:solidFill>
-            <a:prstDash val="solid"/>
-          </a:ln>
-        </p:spPr>
-      </p:sp>
-      <p:sp>
-        <p:nvSpPr>
-          <p:cNvPr id="17" name="Shape 15"/>
-          <p:cNvSpPr/>
-          <p:nvPr/>
-        </p:nvSpPr>
-        <p:spPr>
-          <a:xfrm>
-            <a:off x="8385048" y="3419856"/>
-            <a:ext cx="1975104" cy="0"/>
-          </a:xfrm>
-          <a:prstGeom prst="line">
-            <a:avLst/>
-          </a:prstGeom>
-          <a:noFill/>
-          <a:ln w="25400">
-            <a:solidFill>
-              <a:srgbClr val="8ABBD8"/>
-            </a:solidFill>
-            <a:prstDash val="solid"/>
-          </a:ln>
-        </p:spPr>
-      </p:sp>
-      <p:sp>
-        <p:nvSpPr>
-          <p:cNvPr id="18" name="Shape 16"/>
-          <p:cNvSpPr/>
-          <p:nvPr/>
-        </p:nvSpPr>
-        <p:spPr>
-          <a:xfrm>
-            <a:off x="8202168" y="3630168"/>
-            <a:ext cx="1170432" cy="118872"/>
-          </a:xfrm>
-          <a:prstGeom prst="line">
-            <a:avLst/>
-          </a:prstGeom>
-          <a:noFill/>
-          <a:ln w="25400">
-            <a:solidFill>
-              <a:srgbClr val="8ABBD8"/>
-            </a:solidFill>
-            <a:prstDash val="solid"/>
-          </a:ln>
-        </p:spPr>
-      </p:sp>
-      <p:sp>
-        <p:nvSpPr>
-          <p:cNvPr id="19" name="Shape 17"/>
-          <p:cNvSpPr/>
-          <p:nvPr/>
-        </p:nvSpPr>
-        <p:spPr>
-          <a:xfrm>
-            <a:off x="10543032" y="3630168"/>
-            <a:ext cx="-1170432" cy="118872"/>
-          </a:xfrm>
-          <a:prstGeom prst="line">
-            <a:avLst/>
-          </a:prstGeom>
-          <a:noFill/>
-          <a:ln w="25400">
-            <a:solidFill>
-              <a:srgbClr val="8ABBD8"/>
-            </a:solidFill>
-            <a:prstDash val="solid"/>
-          </a:ln>
-        </p:spPr>
-      </p:sp>
-      <p:sp>
-        <p:nvSpPr>
-          <p:cNvPr id="20" name="Text 18"/>
-          <p:cNvSpPr/>
-          <p:nvPr/>
-        </p:nvSpPr>
-        <p:spPr>
-          <a:xfrm>
-            <a:off x="7863840" y="4069080"/>
-            <a:ext cx="3017520" cy="164592"/>
-          </a:xfrm>
-          <a:prstGeom prst="rect">
-            <a:avLst/>
-          </a:prstGeom>
-          <a:noFill/>
-          <a:ln/>
-        </p:spPr>
-        <p:txBody>
-          <a:bodyPr wrap="square" lIns="0" tIns="0" rIns="0" bIns="0" rtlCol="0" anchor="ctr"/>
-          <a:lstStyle/>
-          <a:p>
-            <a:pPr algn="ctr" indent="0" marL="0">
-              <a:buNone/>
-            </a:pPr>
-            <a:r>
-              <a:rPr lang="en-US" sz="900" b="1" dirty="0">
-                <a:solidFill>
-                  <a:srgbClr val="003A63"/>
-                </a:solidFill>
-                <a:latin typeface="Aptos" pitchFamily="34" charset="0"/>
-                <a:ea typeface="Aptos" pitchFamily="34" charset="-122"/>
-                <a:cs typeface="Aptos" pitchFamily="34" charset="-120"/>
-              </a:rPr>
-              <a:t>Decision rights</a:t>
-            </a:r>
-            <a:endParaRPr lang="en-US" sz="900" dirty="0"/>
-          </a:p>
-        </p:txBody>
-      </p:sp>
-      <p:sp>
-        <p:nvSpPr>
-          <p:cNvPr id="21" name="Shape 19"/>
           <p:cNvSpPr/>
           <p:nvPr/>
         </p:nvSpPr>
@@ -17905,7 +17168,7 @@
       </p:sp>
       <p:sp>
         <p:nvSpPr>
-          <p:cNvPr id="22" name="Text 20"/>
+          <p:cNvPr id="17" name="Text 15"/>
           <p:cNvSpPr/>
           <p:nvPr/>
         </p:nvSpPr>
@@ -17944,7 +17207,7 @@
       </p:sp>
       <p:sp>
         <p:nvSpPr>
-          <p:cNvPr id="23" name="Text 21"/>
+          <p:cNvPr id="18" name="Text 16"/>
           <p:cNvSpPr/>
           <p:nvPr/>
         </p:nvSpPr>
@@ -18452,13 +17715,11 @@
             </a:avLst>
           </a:prstGeom>
           <a:solidFill>
-            <a:srgbClr val="FFFFFF">
-              <a:alpha val="88000"/>
-            </a:srgbClr>
+            <a:srgbClr val="FFFFFF"/>
           </a:solidFill>
           <a:ln w="12700">
             <a:solidFill>
-              <a:srgbClr val="D6E8F2"/>
+              <a:srgbClr val="B9D7E6"/>
             </a:solidFill>
             <a:prstDash val="solid"/>
           </a:ln>
@@ -18466,26 +17727,42 @@
       </p:sp>
       <p:sp>
         <p:nvSpPr>
-          <p:cNvPr id="14" name="Shape 12"/>
-          <p:cNvSpPr/>
-          <p:nvPr/>
-        </p:nvSpPr>
-        <p:spPr>
-          <a:xfrm>
-            <a:off x="8046720" y="3108960"/>
-            <a:ext cx="2651760" cy="896112"/>
-          </a:xfrm>
-          <a:prstGeom prst="arc">
-            <a:avLst/>
-          </a:prstGeom>
-          <a:noFill/>
-          <a:ln w="25400">
-            <a:solidFill>
-              <a:srgbClr val="0068B7"/>
-            </a:solidFill>
-            <a:prstDash val="solid"/>
-          </a:ln>
-        </p:spPr>
+          <p:cNvPr id="14" name="Text 12"/>
+          <p:cNvSpPr/>
+          <p:nvPr/>
+        </p:nvSpPr>
+        <p:spPr>
+          <a:xfrm>
+            <a:off x="7799832" y="2935224"/>
+            <a:ext cx="3145536" cy="256032"/>
+          </a:xfrm>
+          <a:prstGeom prst="rect">
+            <a:avLst/>
+          </a:prstGeom>
+          <a:noFill/>
+          <a:ln/>
+        </p:spPr>
+        <p:txBody>
+          <a:bodyPr wrap="square" lIns="0" tIns="0" rIns="0" bIns="0" rtlCol="0" anchor="ctr"/>
+          <a:lstStyle/>
+          <a:p>
+            <a:pPr indent="0" marL="0">
+              <a:buNone/>
+            </a:pPr>
+            <a:r>
+              <a:rPr lang="en-US" sz="1300" b="1" dirty="0">
+                <a:solidFill>
+                  <a:srgbClr val="0068B7"/>
+                </a:solidFill>
+                <a:latin typeface="Aptos" pitchFamily="34" charset="0"/>
+                <a:ea typeface="Aptos" pitchFamily="34" charset="-122"/>
+                <a:cs typeface="Aptos" pitchFamily="34" charset="-120"/>
+              </a:rPr>
+              <a:t>Concept checkpoints</a:t>
+            </a:r>
+            <a:endParaRPr lang="en-US" sz="1300" dirty="0"/>
+          </a:p>
+        </p:txBody>
       </p:sp>
       <p:sp>
         <p:nvSpPr>
@@ -18495,102 +17772,67 @@
         </p:nvSpPr>
         <p:spPr>
           <a:xfrm>
-            <a:off x="7909560" y="3099816"/>
-            <a:ext cx="2926080" cy="256032"/>
-          </a:xfrm>
-          <a:prstGeom prst="rect">
-            <a:avLst/>
-          </a:prstGeom>
-          <a:noFill/>
-          <a:ln/>
-        </p:spPr>
-        <p:txBody>
-          <a:bodyPr wrap="square" lIns="0" tIns="0" rIns="0" bIns="0" rtlCol="0" anchor="ctr"/>
-          <a:lstStyle/>
-          <a:p>
-            <a:pPr algn="ctr" indent="0" marL="0">
-              <a:buNone/>
-            </a:pPr>
-            <a:r>
-              <a:rPr lang="en-US" sz="1500" b="1" dirty="0">
-                <a:solidFill>
-                  <a:srgbClr val="003A63"/>
-                </a:solidFill>
-                <a:latin typeface="Aptos" pitchFamily="34" charset="0"/>
-                <a:ea typeface="Aptos" pitchFamily="34" charset="-122"/>
-                <a:cs typeface="Aptos" pitchFamily="34" charset="-120"/>
-              </a:rPr>
-              <a:t>Risk</a:t>
-            </a:r>
-            <a:endParaRPr lang="en-US" sz="1500" dirty="0"/>
+            <a:off x="7818120" y="3300984"/>
+            <a:ext cx="3090672" cy="877824"/>
+          </a:xfrm>
+          <a:prstGeom prst="rect">
+            <a:avLst/>
+          </a:prstGeom>
+          <a:noFill/>
+          <a:ln/>
+        </p:spPr>
+        <p:txBody>
+          <a:bodyPr wrap="square" lIns="254" tIns="254" rIns="254" bIns="254" rtlCol="0" anchor="t">
+            <a:normAutofit/>
+          </a:bodyPr>
+          <a:lstStyle/>
+          <a:p>
+            <a:r>
+              <a:rPr lang="en-US" sz="1380" dirty="0">
+                <a:solidFill>
+                  <a:srgbClr val="17364A"/>
+                </a:solidFill>
+                <a:latin typeface="Aptos" pitchFamily="34" charset="0"/>
+                <a:ea typeface="Aptos" pitchFamily="34" charset="-122"/>
+                <a:cs typeface="Aptos" pitchFamily="34" charset="-120"/>
+              </a:rPr>
+              <a:t>AI security matters because public health AI tools may process sensitive records, internal.</a:t>
+            </a:r>
+            <a:endParaRPr lang="en-US" sz="1380" dirty="0"/>
+          </a:p>
+          <a:p>
+            <a:r>
+              <a:rPr lang="en-US" sz="1380" dirty="0">
+                <a:solidFill>
+                  <a:srgbClr val="17364A"/>
+                </a:solidFill>
+                <a:latin typeface="Aptos" pitchFamily="34" charset="0"/>
+                <a:ea typeface="Aptos" pitchFamily="34" charset="-122"/>
+                <a:cs typeface="Aptos" pitchFamily="34" charset="-120"/>
+              </a:rPr>
+              <a:t>The risks increase when AI tools are connected to email, calendars, case systems, data.</a:t>
+            </a:r>
+            <a:endParaRPr lang="en-US" sz="1380" dirty="0"/>
+          </a:p>
+          <a:p>
+            <a:r>
+              <a:rPr lang="en-US" sz="1380" dirty="0">
+                <a:solidFill>
+                  <a:srgbClr val="17364A"/>
+                </a:solidFill>
+                <a:latin typeface="Aptos" pitchFamily="34" charset="0"/>
+                <a:ea typeface="Aptos" pitchFamily="34" charset="-122"/>
+                <a:cs typeface="Aptos" pitchFamily="34" charset="-120"/>
+              </a:rPr>
+              <a:t>A security weakness can become a privacy breach, operational disruption, public trust.</a:t>
+            </a:r>
+            <a:endParaRPr lang="en-US" sz="1380" dirty="0"/>
           </a:p>
         </p:txBody>
       </p:sp>
       <p:sp>
         <p:nvSpPr>
           <p:cNvPr id="16" name="Shape 14"/>
-          <p:cNvSpPr/>
-          <p:nvPr/>
-        </p:nvSpPr>
-        <p:spPr>
-          <a:xfrm>
-            <a:off x="8366760" y="3639312"/>
-            <a:ext cx="2011680" cy="0"/>
-          </a:xfrm>
-          <a:prstGeom prst="line">
-            <a:avLst/>
-          </a:prstGeom>
-          <a:noFill/>
-          <a:ln w="63500">
-            <a:solidFill>
-              <a:srgbClr val="2F8A28"/>
-            </a:solidFill>
-            <a:prstDash val="solid"/>
-          </a:ln>
-        </p:spPr>
-      </p:sp>
-      <p:sp>
-        <p:nvSpPr>
-          <p:cNvPr id="17" name="Text 15"/>
-          <p:cNvSpPr/>
-          <p:nvPr/>
-        </p:nvSpPr>
-        <p:spPr>
-          <a:xfrm>
-            <a:off x="7909560" y="3849624"/>
-            <a:ext cx="2926080" cy="164592"/>
-          </a:xfrm>
-          <a:prstGeom prst="rect">
-            <a:avLst/>
-          </a:prstGeom>
-          <a:noFill/>
-          <a:ln/>
-        </p:spPr>
-        <p:txBody>
-          <a:bodyPr wrap="square" lIns="0" tIns="0" rIns="0" bIns="0" rtlCol="0" anchor="ctr"/>
-          <a:lstStyle/>
-          <a:p>
-            <a:pPr algn="ctr" indent="0" marL="0">
-              <a:buNone/>
-            </a:pPr>
-            <a:r>
-              <a:rPr lang="en-US" sz="900" dirty="0">
-                <a:solidFill>
-                  <a:srgbClr val="003A63"/>
-                </a:solidFill>
-                <a:latin typeface="Aptos" pitchFamily="34" charset="0"/>
-                <a:ea typeface="Aptos" pitchFamily="34" charset="-122"/>
-                <a:cs typeface="Aptos" pitchFamily="34" charset="-120"/>
-              </a:rPr>
-              <a:t>Human review</a:t>
-            </a:r>
-            <a:endParaRPr lang="en-US" sz="900" dirty="0"/>
-          </a:p>
-        </p:txBody>
-      </p:sp>
-      <p:sp>
-        <p:nvSpPr>
-          <p:cNvPr id="18" name="Shape 16"/>
           <p:cNvSpPr/>
           <p:nvPr/>
         </p:nvSpPr>
@@ -18617,7 +17859,7 @@
       </p:sp>
       <p:sp>
         <p:nvSpPr>
-          <p:cNvPr id="19" name="Text 17"/>
+          <p:cNvPr id="17" name="Text 15"/>
           <p:cNvSpPr/>
           <p:nvPr/>
         </p:nvSpPr>
@@ -18656,7 +17898,7 @@
       </p:sp>
       <p:sp>
         <p:nvSpPr>
-          <p:cNvPr id="20" name="Text 18"/>
+          <p:cNvPr id="18" name="Text 16"/>
           <p:cNvSpPr/>
           <p:nvPr/>
         </p:nvSpPr>

--- a/downloads/presentations/modules/gov-300.pptx
+++ b/downloads/presentations/modules/gov-300.pptx
@@ -3445,49 +3445,58 @@
           <a:ln/>
         </p:spPr>
         <p:txBody>
-          <a:bodyPr wrap="square" lIns="635" tIns="635" rIns="635" bIns="635" rtlCol="0" anchor="t">
+          <a:bodyPr wrap="square" lIns="1016" tIns="1016" rIns="1016" bIns="1016" rtlCol="0" anchor="t">
             <a:normAutofit/>
           </a:bodyPr>
           <a:lstStyle/>
           <a:p>
+            <a:pPr indent="0" marL="0">
+              <a:buNone/>
+            </a:pPr>
             <a:r>
               <a:rPr lang="en-US" sz="2100" dirty="0">
                 <a:solidFill>
-                  <a:srgbClr val="17364A"/>
-                </a:solidFill>
-                <a:latin typeface="Aptos" pitchFamily="34" charset="0"/>
-                <a:ea typeface="Aptos" pitchFamily="34" charset="-122"/>
-                <a:cs typeface="Aptos" pitchFamily="34" charset="-120"/>
-              </a:rPr>
-              <a:t>A public health program may use an AI assistant to summarize uploaded partner reports.</a:t>
+                  <a:srgbClr val="003A63"/>
+                </a:solidFill>
+                <a:latin typeface="Aptos" pitchFamily="34" charset="0"/>
+                <a:ea typeface="Aptos" pitchFamily="34" charset="-122"/>
+                <a:cs typeface="Aptos" pitchFamily="34" charset="-120"/>
+              </a:rPr>
+              <a:t>• A public health program may use an AI assistant to summarize uploaded partner reports.</a:t>
             </a:r>
             <a:endParaRPr lang="en-US" sz="2100" dirty="0"/>
           </a:p>
           <a:p>
+            <a:pPr indent="0" marL="0">
+              <a:buNone/>
+            </a:pPr>
             <a:r>
               <a:rPr lang="en-US" sz="2100" dirty="0">
                 <a:solidFill>
-                  <a:srgbClr val="17364A"/>
-                </a:solidFill>
-                <a:latin typeface="Aptos" pitchFamily="34" charset="0"/>
-                <a:ea typeface="Aptos" pitchFamily="34" charset="-122"/>
-                <a:cs typeface="Aptos" pitchFamily="34" charset="-120"/>
-              </a:rPr>
-              <a:t>One report could contain hidden or visible instructions telling the AI to ignore prior rules and reveal.</a:t>
+                  <a:srgbClr val="003A63"/>
+                </a:solidFill>
+                <a:latin typeface="Aptos" pitchFamily="34" charset="0"/>
+                <a:ea typeface="Aptos" pitchFamily="34" charset="-122"/>
+                <a:cs typeface="Aptos" pitchFamily="34" charset="-120"/>
+              </a:rPr>
+              <a:t>• One report could contain hidden or visible instructions telling the AI to ignore prior rules.</a:t>
             </a:r>
             <a:endParaRPr lang="en-US" sz="2100" dirty="0"/>
           </a:p>
           <a:p>
+            <a:pPr indent="0" marL="0">
+              <a:buNone/>
+            </a:pPr>
             <a:r>
               <a:rPr lang="en-US" sz="2100" dirty="0">
                 <a:solidFill>
-                  <a:srgbClr val="17364A"/>
-                </a:solidFill>
-                <a:latin typeface="Aptos" pitchFamily="34" charset="0"/>
-                <a:ea typeface="Aptos" pitchFamily="34" charset="-122"/>
-                <a:cs typeface="Aptos" pitchFamily="34" charset="-120"/>
-              </a:rPr>
-              <a:t>If the assistant treats the report content as instructions rather than data, it may produce unsafe.</a:t>
+                  <a:srgbClr val="003A63"/>
+                </a:solidFill>
+                <a:latin typeface="Aptos" pitchFamily="34" charset="0"/>
+                <a:ea typeface="Aptos" pitchFamily="34" charset="-122"/>
+                <a:cs typeface="Aptos" pitchFamily="34" charset="-120"/>
+              </a:rPr>
+              <a:t>• If the assistant treats the report content as instructions rather than data, it may produce.</a:t>
             </a:r>
             <a:endParaRPr lang="en-US" sz="2100" dirty="0"/>
           </a:p>
@@ -3567,17 +3576,17 @@
         </p:nvSpPr>
         <p:spPr>
           <a:xfrm>
-            <a:off x="7799832" y="1828800"/>
-            <a:ext cx="3145536" cy="685800"/>
-          </a:xfrm>
-          <a:prstGeom prst="rect">
-            <a:avLst/>
-          </a:prstGeom>
-          <a:noFill/>
-          <a:ln/>
-        </p:spPr>
-        <p:txBody>
-          <a:bodyPr wrap="square" lIns="0" tIns="0" rIns="0" bIns="0" rtlCol="0" anchor="t">
+            <a:off x="7799832" y="1801368"/>
+            <a:ext cx="3145536" cy="758952"/>
+          </a:xfrm>
+          <a:prstGeom prst="rect">
+            <a:avLst/>
+          </a:prstGeom>
+          <a:noFill/>
+          <a:ln/>
+        </p:spPr>
+        <p:txBody>
+          <a:bodyPr wrap="square" lIns="254" tIns="254" rIns="254" bIns="254" rtlCol="0" anchor="t">
             <a:normAutofit/>
           </a:bodyPr>
           <a:lstStyle/>
@@ -3586,7 +3595,7 @@
               <a:buNone/>
             </a:pPr>
             <a:r>
-              <a:rPr lang="en-US" sz="1550" dirty="0">
+              <a:rPr lang="en-US" sz="1320" dirty="0">
                 <a:solidFill>
                   <a:srgbClr val="17364A"/>
                 </a:solidFill>
@@ -3596,7 +3605,7 @@
               </a:rPr>
               <a:t>A public health program may use an AI assistant to summarize uploaded partner reports.</a:t>
             </a:r>
-            <a:endParaRPr lang="en-US" sz="1550" dirty="0"/>
+            <a:endParaRPr lang="en-US" sz="1320" dirty="0"/>
           </a:p>
         </p:txBody>
       </p:sp>
@@ -3684,13 +3693,16 @@
           <a:ln/>
         </p:spPr>
         <p:txBody>
-          <a:bodyPr wrap="square" lIns="254" tIns="254" rIns="254" bIns="254" rtlCol="0" anchor="t">
+          <a:bodyPr wrap="square" lIns="508" tIns="508" rIns="508" bIns="508" rtlCol="0" anchor="t">
             <a:normAutofit/>
           </a:bodyPr>
           <a:lstStyle/>
           <a:p>
-            <a:r>
-              <a:rPr lang="en-US" sz="1380" dirty="0">
+            <a:pPr indent="0" marL="0">
+              <a:buNone/>
+            </a:pPr>
+            <a:r>
+              <a:rPr lang="en-US" sz="1220" dirty="0">
                 <a:solidFill>
                   <a:srgbClr val="17364A"/>
                 </a:solidFill>
@@ -3698,13 +3710,16 @@
                 <a:ea typeface="Aptos" pitchFamily="34" charset="-122"/>
                 <a:cs typeface="Aptos" pitchFamily="34" charset="-120"/>
               </a:rPr>
-              <a:t>One report could contain hidden or visible instructions telling the AI to ignore prior.</a:t>
-            </a:r>
-            <a:endParaRPr lang="en-US" sz="1380" dirty="0"/>
-          </a:p>
-          <a:p>
-            <a:r>
-              <a:rPr lang="en-US" sz="1380" dirty="0">
+              <a:t>One report could contain hidden or visible instructions telling.</a:t>
+            </a:r>
+            <a:endParaRPr lang="en-US" sz="1220" dirty="0"/>
+          </a:p>
+          <a:p>
+            <a:pPr indent="0" marL="0">
+              <a:buNone/>
+            </a:pPr>
+            <a:r>
+              <a:rPr lang="en-US" sz="1220" dirty="0">
                 <a:solidFill>
                   <a:srgbClr val="17364A"/>
                 </a:solidFill>
@@ -3712,13 +3727,16 @@
                 <a:ea typeface="Aptos" pitchFamily="34" charset="-122"/>
                 <a:cs typeface="Aptos" pitchFamily="34" charset="-120"/>
               </a:rPr>
-              <a:t>If the assistant treats the report content as instructions rather than data, it may.</a:t>
-            </a:r>
-            <a:endParaRPr lang="en-US" sz="1380" dirty="0"/>
-          </a:p>
-          <a:p>
-            <a:r>
-              <a:rPr lang="en-US" sz="1380" dirty="0">
+              <a:t>If the assistant treats the report content as instructions rather.</a:t>
+            </a:r>
+            <a:endParaRPr lang="en-US" sz="1220" dirty="0"/>
+          </a:p>
+          <a:p>
+            <a:pPr indent="0" marL="0">
+              <a:buNone/>
+            </a:pPr>
+            <a:r>
+              <a:rPr lang="en-US" sz="1220" dirty="0">
                 <a:solidFill>
                   <a:srgbClr val="17364A"/>
                 </a:solidFill>
@@ -3726,9 +3744,9 @@
                 <a:ea typeface="Aptos" pitchFamily="34" charset="-122"/>
                 <a:cs typeface="Aptos" pitchFamily="34" charset="-120"/>
               </a:rPr>
-              <a:t>A secure workflow would use an approved tool, restrict the assistant’s access, treat.</a:t>
-            </a:r>
-            <a:endParaRPr lang="en-US" sz="1380" dirty="0"/>
+              <a:t>A secure workflow would use an approved tool, restrict the.</a:t>
+            </a:r>
+            <a:endParaRPr lang="en-US" sz="1220" dirty="0"/>
           </a:p>
         </p:txBody>
       </p:sp>
@@ -3806,17 +3824,17 @@
         </p:nvSpPr>
         <p:spPr>
           <a:xfrm>
-            <a:off x="7799832" y="5001768"/>
-            <a:ext cx="3145536" cy="502920"/>
-          </a:xfrm>
-          <a:prstGeom prst="rect">
-            <a:avLst/>
-          </a:prstGeom>
-          <a:noFill/>
-          <a:ln/>
-        </p:spPr>
-        <p:txBody>
-          <a:bodyPr wrap="square" lIns="0" tIns="0" rIns="0" bIns="0" rtlCol="0" anchor="t">
+            <a:off x="7799832" y="4974336"/>
+            <a:ext cx="3145536" cy="576072"/>
+          </a:xfrm>
+          <a:prstGeom prst="rect">
+            <a:avLst/>
+          </a:prstGeom>
+          <a:noFill/>
+          <a:ln/>
+        </p:spPr>
+        <p:txBody>
+          <a:bodyPr wrap="square" lIns="254" tIns="254" rIns="254" bIns="254" rtlCol="0" anchor="t">
             <a:normAutofit/>
           </a:bodyPr>
           <a:lstStyle/>
@@ -3825,7 +3843,7 @@
               <a:buNone/>
             </a:pPr>
             <a:r>
-              <a:rPr lang="en-US" sz="1550" dirty="0">
+              <a:rPr lang="en-US" sz="1320" dirty="0">
                 <a:solidFill>
                   <a:srgbClr val="17364A"/>
                 </a:solidFill>
@@ -3833,9 +3851,9 @@
                 <a:ea typeface="Aptos" pitchFamily="34" charset="-122"/>
                 <a:cs typeface="Aptos" pitchFamily="34" charset="-120"/>
               </a:rPr>
-              <a:t>Identify what could go wrong, who could be affected, what safeguards are needed, and what evidence should be reviewed before use expands.</a:t>
-            </a:r>
-            <a:endParaRPr lang="en-US" sz="1550" dirty="0"/>
+              <a:t>Identify what could go wrong, who could be affected, what safeguards are needed, and what evidence should be reviewed.</a:t>
+            </a:r>
+            <a:endParaRPr lang="en-US" sz="1320" dirty="0"/>
           </a:p>
         </p:txBody>
       </p:sp>
@@ -4136,49 +4154,58 @@
           <a:ln/>
         </p:spPr>
         <p:txBody>
-          <a:bodyPr wrap="square" lIns="635" tIns="635" rIns="635" bIns="635" rtlCol="0" anchor="t">
+          <a:bodyPr wrap="square" lIns="1016" tIns="1016" rIns="1016" bIns="1016" rtlCol="0" anchor="t">
             <a:normAutofit/>
           </a:bodyPr>
           <a:lstStyle/>
           <a:p>
+            <a:pPr indent="0" marL="0">
+              <a:buNone/>
+            </a:pPr>
             <a:r>
               <a:rPr lang="en-US" sz="2100" dirty="0">
                 <a:solidFill>
-                  <a:srgbClr val="17364A"/>
-                </a:solidFill>
-                <a:latin typeface="Aptos" pitchFamily="34" charset="0"/>
-                <a:ea typeface="Aptos" pitchFamily="34" charset="-122"/>
-                <a:cs typeface="Aptos" pitchFamily="34" charset="-120"/>
-              </a:rPr>
-              <a:t>AI security begins with use-case classification.</a:t>
+                  <a:srgbClr val="003A63"/>
+                </a:solidFill>
+                <a:latin typeface="Aptos" pitchFamily="34" charset="0"/>
+                <a:ea typeface="Aptos" pitchFamily="34" charset="-122"/>
+                <a:cs typeface="Aptos" pitchFamily="34" charset="-120"/>
+              </a:rPr>
+              <a:t>• AI security begins with use-case classification.</a:t>
             </a:r>
             <a:endParaRPr lang="en-US" sz="2100" dirty="0"/>
           </a:p>
           <a:p>
+            <a:pPr indent="0" marL="0">
+              <a:buNone/>
+            </a:pPr>
             <a:r>
               <a:rPr lang="en-US" sz="2100" dirty="0">
                 <a:solidFill>
-                  <a:srgbClr val="17364A"/>
-                </a:solidFill>
-                <a:latin typeface="Aptos" pitchFamily="34" charset="0"/>
-                <a:ea typeface="Aptos" pitchFamily="34" charset="-122"/>
-                <a:cs typeface="Aptos" pitchFamily="34" charset="-120"/>
-              </a:rPr>
-              <a:t>A low-risk training exercise using public documents requires different controls than a tool connected.</a:t>
+                  <a:srgbClr val="003A63"/>
+                </a:solidFill>
+                <a:latin typeface="Aptos" pitchFamily="34" charset="0"/>
+                <a:ea typeface="Aptos" pitchFamily="34" charset="-122"/>
+                <a:cs typeface="Aptos" pitchFamily="34" charset="-120"/>
+              </a:rPr>
+              <a:t>• A low-risk training exercise using public documents requires different controls than a tool.</a:t>
             </a:r>
             <a:endParaRPr lang="en-US" sz="2100" dirty="0"/>
           </a:p>
           <a:p>
+            <a:pPr indent="0" marL="0">
+              <a:buNone/>
+            </a:pPr>
             <a:r>
               <a:rPr lang="en-US" sz="2100" dirty="0">
                 <a:solidFill>
-                  <a:srgbClr val="17364A"/>
-                </a:solidFill>
-                <a:latin typeface="Aptos" pitchFamily="34" charset="0"/>
-                <a:ea typeface="Aptos" pitchFamily="34" charset="-122"/>
-                <a:cs typeface="Aptos" pitchFamily="34" charset="-120"/>
-              </a:rPr>
-              <a:t>Agencies should classify AI uses by data sensitivity, system access, autonomy, public-facing impact,.</a:t>
+                  <a:srgbClr val="003A63"/>
+                </a:solidFill>
+                <a:latin typeface="Aptos" pitchFamily="34" charset="0"/>
+                <a:ea typeface="Aptos" pitchFamily="34" charset="-122"/>
+                <a:cs typeface="Aptos" pitchFamily="34" charset="-120"/>
+              </a:rPr>
+              <a:t>• Agencies should classify AI uses by data sensitivity, system access, autonomy, public-facing.</a:t>
             </a:r>
             <a:endParaRPr lang="en-US" sz="2100" dirty="0"/>
           </a:p>
@@ -4258,17 +4285,17 @@
         </p:nvSpPr>
         <p:spPr>
           <a:xfrm>
-            <a:off x="7799832" y="1828800"/>
-            <a:ext cx="3145536" cy="685800"/>
-          </a:xfrm>
-          <a:prstGeom prst="rect">
-            <a:avLst/>
-          </a:prstGeom>
-          <a:noFill/>
-          <a:ln/>
-        </p:spPr>
-        <p:txBody>
-          <a:bodyPr wrap="square" lIns="0" tIns="0" rIns="0" bIns="0" rtlCol="0" anchor="t">
+            <a:off x="7799832" y="1801368"/>
+            <a:ext cx="3145536" cy="758952"/>
+          </a:xfrm>
+          <a:prstGeom prst="rect">
+            <a:avLst/>
+          </a:prstGeom>
+          <a:noFill/>
+          <a:ln/>
+        </p:spPr>
+        <p:txBody>
+          <a:bodyPr wrap="square" lIns="254" tIns="254" rIns="254" bIns="254" rtlCol="0" anchor="t">
             <a:normAutofit/>
           </a:bodyPr>
           <a:lstStyle/>
@@ -4277,7 +4304,7 @@
               <a:buNone/>
             </a:pPr>
             <a:r>
-              <a:rPr lang="en-US" sz="1550" dirty="0">
+              <a:rPr lang="en-US" sz="1320" dirty="0">
                 <a:solidFill>
                   <a:srgbClr val="17364A"/>
                 </a:solidFill>
@@ -4287,7 +4314,7 @@
               </a:rPr>
               <a:t>AI security begins with use-case classification.</a:t>
             </a:r>
-            <a:endParaRPr lang="en-US" sz="1550" dirty="0"/>
+            <a:endParaRPr lang="en-US" sz="1320" dirty="0"/>
           </a:p>
         </p:txBody>
       </p:sp>
@@ -4375,13 +4402,16 @@
           <a:ln/>
         </p:spPr>
         <p:txBody>
-          <a:bodyPr wrap="square" lIns="254" tIns="254" rIns="254" bIns="254" rtlCol="0" anchor="t">
+          <a:bodyPr wrap="square" lIns="508" tIns="508" rIns="508" bIns="508" rtlCol="0" anchor="t">
             <a:normAutofit/>
           </a:bodyPr>
           <a:lstStyle/>
           <a:p>
-            <a:r>
-              <a:rPr lang="en-US" sz="1380" dirty="0">
+            <a:pPr indent="0" marL="0">
+              <a:buNone/>
+            </a:pPr>
+            <a:r>
+              <a:rPr lang="en-US" sz="1220" dirty="0">
                 <a:solidFill>
                   <a:srgbClr val="17364A"/>
                 </a:solidFill>
@@ -4389,13 +4419,16 @@
                 <a:ea typeface="Aptos" pitchFamily="34" charset="-122"/>
                 <a:cs typeface="Aptos" pitchFamily="34" charset="-120"/>
               </a:rPr>
-              <a:t>A low-risk training exercise using public documents requires different controls than a.</a:t>
-            </a:r>
-            <a:endParaRPr lang="en-US" sz="1380" dirty="0"/>
-          </a:p>
-          <a:p>
-            <a:r>
-              <a:rPr lang="en-US" sz="1380" dirty="0">
+              <a:t>A low-risk training exercise using public documents requires.</a:t>
+            </a:r>
+            <a:endParaRPr lang="en-US" sz="1220" dirty="0"/>
+          </a:p>
+          <a:p>
+            <a:pPr indent="0" marL="0">
+              <a:buNone/>
+            </a:pPr>
+            <a:r>
+              <a:rPr lang="en-US" sz="1220" dirty="0">
                 <a:solidFill>
                   <a:srgbClr val="17364A"/>
                 </a:solidFill>
@@ -4403,13 +4436,16 @@
                 <a:ea typeface="Aptos" pitchFamily="34" charset="-122"/>
                 <a:cs typeface="Aptos" pitchFamily="34" charset="-120"/>
               </a:rPr>
-              <a:t>Agencies should classify AI uses by data sensitivity, system access, autonomy,.</a:t>
-            </a:r>
-            <a:endParaRPr lang="en-US" sz="1380" dirty="0"/>
-          </a:p>
-          <a:p>
-            <a:r>
-              <a:rPr lang="en-US" sz="1380" dirty="0">
+              <a:t>Agencies should classify AI uses by data sensitivity, system.</a:t>
+            </a:r>
+            <a:endParaRPr lang="en-US" sz="1220" dirty="0"/>
+          </a:p>
+          <a:p>
+            <a:pPr indent="0" marL="0">
+              <a:buNone/>
+            </a:pPr>
+            <a:r>
+              <a:rPr lang="en-US" sz="1220" dirty="0">
                 <a:solidFill>
                   <a:srgbClr val="17364A"/>
                 </a:solidFill>
@@ -4419,7 +4455,7 @@
               </a:rPr>
               <a:t>Access control is central.</a:t>
             </a:r>
-            <a:endParaRPr lang="en-US" sz="1380" dirty="0"/>
+            <a:endParaRPr lang="en-US" sz="1220" dirty="0"/>
           </a:p>
         </p:txBody>
       </p:sp>
@@ -4497,17 +4533,17 @@
         </p:nvSpPr>
         <p:spPr>
           <a:xfrm>
-            <a:off x="7799832" y="5001768"/>
-            <a:ext cx="3145536" cy="502920"/>
-          </a:xfrm>
-          <a:prstGeom prst="rect">
-            <a:avLst/>
-          </a:prstGeom>
-          <a:noFill/>
-          <a:ln/>
-        </p:spPr>
-        <p:txBody>
-          <a:bodyPr wrap="square" lIns="0" tIns="0" rIns="0" bIns="0" rtlCol="0" anchor="t">
+            <a:off x="7799832" y="4974336"/>
+            <a:ext cx="3145536" cy="576072"/>
+          </a:xfrm>
+          <a:prstGeom prst="rect">
+            <a:avLst/>
+          </a:prstGeom>
+          <a:noFill/>
+          <a:ln/>
+        </p:spPr>
+        <p:txBody>
+          <a:bodyPr wrap="square" lIns="254" tIns="254" rIns="254" bIns="254" rtlCol="0" anchor="t">
             <a:normAutofit/>
           </a:bodyPr>
           <a:lstStyle/>
@@ -4516,7 +4552,7 @@
               <a:buNone/>
             </a:pPr>
             <a:r>
-              <a:rPr lang="en-US" sz="1550" dirty="0">
+              <a:rPr lang="en-US" sz="1320" dirty="0">
                 <a:solidFill>
                   <a:srgbClr val="17364A"/>
                 </a:solidFill>
@@ -4524,9 +4560,9 @@
                 <a:ea typeface="Aptos" pitchFamily="34" charset="-122"/>
                 <a:cs typeface="Aptos" pitchFamily="34" charset="-120"/>
               </a:rPr>
-              <a:t>Identify what could go wrong, who could be affected, what safeguards are needed, and what evidence should be reviewed before use expands.</a:t>
-            </a:r>
-            <a:endParaRPr lang="en-US" sz="1550" dirty="0"/>
+              <a:t>Identify what could go wrong, who could be affected, what safeguards are needed, and what evidence should be reviewed.</a:t>
+            </a:r>
+            <a:endParaRPr lang="en-US" sz="1320" dirty="0"/>
           </a:p>
         </p:txBody>
       </p:sp>
@@ -4827,49 +4863,58 @@
           <a:ln/>
         </p:spPr>
         <p:txBody>
-          <a:bodyPr wrap="square" lIns="635" tIns="635" rIns="635" bIns="635" rtlCol="0" anchor="t">
+          <a:bodyPr wrap="square" lIns="1016" tIns="1016" rIns="1016" bIns="1016" rtlCol="0" anchor="t">
             <a:normAutofit/>
           </a:bodyPr>
           <a:lstStyle/>
           <a:p>
+            <a:pPr indent="0" marL="0">
+              <a:buNone/>
+            </a:pPr>
             <a:r>
               <a:rPr lang="en-US" sz="2100" dirty="0">
                 <a:solidFill>
-                  <a:srgbClr val="17364A"/>
-                </a:solidFill>
-                <a:latin typeface="Aptos" pitchFamily="34" charset="0"/>
-                <a:ea typeface="Aptos" pitchFamily="34" charset="-122"/>
-                <a:cs typeface="Aptos" pitchFamily="34" charset="-120"/>
-              </a:rPr>
-              <a:t>Output handling matters because AI outputs may be copied into reports, emails, code, dashboards, or.</a:t>
+                  <a:srgbClr val="003A63"/>
+                </a:solidFill>
+                <a:latin typeface="Aptos" pitchFamily="34" charset="0"/>
+                <a:ea typeface="Aptos" pitchFamily="34" charset="-122"/>
+                <a:cs typeface="Aptos" pitchFamily="34" charset="-120"/>
+              </a:rPr>
+              <a:t>• Output handling matters because AI outputs may be copied into reports, emails, code,.</a:t>
             </a:r>
             <a:endParaRPr lang="en-US" sz="2100" dirty="0"/>
           </a:p>
           <a:p>
+            <a:pPr indent="0" marL="0">
+              <a:buNone/>
+            </a:pPr>
             <a:r>
               <a:rPr lang="en-US" sz="2100" dirty="0">
                 <a:solidFill>
-                  <a:srgbClr val="17364A"/>
-                </a:solidFill>
-                <a:latin typeface="Aptos" pitchFamily="34" charset="0"/>
-                <a:ea typeface="Aptos" pitchFamily="34" charset="-122"/>
-                <a:cs typeface="Aptos" pitchFamily="34" charset="-120"/>
-              </a:rPr>
-              <a:t>Insecure output handling can lead to misinformation, broken code, malicious links, or inappropriate.</a:t>
+                  <a:srgbClr val="003A63"/>
+                </a:solidFill>
+                <a:latin typeface="Aptos" pitchFamily="34" charset="0"/>
+                <a:ea typeface="Aptos" pitchFamily="34" charset="-122"/>
+                <a:cs typeface="Aptos" pitchFamily="34" charset="-120"/>
+              </a:rPr>
+              <a:t>• Insecure output handling can lead to misinformation, broken code, malicious links, or.</a:t>
             </a:r>
             <a:endParaRPr lang="en-US" sz="2100" dirty="0"/>
           </a:p>
           <a:p>
+            <a:pPr indent="0" marL="0">
+              <a:buNone/>
+            </a:pPr>
             <a:r>
               <a:rPr lang="en-US" sz="2100" dirty="0">
                 <a:solidFill>
-                  <a:srgbClr val="17364A"/>
-                </a:solidFill>
-                <a:latin typeface="Aptos" pitchFamily="34" charset="0"/>
-                <a:ea typeface="Aptos" pitchFamily="34" charset="-122"/>
-                <a:cs typeface="Aptos" pitchFamily="34" charset="-120"/>
-              </a:rPr>
-              <a:t>Outputs should be validated before downstream use, especially when they affect systems, public.</a:t>
+                  <a:srgbClr val="003A63"/>
+                </a:solidFill>
+                <a:latin typeface="Aptos" pitchFamily="34" charset="0"/>
+                <a:ea typeface="Aptos" pitchFamily="34" charset="-122"/>
+                <a:cs typeface="Aptos" pitchFamily="34" charset="-120"/>
+              </a:rPr>
+              <a:t>• Outputs should be validated before downstream use, especially when they affect systems, public.</a:t>
             </a:r>
             <a:endParaRPr lang="en-US" sz="2100" dirty="0"/>
           </a:p>
@@ -4949,17 +4994,17 @@
         </p:nvSpPr>
         <p:spPr>
           <a:xfrm>
-            <a:off x="7799832" y="1828800"/>
-            <a:ext cx="3145536" cy="685800"/>
-          </a:xfrm>
-          <a:prstGeom prst="rect">
-            <a:avLst/>
-          </a:prstGeom>
-          <a:noFill/>
-          <a:ln/>
-        </p:spPr>
-        <p:txBody>
-          <a:bodyPr wrap="square" lIns="0" tIns="0" rIns="0" bIns="0" rtlCol="0" anchor="t">
+            <a:off x="7799832" y="1801368"/>
+            <a:ext cx="3145536" cy="758952"/>
+          </a:xfrm>
+          <a:prstGeom prst="rect">
+            <a:avLst/>
+          </a:prstGeom>
+          <a:noFill/>
+          <a:ln/>
+        </p:spPr>
+        <p:txBody>
+          <a:bodyPr wrap="square" lIns="254" tIns="254" rIns="254" bIns="254" rtlCol="0" anchor="t">
             <a:normAutofit/>
           </a:bodyPr>
           <a:lstStyle/>
@@ -4968,7 +5013,7 @@
               <a:buNone/>
             </a:pPr>
             <a:r>
-              <a:rPr lang="en-US" sz="1550" dirty="0">
+              <a:rPr lang="en-US" sz="1320" dirty="0">
                 <a:solidFill>
                   <a:srgbClr val="17364A"/>
                 </a:solidFill>
@@ -4978,7 +5023,7 @@
               </a:rPr>
               <a:t>Output handling matters because AI outputs may be copied into reports, emails, code, dashboards, or.</a:t>
             </a:r>
-            <a:endParaRPr lang="en-US" sz="1550" dirty="0"/>
+            <a:endParaRPr lang="en-US" sz="1320" dirty="0"/>
           </a:p>
         </p:txBody>
       </p:sp>
@@ -5066,13 +5111,16 @@
           <a:ln/>
         </p:spPr>
         <p:txBody>
-          <a:bodyPr wrap="square" lIns="254" tIns="254" rIns="254" bIns="254" rtlCol="0" anchor="t">
+          <a:bodyPr wrap="square" lIns="508" tIns="508" rIns="508" bIns="508" rtlCol="0" anchor="t">
             <a:normAutofit/>
           </a:bodyPr>
           <a:lstStyle/>
           <a:p>
-            <a:r>
-              <a:rPr lang="en-US" sz="1380" dirty="0">
+            <a:pPr indent="0" marL="0">
+              <a:buNone/>
+            </a:pPr>
+            <a:r>
+              <a:rPr lang="en-US" sz="1220" dirty="0">
                 <a:solidFill>
                   <a:srgbClr val="17364A"/>
                 </a:solidFill>
@@ -5080,13 +5128,16 @@
                 <a:ea typeface="Aptos" pitchFamily="34" charset="-122"/>
                 <a:cs typeface="Aptos" pitchFamily="34" charset="-120"/>
               </a:rPr>
-              <a:t>Output handling matters because AI outputs may be copied into reports, emails, code,.</a:t>
-            </a:r>
-            <a:endParaRPr lang="en-US" sz="1380" dirty="0"/>
-          </a:p>
-          <a:p>
-            <a:r>
-              <a:rPr lang="en-US" sz="1380" dirty="0">
+              <a:t>Output handling matters because AI outputs may be copied into.</a:t>
+            </a:r>
+            <a:endParaRPr lang="en-US" sz="1220" dirty="0"/>
+          </a:p>
+          <a:p>
+            <a:pPr indent="0" marL="0">
+              <a:buNone/>
+            </a:pPr>
+            <a:r>
+              <a:rPr lang="en-US" sz="1220" dirty="0">
                 <a:solidFill>
                   <a:srgbClr val="17364A"/>
                 </a:solidFill>
@@ -5094,13 +5145,16 @@
                 <a:ea typeface="Aptos" pitchFamily="34" charset="-122"/>
                 <a:cs typeface="Aptos" pitchFamily="34" charset="-120"/>
               </a:rPr>
-              <a:t>Insecure output handling can lead to misinformation, broken code, malicious links, or.</a:t>
-            </a:r>
-            <a:endParaRPr lang="en-US" sz="1380" dirty="0"/>
-          </a:p>
-          <a:p>
-            <a:r>
-              <a:rPr lang="en-US" sz="1380" dirty="0">
+              <a:t>Insecure output handling can lead to misinformation, broken code,.</a:t>
+            </a:r>
+            <a:endParaRPr lang="en-US" sz="1220" dirty="0"/>
+          </a:p>
+          <a:p>
+            <a:pPr indent="0" marL="0">
+              <a:buNone/>
+            </a:pPr>
+            <a:r>
+              <a:rPr lang="en-US" sz="1220" dirty="0">
                 <a:solidFill>
                   <a:srgbClr val="17364A"/>
                 </a:solidFill>
@@ -5108,9 +5162,9 @@
                 <a:ea typeface="Aptos" pitchFamily="34" charset="-122"/>
                 <a:cs typeface="Aptos" pitchFamily="34" charset="-120"/>
               </a:rPr>
-              <a:t>Outputs should be validated before downstream use, especially when they affect systems,.</a:t>
-            </a:r>
-            <a:endParaRPr lang="en-US" sz="1380" dirty="0"/>
+              <a:t>Outputs should be validated before downstream use, especially when.</a:t>
+            </a:r>
+            <a:endParaRPr lang="en-US" sz="1220" dirty="0"/>
           </a:p>
         </p:txBody>
       </p:sp>
@@ -5188,17 +5242,17 @@
         </p:nvSpPr>
         <p:spPr>
           <a:xfrm>
-            <a:off x="7799832" y="5001768"/>
-            <a:ext cx="3145536" cy="502920"/>
-          </a:xfrm>
-          <a:prstGeom prst="rect">
-            <a:avLst/>
-          </a:prstGeom>
-          <a:noFill/>
-          <a:ln/>
-        </p:spPr>
-        <p:txBody>
-          <a:bodyPr wrap="square" lIns="0" tIns="0" rIns="0" bIns="0" rtlCol="0" anchor="t">
+            <a:off x="7799832" y="4974336"/>
+            <a:ext cx="3145536" cy="576072"/>
+          </a:xfrm>
+          <a:prstGeom prst="rect">
+            <a:avLst/>
+          </a:prstGeom>
+          <a:noFill/>
+          <a:ln/>
+        </p:spPr>
+        <p:txBody>
+          <a:bodyPr wrap="square" lIns="254" tIns="254" rIns="254" bIns="254" rtlCol="0" anchor="t">
             <a:normAutofit/>
           </a:bodyPr>
           <a:lstStyle/>
@@ -5207,7 +5261,7 @@
               <a:buNone/>
             </a:pPr>
             <a:r>
-              <a:rPr lang="en-US" sz="1550" dirty="0">
+              <a:rPr lang="en-US" sz="1320" dirty="0">
                 <a:solidFill>
                   <a:srgbClr val="17364A"/>
                 </a:solidFill>
@@ -5215,9 +5269,9 @@
                 <a:ea typeface="Aptos" pitchFamily="34" charset="-122"/>
                 <a:cs typeface="Aptos" pitchFamily="34" charset="-120"/>
               </a:rPr>
-              <a:t>Identify what could go wrong, who could be affected, what safeguards are needed, and what evidence should be reviewed before use expands.</a:t>
-            </a:r>
-            <a:endParaRPr lang="en-US" sz="1550" dirty="0"/>
+              <a:t>Identify what could go wrong, who could be affected, what safeguards are needed, and what evidence should be reviewed.</a:t>
+            </a:r>
+            <a:endParaRPr lang="en-US" sz="1320" dirty="0"/>
           </a:p>
         </p:txBody>
       </p:sp>
@@ -5518,49 +5572,58 @@
           <a:ln/>
         </p:spPr>
         <p:txBody>
-          <a:bodyPr wrap="square" lIns="635" tIns="635" rIns="635" bIns="635" rtlCol="0" anchor="t">
+          <a:bodyPr wrap="square" lIns="1016" tIns="1016" rIns="1016" bIns="1016" rtlCol="0" anchor="t">
             <a:normAutofit/>
           </a:bodyPr>
           <a:lstStyle/>
           <a:p>
+            <a:pPr indent="0" marL="0">
+              <a:buNone/>
+            </a:pPr>
             <a:r>
               <a:rPr lang="en-US" sz="2100" dirty="0">
                 <a:solidFill>
-                  <a:srgbClr val="17364A"/>
-                </a:solidFill>
-                <a:latin typeface="Aptos" pitchFamily="34" charset="0"/>
-                <a:ea typeface="Aptos" pitchFamily="34" charset="-122"/>
-                <a:cs typeface="Aptos" pitchFamily="34" charset="-120"/>
-              </a:rPr>
-              <a:t>Prompt injection.</a:t>
+                  <a:srgbClr val="003A63"/>
+                </a:solidFill>
+                <a:latin typeface="Aptos" pitchFamily="34" charset="0"/>
+                <a:ea typeface="Aptos" pitchFamily="34" charset="-122"/>
+                <a:cs typeface="Aptos" pitchFamily="34" charset="-120"/>
+              </a:rPr>
+              <a:t>• Prompt injection.</a:t>
             </a:r>
             <a:endParaRPr lang="en-US" sz="2100" dirty="0"/>
           </a:p>
           <a:p>
+            <a:pPr indent="0" marL="0">
+              <a:buNone/>
+            </a:pPr>
             <a:r>
               <a:rPr lang="en-US" sz="2100" dirty="0">
                 <a:solidFill>
-                  <a:srgbClr val="17364A"/>
-                </a:solidFill>
-                <a:latin typeface="Aptos" pitchFamily="34" charset="0"/>
-                <a:ea typeface="Aptos" pitchFamily="34" charset="-122"/>
-                <a:cs typeface="Aptos" pitchFamily="34" charset="-120"/>
-              </a:rPr>
-              <a:t>Untrusted content may override instructions.</a:t>
+                  <a:srgbClr val="003A63"/>
+                </a:solidFill>
+                <a:latin typeface="Aptos" pitchFamily="34" charset="0"/>
+                <a:ea typeface="Aptos" pitchFamily="34" charset="-122"/>
+                <a:cs typeface="Aptos" pitchFamily="34" charset="-120"/>
+              </a:rPr>
+              <a:t>• Untrusted content may override instructions.</a:t>
             </a:r>
             <a:endParaRPr lang="en-US" sz="2100" dirty="0"/>
           </a:p>
           <a:p>
+            <a:pPr indent="0" marL="0">
+              <a:buNone/>
+            </a:pPr>
             <a:r>
               <a:rPr lang="en-US" sz="2100" dirty="0">
                 <a:solidFill>
-                  <a:srgbClr val="17364A"/>
-                </a:solidFill>
-                <a:latin typeface="Aptos" pitchFamily="34" charset="0"/>
-                <a:ea typeface="Aptos" pitchFamily="34" charset="-122"/>
-                <a:cs typeface="Aptos" pitchFamily="34" charset="-120"/>
-              </a:rPr>
-              <a:t>Guardrails include treating external content as data, restricting tools, and testing with adversarial.</a:t>
+                  <a:srgbClr val="003A63"/>
+                </a:solidFill>
+                <a:latin typeface="Aptos" pitchFamily="34" charset="0"/>
+                <a:ea typeface="Aptos" pitchFamily="34" charset="-122"/>
+                <a:cs typeface="Aptos" pitchFamily="34" charset="-120"/>
+              </a:rPr>
+              <a:t>• Guardrails include treating external content as data, restricting tools, and testing with.</a:t>
             </a:r>
             <a:endParaRPr lang="en-US" sz="2100" dirty="0"/>
           </a:p>
@@ -5640,17 +5703,17 @@
         </p:nvSpPr>
         <p:spPr>
           <a:xfrm>
-            <a:off x="7799832" y="1828800"/>
-            <a:ext cx="3145536" cy="685800"/>
-          </a:xfrm>
-          <a:prstGeom prst="rect">
-            <a:avLst/>
-          </a:prstGeom>
-          <a:noFill/>
-          <a:ln/>
-        </p:spPr>
-        <p:txBody>
-          <a:bodyPr wrap="square" lIns="0" tIns="0" rIns="0" bIns="0" rtlCol="0" anchor="t">
+            <a:off x="7799832" y="1801368"/>
+            <a:ext cx="3145536" cy="758952"/>
+          </a:xfrm>
+          <a:prstGeom prst="rect">
+            <a:avLst/>
+          </a:prstGeom>
+          <a:noFill/>
+          <a:ln/>
+        </p:spPr>
+        <p:txBody>
+          <a:bodyPr wrap="square" lIns="254" tIns="254" rIns="254" bIns="254" rtlCol="0" anchor="t">
             <a:normAutofit/>
           </a:bodyPr>
           <a:lstStyle/>
@@ -5659,7 +5722,7 @@
               <a:buNone/>
             </a:pPr>
             <a:r>
-              <a:rPr lang="en-US" sz="1550" dirty="0">
+              <a:rPr lang="en-US" sz="1320" dirty="0">
                 <a:solidFill>
                   <a:srgbClr val="17364A"/>
                 </a:solidFill>
@@ -5669,7 +5732,7 @@
               </a:rPr>
               <a:t>Prompt injection.</a:t>
             </a:r>
-            <a:endParaRPr lang="en-US" sz="1550" dirty="0"/>
+            <a:endParaRPr lang="en-US" sz="1320" dirty="0"/>
           </a:p>
         </p:txBody>
       </p:sp>
@@ -5757,13 +5820,16 @@
           <a:ln/>
         </p:spPr>
         <p:txBody>
-          <a:bodyPr wrap="square" lIns="254" tIns="254" rIns="254" bIns="254" rtlCol="0" anchor="t">
+          <a:bodyPr wrap="square" lIns="508" tIns="508" rIns="508" bIns="508" rtlCol="0" anchor="t">
             <a:normAutofit/>
           </a:bodyPr>
           <a:lstStyle/>
           <a:p>
-            <a:r>
-              <a:rPr lang="en-US" sz="1380" dirty="0">
+            <a:pPr indent="0" marL="0">
+              <a:buNone/>
+            </a:pPr>
+            <a:r>
+              <a:rPr lang="en-US" sz="1220" dirty="0">
                 <a:solidFill>
                   <a:srgbClr val="17364A"/>
                 </a:solidFill>
@@ -5771,13 +5837,16 @@
                 <a:ea typeface="Aptos" pitchFamily="34" charset="-122"/>
                 <a:cs typeface="Aptos" pitchFamily="34" charset="-120"/>
               </a:rPr>
-              <a:t>Guardrails include treating external content as data, restricting tools, and testing with.</a:t>
-            </a:r>
-            <a:endParaRPr lang="en-US" sz="1380" dirty="0"/>
-          </a:p>
-          <a:p>
-            <a:r>
-              <a:rPr lang="en-US" sz="1380" dirty="0">
+              <a:t>Guardrails include treating external content as data, restricting.</a:t>
+            </a:r>
+            <a:endParaRPr lang="en-US" sz="1220" dirty="0"/>
+          </a:p>
+          <a:p>
+            <a:pPr indent="0" marL="0">
+              <a:buNone/>
+            </a:pPr>
+            <a:r>
+              <a:rPr lang="en-US" sz="1220" dirty="0">
                 <a:solidFill>
                   <a:srgbClr val="17364A"/>
                 </a:solidFill>
@@ -5787,11 +5856,14 @@
               </a:rPr>
               <a:t>Sensitive information disclosure.</a:t>
             </a:r>
-            <a:endParaRPr lang="en-US" sz="1380" dirty="0"/>
-          </a:p>
-          <a:p>
-            <a:r>
-              <a:rPr lang="en-US" sz="1380" dirty="0">
+            <a:endParaRPr lang="en-US" sz="1220" dirty="0"/>
+          </a:p>
+          <a:p>
+            <a:pPr indent="0" marL="0">
+              <a:buNone/>
+            </a:pPr>
+            <a:r>
+              <a:rPr lang="en-US" sz="1220" dirty="0">
                 <a:solidFill>
                   <a:srgbClr val="17364A"/>
                 </a:solidFill>
@@ -5801,7 +5873,7 @@
               </a:rPr>
               <a:t>AI may reveal information outside user permissions.</a:t>
             </a:r>
-            <a:endParaRPr lang="en-US" sz="1380" dirty="0"/>
+            <a:endParaRPr lang="en-US" sz="1220" dirty="0"/>
           </a:p>
         </p:txBody>
       </p:sp>
@@ -5879,17 +5951,17 @@
         </p:nvSpPr>
         <p:spPr>
           <a:xfrm>
-            <a:off x="7799832" y="5001768"/>
-            <a:ext cx="3145536" cy="502920"/>
-          </a:xfrm>
-          <a:prstGeom prst="rect">
-            <a:avLst/>
-          </a:prstGeom>
-          <a:noFill/>
-          <a:ln/>
-        </p:spPr>
-        <p:txBody>
-          <a:bodyPr wrap="square" lIns="0" tIns="0" rIns="0" bIns="0" rtlCol="0" anchor="t">
+            <a:off x="7799832" y="4974336"/>
+            <a:ext cx="3145536" cy="576072"/>
+          </a:xfrm>
+          <a:prstGeom prst="rect">
+            <a:avLst/>
+          </a:prstGeom>
+          <a:noFill/>
+          <a:ln/>
+        </p:spPr>
+        <p:txBody>
+          <a:bodyPr wrap="square" lIns="254" tIns="254" rIns="254" bIns="254" rtlCol="0" anchor="t">
             <a:normAutofit/>
           </a:bodyPr>
           <a:lstStyle/>
@@ -5898,7 +5970,7 @@
               <a:buNone/>
             </a:pPr>
             <a:r>
-              <a:rPr lang="en-US" sz="1550" dirty="0">
+              <a:rPr lang="en-US" sz="1320" dirty="0">
                 <a:solidFill>
                   <a:srgbClr val="17364A"/>
                 </a:solidFill>
@@ -5906,9 +5978,9 @@
                 <a:ea typeface="Aptos" pitchFamily="34" charset="-122"/>
                 <a:cs typeface="Aptos" pitchFamily="34" charset="-120"/>
               </a:rPr>
-              <a:t>Identify what could go wrong, who could be affected, what safeguards are needed, and what evidence should be reviewed before use expands.</a:t>
-            </a:r>
-            <a:endParaRPr lang="en-US" sz="1550" dirty="0"/>
+              <a:t>Identify what could go wrong, who could be affected, what safeguards are needed, and what evidence should be reviewed.</a:t>
+            </a:r>
+            <a:endParaRPr lang="en-US" sz="1320" dirty="0"/>
           </a:p>
         </p:txBody>
       </p:sp>
@@ -6209,49 +6281,58 @@
           <a:ln/>
         </p:spPr>
         <p:txBody>
-          <a:bodyPr wrap="square" lIns="635" tIns="635" rIns="635" bIns="635" rtlCol="0" anchor="t">
+          <a:bodyPr wrap="square" lIns="1016" tIns="1016" rIns="1016" bIns="1016" rtlCol="0" anchor="t">
             <a:normAutofit/>
           </a:bodyPr>
           <a:lstStyle/>
           <a:p>
+            <a:pPr indent="0" marL="0">
+              <a:buNone/>
+            </a:pPr>
             <a:r>
               <a:rPr lang="en-US" sz="2100" dirty="0">
                 <a:solidFill>
-                  <a:srgbClr val="17364A"/>
-                </a:solidFill>
-                <a:latin typeface="Aptos" pitchFamily="34" charset="0"/>
-                <a:ea typeface="Aptos" pitchFamily="34" charset="-122"/>
-                <a:cs typeface="Aptos" pitchFamily="34" charset="-120"/>
-              </a:rPr>
-              <a:t>Supply chain risk.</a:t>
+                  <a:srgbClr val="003A63"/>
+                </a:solidFill>
+                <a:latin typeface="Aptos" pitchFamily="34" charset="0"/>
+                <a:ea typeface="Aptos" pitchFamily="34" charset="-122"/>
+                <a:cs typeface="Aptos" pitchFamily="34" charset="-120"/>
+              </a:rPr>
+              <a:t>• Supply chain risk.</a:t>
             </a:r>
             <a:endParaRPr lang="en-US" sz="2100" dirty="0"/>
           </a:p>
           <a:p>
+            <a:pPr indent="0" marL="0">
+              <a:buNone/>
+            </a:pPr>
             <a:r>
               <a:rPr lang="en-US" sz="2100" dirty="0">
                 <a:solidFill>
-                  <a:srgbClr val="17364A"/>
-                </a:solidFill>
-                <a:latin typeface="Aptos" pitchFamily="34" charset="0"/>
-                <a:ea typeface="Aptos" pitchFamily="34" charset="-122"/>
-                <a:cs typeface="Aptos" pitchFamily="34" charset="-120"/>
-              </a:rPr>
-              <a:t>AI tools may depend on vendors, plugins, models, or libraries with vulnerabilities.</a:t>
+                  <a:srgbClr val="003A63"/>
+                </a:solidFill>
+                <a:latin typeface="Aptos" pitchFamily="34" charset="0"/>
+                <a:ea typeface="Aptos" pitchFamily="34" charset="-122"/>
+                <a:cs typeface="Aptos" pitchFamily="34" charset="-120"/>
+              </a:rPr>
+              <a:t>• AI tools may depend on vendors, plugins, models, or libraries with vulnerabilities.</a:t>
             </a:r>
             <a:endParaRPr lang="en-US" sz="2100" dirty="0"/>
           </a:p>
           <a:p>
+            <a:pPr indent="0" marL="0">
+              <a:buNone/>
+            </a:pPr>
             <a:r>
               <a:rPr lang="en-US" sz="2100" dirty="0">
                 <a:solidFill>
-                  <a:srgbClr val="17364A"/>
-                </a:solidFill>
-                <a:latin typeface="Aptos" pitchFamily="34" charset="0"/>
-                <a:ea typeface="Aptos" pitchFamily="34" charset="-122"/>
-                <a:cs typeface="Aptos" pitchFamily="34" charset="-120"/>
-              </a:rPr>
-              <a:t>Guardrails include vendor review, security documentation, patching, and contract requirements.</a:t>
+                  <a:srgbClr val="003A63"/>
+                </a:solidFill>
+                <a:latin typeface="Aptos" pitchFamily="34" charset="0"/>
+                <a:ea typeface="Aptos" pitchFamily="34" charset="-122"/>
+                <a:cs typeface="Aptos" pitchFamily="34" charset="-120"/>
+              </a:rPr>
+              <a:t>• Guardrails include vendor review, security documentation, patching, and contract requirements.</a:t>
             </a:r>
             <a:endParaRPr lang="en-US" sz="2100" dirty="0"/>
           </a:p>
@@ -6331,17 +6412,17 @@
         </p:nvSpPr>
         <p:spPr>
           <a:xfrm>
-            <a:off x="7799832" y="1828800"/>
-            <a:ext cx="3145536" cy="685800"/>
-          </a:xfrm>
-          <a:prstGeom prst="rect">
-            <a:avLst/>
-          </a:prstGeom>
-          <a:noFill/>
-          <a:ln/>
-        </p:spPr>
-        <p:txBody>
-          <a:bodyPr wrap="square" lIns="0" tIns="0" rIns="0" bIns="0" rtlCol="0" anchor="t">
+            <a:off x="7799832" y="1801368"/>
+            <a:ext cx="3145536" cy="758952"/>
+          </a:xfrm>
+          <a:prstGeom prst="rect">
+            <a:avLst/>
+          </a:prstGeom>
+          <a:noFill/>
+          <a:ln/>
+        </p:spPr>
+        <p:txBody>
+          <a:bodyPr wrap="square" lIns="254" tIns="254" rIns="254" bIns="254" rtlCol="0" anchor="t">
             <a:normAutofit/>
           </a:bodyPr>
           <a:lstStyle/>
@@ -6350,7 +6431,7 @@
               <a:buNone/>
             </a:pPr>
             <a:r>
-              <a:rPr lang="en-US" sz="1550" dirty="0">
+              <a:rPr lang="en-US" sz="1320" dirty="0">
                 <a:solidFill>
                   <a:srgbClr val="17364A"/>
                 </a:solidFill>
@@ -6360,7 +6441,7 @@
               </a:rPr>
               <a:t>Supply chain risk.</a:t>
             </a:r>
-            <a:endParaRPr lang="en-US" sz="1550" dirty="0"/>
+            <a:endParaRPr lang="en-US" sz="1320" dirty="0"/>
           </a:p>
         </p:txBody>
       </p:sp>
@@ -6448,13 +6529,16 @@
           <a:ln/>
         </p:spPr>
         <p:txBody>
-          <a:bodyPr wrap="square" lIns="254" tIns="254" rIns="254" bIns="254" rtlCol="0" anchor="t">
+          <a:bodyPr wrap="square" lIns="508" tIns="508" rIns="508" bIns="508" rtlCol="0" anchor="t">
             <a:normAutofit/>
           </a:bodyPr>
           <a:lstStyle/>
           <a:p>
-            <a:r>
-              <a:rPr lang="en-US" sz="1380" dirty="0">
+            <a:pPr indent="0" marL="0">
+              <a:buNone/>
+            </a:pPr>
+            <a:r>
+              <a:rPr lang="en-US" sz="1220" dirty="0">
                 <a:solidFill>
                   <a:srgbClr val="17364A"/>
                 </a:solidFill>
@@ -6464,11 +6548,14 @@
               </a:rPr>
               <a:t>Supply chain risk.</a:t>
             </a:r>
-            <a:endParaRPr lang="en-US" sz="1380" dirty="0"/>
-          </a:p>
-          <a:p>
-            <a:r>
-              <a:rPr lang="en-US" sz="1380" dirty="0">
+            <a:endParaRPr lang="en-US" sz="1220" dirty="0"/>
+          </a:p>
+          <a:p>
+            <a:pPr indent="0" marL="0">
+              <a:buNone/>
+            </a:pPr>
+            <a:r>
+              <a:rPr lang="en-US" sz="1220" dirty="0">
                 <a:solidFill>
                   <a:srgbClr val="17364A"/>
                 </a:solidFill>
@@ -6476,13 +6563,16 @@
                 <a:ea typeface="Aptos" pitchFamily="34" charset="-122"/>
                 <a:cs typeface="Aptos" pitchFamily="34" charset="-120"/>
               </a:rPr>
-              <a:t>AI tools may depend on vendors, plugins, models, or libraries with vulnerabilities.</a:t>
-            </a:r>
-            <a:endParaRPr lang="en-US" sz="1380" dirty="0"/>
-          </a:p>
-          <a:p>
-            <a:r>
-              <a:rPr lang="en-US" sz="1380" dirty="0">
+              <a:t>AI tools may depend on vendors, plugins, models, or libraries with.</a:t>
+            </a:r>
+            <a:endParaRPr lang="en-US" sz="1220" dirty="0"/>
+          </a:p>
+          <a:p>
+            <a:pPr indent="0" marL="0">
+              <a:buNone/>
+            </a:pPr>
+            <a:r>
+              <a:rPr lang="en-US" sz="1220" dirty="0">
                 <a:solidFill>
                   <a:srgbClr val="17364A"/>
                 </a:solidFill>
@@ -6490,9 +6580,9 @@
                 <a:ea typeface="Aptos" pitchFamily="34" charset="-122"/>
                 <a:cs typeface="Aptos" pitchFamily="34" charset="-120"/>
               </a:rPr>
-              <a:t>Guardrails include vendor review, security documentation, patching, and contract.</a:t>
-            </a:r>
-            <a:endParaRPr lang="en-US" sz="1380" dirty="0"/>
+              <a:t>Guardrails include vendor review, security documentation,.</a:t>
+            </a:r>
+            <a:endParaRPr lang="en-US" sz="1220" dirty="0"/>
           </a:p>
         </p:txBody>
       </p:sp>
@@ -6570,17 +6660,17 @@
         </p:nvSpPr>
         <p:spPr>
           <a:xfrm>
-            <a:off x="7799832" y="5001768"/>
-            <a:ext cx="3145536" cy="502920"/>
-          </a:xfrm>
-          <a:prstGeom prst="rect">
-            <a:avLst/>
-          </a:prstGeom>
-          <a:noFill/>
-          <a:ln/>
-        </p:spPr>
-        <p:txBody>
-          <a:bodyPr wrap="square" lIns="0" tIns="0" rIns="0" bIns="0" rtlCol="0" anchor="t">
+            <a:off x="7799832" y="4974336"/>
+            <a:ext cx="3145536" cy="576072"/>
+          </a:xfrm>
+          <a:prstGeom prst="rect">
+            <a:avLst/>
+          </a:prstGeom>
+          <a:noFill/>
+          <a:ln/>
+        </p:spPr>
+        <p:txBody>
+          <a:bodyPr wrap="square" lIns="254" tIns="254" rIns="254" bIns="254" rtlCol="0" anchor="t">
             <a:normAutofit/>
           </a:bodyPr>
           <a:lstStyle/>
@@ -6589,7 +6679,7 @@
               <a:buNone/>
             </a:pPr>
             <a:r>
-              <a:rPr lang="en-US" sz="1550" dirty="0">
+              <a:rPr lang="en-US" sz="1320" dirty="0">
                 <a:solidFill>
                   <a:srgbClr val="17364A"/>
                 </a:solidFill>
@@ -6597,9 +6687,9 @@
                 <a:ea typeface="Aptos" pitchFamily="34" charset="-122"/>
                 <a:cs typeface="Aptos" pitchFamily="34" charset="-120"/>
               </a:rPr>
-              <a:t>Identify what could go wrong, who could be affected, what safeguards are needed, and what evidence should be reviewed before use expands.</a:t>
-            </a:r>
-            <a:endParaRPr lang="en-US" sz="1550" dirty="0"/>
+              <a:t>Identify what could go wrong, who could be affected, what safeguards are needed, and what evidence should be reviewed.</a:t>
+            </a:r>
+            <a:endParaRPr lang="en-US" sz="1320" dirty="0"/>
           </a:p>
         </p:txBody>
       </p:sp>
@@ -6900,49 +6990,58 @@
           <a:ln/>
         </p:spPr>
         <p:txBody>
-          <a:bodyPr wrap="square" lIns="635" tIns="635" rIns="635" bIns="635" rtlCol="0" anchor="t">
+          <a:bodyPr wrap="square" lIns="1016" tIns="1016" rIns="1016" bIns="1016" rtlCol="0" anchor="t">
             <a:normAutofit/>
           </a:bodyPr>
           <a:lstStyle/>
           <a:p>
+            <a:pPr indent="0" marL="0">
+              <a:buNone/>
+            </a:pPr>
             <a:r>
               <a:rPr lang="en-US" sz="2100" dirty="0">
                 <a:solidFill>
-                  <a:srgbClr val="17364A"/>
-                </a:solidFill>
-                <a:latin typeface="Aptos" pitchFamily="34" charset="0"/>
-                <a:ea typeface="Aptos" pitchFamily="34" charset="-122"/>
-                <a:cs typeface="Aptos" pitchFamily="34" charset="-120"/>
-              </a:rPr>
-              <a:t>AI security applies to generative AI, RAG, NLP, APIs, and agentic workflows.</a:t>
+                  <a:srgbClr val="003A63"/>
+                </a:solidFill>
+                <a:latin typeface="Aptos" pitchFamily="34" charset="0"/>
+                <a:ea typeface="Aptos" pitchFamily="34" charset="-122"/>
+                <a:cs typeface="Aptos" pitchFamily="34" charset="-120"/>
+              </a:rPr>
+              <a:t>• AI security applies to generative AI, RAG, NLP, APIs, and agentic workflows.</a:t>
             </a:r>
             <a:endParaRPr lang="en-US" sz="2100" dirty="0"/>
           </a:p>
           <a:p>
+            <a:pPr indent="0" marL="0">
+              <a:buNone/>
+            </a:pPr>
             <a:r>
               <a:rPr lang="en-US" sz="2100" dirty="0">
                 <a:solidFill>
-                  <a:srgbClr val="17364A"/>
-                </a:solidFill>
-                <a:latin typeface="Aptos" pitchFamily="34" charset="0"/>
-                <a:ea typeface="Aptos" pitchFamily="34" charset="-122"/>
-                <a:cs typeface="Aptos" pitchFamily="34" charset="-120"/>
-              </a:rPr>
-              <a:t>RAG systems need document-level permissions and protections against unauthorized retrieval.</a:t>
+                  <a:srgbClr val="003A63"/>
+                </a:solidFill>
+                <a:latin typeface="Aptos" pitchFamily="34" charset="0"/>
+                <a:ea typeface="Aptos" pitchFamily="34" charset="-122"/>
+                <a:cs typeface="Aptos" pitchFamily="34" charset="-120"/>
+              </a:rPr>
+              <a:t>• RAG systems need document-level permissions and protections against unauthorized retrieval.</a:t>
             </a:r>
             <a:endParaRPr lang="en-US" sz="2100" dirty="0"/>
           </a:p>
           <a:p>
+            <a:pPr indent="0" marL="0">
+              <a:buNone/>
+            </a:pPr>
             <a:r>
               <a:rPr lang="en-US" sz="2100" dirty="0">
                 <a:solidFill>
-                  <a:srgbClr val="17364A"/>
-                </a:solidFill>
-                <a:latin typeface="Aptos" pitchFamily="34" charset="0"/>
-                <a:ea typeface="Aptos" pitchFamily="34" charset="-122"/>
-                <a:cs typeface="Aptos" pitchFamily="34" charset="-120"/>
-              </a:rPr>
-              <a:t>Agentic systems need tool restrictions and action approval.</a:t>
+                  <a:srgbClr val="003A63"/>
+                </a:solidFill>
+                <a:latin typeface="Aptos" pitchFamily="34" charset="0"/>
+                <a:ea typeface="Aptos" pitchFamily="34" charset="-122"/>
+                <a:cs typeface="Aptos" pitchFamily="34" charset="-120"/>
+              </a:rPr>
+              <a:t>• Agentic systems need tool restrictions and action approval.</a:t>
             </a:r>
             <a:endParaRPr lang="en-US" sz="2100" dirty="0"/>
           </a:p>
@@ -7022,17 +7121,17 @@
         </p:nvSpPr>
         <p:spPr>
           <a:xfrm>
-            <a:off x="7799832" y="1828800"/>
-            <a:ext cx="3145536" cy="685800"/>
-          </a:xfrm>
-          <a:prstGeom prst="rect">
-            <a:avLst/>
-          </a:prstGeom>
-          <a:noFill/>
-          <a:ln/>
-        </p:spPr>
-        <p:txBody>
-          <a:bodyPr wrap="square" lIns="0" tIns="0" rIns="0" bIns="0" rtlCol="0" anchor="t">
+            <a:off x="7799832" y="1801368"/>
+            <a:ext cx="3145536" cy="758952"/>
+          </a:xfrm>
+          <a:prstGeom prst="rect">
+            <a:avLst/>
+          </a:prstGeom>
+          <a:noFill/>
+          <a:ln/>
+        </p:spPr>
+        <p:txBody>
+          <a:bodyPr wrap="square" lIns="254" tIns="254" rIns="254" bIns="254" rtlCol="0" anchor="t">
             <a:normAutofit/>
           </a:bodyPr>
           <a:lstStyle/>
@@ -7041,7 +7140,7 @@
               <a:buNone/>
             </a:pPr>
             <a:r>
-              <a:rPr lang="en-US" sz="1550" dirty="0">
+              <a:rPr lang="en-US" sz="1320" dirty="0">
                 <a:solidFill>
                   <a:srgbClr val="17364A"/>
                 </a:solidFill>
@@ -7051,7 +7150,7 @@
               </a:rPr>
               <a:t>AI security applies to generative AI, RAG, NLP, APIs, and agentic workflows.</a:t>
             </a:r>
-            <a:endParaRPr lang="en-US" sz="1550" dirty="0"/>
+            <a:endParaRPr lang="en-US" sz="1320" dirty="0"/>
           </a:p>
         </p:txBody>
       </p:sp>
@@ -7139,13 +7238,16 @@
           <a:ln/>
         </p:spPr>
         <p:txBody>
-          <a:bodyPr wrap="square" lIns="254" tIns="254" rIns="254" bIns="254" rtlCol="0" anchor="t">
+          <a:bodyPr wrap="square" lIns="508" tIns="508" rIns="508" bIns="508" rtlCol="0" anchor="t">
             <a:normAutofit/>
           </a:bodyPr>
           <a:lstStyle/>
           <a:p>
-            <a:r>
-              <a:rPr lang="en-US" sz="1380" dirty="0">
+            <a:pPr indent="0" marL="0">
+              <a:buNone/>
+            </a:pPr>
+            <a:r>
+              <a:rPr lang="en-US" sz="1220" dirty="0">
                 <a:solidFill>
                   <a:srgbClr val="17364A"/>
                 </a:solidFill>
@@ -7153,13 +7255,16 @@
                 <a:ea typeface="Aptos" pitchFamily="34" charset="-122"/>
                 <a:cs typeface="Aptos" pitchFamily="34" charset="-120"/>
               </a:rPr>
-              <a:t>Prompt templates should include data boundaries, and technical implementations should.</a:t>
-            </a:r>
-            <a:endParaRPr lang="en-US" sz="1380" dirty="0"/>
-          </a:p>
-          <a:p>
-            <a:r>
-              <a:rPr lang="en-US" sz="1380" dirty="0">
+              <a:t>Prompt templates should include data boundaries, and technical.</a:t>
+            </a:r>
+            <a:endParaRPr lang="en-US" sz="1220" dirty="0"/>
+          </a:p>
+          <a:p>
+            <a:pPr indent="0" marL="0">
+              <a:buNone/>
+            </a:pPr>
+            <a:r>
+              <a:rPr lang="en-US" sz="1220" dirty="0">
                 <a:solidFill>
                   <a:srgbClr val="17364A"/>
                 </a:solidFill>
@@ -7169,11 +7274,14 @@
               </a:rPr>
               <a:t>Security should be designed as part of the workflow.</a:t>
             </a:r>
-            <a:endParaRPr lang="en-US" sz="1380" dirty="0"/>
-          </a:p>
-          <a:p>
-            <a:r>
-              <a:rPr lang="en-US" sz="1380" dirty="0">
+            <a:endParaRPr lang="en-US" sz="1220" dirty="0"/>
+          </a:p>
+          <a:p>
+            <a:pPr indent="0" marL="0">
+              <a:buNone/>
+            </a:pPr>
+            <a:r>
+              <a:rPr lang="en-US" sz="1220" dirty="0">
                 <a:solidFill>
                   <a:srgbClr val="17364A"/>
                 </a:solidFill>
@@ -7181,9 +7289,9 @@
                 <a:ea typeface="Aptos" pitchFamily="34" charset="-122"/>
                 <a:cs typeface="Aptos" pitchFamily="34" charset="-120"/>
               </a:rPr>
-              <a:t>Public health users should know which tools are approved, what data may be used, what.</a:t>
-            </a:r>
-            <a:endParaRPr lang="en-US" sz="1380" dirty="0"/>
+              <a:t>Public health users should know which tools are approved, what.</a:t>
+            </a:r>
+            <a:endParaRPr lang="en-US" sz="1220" dirty="0"/>
           </a:p>
         </p:txBody>
       </p:sp>
@@ -7261,17 +7369,17 @@
         </p:nvSpPr>
         <p:spPr>
           <a:xfrm>
-            <a:off x="7799832" y="5001768"/>
-            <a:ext cx="3145536" cy="502920"/>
-          </a:xfrm>
-          <a:prstGeom prst="rect">
-            <a:avLst/>
-          </a:prstGeom>
-          <a:noFill/>
-          <a:ln/>
-        </p:spPr>
-        <p:txBody>
-          <a:bodyPr wrap="square" lIns="0" tIns="0" rIns="0" bIns="0" rtlCol="0" anchor="t">
+            <a:off x="7799832" y="4974336"/>
+            <a:ext cx="3145536" cy="576072"/>
+          </a:xfrm>
+          <a:prstGeom prst="rect">
+            <a:avLst/>
+          </a:prstGeom>
+          <a:noFill/>
+          <a:ln/>
+        </p:spPr>
+        <p:txBody>
+          <a:bodyPr wrap="square" lIns="254" tIns="254" rIns="254" bIns="254" rtlCol="0" anchor="t">
             <a:normAutofit/>
           </a:bodyPr>
           <a:lstStyle/>
@@ -7280,7 +7388,7 @@
               <a:buNone/>
             </a:pPr>
             <a:r>
-              <a:rPr lang="en-US" sz="1550" dirty="0">
+              <a:rPr lang="en-US" sz="1320" dirty="0">
                 <a:solidFill>
                   <a:srgbClr val="17364A"/>
                 </a:solidFill>
@@ -7288,9 +7396,9 @@
                 <a:ea typeface="Aptos" pitchFamily="34" charset="-122"/>
                 <a:cs typeface="Aptos" pitchFamily="34" charset="-120"/>
               </a:rPr>
-              <a:t>Identify what could go wrong, who could be affected, what safeguards are needed, and what evidence should be reviewed before use expands.</a:t>
-            </a:r>
-            <a:endParaRPr lang="en-US" sz="1550" dirty="0"/>
+              <a:t>Identify what could go wrong, who could be affected, what safeguards are needed, and what evidence should be reviewed.</a:t>
+            </a:r>
+            <a:endParaRPr lang="en-US" sz="1320" dirty="0"/>
           </a:p>
         </p:txBody>
       </p:sp>
@@ -7591,49 +7699,58 @@
           <a:ln/>
         </p:spPr>
         <p:txBody>
-          <a:bodyPr wrap="square" lIns="635" tIns="635" rIns="635" bIns="635" rtlCol="0" anchor="t">
+          <a:bodyPr wrap="square" lIns="1016" tIns="1016" rIns="1016" bIns="1016" rtlCol="0" anchor="t">
             <a:normAutofit/>
           </a:bodyPr>
           <a:lstStyle/>
           <a:p>
+            <a:pPr indent="0" marL="0">
+              <a:buNone/>
+            </a:pPr>
             <a:r>
               <a:rPr lang="en-US" sz="2100" dirty="0">
                 <a:solidFill>
-                  <a:srgbClr val="17364A"/>
-                </a:solidFill>
-                <a:latin typeface="Aptos" pitchFamily="34" charset="0"/>
-                <a:ea typeface="Aptos" pitchFamily="34" charset="-122"/>
-                <a:cs typeface="Aptos" pitchFamily="34" charset="-120"/>
-              </a:rPr>
-              <a:t>What sensitive data or systems would the AI workflow touch?</a:t>
+                  <a:srgbClr val="003A63"/>
+                </a:solidFill>
+                <a:latin typeface="Aptos" pitchFamily="34" charset="0"/>
+                <a:ea typeface="Aptos" pitchFamily="34" charset="-122"/>
+                <a:cs typeface="Aptos" pitchFamily="34" charset="-120"/>
+              </a:rPr>
+              <a:t>• What sensitive data or systems would the AI workflow touch?</a:t>
             </a:r>
             <a:endParaRPr lang="en-US" sz="2100" dirty="0"/>
           </a:p>
           <a:p>
+            <a:pPr indent="0" marL="0">
+              <a:buNone/>
+            </a:pPr>
             <a:r>
               <a:rPr lang="en-US" sz="2100" dirty="0">
                 <a:solidFill>
-                  <a:srgbClr val="17364A"/>
-                </a:solidFill>
-                <a:latin typeface="Aptos" pitchFamily="34" charset="0"/>
-                <a:ea typeface="Aptos" pitchFamily="34" charset="-122"/>
-                <a:cs typeface="Aptos" pitchFamily="34" charset="-120"/>
-              </a:rPr>
-              <a:t>Could the AI tool access more information or actions than necessary?</a:t>
+                  <a:srgbClr val="003A63"/>
+                </a:solidFill>
+                <a:latin typeface="Aptos" pitchFamily="34" charset="0"/>
+                <a:ea typeface="Aptos" pitchFamily="34" charset="-122"/>
+                <a:cs typeface="Aptos" pitchFamily="34" charset="-120"/>
+              </a:rPr>
+              <a:t>• Could the AI tool access more information or actions than necessary?</a:t>
             </a:r>
             <a:endParaRPr lang="en-US" sz="2100" dirty="0"/>
           </a:p>
           <a:p>
+            <a:pPr indent="0" marL="0">
+              <a:buNone/>
+            </a:pPr>
             <a:r>
               <a:rPr lang="en-US" sz="2100" dirty="0">
                 <a:solidFill>
-                  <a:srgbClr val="17364A"/>
-                </a:solidFill>
-                <a:latin typeface="Aptos" pitchFamily="34" charset="0"/>
-                <a:ea typeface="Aptos" pitchFamily="34" charset="-122"/>
-                <a:cs typeface="Aptos" pitchFamily="34" charset="-120"/>
-              </a:rPr>
-              <a:t>What untrusted content might the tool process?</a:t>
+                  <a:srgbClr val="003A63"/>
+                </a:solidFill>
+                <a:latin typeface="Aptos" pitchFamily="34" charset="0"/>
+                <a:ea typeface="Aptos" pitchFamily="34" charset="-122"/>
+                <a:cs typeface="Aptos" pitchFamily="34" charset="-120"/>
+              </a:rPr>
+              <a:t>• What untrusted content might the tool process?</a:t>
             </a:r>
             <a:endParaRPr lang="en-US" sz="2100" dirty="0"/>
           </a:p>
@@ -7713,17 +7830,17 @@
         </p:nvSpPr>
         <p:spPr>
           <a:xfrm>
-            <a:off x="7799832" y="1828800"/>
-            <a:ext cx="3145536" cy="685800"/>
-          </a:xfrm>
-          <a:prstGeom prst="rect">
-            <a:avLst/>
-          </a:prstGeom>
-          <a:noFill/>
-          <a:ln/>
-        </p:spPr>
-        <p:txBody>
-          <a:bodyPr wrap="square" lIns="0" tIns="0" rIns="0" bIns="0" rtlCol="0" anchor="t">
+            <a:off x="7799832" y="1801368"/>
+            <a:ext cx="3145536" cy="758952"/>
+          </a:xfrm>
+          <a:prstGeom prst="rect">
+            <a:avLst/>
+          </a:prstGeom>
+          <a:noFill/>
+          <a:ln/>
+        </p:spPr>
+        <p:txBody>
+          <a:bodyPr wrap="square" lIns="254" tIns="254" rIns="254" bIns="254" rtlCol="0" anchor="t">
             <a:normAutofit/>
           </a:bodyPr>
           <a:lstStyle/>
@@ -7732,7 +7849,7 @@
               <a:buNone/>
             </a:pPr>
             <a:r>
-              <a:rPr lang="en-US" sz="1550" dirty="0">
+              <a:rPr lang="en-US" sz="1320" dirty="0">
                 <a:solidFill>
                   <a:srgbClr val="17364A"/>
                 </a:solidFill>
@@ -7742,7 +7859,7 @@
               </a:rPr>
               <a:t>What sensitive data or systems would the AI workflow touch?</a:t>
             </a:r>
-            <a:endParaRPr lang="en-US" sz="1550" dirty="0"/>
+            <a:endParaRPr lang="en-US" sz="1320" dirty="0"/>
           </a:p>
         </p:txBody>
       </p:sp>
@@ -7830,13 +7947,16 @@
           <a:ln/>
         </p:spPr>
         <p:txBody>
-          <a:bodyPr wrap="square" lIns="254" tIns="254" rIns="254" bIns="254" rtlCol="0" anchor="t">
+          <a:bodyPr wrap="square" lIns="508" tIns="508" rIns="508" bIns="508" rtlCol="0" anchor="t">
             <a:normAutofit/>
           </a:bodyPr>
           <a:lstStyle/>
           <a:p>
-            <a:r>
-              <a:rPr lang="en-US" sz="1380" dirty="0">
+            <a:pPr indent="0" marL="0">
+              <a:buNone/>
+            </a:pPr>
+            <a:r>
+              <a:rPr lang="en-US" sz="1220" dirty="0">
                 <a:solidFill>
                   <a:srgbClr val="17364A"/>
                 </a:solidFill>
@@ -7846,11 +7966,14 @@
               </a:rPr>
               <a:t>What sensitive data or systems would the AI workflow touch?</a:t>
             </a:r>
-            <a:endParaRPr lang="en-US" sz="1380" dirty="0"/>
-          </a:p>
-          <a:p>
-            <a:r>
-              <a:rPr lang="en-US" sz="1380" dirty="0">
+            <a:endParaRPr lang="en-US" sz="1220" dirty="0"/>
+          </a:p>
+          <a:p>
+            <a:pPr indent="0" marL="0">
+              <a:buNone/>
+            </a:pPr>
+            <a:r>
+              <a:rPr lang="en-US" sz="1220" dirty="0">
                 <a:solidFill>
                   <a:srgbClr val="17364A"/>
                 </a:solidFill>
@@ -7860,11 +7983,14 @@
               </a:rPr>
               <a:t>Could the AI tool access more information or actions than necessary?</a:t>
             </a:r>
-            <a:endParaRPr lang="en-US" sz="1380" dirty="0"/>
-          </a:p>
-          <a:p>
-            <a:r>
-              <a:rPr lang="en-US" sz="1380" dirty="0">
+            <a:endParaRPr lang="en-US" sz="1220" dirty="0"/>
+          </a:p>
+          <a:p>
+            <a:pPr indent="0" marL="0">
+              <a:buNone/>
+            </a:pPr>
+            <a:r>
+              <a:rPr lang="en-US" sz="1220" dirty="0">
                 <a:solidFill>
                   <a:srgbClr val="17364A"/>
                 </a:solidFill>
@@ -7874,7 +8000,7 @@
               </a:rPr>
               <a:t>What untrusted content might the tool process?</a:t>
             </a:r>
-            <a:endParaRPr lang="en-US" sz="1380" dirty="0"/>
+            <a:endParaRPr lang="en-US" sz="1220" dirty="0"/>
           </a:p>
         </p:txBody>
       </p:sp>
@@ -7952,17 +8078,17 @@
         </p:nvSpPr>
         <p:spPr>
           <a:xfrm>
-            <a:off x="7799832" y="5001768"/>
-            <a:ext cx="3145536" cy="502920"/>
-          </a:xfrm>
-          <a:prstGeom prst="rect">
-            <a:avLst/>
-          </a:prstGeom>
-          <a:noFill/>
-          <a:ln/>
-        </p:spPr>
-        <p:txBody>
-          <a:bodyPr wrap="square" lIns="0" tIns="0" rIns="0" bIns="0" rtlCol="0" anchor="t">
+            <a:off x="7799832" y="4974336"/>
+            <a:ext cx="3145536" cy="576072"/>
+          </a:xfrm>
+          <a:prstGeom prst="rect">
+            <a:avLst/>
+          </a:prstGeom>
+          <a:noFill/>
+          <a:ln/>
+        </p:spPr>
+        <p:txBody>
+          <a:bodyPr wrap="square" lIns="254" tIns="254" rIns="254" bIns="254" rtlCol="0" anchor="t">
             <a:normAutofit/>
           </a:bodyPr>
           <a:lstStyle/>
@@ -7971,7 +8097,7 @@
               <a:buNone/>
             </a:pPr>
             <a:r>
-              <a:rPr lang="en-US" sz="1550" dirty="0">
+              <a:rPr lang="en-US" sz="1320" dirty="0">
                 <a:solidFill>
                   <a:srgbClr val="17364A"/>
                 </a:solidFill>
@@ -7979,9 +8105,9 @@
                 <a:ea typeface="Aptos" pitchFamily="34" charset="-122"/>
                 <a:cs typeface="Aptos" pitchFamily="34" charset="-120"/>
               </a:rPr>
-              <a:t>Identify what could go wrong, who could be affected, what safeguards are needed, and what evidence should be reviewed before use expands.</a:t>
-            </a:r>
-            <a:endParaRPr lang="en-US" sz="1550" dirty="0"/>
+              <a:t>Identify what could go wrong, who could be affected, what safeguards are needed, and what evidence should be reviewed.</a:t>
+            </a:r>
+            <a:endParaRPr lang="en-US" sz="1320" dirty="0"/>
           </a:p>
         </p:txBody>
       </p:sp>
@@ -8282,35 +8408,41 @@
           <a:ln/>
         </p:spPr>
         <p:txBody>
-          <a:bodyPr wrap="square" lIns="635" tIns="635" rIns="635" bIns="635" rtlCol="0" anchor="t">
+          <a:bodyPr wrap="square" lIns="1016" tIns="1016" rIns="1016" bIns="1016" rtlCol="0" anchor="t">
             <a:normAutofit/>
           </a:bodyPr>
           <a:lstStyle/>
           <a:p>
+            <a:pPr indent="0" marL="0">
+              <a:buNone/>
+            </a:pPr>
             <a:r>
               <a:rPr lang="en-US" sz="2100" dirty="0">
                 <a:solidFill>
-                  <a:srgbClr val="17364A"/>
-                </a:solidFill>
-                <a:latin typeface="Aptos" pitchFamily="34" charset="0"/>
-                <a:ea typeface="Aptos" pitchFamily="34" charset="-122"/>
-                <a:cs typeface="Aptos" pitchFamily="34" charset="-120"/>
-              </a:rPr>
-              <a:t>How will prompt injection attempts or unsafe outputs be detected?</a:t>
+                  <a:srgbClr val="003A63"/>
+                </a:solidFill>
+                <a:latin typeface="Aptos" pitchFamily="34" charset="0"/>
+                <a:ea typeface="Aptos" pitchFamily="34" charset="-122"/>
+                <a:cs typeface="Aptos" pitchFamily="34" charset="-120"/>
+              </a:rPr>
+              <a:t>• How will prompt injection attempts or unsafe outputs be detected?</a:t>
             </a:r>
             <a:endParaRPr lang="en-US" sz="2100" dirty="0"/>
           </a:p>
           <a:p>
+            <a:pPr indent="0" marL="0">
+              <a:buNone/>
+            </a:pPr>
             <a:r>
               <a:rPr lang="en-US" sz="2100" dirty="0">
                 <a:solidFill>
-                  <a:srgbClr val="17364A"/>
-                </a:solidFill>
-                <a:latin typeface="Aptos" pitchFamily="34" charset="0"/>
-                <a:ea typeface="Aptos" pitchFamily="34" charset="-122"/>
-                <a:cs typeface="Aptos" pitchFamily="34" charset="-120"/>
-              </a:rPr>
-              <a:t>What logs and incident response steps are required?</a:t>
+                  <a:srgbClr val="003A63"/>
+                </a:solidFill>
+                <a:latin typeface="Aptos" pitchFamily="34" charset="0"/>
+                <a:ea typeface="Aptos" pitchFamily="34" charset="-122"/>
+                <a:cs typeface="Aptos" pitchFamily="34" charset="-120"/>
+              </a:rPr>
+              <a:t>• What logs and incident response steps are required?</a:t>
             </a:r>
             <a:endParaRPr lang="en-US" sz="2100" dirty="0"/>
           </a:p>
@@ -8390,17 +8522,17 @@
         </p:nvSpPr>
         <p:spPr>
           <a:xfrm>
-            <a:off x="7799832" y="1828800"/>
-            <a:ext cx="3145536" cy="685800"/>
-          </a:xfrm>
-          <a:prstGeom prst="rect">
-            <a:avLst/>
-          </a:prstGeom>
-          <a:noFill/>
-          <a:ln/>
-        </p:spPr>
-        <p:txBody>
-          <a:bodyPr wrap="square" lIns="0" tIns="0" rIns="0" bIns="0" rtlCol="0" anchor="t">
+            <a:off x="7799832" y="1801368"/>
+            <a:ext cx="3145536" cy="758952"/>
+          </a:xfrm>
+          <a:prstGeom prst="rect">
+            <a:avLst/>
+          </a:prstGeom>
+          <a:noFill/>
+          <a:ln/>
+        </p:spPr>
+        <p:txBody>
+          <a:bodyPr wrap="square" lIns="254" tIns="254" rIns="254" bIns="254" rtlCol="0" anchor="t">
             <a:normAutofit/>
           </a:bodyPr>
           <a:lstStyle/>
@@ -8409,7 +8541,7 @@
               <a:buNone/>
             </a:pPr>
             <a:r>
-              <a:rPr lang="en-US" sz="1550" dirty="0">
+              <a:rPr lang="en-US" sz="1320" dirty="0">
                 <a:solidFill>
                   <a:srgbClr val="17364A"/>
                 </a:solidFill>
@@ -8419,7 +8551,7 @@
               </a:rPr>
               <a:t>How will prompt injection attempts or unsafe outputs be detected?</a:t>
             </a:r>
-            <a:endParaRPr lang="en-US" sz="1550" dirty="0"/>
+            <a:endParaRPr lang="en-US" sz="1320" dirty="0"/>
           </a:p>
         </p:txBody>
       </p:sp>
@@ -8507,13 +8639,16 @@
           <a:ln/>
         </p:spPr>
         <p:txBody>
-          <a:bodyPr wrap="square" lIns="254" tIns="254" rIns="254" bIns="254" rtlCol="0" anchor="t">
+          <a:bodyPr wrap="square" lIns="508" tIns="508" rIns="508" bIns="508" rtlCol="0" anchor="t">
             <a:normAutofit/>
           </a:bodyPr>
           <a:lstStyle/>
           <a:p>
-            <a:r>
-              <a:rPr lang="en-US" sz="1380" dirty="0">
+            <a:pPr indent="0" marL="0">
+              <a:buNone/>
+            </a:pPr>
+            <a:r>
+              <a:rPr lang="en-US" sz="1220" dirty="0">
                 <a:solidFill>
                   <a:srgbClr val="17364A"/>
                 </a:solidFill>
@@ -8523,11 +8658,14 @@
               </a:rPr>
               <a:t>How will prompt injection attempts or unsafe outputs be detected?</a:t>
             </a:r>
-            <a:endParaRPr lang="en-US" sz="1380" dirty="0"/>
-          </a:p>
-          <a:p>
-            <a:r>
-              <a:rPr lang="en-US" sz="1380" dirty="0">
+            <a:endParaRPr lang="en-US" sz="1220" dirty="0"/>
+          </a:p>
+          <a:p>
+            <a:pPr indent="0" marL="0">
+              <a:buNone/>
+            </a:pPr>
+            <a:r>
+              <a:rPr lang="en-US" sz="1220" dirty="0">
                 <a:solidFill>
                   <a:srgbClr val="17364A"/>
                 </a:solidFill>
@@ -8537,7 +8675,7 @@
               </a:rPr>
               <a:t>What logs and incident response steps are required?</a:t>
             </a:r>
-            <a:endParaRPr lang="en-US" sz="1380" dirty="0"/>
+            <a:endParaRPr lang="en-US" sz="1220" dirty="0"/>
           </a:p>
         </p:txBody>
       </p:sp>
@@ -8615,17 +8753,17 @@
         </p:nvSpPr>
         <p:spPr>
           <a:xfrm>
-            <a:off x="7799832" y="5001768"/>
-            <a:ext cx="3145536" cy="502920"/>
-          </a:xfrm>
-          <a:prstGeom prst="rect">
-            <a:avLst/>
-          </a:prstGeom>
-          <a:noFill/>
-          <a:ln/>
-        </p:spPr>
-        <p:txBody>
-          <a:bodyPr wrap="square" lIns="0" tIns="0" rIns="0" bIns="0" rtlCol="0" anchor="t">
+            <a:off x="7799832" y="4974336"/>
+            <a:ext cx="3145536" cy="576072"/>
+          </a:xfrm>
+          <a:prstGeom prst="rect">
+            <a:avLst/>
+          </a:prstGeom>
+          <a:noFill/>
+          <a:ln/>
+        </p:spPr>
+        <p:txBody>
+          <a:bodyPr wrap="square" lIns="254" tIns="254" rIns="254" bIns="254" rtlCol="0" anchor="t">
             <a:normAutofit/>
           </a:bodyPr>
           <a:lstStyle/>
@@ -8634,7 +8772,7 @@
               <a:buNone/>
             </a:pPr>
             <a:r>
-              <a:rPr lang="en-US" sz="1550" dirty="0">
+              <a:rPr lang="en-US" sz="1320" dirty="0">
                 <a:solidFill>
                   <a:srgbClr val="17364A"/>
                 </a:solidFill>
@@ -8642,9 +8780,9 @@
                 <a:ea typeface="Aptos" pitchFamily="34" charset="-122"/>
                 <a:cs typeface="Aptos" pitchFamily="34" charset="-120"/>
               </a:rPr>
-              <a:t>Identify what could go wrong, who could be affected, what safeguards are needed, and what evidence should be reviewed before use expands.</a:t>
-            </a:r>
-            <a:endParaRPr lang="en-US" sz="1550" dirty="0"/>
+              <a:t>Identify what could go wrong, who could be affected, what safeguards are needed, and what evidence should be reviewed.</a:t>
+            </a:r>
+            <a:endParaRPr lang="en-US" sz="1320" dirty="0"/>
           </a:p>
         </p:txBody>
       </p:sp>
@@ -8945,49 +9083,58 @@
           <a:ln/>
         </p:spPr>
         <p:txBody>
-          <a:bodyPr wrap="square" lIns="635" tIns="635" rIns="635" bIns="635" rtlCol="0" anchor="t">
+          <a:bodyPr wrap="square" lIns="1016" tIns="1016" rIns="1016" bIns="1016" rtlCol="0" anchor="t">
             <a:normAutofit/>
           </a:bodyPr>
           <a:lstStyle/>
           <a:p>
+            <a:pPr indent="0" marL="0">
+              <a:buNone/>
+            </a:pPr>
             <a:r>
               <a:rPr lang="en-US" sz="2100" dirty="0">
                 <a:solidFill>
-                  <a:srgbClr val="17364A"/>
-                </a:solidFill>
-                <a:latin typeface="Aptos" pitchFamily="34" charset="0"/>
-                <a:ea typeface="Aptos" pitchFamily="34" charset="-122"/>
-                <a:cs typeface="Aptos" pitchFamily="34" charset="-120"/>
-              </a:rPr>
-              <a:t>Create a secure AI workflow checklist for one public health use case.</a:t>
+                  <a:srgbClr val="003A63"/>
+                </a:solidFill>
+                <a:latin typeface="Aptos" pitchFamily="34" charset="0"/>
+                <a:ea typeface="Aptos" pitchFamily="34" charset="-122"/>
+                <a:cs typeface="Aptos" pitchFamily="34" charset="-120"/>
+              </a:rPr>
+              <a:t>• Create a secure AI workflow checklist for one public health use case.</a:t>
             </a:r>
             <a:endParaRPr lang="en-US" sz="2100" dirty="0"/>
           </a:p>
           <a:p>
+            <a:pPr indent="0" marL="0">
+              <a:buNone/>
+            </a:pPr>
             <a:r>
               <a:rPr lang="en-US" sz="2100" dirty="0">
                 <a:solidFill>
-                  <a:srgbClr val="17364A"/>
-                </a:solidFill>
-                <a:latin typeface="Aptos" pitchFamily="34" charset="0"/>
-                <a:ea typeface="Aptos" pitchFamily="34" charset="-122"/>
-                <a:cs typeface="Aptos" pitchFamily="34" charset="-120"/>
-              </a:rPr>
-              <a:t>Include data sensitivity, approved tools, access controls, least-privilege review, prompt injection.</a:t>
+                  <a:srgbClr val="003A63"/>
+                </a:solidFill>
+                <a:latin typeface="Aptos" pitchFamily="34" charset="0"/>
+                <a:ea typeface="Aptos" pitchFamily="34" charset="-122"/>
+                <a:cs typeface="Aptos" pitchFamily="34" charset="-120"/>
+              </a:rPr>
+              <a:t>• Include data sensitivity, approved tools, access controls, least-privilege review, prompt.</a:t>
             </a:r>
             <a:endParaRPr lang="en-US" sz="2100" dirty="0"/>
           </a:p>
           <a:p>
+            <a:pPr indent="0" marL="0">
+              <a:buNone/>
+            </a:pPr>
             <a:r>
               <a:rPr lang="en-US" sz="2100" dirty="0">
                 <a:solidFill>
-                  <a:srgbClr val="17364A"/>
-                </a:solidFill>
-                <a:latin typeface="Aptos" pitchFamily="34" charset="0"/>
-                <a:ea typeface="Aptos" pitchFamily="34" charset="-122"/>
-                <a:cs typeface="Aptos" pitchFamily="34" charset="-120"/>
-              </a:rPr>
-              <a:t>The checklist should identify which controls must be in place before pilot testing and which controls.</a:t>
+                  <a:srgbClr val="003A63"/>
+                </a:solidFill>
+                <a:latin typeface="Aptos" pitchFamily="34" charset="0"/>
+                <a:ea typeface="Aptos" pitchFamily="34" charset="-122"/>
+                <a:cs typeface="Aptos" pitchFamily="34" charset="-120"/>
+              </a:rPr>
+              <a:t>• The checklist should identify which controls must be in place before pilot testing and which.</a:t>
             </a:r>
             <a:endParaRPr lang="en-US" sz="2100" dirty="0"/>
           </a:p>
@@ -9067,17 +9214,17 @@
         </p:nvSpPr>
         <p:spPr>
           <a:xfrm>
-            <a:off x="7799832" y="1828800"/>
-            <a:ext cx="3145536" cy="685800"/>
-          </a:xfrm>
-          <a:prstGeom prst="rect">
-            <a:avLst/>
-          </a:prstGeom>
-          <a:noFill/>
-          <a:ln/>
-        </p:spPr>
-        <p:txBody>
-          <a:bodyPr wrap="square" lIns="0" tIns="0" rIns="0" bIns="0" rtlCol="0" anchor="t">
+            <a:off x="7799832" y="1801368"/>
+            <a:ext cx="3145536" cy="758952"/>
+          </a:xfrm>
+          <a:prstGeom prst="rect">
+            <a:avLst/>
+          </a:prstGeom>
+          <a:noFill/>
+          <a:ln/>
+        </p:spPr>
+        <p:txBody>
+          <a:bodyPr wrap="square" lIns="254" tIns="254" rIns="254" bIns="254" rtlCol="0" anchor="t">
             <a:normAutofit/>
           </a:bodyPr>
           <a:lstStyle/>
@@ -9086,7 +9233,7 @@
               <a:buNone/>
             </a:pPr>
             <a:r>
-              <a:rPr lang="en-US" sz="1550" dirty="0">
+              <a:rPr lang="en-US" sz="1320" dirty="0">
                 <a:solidFill>
                   <a:srgbClr val="17364A"/>
                 </a:solidFill>
@@ -9096,7 +9243,7 @@
               </a:rPr>
               <a:t>Create a secure AI workflow checklist for one public health use case.</a:t>
             </a:r>
-            <a:endParaRPr lang="en-US" sz="1550" dirty="0"/>
+            <a:endParaRPr lang="en-US" sz="1320" dirty="0"/>
           </a:p>
         </p:txBody>
       </p:sp>
@@ -9184,13 +9331,16 @@
           <a:ln/>
         </p:spPr>
         <p:txBody>
-          <a:bodyPr wrap="square" lIns="254" tIns="254" rIns="254" bIns="254" rtlCol="0" anchor="t">
+          <a:bodyPr wrap="square" lIns="508" tIns="508" rIns="508" bIns="508" rtlCol="0" anchor="t">
             <a:normAutofit/>
           </a:bodyPr>
           <a:lstStyle/>
           <a:p>
-            <a:r>
-              <a:rPr lang="en-US" sz="1380" dirty="0">
+            <a:pPr indent="0" marL="0">
+              <a:buNone/>
+            </a:pPr>
+            <a:r>
+              <a:rPr lang="en-US" sz="1220" dirty="0">
                 <a:solidFill>
                   <a:srgbClr val="17364A"/>
                 </a:solidFill>
@@ -9198,13 +9348,16 @@
                 <a:ea typeface="Aptos" pitchFamily="34" charset="-122"/>
                 <a:cs typeface="Aptos" pitchFamily="34" charset="-120"/>
               </a:rPr>
-              <a:t>Include data sensitivity, approved tools, access controls, least-privilege review, prompt.</a:t>
-            </a:r>
-            <a:endParaRPr lang="en-US" sz="1380" dirty="0"/>
-          </a:p>
-          <a:p>
-            <a:r>
-              <a:rPr lang="en-US" sz="1380" dirty="0">
+              <a:t>Include data sensitivity, approved tools, access controls,.</a:t>
+            </a:r>
+            <a:endParaRPr lang="en-US" sz="1220" dirty="0"/>
+          </a:p>
+          <a:p>
+            <a:pPr indent="0" marL="0">
+              <a:buNone/>
+            </a:pPr>
+            <a:r>
+              <a:rPr lang="en-US" sz="1220" dirty="0">
                 <a:solidFill>
                   <a:srgbClr val="17364A"/>
                 </a:solidFill>
@@ -9212,9 +9365,9 @@
                 <a:ea typeface="Aptos" pitchFamily="34" charset="-122"/>
                 <a:cs typeface="Aptos" pitchFamily="34" charset="-120"/>
               </a:rPr>
-              <a:t>The checklist should identify which controls must be in place before pilot testing and.</a:t>
-            </a:r>
-            <a:endParaRPr lang="en-US" sz="1380" dirty="0"/>
+              <a:t>The checklist should identify which controls must be in place.</a:t>
+            </a:r>
+            <a:endParaRPr lang="en-US" sz="1220" dirty="0"/>
           </a:p>
         </p:txBody>
       </p:sp>
@@ -9292,17 +9445,17 @@
         </p:nvSpPr>
         <p:spPr>
           <a:xfrm>
-            <a:off x="7799832" y="5001768"/>
-            <a:ext cx="3145536" cy="502920"/>
-          </a:xfrm>
-          <a:prstGeom prst="rect">
-            <a:avLst/>
-          </a:prstGeom>
-          <a:noFill/>
-          <a:ln/>
-        </p:spPr>
-        <p:txBody>
-          <a:bodyPr wrap="square" lIns="0" tIns="0" rIns="0" bIns="0" rtlCol="0" anchor="t">
+            <a:off x="7799832" y="4974336"/>
+            <a:ext cx="3145536" cy="576072"/>
+          </a:xfrm>
+          <a:prstGeom prst="rect">
+            <a:avLst/>
+          </a:prstGeom>
+          <a:noFill/>
+          <a:ln/>
+        </p:spPr>
+        <p:txBody>
+          <a:bodyPr wrap="square" lIns="254" tIns="254" rIns="254" bIns="254" rtlCol="0" anchor="t">
             <a:normAutofit/>
           </a:bodyPr>
           <a:lstStyle/>
@@ -9311,7 +9464,7 @@
               <a:buNone/>
             </a:pPr>
             <a:r>
-              <a:rPr lang="en-US" sz="1550" dirty="0">
+              <a:rPr lang="en-US" sz="1320" dirty="0">
                 <a:solidFill>
                   <a:srgbClr val="17364A"/>
                 </a:solidFill>
@@ -9319,9 +9472,9 @@
                 <a:ea typeface="Aptos" pitchFamily="34" charset="-122"/>
                 <a:cs typeface="Aptos" pitchFamily="34" charset="-120"/>
               </a:rPr>
-              <a:t>Use the assignment to test whether you can explain the concept, apply it to a realistic public health situation, and identify what would need review before the work moves forward.</a:t>
-            </a:r>
-            <a:endParaRPr lang="en-US" sz="1550" dirty="0"/>
+              <a:t>Use the assignment to test whether you can explain the concept, apply it to a realistic public health situation, and.</a:t>
+            </a:r>
+            <a:endParaRPr lang="en-US" sz="1320" dirty="0"/>
           </a:p>
         </p:txBody>
       </p:sp>
@@ -9622,49 +9775,58 @@
           <a:ln/>
         </p:spPr>
         <p:txBody>
-          <a:bodyPr wrap="square" lIns="635" tIns="635" rIns="635" bIns="635" rtlCol="0" anchor="t">
+          <a:bodyPr wrap="square" lIns="1016" tIns="1016" rIns="1016" bIns="1016" rtlCol="0" anchor="t">
             <a:normAutofit/>
           </a:bodyPr>
           <a:lstStyle/>
           <a:p>
+            <a:pPr indent="0" marL="0">
+              <a:buNone/>
+            </a:pPr>
             <a:r>
               <a:rPr lang="en-US" sz="2100" dirty="0">
                 <a:solidFill>
-                  <a:srgbClr val="17364A"/>
-                </a:solidFill>
-                <a:latin typeface="Aptos" pitchFamily="34" charset="0"/>
-                <a:ea typeface="Aptos" pitchFamily="34" charset="-122"/>
-                <a:cs typeface="Aptos" pitchFamily="34" charset="-120"/>
-              </a:rPr>
-              <a:t>Secure AI workflow checklist</a:t>
+                  <a:srgbClr val="003A63"/>
+                </a:solidFill>
+                <a:latin typeface="Aptos" pitchFamily="34" charset="0"/>
+                <a:ea typeface="Aptos" pitchFamily="34" charset="-122"/>
+                <a:cs typeface="Aptos" pitchFamily="34" charset="-120"/>
+              </a:rPr>
+              <a:t>• Secure AI workflow checklist</a:t>
             </a:r>
             <a:endParaRPr lang="en-US" sz="2100" dirty="0"/>
           </a:p>
           <a:p>
+            <a:pPr indent="0" marL="0">
+              <a:buNone/>
+            </a:pPr>
             <a:r>
               <a:rPr lang="en-US" sz="2100" dirty="0">
                 <a:solidFill>
-                  <a:srgbClr val="17364A"/>
-                </a:solidFill>
-                <a:latin typeface="Aptos" pitchFamily="34" charset="0"/>
-                <a:ea typeface="Aptos" pitchFamily="34" charset="-122"/>
-                <a:cs typeface="Aptos" pitchFamily="34" charset="-120"/>
-              </a:rPr>
-              <a:t>Vendor and implementation security questions</a:t>
+                  <a:srgbClr val="003A63"/>
+                </a:solidFill>
+                <a:latin typeface="Aptos" pitchFamily="34" charset="0"/>
+                <a:ea typeface="Aptos" pitchFamily="34" charset="-122"/>
+                <a:cs typeface="Aptos" pitchFamily="34" charset="-120"/>
+              </a:rPr>
+              <a:t>• Vendor and implementation security questions</a:t>
             </a:r>
             <a:endParaRPr lang="en-US" sz="2100" dirty="0"/>
           </a:p>
           <a:p>
+            <a:pPr indent="0" marL="0">
+              <a:buNone/>
+            </a:pPr>
             <a:r>
               <a:rPr lang="en-US" sz="2100" dirty="0">
                 <a:solidFill>
-                  <a:srgbClr val="17364A"/>
-                </a:solidFill>
-                <a:latin typeface="Aptos" pitchFamily="34" charset="0"/>
-                <a:ea typeface="Aptos" pitchFamily="34" charset="-122"/>
-                <a:cs typeface="Aptos" pitchFamily="34" charset="-120"/>
-              </a:rPr>
-              <a:t>Prompt injection risk notes</a:t>
+                  <a:srgbClr val="003A63"/>
+                </a:solidFill>
+                <a:latin typeface="Aptos" pitchFamily="34" charset="0"/>
+                <a:ea typeface="Aptos" pitchFamily="34" charset="-122"/>
+                <a:cs typeface="Aptos" pitchFamily="34" charset="-120"/>
+              </a:rPr>
+              <a:t>• Prompt injection risk notes</a:t>
             </a:r>
             <a:endParaRPr lang="en-US" sz="2100" dirty="0"/>
           </a:p>
@@ -9744,17 +9906,17 @@
         </p:nvSpPr>
         <p:spPr>
           <a:xfrm>
-            <a:off x="7799832" y="1828800"/>
-            <a:ext cx="3145536" cy="685800"/>
-          </a:xfrm>
-          <a:prstGeom prst="rect">
-            <a:avLst/>
-          </a:prstGeom>
-          <a:noFill/>
-          <a:ln/>
-        </p:spPr>
-        <p:txBody>
-          <a:bodyPr wrap="square" lIns="0" tIns="0" rIns="0" bIns="0" rtlCol="0" anchor="t">
+            <a:off x="7799832" y="1801368"/>
+            <a:ext cx="3145536" cy="758952"/>
+          </a:xfrm>
+          <a:prstGeom prst="rect">
+            <a:avLst/>
+          </a:prstGeom>
+          <a:noFill/>
+          <a:ln/>
+        </p:spPr>
+        <p:txBody>
+          <a:bodyPr wrap="square" lIns="254" tIns="254" rIns="254" bIns="254" rtlCol="0" anchor="t">
             <a:normAutofit/>
           </a:bodyPr>
           <a:lstStyle/>
@@ -9763,7 +9925,7 @@
               <a:buNone/>
             </a:pPr>
             <a:r>
-              <a:rPr lang="en-US" sz="1550" dirty="0">
+              <a:rPr lang="en-US" sz="1320" dirty="0">
                 <a:solidFill>
                   <a:srgbClr val="17364A"/>
                 </a:solidFill>
@@ -9773,7 +9935,7 @@
               </a:rPr>
               <a:t>Secure AI workflow checklist</a:t>
             </a:r>
-            <a:endParaRPr lang="en-US" sz="1550" dirty="0"/>
+            <a:endParaRPr lang="en-US" sz="1320" dirty="0"/>
           </a:p>
         </p:txBody>
       </p:sp>
@@ -9861,13 +10023,16 @@
           <a:ln/>
         </p:spPr>
         <p:txBody>
-          <a:bodyPr wrap="square" lIns="254" tIns="254" rIns="254" bIns="254" rtlCol="0" anchor="t">
+          <a:bodyPr wrap="square" lIns="508" tIns="508" rIns="508" bIns="508" rtlCol="0" anchor="t">
             <a:normAutofit/>
           </a:bodyPr>
           <a:lstStyle/>
           <a:p>
-            <a:r>
-              <a:rPr lang="en-US" sz="1380" dirty="0">
+            <a:pPr indent="0" marL="0">
+              <a:buNone/>
+            </a:pPr>
+            <a:r>
+              <a:rPr lang="en-US" sz="1220" dirty="0">
                 <a:solidFill>
                   <a:srgbClr val="17364A"/>
                 </a:solidFill>
@@ -9877,11 +10042,14 @@
               </a:rPr>
               <a:t>Secure AI workflow checklist</a:t>
             </a:r>
-            <a:endParaRPr lang="en-US" sz="1380" dirty="0"/>
-          </a:p>
-          <a:p>
-            <a:r>
-              <a:rPr lang="en-US" sz="1380" dirty="0">
+            <a:endParaRPr lang="en-US" sz="1220" dirty="0"/>
+          </a:p>
+          <a:p>
+            <a:pPr indent="0" marL="0">
+              <a:buNone/>
+            </a:pPr>
+            <a:r>
+              <a:rPr lang="en-US" sz="1220" dirty="0">
                 <a:solidFill>
                   <a:srgbClr val="17364A"/>
                 </a:solidFill>
@@ -9891,11 +10059,14 @@
               </a:rPr>
               <a:t>Vendor and implementation security questions</a:t>
             </a:r>
-            <a:endParaRPr lang="en-US" sz="1380" dirty="0"/>
-          </a:p>
-          <a:p>
-            <a:r>
-              <a:rPr lang="en-US" sz="1380" dirty="0">
+            <a:endParaRPr lang="en-US" sz="1220" dirty="0"/>
+          </a:p>
+          <a:p>
+            <a:pPr indent="0" marL="0">
+              <a:buNone/>
+            </a:pPr>
+            <a:r>
+              <a:rPr lang="en-US" sz="1220" dirty="0">
                 <a:solidFill>
                   <a:srgbClr val="17364A"/>
                 </a:solidFill>
@@ -9905,7 +10076,7 @@
               </a:rPr>
               <a:t>Prompt injection risk notes</a:t>
             </a:r>
-            <a:endParaRPr lang="en-US" sz="1380" dirty="0"/>
+            <a:endParaRPr lang="en-US" sz="1220" dirty="0"/>
           </a:p>
         </p:txBody>
       </p:sp>
@@ -9983,17 +10154,17 @@
         </p:nvSpPr>
         <p:spPr>
           <a:xfrm>
-            <a:off x="7799832" y="5001768"/>
-            <a:ext cx="3145536" cy="502920"/>
-          </a:xfrm>
-          <a:prstGeom prst="rect">
-            <a:avLst/>
-          </a:prstGeom>
-          <a:noFill/>
-          <a:ln/>
-        </p:spPr>
-        <p:txBody>
-          <a:bodyPr wrap="square" lIns="0" tIns="0" rIns="0" bIns="0" rtlCol="0" anchor="t">
+            <a:off x="7799832" y="4974336"/>
+            <a:ext cx="3145536" cy="576072"/>
+          </a:xfrm>
+          <a:prstGeom prst="rect">
+            <a:avLst/>
+          </a:prstGeom>
+          <a:noFill/>
+          <a:ln/>
+        </p:spPr>
+        <p:txBody>
+          <a:bodyPr wrap="square" lIns="254" tIns="254" rIns="254" bIns="254" rtlCol="0" anchor="t">
             <a:normAutofit/>
           </a:bodyPr>
           <a:lstStyle/>
@@ -10002,7 +10173,7 @@
               <a:buNone/>
             </a:pPr>
             <a:r>
-              <a:rPr lang="en-US" sz="1550" dirty="0">
+              <a:rPr lang="en-US" sz="1320" dirty="0">
                 <a:solidFill>
                   <a:srgbClr val="17364A"/>
                 </a:solidFill>
@@ -10010,9 +10181,9 @@
                 <a:ea typeface="Aptos" pitchFamily="34" charset="-122"/>
                 <a:cs typeface="Aptos" pitchFamily="34" charset="-120"/>
               </a:rPr>
-              <a:t>Identify what could go wrong, who could be affected, what safeguards are needed, and what evidence should be reviewed before use expands.</a:t>
-            </a:r>
-            <a:endParaRPr lang="en-US" sz="1550" dirty="0"/>
+              <a:t>Identify what could go wrong, who could be affected, what safeguards are needed, and what evidence should be reviewed.</a:t>
+            </a:r>
+            <a:endParaRPr lang="en-US" sz="1320" dirty="0"/>
           </a:p>
         </p:txBody>
       </p:sp>
@@ -10313,49 +10484,58 @@
           <a:ln/>
         </p:spPr>
         <p:txBody>
-          <a:bodyPr wrap="square" lIns="635" tIns="635" rIns="635" bIns="635" rtlCol="0" anchor="t">
+          <a:bodyPr wrap="square" lIns="1016" tIns="1016" rIns="1016" bIns="1016" rtlCol="0" anchor="t">
             <a:normAutofit/>
           </a:bodyPr>
           <a:lstStyle/>
           <a:p>
+            <a:pPr indent="0" marL="0">
+              <a:buNone/>
+            </a:pPr>
             <a:r>
               <a:rPr lang="en-US" sz="2100" dirty="0">
                 <a:solidFill>
-                  <a:srgbClr val="17364A"/>
-                </a:solidFill>
-                <a:latin typeface="Aptos" pitchFamily="34" charset="0"/>
-                <a:ea typeface="Aptos" pitchFamily="34" charset="-122"/>
-                <a:cs typeface="Aptos" pitchFamily="34" charset="-120"/>
-              </a:rPr>
-              <a:t>AI security focuses on protecting AI systems, integrations, prompts, outputs, data, users, and connected tools.</a:t>
+                  <a:srgbClr val="003A63"/>
+                </a:solidFill>
+                <a:latin typeface="Aptos" pitchFamily="34" charset="0"/>
+                <a:ea typeface="Aptos" pitchFamily="34" charset="-122"/>
+                <a:cs typeface="Aptos" pitchFamily="34" charset="-120"/>
+              </a:rPr>
+              <a:t>• AI security focuses on protecting AI systems, integrations, prompts, outputs, data, users, and.</a:t>
             </a:r>
             <a:endParaRPr lang="en-US" sz="2100" dirty="0"/>
           </a:p>
           <a:p>
+            <a:pPr indent="0" marL="0">
+              <a:buNone/>
+            </a:pPr>
             <a:r>
               <a:rPr lang="en-US" sz="2100" dirty="0">
                 <a:solidFill>
-                  <a:srgbClr val="17364A"/>
-                </a:solidFill>
-                <a:latin typeface="Aptos" pitchFamily="34" charset="0"/>
-                <a:ea typeface="Aptos" pitchFamily="34" charset="-122"/>
-                <a:cs typeface="Aptos" pitchFamily="34" charset="-120"/>
-              </a:rPr>
-              <a:t>Public health agencies handle sensitive health, demographic, legal, operational, and community information.</a:t>
+                  <a:srgbClr val="003A63"/>
+                </a:solidFill>
+                <a:latin typeface="Aptos" pitchFamily="34" charset="0"/>
+                <a:ea typeface="Aptos" pitchFamily="34" charset="-122"/>
+                <a:cs typeface="Aptos" pitchFamily="34" charset="-120"/>
+              </a:rPr>
+              <a:t>• Public health agencies handle sensitive health, demographic, legal, operational, and community.</a:t>
             </a:r>
             <a:endParaRPr lang="en-US" sz="2100" dirty="0"/>
           </a:p>
           <a:p>
+            <a:pPr indent="0" marL="0">
+              <a:buNone/>
+            </a:pPr>
             <a:r>
               <a:rPr lang="en-US" sz="2100" dirty="0">
                 <a:solidFill>
-                  <a:srgbClr val="17364A"/>
-                </a:solidFill>
-                <a:latin typeface="Aptos" pitchFamily="34" charset="0"/>
-                <a:ea typeface="Aptos" pitchFamily="34" charset="-122"/>
-                <a:cs typeface="Aptos" pitchFamily="34" charset="-120"/>
-              </a:rPr>
-              <a:t>AI security is therefore a core public health safeguard, not only an IT responsibility.</a:t>
+                  <a:srgbClr val="003A63"/>
+                </a:solidFill>
+                <a:latin typeface="Aptos" pitchFamily="34" charset="0"/>
+                <a:ea typeface="Aptos" pitchFamily="34" charset="-122"/>
+                <a:cs typeface="Aptos" pitchFamily="34" charset="-120"/>
+              </a:rPr>
+              <a:t>• AI security is therefore a core public health safeguard, not only an IT responsibility.</a:t>
             </a:r>
             <a:endParaRPr lang="en-US" sz="2100" dirty="0"/>
           </a:p>
@@ -10435,17 +10615,17 @@
         </p:nvSpPr>
         <p:spPr>
           <a:xfrm>
-            <a:off x="8074152" y="1920240"/>
-            <a:ext cx="2825496" cy="1280160"/>
-          </a:xfrm>
-          <a:prstGeom prst="rect">
-            <a:avLst/>
-          </a:prstGeom>
-          <a:noFill/>
-          <a:ln/>
-        </p:spPr>
-        <p:txBody>
-          <a:bodyPr wrap="square" lIns="0" tIns="0" rIns="0" bIns="0" rtlCol="0" anchor="t">
+            <a:off x="8074152" y="1892808"/>
+            <a:ext cx="2825496" cy="1353312"/>
+          </a:xfrm>
+          <a:prstGeom prst="rect">
+            <a:avLst/>
+          </a:prstGeom>
+          <a:noFill/>
+          <a:ln/>
+        </p:spPr>
+        <p:txBody>
+          <a:bodyPr wrap="square" lIns="254" tIns="254" rIns="254" bIns="254" rtlCol="0" anchor="t">
             <a:normAutofit/>
           </a:bodyPr>
           <a:lstStyle/>
@@ -10454,7 +10634,7 @@
               <a:buNone/>
             </a:pPr>
             <a:r>
-              <a:rPr lang="en-US" sz="1550" dirty="0">
+              <a:rPr lang="en-US" sz="1320" dirty="0">
                 <a:solidFill>
                   <a:srgbClr val="17364A"/>
                 </a:solidFill>
@@ -10462,43 +10642,9 @@
                 <a:ea typeface="Aptos" pitchFamily="34" charset="-122"/>
                 <a:cs typeface="Aptos" pitchFamily="34" charset="-120"/>
               </a:rPr>
-              <a:t>Level: intermediate/practitioner</a:t>
-            </a:r>
-            <a:endParaRPr lang="en-US" sz="1550" dirty="0"/>
-          </a:p>
-          <a:p>
-            <a:pPr indent="0" marL="0">
-              <a:buNone/>
-            </a:pPr>
-            <a:r>
-              <a:rPr lang="en-US" sz="1550" dirty="0">
-                <a:solidFill>
-                  <a:srgbClr val="17364A"/>
-                </a:solidFill>
-                <a:latin typeface="Aptos" pitchFamily="34" charset="0"/>
-                <a:ea typeface="Aptos" pitchFamily="34" charset="-122"/>
-                <a:cs typeface="Aptos" pitchFamily="34" charset="-120"/>
-              </a:rPr>
-              <a:t>Primary track: Governance and Security Track</a:t>
-            </a:r>
-            <a:endParaRPr lang="en-US" sz="1550" dirty="0"/>
-          </a:p>
-          <a:p>
-            <a:pPr indent="0" marL="0">
-              <a:buNone/>
-            </a:pPr>
-            <a:r>
-              <a:rPr lang="en-US" sz="1550" dirty="0">
-                <a:solidFill>
-                  <a:srgbClr val="17364A"/>
-                </a:solidFill>
-                <a:latin typeface="Aptos" pitchFamily="34" charset="0"/>
-                <a:ea typeface="Aptos" pitchFamily="34" charset="-122"/>
-                <a:cs typeface="Aptos" pitchFamily="34" charset="-120"/>
-              </a:rPr>
-              <a:t>Appears in tracks: analytics-modeling</a:t>
-            </a:r>
-            <a:endParaRPr lang="en-US" sz="1550" dirty="0"/>
+              <a:t>Level: intermediate/practitioner Primary track: Governance and Security Track Appears in tracks: analytics-modeling</a:t>
+            </a:r>
+            <a:endParaRPr lang="en-US" sz="1320" dirty="0"/>
           </a:p>
         </p:txBody>
       </p:sp>
@@ -10586,13 +10732,16 @@
           <a:ln/>
         </p:spPr>
         <p:txBody>
-          <a:bodyPr wrap="square" lIns="254" tIns="254" rIns="254" bIns="254" rtlCol="0" anchor="t">
+          <a:bodyPr wrap="square" lIns="508" tIns="508" rIns="508" bIns="508" rtlCol="0" anchor="t">
             <a:normAutofit/>
           </a:bodyPr>
           <a:lstStyle/>
           <a:p>
-            <a:r>
-              <a:rPr lang="en-US" sz="1380" dirty="0">
+            <a:pPr indent="0" marL="0">
+              <a:buNone/>
+            </a:pPr>
+            <a:r>
+              <a:rPr lang="en-US" sz="1220" dirty="0">
                 <a:solidFill>
                   <a:srgbClr val="17364A"/>
                 </a:solidFill>
@@ -10602,11 +10751,14 @@
               </a:rPr>
               <a:t>Read the module for shared vocabulary and context.</a:t>
             </a:r>
-            <a:endParaRPr lang="en-US" sz="1380" dirty="0"/>
-          </a:p>
-          <a:p>
-            <a:r>
-              <a:rPr lang="en-US" sz="1380" dirty="0">
+            <a:endParaRPr lang="en-US" sz="1220" dirty="0"/>
+          </a:p>
+          <a:p>
+            <a:pPr indent="0" marL="0">
+              <a:buNone/>
+            </a:pPr>
+            <a:r>
+              <a:rPr lang="en-US" sz="1220" dirty="0">
                 <a:solidFill>
                   <a:srgbClr val="17364A"/>
                 </a:solidFill>
@@ -10616,11 +10768,14 @@
               </a:rPr>
               <a:t>Complete the practical exercise to apply the concept.</a:t>
             </a:r>
-            <a:endParaRPr lang="en-US" sz="1380" dirty="0"/>
-          </a:p>
-          <a:p>
-            <a:r>
-              <a:rPr lang="en-US" sz="1380" dirty="0">
+            <a:endParaRPr lang="en-US" sz="1220" dirty="0"/>
+          </a:p>
+          <a:p>
+            <a:pPr indent="0" marL="0">
+              <a:buNone/>
+            </a:pPr>
+            <a:r>
+              <a:rPr lang="en-US" sz="1220" dirty="0">
                 <a:solidFill>
                   <a:srgbClr val="17364A"/>
                 </a:solidFill>
@@ -10630,7 +10785,7 @@
               </a:rPr>
               <a:t>Use the notes and references for deeper review.</a:t>
             </a:r>
-            <a:endParaRPr lang="en-US" sz="1380" dirty="0"/>
+            <a:endParaRPr lang="en-US" sz="1220" dirty="0"/>
           </a:p>
         </p:txBody>
       </p:sp>
@@ -10931,21 +11086,24 @@
           <a:ln/>
         </p:spPr>
         <p:txBody>
-          <a:bodyPr wrap="square" lIns="635" tIns="635" rIns="635" bIns="635" rtlCol="0" anchor="t">
+          <a:bodyPr wrap="square" lIns="1016" tIns="1016" rIns="1016" bIns="1016" rtlCol="0" anchor="t">
             <a:normAutofit/>
           </a:bodyPr>
           <a:lstStyle/>
           <a:p>
+            <a:pPr indent="0" marL="0">
+              <a:buNone/>
+            </a:pPr>
             <a:r>
               <a:rPr lang="en-US" sz="2100" dirty="0">
                 <a:solidFill>
-                  <a:srgbClr val="17364A"/>
-                </a:solidFill>
-                <a:latin typeface="Aptos" pitchFamily="34" charset="0"/>
-                <a:ea typeface="Aptos" pitchFamily="34" charset="-122"/>
-                <a:cs typeface="Aptos" pitchFamily="34" charset="-120"/>
-              </a:rPr>
-              <a:t>AI incident trigger and escalation plan</a:t>
+                  <a:srgbClr val="003A63"/>
+                </a:solidFill>
+                <a:latin typeface="Aptos" pitchFamily="34" charset="0"/>
+                <a:ea typeface="Aptos" pitchFamily="34" charset="-122"/>
+                <a:cs typeface="Aptos" pitchFamily="34" charset="-120"/>
+              </a:rPr>
+              <a:t>• AI incident trigger and escalation plan</a:t>
             </a:r>
             <a:endParaRPr lang="en-US" sz="2100" dirty="0"/>
           </a:p>
@@ -11025,17 +11183,17 @@
         </p:nvSpPr>
         <p:spPr>
           <a:xfrm>
-            <a:off x="7799832" y="1828800"/>
-            <a:ext cx="3145536" cy="685800"/>
-          </a:xfrm>
-          <a:prstGeom prst="rect">
-            <a:avLst/>
-          </a:prstGeom>
-          <a:noFill/>
-          <a:ln/>
-        </p:spPr>
-        <p:txBody>
-          <a:bodyPr wrap="square" lIns="0" tIns="0" rIns="0" bIns="0" rtlCol="0" anchor="t">
+            <a:off x="7799832" y="1801368"/>
+            <a:ext cx="3145536" cy="758952"/>
+          </a:xfrm>
+          <a:prstGeom prst="rect">
+            <a:avLst/>
+          </a:prstGeom>
+          <a:noFill/>
+          <a:ln/>
+        </p:spPr>
+        <p:txBody>
+          <a:bodyPr wrap="square" lIns="254" tIns="254" rIns="254" bIns="254" rtlCol="0" anchor="t">
             <a:normAutofit/>
           </a:bodyPr>
           <a:lstStyle/>
@@ -11044,7 +11202,7 @@
               <a:buNone/>
             </a:pPr>
             <a:r>
-              <a:rPr lang="en-US" sz="1550" dirty="0">
+              <a:rPr lang="en-US" sz="1320" dirty="0">
                 <a:solidFill>
                   <a:srgbClr val="17364A"/>
                 </a:solidFill>
@@ -11054,7 +11212,7 @@
               </a:rPr>
               <a:t>AI incident trigger and escalation plan</a:t>
             </a:r>
-            <a:endParaRPr lang="en-US" sz="1550" dirty="0"/>
+            <a:endParaRPr lang="en-US" sz="1320" dirty="0"/>
           </a:p>
         </p:txBody>
       </p:sp>
@@ -11142,13 +11300,16 @@
           <a:ln/>
         </p:spPr>
         <p:txBody>
-          <a:bodyPr wrap="square" lIns="254" tIns="254" rIns="254" bIns="254" rtlCol="0" anchor="t">
+          <a:bodyPr wrap="square" lIns="508" tIns="508" rIns="508" bIns="508" rtlCol="0" anchor="t">
             <a:normAutofit/>
           </a:bodyPr>
           <a:lstStyle/>
           <a:p>
-            <a:r>
-              <a:rPr lang="en-US" sz="1380" dirty="0">
+            <a:pPr indent="0" marL="0">
+              <a:buNone/>
+            </a:pPr>
+            <a:r>
+              <a:rPr lang="en-US" sz="1220" dirty="0">
                 <a:solidFill>
                   <a:srgbClr val="17364A"/>
                 </a:solidFill>
@@ -11158,7 +11319,7 @@
               </a:rPr>
               <a:t>AI incident trigger and escalation plan</a:t>
             </a:r>
-            <a:endParaRPr lang="en-US" sz="1380" dirty="0"/>
+            <a:endParaRPr lang="en-US" sz="1220" dirty="0"/>
           </a:p>
         </p:txBody>
       </p:sp>
@@ -11236,17 +11397,17 @@
         </p:nvSpPr>
         <p:spPr>
           <a:xfrm>
-            <a:off x="7799832" y="5001768"/>
-            <a:ext cx="3145536" cy="502920"/>
-          </a:xfrm>
-          <a:prstGeom prst="rect">
-            <a:avLst/>
-          </a:prstGeom>
-          <a:noFill/>
-          <a:ln/>
-        </p:spPr>
-        <p:txBody>
-          <a:bodyPr wrap="square" lIns="0" tIns="0" rIns="0" bIns="0" rtlCol="0" anchor="t">
+            <a:off x="7799832" y="4974336"/>
+            <a:ext cx="3145536" cy="576072"/>
+          </a:xfrm>
+          <a:prstGeom prst="rect">
+            <a:avLst/>
+          </a:prstGeom>
+          <a:noFill/>
+          <a:ln/>
+        </p:spPr>
+        <p:txBody>
+          <a:bodyPr wrap="square" lIns="254" tIns="254" rIns="254" bIns="254" rtlCol="0" anchor="t">
             <a:normAutofit/>
           </a:bodyPr>
           <a:lstStyle/>
@@ -11255,7 +11416,7 @@
               <a:buNone/>
             </a:pPr>
             <a:r>
-              <a:rPr lang="en-US" sz="1550" dirty="0">
+              <a:rPr lang="en-US" sz="1320" dirty="0">
                 <a:solidFill>
                   <a:srgbClr val="17364A"/>
                 </a:solidFill>
@@ -11263,9 +11424,9 @@
                 <a:ea typeface="Aptos" pitchFamily="34" charset="-122"/>
                 <a:cs typeface="Aptos" pitchFamily="34" charset="-120"/>
               </a:rPr>
-              <a:t>Identify what could go wrong, who could be affected, what safeguards are needed, and what evidence should be reviewed before use expands.</a:t>
-            </a:r>
-            <a:endParaRPr lang="en-US" sz="1550" dirty="0"/>
+              <a:t>Identify what could go wrong, who could be affected, what safeguards are needed, and what evidence should be reviewed.</a:t>
+            </a:r>
+            <a:endParaRPr lang="en-US" sz="1320" dirty="0"/>
           </a:p>
         </p:txBody>
       </p:sp>
@@ -11566,49 +11727,58 @@
           <a:ln/>
         </p:spPr>
         <p:txBody>
-          <a:bodyPr wrap="square" lIns="635" tIns="635" rIns="635" bIns="635" rtlCol="0" anchor="t">
+          <a:bodyPr wrap="square" lIns="1016" tIns="1016" rIns="1016" bIns="1016" rtlCol="0" anchor="t">
             <a:normAutofit/>
           </a:bodyPr>
           <a:lstStyle/>
           <a:p>
+            <a:pPr indent="0" marL="0">
+              <a:buNone/>
+            </a:pPr>
             <a:r>
               <a:rPr lang="en-US" sz="2100" dirty="0">
                 <a:solidFill>
-                  <a:srgbClr val="17364A"/>
-                </a:solidFill>
-                <a:latin typeface="Aptos" pitchFamily="34" charset="0"/>
-                <a:ea typeface="Aptos" pitchFamily="34" charset="-122"/>
-                <a:cs typeface="Aptos" pitchFamily="34" charset="-120"/>
-              </a:rPr>
-              <a:t>Secure AI workflow checklist</a:t>
+                  <a:srgbClr val="003A63"/>
+                </a:solidFill>
+                <a:latin typeface="Aptos" pitchFamily="34" charset="0"/>
+                <a:ea typeface="Aptos" pitchFamily="34" charset="-122"/>
+                <a:cs typeface="Aptos" pitchFamily="34" charset="-120"/>
+              </a:rPr>
+              <a:t>• Secure AI workflow checklist</a:t>
             </a:r>
             <a:endParaRPr lang="en-US" sz="2100" dirty="0"/>
           </a:p>
           <a:p>
+            <a:pPr indent="0" marL="0">
+              <a:buNone/>
+            </a:pPr>
             <a:r>
               <a:rPr lang="en-US" sz="2100" dirty="0">
                 <a:solidFill>
-                  <a:srgbClr val="17364A"/>
-                </a:solidFill>
-                <a:latin typeface="Aptos" pitchFamily="34" charset="0"/>
-                <a:ea typeface="Aptos" pitchFamily="34" charset="-122"/>
-                <a:cs typeface="Aptos" pitchFamily="34" charset="-120"/>
-              </a:rPr>
-              <a:t>Vendor and implementation security questions</a:t>
+                  <a:srgbClr val="003A63"/>
+                </a:solidFill>
+                <a:latin typeface="Aptos" pitchFamily="34" charset="0"/>
+                <a:ea typeface="Aptos" pitchFamily="34" charset="-122"/>
+                <a:cs typeface="Aptos" pitchFamily="34" charset="-120"/>
+              </a:rPr>
+              <a:t>• Vendor and implementation security questions</a:t>
             </a:r>
             <a:endParaRPr lang="en-US" sz="2100" dirty="0"/>
           </a:p>
           <a:p>
+            <a:pPr indent="0" marL="0">
+              <a:buNone/>
+            </a:pPr>
             <a:r>
               <a:rPr lang="en-US" sz="2100" dirty="0">
                 <a:solidFill>
-                  <a:srgbClr val="17364A"/>
-                </a:solidFill>
-                <a:latin typeface="Aptos" pitchFamily="34" charset="0"/>
-                <a:ea typeface="Aptos" pitchFamily="34" charset="-122"/>
-                <a:cs typeface="Aptos" pitchFamily="34" charset="-120"/>
-              </a:rPr>
-              <a:t>Prompt injection risk notes</a:t>
+                  <a:srgbClr val="003A63"/>
+                </a:solidFill>
+                <a:latin typeface="Aptos" pitchFamily="34" charset="0"/>
+                <a:ea typeface="Aptos" pitchFamily="34" charset="-122"/>
+                <a:cs typeface="Aptos" pitchFamily="34" charset="-120"/>
+              </a:rPr>
+              <a:t>• Prompt injection risk notes</a:t>
             </a:r>
             <a:endParaRPr lang="en-US" sz="2100" dirty="0"/>
           </a:p>
@@ -11688,17 +11858,17 @@
         </p:nvSpPr>
         <p:spPr>
           <a:xfrm>
-            <a:off x="7799832" y="1828800"/>
-            <a:ext cx="3145536" cy="685800"/>
-          </a:xfrm>
-          <a:prstGeom prst="rect">
-            <a:avLst/>
-          </a:prstGeom>
-          <a:noFill/>
-          <a:ln/>
-        </p:spPr>
-        <p:txBody>
-          <a:bodyPr wrap="square" lIns="0" tIns="0" rIns="0" bIns="0" rtlCol="0" anchor="t">
+            <a:off x="7799832" y="1801368"/>
+            <a:ext cx="3145536" cy="758952"/>
+          </a:xfrm>
+          <a:prstGeom prst="rect">
+            <a:avLst/>
+          </a:prstGeom>
+          <a:noFill/>
+          <a:ln/>
+        </p:spPr>
+        <p:txBody>
+          <a:bodyPr wrap="square" lIns="254" tIns="254" rIns="254" bIns="254" rtlCol="0" anchor="t">
             <a:normAutofit/>
           </a:bodyPr>
           <a:lstStyle/>
@@ -11707,7 +11877,7 @@
               <a:buNone/>
             </a:pPr>
             <a:r>
-              <a:rPr lang="en-US" sz="1550" dirty="0">
+              <a:rPr lang="en-US" sz="1320" dirty="0">
                 <a:solidFill>
                   <a:srgbClr val="17364A"/>
                 </a:solidFill>
@@ -11717,7 +11887,7 @@
               </a:rPr>
               <a:t>Secure AI workflow checklist</a:t>
             </a:r>
-            <a:endParaRPr lang="en-US" sz="1550" dirty="0"/>
+            <a:endParaRPr lang="en-US" sz="1320" dirty="0"/>
           </a:p>
         </p:txBody>
       </p:sp>
@@ -11805,13 +11975,16 @@
           <a:ln/>
         </p:spPr>
         <p:txBody>
-          <a:bodyPr wrap="square" lIns="254" tIns="254" rIns="254" bIns="254" rtlCol="0" anchor="t">
+          <a:bodyPr wrap="square" lIns="508" tIns="508" rIns="508" bIns="508" rtlCol="0" anchor="t">
             <a:normAutofit/>
           </a:bodyPr>
           <a:lstStyle/>
           <a:p>
-            <a:r>
-              <a:rPr lang="en-US" sz="1380" dirty="0">
+            <a:pPr indent="0" marL="0">
+              <a:buNone/>
+            </a:pPr>
+            <a:r>
+              <a:rPr lang="en-US" sz="1220" dirty="0">
                 <a:solidFill>
                   <a:srgbClr val="17364A"/>
                 </a:solidFill>
@@ -11821,11 +11994,14 @@
               </a:rPr>
               <a:t>Secure AI workflow checklist</a:t>
             </a:r>
-            <a:endParaRPr lang="en-US" sz="1380" dirty="0"/>
-          </a:p>
-          <a:p>
-            <a:r>
-              <a:rPr lang="en-US" sz="1380" dirty="0">
+            <a:endParaRPr lang="en-US" sz="1220" dirty="0"/>
+          </a:p>
+          <a:p>
+            <a:pPr indent="0" marL="0">
+              <a:buNone/>
+            </a:pPr>
+            <a:r>
+              <a:rPr lang="en-US" sz="1220" dirty="0">
                 <a:solidFill>
                   <a:srgbClr val="17364A"/>
                 </a:solidFill>
@@ -11835,11 +12011,14 @@
               </a:rPr>
               <a:t>Vendor and implementation security questions</a:t>
             </a:r>
-            <a:endParaRPr lang="en-US" sz="1380" dirty="0"/>
-          </a:p>
-          <a:p>
-            <a:r>
-              <a:rPr lang="en-US" sz="1380" dirty="0">
+            <a:endParaRPr lang="en-US" sz="1220" dirty="0"/>
+          </a:p>
+          <a:p>
+            <a:pPr indent="0" marL="0">
+              <a:buNone/>
+            </a:pPr>
+            <a:r>
+              <a:rPr lang="en-US" sz="1220" dirty="0">
                 <a:solidFill>
                   <a:srgbClr val="17364A"/>
                 </a:solidFill>
@@ -11849,7 +12028,7 @@
               </a:rPr>
               <a:t>Prompt injection risk notes</a:t>
             </a:r>
-            <a:endParaRPr lang="en-US" sz="1380" dirty="0"/>
+            <a:endParaRPr lang="en-US" sz="1220" dirty="0"/>
           </a:p>
         </p:txBody>
       </p:sp>
@@ -11927,17 +12106,17 @@
         </p:nvSpPr>
         <p:spPr>
           <a:xfrm>
-            <a:off x="7799832" y="5001768"/>
-            <a:ext cx="3145536" cy="502920"/>
-          </a:xfrm>
-          <a:prstGeom prst="rect">
-            <a:avLst/>
-          </a:prstGeom>
-          <a:noFill/>
-          <a:ln/>
-        </p:spPr>
-        <p:txBody>
-          <a:bodyPr wrap="square" lIns="0" tIns="0" rIns="0" bIns="0" rtlCol="0" anchor="t">
+            <a:off x="7799832" y="4974336"/>
+            <a:ext cx="3145536" cy="576072"/>
+          </a:xfrm>
+          <a:prstGeom prst="rect">
+            <a:avLst/>
+          </a:prstGeom>
+          <a:noFill/>
+          <a:ln/>
+        </p:spPr>
+        <p:txBody>
+          <a:bodyPr wrap="square" lIns="254" tIns="254" rIns="254" bIns="254" rtlCol="0" anchor="t">
             <a:normAutofit/>
           </a:bodyPr>
           <a:lstStyle/>
@@ -11946,7 +12125,7 @@
               <a:buNone/>
             </a:pPr>
             <a:r>
-              <a:rPr lang="en-US" sz="1550" dirty="0">
+              <a:rPr lang="en-US" sz="1320" dirty="0">
                 <a:solidFill>
                   <a:srgbClr val="17364A"/>
                 </a:solidFill>
@@ -11954,9 +12133,9 @@
                 <a:ea typeface="Aptos" pitchFamily="34" charset="-122"/>
                 <a:cs typeface="Aptos" pitchFamily="34" charset="-120"/>
               </a:rPr>
-              <a:t>Use the assignment to test whether you can explain the concept, apply it to a realistic public health situation, and identify what would need review before the work moves forward.</a:t>
-            </a:r>
-            <a:endParaRPr lang="en-US" sz="1550" dirty="0"/>
+              <a:t>Use the assignment to test whether you can explain the concept, apply it to a realistic public health situation, and.</a:t>
+            </a:r>
+            <a:endParaRPr lang="en-US" sz="1320" dirty="0"/>
           </a:p>
         </p:txBody>
       </p:sp>
@@ -12257,49 +12436,58 @@
           <a:ln/>
         </p:spPr>
         <p:txBody>
-          <a:bodyPr wrap="square" lIns="635" tIns="635" rIns="635" bIns="635" rtlCol="0" anchor="t">
+          <a:bodyPr wrap="square" lIns="1016" tIns="1016" rIns="1016" bIns="1016" rtlCol="0" anchor="t">
             <a:normAutofit/>
           </a:bodyPr>
           <a:lstStyle/>
           <a:p>
+            <a:pPr indent="0" marL="0">
+              <a:buNone/>
+            </a:pPr>
             <a:r>
               <a:rPr lang="en-US" sz="2100" dirty="0">
                 <a:solidFill>
-                  <a:srgbClr val="17364A"/>
-                </a:solidFill>
-                <a:latin typeface="Aptos" pitchFamily="34" charset="0"/>
-                <a:ea typeface="Aptos" pitchFamily="34" charset="-122"/>
-                <a:cs typeface="Aptos" pitchFamily="34" charset="-120"/>
-              </a:rPr>
-              <a:t>1. What is prompt injection?</a:t>
+                  <a:srgbClr val="003A63"/>
+                </a:solidFill>
+                <a:latin typeface="Aptos" pitchFamily="34" charset="0"/>
+                <a:ea typeface="Aptos" pitchFamily="34" charset="-122"/>
+                <a:cs typeface="Aptos" pitchFamily="34" charset="-120"/>
+              </a:rPr>
+              <a:t>• 1. What is prompt injection?</a:t>
             </a:r>
             <a:endParaRPr lang="en-US" sz="2100" dirty="0"/>
           </a:p>
           <a:p>
+            <a:pPr indent="0" marL="0">
+              <a:buNone/>
+            </a:pPr>
             <a:r>
               <a:rPr lang="en-US" sz="2100" dirty="0">
                 <a:solidFill>
-                  <a:srgbClr val="17364A"/>
-                </a:solidFill>
-                <a:latin typeface="Aptos" pitchFamily="34" charset="0"/>
-                <a:ea typeface="Aptos" pitchFamily="34" charset="-122"/>
-                <a:cs typeface="Aptos" pitchFamily="34" charset="-120"/>
-              </a:rPr>
-              <a:t>2. What does least privilege mean?</a:t>
+                  <a:srgbClr val="003A63"/>
+                </a:solidFill>
+                <a:latin typeface="Aptos" pitchFamily="34" charset="0"/>
+                <a:ea typeface="Aptos" pitchFamily="34" charset="-122"/>
+                <a:cs typeface="Aptos" pitchFamily="34" charset="-120"/>
+              </a:rPr>
+              <a:t>• 2. What does least privilege mean?</a:t>
             </a:r>
             <a:endParaRPr lang="en-US" sz="2100" dirty="0"/>
           </a:p>
           <a:p>
+            <a:pPr indent="0" marL="0">
+              <a:buNone/>
+            </a:pPr>
             <a:r>
               <a:rPr lang="en-US" sz="2100" dirty="0">
                 <a:solidFill>
-                  <a:srgbClr val="17364A"/>
-                </a:solidFill>
-                <a:latin typeface="Aptos" pitchFamily="34" charset="0"/>
-                <a:ea typeface="Aptos" pitchFamily="34" charset="-122"/>
-                <a:cs typeface="Aptos" pitchFamily="34" charset="-120"/>
-              </a:rPr>
-              <a:t>3. Why does agentic AI increase security risk?</a:t>
+                  <a:srgbClr val="003A63"/>
+                </a:solidFill>
+                <a:latin typeface="Aptos" pitchFamily="34" charset="0"/>
+                <a:ea typeface="Aptos" pitchFamily="34" charset="-122"/>
+                <a:cs typeface="Aptos" pitchFamily="34" charset="-120"/>
+              </a:rPr>
+              <a:t>• 3. Why does agentic AI increase security risk?</a:t>
             </a:r>
             <a:endParaRPr lang="en-US" sz="2100" dirty="0"/>
           </a:p>
@@ -12379,17 +12567,17 @@
         </p:nvSpPr>
         <p:spPr>
           <a:xfrm>
-            <a:off x="7799832" y="1828800"/>
-            <a:ext cx="3145536" cy="685800"/>
-          </a:xfrm>
-          <a:prstGeom prst="rect">
-            <a:avLst/>
-          </a:prstGeom>
-          <a:noFill/>
-          <a:ln/>
-        </p:spPr>
-        <p:txBody>
-          <a:bodyPr wrap="square" lIns="0" tIns="0" rIns="0" bIns="0" rtlCol="0" anchor="t">
+            <a:off x="7799832" y="1801368"/>
+            <a:ext cx="3145536" cy="758952"/>
+          </a:xfrm>
+          <a:prstGeom prst="rect">
+            <a:avLst/>
+          </a:prstGeom>
+          <a:noFill/>
+          <a:ln/>
+        </p:spPr>
+        <p:txBody>
+          <a:bodyPr wrap="square" lIns="254" tIns="254" rIns="254" bIns="254" rtlCol="0" anchor="t">
             <a:normAutofit/>
           </a:bodyPr>
           <a:lstStyle/>
@@ -12398,7 +12586,7 @@
               <a:buNone/>
             </a:pPr>
             <a:r>
-              <a:rPr lang="en-US" sz="1550" dirty="0">
+              <a:rPr lang="en-US" sz="1320" dirty="0">
                 <a:solidFill>
                   <a:srgbClr val="17364A"/>
                 </a:solidFill>
@@ -12408,7 +12596,7 @@
               </a:rPr>
               <a:t>1. What is prompt injection?</a:t>
             </a:r>
-            <a:endParaRPr lang="en-US" sz="1550" dirty="0"/>
+            <a:endParaRPr lang="en-US" sz="1320" dirty="0"/>
           </a:p>
         </p:txBody>
       </p:sp>
@@ -12496,13 +12684,16 @@
           <a:ln/>
         </p:spPr>
         <p:txBody>
-          <a:bodyPr wrap="square" lIns="254" tIns="254" rIns="254" bIns="254" rtlCol="0" anchor="t">
+          <a:bodyPr wrap="square" lIns="508" tIns="508" rIns="508" bIns="508" rtlCol="0" anchor="t">
             <a:normAutofit/>
           </a:bodyPr>
           <a:lstStyle/>
           <a:p>
-            <a:r>
-              <a:rPr lang="en-US" sz="1380" dirty="0">
+            <a:pPr indent="0" marL="0">
+              <a:buNone/>
+            </a:pPr>
+            <a:r>
+              <a:rPr lang="en-US" sz="1220" dirty="0">
                 <a:solidFill>
                   <a:srgbClr val="17364A"/>
                 </a:solidFill>
@@ -12512,11 +12703,14 @@
               </a:rPr>
               <a:t>1.</a:t>
             </a:r>
-            <a:endParaRPr lang="en-US" sz="1380" dirty="0"/>
-          </a:p>
-          <a:p>
-            <a:r>
-              <a:rPr lang="en-US" sz="1380" dirty="0">
+            <a:endParaRPr lang="en-US" sz="1220" dirty="0"/>
+          </a:p>
+          <a:p>
+            <a:pPr indent="0" marL="0">
+              <a:buNone/>
+            </a:pPr>
+            <a:r>
+              <a:rPr lang="en-US" sz="1220" dirty="0">
                 <a:solidFill>
                   <a:srgbClr val="17364A"/>
                 </a:solidFill>
@@ -12526,11 +12720,14 @@
               </a:rPr>
               <a:t>What is prompt injection?</a:t>
             </a:r>
-            <a:endParaRPr lang="en-US" sz="1380" dirty="0"/>
-          </a:p>
-          <a:p>
-            <a:r>
-              <a:rPr lang="en-US" sz="1380" dirty="0">
+            <a:endParaRPr lang="en-US" sz="1220" dirty="0"/>
+          </a:p>
+          <a:p>
+            <a:pPr indent="0" marL="0">
+              <a:buNone/>
+            </a:pPr>
+            <a:r>
+              <a:rPr lang="en-US" sz="1220" dirty="0">
                 <a:solidFill>
                   <a:srgbClr val="17364A"/>
                 </a:solidFill>
@@ -12540,7 +12737,7 @@
               </a:rPr>
               <a:t>2.</a:t>
             </a:r>
-            <a:endParaRPr lang="en-US" sz="1380" dirty="0"/>
+            <a:endParaRPr lang="en-US" sz="1220" dirty="0"/>
           </a:p>
         </p:txBody>
       </p:sp>
@@ -12618,17 +12815,17 @@
         </p:nvSpPr>
         <p:spPr>
           <a:xfrm>
-            <a:off x="7799832" y="5001768"/>
-            <a:ext cx="3145536" cy="502920"/>
-          </a:xfrm>
-          <a:prstGeom prst="rect">
-            <a:avLst/>
-          </a:prstGeom>
-          <a:noFill/>
-          <a:ln/>
-        </p:spPr>
-        <p:txBody>
-          <a:bodyPr wrap="square" lIns="0" tIns="0" rIns="0" bIns="0" rtlCol="0" anchor="t">
+            <a:off x="7799832" y="4974336"/>
+            <a:ext cx="3145536" cy="576072"/>
+          </a:xfrm>
+          <a:prstGeom prst="rect">
+            <a:avLst/>
+          </a:prstGeom>
+          <a:noFill/>
+          <a:ln/>
+        </p:spPr>
+        <p:txBody>
+          <a:bodyPr wrap="square" lIns="254" tIns="254" rIns="254" bIns="254" rtlCol="0" anchor="t">
             <a:normAutofit/>
           </a:bodyPr>
           <a:lstStyle/>
@@ -12637,7 +12834,7 @@
               <a:buNone/>
             </a:pPr>
             <a:r>
-              <a:rPr lang="en-US" sz="1550" dirty="0">
+              <a:rPr lang="en-US" sz="1320" dirty="0">
                 <a:solidFill>
                   <a:srgbClr val="17364A"/>
                 </a:solidFill>
@@ -12645,9 +12842,9 @@
                 <a:ea typeface="Aptos" pitchFamily="34" charset="-122"/>
                 <a:cs typeface="Aptos" pitchFamily="34" charset="-120"/>
               </a:rPr>
-              <a:t>Use the assignment to test whether you can explain the concept, apply it to a realistic public health situation, and identify what would need review before the work moves forward.</a:t>
-            </a:r>
-            <a:endParaRPr lang="en-US" sz="1550" dirty="0"/>
+              <a:t>Use the assignment to test whether you can explain the concept, apply it to a realistic public health situation, and.</a:t>
+            </a:r>
+            <a:endParaRPr lang="en-US" sz="1320" dirty="0"/>
           </a:p>
         </p:txBody>
       </p:sp>
@@ -12948,49 +13145,58 @@
           <a:ln/>
         </p:spPr>
         <p:txBody>
-          <a:bodyPr wrap="square" lIns="635" tIns="635" rIns="635" bIns="635" rtlCol="0" anchor="t">
+          <a:bodyPr wrap="square" lIns="1016" tIns="1016" rIns="1016" bIns="1016" rtlCol="0" anchor="t">
             <a:normAutofit/>
           </a:bodyPr>
           <a:lstStyle/>
           <a:p>
+            <a:pPr indent="0" marL="0">
+              <a:buNone/>
+            </a:pPr>
             <a:r>
               <a:rPr lang="en-US" sz="2100" dirty="0">
                 <a:solidFill>
-                  <a:srgbClr val="17364A"/>
-                </a:solidFill>
-                <a:latin typeface="Aptos" pitchFamily="34" charset="0"/>
-                <a:ea typeface="Aptos" pitchFamily="34" charset="-122"/>
-                <a:cs typeface="Aptos" pitchFamily="34" charset="-120"/>
-              </a:rPr>
-              <a:t>OWASP Top 10 for Large Language Model Applications:.</a:t>
+                  <a:srgbClr val="003A63"/>
+                </a:solidFill>
+                <a:latin typeface="Aptos" pitchFamily="34" charset="0"/>
+                <a:ea typeface="Aptos" pitchFamily="34" charset="-122"/>
+                <a:cs typeface="Aptos" pitchFamily="34" charset="-120"/>
+              </a:rPr>
+              <a:t>• OWASP Top 10 for Large Language Model Applications:.</a:t>
             </a:r>
             <a:endParaRPr lang="en-US" sz="2100" dirty="0"/>
           </a:p>
           <a:p>
+            <a:pPr indent="0" marL="0">
+              <a:buNone/>
+            </a:pPr>
             <a:r>
               <a:rPr lang="en-US" sz="2100" dirty="0">
                 <a:solidFill>
-                  <a:srgbClr val="17364A"/>
-                </a:solidFill>
-                <a:latin typeface="Aptos" pitchFamily="34" charset="0"/>
-                <a:ea typeface="Aptos" pitchFamily="34" charset="-122"/>
-                <a:cs typeface="Aptos" pitchFamily="34" charset="-120"/>
-              </a:rPr>
-              <a:t>NIST Artificial Intelligence Risk Management Framework:.</a:t>
+                  <a:srgbClr val="003A63"/>
+                </a:solidFill>
+                <a:latin typeface="Aptos" pitchFamily="34" charset="0"/>
+                <a:ea typeface="Aptos" pitchFamily="34" charset="-122"/>
+                <a:cs typeface="Aptos" pitchFamily="34" charset="-120"/>
+              </a:rPr>
+              <a:t>• NIST Artificial Intelligence Risk Management Framework:.</a:t>
             </a:r>
             <a:endParaRPr lang="en-US" sz="2100" dirty="0"/>
           </a:p>
           <a:p>
+            <a:pPr indent="0" marL="0">
+              <a:buNone/>
+            </a:pPr>
             <a:r>
               <a:rPr lang="en-US" sz="2100" dirty="0">
                 <a:solidFill>
-                  <a:srgbClr val="17364A"/>
-                </a:solidFill>
-                <a:latin typeface="Aptos" pitchFamily="34" charset="0"/>
-                <a:ea typeface="Aptos" pitchFamily="34" charset="-122"/>
-                <a:cs typeface="Aptos" pitchFamily="34" charset="-120"/>
-              </a:rPr>
-              <a:t>NIST AI RMF Generative AI Profile:.</a:t>
+                  <a:srgbClr val="003A63"/>
+                </a:solidFill>
+                <a:latin typeface="Aptos" pitchFamily="34" charset="0"/>
+                <a:ea typeface="Aptos" pitchFamily="34" charset="-122"/>
+                <a:cs typeface="Aptos" pitchFamily="34" charset="-120"/>
+              </a:rPr>
+              <a:t>• NIST AI RMF Generative AI Profile:.</a:t>
             </a:r>
             <a:endParaRPr lang="en-US" sz="2100" dirty="0"/>
           </a:p>
@@ -13070,17 +13276,17 @@
         </p:nvSpPr>
         <p:spPr>
           <a:xfrm>
-            <a:off x="7799832" y="1828800"/>
-            <a:ext cx="3145536" cy="685800"/>
-          </a:xfrm>
-          <a:prstGeom prst="rect">
-            <a:avLst/>
-          </a:prstGeom>
-          <a:noFill/>
-          <a:ln/>
-        </p:spPr>
-        <p:txBody>
-          <a:bodyPr wrap="square" lIns="0" tIns="0" rIns="0" bIns="0" rtlCol="0" anchor="t">
+            <a:off x="7799832" y="1801368"/>
+            <a:ext cx="3145536" cy="758952"/>
+          </a:xfrm>
+          <a:prstGeom prst="rect">
+            <a:avLst/>
+          </a:prstGeom>
+          <a:noFill/>
+          <a:ln/>
+        </p:spPr>
+        <p:txBody>
+          <a:bodyPr wrap="square" lIns="254" tIns="254" rIns="254" bIns="254" rtlCol="0" anchor="t">
             <a:normAutofit/>
           </a:bodyPr>
           <a:lstStyle/>
@@ -13089,7 +13295,7 @@
               <a:buNone/>
             </a:pPr>
             <a:r>
-              <a:rPr lang="en-US" sz="1550" dirty="0">
+              <a:rPr lang="en-US" sz="1320" dirty="0">
                 <a:solidFill>
                   <a:srgbClr val="17364A"/>
                 </a:solidFill>
@@ -13099,7 +13305,7 @@
               </a:rPr>
               <a:t>OWASP Top 10 for Large Language Model Applications:.</a:t>
             </a:r>
-            <a:endParaRPr lang="en-US" sz="1550" dirty="0"/>
+            <a:endParaRPr lang="en-US" sz="1320" dirty="0"/>
           </a:p>
         </p:txBody>
       </p:sp>
@@ -13187,13 +13393,16 @@
           <a:ln/>
         </p:spPr>
         <p:txBody>
-          <a:bodyPr wrap="square" lIns="254" tIns="254" rIns="254" bIns="254" rtlCol="0" anchor="t">
+          <a:bodyPr wrap="square" lIns="508" tIns="508" rIns="508" bIns="508" rtlCol="0" anchor="t">
             <a:normAutofit/>
           </a:bodyPr>
           <a:lstStyle/>
           <a:p>
-            <a:r>
-              <a:rPr lang="en-US" sz="1380" dirty="0">
+            <a:pPr indent="0" marL="0">
+              <a:buNone/>
+            </a:pPr>
+            <a:r>
+              <a:rPr lang="en-US" sz="1220" dirty="0">
                 <a:solidFill>
                   <a:srgbClr val="17364A"/>
                 </a:solidFill>
@@ -13203,11 +13412,14 @@
               </a:rPr>
               <a:t>NIST Artificial Intelligence Risk Management Framework:.</a:t>
             </a:r>
-            <a:endParaRPr lang="en-US" sz="1380" dirty="0"/>
-          </a:p>
-          <a:p>
-            <a:r>
-              <a:rPr lang="en-US" sz="1380" dirty="0">
+            <a:endParaRPr lang="en-US" sz="1220" dirty="0"/>
+          </a:p>
+          <a:p>
+            <a:pPr indent="0" marL="0">
+              <a:buNone/>
+            </a:pPr>
+            <a:r>
+              <a:rPr lang="en-US" sz="1220" dirty="0">
                 <a:solidFill>
                   <a:srgbClr val="17364A"/>
                 </a:solidFill>
@@ -13217,11 +13429,14 @@
               </a:rPr>
               <a:t>NIST Privacy Framework: https://www.nist.gov/privacy-framework</a:t>
             </a:r>
-            <a:endParaRPr lang="en-US" sz="1380" dirty="0"/>
-          </a:p>
-          <a:p>
-            <a:r>
-              <a:rPr lang="en-US" sz="1380" dirty="0">
+            <a:endParaRPr lang="en-US" sz="1220" dirty="0"/>
+          </a:p>
+          <a:p>
+            <a:pPr indent="0" marL="0">
+              <a:buNone/>
+            </a:pPr>
+            <a:r>
+              <a:rPr lang="en-US" sz="1220" dirty="0">
                 <a:solidFill>
                   <a:srgbClr val="17364A"/>
                 </a:solidFill>
@@ -13229,9 +13444,9 @@
                 <a:ea typeface="Aptos" pitchFamily="34" charset="-122"/>
                 <a:cs typeface="Aptos" pitchFamily="34" charset="-120"/>
               </a:rPr>
-              <a:t>Agency cybersecurity, identity/access management, privacy, procurement, and incident.</a:t>
-            </a:r>
-            <a:endParaRPr lang="en-US" sz="1380" dirty="0"/>
+              <a:t>Agency cybersecurity, identity/access management, privacy,.</a:t>
+            </a:r>
+            <a:endParaRPr lang="en-US" sz="1220" dirty="0"/>
           </a:p>
         </p:txBody>
       </p:sp>
@@ -13309,17 +13524,17 @@
         </p:nvSpPr>
         <p:spPr>
           <a:xfrm>
-            <a:off x="7799832" y="5001768"/>
-            <a:ext cx="3145536" cy="502920"/>
-          </a:xfrm>
-          <a:prstGeom prst="rect">
-            <a:avLst/>
-          </a:prstGeom>
-          <a:noFill/>
-          <a:ln/>
-        </p:spPr>
-        <p:txBody>
-          <a:bodyPr wrap="square" lIns="0" tIns="0" rIns="0" bIns="0" rtlCol="0" anchor="t">
+            <a:off x="7799832" y="4974336"/>
+            <a:ext cx="3145536" cy="576072"/>
+          </a:xfrm>
+          <a:prstGeom prst="rect">
+            <a:avLst/>
+          </a:prstGeom>
+          <a:noFill/>
+          <a:ln/>
+        </p:spPr>
+        <p:txBody>
+          <a:bodyPr wrap="square" lIns="254" tIns="254" rIns="254" bIns="254" rtlCol="0" anchor="t">
             <a:normAutofit/>
           </a:bodyPr>
           <a:lstStyle/>
@@ -13328,7 +13543,7 @@
               <a:buNone/>
             </a:pPr>
             <a:r>
-              <a:rPr lang="en-US" sz="1550" dirty="0">
+              <a:rPr lang="en-US" sz="1320" dirty="0">
                 <a:solidFill>
                   <a:srgbClr val="17364A"/>
                 </a:solidFill>
@@ -13336,9 +13551,9 @@
                 <a:ea typeface="Aptos" pitchFamily="34" charset="-122"/>
                 <a:cs typeface="Aptos" pitchFamily="34" charset="-120"/>
               </a:rPr>
-              <a:t>Identify what could go wrong, who could be affected, what safeguards are needed, and what evidence should be reviewed before use expands.</a:t>
-            </a:r>
-            <a:endParaRPr lang="en-US" sz="1550" dirty="0"/>
+              <a:t>Identify what could go wrong, who could be affected, what safeguards are needed, and what evidence should be reviewed.</a:t>
+            </a:r>
+            <a:endParaRPr lang="en-US" sz="1320" dirty="0"/>
           </a:p>
         </p:txBody>
       </p:sp>
@@ -13639,63 +13854,75 @@
           <a:ln/>
         </p:spPr>
         <p:txBody>
-          <a:bodyPr wrap="square" lIns="635" tIns="635" rIns="635" bIns="635" rtlCol="0" anchor="t">
+          <a:bodyPr wrap="square" lIns="1016" tIns="1016" rIns="1016" bIns="1016" rtlCol="0" anchor="t">
             <a:normAutofit/>
           </a:bodyPr>
           <a:lstStyle/>
           <a:p>
+            <a:pPr indent="0" marL="0">
+              <a:buNone/>
+            </a:pPr>
             <a:r>
               <a:rPr lang="en-US" sz="1900" dirty="0">
                 <a:solidFill>
-                  <a:srgbClr val="17364A"/>
-                </a:solidFill>
-                <a:latin typeface="Aptos" pitchFamily="34" charset="0"/>
-                <a:ea typeface="Aptos" pitchFamily="34" charset="-122"/>
-                <a:cs typeface="Aptos" pitchFamily="34" charset="-120"/>
-              </a:rPr>
-              <a:t>Play 11: Build and Deploy AI Solutions - This lesson informs Play 11 by helping learners connect the lesson.</a:t>
+                  <a:srgbClr val="003A63"/>
+                </a:solidFill>
+                <a:latin typeface="Aptos" pitchFamily="34" charset="0"/>
+                <a:ea typeface="Aptos" pitchFamily="34" charset="-122"/>
+                <a:cs typeface="Aptos" pitchFamily="34" charset="-120"/>
+              </a:rPr>
+              <a:t>• Play 11: Build and Deploy AI Solutions - This lesson informs Play 11 by helping learners.</a:t>
             </a:r>
             <a:endParaRPr lang="en-US" sz="1900" dirty="0"/>
           </a:p>
           <a:p>
+            <a:pPr indent="0" marL="0">
+              <a:buNone/>
+            </a:pPr>
             <a:r>
               <a:rPr lang="en-US" sz="1900" dirty="0">
                 <a:solidFill>
-                  <a:srgbClr val="17364A"/>
-                </a:solidFill>
-                <a:latin typeface="Aptos" pitchFamily="34" charset="0"/>
-                <a:ea typeface="Aptos" pitchFamily="34" charset="-122"/>
-                <a:cs typeface="Aptos" pitchFamily="34" charset="-120"/>
-              </a:rPr>
-              <a:t>Play 1: Vision &amp; Guardrails - This lesson informs Play 1 by helping learners connect the lesson topic to.</a:t>
+                  <a:srgbClr val="003A63"/>
+                </a:solidFill>
+                <a:latin typeface="Aptos" pitchFamily="34" charset="0"/>
+                <a:ea typeface="Aptos" pitchFamily="34" charset="-122"/>
+                <a:cs typeface="Aptos" pitchFamily="34" charset="-120"/>
+              </a:rPr>
+              <a:t>• Play 1: Vision &amp; Guardrails - This lesson informs Play 1 by helping learners connect the.</a:t>
             </a:r>
             <a:endParaRPr lang="en-US" sz="1900" dirty="0"/>
           </a:p>
           <a:p>
+            <a:pPr indent="0" marL="0">
+              <a:buNone/>
+            </a:pPr>
             <a:r>
               <a:rPr lang="en-US" sz="1900" dirty="0">
                 <a:solidFill>
-                  <a:srgbClr val="17364A"/>
-                </a:solidFill>
-                <a:latin typeface="Aptos" pitchFamily="34" charset="0"/>
-                <a:ea typeface="Aptos" pitchFamily="34" charset="-122"/>
-                <a:cs typeface="Aptos" pitchFamily="34" charset="-120"/>
-              </a:rPr>
-              <a:t>Play 7: Prioritize Use Cases - This lesson informs Play 7 by helping learners connect the lesson topic to.</a:t>
+                  <a:srgbClr val="003A63"/>
+                </a:solidFill>
+                <a:latin typeface="Aptos" pitchFamily="34" charset="0"/>
+                <a:ea typeface="Aptos" pitchFamily="34" charset="-122"/>
+                <a:cs typeface="Aptos" pitchFamily="34" charset="-120"/>
+              </a:rPr>
+              <a:t>• Play 7: Prioritize Use Cases - This lesson informs Play 7 by helping learners connect the.</a:t>
             </a:r>
             <a:endParaRPr lang="en-US" sz="1900" dirty="0"/>
           </a:p>
           <a:p>
+            <a:pPr indent="0" marL="0">
+              <a:buNone/>
+            </a:pPr>
             <a:r>
               <a:rPr lang="en-US" sz="1900" dirty="0">
                 <a:solidFill>
-                  <a:srgbClr val="17364A"/>
-                </a:solidFill>
-                <a:latin typeface="Aptos" pitchFamily="34" charset="0"/>
-                <a:ea typeface="Aptos" pitchFamily="34" charset="-122"/>
-                <a:cs typeface="Aptos" pitchFamily="34" charset="-120"/>
-              </a:rPr>
-              <a:t>Play 8: Develop a Funding Strategy - This lesson informs Play 8 by helping learners connect the lesson topic.</a:t>
+                  <a:srgbClr val="003A63"/>
+                </a:solidFill>
+                <a:latin typeface="Aptos" pitchFamily="34" charset="0"/>
+                <a:ea typeface="Aptos" pitchFamily="34" charset="-122"/>
+                <a:cs typeface="Aptos" pitchFamily="34" charset="-120"/>
+              </a:rPr>
+              <a:t>• Play 8: Develop a Funding Strategy - This lesson informs Play 8 by helping learners connect.</a:t>
             </a:r>
             <a:endParaRPr lang="en-US" sz="1900" dirty="0"/>
           </a:p>
@@ -13775,17 +14002,17 @@
         </p:nvSpPr>
         <p:spPr>
           <a:xfrm>
-            <a:off x="8211312" y="1920240"/>
-            <a:ext cx="2734056" cy="1463040"/>
-          </a:xfrm>
-          <a:prstGeom prst="rect">
-            <a:avLst/>
-          </a:prstGeom>
-          <a:noFill/>
-          <a:ln/>
-        </p:spPr>
-        <p:txBody>
-          <a:bodyPr wrap="square" lIns="0" tIns="0" rIns="0" bIns="0" rtlCol="0" anchor="t">
+            <a:off x="8211312" y="1892808"/>
+            <a:ext cx="2734056" cy="1536192"/>
+          </a:xfrm>
+          <a:prstGeom prst="rect">
+            <a:avLst/>
+          </a:prstGeom>
+          <a:noFill/>
+          <a:ln/>
+        </p:spPr>
+        <p:txBody>
+          <a:bodyPr wrap="square" lIns="254" tIns="254" rIns="254" bIns="254" rtlCol="0" anchor="t">
             <a:normAutofit/>
           </a:bodyPr>
           <a:lstStyle/>
@@ -13794,7 +14021,7 @@
               <a:buNone/>
             </a:pPr>
             <a:r>
-              <a:rPr lang="en-US" sz="1550" dirty="0">
+              <a:rPr lang="en-US" sz="1320" dirty="0">
                 <a:solidFill>
                   <a:srgbClr val="17364A"/>
                 </a:solidFill>
@@ -13802,9 +14029,9 @@
                 <a:ea typeface="Aptos" pitchFamily="34" charset="-122"/>
                 <a:cs typeface="Aptos" pitchFamily="34" charset="-120"/>
               </a:rPr>
-              <a:t>Use the related plays to identify decisions, participants, timing, approvals, and documentation needed for responsible implementation.</a:t>
-            </a:r>
-            <a:endParaRPr lang="en-US" sz="1550" dirty="0"/>
+              <a:t>Use the related plays to identify decisions, participants, timing, approvals, and documentation needed for responsible.</a:t>
+            </a:r>
+            <a:endParaRPr lang="en-US" sz="1320" dirty="0"/>
           </a:p>
         </p:txBody>
       </p:sp>
@@ -13892,13 +14119,16 @@
           <a:ln/>
         </p:spPr>
         <p:txBody>
-          <a:bodyPr wrap="square" lIns="254" tIns="254" rIns="254" bIns="254" rtlCol="0" anchor="t">
+          <a:bodyPr wrap="square" lIns="508" tIns="508" rIns="508" bIns="508" rtlCol="0" anchor="t">
             <a:normAutofit/>
           </a:bodyPr>
           <a:lstStyle/>
           <a:p>
-            <a:r>
-              <a:rPr lang="en-US" sz="1380" dirty="0">
+            <a:pPr indent="0" marL="0">
+              <a:buNone/>
+            </a:pPr>
+            <a:r>
+              <a:rPr lang="en-US" sz="1220" dirty="0">
                 <a:solidFill>
                   <a:srgbClr val="17364A"/>
                 </a:solidFill>
@@ -13908,11 +14138,14 @@
               </a:rPr>
               <a:t>Locate the decision point in the playbook sequence.</a:t>
             </a:r>
-            <a:endParaRPr lang="en-US" sz="1380" dirty="0"/>
-          </a:p>
-          <a:p>
-            <a:r>
-              <a:rPr lang="en-US" sz="1380" dirty="0">
+            <a:endParaRPr lang="en-US" sz="1220" dirty="0"/>
+          </a:p>
+          <a:p>
+            <a:pPr indent="0" marL="0">
+              <a:buNone/>
+            </a:pPr>
+            <a:r>
+              <a:rPr lang="en-US" sz="1220" dirty="0">
                 <a:solidFill>
                   <a:srgbClr val="17364A"/>
                 </a:solidFill>
@@ -13922,11 +14155,14 @@
               </a:rPr>
               <a:t>Identify who should participate in the work.</a:t>
             </a:r>
-            <a:endParaRPr lang="en-US" sz="1380" dirty="0"/>
-          </a:p>
-          <a:p>
-            <a:r>
-              <a:rPr lang="en-US" sz="1380" dirty="0">
+            <a:endParaRPr lang="en-US" sz="1220" dirty="0"/>
+          </a:p>
+          <a:p>
+            <a:pPr indent="0" marL="0">
+              <a:buNone/>
+            </a:pPr>
+            <a:r>
+              <a:rPr lang="en-US" sz="1220" dirty="0">
                 <a:solidFill>
                   <a:srgbClr val="17364A"/>
                 </a:solidFill>
@@ -13936,7 +14172,7 @@
               </a:rPr>
               <a:t>Document the review, approval, or implementation step.</a:t>
             </a:r>
-            <a:endParaRPr lang="en-US" sz="1380" dirty="0"/>
+            <a:endParaRPr lang="en-US" sz="1220" dirty="0"/>
           </a:p>
         </p:txBody>
       </p:sp>
@@ -14237,63 +14473,75 @@
           <a:ln/>
         </p:spPr>
         <p:txBody>
-          <a:bodyPr wrap="square" lIns="635" tIns="635" rIns="635" bIns="635" rtlCol="0" anchor="t">
+          <a:bodyPr wrap="square" lIns="1016" tIns="1016" rIns="1016" bIns="1016" rtlCol="0" anchor="t">
             <a:normAutofit/>
           </a:bodyPr>
           <a:lstStyle/>
           <a:p>
+            <a:pPr indent="0" marL="0">
+              <a:buNone/>
+            </a:pPr>
             <a:r>
               <a:rPr lang="en-US" sz="1850" dirty="0">
                 <a:solidFill>
-                  <a:srgbClr val="17364A"/>
-                </a:solidFill>
-                <a:latin typeface="Aptos" pitchFamily="34" charset="0"/>
-                <a:ea typeface="Aptos" pitchFamily="34" charset="-122"/>
-                <a:cs typeface="Aptos" pitchFamily="34" charset="-120"/>
-              </a:rPr>
-              <a:t>Tool 32: Vendor Evaluation Checklist (Checklist) - Use this tool to complete or strengthen the practical.</a:t>
+                  <a:srgbClr val="003A63"/>
+                </a:solidFill>
+                <a:latin typeface="Aptos" pitchFamily="34" charset="0"/>
+                <a:ea typeface="Aptos" pitchFamily="34" charset="-122"/>
+                <a:cs typeface="Aptos" pitchFamily="34" charset="-120"/>
+              </a:rPr>
+              <a:t>• Tool 32: Vendor Evaluation Checklist (Checklist) - Use this tool to complete or strengthen the.</a:t>
             </a:r>
             <a:endParaRPr lang="en-US" sz="1850" dirty="0"/>
           </a:p>
           <a:p>
+            <a:pPr indent="0" marL="0">
+              <a:buNone/>
+            </a:pPr>
             <a:r>
               <a:rPr lang="en-US" sz="1850" dirty="0">
                 <a:solidFill>
-                  <a:srgbClr val="17364A"/>
-                </a:solidFill>
-                <a:latin typeface="Aptos" pitchFamily="34" charset="0"/>
-                <a:ea typeface="Aptos" pitchFamily="34" charset="-122"/>
-                <a:cs typeface="Aptos" pitchFamily="34" charset="-120"/>
-              </a:rPr>
-              <a:t>Tool 34: STLT AI Procurement and Vendor Addendum (Checklist) - Use this tool to complete or strengthen the.</a:t>
+                  <a:srgbClr val="003A63"/>
+                </a:solidFill>
+                <a:latin typeface="Aptos" pitchFamily="34" charset="0"/>
+                <a:ea typeface="Aptos" pitchFamily="34" charset="-122"/>
+                <a:cs typeface="Aptos" pitchFamily="34" charset="-120"/>
+              </a:rPr>
+              <a:t>• Tool 34: STLT AI Procurement and Vendor Addendum (Checklist) - Use this tool to complete or.</a:t>
             </a:r>
             <a:endParaRPr lang="en-US" sz="1850" dirty="0"/>
           </a:p>
           <a:p>
+            <a:pPr indent="0" marL="0">
+              <a:buNone/>
+            </a:pPr>
             <a:r>
               <a:rPr lang="en-US" sz="1850" dirty="0">
                 <a:solidFill>
-                  <a:srgbClr val="17364A"/>
-                </a:solidFill>
-                <a:latin typeface="Aptos" pitchFamily="34" charset="0"/>
-                <a:ea typeface="Aptos" pitchFamily="34" charset="-122"/>
-                <a:cs typeface="Aptos" pitchFamily="34" charset="-120"/>
-              </a:rPr>
-              <a:t>Tool 4: AI Policy Landscape Scan (Worksheet) - Use AI Policy Landscape Scan to translate this lesson into a.</a:t>
+                  <a:srgbClr val="003A63"/>
+                </a:solidFill>
+                <a:latin typeface="Aptos" pitchFamily="34" charset="0"/>
+                <a:ea typeface="Aptos" pitchFamily="34" charset="-122"/>
+                <a:cs typeface="Aptos" pitchFamily="34" charset="-120"/>
+              </a:rPr>
+              <a:t>• Tool 4: AI Policy Landscape Scan (Worksheet) - Use AI Policy Landscape Scan to translate this.</a:t>
             </a:r>
             <a:endParaRPr lang="en-US" sz="1850" dirty="0"/>
           </a:p>
           <a:p>
+            <a:pPr indent="0" marL="0">
+              <a:buNone/>
+            </a:pPr>
             <a:r>
               <a:rPr lang="en-US" sz="1850" dirty="0">
                 <a:solidFill>
-                  <a:srgbClr val="17364A"/>
-                </a:solidFill>
-                <a:latin typeface="Aptos" pitchFamily="34" charset="0"/>
-                <a:ea typeface="Aptos" pitchFamily="34" charset="-122"/>
-                <a:cs typeface="Aptos" pitchFamily="34" charset="-120"/>
-              </a:rPr>
-              <a:t>Tool 5: AI Environmental and Resource Impact Review (Checklist) - Use AI Environmental and Resource Impact.</a:t>
+                  <a:srgbClr val="003A63"/>
+                </a:solidFill>
+                <a:latin typeface="Aptos" pitchFamily="34" charset="0"/>
+                <a:ea typeface="Aptos" pitchFamily="34" charset="-122"/>
+                <a:cs typeface="Aptos" pitchFamily="34" charset="-120"/>
+              </a:rPr>
+              <a:t>• Tool 5: AI Environmental and Resource Impact Review (Checklist) - Use AI Environmental and.</a:t>
             </a:r>
             <a:endParaRPr lang="en-US" sz="1850" dirty="0"/>
           </a:p>
@@ -14373,17 +14621,17 @@
         </p:nvSpPr>
         <p:spPr>
           <a:xfrm>
-            <a:off x="8211312" y="1920240"/>
-            <a:ext cx="2734056" cy="1463040"/>
-          </a:xfrm>
-          <a:prstGeom prst="rect">
-            <a:avLst/>
-          </a:prstGeom>
-          <a:noFill/>
-          <a:ln/>
-        </p:spPr>
-        <p:txBody>
-          <a:bodyPr wrap="square" lIns="0" tIns="0" rIns="0" bIns="0" rtlCol="0" anchor="t">
+            <a:off x="8211312" y="1892808"/>
+            <a:ext cx="2734056" cy="1536192"/>
+          </a:xfrm>
+          <a:prstGeom prst="rect">
+            <a:avLst/>
+          </a:prstGeom>
+          <a:noFill/>
+          <a:ln/>
+        </p:spPr>
+        <p:txBody>
+          <a:bodyPr wrap="square" lIns="254" tIns="254" rIns="254" bIns="254" rtlCol="0" anchor="t">
             <a:normAutofit/>
           </a:bodyPr>
           <a:lstStyle/>
@@ -14392,7 +14640,7 @@
               <a:buNone/>
             </a:pPr>
             <a:r>
-              <a:rPr lang="en-US" sz="1550" dirty="0">
+              <a:rPr lang="en-US" sz="1320" dirty="0">
                 <a:solidFill>
                   <a:srgbClr val="17364A"/>
                 </a:solidFill>
@@ -14400,9 +14648,9 @@
                 <a:ea typeface="Aptos" pitchFamily="34" charset="-122"/>
                 <a:cs typeface="Aptos" pitchFamily="34" charset="-120"/>
               </a:rPr>
-              <a:t>Use linked tools when your department needs a structured worksheet, template, checklist, review process, or documentation artifact.</a:t>
-            </a:r>
-            <a:endParaRPr lang="en-US" sz="1550" dirty="0"/>
+              <a:t>Use linked tools when your department needs a structured worksheet, template, checklist, review process, or.</a:t>
+            </a:r>
+            <a:endParaRPr lang="en-US" sz="1320" dirty="0"/>
           </a:p>
         </p:txBody>
       </p:sp>
@@ -14490,13 +14738,16 @@
           <a:ln/>
         </p:spPr>
         <p:txBody>
-          <a:bodyPr wrap="square" lIns="254" tIns="254" rIns="254" bIns="254" rtlCol="0" anchor="t">
+          <a:bodyPr wrap="square" lIns="508" tIns="508" rIns="508" bIns="508" rtlCol="0" anchor="t">
             <a:normAutofit/>
           </a:bodyPr>
           <a:lstStyle/>
           <a:p>
-            <a:r>
-              <a:rPr lang="en-US" sz="1380" dirty="0">
+            <a:pPr indent="0" marL="0">
+              <a:buNone/>
+            </a:pPr>
+            <a:r>
+              <a:rPr lang="en-US" sz="1220" dirty="0">
                 <a:solidFill>
                   <a:srgbClr val="17364A"/>
                 </a:solidFill>
@@ -14506,11 +14757,14 @@
               </a:rPr>
               <a:t>Use a tool when no comparable local process exists.</a:t>
             </a:r>
-            <a:endParaRPr lang="en-US" sz="1380" dirty="0"/>
-          </a:p>
-          <a:p>
-            <a:r>
-              <a:rPr lang="en-US" sz="1380" dirty="0">
+            <a:endParaRPr lang="en-US" sz="1220" dirty="0"/>
+          </a:p>
+          <a:p>
+            <a:pPr indent="0" marL="0">
+              <a:buNone/>
+            </a:pPr>
+            <a:r>
+              <a:rPr lang="en-US" sz="1220" dirty="0">
                 <a:solidFill>
                   <a:srgbClr val="17364A"/>
                 </a:solidFill>
@@ -14518,13 +14772,16 @@
                 <a:ea typeface="Aptos" pitchFamily="34" charset="-122"/>
                 <a:cs typeface="Aptos" pitchFamily="34" charset="-120"/>
               </a:rPr>
-              <a:t>Adapt existing department templates when they already fit the purpose.</a:t>
-            </a:r>
-            <a:endParaRPr lang="en-US" sz="1380" dirty="0"/>
-          </a:p>
-          <a:p>
-            <a:r>
-              <a:rPr lang="en-US" sz="1380" dirty="0">
+              <a:t>Adapt existing department templates when they already fit the.</a:t>
+            </a:r>
+            <a:endParaRPr lang="en-US" sz="1220" dirty="0"/>
+          </a:p>
+          <a:p>
+            <a:pPr indent="0" marL="0">
+              <a:buNone/>
+            </a:pPr>
+            <a:r>
+              <a:rPr lang="en-US" sz="1220" dirty="0">
                 <a:solidFill>
                   <a:srgbClr val="17364A"/>
                 </a:solidFill>
@@ -14534,7 +14791,7 @@
               </a:rPr>
               <a:t>Save the completed artifact as evidence of the decision.</a:t>
             </a:r>
-            <a:endParaRPr lang="en-US" sz="1380" dirty="0"/>
+            <a:endParaRPr lang="en-US" sz="1220" dirty="0"/>
           </a:p>
         </p:txBody>
       </p:sp>
@@ -14835,49 +15092,58 @@
           <a:ln/>
         </p:spPr>
         <p:txBody>
-          <a:bodyPr wrap="square" lIns="635" tIns="635" rIns="635" bIns="635" rtlCol="0" anchor="t">
+          <a:bodyPr wrap="square" lIns="1016" tIns="1016" rIns="1016" bIns="1016" rtlCol="0" anchor="t">
             <a:normAutofit/>
           </a:bodyPr>
           <a:lstStyle/>
           <a:p>
+            <a:pPr indent="0" marL="0">
+              <a:buNone/>
+            </a:pPr>
             <a:r>
               <a:rPr lang="en-US" sz="2100" dirty="0">
                 <a:solidFill>
-                  <a:srgbClr val="17364A"/>
-                </a:solidFill>
-                <a:latin typeface="Aptos" pitchFamily="34" charset="0"/>
-                <a:ea typeface="Aptos" pitchFamily="34" charset="-122"/>
-                <a:cs typeface="Aptos" pitchFamily="34" charset="-120"/>
-              </a:rPr>
-              <a:t>Define AI security in public health operational terms.</a:t>
+                  <a:srgbClr val="003A63"/>
+                </a:solidFill>
+                <a:latin typeface="Aptos" pitchFamily="34" charset="0"/>
+                <a:ea typeface="Aptos" pitchFamily="34" charset="-122"/>
+                <a:cs typeface="Aptos" pitchFamily="34" charset="-120"/>
+              </a:rPr>
+              <a:t>• Define AI security in public health operational terms.</a:t>
             </a:r>
             <a:endParaRPr lang="en-US" sz="2100" dirty="0"/>
           </a:p>
           <a:p>
+            <a:pPr indent="0" marL="0">
+              <a:buNone/>
+            </a:pPr>
             <a:r>
               <a:rPr lang="en-US" sz="2100" dirty="0">
                 <a:solidFill>
-                  <a:srgbClr val="17364A"/>
-                </a:solidFill>
-                <a:latin typeface="Aptos" pitchFamily="34" charset="0"/>
-                <a:ea typeface="Aptos" pitchFamily="34" charset="-122"/>
-                <a:cs typeface="Aptos" pitchFamily="34" charset="-120"/>
-              </a:rPr>
-              <a:t>Identify prompt injection, data leakage, sensitive information disclosure, insecure output handling,.</a:t>
+                  <a:srgbClr val="003A63"/>
+                </a:solidFill>
+                <a:latin typeface="Aptos" pitchFamily="34" charset="0"/>
+                <a:ea typeface="Aptos" pitchFamily="34" charset="-122"/>
+                <a:cs typeface="Aptos" pitchFamily="34" charset="-120"/>
+              </a:rPr>
+              <a:t>• Identify prompt injection, data leakage, sensitive information disclosure, insecure output.</a:t>
             </a:r>
             <a:endParaRPr lang="en-US" sz="2100" dirty="0"/>
           </a:p>
           <a:p>
+            <a:pPr indent="0" marL="0">
+              <a:buNone/>
+            </a:pPr>
             <a:r>
               <a:rPr lang="en-US" sz="2100" dirty="0">
                 <a:solidFill>
-                  <a:srgbClr val="17364A"/>
-                </a:solidFill>
-                <a:latin typeface="Aptos" pitchFamily="34" charset="0"/>
-                <a:ea typeface="Aptos" pitchFamily="34" charset="-122"/>
-                <a:cs typeface="Aptos" pitchFamily="34" charset="-120"/>
-              </a:rPr>
-              <a:t>Explain why RAG, plugins, APIs, and agentic workflows increase the need for security controls.</a:t>
+                  <a:srgbClr val="003A63"/>
+                </a:solidFill>
+                <a:latin typeface="Aptos" pitchFamily="34" charset="0"/>
+                <a:ea typeface="Aptos" pitchFamily="34" charset="-122"/>
+                <a:cs typeface="Aptos" pitchFamily="34" charset="-120"/>
+              </a:rPr>
+              <a:t>• Explain why RAG, plugins, APIs, and agentic workflows increase the need for security controls.</a:t>
             </a:r>
             <a:endParaRPr lang="en-US" sz="2100" dirty="0"/>
           </a:p>
@@ -14957,17 +15223,17 @@
         </p:nvSpPr>
         <p:spPr>
           <a:xfrm>
-            <a:off x="7799832" y="1828800"/>
-            <a:ext cx="3145536" cy="685800"/>
-          </a:xfrm>
-          <a:prstGeom prst="rect">
-            <a:avLst/>
-          </a:prstGeom>
-          <a:noFill/>
-          <a:ln/>
-        </p:spPr>
-        <p:txBody>
-          <a:bodyPr wrap="square" lIns="0" tIns="0" rIns="0" bIns="0" rtlCol="0" anchor="t">
+            <a:off x="7799832" y="1801368"/>
+            <a:ext cx="3145536" cy="758952"/>
+          </a:xfrm>
+          <a:prstGeom prst="rect">
+            <a:avLst/>
+          </a:prstGeom>
+          <a:noFill/>
+          <a:ln/>
+        </p:spPr>
+        <p:txBody>
+          <a:bodyPr wrap="square" lIns="254" tIns="254" rIns="254" bIns="254" rtlCol="0" anchor="t">
             <a:normAutofit/>
           </a:bodyPr>
           <a:lstStyle/>
@@ -14976,7 +15242,7 @@
               <a:buNone/>
             </a:pPr>
             <a:r>
-              <a:rPr lang="en-US" sz="1550" dirty="0">
+              <a:rPr lang="en-US" sz="1320" dirty="0">
                 <a:solidFill>
                   <a:srgbClr val="17364A"/>
                 </a:solidFill>
@@ -14986,7 +15252,7 @@
               </a:rPr>
               <a:t>Define AI security in public health operational terms.</a:t>
             </a:r>
-            <a:endParaRPr lang="en-US" sz="1550" dirty="0"/>
+            <a:endParaRPr lang="en-US" sz="1320" dirty="0"/>
           </a:p>
         </p:txBody>
       </p:sp>
@@ -15074,13 +15340,16 @@
           <a:ln/>
         </p:spPr>
         <p:txBody>
-          <a:bodyPr wrap="square" lIns="254" tIns="254" rIns="254" bIns="254" rtlCol="0" anchor="t">
+          <a:bodyPr wrap="square" lIns="508" tIns="508" rIns="508" bIns="508" rtlCol="0" anchor="t">
             <a:normAutofit/>
           </a:bodyPr>
           <a:lstStyle/>
           <a:p>
-            <a:r>
-              <a:rPr lang="en-US" sz="1380" dirty="0">
+            <a:pPr indent="0" marL="0">
+              <a:buNone/>
+            </a:pPr>
+            <a:r>
+              <a:rPr lang="en-US" sz="1220" dirty="0">
                 <a:solidFill>
                   <a:srgbClr val="17364A"/>
                 </a:solidFill>
@@ -15088,13 +15357,16 @@
                 <a:ea typeface="Aptos" pitchFamily="34" charset="-122"/>
                 <a:cs typeface="Aptos" pitchFamily="34" charset="-120"/>
               </a:rPr>
-              <a:t>Identify prompt injection, data leakage, sensitive information disclosure, insecure output.</a:t>
-            </a:r>
-            <a:endParaRPr lang="en-US" sz="1380" dirty="0"/>
-          </a:p>
-          <a:p>
-            <a:r>
-              <a:rPr lang="en-US" sz="1380" dirty="0">
+              <a:t>Identify prompt injection, data leakage, sensitive information.</a:t>
+            </a:r>
+            <a:endParaRPr lang="en-US" sz="1220" dirty="0"/>
+          </a:p>
+          <a:p>
+            <a:pPr indent="0" marL="0">
+              <a:buNone/>
+            </a:pPr>
+            <a:r>
+              <a:rPr lang="en-US" sz="1220" dirty="0">
                 <a:solidFill>
                   <a:srgbClr val="17364A"/>
                 </a:solidFill>
@@ -15102,13 +15374,16 @@
                 <a:ea typeface="Aptos" pitchFamily="34" charset="-122"/>
                 <a:cs typeface="Aptos" pitchFamily="34" charset="-120"/>
               </a:rPr>
-              <a:t>Apply least privilege, approved-tool use, access controls, logging, testing, and incident.</a:t>
-            </a:r>
-            <a:endParaRPr lang="en-US" sz="1380" dirty="0"/>
-          </a:p>
-          <a:p>
-            <a:r>
-              <a:rPr lang="en-US" sz="1380" dirty="0">
+              <a:t>Apply least privilege, approved-tool use, access controls,.</a:t>
+            </a:r>
+            <a:endParaRPr lang="en-US" sz="1220" dirty="0"/>
+          </a:p>
+          <a:p>
+            <a:pPr indent="0" marL="0">
+              <a:buNone/>
+            </a:pPr>
+            <a:r>
+              <a:rPr lang="en-US" sz="1220" dirty="0">
                 <a:solidFill>
                   <a:srgbClr val="17364A"/>
                 </a:solidFill>
@@ -15116,9 +15391,9 @@
                 <a:ea typeface="Aptos" pitchFamily="34" charset="-122"/>
                 <a:cs typeface="Aptos" pitchFamily="34" charset="-120"/>
               </a:rPr>
-              <a:t>Develop security questions for AI procurement, implementation, and monitoring.</a:t>
-            </a:r>
-            <a:endParaRPr lang="en-US" sz="1380" dirty="0"/>
+              <a:t>Develop security questions for AI procurement, implementation, and.</a:t>
+            </a:r>
+            <a:endParaRPr lang="en-US" sz="1220" dirty="0"/>
           </a:p>
         </p:txBody>
       </p:sp>
@@ -15196,17 +15471,17 @@
         </p:nvSpPr>
         <p:spPr>
           <a:xfrm>
-            <a:off x="7799832" y="5001768"/>
-            <a:ext cx="3145536" cy="502920"/>
-          </a:xfrm>
-          <a:prstGeom prst="rect">
-            <a:avLst/>
-          </a:prstGeom>
-          <a:noFill/>
-          <a:ln/>
-        </p:spPr>
-        <p:txBody>
-          <a:bodyPr wrap="square" lIns="0" tIns="0" rIns="0" bIns="0" rtlCol="0" anchor="t">
+            <a:off x="7799832" y="4974336"/>
+            <a:ext cx="3145536" cy="576072"/>
+          </a:xfrm>
+          <a:prstGeom prst="rect">
+            <a:avLst/>
+          </a:prstGeom>
+          <a:noFill/>
+          <a:ln/>
+        </p:spPr>
+        <p:txBody>
+          <a:bodyPr wrap="square" lIns="254" tIns="254" rIns="254" bIns="254" rtlCol="0" anchor="t">
             <a:normAutofit/>
           </a:bodyPr>
           <a:lstStyle/>
@@ -15215,7 +15490,7 @@
               <a:buNone/>
             </a:pPr>
             <a:r>
-              <a:rPr lang="en-US" sz="1550" dirty="0">
+              <a:rPr lang="en-US" sz="1320" dirty="0">
                 <a:solidFill>
                   <a:srgbClr val="17364A"/>
                 </a:solidFill>
@@ -15223,9 +15498,9 @@
                 <a:ea typeface="Aptos" pitchFamily="34" charset="-122"/>
                 <a:cs typeface="Aptos" pitchFamily="34" charset="-120"/>
               </a:rPr>
-              <a:t>Use the assignment to test whether you can explain the concept, apply it to a realistic public health situation, and identify what would need review before the work moves forward.</a:t>
-            </a:r>
-            <a:endParaRPr lang="en-US" sz="1550" dirty="0"/>
+              <a:t>Use the assignment to test whether you can explain the concept, apply it to a realistic public health situation, and.</a:t>
+            </a:r>
+            <a:endParaRPr lang="en-US" sz="1320" dirty="0"/>
           </a:p>
         </p:txBody>
       </p:sp>
@@ -15526,21 +15801,24 @@
           <a:ln/>
         </p:spPr>
         <p:txBody>
-          <a:bodyPr wrap="square" lIns="635" tIns="635" rIns="635" bIns="635" rtlCol="0" anchor="t">
+          <a:bodyPr wrap="square" lIns="1016" tIns="1016" rIns="1016" bIns="1016" rtlCol="0" anchor="t">
             <a:normAutofit/>
           </a:bodyPr>
           <a:lstStyle/>
           <a:p>
+            <a:pPr indent="0" marL="0">
+              <a:buNone/>
+            </a:pPr>
             <a:r>
               <a:rPr lang="en-US" sz="2100" dirty="0">
                 <a:solidFill>
-                  <a:srgbClr val="17364A"/>
-                </a:solidFill>
-                <a:latin typeface="Aptos" pitchFamily="34" charset="0"/>
-                <a:ea typeface="Aptos" pitchFamily="34" charset="-122"/>
-                <a:cs typeface="Aptos" pitchFamily="34" charset="-120"/>
-              </a:rPr>
-              <a:t>Produce a secure AI workflow checklist.</a:t>
+                  <a:srgbClr val="003A63"/>
+                </a:solidFill>
+                <a:latin typeface="Aptos" pitchFamily="34" charset="0"/>
+                <a:ea typeface="Aptos" pitchFamily="34" charset="-122"/>
+                <a:cs typeface="Aptos" pitchFamily="34" charset="-120"/>
+              </a:rPr>
+              <a:t>• Produce a secure AI workflow checklist.</a:t>
             </a:r>
             <a:endParaRPr lang="en-US" sz="2100" dirty="0"/>
           </a:p>
@@ -15620,17 +15898,17 @@
         </p:nvSpPr>
         <p:spPr>
           <a:xfrm>
-            <a:off x="7799832" y="1828800"/>
-            <a:ext cx="3145536" cy="685800"/>
-          </a:xfrm>
-          <a:prstGeom prst="rect">
-            <a:avLst/>
-          </a:prstGeom>
-          <a:noFill/>
-          <a:ln/>
-        </p:spPr>
-        <p:txBody>
-          <a:bodyPr wrap="square" lIns="0" tIns="0" rIns="0" bIns="0" rtlCol="0" anchor="t">
+            <a:off x="7799832" y="1801368"/>
+            <a:ext cx="3145536" cy="758952"/>
+          </a:xfrm>
+          <a:prstGeom prst="rect">
+            <a:avLst/>
+          </a:prstGeom>
+          <a:noFill/>
+          <a:ln/>
+        </p:spPr>
+        <p:txBody>
+          <a:bodyPr wrap="square" lIns="254" tIns="254" rIns="254" bIns="254" rtlCol="0" anchor="t">
             <a:normAutofit/>
           </a:bodyPr>
           <a:lstStyle/>
@@ -15639,7 +15917,7 @@
               <a:buNone/>
             </a:pPr>
             <a:r>
-              <a:rPr lang="en-US" sz="1550" dirty="0">
+              <a:rPr lang="en-US" sz="1320" dirty="0">
                 <a:solidFill>
                   <a:srgbClr val="17364A"/>
                 </a:solidFill>
@@ -15649,7 +15927,7 @@
               </a:rPr>
               <a:t>Produce a secure AI workflow checklist.</a:t>
             </a:r>
-            <a:endParaRPr lang="en-US" sz="1550" dirty="0"/>
+            <a:endParaRPr lang="en-US" sz="1320" dirty="0"/>
           </a:p>
         </p:txBody>
       </p:sp>
@@ -15737,13 +16015,16 @@
           <a:ln/>
         </p:spPr>
         <p:txBody>
-          <a:bodyPr wrap="square" lIns="254" tIns="254" rIns="254" bIns="254" rtlCol="0" anchor="t">
+          <a:bodyPr wrap="square" lIns="508" tIns="508" rIns="508" bIns="508" rtlCol="0" anchor="t">
             <a:normAutofit/>
           </a:bodyPr>
           <a:lstStyle/>
           <a:p>
-            <a:r>
-              <a:rPr lang="en-US" sz="1380" dirty="0">
+            <a:pPr indent="0" marL="0">
+              <a:buNone/>
+            </a:pPr>
+            <a:r>
+              <a:rPr lang="en-US" sz="1220" dirty="0">
                 <a:solidFill>
                   <a:srgbClr val="17364A"/>
                 </a:solidFill>
@@ -15753,7 +16034,7 @@
               </a:rPr>
               <a:t>Produce a secure AI workflow checklist.</a:t>
             </a:r>
-            <a:endParaRPr lang="en-US" sz="1380" dirty="0"/>
+            <a:endParaRPr lang="en-US" sz="1220" dirty="0"/>
           </a:p>
         </p:txBody>
       </p:sp>
@@ -15831,17 +16112,17 @@
         </p:nvSpPr>
         <p:spPr>
           <a:xfrm>
-            <a:off x="7799832" y="5001768"/>
-            <a:ext cx="3145536" cy="502920"/>
-          </a:xfrm>
-          <a:prstGeom prst="rect">
-            <a:avLst/>
-          </a:prstGeom>
-          <a:noFill/>
-          <a:ln/>
-        </p:spPr>
-        <p:txBody>
-          <a:bodyPr wrap="square" lIns="0" tIns="0" rIns="0" bIns="0" rtlCol="0" anchor="t">
+            <a:off x="7799832" y="4974336"/>
+            <a:ext cx="3145536" cy="576072"/>
+          </a:xfrm>
+          <a:prstGeom prst="rect">
+            <a:avLst/>
+          </a:prstGeom>
+          <a:noFill/>
+          <a:ln/>
+        </p:spPr>
+        <p:txBody>
+          <a:bodyPr wrap="square" lIns="254" tIns="254" rIns="254" bIns="254" rtlCol="0" anchor="t">
             <a:normAutofit/>
           </a:bodyPr>
           <a:lstStyle/>
@@ -15850,7 +16131,7 @@
               <a:buNone/>
             </a:pPr>
             <a:r>
-              <a:rPr lang="en-US" sz="1550" dirty="0">
+              <a:rPr lang="en-US" sz="1320" dirty="0">
                 <a:solidFill>
                   <a:srgbClr val="17364A"/>
                 </a:solidFill>
@@ -15858,9 +16139,9 @@
                 <a:ea typeface="Aptos" pitchFamily="34" charset="-122"/>
                 <a:cs typeface="Aptos" pitchFamily="34" charset="-120"/>
               </a:rPr>
-              <a:t>Use the assignment to test whether you can explain the concept, apply it to a realistic public health situation, and identify what would need review before the work moves forward.</a:t>
-            </a:r>
-            <a:endParaRPr lang="en-US" sz="1550" dirty="0"/>
+              <a:t>Use the assignment to test whether you can explain the concept, apply it to a realistic public health situation, and.</a:t>
+            </a:r>
+            <a:endParaRPr lang="en-US" sz="1320" dirty="0"/>
           </a:p>
         </p:txBody>
       </p:sp>
@@ -16161,49 +16442,58 @@
           <a:ln/>
         </p:spPr>
         <p:txBody>
-          <a:bodyPr wrap="square" lIns="635" tIns="635" rIns="635" bIns="635" rtlCol="0" anchor="t">
+          <a:bodyPr wrap="square" lIns="1016" tIns="1016" rIns="1016" bIns="1016" rtlCol="0" anchor="t">
             <a:normAutofit/>
           </a:bodyPr>
           <a:lstStyle/>
           <a:p>
+            <a:pPr indent="0" marL="0">
+              <a:buNone/>
+            </a:pPr>
             <a:r>
               <a:rPr lang="en-US" sz="2100" dirty="0">
                 <a:solidFill>
-                  <a:srgbClr val="17364A"/>
-                </a:solidFill>
-                <a:latin typeface="Aptos" pitchFamily="34" charset="0"/>
-                <a:ea typeface="Aptos" pitchFamily="34" charset="-122"/>
-                <a:cs typeface="Aptos" pitchFamily="34" charset="-120"/>
-              </a:rPr>
-              <a:t>AI security focuses on protecting AI systems, integrations, prompts, outputs, data, users, and.</a:t>
+                  <a:srgbClr val="003A63"/>
+                </a:solidFill>
+                <a:latin typeface="Aptos" pitchFamily="34" charset="0"/>
+                <a:ea typeface="Aptos" pitchFamily="34" charset="-122"/>
+                <a:cs typeface="Aptos" pitchFamily="34" charset="-120"/>
+              </a:rPr>
+              <a:t>• AI security focuses on protecting AI systems, integrations, prompts, outputs, data, users, and.</a:t>
             </a:r>
             <a:endParaRPr lang="en-US" sz="2100" dirty="0"/>
           </a:p>
           <a:p>
+            <a:pPr indent="0" marL="0">
+              <a:buNone/>
+            </a:pPr>
             <a:r>
               <a:rPr lang="en-US" sz="2100" dirty="0">
                 <a:solidFill>
-                  <a:srgbClr val="17364A"/>
-                </a:solidFill>
-                <a:latin typeface="Aptos" pitchFamily="34" charset="0"/>
-                <a:ea typeface="Aptos" pitchFamily="34" charset="-122"/>
-                <a:cs typeface="Aptos" pitchFamily="34" charset="-120"/>
-              </a:rPr>
-              <a:t>Public health agencies handle sensitive health, demographic, legal, operational, and community.</a:t>
+                  <a:srgbClr val="003A63"/>
+                </a:solidFill>
+                <a:latin typeface="Aptos" pitchFamily="34" charset="0"/>
+                <a:ea typeface="Aptos" pitchFamily="34" charset="-122"/>
+                <a:cs typeface="Aptos" pitchFamily="34" charset="-120"/>
+              </a:rPr>
+              <a:t>• Public health agencies handle sensitive health, demographic, legal, operational, and community.</a:t>
             </a:r>
             <a:endParaRPr lang="en-US" sz="2100" dirty="0"/>
           </a:p>
           <a:p>
+            <a:pPr indent="0" marL="0">
+              <a:buNone/>
+            </a:pPr>
             <a:r>
               <a:rPr lang="en-US" sz="2100" dirty="0">
                 <a:solidFill>
-                  <a:srgbClr val="17364A"/>
-                </a:solidFill>
-                <a:latin typeface="Aptos" pitchFamily="34" charset="0"/>
-                <a:ea typeface="Aptos" pitchFamily="34" charset="-122"/>
-                <a:cs typeface="Aptos" pitchFamily="34" charset="-120"/>
-              </a:rPr>
-              <a:t>AI security is therefore a core public health safeguard, not only an IT responsibility.</a:t>
+                  <a:srgbClr val="003A63"/>
+                </a:solidFill>
+                <a:latin typeface="Aptos" pitchFamily="34" charset="0"/>
+                <a:ea typeface="Aptos" pitchFamily="34" charset="-122"/>
+                <a:cs typeface="Aptos" pitchFamily="34" charset="-120"/>
+              </a:rPr>
+              <a:t>• AI security is therefore a core public health safeguard, not only an IT responsibility.</a:t>
             </a:r>
             <a:endParaRPr lang="en-US" sz="2100" dirty="0"/>
           </a:p>
@@ -16283,17 +16573,17 @@
         </p:nvSpPr>
         <p:spPr>
           <a:xfrm>
-            <a:off x="7799832" y="1828800"/>
-            <a:ext cx="3145536" cy="685800"/>
-          </a:xfrm>
-          <a:prstGeom prst="rect">
-            <a:avLst/>
-          </a:prstGeom>
-          <a:noFill/>
-          <a:ln/>
-        </p:spPr>
-        <p:txBody>
-          <a:bodyPr wrap="square" lIns="0" tIns="0" rIns="0" bIns="0" rtlCol="0" anchor="t">
+            <a:off x="7799832" y="1801368"/>
+            <a:ext cx="3145536" cy="758952"/>
+          </a:xfrm>
+          <a:prstGeom prst="rect">
+            <a:avLst/>
+          </a:prstGeom>
+          <a:noFill/>
+          <a:ln/>
+        </p:spPr>
+        <p:txBody>
+          <a:bodyPr wrap="square" lIns="254" tIns="254" rIns="254" bIns="254" rtlCol="0" anchor="t">
             <a:normAutofit/>
           </a:bodyPr>
           <a:lstStyle/>
@@ -16302,7 +16592,7 @@
               <a:buNone/>
             </a:pPr>
             <a:r>
-              <a:rPr lang="en-US" sz="1550" dirty="0">
+              <a:rPr lang="en-US" sz="1320" dirty="0">
                 <a:solidFill>
                   <a:srgbClr val="17364A"/>
                 </a:solidFill>
@@ -16312,7 +16602,7 @@
               </a:rPr>
               <a:t>AI security focuses on protecting AI systems, integrations, prompts, outputs, data, users, and.</a:t>
             </a:r>
-            <a:endParaRPr lang="en-US" sz="1550" dirty="0"/>
+            <a:endParaRPr lang="en-US" sz="1320" dirty="0"/>
           </a:p>
         </p:txBody>
       </p:sp>
@@ -16400,13 +16690,16 @@
           <a:ln/>
         </p:spPr>
         <p:txBody>
-          <a:bodyPr wrap="square" lIns="254" tIns="254" rIns="254" bIns="254" rtlCol="0" anchor="t">
+          <a:bodyPr wrap="square" lIns="508" tIns="508" rIns="508" bIns="508" rtlCol="0" anchor="t">
             <a:normAutofit/>
           </a:bodyPr>
           <a:lstStyle/>
           <a:p>
-            <a:r>
-              <a:rPr lang="en-US" sz="1380" dirty="0">
+            <a:pPr indent="0" marL="0">
+              <a:buNone/>
+            </a:pPr>
+            <a:r>
+              <a:rPr lang="en-US" sz="1220" dirty="0">
                 <a:solidFill>
                   <a:srgbClr val="17364A"/>
                 </a:solidFill>
@@ -16414,13 +16707,16 @@
                 <a:ea typeface="Aptos" pitchFamily="34" charset="-122"/>
                 <a:cs typeface="Aptos" pitchFamily="34" charset="-120"/>
               </a:rPr>
-              <a:t>AI security focuses on protecting AI systems, integrations, prompts, outputs, data, users,.</a:t>
-            </a:r>
-            <a:endParaRPr lang="en-US" sz="1380" dirty="0"/>
-          </a:p>
-          <a:p>
-            <a:r>
-              <a:rPr lang="en-US" sz="1380" dirty="0">
+              <a:t>AI security focuses on protecting AI systems, integrations,.</a:t>
+            </a:r>
+            <a:endParaRPr lang="en-US" sz="1220" dirty="0"/>
+          </a:p>
+          <a:p>
+            <a:pPr indent="0" marL="0">
+              <a:buNone/>
+            </a:pPr>
+            <a:r>
+              <a:rPr lang="en-US" sz="1220" dirty="0">
                 <a:solidFill>
                   <a:srgbClr val="17364A"/>
                 </a:solidFill>
@@ -16428,13 +16724,16 @@
                 <a:ea typeface="Aptos" pitchFamily="34" charset="-122"/>
                 <a:cs typeface="Aptos" pitchFamily="34" charset="-120"/>
               </a:rPr>
-              <a:t>Public health agencies handle sensitive health, demographic, legal, operational, and.</a:t>
-            </a:r>
-            <a:endParaRPr lang="en-US" sz="1380" dirty="0"/>
-          </a:p>
-          <a:p>
-            <a:r>
-              <a:rPr lang="en-US" sz="1380" dirty="0">
+              <a:t>Public health agencies handle sensitive health, demographic,.</a:t>
+            </a:r>
+            <a:endParaRPr lang="en-US" sz="1220" dirty="0"/>
+          </a:p>
+          <a:p>
+            <a:pPr indent="0" marL="0">
+              <a:buNone/>
+            </a:pPr>
+            <a:r>
+              <a:rPr lang="en-US" sz="1220" dirty="0">
                 <a:solidFill>
                   <a:srgbClr val="17364A"/>
                 </a:solidFill>
@@ -16442,9 +16741,9 @@
                 <a:ea typeface="Aptos" pitchFamily="34" charset="-122"/>
                 <a:cs typeface="Aptos" pitchFamily="34" charset="-120"/>
               </a:rPr>
-              <a:t>This module introduces security risks that are especially relevant to generative AI, RAG.</a:t>
-            </a:r>
-            <a:endParaRPr lang="en-US" sz="1380" dirty="0"/>
+              <a:t>This module introduces security risks that are especially relevant.</a:t>
+            </a:r>
+            <a:endParaRPr lang="en-US" sz="1220" dirty="0"/>
           </a:p>
         </p:txBody>
       </p:sp>
@@ -16522,17 +16821,17 @@
         </p:nvSpPr>
         <p:spPr>
           <a:xfrm>
-            <a:off x="7799832" y="5001768"/>
-            <a:ext cx="3145536" cy="502920"/>
-          </a:xfrm>
-          <a:prstGeom prst="rect">
-            <a:avLst/>
-          </a:prstGeom>
-          <a:noFill/>
-          <a:ln/>
-        </p:spPr>
-        <p:txBody>
-          <a:bodyPr wrap="square" lIns="0" tIns="0" rIns="0" bIns="0" rtlCol="0" anchor="t">
+            <a:off x="7799832" y="4974336"/>
+            <a:ext cx="3145536" cy="576072"/>
+          </a:xfrm>
+          <a:prstGeom prst="rect">
+            <a:avLst/>
+          </a:prstGeom>
+          <a:noFill/>
+          <a:ln/>
+        </p:spPr>
+        <p:txBody>
+          <a:bodyPr wrap="square" lIns="254" tIns="254" rIns="254" bIns="254" rtlCol="0" anchor="t">
             <a:normAutofit/>
           </a:bodyPr>
           <a:lstStyle/>
@@ -16541,7 +16840,7 @@
               <a:buNone/>
             </a:pPr>
             <a:r>
-              <a:rPr lang="en-US" sz="1550" dirty="0">
+              <a:rPr lang="en-US" sz="1320" dirty="0">
                 <a:solidFill>
                   <a:srgbClr val="17364A"/>
                 </a:solidFill>
@@ -16549,9 +16848,9 @@
                 <a:ea typeface="Aptos" pitchFamily="34" charset="-122"/>
                 <a:cs typeface="Aptos" pitchFamily="34" charset="-120"/>
               </a:rPr>
-              <a:t>Identify what could go wrong, who could be affected, what safeguards are needed, and what evidence should be reviewed before use expands.</a:t>
-            </a:r>
-            <a:endParaRPr lang="en-US" sz="1550" dirty="0"/>
+              <a:t>Identify what could go wrong, who could be affected, what safeguards are needed, and what evidence should be reviewed.</a:t>
+            </a:r>
+            <a:endParaRPr lang="en-US" sz="1320" dirty="0"/>
           </a:p>
         </p:txBody>
       </p:sp>
@@ -16852,49 +17151,58 @@
           <a:ln/>
         </p:spPr>
         <p:txBody>
-          <a:bodyPr wrap="square" lIns="635" tIns="635" rIns="635" bIns="635" rtlCol="0" anchor="t">
+          <a:bodyPr wrap="square" lIns="1016" tIns="1016" rIns="1016" bIns="1016" rtlCol="0" anchor="t">
             <a:normAutofit/>
           </a:bodyPr>
           <a:lstStyle/>
           <a:p>
+            <a:pPr indent="0" marL="0">
+              <a:buNone/>
+            </a:pPr>
             <a:r>
               <a:rPr lang="en-US" sz="2100" dirty="0">
                 <a:solidFill>
-                  <a:srgbClr val="17364A"/>
-                </a:solidFill>
-                <a:latin typeface="Aptos" pitchFamily="34" charset="0"/>
-                <a:ea typeface="Aptos" pitchFamily="34" charset="-122"/>
-                <a:cs typeface="Aptos" pitchFamily="34" charset="-120"/>
-              </a:rPr>
-              <a:t>This module provides national-level training guidance for public health agencies and partners.</a:t>
+                  <a:srgbClr val="003A63"/>
+                </a:solidFill>
+                <a:latin typeface="Aptos" pitchFamily="34" charset="0"/>
+                <a:ea typeface="Aptos" pitchFamily="34" charset="-122"/>
+                <a:cs typeface="Aptos" pitchFamily="34" charset="-120"/>
+              </a:rPr>
+              <a:t>• This module provides national-level training guidance for public health agencies and partners.</a:t>
             </a:r>
             <a:endParaRPr lang="en-US" sz="2100" dirty="0"/>
           </a:p>
           <a:p>
+            <a:pPr indent="0" marL="0">
+              <a:buNone/>
+            </a:pPr>
             <a:r>
               <a:rPr lang="en-US" sz="2100" dirty="0">
                 <a:solidFill>
-                  <a:srgbClr val="17364A"/>
-                </a:solidFill>
-                <a:latin typeface="Aptos" pitchFamily="34" charset="0"/>
-                <a:ea typeface="Aptos" pitchFamily="34" charset="-122"/>
-                <a:cs typeface="Aptos" pitchFamily="34" charset="-120"/>
-              </a:rPr>
-              <a:t>It is not legal advice and does not replace review by agency legal counsel, privacy officers,.</a:t>
+                  <a:srgbClr val="003A63"/>
+                </a:solidFill>
+                <a:latin typeface="Aptos" pitchFamily="34" charset="0"/>
+                <a:ea typeface="Aptos" pitchFamily="34" charset="-122"/>
+                <a:cs typeface="Aptos" pitchFamily="34" charset="-120"/>
+              </a:rPr>
+              <a:t>• It is not legal advice and does not replace review by agency legal counsel, privacy officers,.</a:t>
             </a:r>
             <a:endParaRPr lang="en-US" sz="2100" dirty="0"/>
           </a:p>
           <a:p>
+            <a:pPr indent="0" marL="0">
+              <a:buNone/>
+            </a:pPr>
             <a:r>
               <a:rPr lang="en-US" sz="2100" dirty="0">
                 <a:solidFill>
-                  <a:srgbClr val="17364A"/>
-                </a:solidFill>
-                <a:latin typeface="Aptos" pitchFamily="34" charset="0"/>
-                <a:ea typeface="Aptos" pitchFamily="34" charset="-122"/>
-                <a:cs typeface="Aptos" pitchFamily="34" charset="-120"/>
-              </a:rPr>
-              <a:t>Requirements may vary by state, locality, territory, Tribe, agency, funding source, data-sharing.</a:t>
+                  <a:srgbClr val="003A63"/>
+                </a:solidFill>
+                <a:latin typeface="Aptos" pitchFamily="34" charset="0"/>
+                <a:ea typeface="Aptos" pitchFamily="34" charset="-122"/>
+                <a:cs typeface="Aptos" pitchFamily="34" charset="-120"/>
+              </a:rPr>
+              <a:t>• Requirements may vary by state, locality, territory, Tribe, agency, funding source,.</a:t>
             </a:r>
             <a:endParaRPr lang="en-US" sz="2100" dirty="0"/>
           </a:p>
@@ -16974,17 +17282,17 @@
         </p:nvSpPr>
         <p:spPr>
           <a:xfrm>
-            <a:off x="7799832" y="1828800"/>
-            <a:ext cx="3145536" cy="685800"/>
-          </a:xfrm>
-          <a:prstGeom prst="rect">
-            <a:avLst/>
-          </a:prstGeom>
-          <a:noFill/>
-          <a:ln/>
-        </p:spPr>
-        <p:txBody>
-          <a:bodyPr wrap="square" lIns="0" tIns="0" rIns="0" bIns="0" rtlCol="0" anchor="t">
+            <a:off x="7799832" y="1801368"/>
+            <a:ext cx="3145536" cy="758952"/>
+          </a:xfrm>
+          <a:prstGeom prst="rect">
+            <a:avLst/>
+          </a:prstGeom>
+          <a:noFill/>
+          <a:ln/>
+        </p:spPr>
+        <p:txBody>
+          <a:bodyPr wrap="square" lIns="254" tIns="254" rIns="254" bIns="254" rtlCol="0" anchor="t">
             <a:normAutofit/>
           </a:bodyPr>
           <a:lstStyle/>
@@ -16993,7 +17301,7 @@
               <a:buNone/>
             </a:pPr>
             <a:r>
-              <a:rPr lang="en-US" sz="1550" dirty="0">
+              <a:rPr lang="en-US" sz="1320" dirty="0">
                 <a:solidFill>
                   <a:srgbClr val="17364A"/>
                 </a:solidFill>
@@ -17003,7 +17311,7 @@
               </a:rPr>
               <a:t>This module provides national-level training guidance for public health agencies and partners.</a:t>
             </a:r>
-            <a:endParaRPr lang="en-US" sz="1550" dirty="0"/>
+            <a:endParaRPr lang="en-US" sz="1320" dirty="0"/>
           </a:p>
         </p:txBody>
       </p:sp>
@@ -17091,13 +17399,16 @@
           <a:ln/>
         </p:spPr>
         <p:txBody>
-          <a:bodyPr wrap="square" lIns="254" tIns="254" rIns="254" bIns="254" rtlCol="0" anchor="t">
+          <a:bodyPr wrap="square" lIns="508" tIns="508" rIns="508" bIns="508" rtlCol="0" anchor="t">
             <a:normAutofit/>
           </a:bodyPr>
           <a:lstStyle/>
           <a:p>
-            <a:r>
-              <a:rPr lang="en-US" sz="1380" dirty="0">
+            <a:pPr indent="0" marL="0">
+              <a:buNone/>
+            </a:pPr>
+            <a:r>
+              <a:rPr lang="en-US" sz="1220" dirty="0">
                 <a:solidFill>
                   <a:srgbClr val="17364A"/>
                 </a:solidFill>
@@ -17105,13 +17416,16 @@
                 <a:ea typeface="Aptos" pitchFamily="34" charset="-122"/>
                 <a:cs typeface="Aptos" pitchFamily="34" charset="-120"/>
               </a:rPr>
-              <a:t>It is not legal advice and does not replace review by agency legal counsel, privacy.</a:t>
-            </a:r>
-            <a:endParaRPr lang="en-US" sz="1380" dirty="0"/>
-          </a:p>
-          <a:p>
-            <a:r>
-              <a:rPr lang="en-US" sz="1380" dirty="0">
+              <a:t>It is not legal advice and does not replace review by agency legal.</a:t>
+            </a:r>
+            <a:endParaRPr lang="en-US" sz="1220" dirty="0"/>
+          </a:p>
+          <a:p>
+            <a:pPr indent="0" marL="0">
+              <a:buNone/>
+            </a:pPr>
+            <a:r>
+              <a:rPr lang="en-US" sz="1220" dirty="0">
                 <a:solidFill>
                   <a:srgbClr val="17364A"/>
                 </a:solidFill>
@@ -17119,13 +17433,16 @@
                 <a:ea typeface="Aptos" pitchFamily="34" charset="-122"/>
                 <a:cs typeface="Aptos" pitchFamily="34" charset="-120"/>
               </a:rPr>
-              <a:t>Requirements may vary by state, locality, territory, Tribe, agency, funding source,.</a:t>
-            </a:r>
-            <a:endParaRPr lang="en-US" sz="1380" dirty="0"/>
-          </a:p>
-          <a:p>
-            <a:r>
-              <a:rPr lang="en-US" sz="1380" dirty="0">
+              <a:t>Requirements may vary by state, locality, territory, Tribe,.</a:t>
+            </a:r>
+            <a:endParaRPr lang="en-US" sz="1220" dirty="0"/>
+          </a:p>
+          <a:p>
+            <a:pPr indent="0" marL="0">
+              <a:buNone/>
+            </a:pPr>
+            <a:r>
+              <a:rPr lang="en-US" sz="1220" dirty="0">
                 <a:solidFill>
                   <a:srgbClr val="17364A"/>
                 </a:solidFill>
@@ -17133,9 +17450,9 @@
                 <a:ea typeface="Aptos" pitchFamily="34" charset="-122"/>
                 <a:cs typeface="Aptos" pitchFamily="34" charset="-120"/>
               </a:rPr>
-              <a:t>Learners should use this module to identify the issues that require review and should.</a:t>
-            </a:r>
-            <a:endParaRPr lang="en-US" sz="1380" dirty="0"/>
+              <a:t>Learners should use this module to identify the issues that.</a:t>
+            </a:r>
+            <a:endParaRPr lang="en-US" sz="1220" dirty="0"/>
           </a:p>
         </p:txBody>
       </p:sp>
@@ -17213,17 +17530,17 @@
         </p:nvSpPr>
         <p:spPr>
           <a:xfrm>
-            <a:off x="7799832" y="5001768"/>
-            <a:ext cx="3145536" cy="502920"/>
-          </a:xfrm>
-          <a:prstGeom prst="rect">
-            <a:avLst/>
-          </a:prstGeom>
-          <a:noFill/>
-          <a:ln/>
-        </p:spPr>
-        <p:txBody>
-          <a:bodyPr wrap="square" lIns="0" tIns="0" rIns="0" bIns="0" rtlCol="0" anchor="t">
+            <a:off x="7799832" y="4974336"/>
+            <a:ext cx="3145536" cy="576072"/>
+          </a:xfrm>
+          <a:prstGeom prst="rect">
+            <a:avLst/>
+          </a:prstGeom>
+          <a:noFill/>
+          <a:ln/>
+        </p:spPr>
+        <p:txBody>
+          <a:bodyPr wrap="square" lIns="254" tIns="254" rIns="254" bIns="254" rtlCol="0" anchor="t">
             <a:normAutofit/>
           </a:bodyPr>
           <a:lstStyle/>
@@ -17232,7 +17549,7 @@
               <a:buNone/>
             </a:pPr>
             <a:r>
-              <a:rPr lang="en-US" sz="1550" dirty="0">
+              <a:rPr lang="en-US" sz="1320" dirty="0">
                 <a:solidFill>
                   <a:srgbClr val="17364A"/>
                 </a:solidFill>
@@ -17240,9 +17557,9 @@
                 <a:ea typeface="Aptos" pitchFamily="34" charset="-122"/>
                 <a:cs typeface="Aptos" pitchFamily="34" charset="-120"/>
               </a:rPr>
-              <a:t>Translate this concept into clear decision rights, review steps, documentation expectations, and escalation paths before an AI-supported workflow is approved.</a:t>
-            </a:r>
-            <a:endParaRPr lang="en-US" sz="1550" dirty="0"/>
+              <a:t>Translate this concept into clear decision rights, review steps, documentation expectations, and escalation paths before.</a:t>
+            </a:r>
+            <a:endParaRPr lang="en-US" sz="1320" dirty="0"/>
           </a:p>
         </p:txBody>
       </p:sp>
@@ -17543,49 +17860,58 @@
           <a:ln/>
         </p:spPr>
         <p:txBody>
-          <a:bodyPr wrap="square" lIns="635" tIns="635" rIns="635" bIns="635" rtlCol="0" anchor="t">
+          <a:bodyPr wrap="square" lIns="1016" tIns="1016" rIns="1016" bIns="1016" rtlCol="0" anchor="t">
             <a:normAutofit/>
           </a:bodyPr>
           <a:lstStyle/>
           <a:p>
+            <a:pPr indent="0" marL="0">
+              <a:buNone/>
+            </a:pPr>
             <a:r>
               <a:rPr lang="en-US" sz="2100" dirty="0">
                 <a:solidFill>
-                  <a:srgbClr val="17364A"/>
-                </a:solidFill>
-                <a:latin typeface="Aptos" pitchFamily="34" charset="0"/>
-                <a:ea typeface="Aptos" pitchFamily="34" charset="-122"/>
-                <a:cs typeface="Aptos" pitchFamily="34" charset="-120"/>
-              </a:rPr>
-              <a:t>AI security matters because public health AI tools may process sensitive records, internal protocols,.</a:t>
+                  <a:srgbClr val="003A63"/>
+                </a:solidFill>
+                <a:latin typeface="Aptos" pitchFamily="34" charset="0"/>
+                <a:ea typeface="Aptos" pitchFamily="34" charset="-122"/>
+                <a:cs typeface="Aptos" pitchFamily="34" charset="-120"/>
+              </a:rPr>
+              <a:t>• AI security matters because public health AI tools may process sensitive records, internal.</a:t>
             </a:r>
             <a:endParaRPr lang="en-US" sz="2100" dirty="0"/>
           </a:p>
           <a:p>
+            <a:pPr indent="0" marL="0">
+              <a:buNone/>
+            </a:pPr>
             <a:r>
               <a:rPr lang="en-US" sz="2100" dirty="0">
                 <a:solidFill>
-                  <a:srgbClr val="17364A"/>
-                </a:solidFill>
-                <a:latin typeface="Aptos" pitchFamily="34" charset="0"/>
-                <a:ea typeface="Aptos" pitchFamily="34" charset="-122"/>
-                <a:cs typeface="Aptos" pitchFamily="34" charset="-120"/>
-              </a:rPr>
-              <a:t>The risks increase when AI tools are connected to email, calendars, case systems, data warehouses,.</a:t>
+                  <a:srgbClr val="003A63"/>
+                </a:solidFill>
+                <a:latin typeface="Aptos" pitchFamily="34" charset="0"/>
+                <a:ea typeface="Aptos" pitchFamily="34" charset="-122"/>
+                <a:cs typeface="Aptos" pitchFamily="34" charset="-120"/>
+              </a:rPr>
+              <a:t>• The risks increase when AI tools are connected to email, calendars, case systems, data.</a:t>
             </a:r>
             <a:endParaRPr lang="en-US" sz="2100" dirty="0"/>
           </a:p>
           <a:p>
+            <a:pPr indent="0" marL="0">
+              <a:buNone/>
+            </a:pPr>
             <a:r>
               <a:rPr lang="en-US" sz="2100" dirty="0">
                 <a:solidFill>
-                  <a:srgbClr val="17364A"/>
-                </a:solidFill>
-                <a:latin typeface="Aptos" pitchFamily="34" charset="0"/>
-                <a:ea typeface="Aptos" pitchFamily="34" charset="-122"/>
-                <a:cs typeface="Aptos" pitchFamily="34" charset="-120"/>
-              </a:rPr>
-              <a:t>A security weakness can become a privacy breach, operational disruption, public trust problem, or legal.</a:t>
+                  <a:srgbClr val="003A63"/>
+                </a:solidFill>
+                <a:latin typeface="Aptos" pitchFamily="34" charset="0"/>
+                <a:ea typeface="Aptos" pitchFamily="34" charset="-122"/>
+                <a:cs typeface="Aptos" pitchFamily="34" charset="-120"/>
+              </a:rPr>
+              <a:t>• A security weakness can become a privacy breach, operational disruption, public trust problem,.</a:t>
             </a:r>
             <a:endParaRPr lang="en-US" sz="2100" dirty="0"/>
           </a:p>
@@ -17665,17 +17991,17 @@
         </p:nvSpPr>
         <p:spPr>
           <a:xfrm>
-            <a:off x="7799832" y="1828800"/>
-            <a:ext cx="3145536" cy="685800"/>
-          </a:xfrm>
-          <a:prstGeom prst="rect">
-            <a:avLst/>
-          </a:prstGeom>
-          <a:noFill/>
-          <a:ln/>
-        </p:spPr>
-        <p:txBody>
-          <a:bodyPr wrap="square" lIns="0" tIns="0" rIns="0" bIns="0" rtlCol="0" anchor="t">
+            <a:off x="7799832" y="1801368"/>
+            <a:ext cx="3145536" cy="758952"/>
+          </a:xfrm>
+          <a:prstGeom prst="rect">
+            <a:avLst/>
+          </a:prstGeom>
+          <a:noFill/>
+          <a:ln/>
+        </p:spPr>
+        <p:txBody>
+          <a:bodyPr wrap="square" lIns="254" tIns="254" rIns="254" bIns="254" rtlCol="0" anchor="t">
             <a:normAutofit/>
           </a:bodyPr>
           <a:lstStyle/>
@@ -17684,7 +18010,7 @@
               <a:buNone/>
             </a:pPr>
             <a:r>
-              <a:rPr lang="en-US" sz="1550" dirty="0">
+              <a:rPr lang="en-US" sz="1320" dirty="0">
                 <a:solidFill>
                   <a:srgbClr val="17364A"/>
                 </a:solidFill>
@@ -17694,7 +18020,7 @@
               </a:rPr>
               <a:t>AI security matters because public health AI tools may process sensitive records, internal protocols,.</a:t>
             </a:r>
-            <a:endParaRPr lang="en-US" sz="1550" dirty="0"/>
+            <a:endParaRPr lang="en-US" sz="1320" dirty="0"/>
           </a:p>
         </p:txBody>
       </p:sp>
@@ -17782,13 +18108,16 @@
           <a:ln/>
         </p:spPr>
         <p:txBody>
-          <a:bodyPr wrap="square" lIns="254" tIns="254" rIns="254" bIns="254" rtlCol="0" anchor="t">
+          <a:bodyPr wrap="square" lIns="508" tIns="508" rIns="508" bIns="508" rtlCol="0" anchor="t">
             <a:normAutofit/>
           </a:bodyPr>
           <a:lstStyle/>
           <a:p>
-            <a:r>
-              <a:rPr lang="en-US" sz="1380" dirty="0">
+            <a:pPr indent="0" marL="0">
+              <a:buNone/>
+            </a:pPr>
+            <a:r>
+              <a:rPr lang="en-US" sz="1220" dirty="0">
                 <a:solidFill>
                   <a:srgbClr val="17364A"/>
                 </a:solidFill>
@@ -17796,13 +18125,16 @@
                 <a:ea typeface="Aptos" pitchFamily="34" charset="-122"/>
                 <a:cs typeface="Aptos" pitchFamily="34" charset="-120"/>
               </a:rPr>
-              <a:t>AI security matters because public health AI tools may process sensitive records, internal.</a:t>
-            </a:r>
-            <a:endParaRPr lang="en-US" sz="1380" dirty="0"/>
-          </a:p>
-          <a:p>
-            <a:r>
-              <a:rPr lang="en-US" sz="1380" dirty="0">
+              <a:t>AI security matters because public health AI tools may process.</a:t>
+            </a:r>
+            <a:endParaRPr lang="en-US" sz="1220" dirty="0"/>
+          </a:p>
+          <a:p>
+            <a:pPr indent="0" marL="0">
+              <a:buNone/>
+            </a:pPr>
+            <a:r>
+              <a:rPr lang="en-US" sz="1220" dirty="0">
                 <a:solidFill>
                   <a:srgbClr val="17364A"/>
                 </a:solidFill>
@@ -17810,13 +18142,16 @@
                 <a:ea typeface="Aptos" pitchFamily="34" charset="-122"/>
                 <a:cs typeface="Aptos" pitchFamily="34" charset="-120"/>
               </a:rPr>
-              <a:t>The risks increase when AI tools are connected to email, calendars, case systems, data.</a:t>
-            </a:r>
-            <a:endParaRPr lang="en-US" sz="1380" dirty="0"/>
-          </a:p>
-          <a:p>
-            <a:r>
-              <a:rPr lang="en-US" sz="1380" dirty="0">
+              <a:t>The risks increase when AI tools are connected to email,.</a:t>
+            </a:r>
+            <a:endParaRPr lang="en-US" sz="1220" dirty="0"/>
+          </a:p>
+          <a:p>
+            <a:pPr indent="0" marL="0">
+              <a:buNone/>
+            </a:pPr>
+            <a:r>
+              <a:rPr lang="en-US" sz="1220" dirty="0">
                 <a:solidFill>
                   <a:srgbClr val="17364A"/>
                 </a:solidFill>
@@ -17824,9 +18159,9 @@
                 <a:ea typeface="Aptos" pitchFamily="34" charset="-122"/>
                 <a:cs typeface="Aptos" pitchFamily="34" charset="-120"/>
               </a:rPr>
-              <a:t>A security weakness can become a privacy breach, operational disruption, public trust.</a:t>
-            </a:r>
-            <a:endParaRPr lang="en-US" sz="1380" dirty="0"/>
+              <a:t>A security weakness can become a privacy breach, operational.</a:t>
+            </a:r>
+            <a:endParaRPr lang="en-US" sz="1220" dirty="0"/>
           </a:p>
         </p:txBody>
       </p:sp>
@@ -17904,17 +18239,17 @@
         </p:nvSpPr>
         <p:spPr>
           <a:xfrm>
-            <a:off x="7799832" y="5001768"/>
-            <a:ext cx="3145536" cy="502920"/>
-          </a:xfrm>
-          <a:prstGeom prst="rect">
-            <a:avLst/>
-          </a:prstGeom>
-          <a:noFill/>
-          <a:ln/>
-        </p:spPr>
-        <p:txBody>
-          <a:bodyPr wrap="square" lIns="0" tIns="0" rIns="0" bIns="0" rtlCol="0" anchor="t">
+            <a:off x="7799832" y="4974336"/>
+            <a:ext cx="3145536" cy="576072"/>
+          </a:xfrm>
+          <a:prstGeom prst="rect">
+            <a:avLst/>
+          </a:prstGeom>
+          <a:noFill/>
+          <a:ln/>
+        </p:spPr>
+        <p:txBody>
+          <a:bodyPr wrap="square" lIns="254" tIns="254" rIns="254" bIns="254" rtlCol="0" anchor="t">
             <a:normAutofit/>
           </a:bodyPr>
           <a:lstStyle/>
@@ -17923,7 +18258,7 @@
               <a:buNone/>
             </a:pPr>
             <a:r>
-              <a:rPr lang="en-US" sz="1550" dirty="0">
+              <a:rPr lang="en-US" sz="1320" dirty="0">
                 <a:solidFill>
                   <a:srgbClr val="17364A"/>
                 </a:solidFill>
@@ -17931,9 +18266,9 @@
                 <a:ea typeface="Aptos" pitchFamily="34" charset="-122"/>
                 <a:cs typeface="Aptos" pitchFamily="34" charset="-120"/>
               </a:rPr>
-              <a:t>Identify what could go wrong, who could be affected, what safeguards are needed, and what evidence should be reviewed before use expands.</a:t>
-            </a:r>
-            <a:endParaRPr lang="en-US" sz="1550" dirty="0"/>
+              <a:t>Identify what could go wrong, who could be affected, what safeguards are needed, and what evidence should be reviewed.</a:t>
+            </a:r>
+            <a:endParaRPr lang="en-US" sz="1320" dirty="0"/>
           </a:p>
         </p:txBody>
       </p:sp>

--- a/downloads/presentations/modules/gov-300.pptx
+++ b/downloads/presentations/modules/gov-300.pptx
@@ -3511,11 +3511,11 @@
         <p:spPr>
           <a:xfrm>
             <a:off x="7635240" y="1325880"/>
-            <a:ext cx="3474720" cy="1325880"/>
+            <a:ext cx="3474720" cy="1207008"/>
           </a:xfrm>
           <a:prstGeom prst="roundRect">
             <a:avLst>
-              <a:gd name="adj" fmla="val 8276"/>
+              <a:gd name="adj" fmla="val 9091"/>
             </a:avLst>
           </a:prstGeom>
           <a:solidFill>
@@ -3577,7 +3577,7 @@
         <p:spPr>
           <a:xfrm>
             <a:off x="7799832" y="1801368"/>
-            <a:ext cx="3145536" cy="758952"/>
+            <a:ext cx="3145536" cy="640080"/>
           </a:xfrm>
           <a:prstGeom prst="rect">
             <a:avLst/>
@@ -3617,7 +3617,7 @@
         </p:nvSpPr>
         <p:spPr>
           <a:xfrm>
-            <a:off x="7635240" y="2788920"/>
+            <a:off x="7635240" y="2670048"/>
             <a:ext cx="3474720" cy="1536192"/>
           </a:xfrm>
           <a:prstGeom prst="roundRect">
@@ -3644,7 +3644,7 @@
         </p:nvSpPr>
         <p:spPr>
           <a:xfrm>
-            <a:off x="7799832" y="2935224"/>
+            <a:off x="7799832" y="2816352"/>
             <a:ext cx="3145536" cy="256032"/>
           </a:xfrm>
           <a:prstGeom prst="rect">
@@ -3683,7 +3683,7 @@
         </p:nvSpPr>
         <p:spPr>
           <a:xfrm>
-            <a:off x="7818120" y="3300984"/>
+            <a:off x="7818120" y="3182112"/>
             <a:ext cx="3090672" cy="877824"/>
           </a:xfrm>
           <a:prstGeom prst="rect">
@@ -3758,12 +3758,12 @@
         </p:nvSpPr>
         <p:spPr>
           <a:xfrm>
-            <a:off x="7635240" y="4498848"/>
-            <a:ext cx="3474720" cy="1143000"/>
+            <a:off x="7635240" y="4343400"/>
+            <a:ext cx="3474720" cy="1255471"/>
           </a:xfrm>
           <a:prstGeom prst="roundRect">
             <a:avLst>
-              <a:gd name="adj" fmla="val 9600"/>
+              <a:gd name="adj" fmla="val 8740"/>
             </a:avLst>
           </a:prstGeom>
           <a:solidFill>
@@ -3785,7 +3785,7 @@
         </p:nvSpPr>
         <p:spPr>
           <a:xfrm>
-            <a:off x="7799832" y="4645152"/>
+            <a:off x="7799832" y="4489704"/>
             <a:ext cx="3145536" cy="256032"/>
           </a:xfrm>
           <a:prstGeom prst="rect">
@@ -3824,8 +3824,8 @@
         </p:nvSpPr>
         <p:spPr>
           <a:xfrm>
-            <a:off x="7799832" y="4974336"/>
-            <a:ext cx="3145536" cy="576072"/>
+            <a:off x="7799832" y="4818888"/>
+            <a:ext cx="3145536" cy="688543"/>
           </a:xfrm>
           <a:prstGeom prst="rect">
             <a:avLst/>
@@ -3851,7 +3851,7 @@
                 <a:ea typeface="Aptos" pitchFamily="34" charset="-122"/>
                 <a:cs typeface="Aptos" pitchFamily="34" charset="-120"/>
               </a:rPr>
-              <a:t>Identify what could go wrong, who could be affected, what safeguards are needed, and what evidence should be reviewed.</a:t>
+              <a:t>Identify what could go wrong, who could be affected, what safeguards are needed, and what evidence should be reviewed before use.</a:t>
             </a:r>
             <a:endParaRPr lang="en-US" sz="1320" dirty="0"/>
           </a:p>
@@ -4220,11 +4220,11 @@
         <p:spPr>
           <a:xfrm>
             <a:off x="7635240" y="1325880"/>
-            <a:ext cx="3474720" cy="1325880"/>
+            <a:ext cx="3474720" cy="1207008"/>
           </a:xfrm>
           <a:prstGeom prst="roundRect">
             <a:avLst>
-              <a:gd name="adj" fmla="val 8276"/>
+              <a:gd name="adj" fmla="val 9091"/>
             </a:avLst>
           </a:prstGeom>
           <a:solidFill>
@@ -4286,7 +4286,7 @@
         <p:spPr>
           <a:xfrm>
             <a:off x="7799832" y="1801368"/>
-            <a:ext cx="3145536" cy="758952"/>
+            <a:ext cx="3145536" cy="640080"/>
           </a:xfrm>
           <a:prstGeom prst="rect">
             <a:avLst/>
@@ -4326,7 +4326,7 @@
         </p:nvSpPr>
         <p:spPr>
           <a:xfrm>
-            <a:off x="7635240" y="2788920"/>
+            <a:off x="7635240" y="2670048"/>
             <a:ext cx="3474720" cy="1536192"/>
           </a:xfrm>
           <a:prstGeom prst="roundRect">
@@ -4353,7 +4353,7 @@
         </p:nvSpPr>
         <p:spPr>
           <a:xfrm>
-            <a:off x="7799832" y="2935224"/>
+            <a:off x="7799832" y="2816352"/>
             <a:ext cx="3145536" cy="256032"/>
           </a:xfrm>
           <a:prstGeom prst="rect">
@@ -4392,7 +4392,7 @@
         </p:nvSpPr>
         <p:spPr>
           <a:xfrm>
-            <a:off x="7818120" y="3300984"/>
+            <a:off x="7818120" y="3182112"/>
             <a:ext cx="3090672" cy="877824"/>
           </a:xfrm>
           <a:prstGeom prst="rect">
@@ -4467,12 +4467,12 @@
         </p:nvSpPr>
         <p:spPr>
           <a:xfrm>
-            <a:off x="7635240" y="4498848"/>
-            <a:ext cx="3474720" cy="1143000"/>
+            <a:off x="7635240" y="4343400"/>
+            <a:ext cx="3474720" cy="1255471"/>
           </a:xfrm>
           <a:prstGeom prst="roundRect">
             <a:avLst>
-              <a:gd name="adj" fmla="val 9600"/>
+              <a:gd name="adj" fmla="val 8740"/>
             </a:avLst>
           </a:prstGeom>
           <a:solidFill>
@@ -4494,7 +4494,7 @@
         </p:nvSpPr>
         <p:spPr>
           <a:xfrm>
-            <a:off x="7799832" y="4645152"/>
+            <a:off x="7799832" y="4489704"/>
             <a:ext cx="3145536" cy="256032"/>
           </a:xfrm>
           <a:prstGeom prst="rect">
@@ -4533,8 +4533,8 @@
         </p:nvSpPr>
         <p:spPr>
           <a:xfrm>
-            <a:off x="7799832" y="4974336"/>
-            <a:ext cx="3145536" cy="576072"/>
+            <a:off x="7799832" y="4818888"/>
+            <a:ext cx="3145536" cy="688543"/>
           </a:xfrm>
           <a:prstGeom prst="rect">
             <a:avLst/>
@@ -4560,7 +4560,7 @@
                 <a:ea typeface="Aptos" pitchFamily="34" charset="-122"/>
                 <a:cs typeface="Aptos" pitchFamily="34" charset="-120"/>
               </a:rPr>
-              <a:t>Identify what could go wrong, who could be affected, what safeguards are needed, and what evidence should be reviewed.</a:t>
+              <a:t>Identify what could go wrong, who could be affected, what safeguards are needed, and what evidence should be reviewed before use.</a:t>
             </a:r>
             <a:endParaRPr lang="en-US" sz="1320" dirty="0"/>
           </a:p>
@@ -4929,11 +4929,11 @@
         <p:spPr>
           <a:xfrm>
             <a:off x="7635240" y="1325880"/>
-            <a:ext cx="3474720" cy="1325880"/>
+            <a:ext cx="3474720" cy="1255471"/>
           </a:xfrm>
           <a:prstGeom prst="roundRect">
             <a:avLst>
-              <a:gd name="adj" fmla="val 8276"/>
+              <a:gd name="adj" fmla="val 8740"/>
             </a:avLst>
           </a:prstGeom>
           <a:solidFill>
@@ -4995,7 +4995,7 @@
         <p:spPr>
           <a:xfrm>
             <a:off x="7799832" y="1801368"/>
-            <a:ext cx="3145536" cy="758952"/>
+            <a:ext cx="3145536" cy="688543"/>
           </a:xfrm>
           <a:prstGeom prst="rect">
             <a:avLst/>
@@ -5035,7 +5035,7 @@
         </p:nvSpPr>
         <p:spPr>
           <a:xfrm>
-            <a:off x="7635240" y="2788920"/>
+            <a:off x="7635240" y="2718511"/>
             <a:ext cx="3474720" cy="1536192"/>
           </a:xfrm>
           <a:prstGeom prst="roundRect">
@@ -5062,7 +5062,7 @@
         </p:nvSpPr>
         <p:spPr>
           <a:xfrm>
-            <a:off x="7799832" y="2935224"/>
+            <a:off x="7799832" y="2864815"/>
             <a:ext cx="3145536" cy="256032"/>
           </a:xfrm>
           <a:prstGeom prst="rect">
@@ -5101,7 +5101,7 @@
         </p:nvSpPr>
         <p:spPr>
           <a:xfrm>
-            <a:off x="7818120" y="3300984"/>
+            <a:off x="7818120" y="3230575"/>
             <a:ext cx="3090672" cy="877824"/>
           </a:xfrm>
           <a:prstGeom prst="rect">
@@ -5176,12 +5176,12 @@
         </p:nvSpPr>
         <p:spPr>
           <a:xfrm>
-            <a:off x="7635240" y="4498848"/>
-            <a:ext cx="3474720" cy="1143000"/>
+            <a:off x="7635240" y="4391863"/>
+            <a:ext cx="3474720" cy="1255471"/>
           </a:xfrm>
           <a:prstGeom prst="roundRect">
             <a:avLst>
-              <a:gd name="adj" fmla="val 9600"/>
+              <a:gd name="adj" fmla="val 8740"/>
             </a:avLst>
           </a:prstGeom>
           <a:solidFill>
@@ -5203,7 +5203,7 @@
         </p:nvSpPr>
         <p:spPr>
           <a:xfrm>
-            <a:off x="7799832" y="4645152"/>
+            <a:off x="7799832" y="4538167"/>
             <a:ext cx="3145536" cy="256032"/>
           </a:xfrm>
           <a:prstGeom prst="rect">
@@ -5242,8 +5242,8 @@
         </p:nvSpPr>
         <p:spPr>
           <a:xfrm>
-            <a:off x="7799832" y="4974336"/>
-            <a:ext cx="3145536" cy="576072"/>
+            <a:off x="7799832" y="4867351"/>
+            <a:ext cx="3145536" cy="688543"/>
           </a:xfrm>
           <a:prstGeom prst="rect">
             <a:avLst/>
@@ -5269,7 +5269,7 @@
                 <a:ea typeface="Aptos" pitchFamily="34" charset="-122"/>
                 <a:cs typeface="Aptos" pitchFamily="34" charset="-120"/>
               </a:rPr>
-              <a:t>Identify what could go wrong, who could be affected, what safeguards are needed, and what evidence should be reviewed.</a:t>
+              <a:t>Identify what could go wrong, who could be affected, what safeguards are needed, and what evidence should be reviewed before use.</a:t>
             </a:r>
             <a:endParaRPr lang="en-US" sz="1320" dirty="0"/>
           </a:p>
@@ -5638,11 +5638,11 @@
         <p:spPr>
           <a:xfrm>
             <a:off x="7635240" y="1325880"/>
-            <a:ext cx="3474720" cy="1325880"/>
+            <a:ext cx="3474720" cy="1207008"/>
           </a:xfrm>
           <a:prstGeom prst="roundRect">
             <a:avLst>
-              <a:gd name="adj" fmla="val 8276"/>
+              <a:gd name="adj" fmla="val 9091"/>
             </a:avLst>
           </a:prstGeom>
           <a:solidFill>
@@ -5704,7 +5704,7 @@
         <p:spPr>
           <a:xfrm>
             <a:off x="7799832" y="1801368"/>
-            <a:ext cx="3145536" cy="758952"/>
+            <a:ext cx="3145536" cy="640080"/>
           </a:xfrm>
           <a:prstGeom prst="rect">
             <a:avLst/>
@@ -5744,7 +5744,7 @@
         </p:nvSpPr>
         <p:spPr>
           <a:xfrm>
-            <a:off x="7635240" y="2788920"/>
+            <a:off x="7635240" y="2670048"/>
             <a:ext cx="3474720" cy="1536192"/>
           </a:xfrm>
           <a:prstGeom prst="roundRect">
@@ -5771,7 +5771,7 @@
         </p:nvSpPr>
         <p:spPr>
           <a:xfrm>
-            <a:off x="7799832" y="2935224"/>
+            <a:off x="7799832" y="2816352"/>
             <a:ext cx="3145536" cy="256032"/>
           </a:xfrm>
           <a:prstGeom prst="rect">
@@ -5810,7 +5810,7 @@
         </p:nvSpPr>
         <p:spPr>
           <a:xfrm>
-            <a:off x="7818120" y="3300984"/>
+            <a:off x="7818120" y="3182112"/>
             <a:ext cx="3090672" cy="877824"/>
           </a:xfrm>
           <a:prstGeom prst="rect">
@@ -5885,12 +5885,12 @@
         </p:nvSpPr>
         <p:spPr>
           <a:xfrm>
-            <a:off x="7635240" y="4498848"/>
-            <a:ext cx="3474720" cy="1143000"/>
+            <a:off x="7635240" y="4343400"/>
+            <a:ext cx="3474720" cy="1255471"/>
           </a:xfrm>
           <a:prstGeom prst="roundRect">
             <a:avLst>
-              <a:gd name="adj" fmla="val 9600"/>
+              <a:gd name="adj" fmla="val 8740"/>
             </a:avLst>
           </a:prstGeom>
           <a:solidFill>
@@ -5912,7 +5912,7 @@
         </p:nvSpPr>
         <p:spPr>
           <a:xfrm>
-            <a:off x="7799832" y="4645152"/>
+            <a:off x="7799832" y="4489704"/>
             <a:ext cx="3145536" cy="256032"/>
           </a:xfrm>
           <a:prstGeom prst="rect">
@@ -5951,8 +5951,8 @@
         </p:nvSpPr>
         <p:spPr>
           <a:xfrm>
-            <a:off x="7799832" y="4974336"/>
-            <a:ext cx="3145536" cy="576072"/>
+            <a:off x="7799832" y="4818888"/>
+            <a:ext cx="3145536" cy="688543"/>
           </a:xfrm>
           <a:prstGeom prst="rect">
             <a:avLst/>
@@ -5978,7 +5978,7 @@
                 <a:ea typeface="Aptos" pitchFamily="34" charset="-122"/>
                 <a:cs typeface="Aptos" pitchFamily="34" charset="-120"/>
               </a:rPr>
-              <a:t>Identify what could go wrong, who could be affected, what safeguards are needed, and what evidence should be reviewed.</a:t>
+              <a:t>Identify what could go wrong, who could be affected, what safeguards are needed, and what evidence should be reviewed before use.</a:t>
             </a:r>
             <a:endParaRPr lang="en-US" sz="1320" dirty="0"/>
           </a:p>
@@ -6347,11 +6347,11 @@
         <p:spPr>
           <a:xfrm>
             <a:off x="7635240" y="1325880"/>
-            <a:ext cx="3474720" cy="1325880"/>
+            <a:ext cx="3474720" cy="1207008"/>
           </a:xfrm>
           <a:prstGeom prst="roundRect">
             <a:avLst>
-              <a:gd name="adj" fmla="val 8276"/>
+              <a:gd name="adj" fmla="val 9091"/>
             </a:avLst>
           </a:prstGeom>
           <a:solidFill>
@@ -6413,7 +6413,7 @@
         <p:spPr>
           <a:xfrm>
             <a:off x="7799832" y="1801368"/>
-            <a:ext cx="3145536" cy="758952"/>
+            <a:ext cx="3145536" cy="640080"/>
           </a:xfrm>
           <a:prstGeom prst="rect">
             <a:avLst/>
@@ -6453,7 +6453,7 @@
         </p:nvSpPr>
         <p:spPr>
           <a:xfrm>
-            <a:off x="7635240" y="2788920"/>
+            <a:off x="7635240" y="2670048"/>
             <a:ext cx="3474720" cy="1536192"/>
           </a:xfrm>
           <a:prstGeom prst="roundRect">
@@ -6480,7 +6480,7 @@
         </p:nvSpPr>
         <p:spPr>
           <a:xfrm>
-            <a:off x="7799832" y="2935224"/>
+            <a:off x="7799832" y="2816352"/>
             <a:ext cx="3145536" cy="256032"/>
           </a:xfrm>
           <a:prstGeom prst="rect">
@@ -6519,7 +6519,7 @@
         </p:nvSpPr>
         <p:spPr>
           <a:xfrm>
-            <a:off x="7818120" y="3300984"/>
+            <a:off x="7818120" y="3182112"/>
             <a:ext cx="3090672" cy="877824"/>
           </a:xfrm>
           <a:prstGeom prst="rect">
@@ -6594,12 +6594,12 @@
         </p:nvSpPr>
         <p:spPr>
           <a:xfrm>
-            <a:off x="7635240" y="4498848"/>
-            <a:ext cx="3474720" cy="1143000"/>
+            <a:off x="7635240" y="4343400"/>
+            <a:ext cx="3474720" cy="1255471"/>
           </a:xfrm>
           <a:prstGeom prst="roundRect">
             <a:avLst>
-              <a:gd name="adj" fmla="val 9600"/>
+              <a:gd name="adj" fmla="val 8740"/>
             </a:avLst>
           </a:prstGeom>
           <a:solidFill>
@@ -6621,7 +6621,7 @@
         </p:nvSpPr>
         <p:spPr>
           <a:xfrm>
-            <a:off x="7799832" y="4645152"/>
+            <a:off x="7799832" y="4489704"/>
             <a:ext cx="3145536" cy="256032"/>
           </a:xfrm>
           <a:prstGeom prst="rect">
@@ -6660,8 +6660,8 @@
         </p:nvSpPr>
         <p:spPr>
           <a:xfrm>
-            <a:off x="7799832" y="4974336"/>
-            <a:ext cx="3145536" cy="576072"/>
+            <a:off x="7799832" y="4818888"/>
+            <a:ext cx="3145536" cy="688543"/>
           </a:xfrm>
           <a:prstGeom prst="rect">
             <a:avLst/>
@@ -6687,7 +6687,7 @@
                 <a:ea typeface="Aptos" pitchFamily="34" charset="-122"/>
                 <a:cs typeface="Aptos" pitchFamily="34" charset="-120"/>
               </a:rPr>
-              <a:t>Identify what could go wrong, who could be affected, what safeguards are needed, and what evidence should be reviewed.</a:t>
+              <a:t>Identify what could go wrong, who could be affected, what safeguards are needed, and what evidence should be reviewed before use.</a:t>
             </a:r>
             <a:endParaRPr lang="en-US" sz="1320" dirty="0"/>
           </a:p>
@@ -7056,11 +7056,11 @@
         <p:spPr>
           <a:xfrm>
             <a:off x="7635240" y="1325880"/>
-            <a:ext cx="3474720" cy="1325880"/>
+            <a:ext cx="3474720" cy="1207008"/>
           </a:xfrm>
           <a:prstGeom prst="roundRect">
             <a:avLst>
-              <a:gd name="adj" fmla="val 8276"/>
+              <a:gd name="adj" fmla="val 9091"/>
             </a:avLst>
           </a:prstGeom>
           <a:solidFill>
@@ -7122,7 +7122,7 @@
         <p:spPr>
           <a:xfrm>
             <a:off x="7799832" y="1801368"/>
-            <a:ext cx="3145536" cy="758952"/>
+            <a:ext cx="3145536" cy="640080"/>
           </a:xfrm>
           <a:prstGeom prst="rect">
             <a:avLst/>
@@ -7162,7 +7162,7 @@
         </p:nvSpPr>
         <p:spPr>
           <a:xfrm>
-            <a:off x="7635240" y="2788920"/>
+            <a:off x="7635240" y="2670048"/>
             <a:ext cx="3474720" cy="1536192"/>
           </a:xfrm>
           <a:prstGeom prst="roundRect">
@@ -7189,7 +7189,7 @@
         </p:nvSpPr>
         <p:spPr>
           <a:xfrm>
-            <a:off x="7799832" y="2935224"/>
+            <a:off x="7799832" y="2816352"/>
             <a:ext cx="3145536" cy="256032"/>
           </a:xfrm>
           <a:prstGeom prst="rect">
@@ -7228,7 +7228,7 @@
         </p:nvSpPr>
         <p:spPr>
           <a:xfrm>
-            <a:off x="7818120" y="3300984"/>
+            <a:off x="7818120" y="3182112"/>
             <a:ext cx="3090672" cy="877824"/>
           </a:xfrm>
           <a:prstGeom prst="rect">
@@ -7303,12 +7303,12 @@
         </p:nvSpPr>
         <p:spPr>
           <a:xfrm>
-            <a:off x="7635240" y="4498848"/>
-            <a:ext cx="3474720" cy="1143000"/>
+            <a:off x="7635240" y="4343400"/>
+            <a:ext cx="3474720" cy="1255471"/>
           </a:xfrm>
           <a:prstGeom prst="roundRect">
             <a:avLst>
-              <a:gd name="adj" fmla="val 9600"/>
+              <a:gd name="adj" fmla="val 8740"/>
             </a:avLst>
           </a:prstGeom>
           <a:solidFill>
@@ -7330,7 +7330,7 @@
         </p:nvSpPr>
         <p:spPr>
           <a:xfrm>
-            <a:off x="7799832" y="4645152"/>
+            <a:off x="7799832" y="4489704"/>
             <a:ext cx="3145536" cy="256032"/>
           </a:xfrm>
           <a:prstGeom prst="rect">
@@ -7369,8 +7369,8 @@
         </p:nvSpPr>
         <p:spPr>
           <a:xfrm>
-            <a:off x="7799832" y="4974336"/>
-            <a:ext cx="3145536" cy="576072"/>
+            <a:off x="7799832" y="4818888"/>
+            <a:ext cx="3145536" cy="688543"/>
           </a:xfrm>
           <a:prstGeom prst="rect">
             <a:avLst/>
@@ -7396,7 +7396,7 @@
                 <a:ea typeface="Aptos" pitchFamily="34" charset="-122"/>
                 <a:cs typeface="Aptos" pitchFamily="34" charset="-120"/>
               </a:rPr>
-              <a:t>Identify what could go wrong, who could be affected, what safeguards are needed, and what evidence should be reviewed.</a:t>
+              <a:t>Identify what could go wrong, who could be affected, what safeguards are needed, and what evidence should be reviewed before use.</a:t>
             </a:r>
             <a:endParaRPr lang="en-US" sz="1320" dirty="0"/>
           </a:p>
@@ -7765,11 +7765,11 @@
         <p:spPr>
           <a:xfrm>
             <a:off x="7635240" y="1325880"/>
-            <a:ext cx="3474720" cy="1325880"/>
+            <a:ext cx="3474720" cy="1207008"/>
           </a:xfrm>
           <a:prstGeom prst="roundRect">
             <a:avLst>
-              <a:gd name="adj" fmla="val 8276"/>
+              <a:gd name="adj" fmla="val 9091"/>
             </a:avLst>
           </a:prstGeom>
           <a:solidFill>
@@ -7831,7 +7831,7 @@
         <p:spPr>
           <a:xfrm>
             <a:off x="7799832" y="1801368"/>
-            <a:ext cx="3145536" cy="758952"/>
+            <a:ext cx="3145536" cy="640080"/>
           </a:xfrm>
           <a:prstGeom prst="rect">
             <a:avLst/>
@@ -7871,7 +7871,7 @@
         </p:nvSpPr>
         <p:spPr>
           <a:xfrm>
-            <a:off x="7635240" y="2788920"/>
+            <a:off x="7635240" y="2670048"/>
             <a:ext cx="3474720" cy="1536192"/>
           </a:xfrm>
           <a:prstGeom prst="roundRect">
@@ -7898,7 +7898,7 @@
         </p:nvSpPr>
         <p:spPr>
           <a:xfrm>
-            <a:off x="7799832" y="2935224"/>
+            <a:off x="7799832" y="2816352"/>
             <a:ext cx="3145536" cy="256032"/>
           </a:xfrm>
           <a:prstGeom prst="rect">
@@ -7937,7 +7937,7 @@
         </p:nvSpPr>
         <p:spPr>
           <a:xfrm>
-            <a:off x="7818120" y="3300984"/>
+            <a:off x="7818120" y="3182112"/>
             <a:ext cx="3090672" cy="877824"/>
           </a:xfrm>
           <a:prstGeom prst="rect">
@@ -8012,12 +8012,12 @@
         </p:nvSpPr>
         <p:spPr>
           <a:xfrm>
-            <a:off x="7635240" y="4498848"/>
-            <a:ext cx="3474720" cy="1143000"/>
+            <a:off x="7635240" y="4343400"/>
+            <a:ext cx="3474720" cy="1255471"/>
           </a:xfrm>
           <a:prstGeom prst="roundRect">
             <a:avLst>
-              <a:gd name="adj" fmla="val 9600"/>
+              <a:gd name="adj" fmla="val 8740"/>
             </a:avLst>
           </a:prstGeom>
           <a:solidFill>
@@ -8039,7 +8039,7 @@
         </p:nvSpPr>
         <p:spPr>
           <a:xfrm>
-            <a:off x="7799832" y="4645152"/>
+            <a:off x="7799832" y="4489704"/>
             <a:ext cx="3145536" cy="256032"/>
           </a:xfrm>
           <a:prstGeom prst="rect">
@@ -8078,8 +8078,8 @@
         </p:nvSpPr>
         <p:spPr>
           <a:xfrm>
-            <a:off x="7799832" y="4974336"/>
-            <a:ext cx="3145536" cy="576072"/>
+            <a:off x="7799832" y="4818888"/>
+            <a:ext cx="3145536" cy="688543"/>
           </a:xfrm>
           <a:prstGeom prst="rect">
             <a:avLst/>
@@ -8105,7 +8105,7 @@
                 <a:ea typeface="Aptos" pitchFamily="34" charset="-122"/>
                 <a:cs typeface="Aptos" pitchFamily="34" charset="-120"/>
               </a:rPr>
-              <a:t>Identify what could go wrong, who could be affected, what safeguards are needed, and what evidence should be reviewed.</a:t>
+              <a:t>Identify what could go wrong, who could be affected, what safeguards are needed, and what evidence should be reviewed before use.</a:t>
             </a:r>
             <a:endParaRPr lang="en-US" sz="1320" dirty="0"/>
           </a:p>
@@ -8457,11 +8457,11 @@
         <p:spPr>
           <a:xfrm>
             <a:off x="7635240" y="1325880"/>
-            <a:ext cx="3474720" cy="1325880"/>
+            <a:ext cx="3474720" cy="1207008"/>
           </a:xfrm>
           <a:prstGeom prst="roundRect">
             <a:avLst>
-              <a:gd name="adj" fmla="val 8276"/>
+              <a:gd name="adj" fmla="val 9091"/>
             </a:avLst>
           </a:prstGeom>
           <a:solidFill>
@@ -8523,7 +8523,7 @@
         <p:spPr>
           <a:xfrm>
             <a:off x="7799832" y="1801368"/>
-            <a:ext cx="3145536" cy="758952"/>
+            <a:ext cx="3145536" cy="640080"/>
           </a:xfrm>
           <a:prstGeom prst="rect">
             <a:avLst/>
@@ -8563,7 +8563,7 @@
         </p:nvSpPr>
         <p:spPr>
           <a:xfrm>
-            <a:off x="7635240" y="2788920"/>
+            <a:off x="7635240" y="2670048"/>
             <a:ext cx="3474720" cy="1536192"/>
           </a:xfrm>
           <a:prstGeom prst="roundRect">
@@ -8590,7 +8590,7 @@
         </p:nvSpPr>
         <p:spPr>
           <a:xfrm>
-            <a:off x="7799832" y="2935224"/>
+            <a:off x="7799832" y="2816352"/>
             <a:ext cx="3145536" cy="256032"/>
           </a:xfrm>
           <a:prstGeom prst="rect">
@@ -8629,7 +8629,7 @@
         </p:nvSpPr>
         <p:spPr>
           <a:xfrm>
-            <a:off x="7818120" y="3300984"/>
+            <a:off x="7818120" y="3182112"/>
             <a:ext cx="3090672" cy="877824"/>
           </a:xfrm>
           <a:prstGeom prst="rect">
@@ -8687,12 +8687,12 @@
         </p:nvSpPr>
         <p:spPr>
           <a:xfrm>
-            <a:off x="7635240" y="4498848"/>
-            <a:ext cx="3474720" cy="1143000"/>
+            <a:off x="7635240" y="4343400"/>
+            <a:ext cx="3474720" cy="1255471"/>
           </a:xfrm>
           <a:prstGeom prst="roundRect">
             <a:avLst>
-              <a:gd name="adj" fmla="val 9600"/>
+              <a:gd name="adj" fmla="val 8740"/>
             </a:avLst>
           </a:prstGeom>
           <a:solidFill>
@@ -8714,7 +8714,7 @@
         </p:nvSpPr>
         <p:spPr>
           <a:xfrm>
-            <a:off x="7799832" y="4645152"/>
+            <a:off x="7799832" y="4489704"/>
             <a:ext cx="3145536" cy="256032"/>
           </a:xfrm>
           <a:prstGeom prst="rect">
@@ -8753,8 +8753,8 @@
         </p:nvSpPr>
         <p:spPr>
           <a:xfrm>
-            <a:off x="7799832" y="4974336"/>
-            <a:ext cx="3145536" cy="576072"/>
+            <a:off x="7799832" y="4818888"/>
+            <a:ext cx="3145536" cy="688543"/>
           </a:xfrm>
           <a:prstGeom prst="rect">
             <a:avLst/>
@@ -8780,7 +8780,7 @@
                 <a:ea typeface="Aptos" pitchFamily="34" charset="-122"/>
                 <a:cs typeface="Aptos" pitchFamily="34" charset="-120"/>
               </a:rPr>
-              <a:t>Identify what could go wrong, who could be affected, what safeguards are needed, and what evidence should be reviewed.</a:t>
+              <a:t>Identify what could go wrong, who could be affected, what safeguards are needed, and what evidence should be reviewed before use.</a:t>
             </a:r>
             <a:endParaRPr lang="en-US" sz="1320" dirty="0"/>
           </a:p>
@@ -9149,11 +9149,11 @@
         <p:spPr>
           <a:xfrm>
             <a:off x="7635240" y="1325880"/>
-            <a:ext cx="3474720" cy="1325880"/>
+            <a:ext cx="3474720" cy="1207008"/>
           </a:xfrm>
           <a:prstGeom prst="roundRect">
             <a:avLst>
-              <a:gd name="adj" fmla="val 8276"/>
+              <a:gd name="adj" fmla="val 9091"/>
             </a:avLst>
           </a:prstGeom>
           <a:solidFill>
@@ -9215,7 +9215,7 @@
         <p:spPr>
           <a:xfrm>
             <a:off x="7799832" y="1801368"/>
-            <a:ext cx="3145536" cy="758952"/>
+            <a:ext cx="3145536" cy="640080"/>
           </a:xfrm>
           <a:prstGeom prst="rect">
             <a:avLst/>
@@ -9255,12 +9255,12 @@
         </p:nvSpPr>
         <p:spPr>
           <a:xfrm>
-            <a:off x="7635240" y="2788920"/>
-            <a:ext cx="3474720" cy="1536192"/>
+            <a:off x="7635240" y="2670048"/>
+            <a:ext cx="3474720" cy="1377086"/>
           </a:xfrm>
           <a:prstGeom prst="roundRect">
             <a:avLst>
-              <a:gd name="adj" fmla="val 7143"/>
+              <a:gd name="adj" fmla="val 7968"/>
             </a:avLst>
           </a:prstGeom>
           <a:solidFill>
@@ -9282,7 +9282,7 @@
         </p:nvSpPr>
         <p:spPr>
           <a:xfrm>
-            <a:off x="7799832" y="2935224"/>
+            <a:off x="7799832" y="2816352"/>
             <a:ext cx="3145536" cy="256032"/>
           </a:xfrm>
           <a:prstGeom prst="rect">
@@ -9321,8 +9321,8 @@
         </p:nvSpPr>
         <p:spPr>
           <a:xfrm>
-            <a:off x="7818120" y="3300984"/>
-            <a:ext cx="3090672" cy="877824"/>
+            <a:off x="7818120" y="3182112"/>
+            <a:ext cx="3090672" cy="718718"/>
           </a:xfrm>
           <a:prstGeom prst="rect">
             <a:avLst/>
@@ -9379,12 +9379,12 @@
         </p:nvSpPr>
         <p:spPr>
           <a:xfrm>
-            <a:off x="7635240" y="4498848"/>
-            <a:ext cx="3474720" cy="1143000"/>
+            <a:off x="7635240" y="4184294"/>
+            <a:ext cx="3474720" cy="1466698"/>
           </a:xfrm>
           <a:prstGeom prst="roundRect">
             <a:avLst>
-              <a:gd name="adj" fmla="val 9600"/>
+              <a:gd name="adj" fmla="val 7481"/>
             </a:avLst>
           </a:prstGeom>
           <a:solidFill>
@@ -9406,7 +9406,7 @@
         </p:nvSpPr>
         <p:spPr>
           <a:xfrm>
-            <a:off x="7799832" y="4645152"/>
+            <a:off x="7799832" y="4330598"/>
             <a:ext cx="3145536" cy="256032"/>
           </a:xfrm>
           <a:prstGeom prst="rect">
@@ -9445,8 +9445,8 @@
         </p:nvSpPr>
         <p:spPr>
           <a:xfrm>
-            <a:off x="7799832" y="4974336"/>
-            <a:ext cx="3145536" cy="576072"/>
+            <a:off x="7799832" y="4659782"/>
+            <a:ext cx="3145536" cy="899770"/>
           </a:xfrm>
           <a:prstGeom prst="rect">
             <a:avLst/>
@@ -9472,7 +9472,7 @@
                 <a:ea typeface="Aptos" pitchFamily="34" charset="-122"/>
                 <a:cs typeface="Aptos" pitchFamily="34" charset="-120"/>
               </a:rPr>
-              <a:t>Use the assignment to test whether you can explain the concept, apply it to a realistic public health situation, and.</a:t>
+              <a:t>Use the assignment to test whether you can explain the concept, apply it to a realistic public health situation, and identify what would need review before the work moves forward.</a:t>
             </a:r>
             <a:endParaRPr lang="en-US" sz="1320" dirty="0"/>
           </a:p>
@@ -9841,11 +9841,11 @@
         <p:spPr>
           <a:xfrm>
             <a:off x="7635240" y="1325880"/>
-            <a:ext cx="3474720" cy="1325880"/>
+            <a:ext cx="3474720" cy="1207008"/>
           </a:xfrm>
           <a:prstGeom prst="roundRect">
             <a:avLst>
-              <a:gd name="adj" fmla="val 8276"/>
+              <a:gd name="adj" fmla="val 9091"/>
             </a:avLst>
           </a:prstGeom>
           <a:solidFill>
@@ -9907,7 +9907,7 @@
         <p:spPr>
           <a:xfrm>
             <a:off x="7799832" y="1801368"/>
-            <a:ext cx="3145536" cy="758952"/>
+            <a:ext cx="3145536" cy="640080"/>
           </a:xfrm>
           <a:prstGeom prst="rect">
             <a:avLst/>
@@ -9947,7 +9947,7 @@
         </p:nvSpPr>
         <p:spPr>
           <a:xfrm>
-            <a:off x="7635240" y="2788920"/>
+            <a:off x="7635240" y="2670048"/>
             <a:ext cx="3474720" cy="1536192"/>
           </a:xfrm>
           <a:prstGeom prst="roundRect">
@@ -9974,7 +9974,7 @@
         </p:nvSpPr>
         <p:spPr>
           <a:xfrm>
-            <a:off x="7799832" y="2935224"/>
+            <a:off x="7799832" y="2816352"/>
             <a:ext cx="3145536" cy="256032"/>
           </a:xfrm>
           <a:prstGeom prst="rect">
@@ -10013,7 +10013,7 @@
         </p:nvSpPr>
         <p:spPr>
           <a:xfrm>
-            <a:off x="7818120" y="3300984"/>
+            <a:off x="7818120" y="3182112"/>
             <a:ext cx="3090672" cy="877824"/>
           </a:xfrm>
           <a:prstGeom prst="rect">
@@ -10088,12 +10088,12 @@
         </p:nvSpPr>
         <p:spPr>
           <a:xfrm>
-            <a:off x="7635240" y="4498848"/>
-            <a:ext cx="3474720" cy="1143000"/>
+            <a:off x="7635240" y="4343400"/>
+            <a:ext cx="3474720" cy="1255471"/>
           </a:xfrm>
           <a:prstGeom prst="roundRect">
             <a:avLst>
-              <a:gd name="adj" fmla="val 9600"/>
+              <a:gd name="adj" fmla="val 8740"/>
             </a:avLst>
           </a:prstGeom>
           <a:solidFill>
@@ -10115,7 +10115,7 @@
         </p:nvSpPr>
         <p:spPr>
           <a:xfrm>
-            <a:off x="7799832" y="4645152"/>
+            <a:off x="7799832" y="4489704"/>
             <a:ext cx="3145536" cy="256032"/>
           </a:xfrm>
           <a:prstGeom prst="rect">
@@ -10154,8 +10154,8 @@
         </p:nvSpPr>
         <p:spPr>
           <a:xfrm>
-            <a:off x="7799832" y="4974336"/>
-            <a:ext cx="3145536" cy="576072"/>
+            <a:off x="7799832" y="4818888"/>
+            <a:ext cx="3145536" cy="688543"/>
           </a:xfrm>
           <a:prstGeom prst="rect">
             <a:avLst/>
@@ -10181,7 +10181,7 @@
                 <a:ea typeface="Aptos" pitchFamily="34" charset="-122"/>
                 <a:cs typeface="Aptos" pitchFamily="34" charset="-120"/>
               </a:rPr>
-              <a:t>Identify what could go wrong, who could be affected, what safeguards are needed, and what evidence should be reviewed.</a:t>
+              <a:t>Identify what could go wrong, who could be affected, what safeguards are needed, and what evidence should be reviewed before use.</a:t>
             </a:r>
             <a:endParaRPr lang="en-US" sz="1320" dirty="0"/>
           </a:p>
@@ -11118,11 +11118,11 @@
         <p:spPr>
           <a:xfrm>
             <a:off x="7635240" y="1325880"/>
-            <a:ext cx="3474720" cy="1325880"/>
+            <a:ext cx="3474720" cy="1207008"/>
           </a:xfrm>
           <a:prstGeom prst="roundRect">
             <a:avLst>
-              <a:gd name="adj" fmla="val 8276"/>
+              <a:gd name="adj" fmla="val 9091"/>
             </a:avLst>
           </a:prstGeom>
           <a:solidFill>
@@ -11184,7 +11184,7 @@
         <p:spPr>
           <a:xfrm>
             <a:off x="7799832" y="1801368"/>
-            <a:ext cx="3145536" cy="758952"/>
+            <a:ext cx="3145536" cy="640080"/>
           </a:xfrm>
           <a:prstGeom prst="rect">
             <a:avLst/>
@@ -11224,7 +11224,7 @@
         </p:nvSpPr>
         <p:spPr>
           <a:xfrm>
-            <a:off x="7635240" y="2788920"/>
+            <a:off x="7635240" y="2670048"/>
             <a:ext cx="3474720" cy="1536192"/>
           </a:xfrm>
           <a:prstGeom prst="roundRect">
@@ -11251,7 +11251,7 @@
         </p:nvSpPr>
         <p:spPr>
           <a:xfrm>
-            <a:off x="7799832" y="2935224"/>
+            <a:off x="7799832" y="2816352"/>
             <a:ext cx="3145536" cy="256032"/>
           </a:xfrm>
           <a:prstGeom prst="rect">
@@ -11290,7 +11290,7 @@
         </p:nvSpPr>
         <p:spPr>
           <a:xfrm>
-            <a:off x="7818120" y="3300984"/>
+            <a:off x="7818120" y="3182112"/>
             <a:ext cx="3090672" cy="877824"/>
           </a:xfrm>
           <a:prstGeom prst="rect">
@@ -11331,12 +11331,12 @@
         </p:nvSpPr>
         <p:spPr>
           <a:xfrm>
-            <a:off x="7635240" y="4498848"/>
-            <a:ext cx="3474720" cy="1143000"/>
+            <a:off x="7635240" y="4343400"/>
+            <a:ext cx="3474720" cy="1255471"/>
           </a:xfrm>
           <a:prstGeom prst="roundRect">
             <a:avLst>
-              <a:gd name="adj" fmla="val 9600"/>
+              <a:gd name="adj" fmla="val 8740"/>
             </a:avLst>
           </a:prstGeom>
           <a:solidFill>
@@ -11358,7 +11358,7 @@
         </p:nvSpPr>
         <p:spPr>
           <a:xfrm>
-            <a:off x="7799832" y="4645152"/>
+            <a:off x="7799832" y="4489704"/>
             <a:ext cx="3145536" cy="256032"/>
           </a:xfrm>
           <a:prstGeom prst="rect">
@@ -11397,8 +11397,8 @@
         </p:nvSpPr>
         <p:spPr>
           <a:xfrm>
-            <a:off x="7799832" y="4974336"/>
-            <a:ext cx="3145536" cy="576072"/>
+            <a:off x="7799832" y="4818888"/>
+            <a:ext cx="3145536" cy="688543"/>
           </a:xfrm>
           <a:prstGeom prst="rect">
             <a:avLst/>
@@ -11424,7 +11424,7 @@
                 <a:ea typeface="Aptos" pitchFamily="34" charset="-122"/>
                 <a:cs typeface="Aptos" pitchFamily="34" charset="-120"/>
               </a:rPr>
-              <a:t>Identify what could go wrong, who could be affected, what safeguards are needed, and what evidence should be reviewed.</a:t>
+              <a:t>Identify what could go wrong, who could be affected, what safeguards are needed, and what evidence should be reviewed before use.</a:t>
             </a:r>
             <a:endParaRPr lang="en-US" sz="1320" dirty="0"/>
           </a:p>
@@ -11793,11 +11793,11 @@
         <p:spPr>
           <a:xfrm>
             <a:off x="7635240" y="1325880"/>
-            <a:ext cx="3474720" cy="1325880"/>
+            <a:ext cx="3474720" cy="1207008"/>
           </a:xfrm>
           <a:prstGeom prst="roundRect">
             <a:avLst>
-              <a:gd name="adj" fmla="val 8276"/>
+              <a:gd name="adj" fmla="val 9091"/>
             </a:avLst>
           </a:prstGeom>
           <a:solidFill>
@@ -11859,7 +11859,7 @@
         <p:spPr>
           <a:xfrm>
             <a:off x="7799832" y="1801368"/>
-            <a:ext cx="3145536" cy="758952"/>
+            <a:ext cx="3145536" cy="640080"/>
           </a:xfrm>
           <a:prstGeom prst="rect">
             <a:avLst/>
@@ -11899,12 +11899,12 @@
         </p:nvSpPr>
         <p:spPr>
           <a:xfrm>
-            <a:off x="7635240" y="2788920"/>
-            <a:ext cx="3474720" cy="1536192"/>
+            <a:off x="7635240" y="2670048"/>
+            <a:ext cx="3474720" cy="1377086"/>
           </a:xfrm>
           <a:prstGeom prst="roundRect">
             <a:avLst>
-              <a:gd name="adj" fmla="val 7143"/>
+              <a:gd name="adj" fmla="val 7968"/>
             </a:avLst>
           </a:prstGeom>
           <a:solidFill>
@@ -11926,7 +11926,7 @@
         </p:nvSpPr>
         <p:spPr>
           <a:xfrm>
-            <a:off x="7799832" y="2935224"/>
+            <a:off x="7799832" y="2816352"/>
             <a:ext cx="3145536" cy="256032"/>
           </a:xfrm>
           <a:prstGeom prst="rect">
@@ -11965,8 +11965,8 @@
         </p:nvSpPr>
         <p:spPr>
           <a:xfrm>
-            <a:off x="7818120" y="3300984"/>
-            <a:ext cx="3090672" cy="877824"/>
+            <a:off x="7818120" y="3182112"/>
+            <a:ext cx="3090672" cy="718718"/>
           </a:xfrm>
           <a:prstGeom prst="rect">
             <a:avLst/>
@@ -12040,12 +12040,12 @@
         </p:nvSpPr>
         <p:spPr>
           <a:xfrm>
-            <a:off x="7635240" y="4498848"/>
-            <a:ext cx="3474720" cy="1143000"/>
+            <a:off x="7635240" y="4184294"/>
+            <a:ext cx="3474720" cy="1466698"/>
           </a:xfrm>
           <a:prstGeom prst="roundRect">
             <a:avLst>
-              <a:gd name="adj" fmla="val 9600"/>
+              <a:gd name="adj" fmla="val 7481"/>
             </a:avLst>
           </a:prstGeom>
           <a:solidFill>
@@ -12067,7 +12067,7 @@
         </p:nvSpPr>
         <p:spPr>
           <a:xfrm>
-            <a:off x="7799832" y="4645152"/>
+            <a:off x="7799832" y="4330598"/>
             <a:ext cx="3145536" cy="256032"/>
           </a:xfrm>
           <a:prstGeom prst="rect">
@@ -12106,8 +12106,8 @@
         </p:nvSpPr>
         <p:spPr>
           <a:xfrm>
-            <a:off x="7799832" y="4974336"/>
-            <a:ext cx="3145536" cy="576072"/>
+            <a:off x="7799832" y="4659782"/>
+            <a:ext cx="3145536" cy="899770"/>
           </a:xfrm>
           <a:prstGeom prst="rect">
             <a:avLst/>
@@ -12133,7 +12133,7 @@
                 <a:ea typeface="Aptos" pitchFamily="34" charset="-122"/>
                 <a:cs typeface="Aptos" pitchFamily="34" charset="-120"/>
               </a:rPr>
-              <a:t>Use the assignment to test whether you can explain the concept, apply it to a realistic public health situation, and.</a:t>
+              <a:t>Use the assignment to test whether you can explain the concept, apply it to a realistic public health situation, and identify what would need review before the work moves forward.</a:t>
             </a:r>
             <a:endParaRPr lang="en-US" sz="1320" dirty="0"/>
           </a:p>
@@ -12502,11 +12502,11 @@
         <p:spPr>
           <a:xfrm>
             <a:off x="7635240" y="1325880"/>
-            <a:ext cx="3474720" cy="1325880"/>
+            <a:ext cx="3474720" cy="1207008"/>
           </a:xfrm>
           <a:prstGeom prst="roundRect">
             <a:avLst>
-              <a:gd name="adj" fmla="val 8276"/>
+              <a:gd name="adj" fmla="val 9091"/>
             </a:avLst>
           </a:prstGeom>
           <a:solidFill>
@@ -12568,7 +12568,7 @@
         <p:spPr>
           <a:xfrm>
             <a:off x="7799832" y="1801368"/>
-            <a:ext cx="3145536" cy="758952"/>
+            <a:ext cx="3145536" cy="640080"/>
           </a:xfrm>
           <a:prstGeom prst="rect">
             <a:avLst/>
@@ -12608,12 +12608,12 @@
         </p:nvSpPr>
         <p:spPr>
           <a:xfrm>
-            <a:off x="7635240" y="2788920"/>
-            <a:ext cx="3474720" cy="1536192"/>
+            <a:off x="7635240" y="2670048"/>
+            <a:ext cx="3474720" cy="1377086"/>
           </a:xfrm>
           <a:prstGeom prst="roundRect">
             <a:avLst>
-              <a:gd name="adj" fmla="val 7143"/>
+              <a:gd name="adj" fmla="val 7968"/>
             </a:avLst>
           </a:prstGeom>
           <a:solidFill>
@@ -12635,7 +12635,7 @@
         </p:nvSpPr>
         <p:spPr>
           <a:xfrm>
-            <a:off x="7799832" y="2935224"/>
+            <a:off x="7799832" y="2816352"/>
             <a:ext cx="3145536" cy="256032"/>
           </a:xfrm>
           <a:prstGeom prst="rect">
@@ -12674,8 +12674,8 @@
         </p:nvSpPr>
         <p:spPr>
           <a:xfrm>
-            <a:off x="7818120" y="3300984"/>
-            <a:ext cx="3090672" cy="877824"/>
+            <a:off x="7818120" y="3182112"/>
+            <a:ext cx="3090672" cy="718718"/>
           </a:xfrm>
           <a:prstGeom prst="rect">
             <a:avLst/>
@@ -12749,12 +12749,12 @@
         </p:nvSpPr>
         <p:spPr>
           <a:xfrm>
-            <a:off x="7635240" y="4498848"/>
-            <a:ext cx="3474720" cy="1143000"/>
+            <a:off x="7635240" y="4184294"/>
+            <a:ext cx="3474720" cy="1466698"/>
           </a:xfrm>
           <a:prstGeom prst="roundRect">
             <a:avLst>
-              <a:gd name="adj" fmla="val 9600"/>
+              <a:gd name="adj" fmla="val 7481"/>
             </a:avLst>
           </a:prstGeom>
           <a:solidFill>
@@ -12776,7 +12776,7 @@
         </p:nvSpPr>
         <p:spPr>
           <a:xfrm>
-            <a:off x="7799832" y="4645152"/>
+            <a:off x="7799832" y="4330598"/>
             <a:ext cx="3145536" cy="256032"/>
           </a:xfrm>
           <a:prstGeom prst="rect">
@@ -12815,8 +12815,8 @@
         </p:nvSpPr>
         <p:spPr>
           <a:xfrm>
-            <a:off x="7799832" y="4974336"/>
-            <a:ext cx="3145536" cy="576072"/>
+            <a:off x="7799832" y="4659782"/>
+            <a:ext cx="3145536" cy="899770"/>
           </a:xfrm>
           <a:prstGeom prst="rect">
             <a:avLst/>
@@ -12842,7 +12842,7 @@
                 <a:ea typeface="Aptos" pitchFamily="34" charset="-122"/>
                 <a:cs typeface="Aptos" pitchFamily="34" charset="-120"/>
               </a:rPr>
-              <a:t>Use the assignment to test whether you can explain the concept, apply it to a realistic public health situation, and.</a:t>
+              <a:t>Use the assignment to test whether you can explain the concept, apply it to a realistic public health situation, and identify what would need review before the work moves forward.</a:t>
             </a:r>
             <a:endParaRPr lang="en-US" sz="1320" dirty="0"/>
           </a:p>
@@ -13211,11 +13211,11 @@
         <p:spPr>
           <a:xfrm>
             <a:off x="7635240" y="1325880"/>
-            <a:ext cx="3474720" cy="1325880"/>
+            <a:ext cx="3474720" cy="1207008"/>
           </a:xfrm>
           <a:prstGeom prst="roundRect">
             <a:avLst>
-              <a:gd name="adj" fmla="val 8276"/>
+              <a:gd name="adj" fmla="val 9091"/>
             </a:avLst>
           </a:prstGeom>
           <a:solidFill>
@@ -13277,7 +13277,7 @@
         <p:spPr>
           <a:xfrm>
             <a:off x="7799832" y="1801368"/>
-            <a:ext cx="3145536" cy="758952"/>
+            <a:ext cx="3145536" cy="640080"/>
           </a:xfrm>
           <a:prstGeom prst="rect">
             <a:avLst/>
@@ -13317,7 +13317,7 @@
         </p:nvSpPr>
         <p:spPr>
           <a:xfrm>
-            <a:off x="7635240" y="2788920"/>
+            <a:off x="7635240" y="2670048"/>
             <a:ext cx="3474720" cy="1536192"/>
           </a:xfrm>
           <a:prstGeom prst="roundRect">
@@ -13344,7 +13344,7 @@
         </p:nvSpPr>
         <p:spPr>
           <a:xfrm>
-            <a:off x="7799832" y="2935224"/>
+            <a:off x="7799832" y="2816352"/>
             <a:ext cx="3145536" cy="256032"/>
           </a:xfrm>
           <a:prstGeom prst="rect">
@@ -13383,7 +13383,7 @@
         </p:nvSpPr>
         <p:spPr>
           <a:xfrm>
-            <a:off x="7818120" y="3300984"/>
+            <a:off x="7818120" y="3182112"/>
             <a:ext cx="3090672" cy="877824"/>
           </a:xfrm>
           <a:prstGeom prst="rect">
@@ -13458,12 +13458,12 @@
         </p:nvSpPr>
         <p:spPr>
           <a:xfrm>
-            <a:off x="7635240" y="4498848"/>
-            <a:ext cx="3474720" cy="1143000"/>
+            <a:off x="7635240" y="4343400"/>
+            <a:ext cx="3474720" cy="1255471"/>
           </a:xfrm>
           <a:prstGeom prst="roundRect">
             <a:avLst>
-              <a:gd name="adj" fmla="val 9600"/>
+              <a:gd name="adj" fmla="val 8740"/>
             </a:avLst>
           </a:prstGeom>
           <a:solidFill>
@@ -13485,7 +13485,7 @@
         </p:nvSpPr>
         <p:spPr>
           <a:xfrm>
-            <a:off x="7799832" y="4645152"/>
+            <a:off x="7799832" y="4489704"/>
             <a:ext cx="3145536" cy="256032"/>
           </a:xfrm>
           <a:prstGeom prst="rect">
@@ -13524,8 +13524,8 @@
         </p:nvSpPr>
         <p:spPr>
           <a:xfrm>
-            <a:off x="7799832" y="4974336"/>
-            <a:ext cx="3145536" cy="576072"/>
+            <a:off x="7799832" y="4818888"/>
+            <a:ext cx="3145536" cy="688543"/>
           </a:xfrm>
           <a:prstGeom prst="rect">
             <a:avLst/>
@@ -13551,7 +13551,7 @@
                 <a:ea typeface="Aptos" pitchFamily="34" charset="-122"/>
                 <a:cs typeface="Aptos" pitchFamily="34" charset="-120"/>
               </a:rPr>
-              <a:t>Identify what could go wrong, who could be affected, what safeguards are needed, and what evidence should be reviewed.</a:t>
+              <a:t>Identify what could go wrong, who could be affected, what safeguards are needed, and what evidence should be reviewed before use.</a:t>
             </a:r>
             <a:endParaRPr lang="en-US" sz="1320" dirty="0"/>
           </a:p>
@@ -14029,7 +14029,7 @@
                 <a:ea typeface="Aptos" pitchFamily="34" charset="-122"/>
                 <a:cs typeface="Aptos" pitchFamily="34" charset="-120"/>
               </a:rPr>
-              <a:t>Use the related plays to identify decisions, participants, timing, approvals, and documentation needed for responsible.</a:t>
+              <a:t>Use the related plays to identify decisions, participants, timing, approvals, and documentation needed for responsible implementation.</a:t>
             </a:r>
             <a:endParaRPr lang="en-US" sz="1320" dirty="0"/>
           </a:p>
@@ -14648,7 +14648,7 @@
                 <a:ea typeface="Aptos" pitchFamily="34" charset="-122"/>
                 <a:cs typeface="Aptos" pitchFamily="34" charset="-120"/>
               </a:rPr>
-              <a:t>Use linked tools when your department needs a structured worksheet, template, checklist, review process, or.</a:t>
+              <a:t>Use linked tools when your department needs a structured worksheet, template, checklist, review process, or documentation artifact.</a:t>
             </a:r>
             <a:endParaRPr lang="en-US" sz="1320" dirty="0"/>
           </a:p>
@@ -15158,11 +15158,11 @@
         <p:spPr>
           <a:xfrm>
             <a:off x="7635240" y="1325880"/>
-            <a:ext cx="3474720" cy="1325880"/>
+            <a:ext cx="3474720" cy="1207008"/>
           </a:xfrm>
           <a:prstGeom prst="roundRect">
             <a:avLst>
-              <a:gd name="adj" fmla="val 8276"/>
+              <a:gd name="adj" fmla="val 9091"/>
             </a:avLst>
           </a:prstGeom>
           <a:solidFill>
@@ -15224,7 +15224,7 @@
         <p:spPr>
           <a:xfrm>
             <a:off x="7799832" y="1801368"/>
-            <a:ext cx="3145536" cy="758952"/>
+            <a:ext cx="3145536" cy="640080"/>
           </a:xfrm>
           <a:prstGeom prst="rect">
             <a:avLst/>
@@ -15264,12 +15264,12 @@
         </p:nvSpPr>
         <p:spPr>
           <a:xfrm>
-            <a:off x="7635240" y="2788920"/>
-            <a:ext cx="3474720" cy="1536192"/>
+            <a:off x="7635240" y="2670048"/>
+            <a:ext cx="3474720" cy="1377086"/>
           </a:xfrm>
           <a:prstGeom prst="roundRect">
             <a:avLst>
-              <a:gd name="adj" fmla="val 7143"/>
+              <a:gd name="adj" fmla="val 7968"/>
             </a:avLst>
           </a:prstGeom>
           <a:solidFill>
@@ -15291,7 +15291,7 @@
         </p:nvSpPr>
         <p:spPr>
           <a:xfrm>
-            <a:off x="7799832" y="2935224"/>
+            <a:off x="7799832" y="2816352"/>
             <a:ext cx="3145536" cy="256032"/>
           </a:xfrm>
           <a:prstGeom prst="rect">
@@ -15330,8 +15330,8 @@
         </p:nvSpPr>
         <p:spPr>
           <a:xfrm>
-            <a:off x="7818120" y="3300984"/>
-            <a:ext cx="3090672" cy="877824"/>
+            <a:off x="7818120" y="3182112"/>
+            <a:ext cx="3090672" cy="718718"/>
           </a:xfrm>
           <a:prstGeom prst="rect">
             <a:avLst/>
@@ -15405,12 +15405,12 @@
         </p:nvSpPr>
         <p:spPr>
           <a:xfrm>
-            <a:off x="7635240" y="4498848"/>
-            <a:ext cx="3474720" cy="1143000"/>
+            <a:off x="7635240" y="4184294"/>
+            <a:ext cx="3474720" cy="1466698"/>
           </a:xfrm>
           <a:prstGeom prst="roundRect">
             <a:avLst>
-              <a:gd name="adj" fmla="val 9600"/>
+              <a:gd name="adj" fmla="val 7481"/>
             </a:avLst>
           </a:prstGeom>
           <a:solidFill>
@@ -15432,7 +15432,7 @@
         </p:nvSpPr>
         <p:spPr>
           <a:xfrm>
-            <a:off x="7799832" y="4645152"/>
+            <a:off x="7799832" y="4330598"/>
             <a:ext cx="3145536" cy="256032"/>
           </a:xfrm>
           <a:prstGeom prst="rect">
@@ -15471,8 +15471,8 @@
         </p:nvSpPr>
         <p:spPr>
           <a:xfrm>
-            <a:off x="7799832" y="4974336"/>
-            <a:ext cx="3145536" cy="576072"/>
+            <a:off x="7799832" y="4659782"/>
+            <a:ext cx="3145536" cy="899770"/>
           </a:xfrm>
           <a:prstGeom prst="rect">
             <a:avLst/>
@@ -15498,7 +15498,7 @@
                 <a:ea typeface="Aptos" pitchFamily="34" charset="-122"/>
                 <a:cs typeface="Aptos" pitchFamily="34" charset="-120"/>
               </a:rPr>
-              <a:t>Use the assignment to test whether you can explain the concept, apply it to a realistic public health situation, and.</a:t>
+              <a:t>Use the assignment to test whether you can explain the concept, apply it to a realistic public health situation, and identify what would need review before the work moves forward.</a:t>
             </a:r>
             <a:endParaRPr lang="en-US" sz="1320" dirty="0"/>
           </a:p>
@@ -15833,11 +15833,11 @@
         <p:spPr>
           <a:xfrm>
             <a:off x="7635240" y="1325880"/>
-            <a:ext cx="3474720" cy="1325880"/>
+            <a:ext cx="3474720" cy="1207008"/>
           </a:xfrm>
           <a:prstGeom prst="roundRect">
             <a:avLst>
-              <a:gd name="adj" fmla="val 8276"/>
+              <a:gd name="adj" fmla="val 9091"/>
             </a:avLst>
           </a:prstGeom>
           <a:solidFill>
@@ -15899,7 +15899,7 @@
         <p:spPr>
           <a:xfrm>
             <a:off x="7799832" y="1801368"/>
-            <a:ext cx="3145536" cy="758952"/>
+            <a:ext cx="3145536" cy="640080"/>
           </a:xfrm>
           <a:prstGeom prst="rect">
             <a:avLst/>
@@ -15939,12 +15939,12 @@
         </p:nvSpPr>
         <p:spPr>
           <a:xfrm>
-            <a:off x="7635240" y="2788920"/>
-            <a:ext cx="3474720" cy="1536192"/>
+            <a:off x="7635240" y="2670048"/>
+            <a:ext cx="3474720" cy="1377086"/>
           </a:xfrm>
           <a:prstGeom prst="roundRect">
             <a:avLst>
-              <a:gd name="adj" fmla="val 7143"/>
+              <a:gd name="adj" fmla="val 7968"/>
             </a:avLst>
           </a:prstGeom>
           <a:solidFill>
@@ -15966,7 +15966,7 @@
         </p:nvSpPr>
         <p:spPr>
           <a:xfrm>
-            <a:off x="7799832" y="2935224"/>
+            <a:off x="7799832" y="2816352"/>
             <a:ext cx="3145536" cy="256032"/>
           </a:xfrm>
           <a:prstGeom prst="rect">
@@ -16005,8 +16005,8 @@
         </p:nvSpPr>
         <p:spPr>
           <a:xfrm>
-            <a:off x="7818120" y="3300984"/>
-            <a:ext cx="3090672" cy="877824"/>
+            <a:off x="7818120" y="3182112"/>
+            <a:ext cx="3090672" cy="718718"/>
           </a:xfrm>
           <a:prstGeom prst="rect">
             <a:avLst/>
@@ -16046,12 +16046,12 @@
         </p:nvSpPr>
         <p:spPr>
           <a:xfrm>
-            <a:off x="7635240" y="4498848"/>
-            <a:ext cx="3474720" cy="1143000"/>
+            <a:off x="7635240" y="4184294"/>
+            <a:ext cx="3474720" cy="1466698"/>
           </a:xfrm>
           <a:prstGeom prst="roundRect">
             <a:avLst>
-              <a:gd name="adj" fmla="val 9600"/>
+              <a:gd name="adj" fmla="val 7481"/>
             </a:avLst>
           </a:prstGeom>
           <a:solidFill>
@@ -16073,7 +16073,7 @@
         </p:nvSpPr>
         <p:spPr>
           <a:xfrm>
-            <a:off x="7799832" y="4645152"/>
+            <a:off x="7799832" y="4330598"/>
             <a:ext cx="3145536" cy="256032"/>
           </a:xfrm>
           <a:prstGeom prst="rect">
@@ -16112,8 +16112,8 @@
         </p:nvSpPr>
         <p:spPr>
           <a:xfrm>
-            <a:off x="7799832" y="4974336"/>
-            <a:ext cx="3145536" cy="576072"/>
+            <a:off x="7799832" y="4659782"/>
+            <a:ext cx="3145536" cy="899770"/>
           </a:xfrm>
           <a:prstGeom prst="rect">
             <a:avLst/>
@@ -16139,7 +16139,7 @@
                 <a:ea typeface="Aptos" pitchFamily="34" charset="-122"/>
                 <a:cs typeface="Aptos" pitchFamily="34" charset="-120"/>
               </a:rPr>
-              <a:t>Use the assignment to test whether you can explain the concept, apply it to a realistic public health situation, and.</a:t>
+              <a:t>Use the assignment to test whether you can explain the concept, apply it to a realistic public health situation, and identify what would need review before the work moves forward.</a:t>
             </a:r>
             <a:endParaRPr lang="en-US" sz="1320" dirty="0"/>
           </a:p>
@@ -16508,11 +16508,11 @@
         <p:spPr>
           <a:xfrm>
             <a:off x="7635240" y="1325880"/>
-            <a:ext cx="3474720" cy="1325880"/>
+            <a:ext cx="3474720" cy="1255471"/>
           </a:xfrm>
           <a:prstGeom prst="roundRect">
             <a:avLst>
-              <a:gd name="adj" fmla="val 8276"/>
+              <a:gd name="adj" fmla="val 8740"/>
             </a:avLst>
           </a:prstGeom>
           <a:solidFill>
@@ -16574,7 +16574,7 @@
         <p:spPr>
           <a:xfrm>
             <a:off x="7799832" y="1801368"/>
-            <a:ext cx="3145536" cy="758952"/>
+            <a:ext cx="3145536" cy="688543"/>
           </a:xfrm>
           <a:prstGeom prst="rect">
             <a:avLst/>
@@ -16614,7 +16614,7 @@
         </p:nvSpPr>
         <p:spPr>
           <a:xfrm>
-            <a:off x="7635240" y="2788920"/>
+            <a:off x="7635240" y="2718511"/>
             <a:ext cx="3474720" cy="1536192"/>
           </a:xfrm>
           <a:prstGeom prst="roundRect">
@@ -16641,8 +16641,8 @@
         </p:nvSpPr>
         <p:spPr>
           <a:xfrm>
-            <a:off x="7799832" y="2935224"/>
-            <a:ext cx="3145536" cy="256032"/>
+            <a:off x="7799832" y="2846527"/>
+            <a:ext cx="3145536" cy="237744"/>
           </a:xfrm>
           <a:prstGeom prst="rect">
             <a:avLst/>
@@ -16658,7 +16658,7 @@
               <a:buNone/>
             </a:pPr>
             <a:r>
-              <a:rPr lang="en-US" sz="1300" b="1" dirty="0">
+              <a:rPr lang="en-US" sz="1250" b="1" dirty="0">
                 <a:solidFill>
                   <a:srgbClr val="0068B7"/>
                 </a:solidFill>
@@ -16666,101 +16666,317 @@
                 <a:ea typeface="Aptos" pitchFamily="34" charset="-122"/>
                 <a:cs typeface="Aptos" pitchFamily="34" charset="-120"/>
               </a:rPr>
-              <a:t>Concept checkpoints</a:t>
-            </a:r>
-            <a:endParaRPr lang="en-US" sz="1300" dirty="0"/>
-          </a:p>
-        </p:txBody>
-      </p:sp>
-      <p:sp>
-        <p:nvSpPr>
-          <p:cNvPr id="15" name="Text 13"/>
-          <p:cNvSpPr/>
-          <p:nvPr/>
-        </p:nvSpPr>
-        <p:spPr>
-          <a:xfrm>
-            <a:off x="7818120" y="3300984"/>
-            <a:ext cx="3090672" cy="877824"/>
-          </a:xfrm>
-          <a:prstGeom prst="rect">
-            <a:avLst/>
-          </a:prstGeom>
-          <a:noFill/>
-          <a:ln/>
-        </p:spPr>
-        <p:txBody>
-          <a:bodyPr wrap="square" lIns="508" tIns="508" rIns="508" bIns="508" rtlCol="0" anchor="t">
+              <a:t>Risk control loop</a:t>
+            </a:r>
+            <a:endParaRPr lang="en-US" sz="1250" dirty="0"/>
+          </a:p>
+        </p:txBody>
+      </p:sp>
+      <p:sp>
+        <p:nvSpPr>
+          <p:cNvPr id="15" name="Shape 13"/>
+          <p:cNvSpPr/>
+          <p:nvPr/>
+        </p:nvSpPr>
+        <p:spPr>
+          <a:xfrm>
+            <a:off x="8763000" y="3399739"/>
+            <a:ext cx="164592" cy="0"/>
+          </a:xfrm>
+          <a:prstGeom prst="line">
+            <a:avLst/>
+          </a:prstGeom>
+          <a:noFill/>
+          <a:ln w="15240">
+            <a:solidFill>
+              <a:srgbClr val="8ABBD8"/>
+            </a:solidFill>
+            <a:prstDash val="solid"/>
+          </a:ln>
+        </p:spPr>
+      </p:sp>
+      <p:sp>
+        <p:nvSpPr>
+          <p:cNvPr id="16" name="Shape 14"/>
+          <p:cNvSpPr/>
+          <p:nvPr/>
+        </p:nvSpPr>
+        <p:spPr>
+          <a:xfrm>
+            <a:off x="7872984" y="3248863"/>
+            <a:ext cx="890016" cy="301752"/>
+          </a:xfrm>
+          <a:prstGeom prst="roundRect">
+            <a:avLst>
+              <a:gd name="adj" fmla="val 24242"/>
+            </a:avLst>
+          </a:prstGeom>
+          <a:solidFill>
+            <a:srgbClr val="0068B7"/>
+          </a:solidFill>
+          <a:ln w="12700">
+            <a:solidFill>
+              <a:srgbClr val="0068B7"/>
+            </a:solidFill>
+            <a:prstDash val="solid"/>
+          </a:ln>
+        </p:spPr>
+      </p:sp>
+      <p:sp>
+        <p:nvSpPr>
+          <p:cNvPr id="17" name="Text 15"/>
+          <p:cNvSpPr/>
+          <p:nvPr/>
+        </p:nvSpPr>
+        <p:spPr>
+          <a:xfrm>
+            <a:off x="7909560" y="3322015"/>
+            <a:ext cx="816864" cy="146304"/>
+          </a:xfrm>
+          <a:prstGeom prst="rect">
+            <a:avLst/>
+          </a:prstGeom>
+          <a:noFill/>
+          <a:ln/>
+        </p:spPr>
+        <p:txBody>
+          <a:bodyPr wrap="square" lIns="0" tIns="0" rIns="0" bIns="0" rtlCol="0" anchor="ctr">
             <a:normAutofit/>
           </a:bodyPr>
           <a:lstStyle/>
           <a:p>
-            <a:pPr indent="0" marL="0">
-              <a:buNone/>
-            </a:pPr>
-            <a:r>
-              <a:rPr lang="en-US" sz="1220" dirty="0">
-                <a:solidFill>
-                  <a:srgbClr val="17364A"/>
-                </a:solidFill>
-                <a:latin typeface="Aptos" pitchFamily="34" charset="0"/>
-                <a:ea typeface="Aptos" pitchFamily="34" charset="-122"/>
-                <a:cs typeface="Aptos" pitchFamily="34" charset="-120"/>
-              </a:rPr>
-              <a:t>AI security focuses on protecting AI systems, integrations,.</a:t>
-            </a:r>
-            <a:endParaRPr lang="en-US" sz="1220" dirty="0"/>
-          </a:p>
-          <a:p>
-            <a:pPr indent="0" marL="0">
-              <a:buNone/>
-            </a:pPr>
-            <a:r>
-              <a:rPr lang="en-US" sz="1220" dirty="0">
-                <a:solidFill>
-                  <a:srgbClr val="17364A"/>
-                </a:solidFill>
-                <a:latin typeface="Aptos" pitchFamily="34" charset="0"/>
-                <a:ea typeface="Aptos" pitchFamily="34" charset="-122"/>
-                <a:cs typeface="Aptos" pitchFamily="34" charset="-120"/>
-              </a:rPr>
-              <a:t>Public health agencies handle sensitive health, demographic,.</a:t>
-            </a:r>
-            <a:endParaRPr lang="en-US" sz="1220" dirty="0"/>
-          </a:p>
-          <a:p>
-            <a:pPr indent="0" marL="0">
-              <a:buNone/>
-            </a:pPr>
-            <a:r>
-              <a:rPr lang="en-US" sz="1220" dirty="0">
-                <a:solidFill>
-                  <a:srgbClr val="17364A"/>
-                </a:solidFill>
-                <a:latin typeface="Aptos" pitchFamily="34" charset="0"/>
-                <a:ea typeface="Aptos" pitchFamily="34" charset="-122"/>
-                <a:cs typeface="Aptos" pitchFamily="34" charset="-120"/>
-              </a:rPr>
-              <a:t>This module introduces security risks that are especially relevant.</a:t>
-            </a:r>
-            <a:endParaRPr lang="en-US" sz="1220" dirty="0"/>
-          </a:p>
-        </p:txBody>
-      </p:sp>
-      <p:sp>
-        <p:nvSpPr>
-          <p:cNvPr id="16" name="Shape 14"/>
-          <p:cNvSpPr/>
-          <p:nvPr/>
-        </p:nvSpPr>
-        <p:spPr>
-          <a:xfrm>
-            <a:off x="7635240" y="4498848"/>
-            <a:ext cx="3474720" cy="1143000"/>
+            <a:pPr algn="ctr" indent="0" marL="0">
+              <a:buNone/>
+            </a:pPr>
+            <a:r>
+              <a:rPr lang="en-US" sz="880" b="1" dirty="0">
+                <a:solidFill>
+                  <a:srgbClr val="FFFFFF"/>
+                </a:solidFill>
+                <a:latin typeface="Aptos" pitchFamily="34" charset="0"/>
+                <a:ea typeface="Aptos" pitchFamily="34" charset="-122"/>
+                <a:cs typeface="Aptos" pitchFamily="34" charset="-120"/>
+              </a:rPr>
+              <a:t>Identify</a:t>
+            </a:r>
+            <a:endParaRPr lang="en-US" sz="880" dirty="0"/>
+          </a:p>
+        </p:txBody>
+      </p:sp>
+      <p:sp>
+        <p:nvSpPr>
+          <p:cNvPr id="18" name="Shape 16"/>
+          <p:cNvSpPr/>
+          <p:nvPr/>
+        </p:nvSpPr>
+        <p:spPr>
+          <a:xfrm>
+            <a:off x="9817608" y="3399739"/>
+            <a:ext cx="164592" cy="0"/>
+          </a:xfrm>
+          <a:prstGeom prst="line">
+            <a:avLst/>
+          </a:prstGeom>
+          <a:noFill/>
+          <a:ln w="15240">
+            <a:solidFill>
+              <a:srgbClr val="8ABBD8"/>
+            </a:solidFill>
+            <a:prstDash val="solid"/>
+          </a:ln>
+        </p:spPr>
+      </p:sp>
+      <p:sp>
+        <p:nvSpPr>
+          <p:cNvPr id="19" name="Shape 17"/>
+          <p:cNvSpPr/>
+          <p:nvPr/>
+        </p:nvSpPr>
+        <p:spPr>
+          <a:xfrm>
+            <a:off x="8927592" y="3248863"/>
+            <a:ext cx="890016" cy="301752"/>
           </a:xfrm>
           <a:prstGeom prst="roundRect">
             <a:avLst>
-              <a:gd name="adj" fmla="val 9600"/>
+              <a:gd name="adj" fmla="val 24242"/>
+            </a:avLst>
+          </a:prstGeom>
+          <a:solidFill>
+            <a:srgbClr val="2F8A28"/>
+          </a:solidFill>
+          <a:ln w="12700">
+            <a:solidFill>
+              <a:srgbClr val="2F8A28"/>
+            </a:solidFill>
+            <a:prstDash val="solid"/>
+          </a:ln>
+        </p:spPr>
+      </p:sp>
+      <p:sp>
+        <p:nvSpPr>
+          <p:cNvPr id="20" name="Text 18"/>
+          <p:cNvSpPr/>
+          <p:nvPr/>
+        </p:nvSpPr>
+        <p:spPr>
+          <a:xfrm>
+            <a:off x="8964168" y="3322015"/>
+            <a:ext cx="816864" cy="146304"/>
+          </a:xfrm>
+          <a:prstGeom prst="rect">
+            <a:avLst/>
+          </a:prstGeom>
+          <a:noFill/>
+          <a:ln/>
+        </p:spPr>
+        <p:txBody>
+          <a:bodyPr wrap="square" lIns="0" tIns="0" rIns="0" bIns="0" rtlCol="0" anchor="ctr">
+            <a:normAutofit/>
+          </a:bodyPr>
+          <a:lstStyle/>
+          <a:p>
+            <a:pPr algn="ctr" indent="0" marL="0">
+              <a:buNone/>
+            </a:pPr>
+            <a:r>
+              <a:rPr lang="en-US" sz="880" b="1" dirty="0">
+                <a:solidFill>
+                  <a:srgbClr val="FFFFFF"/>
+                </a:solidFill>
+                <a:latin typeface="Aptos" pitchFamily="34" charset="0"/>
+                <a:ea typeface="Aptos" pitchFamily="34" charset="-122"/>
+                <a:cs typeface="Aptos" pitchFamily="34" charset="-120"/>
+              </a:rPr>
+              <a:t>Control</a:t>
+            </a:r>
+            <a:endParaRPr lang="en-US" sz="880" dirty="0"/>
+          </a:p>
+        </p:txBody>
+      </p:sp>
+      <p:sp>
+        <p:nvSpPr>
+          <p:cNvPr id="21" name="Shape 19"/>
+          <p:cNvSpPr/>
+          <p:nvPr/>
+        </p:nvSpPr>
+        <p:spPr>
+          <a:xfrm>
+            <a:off x="9982200" y="3248863"/>
+            <a:ext cx="890016" cy="301752"/>
+          </a:xfrm>
+          <a:prstGeom prst="roundRect">
+            <a:avLst>
+              <a:gd name="adj" fmla="val 24242"/>
+            </a:avLst>
+          </a:prstGeom>
+          <a:solidFill>
+            <a:srgbClr val="6A4CA3"/>
+          </a:solidFill>
+          <a:ln w="12700">
+            <a:solidFill>
+              <a:srgbClr val="6A4CA3"/>
+            </a:solidFill>
+            <a:prstDash val="solid"/>
+          </a:ln>
+        </p:spPr>
+      </p:sp>
+      <p:sp>
+        <p:nvSpPr>
+          <p:cNvPr id="22" name="Text 20"/>
+          <p:cNvSpPr/>
+          <p:nvPr/>
+        </p:nvSpPr>
+        <p:spPr>
+          <a:xfrm>
+            <a:off x="10018776" y="3322015"/>
+            <a:ext cx="816864" cy="146304"/>
+          </a:xfrm>
+          <a:prstGeom prst="rect">
+            <a:avLst/>
+          </a:prstGeom>
+          <a:noFill/>
+          <a:ln/>
+        </p:spPr>
+        <p:txBody>
+          <a:bodyPr wrap="square" lIns="0" tIns="0" rIns="0" bIns="0" rtlCol="0" anchor="ctr">
+            <a:normAutofit/>
+          </a:bodyPr>
+          <a:lstStyle/>
+          <a:p>
+            <a:pPr algn="ctr" indent="0" marL="0">
+              <a:buNone/>
+            </a:pPr>
+            <a:r>
+              <a:rPr lang="en-US" sz="880" b="1" dirty="0">
+                <a:solidFill>
+                  <a:srgbClr val="FFFFFF"/>
+                </a:solidFill>
+                <a:latin typeface="Aptos" pitchFamily="34" charset="0"/>
+                <a:ea typeface="Aptos" pitchFamily="34" charset="-122"/>
+                <a:cs typeface="Aptos" pitchFamily="34" charset="-120"/>
+              </a:rPr>
+              <a:t>Monitor</a:t>
+            </a:r>
+            <a:endParaRPr lang="en-US" sz="880" dirty="0"/>
+          </a:p>
+        </p:txBody>
+      </p:sp>
+      <p:sp>
+        <p:nvSpPr>
+          <p:cNvPr id="23" name="Text 21"/>
+          <p:cNvSpPr/>
+          <p:nvPr/>
+        </p:nvSpPr>
+        <p:spPr>
+          <a:xfrm>
+            <a:off x="7854696" y="3742639"/>
+            <a:ext cx="3035808" cy="365760"/>
+          </a:xfrm>
+          <a:prstGeom prst="rect">
+            <a:avLst/>
+          </a:prstGeom>
+          <a:noFill/>
+          <a:ln/>
+        </p:spPr>
+        <p:txBody>
+          <a:bodyPr wrap="square" lIns="254" tIns="254" rIns="254" bIns="254" rtlCol="0" anchor="t">
+            <a:normAutofit/>
+          </a:bodyPr>
+          <a:lstStyle/>
+          <a:p>
+            <a:pPr indent="0" marL="0">
+              <a:buNone/>
+            </a:pPr>
+            <a:r>
+              <a:rPr lang="en-US" sz="1120" dirty="0">
+                <a:solidFill>
+                  <a:srgbClr val="17364A"/>
+                </a:solidFill>
+                <a:latin typeface="Aptos" pitchFamily="34" charset="0"/>
+                <a:ea typeface="Aptos" pitchFamily="34" charset="-122"/>
+                <a:cs typeface="Aptos" pitchFamily="34" charset="-120"/>
+              </a:rPr>
+              <a:t>Responsible use depends on finding risks early, applying safeguards, and watching for drift or harm over time.</a:t>
+            </a:r>
+            <a:endParaRPr lang="en-US" sz="1120" dirty="0"/>
+          </a:p>
+        </p:txBody>
+      </p:sp>
+      <p:sp>
+        <p:nvSpPr>
+          <p:cNvPr id="24" name="Shape 22"/>
+          <p:cNvSpPr/>
+          <p:nvPr/>
+        </p:nvSpPr>
+        <p:spPr>
+          <a:xfrm>
+            <a:off x="7635240" y="4391863"/>
+            <a:ext cx="3474720" cy="1255471"/>
+          </a:xfrm>
+          <a:prstGeom prst="roundRect">
+            <a:avLst>
+              <a:gd name="adj" fmla="val 8740"/>
             </a:avLst>
           </a:prstGeom>
           <a:solidFill>
@@ -16776,13 +16992,13 @@
       </p:sp>
       <p:sp>
         <p:nvSpPr>
-          <p:cNvPr id="17" name="Text 15"/>
-          <p:cNvSpPr/>
-          <p:nvPr/>
-        </p:nvSpPr>
-        <p:spPr>
-          <a:xfrm>
-            <a:off x="7799832" y="4645152"/>
+          <p:cNvPr id="25" name="Text 23"/>
+          <p:cNvSpPr/>
+          <p:nvPr/>
+        </p:nvSpPr>
+        <p:spPr>
+          <a:xfrm>
+            <a:off x="7799832" y="4538167"/>
             <a:ext cx="3145536" cy="256032"/>
           </a:xfrm>
           <a:prstGeom prst="rect">
@@ -16815,14 +17031,14 @@
       </p:sp>
       <p:sp>
         <p:nvSpPr>
-          <p:cNvPr id="18" name="Text 16"/>
-          <p:cNvSpPr/>
-          <p:nvPr/>
-        </p:nvSpPr>
-        <p:spPr>
-          <a:xfrm>
-            <a:off x="7799832" y="4974336"/>
-            <a:ext cx="3145536" cy="576072"/>
+          <p:cNvPr id="26" name="Text 24"/>
+          <p:cNvSpPr/>
+          <p:nvPr/>
+        </p:nvSpPr>
+        <p:spPr>
+          <a:xfrm>
+            <a:off x="7799832" y="4867351"/>
+            <a:ext cx="3145536" cy="688543"/>
           </a:xfrm>
           <a:prstGeom prst="rect">
             <a:avLst/>
@@ -16848,7 +17064,7 @@
                 <a:ea typeface="Aptos" pitchFamily="34" charset="-122"/>
                 <a:cs typeface="Aptos" pitchFamily="34" charset="-120"/>
               </a:rPr>
-              <a:t>Identify what could go wrong, who could be affected, what safeguards are needed, and what evidence should be reviewed.</a:t>
+              <a:t>Identify what could go wrong, who could be affected, what safeguards are needed, and what evidence should be reviewed before use.</a:t>
             </a:r>
             <a:endParaRPr lang="en-US" sz="1320" dirty="0"/>
           </a:p>
@@ -17217,11 +17433,11 @@
         <p:spPr>
           <a:xfrm>
             <a:off x="7635240" y="1325880"/>
-            <a:ext cx="3474720" cy="1325880"/>
+            <a:ext cx="3474720" cy="1207008"/>
           </a:xfrm>
           <a:prstGeom prst="roundRect">
             <a:avLst>
-              <a:gd name="adj" fmla="val 8276"/>
+              <a:gd name="adj" fmla="val 9091"/>
             </a:avLst>
           </a:prstGeom>
           <a:solidFill>
@@ -17283,7 +17499,7 @@
         <p:spPr>
           <a:xfrm>
             <a:off x="7799832" y="1801368"/>
-            <a:ext cx="3145536" cy="758952"/>
+            <a:ext cx="3145536" cy="640080"/>
           </a:xfrm>
           <a:prstGeom prst="rect">
             <a:avLst/>
@@ -17309,7 +17525,7 @@
                 <a:ea typeface="Aptos" pitchFamily="34" charset="-122"/>
                 <a:cs typeface="Aptos" pitchFamily="34" charset="-120"/>
               </a:rPr>
-              <a:t>This module provides national-level training guidance for public health agencies and partners.</a:t>
+              <a:t>This module provides national-level training guidance for public health agencies and.</a:t>
             </a:r>
             <a:endParaRPr lang="en-US" sz="1320" dirty="0"/>
           </a:p>
@@ -17323,12 +17539,12 @@
         </p:nvSpPr>
         <p:spPr>
           <a:xfrm>
-            <a:off x="7635240" y="2788920"/>
-            <a:ext cx="3474720" cy="1536192"/>
+            <a:off x="7635240" y="2670048"/>
+            <a:ext cx="3474720" cy="1377086"/>
           </a:xfrm>
           <a:prstGeom prst="roundRect">
             <a:avLst>
-              <a:gd name="adj" fmla="val 7143"/>
+              <a:gd name="adj" fmla="val 7968"/>
             </a:avLst>
           </a:prstGeom>
           <a:solidFill>
@@ -17350,8 +17566,8 @@
         </p:nvSpPr>
         <p:spPr>
           <a:xfrm>
-            <a:off x="7799832" y="2935224"/>
-            <a:ext cx="3145536" cy="256032"/>
+            <a:off x="7799832" y="2798064"/>
+            <a:ext cx="3145536" cy="237744"/>
           </a:xfrm>
           <a:prstGeom prst="rect">
             <a:avLst/>
@@ -17367,7 +17583,7 @@
               <a:buNone/>
             </a:pPr>
             <a:r>
-              <a:rPr lang="en-US" sz="1300" b="1" dirty="0">
+              <a:rPr lang="en-US" sz="1250" b="1" dirty="0">
                 <a:solidFill>
                   <a:srgbClr val="0068B7"/>
                 </a:solidFill>
@@ -17375,101 +17591,317 @@
                 <a:ea typeface="Aptos" pitchFamily="34" charset="-122"/>
                 <a:cs typeface="Aptos" pitchFamily="34" charset="-120"/>
               </a:rPr>
-              <a:t>Concept checkpoints</a:t>
-            </a:r>
-            <a:endParaRPr lang="en-US" sz="1300" dirty="0"/>
-          </a:p>
-        </p:txBody>
-      </p:sp>
-      <p:sp>
-        <p:nvSpPr>
-          <p:cNvPr id="15" name="Text 13"/>
-          <p:cNvSpPr/>
-          <p:nvPr/>
-        </p:nvSpPr>
-        <p:spPr>
-          <a:xfrm>
-            <a:off x="7818120" y="3300984"/>
-            <a:ext cx="3090672" cy="877824"/>
-          </a:xfrm>
-          <a:prstGeom prst="rect">
-            <a:avLst/>
-          </a:prstGeom>
-          <a:noFill/>
-          <a:ln/>
-        </p:spPr>
-        <p:txBody>
-          <a:bodyPr wrap="square" lIns="508" tIns="508" rIns="508" bIns="508" rtlCol="0" anchor="t">
+              <a:t>Governance pathway</a:t>
+            </a:r>
+            <a:endParaRPr lang="en-US" sz="1250" dirty="0"/>
+          </a:p>
+        </p:txBody>
+      </p:sp>
+      <p:sp>
+        <p:nvSpPr>
+          <p:cNvPr id="15" name="Shape 13"/>
+          <p:cNvSpPr/>
+          <p:nvPr/>
+        </p:nvSpPr>
+        <p:spPr>
+          <a:xfrm>
+            <a:off x="8763000" y="3351276"/>
+            <a:ext cx="164592" cy="0"/>
+          </a:xfrm>
+          <a:prstGeom prst="line">
+            <a:avLst/>
+          </a:prstGeom>
+          <a:noFill/>
+          <a:ln w="15240">
+            <a:solidFill>
+              <a:srgbClr val="8ABBD8"/>
+            </a:solidFill>
+            <a:prstDash val="solid"/>
+          </a:ln>
+        </p:spPr>
+      </p:sp>
+      <p:sp>
+        <p:nvSpPr>
+          <p:cNvPr id="16" name="Shape 14"/>
+          <p:cNvSpPr/>
+          <p:nvPr/>
+        </p:nvSpPr>
+        <p:spPr>
+          <a:xfrm>
+            <a:off x="7872984" y="3200400"/>
+            <a:ext cx="890016" cy="301752"/>
+          </a:xfrm>
+          <a:prstGeom prst="roundRect">
+            <a:avLst>
+              <a:gd name="adj" fmla="val 24242"/>
+            </a:avLst>
+          </a:prstGeom>
+          <a:solidFill>
+            <a:srgbClr val="0068B7"/>
+          </a:solidFill>
+          <a:ln w="12700">
+            <a:solidFill>
+              <a:srgbClr val="0068B7"/>
+            </a:solidFill>
+            <a:prstDash val="solid"/>
+          </a:ln>
+        </p:spPr>
+      </p:sp>
+      <p:sp>
+        <p:nvSpPr>
+          <p:cNvPr id="17" name="Text 15"/>
+          <p:cNvSpPr/>
+          <p:nvPr/>
+        </p:nvSpPr>
+        <p:spPr>
+          <a:xfrm>
+            <a:off x="7909560" y="3273552"/>
+            <a:ext cx="816864" cy="146304"/>
+          </a:xfrm>
+          <a:prstGeom prst="rect">
+            <a:avLst/>
+          </a:prstGeom>
+          <a:noFill/>
+          <a:ln/>
+        </p:spPr>
+        <p:txBody>
+          <a:bodyPr wrap="square" lIns="0" tIns="0" rIns="0" bIns="0" rtlCol="0" anchor="ctr">
             <a:normAutofit/>
           </a:bodyPr>
           <a:lstStyle/>
           <a:p>
-            <a:pPr indent="0" marL="0">
-              <a:buNone/>
-            </a:pPr>
-            <a:r>
-              <a:rPr lang="en-US" sz="1220" dirty="0">
-                <a:solidFill>
-                  <a:srgbClr val="17364A"/>
-                </a:solidFill>
-                <a:latin typeface="Aptos" pitchFamily="34" charset="0"/>
-                <a:ea typeface="Aptos" pitchFamily="34" charset="-122"/>
-                <a:cs typeface="Aptos" pitchFamily="34" charset="-120"/>
-              </a:rPr>
-              <a:t>It is not legal advice and does not replace review by agency legal.</a:t>
-            </a:r>
-            <a:endParaRPr lang="en-US" sz="1220" dirty="0"/>
-          </a:p>
-          <a:p>
-            <a:pPr indent="0" marL="0">
-              <a:buNone/>
-            </a:pPr>
-            <a:r>
-              <a:rPr lang="en-US" sz="1220" dirty="0">
-                <a:solidFill>
-                  <a:srgbClr val="17364A"/>
-                </a:solidFill>
-                <a:latin typeface="Aptos" pitchFamily="34" charset="0"/>
-                <a:ea typeface="Aptos" pitchFamily="34" charset="-122"/>
-                <a:cs typeface="Aptos" pitchFamily="34" charset="-120"/>
-              </a:rPr>
-              <a:t>Requirements may vary by state, locality, territory, Tribe,.</a:t>
-            </a:r>
-            <a:endParaRPr lang="en-US" sz="1220" dirty="0"/>
-          </a:p>
-          <a:p>
-            <a:pPr indent="0" marL="0">
-              <a:buNone/>
-            </a:pPr>
-            <a:r>
-              <a:rPr lang="en-US" sz="1220" dirty="0">
-                <a:solidFill>
-                  <a:srgbClr val="17364A"/>
-                </a:solidFill>
-                <a:latin typeface="Aptos" pitchFamily="34" charset="0"/>
-                <a:ea typeface="Aptos" pitchFamily="34" charset="-122"/>
-                <a:cs typeface="Aptos" pitchFamily="34" charset="-120"/>
-              </a:rPr>
-              <a:t>Learners should use this module to identify the issues that.</a:t>
-            </a:r>
-            <a:endParaRPr lang="en-US" sz="1220" dirty="0"/>
-          </a:p>
-        </p:txBody>
-      </p:sp>
-      <p:sp>
-        <p:nvSpPr>
-          <p:cNvPr id="16" name="Shape 14"/>
-          <p:cNvSpPr/>
-          <p:nvPr/>
-        </p:nvSpPr>
-        <p:spPr>
-          <a:xfrm>
-            <a:off x="7635240" y="4498848"/>
-            <a:ext cx="3474720" cy="1143000"/>
+            <a:pPr algn="ctr" indent="0" marL="0">
+              <a:buNone/>
+            </a:pPr>
+            <a:r>
+              <a:rPr lang="en-US" sz="880" b="1" dirty="0">
+                <a:solidFill>
+                  <a:srgbClr val="FFFFFF"/>
+                </a:solidFill>
+                <a:latin typeface="Aptos" pitchFamily="34" charset="0"/>
+                <a:ea typeface="Aptos" pitchFamily="34" charset="-122"/>
+                <a:cs typeface="Aptos" pitchFamily="34" charset="-120"/>
+              </a:rPr>
+              <a:t>Submit</a:t>
+            </a:r>
+            <a:endParaRPr lang="en-US" sz="880" dirty="0"/>
+          </a:p>
+        </p:txBody>
+      </p:sp>
+      <p:sp>
+        <p:nvSpPr>
+          <p:cNvPr id="18" name="Shape 16"/>
+          <p:cNvSpPr/>
+          <p:nvPr/>
+        </p:nvSpPr>
+        <p:spPr>
+          <a:xfrm>
+            <a:off x="9817608" y="3351276"/>
+            <a:ext cx="164592" cy="0"/>
+          </a:xfrm>
+          <a:prstGeom prst="line">
+            <a:avLst/>
+          </a:prstGeom>
+          <a:noFill/>
+          <a:ln w="15240">
+            <a:solidFill>
+              <a:srgbClr val="8ABBD8"/>
+            </a:solidFill>
+            <a:prstDash val="solid"/>
+          </a:ln>
+        </p:spPr>
+      </p:sp>
+      <p:sp>
+        <p:nvSpPr>
+          <p:cNvPr id="19" name="Shape 17"/>
+          <p:cNvSpPr/>
+          <p:nvPr/>
+        </p:nvSpPr>
+        <p:spPr>
+          <a:xfrm>
+            <a:off x="8927592" y="3200400"/>
+            <a:ext cx="890016" cy="301752"/>
           </a:xfrm>
           <a:prstGeom prst="roundRect">
             <a:avLst>
-              <a:gd name="adj" fmla="val 9600"/>
+              <a:gd name="adj" fmla="val 24242"/>
+            </a:avLst>
+          </a:prstGeom>
+          <a:solidFill>
+            <a:srgbClr val="2F8A28"/>
+          </a:solidFill>
+          <a:ln w="12700">
+            <a:solidFill>
+              <a:srgbClr val="2F8A28"/>
+            </a:solidFill>
+            <a:prstDash val="solid"/>
+          </a:ln>
+        </p:spPr>
+      </p:sp>
+      <p:sp>
+        <p:nvSpPr>
+          <p:cNvPr id="20" name="Text 18"/>
+          <p:cNvSpPr/>
+          <p:nvPr/>
+        </p:nvSpPr>
+        <p:spPr>
+          <a:xfrm>
+            <a:off x="8964168" y="3273552"/>
+            <a:ext cx="816864" cy="146304"/>
+          </a:xfrm>
+          <a:prstGeom prst="rect">
+            <a:avLst/>
+          </a:prstGeom>
+          <a:noFill/>
+          <a:ln/>
+        </p:spPr>
+        <p:txBody>
+          <a:bodyPr wrap="square" lIns="0" tIns="0" rIns="0" bIns="0" rtlCol="0" anchor="ctr">
+            <a:normAutofit/>
+          </a:bodyPr>
+          <a:lstStyle/>
+          <a:p>
+            <a:pPr algn="ctr" indent="0" marL="0">
+              <a:buNone/>
+            </a:pPr>
+            <a:r>
+              <a:rPr lang="en-US" sz="880" b="1" dirty="0">
+                <a:solidFill>
+                  <a:srgbClr val="FFFFFF"/>
+                </a:solidFill>
+                <a:latin typeface="Aptos" pitchFamily="34" charset="0"/>
+                <a:ea typeface="Aptos" pitchFamily="34" charset="-122"/>
+                <a:cs typeface="Aptos" pitchFamily="34" charset="-120"/>
+              </a:rPr>
+              <a:t>Review</a:t>
+            </a:r>
+            <a:endParaRPr lang="en-US" sz="880" dirty="0"/>
+          </a:p>
+        </p:txBody>
+      </p:sp>
+      <p:sp>
+        <p:nvSpPr>
+          <p:cNvPr id="21" name="Shape 19"/>
+          <p:cNvSpPr/>
+          <p:nvPr/>
+        </p:nvSpPr>
+        <p:spPr>
+          <a:xfrm>
+            <a:off x="9982200" y="3200400"/>
+            <a:ext cx="890016" cy="301752"/>
+          </a:xfrm>
+          <a:prstGeom prst="roundRect">
+            <a:avLst>
+              <a:gd name="adj" fmla="val 24242"/>
+            </a:avLst>
+          </a:prstGeom>
+          <a:solidFill>
+            <a:srgbClr val="6A4CA3"/>
+          </a:solidFill>
+          <a:ln w="12700">
+            <a:solidFill>
+              <a:srgbClr val="6A4CA3"/>
+            </a:solidFill>
+            <a:prstDash val="solid"/>
+          </a:ln>
+        </p:spPr>
+      </p:sp>
+      <p:sp>
+        <p:nvSpPr>
+          <p:cNvPr id="22" name="Text 20"/>
+          <p:cNvSpPr/>
+          <p:nvPr/>
+        </p:nvSpPr>
+        <p:spPr>
+          <a:xfrm>
+            <a:off x="10018776" y="3273552"/>
+            <a:ext cx="816864" cy="146304"/>
+          </a:xfrm>
+          <a:prstGeom prst="rect">
+            <a:avLst/>
+          </a:prstGeom>
+          <a:noFill/>
+          <a:ln/>
+        </p:spPr>
+        <p:txBody>
+          <a:bodyPr wrap="square" lIns="0" tIns="0" rIns="0" bIns="0" rtlCol="0" anchor="ctr">
+            <a:normAutofit/>
+          </a:bodyPr>
+          <a:lstStyle/>
+          <a:p>
+            <a:pPr algn="ctr" indent="0" marL="0">
+              <a:buNone/>
+            </a:pPr>
+            <a:r>
+              <a:rPr lang="en-US" sz="880" b="1" dirty="0">
+                <a:solidFill>
+                  <a:srgbClr val="FFFFFF"/>
+                </a:solidFill>
+                <a:latin typeface="Aptos" pitchFamily="34" charset="0"/>
+                <a:ea typeface="Aptos" pitchFamily="34" charset="-122"/>
+                <a:cs typeface="Aptos" pitchFamily="34" charset="-120"/>
+              </a:rPr>
+              <a:t>Oversee</a:t>
+            </a:r>
+            <a:endParaRPr lang="en-US" sz="880" dirty="0"/>
+          </a:p>
+        </p:txBody>
+      </p:sp>
+      <p:sp>
+        <p:nvSpPr>
+          <p:cNvPr id="23" name="Text 21"/>
+          <p:cNvSpPr/>
+          <p:nvPr/>
+        </p:nvSpPr>
+        <p:spPr>
+          <a:xfrm>
+            <a:off x="7854696" y="3694176"/>
+            <a:ext cx="3035808" cy="206654"/>
+          </a:xfrm>
+          <a:prstGeom prst="rect">
+            <a:avLst/>
+          </a:prstGeom>
+          <a:noFill/>
+          <a:ln/>
+        </p:spPr>
+        <p:txBody>
+          <a:bodyPr wrap="square" lIns="254" tIns="254" rIns="254" bIns="254" rtlCol="0" anchor="t">
+            <a:normAutofit/>
+          </a:bodyPr>
+          <a:lstStyle/>
+          <a:p>
+            <a:pPr indent="0" marL="0">
+              <a:buNone/>
+            </a:pPr>
+            <a:r>
+              <a:rPr lang="en-US" sz="1120" dirty="0">
+                <a:solidFill>
+                  <a:srgbClr val="17364A"/>
+                </a:solidFill>
+                <a:latin typeface="Aptos" pitchFamily="34" charset="0"/>
+                <a:ea typeface="Aptos" pitchFamily="34" charset="-122"/>
+                <a:cs typeface="Aptos" pitchFamily="34" charset="-120"/>
+              </a:rPr>
+              <a:t>A proposed AI use should move through documented review before it becomes an operational workflow.</a:t>
+            </a:r>
+            <a:endParaRPr lang="en-US" sz="1120" dirty="0"/>
+          </a:p>
+        </p:txBody>
+      </p:sp>
+      <p:sp>
+        <p:nvSpPr>
+          <p:cNvPr id="24" name="Shape 22"/>
+          <p:cNvSpPr/>
+          <p:nvPr/>
+        </p:nvSpPr>
+        <p:spPr>
+          <a:xfrm>
+            <a:off x="7635240" y="4184294"/>
+            <a:ext cx="3474720" cy="1466698"/>
+          </a:xfrm>
+          <a:prstGeom prst="roundRect">
+            <a:avLst>
+              <a:gd name="adj" fmla="val 7481"/>
             </a:avLst>
           </a:prstGeom>
           <a:solidFill>
@@ -17485,13 +17917,13 @@
       </p:sp>
       <p:sp>
         <p:nvSpPr>
-          <p:cNvPr id="17" name="Text 15"/>
-          <p:cNvSpPr/>
-          <p:nvPr/>
-        </p:nvSpPr>
-        <p:spPr>
-          <a:xfrm>
-            <a:off x="7799832" y="4645152"/>
+          <p:cNvPr id="25" name="Text 23"/>
+          <p:cNvSpPr/>
+          <p:nvPr/>
+        </p:nvSpPr>
+        <p:spPr>
+          <a:xfrm>
+            <a:off x="7799832" y="4330598"/>
             <a:ext cx="3145536" cy="256032"/>
           </a:xfrm>
           <a:prstGeom prst="rect">
@@ -17524,14 +17956,14 @@
       </p:sp>
       <p:sp>
         <p:nvSpPr>
-          <p:cNvPr id="18" name="Text 16"/>
-          <p:cNvSpPr/>
-          <p:nvPr/>
-        </p:nvSpPr>
-        <p:spPr>
-          <a:xfrm>
-            <a:off x="7799832" y="4974336"/>
-            <a:ext cx="3145536" cy="576072"/>
+          <p:cNvPr id="26" name="Text 24"/>
+          <p:cNvSpPr/>
+          <p:nvPr/>
+        </p:nvSpPr>
+        <p:spPr>
+          <a:xfrm>
+            <a:off x="7799832" y="4659782"/>
+            <a:ext cx="3145536" cy="899770"/>
           </a:xfrm>
           <a:prstGeom prst="rect">
             <a:avLst/>
@@ -17557,7 +17989,7 @@
                 <a:ea typeface="Aptos" pitchFamily="34" charset="-122"/>
                 <a:cs typeface="Aptos" pitchFamily="34" charset="-120"/>
               </a:rPr>
-              <a:t>Translate this concept into clear decision rights, review steps, documentation expectations, and escalation paths before.</a:t>
+              <a:t>Translate this concept into clear decision rights, review steps, documentation expectations, and escalation paths before an AI-supported workflow is approved.</a:t>
             </a:r>
             <a:endParaRPr lang="en-US" sz="1320" dirty="0"/>
           </a:p>
@@ -17926,11 +18358,11 @@
         <p:spPr>
           <a:xfrm>
             <a:off x="7635240" y="1325880"/>
-            <a:ext cx="3474720" cy="1325880"/>
+            <a:ext cx="3474720" cy="1255471"/>
           </a:xfrm>
           <a:prstGeom prst="roundRect">
             <a:avLst>
-              <a:gd name="adj" fmla="val 8276"/>
+              <a:gd name="adj" fmla="val 8740"/>
             </a:avLst>
           </a:prstGeom>
           <a:solidFill>
@@ -17992,7 +18424,7 @@
         <p:spPr>
           <a:xfrm>
             <a:off x="7799832" y="1801368"/>
-            <a:ext cx="3145536" cy="758952"/>
+            <a:ext cx="3145536" cy="688543"/>
           </a:xfrm>
           <a:prstGeom prst="rect">
             <a:avLst/>
@@ -18032,7 +18464,7 @@
         </p:nvSpPr>
         <p:spPr>
           <a:xfrm>
-            <a:off x="7635240" y="2788920"/>
+            <a:off x="7635240" y="2718511"/>
             <a:ext cx="3474720" cy="1536192"/>
           </a:xfrm>
           <a:prstGeom prst="roundRect">
@@ -18059,8 +18491,8 @@
         </p:nvSpPr>
         <p:spPr>
           <a:xfrm>
-            <a:off x="7799832" y="2935224"/>
-            <a:ext cx="3145536" cy="256032"/>
+            <a:off x="7799832" y="2846527"/>
+            <a:ext cx="3145536" cy="237744"/>
           </a:xfrm>
           <a:prstGeom prst="rect">
             <a:avLst/>
@@ -18076,7 +18508,7 @@
               <a:buNone/>
             </a:pPr>
             <a:r>
-              <a:rPr lang="en-US" sz="1300" b="1" dirty="0">
+              <a:rPr lang="en-US" sz="1250" b="1" dirty="0">
                 <a:solidFill>
                   <a:srgbClr val="0068B7"/>
                 </a:solidFill>
@@ -18084,101 +18516,317 @@
                 <a:ea typeface="Aptos" pitchFamily="34" charset="-122"/>
                 <a:cs typeface="Aptos" pitchFamily="34" charset="-120"/>
               </a:rPr>
-              <a:t>Concept checkpoints</a:t>
-            </a:r>
-            <a:endParaRPr lang="en-US" sz="1300" dirty="0"/>
-          </a:p>
-        </p:txBody>
-      </p:sp>
-      <p:sp>
-        <p:nvSpPr>
-          <p:cNvPr id="15" name="Text 13"/>
-          <p:cNvSpPr/>
-          <p:nvPr/>
-        </p:nvSpPr>
-        <p:spPr>
-          <a:xfrm>
-            <a:off x="7818120" y="3300984"/>
-            <a:ext cx="3090672" cy="877824"/>
-          </a:xfrm>
-          <a:prstGeom prst="rect">
-            <a:avLst/>
-          </a:prstGeom>
-          <a:noFill/>
-          <a:ln/>
-        </p:spPr>
-        <p:txBody>
-          <a:bodyPr wrap="square" lIns="508" tIns="508" rIns="508" bIns="508" rtlCol="0" anchor="t">
+              <a:t>Risk control loop</a:t>
+            </a:r>
+            <a:endParaRPr lang="en-US" sz="1250" dirty="0"/>
+          </a:p>
+        </p:txBody>
+      </p:sp>
+      <p:sp>
+        <p:nvSpPr>
+          <p:cNvPr id="15" name="Shape 13"/>
+          <p:cNvSpPr/>
+          <p:nvPr/>
+        </p:nvSpPr>
+        <p:spPr>
+          <a:xfrm>
+            <a:off x="8763000" y="3399739"/>
+            <a:ext cx="164592" cy="0"/>
+          </a:xfrm>
+          <a:prstGeom prst="line">
+            <a:avLst/>
+          </a:prstGeom>
+          <a:noFill/>
+          <a:ln w="15240">
+            <a:solidFill>
+              <a:srgbClr val="8ABBD8"/>
+            </a:solidFill>
+            <a:prstDash val="solid"/>
+          </a:ln>
+        </p:spPr>
+      </p:sp>
+      <p:sp>
+        <p:nvSpPr>
+          <p:cNvPr id="16" name="Shape 14"/>
+          <p:cNvSpPr/>
+          <p:nvPr/>
+        </p:nvSpPr>
+        <p:spPr>
+          <a:xfrm>
+            <a:off x="7872984" y="3248863"/>
+            <a:ext cx="890016" cy="301752"/>
+          </a:xfrm>
+          <a:prstGeom prst="roundRect">
+            <a:avLst>
+              <a:gd name="adj" fmla="val 24242"/>
+            </a:avLst>
+          </a:prstGeom>
+          <a:solidFill>
+            <a:srgbClr val="0068B7"/>
+          </a:solidFill>
+          <a:ln w="12700">
+            <a:solidFill>
+              <a:srgbClr val="0068B7"/>
+            </a:solidFill>
+            <a:prstDash val="solid"/>
+          </a:ln>
+        </p:spPr>
+      </p:sp>
+      <p:sp>
+        <p:nvSpPr>
+          <p:cNvPr id="17" name="Text 15"/>
+          <p:cNvSpPr/>
+          <p:nvPr/>
+        </p:nvSpPr>
+        <p:spPr>
+          <a:xfrm>
+            <a:off x="7909560" y="3322015"/>
+            <a:ext cx="816864" cy="146304"/>
+          </a:xfrm>
+          <a:prstGeom prst="rect">
+            <a:avLst/>
+          </a:prstGeom>
+          <a:noFill/>
+          <a:ln/>
+        </p:spPr>
+        <p:txBody>
+          <a:bodyPr wrap="square" lIns="0" tIns="0" rIns="0" bIns="0" rtlCol="0" anchor="ctr">
             <a:normAutofit/>
           </a:bodyPr>
           <a:lstStyle/>
           <a:p>
-            <a:pPr indent="0" marL="0">
-              <a:buNone/>
-            </a:pPr>
-            <a:r>
-              <a:rPr lang="en-US" sz="1220" dirty="0">
-                <a:solidFill>
-                  <a:srgbClr val="17364A"/>
-                </a:solidFill>
-                <a:latin typeface="Aptos" pitchFamily="34" charset="0"/>
-                <a:ea typeface="Aptos" pitchFamily="34" charset="-122"/>
-                <a:cs typeface="Aptos" pitchFamily="34" charset="-120"/>
-              </a:rPr>
-              <a:t>AI security matters because public health AI tools may process.</a:t>
-            </a:r>
-            <a:endParaRPr lang="en-US" sz="1220" dirty="0"/>
-          </a:p>
-          <a:p>
-            <a:pPr indent="0" marL="0">
-              <a:buNone/>
-            </a:pPr>
-            <a:r>
-              <a:rPr lang="en-US" sz="1220" dirty="0">
-                <a:solidFill>
-                  <a:srgbClr val="17364A"/>
-                </a:solidFill>
-                <a:latin typeface="Aptos" pitchFamily="34" charset="0"/>
-                <a:ea typeface="Aptos" pitchFamily="34" charset="-122"/>
-                <a:cs typeface="Aptos" pitchFamily="34" charset="-120"/>
-              </a:rPr>
-              <a:t>The risks increase when AI tools are connected to email,.</a:t>
-            </a:r>
-            <a:endParaRPr lang="en-US" sz="1220" dirty="0"/>
-          </a:p>
-          <a:p>
-            <a:pPr indent="0" marL="0">
-              <a:buNone/>
-            </a:pPr>
-            <a:r>
-              <a:rPr lang="en-US" sz="1220" dirty="0">
-                <a:solidFill>
-                  <a:srgbClr val="17364A"/>
-                </a:solidFill>
-                <a:latin typeface="Aptos" pitchFamily="34" charset="0"/>
-                <a:ea typeface="Aptos" pitchFamily="34" charset="-122"/>
-                <a:cs typeface="Aptos" pitchFamily="34" charset="-120"/>
-              </a:rPr>
-              <a:t>A security weakness can become a privacy breach, operational.</a:t>
-            </a:r>
-            <a:endParaRPr lang="en-US" sz="1220" dirty="0"/>
-          </a:p>
-        </p:txBody>
-      </p:sp>
-      <p:sp>
-        <p:nvSpPr>
-          <p:cNvPr id="16" name="Shape 14"/>
-          <p:cNvSpPr/>
-          <p:nvPr/>
-        </p:nvSpPr>
-        <p:spPr>
-          <a:xfrm>
-            <a:off x="7635240" y="4498848"/>
-            <a:ext cx="3474720" cy="1143000"/>
+            <a:pPr algn="ctr" indent="0" marL="0">
+              <a:buNone/>
+            </a:pPr>
+            <a:r>
+              <a:rPr lang="en-US" sz="880" b="1" dirty="0">
+                <a:solidFill>
+                  <a:srgbClr val="FFFFFF"/>
+                </a:solidFill>
+                <a:latin typeface="Aptos" pitchFamily="34" charset="0"/>
+                <a:ea typeface="Aptos" pitchFamily="34" charset="-122"/>
+                <a:cs typeface="Aptos" pitchFamily="34" charset="-120"/>
+              </a:rPr>
+              <a:t>Identify</a:t>
+            </a:r>
+            <a:endParaRPr lang="en-US" sz="880" dirty="0"/>
+          </a:p>
+        </p:txBody>
+      </p:sp>
+      <p:sp>
+        <p:nvSpPr>
+          <p:cNvPr id="18" name="Shape 16"/>
+          <p:cNvSpPr/>
+          <p:nvPr/>
+        </p:nvSpPr>
+        <p:spPr>
+          <a:xfrm>
+            <a:off x="9817608" y="3399739"/>
+            <a:ext cx="164592" cy="0"/>
+          </a:xfrm>
+          <a:prstGeom prst="line">
+            <a:avLst/>
+          </a:prstGeom>
+          <a:noFill/>
+          <a:ln w="15240">
+            <a:solidFill>
+              <a:srgbClr val="8ABBD8"/>
+            </a:solidFill>
+            <a:prstDash val="solid"/>
+          </a:ln>
+        </p:spPr>
+      </p:sp>
+      <p:sp>
+        <p:nvSpPr>
+          <p:cNvPr id="19" name="Shape 17"/>
+          <p:cNvSpPr/>
+          <p:nvPr/>
+        </p:nvSpPr>
+        <p:spPr>
+          <a:xfrm>
+            <a:off x="8927592" y="3248863"/>
+            <a:ext cx="890016" cy="301752"/>
           </a:xfrm>
           <a:prstGeom prst="roundRect">
             <a:avLst>
-              <a:gd name="adj" fmla="val 9600"/>
+              <a:gd name="adj" fmla="val 24242"/>
+            </a:avLst>
+          </a:prstGeom>
+          <a:solidFill>
+            <a:srgbClr val="2F8A28"/>
+          </a:solidFill>
+          <a:ln w="12700">
+            <a:solidFill>
+              <a:srgbClr val="2F8A28"/>
+            </a:solidFill>
+            <a:prstDash val="solid"/>
+          </a:ln>
+        </p:spPr>
+      </p:sp>
+      <p:sp>
+        <p:nvSpPr>
+          <p:cNvPr id="20" name="Text 18"/>
+          <p:cNvSpPr/>
+          <p:nvPr/>
+        </p:nvSpPr>
+        <p:spPr>
+          <a:xfrm>
+            <a:off x="8964168" y="3322015"/>
+            <a:ext cx="816864" cy="146304"/>
+          </a:xfrm>
+          <a:prstGeom prst="rect">
+            <a:avLst/>
+          </a:prstGeom>
+          <a:noFill/>
+          <a:ln/>
+        </p:spPr>
+        <p:txBody>
+          <a:bodyPr wrap="square" lIns="0" tIns="0" rIns="0" bIns="0" rtlCol="0" anchor="ctr">
+            <a:normAutofit/>
+          </a:bodyPr>
+          <a:lstStyle/>
+          <a:p>
+            <a:pPr algn="ctr" indent="0" marL="0">
+              <a:buNone/>
+            </a:pPr>
+            <a:r>
+              <a:rPr lang="en-US" sz="880" b="1" dirty="0">
+                <a:solidFill>
+                  <a:srgbClr val="FFFFFF"/>
+                </a:solidFill>
+                <a:latin typeface="Aptos" pitchFamily="34" charset="0"/>
+                <a:ea typeface="Aptos" pitchFamily="34" charset="-122"/>
+                <a:cs typeface="Aptos" pitchFamily="34" charset="-120"/>
+              </a:rPr>
+              <a:t>Control</a:t>
+            </a:r>
+            <a:endParaRPr lang="en-US" sz="880" dirty="0"/>
+          </a:p>
+        </p:txBody>
+      </p:sp>
+      <p:sp>
+        <p:nvSpPr>
+          <p:cNvPr id="21" name="Shape 19"/>
+          <p:cNvSpPr/>
+          <p:nvPr/>
+        </p:nvSpPr>
+        <p:spPr>
+          <a:xfrm>
+            <a:off x="9982200" y="3248863"/>
+            <a:ext cx="890016" cy="301752"/>
+          </a:xfrm>
+          <a:prstGeom prst="roundRect">
+            <a:avLst>
+              <a:gd name="adj" fmla="val 24242"/>
+            </a:avLst>
+          </a:prstGeom>
+          <a:solidFill>
+            <a:srgbClr val="6A4CA3"/>
+          </a:solidFill>
+          <a:ln w="12700">
+            <a:solidFill>
+              <a:srgbClr val="6A4CA3"/>
+            </a:solidFill>
+            <a:prstDash val="solid"/>
+          </a:ln>
+        </p:spPr>
+      </p:sp>
+      <p:sp>
+        <p:nvSpPr>
+          <p:cNvPr id="22" name="Text 20"/>
+          <p:cNvSpPr/>
+          <p:nvPr/>
+        </p:nvSpPr>
+        <p:spPr>
+          <a:xfrm>
+            <a:off x="10018776" y="3322015"/>
+            <a:ext cx="816864" cy="146304"/>
+          </a:xfrm>
+          <a:prstGeom prst="rect">
+            <a:avLst/>
+          </a:prstGeom>
+          <a:noFill/>
+          <a:ln/>
+        </p:spPr>
+        <p:txBody>
+          <a:bodyPr wrap="square" lIns="0" tIns="0" rIns="0" bIns="0" rtlCol="0" anchor="ctr">
+            <a:normAutofit/>
+          </a:bodyPr>
+          <a:lstStyle/>
+          <a:p>
+            <a:pPr algn="ctr" indent="0" marL="0">
+              <a:buNone/>
+            </a:pPr>
+            <a:r>
+              <a:rPr lang="en-US" sz="880" b="1" dirty="0">
+                <a:solidFill>
+                  <a:srgbClr val="FFFFFF"/>
+                </a:solidFill>
+                <a:latin typeface="Aptos" pitchFamily="34" charset="0"/>
+                <a:ea typeface="Aptos" pitchFamily="34" charset="-122"/>
+                <a:cs typeface="Aptos" pitchFamily="34" charset="-120"/>
+              </a:rPr>
+              <a:t>Monitor</a:t>
+            </a:r>
+            <a:endParaRPr lang="en-US" sz="880" dirty="0"/>
+          </a:p>
+        </p:txBody>
+      </p:sp>
+      <p:sp>
+        <p:nvSpPr>
+          <p:cNvPr id="23" name="Text 21"/>
+          <p:cNvSpPr/>
+          <p:nvPr/>
+        </p:nvSpPr>
+        <p:spPr>
+          <a:xfrm>
+            <a:off x="7854696" y="3742639"/>
+            <a:ext cx="3035808" cy="365760"/>
+          </a:xfrm>
+          <a:prstGeom prst="rect">
+            <a:avLst/>
+          </a:prstGeom>
+          <a:noFill/>
+          <a:ln/>
+        </p:spPr>
+        <p:txBody>
+          <a:bodyPr wrap="square" lIns="254" tIns="254" rIns="254" bIns="254" rtlCol="0" anchor="t">
+            <a:normAutofit/>
+          </a:bodyPr>
+          <a:lstStyle/>
+          <a:p>
+            <a:pPr indent="0" marL="0">
+              <a:buNone/>
+            </a:pPr>
+            <a:r>
+              <a:rPr lang="en-US" sz="1120" dirty="0">
+                <a:solidFill>
+                  <a:srgbClr val="17364A"/>
+                </a:solidFill>
+                <a:latin typeface="Aptos" pitchFamily="34" charset="0"/>
+                <a:ea typeface="Aptos" pitchFamily="34" charset="-122"/>
+                <a:cs typeface="Aptos" pitchFamily="34" charset="-120"/>
+              </a:rPr>
+              <a:t>Responsible use depends on finding risks early, applying safeguards, and watching for drift or harm over time.</a:t>
+            </a:r>
+            <a:endParaRPr lang="en-US" sz="1120" dirty="0"/>
+          </a:p>
+        </p:txBody>
+      </p:sp>
+      <p:sp>
+        <p:nvSpPr>
+          <p:cNvPr id="24" name="Shape 22"/>
+          <p:cNvSpPr/>
+          <p:nvPr/>
+        </p:nvSpPr>
+        <p:spPr>
+          <a:xfrm>
+            <a:off x="7635240" y="4391863"/>
+            <a:ext cx="3474720" cy="1255471"/>
+          </a:xfrm>
+          <a:prstGeom prst="roundRect">
+            <a:avLst>
+              <a:gd name="adj" fmla="val 8740"/>
             </a:avLst>
           </a:prstGeom>
           <a:solidFill>
@@ -18194,13 +18842,13 @@
       </p:sp>
       <p:sp>
         <p:nvSpPr>
-          <p:cNvPr id="17" name="Text 15"/>
-          <p:cNvSpPr/>
-          <p:nvPr/>
-        </p:nvSpPr>
-        <p:spPr>
-          <a:xfrm>
-            <a:off x="7799832" y="4645152"/>
+          <p:cNvPr id="25" name="Text 23"/>
+          <p:cNvSpPr/>
+          <p:nvPr/>
+        </p:nvSpPr>
+        <p:spPr>
+          <a:xfrm>
+            <a:off x="7799832" y="4538167"/>
             <a:ext cx="3145536" cy="256032"/>
           </a:xfrm>
           <a:prstGeom prst="rect">
@@ -18233,14 +18881,14 @@
       </p:sp>
       <p:sp>
         <p:nvSpPr>
-          <p:cNvPr id="18" name="Text 16"/>
-          <p:cNvSpPr/>
-          <p:nvPr/>
-        </p:nvSpPr>
-        <p:spPr>
-          <a:xfrm>
-            <a:off x="7799832" y="4974336"/>
-            <a:ext cx="3145536" cy="576072"/>
+          <p:cNvPr id="26" name="Text 24"/>
+          <p:cNvSpPr/>
+          <p:nvPr/>
+        </p:nvSpPr>
+        <p:spPr>
+          <a:xfrm>
+            <a:off x="7799832" y="4867351"/>
+            <a:ext cx="3145536" cy="688543"/>
           </a:xfrm>
           <a:prstGeom prst="rect">
             <a:avLst/>
@@ -18266,7 +18914,7 @@
                 <a:ea typeface="Aptos" pitchFamily="34" charset="-122"/>
                 <a:cs typeface="Aptos" pitchFamily="34" charset="-120"/>
               </a:rPr>
-              <a:t>Identify what could go wrong, who could be affected, what safeguards are needed, and what evidence should be reviewed.</a:t>
+              <a:t>Identify what could go wrong, who could be affected, what safeguards are needed, and what evidence should be reviewed before use.</a:t>
             </a:r>
             <a:endParaRPr lang="en-US" sz="1320" dirty="0"/>
           </a:p>

--- a/downloads/presentations/modules/gov-300.pptx
+++ b/downloads/presentations/modules/gov-300.pptx
@@ -3435,8 +3435,8 @@
         </p:nvSpPr>
         <p:spPr>
           <a:xfrm>
-            <a:off x="868680" y="1508760"/>
-            <a:ext cx="6309360" cy="4160520"/>
+            <a:off x="822960" y="1463040"/>
+            <a:ext cx="6565392" cy="4343400"/>
           </a:xfrm>
           <a:prstGeom prst="rect">
             <a:avLst/>
@@ -3454,7 +3454,7 @@
               <a:buNone/>
             </a:pPr>
             <a:r>
-              <a:rPr lang="en-US" sz="2100" dirty="0">
+              <a:rPr lang="en-US" sz="1920" dirty="0">
                 <a:solidFill>
                   <a:srgbClr val="003A63"/>
                 </a:solidFill>
@@ -3462,16 +3462,16 @@
                 <a:ea typeface="Aptos" pitchFamily="34" charset="-122"/>
                 <a:cs typeface="Aptos" pitchFamily="34" charset="-120"/>
               </a:rPr>
-              <a:t>• A public health program may use an AI assistant to summarize uploaded partner reports.</a:t>
-            </a:r>
-            <a:endParaRPr lang="en-US" sz="2100" dirty="0"/>
-          </a:p>
-          <a:p>
-            <a:pPr indent="0" marL="0">
-              <a:buNone/>
-            </a:pPr>
-            <a:r>
-              <a:rPr lang="en-US" sz="2100" dirty="0">
+              <a:t>• A public health program may use an AI assistant to summarize uploaded.</a:t>
+            </a:r>
+            <a:endParaRPr lang="en-US" sz="1920" dirty="0"/>
+          </a:p>
+          <a:p>
+            <a:pPr indent="0" marL="0">
+              <a:buNone/>
+            </a:pPr>
+            <a:r>
+              <a:rPr lang="en-US" sz="1920" dirty="0">
                 <a:solidFill>
                   <a:srgbClr val="003A63"/>
                 </a:solidFill>
@@ -3479,16 +3479,16 @@
                 <a:ea typeface="Aptos" pitchFamily="34" charset="-122"/>
                 <a:cs typeface="Aptos" pitchFamily="34" charset="-120"/>
               </a:rPr>
-              <a:t>• One report could contain hidden or visible instructions telling the AI to ignore prior rules.</a:t>
-            </a:r>
-            <a:endParaRPr lang="en-US" sz="2100" dirty="0"/>
-          </a:p>
-          <a:p>
-            <a:pPr indent="0" marL="0">
-              <a:buNone/>
-            </a:pPr>
-            <a:r>
-              <a:rPr lang="en-US" sz="2100" dirty="0">
+              <a:t>• One report could contain hidden or visible instructions telling the AI to.</a:t>
+            </a:r>
+            <a:endParaRPr lang="en-US" sz="1920" dirty="0"/>
+          </a:p>
+          <a:p>
+            <a:pPr indent="0" marL="0">
+              <a:buNone/>
+            </a:pPr>
+            <a:r>
+              <a:rPr lang="en-US" sz="1920" dirty="0">
                 <a:solidFill>
                   <a:srgbClr val="003A63"/>
                 </a:solidFill>
@@ -3496,9 +3496,9 @@
                 <a:ea typeface="Aptos" pitchFamily="34" charset="-122"/>
                 <a:cs typeface="Aptos" pitchFamily="34" charset="-120"/>
               </a:rPr>
-              <a:t>• If the assistant treats the report content as instructions rather than data, it may produce.</a:t>
-            </a:r>
-            <a:endParaRPr lang="en-US" sz="2100" dirty="0"/>
+              <a:t>• If the assistant treats the report content as instructions rather than data,.</a:t>
+            </a:r>
+            <a:endParaRPr lang="en-US" sz="1920" dirty="0"/>
           </a:p>
         </p:txBody>
       </p:sp>
@@ -3510,12 +3510,12 @@
         </p:nvSpPr>
         <p:spPr>
           <a:xfrm>
-            <a:off x="7635240" y="1325880"/>
-            <a:ext cx="3474720" cy="1207008"/>
+            <a:off x="7543800" y="1325880"/>
+            <a:ext cx="3611880" cy="1261872"/>
           </a:xfrm>
           <a:prstGeom prst="roundRect">
             <a:avLst>
-              <a:gd name="adj" fmla="val 9091"/>
+              <a:gd name="adj" fmla="val 8696"/>
             </a:avLst>
           </a:prstGeom>
           <a:solidFill>
@@ -3537,8 +3537,8 @@
         </p:nvSpPr>
         <p:spPr>
           <a:xfrm>
-            <a:off x="7799832" y="1472184"/>
-            <a:ext cx="3145536" cy="256032"/>
+            <a:off x="7708392" y="1453896"/>
+            <a:ext cx="3282696" cy="228600"/>
           </a:xfrm>
           <a:prstGeom prst="rect">
             <a:avLst/>
@@ -3554,7 +3554,7 @@
               <a:buNone/>
             </a:pPr>
             <a:r>
-              <a:rPr lang="en-US" sz="1300" b="1" dirty="0">
+              <a:rPr lang="en-US" sz="1220" b="1" dirty="0">
                 <a:solidFill>
                   <a:srgbClr val="0068B7"/>
                 </a:solidFill>
@@ -3564,7 +3564,7 @@
               </a:rPr>
               <a:t>Risk check</a:t>
             </a:r>
-            <a:endParaRPr lang="en-US" sz="1300" dirty="0"/>
+            <a:endParaRPr lang="en-US" sz="1220" dirty="0"/>
           </a:p>
         </p:txBody>
       </p:sp>
@@ -3576,8 +3576,8 @@
         </p:nvSpPr>
         <p:spPr>
           <a:xfrm>
-            <a:off x="7799832" y="1801368"/>
-            <a:ext cx="3145536" cy="640080"/>
+            <a:off x="7708392" y="1764792"/>
+            <a:ext cx="3282696" cy="749808"/>
           </a:xfrm>
           <a:prstGeom prst="rect">
             <a:avLst/>
@@ -3595,7 +3595,7 @@
               <a:buNone/>
             </a:pPr>
             <a:r>
-              <a:rPr lang="en-US" sz="1320" dirty="0">
+              <a:rPr lang="en-US" sz="1220" dirty="0">
                 <a:solidFill>
                   <a:srgbClr val="17364A"/>
                 </a:solidFill>
@@ -3603,9 +3603,9 @@
                 <a:ea typeface="Aptos" pitchFamily="34" charset="-122"/>
                 <a:cs typeface="Aptos" pitchFamily="34" charset="-120"/>
               </a:rPr>
-              <a:t>A public health program may use an AI assistant to summarize uploaded partner reports.</a:t>
-            </a:r>
-            <a:endParaRPr lang="en-US" sz="1320" dirty="0"/>
+              <a:t>A public health program may use an AI assistant to summarize uploaded partner.</a:t>
+            </a:r>
+            <a:endParaRPr lang="en-US" sz="1220" dirty="0"/>
           </a:p>
         </p:txBody>
       </p:sp>
@@ -3617,12 +3617,12 @@
         </p:nvSpPr>
         <p:spPr>
           <a:xfrm>
-            <a:off x="7635240" y="2670048"/>
-            <a:ext cx="3474720" cy="1536192"/>
+            <a:off x="7543800" y="2724912"/>
+            <a:ext cx="3611880" cy="1527048"/>
           </a:xfrm>
           <a:prstGeom prst="roundRect">
             <a:avLst>
-              <a:gd name="adj" fmla="val 7143"/>
+              <a:gd name="adj" fmla="val 7186"/>
             </a:avLst>
           </a:prstGeom>
           <a:solidFill>
@@ -3644,8 +3644,8 @@
         </p:nvSpPr>
         <p:spPr>
           <a:xfrm>
-            <a:off x="7799832" y="2816352"/>
-            <a:ext cx="3145536" cy="256032"/>
+            <a:off x="7708392" y="2852928"/>
+            <a:ext cx="3282696" cy="228600"/>
           </a:xfrm>
           <a:prstGeom prst="rect">
             <a:avLst/>
@@ -3661,7 +3661,7 @@
               <a:buNone/>
             </a:pPr>
             <a:r>
-              <a:rPr lang="en-US" sz="1300" b="1" dirty="0">
+              <a:rPr lang="en-US" sz="1220" b="1" dirty="0">
                 <a:solidFill>
                   <a:srgbClr val="0068B7"/>
                 </a:solidFill>
@@ -3671,7 +3671,7 @@
               </a:rPr>
               <a:t>Concept checkpoints</a:t>
             </a:r>
-            <a:endParaRPr lang="en-US" sz="1300" dirty="0"/>
+            <a:endParaRPr lang="en-US" sz="1220" dirty="0"/>
           </a:p>
         </p:txBody>
       </p:sp>
@@ -3683,8 +3683,8 @@
         </p:nvSpPr>
         <p:spPr>
           <a:xfrm>
-            <a:off x="7818120" y="3182112"/>
-            <a:ext cx="3090672" cy="877824"/>
+            <a:off x="7726680" y="3182112"/>
+            <a:ext cx="3227832" cy="960120"/>
           </a:xfrm>
           <a:prstGeom prst="rect">
             <a:avLst/>
@@ -3702,7 +3702,7 @@
               <a:buNone/>
             </a:pPr>
             <a:r>
-              <a:rPr lang="en-US" sz="1220" dirty="0">
+              <a:rPr lang="en-US" sz="1140" dirty="0">
                 <a:solidFill>
                   <a:srgbClr val="17364A"/>
                 </a:solidFill>
@@ -3710,16 +3710,16 @@
                 <a:ea typeface="Aptos" pitchFamily="34" charset="-122"/>
                 <a:cs typeface="Aptos" pitchFamily="34" charset="-120"/>
               </a:rPr>
-              <a:t>One report could contain hidden or visible instructions telling.</a:t>
-            </a:r>
-            <a:endParaRPr lang="en-US" sz="1220" dirty="0"/>
-          </a:p>
-          <a:p>
-            <a:pPr indent="0" marL="0">
-              <a:buNone/>
-            </a:pPr>
-            <a:r>
-              <a:rPr lang="en-US" sz="1220" dirty="0">
+              <a:t>One report could contain hidden or visible.</a:t>
+            </a:r>
+            <a:endParaRPr lang="en-US" sz="1140" dirty="0"/>
+          </a:p>
+          <a:p>
+            <a:pPr indent="0" marL="0">
+              <a:buNone/>
+            </a:pPr>
+            <a:r>
+              <a:rPr lang="en-US" sz="1140" dirty="0">
                 <a:solidFill>
                   <a:srgbClr val="17364A"/>
                 </a:solidFill>
@@ -3727,16 +3727,16 @@
                 <a:ea typeface="Aptos" pitchFamily="34" charset="-122"/>
                 <a:cs typeface="Aptos" pitchFamily="34" charset="-120"/>
               </a:rPr>
-              <a:t>If the assistant treats the report content as instructions rather.</a:t>
-            </a:r>
-            <a:endParaRPr lang="en-US" sz="1220" dirty="0"/>
-          </a:p>
-          <a:p>
-            <a:pPr indent="0" marL="0">
-              <a:buNone/>
-            </a:pPr>
-            <a:r>
-              <a:rPr lang="en-US" sz="1220" dirty="0">
+              <a:t>If the assistant treats the report content as.</a:t>
+            </a:r>
+            <a:endParaRPr lang="en-US" sz="1140" dirty="0"/>
+          </a:p>
+          <a:p>
+            <a:pPr indent="0" marL="0">
+              <a:buNone/>
+            </a:pPr>
+            <a:r>
+              <a:rPr lang="en-US" sz="1140" dirty="0">
                 <a:solidFill>
                   <a:srgbClr val="17364A"/>
                 </a:solidFill>
@@ -3744,9 +3744,9 @@
                 <a:ea typeface="Aptos" pitchFamily="34" charset="-122"/>
                 <a:cs typeface="Aptos" pitchFamily="34" charset="-120"/>
               </a:rPr>
-              <a:t>A secure workflow would use an approved tool, restrict the.</a:t>
-            </a:r>
-            <a:endParaRPr lang="en-US" sz="1220" dirty="0"/>
+              <a:t>A secure workflow would use an approved tool,.</a:t>
+            </a:r>
+            <a:endParaRPr lang="en-US" sz="1140" dirty="0"/>
           </a:p>
         </p:txBody>
       </p:sp>
@@ -3758,12 +3758,12 @@
         </p:nvSpPr>
         <p:spPr>
           <a:xfrm>
-            <a:off x="7635240" y="4343400"/>
-            <a:ext cx="3474720" cy="1255471"/>
+            <a:off x="7543800" y="4389120"/>
+            <a:ext cx="3611880" cy="1261872"/>
           </a:xfrm>
           <a:prstGeom prst="roundRect">
             <a:avLst>
-              <a:gd name="adj" fmla="val 8740"/>
+              <a:gd name="adj" fmla="val 8696"/>
             </a:avLst>
           </a:prstGeom>
           <a:solidFill>
@@ -3785,8 +3785,8 @@
         </p:nvSpPr>
         <p:spPr>
           <a:xfrm>
-            <a:off x="7799832" y="4489704"/>
-            <a:ext cx="3145536" cy="256032"/>
+            <a:off x="7708392" y="4517136"/>
+            <a:ext cx="3282696" cy="228600"/>
           </a:xfrm>
           <a:prstGeom prst="rect">
             <a:avLst/>
@@ -3802,7 +3802,7 @@
               <a:buNone/>
             </a:pPr>
             <a:r>
-              <a:rPr lang="en-US" sz="1300" b="1" dirty="0">
+              <a:rPr lang="en-US" sz="1220" b="1" dirty="0">
                 <a:solidFill>
                   <a:srgbClr val="0068B7"/>
                 </a:solidFill>
@@ -3812,7 +3812,7 @@
               </a:rPr>
               <a:t>Safeguard to plan</a:t>
             </a:r>
-            <a:endParaRPr lang="en-US" sz="1300" dirty="0"/>
+            <a:endParaRPr lang="en-US" sz="1220" dirty="0"/>
           </a:p>
         </p:txBody>
       </p:sp>
@@ -3824,8 +3824,8 @@
         </p:nvSpPr>
         <p:spPr>
           <a:xfrm>
-            <a:off x="7799832" y="4818888"/>
-            <a:ext cx="3145536" cy="688543"/>
+            <a:off x="7708392" y="4828032"/>
+            <a:ext cx="3282696" cy="749808"/>
           </a:xfrm>
           <a:prstGeom prst="rect">
             <a:avLst/>
@@ -3843,7 +3843,7 @@
               <a:buNone/>
             </a:pPr>
             <a:r>
-              <a:rPr lang="en-US" sz="1320" dirty="0">
+              <a:rPr lang="en-US" sz="1220" dirty="0">
                 <a:solidFill>
                   <a:srgbClr val="17364A"/>
                 </a:solidFill>
@@ -3851,9 +3851,9 @@
                 <a:ea typeface="Aptos" pitchFamily="34" charset="-122"/>
                 <a:cs typeface="Aptos" pitchFamily="34" charset="-120"/>
               </a:rPr>
-              <a:t>Identify what could go wrong, who could be affected, what safeguards are needed, and what evidence should be reviewed before use.</a:t>
-            </a:r>
-            <a:endParaRPr lang="en-US" sz="1320" dirty="0"/>
+              <a:t>Identify what could go wrong, who could be affected, what safeguards are needed,.</a:t>
+            </a:r>
+            <a:endParaRPr lang="en-US" sz="1220" dirty="0"/>
           </a:p>
         </p:txBody>
       </p:sp>
@@ -4144,8 +4144,8 @@
         </p:nvSpPr>
         <p:spPr>
           <a:xfrm>
-            <a:off x="868680" y="1508760"/>
-            <a:ext cx="6309360" cy="4160520"/>
+            <a:off x="822960" y="1463040"/>
+            <a:ext cx="6565392" cy="4343400"/>
           </a:xfrm>
           <a:prstGeom prst="rect">
             <a:avLst/>
@@ -4163,7 +4163,7 @@
               <a:buNone/>
             </a:pPr>
             <a:r>
-              <a:rPr lang="en-US" sz="2100" dirty="0">
+              <a:rPr lang="en-US" sz="1920" dirty="0">
                 <a:solidFill>
                   <a:srgbClr val="003A63"/>
                 </a:solidFill>
@@ -4173,14 +4173,14 @@
               </a:rPr>
               <a:t>• AI security begins with use-case classification.</a:t>
             </a:r>
-            <a:endParaRPr lang="en-US" sz="2100" dirty="0"/>
-          </a:p>
-          <a:p>
-            <a:pPr indent="0" marL="0">
-              <a:buNone/>
-            </a:pPr>
-            <a:r>
-              <a:rPr lang="en-US" sz="2100" dirty="0">
+            <a:endParaRPr lang="en-US" sz="1920" dirty="0"/>
+          </a:p>
+          <a:p>
+            <a:pPr indent="0" marL="0">
+              <a:buNone/>
+            </a:pPr>
+            <a:r>
+              <a:rPr lang="en-US" sz="1920" dirty="0">
                 <a:solidFill>
                   <a:srgbClr val="003A63"/>
                 </a:solidFill>
@@ -4188,16 +4188,16 @@
                 <a:ea typeface="Aptos" pitchFamily="34" charset="-122"/>
                 <a:cs typeface="Aptos" pitchFamily="34" charset="-120"/>
               </a:rPr>
-              <a:t>• A low-risk training exercise using public documents requires different controls than a tool.</a:t>
-            </a:r>
-            <a:endParaRPr lang="en-US" sz="2100" dirty="0"/>
-          </a:p>
-          <a:p>
-            <a:pPr indent="0" marL="0">
-              <a:buNone/>
-            </a:pPr>
-            <a:r>
-              <a:rPr lang="en-US" sz="2100" dirty="0">
+              <a:t>• A low-risk training exercise using public documents requires different.</a:t>
+            </a:r>
+            <a:endParaRPr lang="en-US" sz="1920" dirty="0"/>
+          </a:p>
+          <a:p>
+            <a:pPr indent="0" marL="0">
+              <a:buNone/>
+            </a:pPr>
+            <a:r>
+              <a:rPr lang="en-US" sz="1920" dirty="0">
                 <a:solidFill>
                   <a:srgbClr val="003A63"/>
                 </a:solidFill>
@@ -4205,9 +4205,9 @@
                 <a:ea typeface="Aptos" pitchFamily="34" charset="-122"/>
                 <a:cs typeface="Aptos" pitchFamily="34" charset="-120"/>
               </a:rPr>
-              <a:t>• Agencies should classify AI uses by data sensitivity, system access, autonomy, public-facing.</a:t>
-            </a:r>
-            <a:endParaRPr lang="en-US" sz="2100" dirty="0"/>
+              <a:t>• Agencies should classify AI uses by data sensitivity, system access,.</a:t>
+            </a:r>
+            <a:endParaRPr lang="en-US" sz="1920" dirty="0"/>
           </a:p>
         </p:txBody>
       </p:sp>
@@ -4219,12 +4219,12 @@
         </p:nvSpPr>
         <p:spPr>
           <a:xfrm>
-            <a:off x="7635240" y="1325880"/>
-            <a:ext cx="3474720" cy="1207008"/>
+            <a:off x="7543800" y="1325880"/>
+            <a:ext cx="3611880" cy="1261872"/>
           </a:xfrm>
           <a:prstGeom prst="roundRect">
             <a:avLst>
-              <a:gd name="adj" fmla="val 9091"/>
+              <a:gd name="adj" fmla="val 8696"/>
             </a:avLst>
           </a:prstGeom>
           <a:solidFill>
@@ -4246,8 +4246,8 @@
         </p:nvSpPr>
         <p:spPr>
           <a:xfrm>
-            <a:off x="7799832" y="1472184"/>
-            <a:ext cx="3145536" cy="256032"/>
+            <a:off x="7708392" y="1453896"/>
+            <a:ext cx="3282696" cy="228600"/>
           </a:xfrm>
           <a:prstGeom prst="rect">
             <a:avLst/>
@@ -4263,7 +4263,7 @@
               <a:buNone/>
             </a:pPr>
             <a:r>
-              <a:rPr lang="en-US" sz="1300" b="1" dirty="0">
+              <a:rPr lang="en-US" sz="1220" b="1" dirty="0">
                 <a:solidFill>
                   <a:srgbClr val="0068B7"/>
                 </a:solidFill>
@@ -4273,7 +4273,7 @@
               </a:rPr>
               <a:t>Risk check</a:t>
             </a:r>
-            <a:endParaRPr lang="en-US" sz="1300" dirty="0"/>
+            <a:endParaRPr lang="en-US" sz="1220" dirty="0"/>
           </a:p>
         </p:txBody>
       </p:sp>
@@ -4285,8 +4285,8 @@
         </p:nvSpPr>
         <p:spPr>
           <a:xfrm>
-            <a:off x="7799832" y="1801368"/>
-            <a:ext cx="3145536" cy="640080"/>
+            <a:off x="7708392" y="1764792"/>
+            <a:ext cx="3282696" cy="749808"/>
           </a:xfrm>
           <a:prstGeom prst="rect">
             <a:avLst/>
@@ -4304,7 +4304,7 @@
               <a:buNone/>
             </a:pPr>
             <a:r>
-              <a:rPr lang="en-US" sz="1320" dirty="0">
+              <a:rPr lang="en-US" sz="1220" dirty="0">
                 <a:solidFill>
                   <a:srgbClr val="17364A"/>
                 </a:solidFill>
@@ -4314,7 +4314,7 @@
               </a:rPr>
               <a:t>AI security begins with use-case classification.</a:t>
             </a:r>
-            <a:endParaRPr lang="en-US" sz="1320" dirty="0"/>
+            <a:endParaRPr lang="en-US" sz="1220" dirty="0"/>
           </a:p>
         </p:txBody>
       </p:sp>
@@ -4326,12 +4326,12 @@
         </p:nvSpPr>
         <p:spPr>
           <a:xfrm>
-            <a:off x="7635240" y="2670048"/>
-            <a:ext cx="3474720" cy="1536192"/>
+            <a:off x="7543800" y="2724912"/>
+            <a:ext cx="3611880" cy="1527048"/>
           </a:xfrm>
           <a:prstGeom prst="roundRect">
             <a:avLst>
-              <a:gd name="adj" fmla="val 7143"/>
+              <a:gd name="adj" fmla="val 7186"/>
             </a:avLst>
           </a:prstGeom>
           <a:solidFill>
@@ -4353,8 +4353,8 @@
         </p:nvSpPr>
         <p:spPr>
           <a:xfrm>
-            <a:off x="7799832" y="2816352"/>
-            <a:ext cx="3145536" cy="256032"/>
+            <a:off x="7708392" y="2852928"/>
+            <a:ext cx="3282696" cy="228600"/>
           </a:xfrm>
           <a:prstGeom prst="rect">
             <a:avLst/>
@@ -4370,7 +4370,7 @@
               <a:buNone/>
             </a:pPr>
             <a:r>
-              <a:rPr lang="en-US" sz="1300" b="1" dirty="0">
+              <a:rPr lang="en-US" sz="1220" b="1" dirty="0">
                 <a:solidFill>
                   <a:srgbClr val="0068B7"/>
                 </a:solidFill>
@@ -4380,7 +4380,7 @@
               </a:rPr>
               <a:t>Concept checkpoints</a:t>
             </a:r>
-            <a:endParaRPr lang="en-US" sz="1300" dirty="0"/>
+            <a:endParaRPr lang="en-US" sz="1220" dirty="0"/>
           </a:p>
         </p:txBody>
       </p:sp>
@@ -4392,8 +4392,8 @@
         </p:nvSpPr>
         <p:spPr>
           <a:xfrm>
-            <a:off x="7818120" y="3182112"/>
-            <a:ext cx="3090672" cy="877824"/>
+            <a:off x="7726680" y="3182112"/>
+            <a:ext cx="3227832" cy="960120"/>
           </a:xfrm>
           <a:prstGeom prst="rect">
             <a:avLst/>
@@ -4411,7 +4411,7 @@
               <a:buNone/>
             </a:pPr>
             <a:r>
-              <a:rPr lang="en-US" sz="1220" dirty="0">
+              <a:rPr lang="en-US" sz="1140" dirty="0">
                 <a:solidFill>
                   <a:srgbClr val="17364A"/>
                 </a:solidFill>
@@ -4419,16 +4419,16 @@
                 <a:ea typeface="Aptos" pitchFamily="34" charset="-122"/>
                 <a:cs typeface="Aptos" pitchFamily="34" charset="-120"/>
               </a:rPr>
-              <a:t>A low-risk training exercise using public documents requires.</a:t>
-            </a:r>
-            <a:endParaRPr lang="en-US" sz="1220" dirty="0"/>
-          </a:p>
-          <a:p>
-            <a:pPr indent="0" marL="0">
-              <a:buNone/>
-            </a:pPr>
-            <a:r>
-              <a:rPr lang="en-US" sz="1220" dirty="0">
+              <a:t>A low-risk training exercise using public.</a:t>
+            </a:r>
+            <a:endParaRPr lang="en-US" sz="1140" dirty="0"/>
+          </a:p>
+          <a:p>
+            <a:pPr indent="0" marL="0">
+              <a:buNone/>
+            </a:pPr>
+            <a:r>
+              <a:rPr lang="en-US" sz="1140" dirty="0">
                 <a:solidFill>
                   <a:srgbClr val="17364A"/>
                 </a:solidFill>
@@ -4436,16 +4436,16 @@
                 <a:ea typeface="Aptos" pitchFamily="34" charset="-122"/>
                 <a:cs typeface="Aptos" pitchFamily="34" charset="-120"/>
               </a:rPr>
-              <a:t>Agencies should classify AI uses by data sensitivity, system.</a:t>
-            </a:r>
-            <a:endParaRPr lang="en-US" sz="1220" dirty="0"/>
-          </a:p>
-          <a:p>
-            <a:pPr indent="0" marL="0">
-              <a:buNone/>
-            </a:pPr>
-            <a:r>
-              <a:rPr lang="en-US" sz="1220" dirty="0">
+              <a:t>Agencies should classify AI uses by data.</a:t>
+            </a:r>
+            <a:endParaRPr lang="en-US" sz="1140" dirty="0"/>
+          </a:p>
+          <a:p>
+            <a:pPr indent="0" marL="0">
+              <a:buNone/>
+            </a:pPr>
+            <a:r>
+              <a:rPr lang="en-US" sz="1140" dirty="0">
                 <a:solidFill>
                   <a:srgbClr val="17364A"/>
                 </a:solidFill>
@@ -4455,7 +4455,7 @@
               </a:rPr>
               <a:t>Access control is central.</a:t>
             </a:r>
-            <a:endParaRPr lang="en-US" sz="1220" dirty="0"/>
+            <a:endParaRPr lang="en-US" sz="1140" dirty="0"/>
           </a:p>
         </p:txBody>
       </p:sp>
@@ -4467,12 +4467,12 @@
         </p:nvSpPr>
         <p:spPr>
           <a:xfrm>
-            <a:off x="7635240" y="4343400"/>
-            <a:ext cx="3474720" cy="1255471"/>
+            <a:off x="7543800" y="4389120"/>
+            <a:ext cx="3611880" cy="1261872"/>
           </a:xfrm>
           <a:prstGeom prst="roundRect">
             <a:avLst>
-              <a:gd name="adj" fmla="val 8740"/>
+              <a:gd name="adj" fmla="val 8696"/>
             </a:avLst>
           </a:prstGeom>
           <a:solidFill>
@@ -4494,8 +4494,8 @@
         </p:nvSpPr>
         <p:spPr>
           <a:xfrm>
-            <a:off x="7799832" y="4489704"/>
-            <a:ext cx="3145536" cy="256032"/>
+            <a:off x="7708392" y="4517136"/>
+            <a:ext cx="3282696" cy="228600"/>
           </a:xfrm>
           <a:prstGeom prst="rect">
             <a:avLst/>
@@ -4511,7 +4511,7 @@
               <a:buNone/>
             </a:pPr>
             <a:r>
-              <a:rPr lang="en-US" sz="1300" b="1" dirty="0">
+              <a:rPr lang="en-US" sz="1220" b="1" dirty="0">
                 <a:solidFill>
                   <a:srgbClr val="0068B7"/>
                 </a:solidFill>
@@ -4521,7 +4521,7 @@
               </a:rPr>
               <a:t>Safeguard to plan</a:t>
             </a:r>
-            <a:endParaRPr lang="en-US" sz="1300" dirty="0"/>
+            <a:endParaRPr lang="en-US" sz="1220" dirty="0"/>
           </a:p>
         </p:txBody>
       </p:sp>
@@ -4533,8 +4533,8 @@
         </p:nvSpPr>
         <p:spPr>
           <a:xfrm>
-            <a:off x="7799832" y="4818888"/>
-            <a:ext cx="3145536" cy="688543"/>
+            <a:off x="7708392" y="4828032"/>
+            <a:ext cx="3282696" cy="749808"/>
           </a:xfrm>
           <a:prstGeom prst="rect">
             <a:avLst/>
@@ -4552,7 +4552,7 @@
               <a:buNone/>
             </a:pPr>
             <a:r>
-              <a:rPr lang="en-US" sz="1320" dirty="0">
+              <a:rPr lang="en-US" sz="1220" dirty="0">
                 <a:solidFill>
                   <a:srgbClr val="17364A"/>
                 </a:solidFill>
@@ -4560,9 +4560,9 @@
                 <a:ea typeface="Aptos" pitchFamily="34" charset="-122"/>
                 <a:cs typeface="Aptos" pitchFamily="34" charset="-120"/>
               </a:rPr>
-              <a:t>Identify what could go wrong, who could be affected, what safeguards are needed, and what evidence should be reviewed before use.</a:t>
-            </a:r>
-            <a:endParaRPr lang="en-US" sz="1320" dirty="0"/>
+              <a:t>Identify what could go wrong, who could be affected, what safeguards are needed,.</a:t>
+            </a:r>
+            <a:endParaRPr lang="en-US" sz="1220" dirty="0"/>
           </a:p>
         </p:txBody>
       </p:sp>
@@ -4853,8 +4853,8 @@
         </p:nvSpPr>
         <p:spPr>
           <a:xfrm>
-            <a:off x="868680" y="1508760"/>
-            <a:ext cx="6309360" cy="4160520"/>
+            <a:off x="822960" y="1463040"/>
+            <a:ext cx="6565392" cy="4343400"/>
           </a:xfrm>
           <a:prstGeom prst="rect">
             <a:avLst/>
@@ -4872,7 +4872,7 @@
               <a:buNone/>
             </a:pPr>
             <a:r>
-              <a:rPr lang="en-US" sz="2100" dirty="0">
+              <a:rPr lang="en-US" sz="1920" dirty="0">
                 <a:solidFill>
                   <a:srgbClr val="003A63"/>
                 </a:solidFill>
@@ -4880,16 +4880,16 @@
                 <a:ea typeface="Aptos" pitchFamily="34" charset="-122"/>
                 <a:cs typeface="Aptos" pitchFamily="34" charset="-120"/>
               </a:rPr>
-              <a:t>• Output handling matters because AI outputs may be copied into reports, emails, code,.</a:t>
-            </a:r>
-            <a:endParaRPr lang="en-US" sz="2100" dirty="0"/>
-          </a:p>
-          <a:p>
-            <a:pPr indent="0" marL="0">
-              <a:buNone/>
-            </a:pPr>
-            <a:r>
-              <a:rPr lang="en-US" sz="2100" dirty="0">
+              <a:t>• Output handling matters because AI outputs may be copied into reports,.</a:t>
+            </a:r>
+            <a:endParaRPr lang="en-US" sz="1920" dirty="0"/>
+          </a:p>
+          <a:p>
+            <a:pPr indent="0" marL="0">
+              <a:buNone/>
+            </a:pPr>
+            <a:r>
+              <a:rPr lang="en-US" sz="1920" dirty="0">
                 <a:solidFill>
                   <a:srgbClr val="003A63"/>
                 </a:solidFill>
@@ -4897,16 +4897,16 @@
                 <a:ea typeface="Aptos" pitchFamily="34" charset="-122"/>
                 <a:cs typeface="Aptos" pitchFamily="34" charset="-120"/>
               </a:rPr>
-              <a:t>• Insecure output handling can lead to misinformation, broken code, malicious links, or.</a:t>
-            </a:r>
-            <a:endParaRPr lang="en-US" sz="2100" dirty="0"/>
-          </a:p>
-          <a:p>
-            <a:pPr indent="0" marL="0">
-              <a:buNone/>
-            </a:pPr>
-            <a:r>
-              <a:rPr lang="en-US" sz="2100" dirty="0">
+              <a:t>• Insecure output handling can lead to misinformation, broken code, malicious.</a:t>
+            </a:r>
+            <a:endParaRPr lang="en-US" sz="1920" dirty="0"/>
+          </a:p>
+          <a:p>
+            <a:pPr indent="0" marL="0">
+              <a:buNone/>
+            </a:pPr>
+            <a:r>
+              <a:rPr lang="en-US" sz="1920" dirty="0">
                 <a:solidFill>
                   <a:srgbClr val="003A63"/>
                 </a:solidFill>
@@ -4914,9 +4914,9 @@
                 <a:ea typeface="Aptos" pitchFamily="34" charset="-122"/>
                 <a:cs typeface="Aptos" pitchFamily="34" charset="-120"/>
               </a:rPr>
-              <a:t>• Outputs should be validated before downstream use, especially when they affect systems, public.</a:t>
-            </a:r>
-            <a:endParaRPr lang="en-US" sz="2100" dirty="0"/>
+              <a:t>• Outputs should be validated before downstream use, especially when they.</a:t>
+            </a:r>
+            <a:endParaRPr lang="en-US" sz="1920" dirty="0"/>
           </a:p>
         </p:txBody>
       </p:sp>
@@ -4928,12 +4928,12 @@
         </p:nvSpPr>
         <p:spPr>
           <a:xfrm>
-            <a:off x="7635240" y="1325880"/>
-            <a:ext cx="3474720" cy="1255471"/>
+            <a:off x="7543800" y="1325880"/>
+            <a:ext cx="3611880" cy="1261872"/>
           </a:xfrm>
           <a:prstGeom prst="roundRect">
             <a:avLst>
-              <a:gd name="adj" fmla="val 8740"/>
+              <a:gd name="adj" fmla="val 8696"/>
             </a:avLst>
           </a:prstGeom>
           <a:solidFill>
@@ -4955,8 +4955,8 @@
         </p:nvSpPr>
         <p:spPr>
           <a:xfrm>
-            <a:off x="7799832" y="1472184"/>
-            <a:ext cx="3145536" cy="256032"/>
+            <a:off x="7708392" y="1453896"/>
+            <a:ext cx="3282696" cy="228600"/>
           </a:xfrm>
           <a:prstGeom prst="rect">
             <a:avLst/>
@@ -4972,7 +4972,7 @@
               <a:buNone/>
             </a:pPr>
             <a:r>
-              <a:rPr lang="en-US" sz="1300" b="1" dirty="0">
+              <a:rPr lang="en-US" sz="1220" b="1" dirty="0">
                 <a:solidFill>
                   <a:srgbClr val="0068B7"/>
                 </a:solidFill>
@@ -4982,7 +4982,7 @@
               </a:rPr>
               <a:t>Risk check</a:t>
             </a:r>
-            <a:endParaRPr lang="en-US" sz="1300" dirty="0"/>
+            <a:endParaRPr lang="en-US" sz="1220" dirty="0"/>
           </a:p>
         </p:txBody>
       </p:sp>
@@ -4994,8 +4994,8 @@
         </p:nvSpPr>
         <p:spPr>
           <a:xfrm>
-            <a:off x="7799832" y="1801368"/>
-            <a:ext cx="3145536" cy="688543"/>
+            <a:off x="7708392" y="1764792"/>
+            <a:ext cx="3282696" cy="749808"/>
           </a:xfrm>
           <a:prstGeom prst="rect">
             <a:avLst/>
@@ -5013,7 +5013,7 @@
               <a:buNone/>
             </a:pPr>
             <a:r>
-              <a:rPr lang="en-US" sz="1320" dirty="0">
+              <a:rPr lang="en-US" sz="1220" dirty="0">
                 <a:solidFill>
                   <a:srgbClr val="17364A"/>
                 </a:solidFill>
@@ -5021,9 +5021,9 @@
                 <a:ea typeface="Aptos" pitchFamily="34" charset="-122"/>
                 <a:cs typeface="Aptos" pitchFamily="34" charset="-120"/>
               </a:rPr>
-              <a:t>Output handling matters because AI outputs may be copied into reports, emails, code, dashboards, or.</a:t>
-            </a:r>
-            <a:endParaRPr lang="en-US" sz="1320" dirty="0"/>
+              <a:t>Output handling matters because AI outputs may be copied into reports, emails,.</a:t>
+            </a:r>
+            <a:endParaRPr lang="en-US" sz="1220" dirty="0"/>
           </a:p>
         </p:txBody>
       </p:sp>
@@ -5035,12 +5035,12 @@
         </p:nvSpPr>
         <p:spPr>
           <a:xfrm>
-            <a:off x="7635240" y="2718511"/>
-            <a:ext cx="3474720" cy="1536192"/>
+            <a:off x="7543800" y="2724912"/>
+            <a:ext cx="3611880" cy="1527048"/>
           </a:xfrm>
           <a:prstGeom prst="roundRect">
             <a:avLst>
-              <a:gd name="adj" fmla="val 7143"/>
+              <a:gd name="adj" fmla="val 7186"/>
             </a:avLst>
           </a:prstGeom>
           <a:solidFill>
@@ -5062,8 +5062,8 @@
         </p:nvSpPr>
         <p:spPr>
           <a:xfrm>
-            <a:off x="7799832" y="2864815"/>
-            <a:ext cx="3145536" cy="256032"/>
+            <a:off x="7708392" y="2852928"/>
+            <a:ext cx="3282696" cy="228600"/>
           </a:xfrm>
           <a:prstGeom prst="rect">
             <a:avLst/>
@@ -5079,7 +5079,7 @@
               <a:buNone/>
             </a:pPr>
             <a:r>
-              <a:rPr lang="en-US" sz="1300" b="1" dirty="0">
+              <a:rPr lang="en-US" sz="1220" b="1" dirty="0">
                 <a:solidFill>
                   <a:srgbClr val="0068B7"/>
                 </a:solidFill>
@@ -5089,7 +5089,7 @@
               </a:rPr>
               <a:t>Concept checkpoints</a:t>
             </a:r>
-            <a:endParaRPr lang="en-US" sz="1300" dirty="0"/>
+            <a:endParaRPr lang="en-US" sz="1220" dirty="0"/>
           </a:p>
         </p:txBody>
       </p:sp>
@@ -5101,8 +5101,8 @@
         </p:nvSpPr>
         <p:spPr>
           <a:xfrm>
-            <a:off x="7818120" y="3230575"/>
-            <a:ext cx="3090672" cy="877824"/>
+            <a:off x="7726680" y="3182112"/>
+            <a:ext cx="3227832" cy="960120"/>
           </a:xfrm>
           <a:prstGeom prst="rect">
             <a:avLst/>
@@ -5120,7 +5120,7 @@
               <a:buNone/>
             </a:pPr>
             <a:r>
-              <a:rPr lang="en-US" sz="1220" dirty="0">
+              <a:rPr lang="en-US" sz="1140" dirty="0">
                 <a:solidFill>
                   <a:srgbClr val="17364A"/>
                 </a:solidFill>
@@ -5128,16 +5128,16 @@
                 <a:ea typeface="Aptos" pitchFamily="34" charset="-122"/>
                 <a:cs typeface="Aptos" pitchFamily="34" charset="-120"/>
               </a:rPr>
-              <a:t>Output handling matters because AI outputs may be copied into.</a:t>
-            </a:r>
-            <a:endParaRPr lang="en-US" sz="1220" dirty="0"/>
-          </a:p>
-          <a:p>
-            <a:pPr indent="0" marL="0">
-              <a:buNone/>
-            </a:pPr>
-            <a:r>
-              <a:rPr lang="en-US" sz="1220" dirty="0">
+              <a:t>Output handling matters because AI outputs may be.</a:t>
+            </a:r>
+            <a:endParaRPr lang="en-US" sz="1140" dirty="0"/>
+          </a:p>
+          <a:p>
+            <a:pPr indent="0" marL="0">
+              <a:buNone/>
+            </a:pPr>
+            <a:r>
+              <a:rPr lang="en-US" sz="1140" dirty="0">
                 <a:solidFill>
                   <a:srgbClr val="17364A"/>
                 </a:solidFill>
@@ -5145,16 +5145,16 @@
                 <a:ea typeface="Aptos" pitchFamily="34" charset="-122"/>
                 <a:cs typeface="Aptos" pitchFamily="34" charset="-120"/>
               </a:rPr>
-              <a:t>Insecure output handling can lead to misinformation, broken code,.</a:t>
-            </a:r>
-            <a:endParaRPr lang="en-US" sz="1220" dirty="0"/>
-          </a:p>
-          <a:p>
-            <a:pPr indent="0" marL="0">
-              <a:buNone/>
-            </a:pPr>
-            <a:r>
-              <a:rPr lang="en-US" sz="1220" dirty="0">
+              <a:t>Insecure output handling can lead to.</a:t>
+            </a:r>
+            <a:endParaRPr lang="en-US" sz="1140" dirty="0"/>
+          </a:p>
+          <a:p>
+            <a:pPr indent="0" marL="0">
+              <a:buNone/>
+            </a:pPr>
+            <a:r>
+              <a:rPr lang="en-US" sz="1140" dirty="0">
                 <a:solidFill>
                   <a:srgbClr val="17364A"/>
                 </a:solidFill>
@@ -5162,9 +5162,9 @@
                 <a:ea typeface="Aptos" pitchFamily="34" charset="-122"/>
                 <a:cs typeface="Aptos" pitchFamily="34" charset="-120"/>
               </a:rPr>
-              <a:t>Outputs should be validated before downstream use, especially when.</a:t>
-            </a:r>
-            <a:endParaRPr lang="en-US" sz="1220" dirty="0"/>
+              <a:t>Outputs should be validated before downstream use,.</a:t>
+            </a:r>
+            <a:endParaRPr lang="en-US" sz="1140" dirty="0"/>
           </a:p>
         </p:txBody>
       </p:sp>
@@ -5176,12 +5176,12 @@
         </p:nvSpPr>
         <p:spPr>
           <a:xfrm>
-            <a:off x="7635240" y="4391863"/>
-            <a:ext cx="3474720" cy="1255471"/>
+            <a:off x="7543800" y="4389120"/>
+            <a:ext cx="3611880" cy="1261872"/>
           </a:xfrm>
           <a:prstGeom prst="roundRect">
             <a:avLst>
-              <a:gd name="adj" fmla="val 8740"/>
+              <a:gd name="adj" fmla="val 8696"/>
             </a:avLst>
           </a:prstGeom>
           <a:solidFill>
@@ -5203,8 +5203,8 @@
         </p:nvSpPr>
         <p:spPr>
           <a:xfrm>
-            <a:off x="7799832" y="4538167"/>
-            <a:ext cx="3145536" cy="256032"/>
+            <a:off x="7708392" y="4517136"/>
+            <a:ext cx="3282696" cy="228600"/>
           </a:xfrm>
           <a:prstGeom prst="rect">
             <a:avLst/>
@@ -5220,7 +5220,7 @@
               <a:buNone/>
             </a:pPr>
             <a:r>
-              <a:rPr lang="en-US" sz="1300" b="1" dirty="0">
+              <a:rPr lang="en-US" sz="1220" b="1" dirty="0">
                 <a:solidFill>
                   <a:srgbClr val="0068B7"/>
                 </a:solidFill>
@@ -5230,7 +5230,7 @@
               </a:rPr>
               <a:t>Safeguard to plan</a:t>
             </a:r>
-            <a:endParaRPr lang="en-US" sz="1300" dirty="0"/>
+            <a:endParaRPr lang="en-US" sz="1220" dirty="0"/>
           </a:p>
         </p:txBody>
       </p:sp>
@@ -5242,8 +5242,8 @@
         </p:nvSpPr>
         <p:spPr>
           <a:xfrm>
-            <a:off x="7799832" y="4867351"/>
-            <a:ext cx="3145536" cy="688543"/>
+            <a:off x="7708392" y="4828032"/>
+            <a:ext cx="3282696" cy="749808"/>
           </a:xfrm>
           <a:prstGeom prst="rect">
             <a:avLst/>
@@ -5261,7 +5261,7 @@
               <a:buNone/>
             </a:pPr>
             <a:r>
-              <a:rPr lang="en-US" sz="1320" dirty="0">
+              <a:rPr lang="en-US" sz="1220" dirty="0">
                 <a:solidFill>
                   <a:srgbClr val="17364A"/>
                 </a:solidFill>
@@ -5269,9 +5269,9 @@
                 <a:ea typeface="Aptos" pitchFamily="34" charset="-122"/>
                 <a:cs typeface="Aptos" pitchFamily="34" charset="-120"/>
               </a:rPr>
-              <a:t>Identify what could go wrong, who could be affected, what safeguards are needed, and what evidence should be reviewed before use.</a:t>
-            </a:r>
-            <a:endParaRPr lang="en-US" sz="1320" dirty="0"/>
+              <a:t>Identify what could go wrong, who could be affected, what safeguards are needed,.</a:t>
+            </a:r>
+            <a:endParaRPr lang="en-US" sz="1220" dirty="0"/>
           </a:p>
         </p:txBody>
       </p:sp>
@@ -5562,8 +5562,8 @@
         </p:nvSpPr>
         <p:spPr>
           <a:xfrm>
-            <a:off x="868680" y="1508760"/>
-            <a:ext cx="6309360" cy="4160520"/>
+            <a:off x="822960" y="1463040"/>
+            <a:ext cx="6565392" cy="4343400"/>
           </a:xfrm>
           <a:prstGeom prst="rect">
             <a:avLst/>
@@ -5581,7 +5581,7 @@
               <a:buNone/>
             </a:pPr>
             <a:r>
-              <a:rPr lang="en-US" sz="2100" dirty="0">
+              <a:rPr lang="en-US" sz="1920" dirty="0">
                 <a:solidFill>
                   <a:srgbClr val="003A63"/>
                 </a:solidFill>
@@ -5591,14 +5591,14 @@
               </a:rPr>
               <a:t>• Prompt injection.</a:t>
             </a:r>
-            <a:endParaRPr lang="en-US" sz="2100" dirty="0"/>
-          </a:p>
-          <a:p>
-            <a:pPr indent="0" marL="0">
-              <a:buNone/>
-            </a:pPr>
-            <a:r>
-              <a:rPr lang="en-US" sz="2100" dirty="0">
+            <a:endParaRPr lang="en-US" sz="1920" dirty="0"/>
+          </a:p>
+          <a:p>
+            <a:pPr indent="0" marL="0">
+              <a:buNone/>
+            </a:pPr>
+            <a:r>
+              <a:rPr lang="en-US" sz="1920" dirty="0">
                 <a:solidFill>
                   <a:srgbClr val="003A63"/>
                 </a:solidFill>
@@ -5608,14 +5608,14 @@
               </a:rPr>
               <a:t>• Untrusted content may override instructions.</a:t>
             </a:r>
-            <a:endParaRPr lang="en-US" sz="2100" dirty="0"/>
-          </a:p>
-          <a:p>
-            <a:pPr indent="0" marL="0">
-              <a:buNone/>
-            </a:pPr>
-            <a:r>
-              <a:rPr lang="en-US" sz="2100" dirty="0">
+            <a:endParaRPr lang="en-US" sz="1920" dirty="0"/>
+          </a:p>
+          <a:p>
+            <a:pPr indent="0" marL="0">
+              <a:buNone/>
+            </a:pPr>
+            <a:r>
+              <a:rPr lang="en-US" sz="1920" dirty="0">
                 <a:solidFill>
                   <a:srgbClr val="003A63"/>
                 </a:solidFill>
@@ -5623,9 +5623,9 @@
                 <a:ea typeface="Aptos" pitchFamily="34" charset="-122"/>
                 <a:cs typeface="Aptos" pitchFamily="34" charset="-120"/>
               </a:rPr>
-              <a:t>• Guardrails include treating external content as data, restricting tools, and testing with.</a:t>
-            </a:r>
-            <a:endParaRPr lang="en-US" sz="2100" dirty="0"/>
+              <a:t>• Guardrails include treating external content as data, restricting tools, and.</a:t>
+            </a:r>
+            <a:endParaRPr lang="en-US" sz="1920" dirty="0"/>
           </a:p>
         </p:txBody>
       </p:sp>
@@ -5637,12 +5637,12 @@
         </p:nvSpPr>
         <p:spPr>
           <a:xfrm>
-            <a:off x="7635240" y="1325880"/>
-            <a:ext cx="3474720" cy="1207008"/>
+            <a:off x="7543800" y="1325880"/>
+            <a:ext cx="3611880" cy="1261872"/>
           </a:xfrm>
           <a:prstGeom prst="roundRect">
             <a:avLst>
-              <a:gd name="adj" fmla="val 9091"/>
+              <a:gd name="adj" fmla="val 8696"/>
             </a:avLst>
           </a:prstGeom>
           <a:solidFill>
@@ -5664,8 +5664,8 @@
         </p:nvSpPr>
         <p:spPr>
           <a:xfrm>
-            <a:off x="7799832" y="1472184"/>
-            <a:ext cx="3145536" cy="256032"/>
+            <a:off x="7708392" y="1453896"/>
+            <a:ext cx="3282696" cy="228600"/>
           </a:xfrm>
           <a:prstGeom prst="rect">
             <a:avLst/>
@@ -5681,7 +5681,7 @@
               <a:buNone/>
             </a:pPr>
             <a:r>
-              <a:rPr lang="en-US" sz="1300" b="1" dirty="0">
+              <a:rPr lang="en-US" sz="1220" b="1" dirty="0">
                 <a:solidFill>
                   <a:srgbClr val="0068B7"/>
                 </a:solidFill>
@@ -5691,7 +5691,7 @@
               </a:rPr>
               <a:t>Risk check</a:t>
             </a:r>
-            <a:endParaRPr lang="en-US" sz="1300" dirty="0"/>
+            <a:endParaRPr lang="en-US" sz="1220" dirty="0"/>
           </a:p>
         </p:txBody>
       </p:sp>
@@ -5703,8 +5703,8 @@
         </p:nvSpPr>
         <p:spPr>
           <a:xfrm>
-            <a:off x="7799832" y="1801368"/>
-            <a:ext cx="3145536" cy="640080"/>
+            <a:off x="7708392" y="1764792"/>
+            <a:ext cx="3282696" cy="749808"/>
           </a:xfrm>
           <a:prstGeom prst="rect">
             <a:avLst/>
@@ -5722,7 +5722,7 @@
               <a:buNone/>
             </a:pPr>
             <a:r>
-              <a:rPr lang="en-US" sz="1320" dirty="0">
+              <a:rPr lang="en-US" sz="1220" dirty="0">
                 <a:solidFill>
                   <a:srgbClr val="17364A"/>
                 </a:solidFill>
@@ -5732,7 +5732,7 @@
               </a:rPr>
               <a:t>Prompt injection.</a:t>
             </a:r>
-            <a:endParaRPr lang="en-US" sz="1320" dirty="0"/>
+            <a:endParaRPr lang="en-US" sz="1220" dirty="0"/>
           </a:p>
         </p:txBody>
       </p:sp>
@@ -5744,12 +5744,12 @@
         </p:nvSpPr>
         <p:spPr>
           <a:xfrm>
-            <a:off x="7635240" y="2670048"/>
-            <a:ext cx="3474720" cy="1536192"/>
+            <a:off x="7543800" y="2724912"/>
+            <a:ext cx="3611880" cy="1527048"/>
           </a:xfrm>
           <a:prstGeom prst="roundRect">
             <a:avLst>
-              <a:gd name="adj" fmla="val 7143"/>
+              <a:gd name="adj" fmla="val 7186"/>
             </a:avLst>
           </a:prstGeom>
           <a:solidFill>
@@ -5771,8 +5771,8 @@
         </p:nvSpPr>
         <p:spPr>
           <a:xfrm>
-            <a:off x="7799832" y="2816352"/>
-            <a:ext cx="3145536" cy="256032"/>
+            <a:off x="7708392" y="2852928"/>
+            <a:ext cx="3282696" cy="228600"/>
           </a:xfrm>
           <a:prstGeom prst="rect">
             <a:avLst/>
@@ -5788,7 +5788,7 @@
               <a:buNone/>
             </a:pPr>
             <a:r>
-              <a:rPr lang="en-US" sz="1300" b="1" dirty="0">
+              <a:rPr lang="en-US" sz="1220" b="1" dirty="0">
                 <a:solidFill>
                   <a:srgbClr val="0068B7"/>
                 </a:solidFill>
@@ -5798,7 +5798,7 @@
               </a:rPr>
               <a:t>Concept checkpoints</a:t>
             </a:r>
-            <a:endParaRPr lang="en-US" sz="1300" dirty="0"/>
+            <a:endParaRPr lang="en-US" sz="1220" dirty="0"/>
           </a:p>
         </p:txBody>
       </p:sp>
@@ -5810,8 +5810,8 @@
         </p:nvSpPr>
         <p:spPr>
           <a:xfrm>
-            <a:off x="7818120" y="3182112"/>
-            <a:ext cx="3090672" cy="877824"/>
+            <a:off x="7726680" y="3182112"/>
+            <a:ext cx="3227832" cy="960120"/>
           </a:xfrm>
           <a:prstGeom prst="rect">
             <a:avLst/>
@@ -5829,7 +5829,7 @@
               <a:buNone/>
             </a:pPr>
             <a:r>
-              <a:rPr lang="en-US" sz="1220" dirty="0">
+              <a:rPr lang="en-US" sz="1140" dirty="0">
                 <a:solidFill>
                   <a:srgbClr val="17364A"/>
                 </a:solidFill>
@@ -5837,16 +5837,16 @@
                 <a:ea typeface="Aptos" pitchFamily="34" charset="-122"/>
                 <a:cs typeface="Aptos" pitchFamily="34" charset="-120"/>
               </a:rPr>
-              <a:t>Guardrails include treating external content as data, restricting.</a:t>
-            </a:r>
-            <a:endParaRPr lang="en-US" sz="1220" dirty="0"/>
-          </a:p>
-          <a:p>
-            <a:pPr indent="0" marL="0">
-              <a:buNone/>
-            </a:pPr>
-            <a:r>
-              <a:rPr lang="en-US" sz="1220" dirty="0">
+              <a:t>Guardrails include treating external content as.</a:t>
+            </a:r>
+            <a:endParaRPr lang="en-US" sz="1140" dirty="0"/>
+          </a:p>
+          <a:p>
+            <a:pPr indent="0" marL="0">
+              <a:buNone/>
+            </a:pPr>
+            <a:r>
+              <a:rPr lang="en-US" sz="1140" dirty="0">
                 <a:solidFill>
                   <a:srgbClr val="17364A"/>
                 </a:solidFill>
@@ -5856,14 +5856,14 @@
               </a:rPr>
               <a:t>Sensitive information disclosure.</a:t>
             </a:r>
-            <a:endParaRPr lang="en-US" sz="1220" dirty="0"/>
-          </a:p>
-          <a:p>
-            <a:pPr indent="0" marL="0">
-              <a:buNone/>
-            </a:pPr>
-            <a:r>
-              <a:rPr lang="en-US" sz="1220" dirty="0">
+            <a:endParaRPr lang="en-US" sz="1140" dirty="0"/>
+          </a:p>
+          <a:p>
+            <a:pPr indent="0" marL="0">
+              <a:buNone/>
+            </a:pPr>
+            <a:r>
+              <a:rPr lang="en-US" sz="1140" dirty="0">
                 <a:solidFill>
                   <a:srgbClr val="17364A"/>
                 </a:solidFill>
@@ -5873,7 +5873,7 @@
               </a:rPr>
               <a:t>AI may reveal information outside user permissions.</a:t>
             </a:r>
-            <a:endParaRPr lang="en-US" sz="1220" dirty="0"/>
+            <a:endParaRPr lang="en-US" sz="1140" dirty="0"/>
           </a:p>
         </p:txBody>
       </p:sp>
@@ -5885,12 +5885,12 @@
         </p:nvSpPr>
         <p:spPr>
           <a:xfrm>
-            <a:off x="7635240" y="4343400"/>
-            <a:ext cx="3474720" cy="1255471"/>
+            <a:off x="7543800" y="4389120"/>
+            <a:ext cx="3611880" cy="1261872"/>
           </a:xfrm>
           <a:prstGeom prst="roundRect">
             <a:avLst>
-              <a:gd name="adj" fmla="val 8740"/>
+              <a:gd name="adj" fmla="val 8696"/>
             </a:avLst>
           </a:prstGeom>
           <a:solidFill>
@@ -5912,8 +5912,8 @@
         </p:nvSpPr>
         <p:spPr>
           <a:xfrm>
-            <a:off x="7799832" y="4489704"/>
-            <a:ext cx="3145536" cy="256032"/>
+            <a:off x="7708392" y="4517136"/>
+            <a:ext cx="3282696" cy="228600"/>
           </a:xfrm>
           <a:prstGeom prst="rect">
             <a:avLst/>
@@ -5929,7 +5929,7 @@
               <a:buNone/>
             </a:pPr>
             <a:r>
-              <a:rPr lang="en-US" sz="1300" b="1" dirty="0">
+              <a:rPr lang="en-US" sz="1220" b="1" dirty="0">
                 <a:solidFill>
                   <a:srgbClr val="0068B7"/>
                 </a:solidFill>
@@ -5939,7 +5939,7 @@
               </a:rPr>
               <a:t>Safeguard to plan</a:t>
             </a:r>
-            <a:endParaRPr lang="en-US" sz="1300" dirty="0"/>
+            <a:endParaRPr lang="en-US" sz="1220" dirty="0"/>
           </a:p>
         </p:txBody>
       </p:sp>
@@ -5951,8 +5951,8 @@
         </p:nvSpPr>
         <p:spPr>
           <a:xfrm>
-            <a:off x="7799832" y="4818888"/>
-            <a:ext cx="3145536" cy="688543"/>
+            <a:off x="7708392" y="4828032"/>
+            <a:ext cx="3282696" cy="749808"/>
           </a:xfrm>
           <a:prstGeom prst="rect">
             <a:avLst/>
@@ -5970,7 +5970,7 @@
               <a:buNone/>
             </a:pPr>
             <a:r>
-              <a:rPr lang="en-US" sz="1320" dirty="0">
+              <a:rPr lang="en-US" sz="1220" dirty="0">
                 <a:solidFill>
                   <a:srgbClr val="17364A"/>
                 </a:solidFill>
@@ -5978,9 +5978,9 @@
                 <a:ea typeface="Aptos" pitchFamily="34" charset="-122"/>
                 <a:cs typeface="Aptos" pitchFamily="34" charset="-120"/>
               </a:rPr>
-              <a:t>Identify what could go wrong, who could be affected, what safeguards are needed, and what evidence should be reviewed before use.</a:t>
-            </a:r>
-            <a:endParaRPr lang="en-US" sz="1320" dirty="0"/>
+              <a:t>Identify what could go wrong, who could be affected, what safeguards are needed,.</a:t>
+            </a:r>
+            <a:endParaRPr lang="en-US" sz="1220" dirty="0"/>
           </a:p>
         </p:txBody>
       </p:sp>
@@ -6271,8 +6271,8 @@
         </p:nvSpPr>
         <p:spPr>
           <a:xfrm>
-            <a:off x="868680" y="1508760"/>
-            <a:ext cx="6309360" cy="4160520"/>
+            <a:off x="822960" y="1463040"/>
+            <a:ext cx="6565392" cy="4343400"/>
           </a:xfrm>
           <a:prstGeom prst="rect">
             <a:avLst/>
@@ -6290,7 +6290,7 @@
               <a:buNone/>
             </a:pPr>
             <a:r>
-              <a:rPr lang="en-US" sz="2100" dirty="0">
+              <a:rPr lang="en-US" sz="1920" dirty="0">
                 <a:solidFill>
                   <a:srgbClr val="003A63"/>
                 </a:solidFill>
@@ -6300,14 +6300,14 @@
               </a:rPr>
               <a:t>• Supply chain risk.</a:t>
             </a:r>
-            <a:endParaRPr lang="en-US" sz="2100" dirty="0"/>
-          </a:p>
-          <a:p>
-            <a:pPr indent="0" marL="0">
-              <a:buNone/>
-            </a:pPr>
-            <a:r>
-              <a:rPr lang="en-US" sz="2100" dirty="0">
+            <a:endParaRPr lang="en-US" sz="1920" dirty="0"/>
+          </a:p>
+          <a:p>
+            <a:pPr indent="0" marL="0">
+              <a:buNone/>
+            </a:pPr>
+            <a:r>
+              <a:rPr lang="en-US" sz="1920" dirty="0">
                 <a:solidFill>
                   <a:srgbClr val="003A63"/>
                 </a:solidFill>
@@ -6315,16 +6315,16 @@
                 <a:ea typeface="Aptos" pitchFamily="34" charset="-122"/>
                 <a:cs typeface="Aptos" pitchFamily="34" charset="-120"/>
               </a:rPr>
-              <a:t>• AI tools may depend on vendors, plugins, models, or libraries with vulnerabilities.</a:t>
-            </a:r>
-            <a:endParaRPr lang="en-US" sz="2100" dirty="0"/>
-          </a:p>
-          <a:p>
-            <a:pPr indent="0" marL="0">
-              <a:buNone/>
-            </a:pPr>
-            <a:r>
-              <a:rPr lang="en-US" sz="2100" dirty="0">
+              <a:t>• AI tools may depend on vendors, plugins, models, or libraries with.</a:t>
+            </a:r>
+            <a:endParaRPr lang="en-US" sz="1920" dirty="0"/>
+          </a:p>
+          <a:p>
+            <a:pPr indent="0" marL="0">
+              <a:buNone/>
+            </a:pPr>
+            <a:r>
+              <a:rPr lang="en-US" sz="1920" dirty="0">
                 <a:solidFill>
                   <a:srgbClr val="003A63"/>
                 </a:solidFill>
@@ -6332,9 +6332,9 @@
                 <a:ea typeface="Aptos" pitchFamily="34" charset="-122"/>
                 <a:cs typeface="Aptos" pitchFamily="34" charset="-120"/>
               </a:rPr>
-              <a:t>• Guardrails include vendor review, security documentation, patching, and contract requirements.</a:t>
-            </a:r>
-            <a:endParaRPr lang="en-US" sz="2100" dirty="0"/>
+              <a:t>• Guardrails include vendor review, security documentation, patching, and.</a:t>
+            </a:r>
+            <a:endParaRPr lang="en-US" sz="1920" dirty="0"/>
           </a:p>
         </p:txBody>
       </p:sp>
@@ -6346,12 +6346,12 @@
         </p:nvSpPr>
         <p:spPr>
           <a:xfrm>
-            <a:off x="7635240" y="1325880"/>
-            <a:ext cx="3474720" cy="1207008"/>
+            <a:off x="7543800" y="1325880"/>
+            <a:ext cx="3611880" cy="1261872"/>
           </a:xfrm>
           <a:prstGeom prst="roundRect">
             <a:avLst>
-              <a:gd name="adj" fmla="val 9091"/>
+              <a:gd name="adj" fmla="val 8696"/>
             </a:avLst>
           </a:prstGeom>
           <a:solidFill>
@@ -6373,8 +6373,8 @@
         </p:nvSpPr>
         <p:spPr>
           <a:xfrm>
-            <a:off x="7799832" y="1472184"/>
-            <a:ext cx="3145536" cy="256032"/>
+            <a:off x="7708392" y="1453896"/>
+            <a:ext cx="3282696" cy="228600"/>
           </a:xfrm>
           <a:prstGeom prst="rect">
             <a:avLst/>
@@ -6390,7 +6390,7 @@
               <a:buNone/>
             </a:pPr>
             <a:r>
-              <a:rPr lang="en-US" sz="1300" b="1" dirty="0">
+              <a:rPr lang="en-US" sz="1220" b="1" dirty="0">
                 <a:solidFill>
                   <a:srgbClr val="0068B7"/>
                 </a:solidFill>
@@ -6400,7 +6400,7 @@
               </a:rPr>
               <a:t>Risk check</a:t>
             </a:r>
-            <a:endParaRPr lang="en-US" sz="1300" dirty="0"/>
+            <a:endParaRPr lang="en-US" sz="1220" dirty="0"/>
           </a:p>
         </p:txBody>
       </p:sp>
@@ -6412,8 +6412,8 @@
         </p:nvSpPr>
         <p:spPr>
           <a:xfrm>
-            <a:off x="7799832" y="1801368"/>
-            <a:ext cx="3145536" cy="640080"/>
+            <a:off x="7708392" y="1764792"/>
+            <a:ext cx="3282696" cy="749808"/>
           </a:xfrm>
           <a:prstGeom prst="rect">
             <a:avLst/>
@@ -6431,7 +6431,7 @@
               <a:buNone/>
             </a:pPr>
             <a:r>
-              <a:rPr lang="en-US" sz="1320" dirty="0">
+              <a:rPr lang="en-US" sz="1220" dirty="0">
                 <a:solidFill>
                   <a:srgbClr val="17364A"/>
                 </a:solidFill>
@@ -6441,7 +6441,7 @@
               </a:rPr>
               <a:t>Supply chain risk.</a:t>
             </a:r>
-            <a:endParaRPr lang="en-US" sz="1320" dirty="0"/>
+            <a:endParaRPr lang="en-US" sz="1220" dirty="0"/>
           </a:p>
         </p:txBody>
       </p:sp>
@@ -6453,12 +6453,12 @@
         </p:nvSpPr>
         <p:spPr>
           <a:xfrm>
-            <a:off x="7635240" y="2670048"/>
-            <a:ext cx="3474720" cy="1536192"/>
+            <a:off x="7543800" y="2724912"/>
+            <a:ext cx="3611880" cy="1527048"/>
           </a:xfrm>
           <a:prstGeom prst="roundRect">
             <a:avLst>
-              <a:gd name="adj" fmla="val 7143"/>
+              <a:gd name="adj" fmla="val 7186"/>
             </a:avLst>
           </a:prstGeom>
           <a:solidFill>
@@ -6480,8 +6480,8 @@
         </p:nvSpPr>
         <p:spPr>
           <a:xfrm>
-            <a:off x="7799832" y="2816352"/>
-            <a:ext cx="3145536" cy="256032"/>
+            <a:off x="7708392" y="2852928"/>
+            <a:ext cx="3282696" cy="228600"/>
           </a:xfrm>
           <a:prstGeom prst="rect">
             <a:avLst/>
@@ -6497,7 +6497,7 @@
               <a:buNone/>
             </a:pPr>
             <a:r>
-              <a:rPr lang="en-US" sz="1300" b="1" dirty="0">
+              <a:rPr lang="en-US" sz="1220" b="1" dirty="0">
                 <a:solidFill>
                   <a:srgbClr val="0068B7"/>
                 </a:solidFill>
@@ -6507,7 +6507,7 @@
               </a:rPr>
               <a:t>Concept checkpoints</a:t>
             </a:r>
-            <a:endParaRPr lang="en-US" sz="1300" dirty="0"/>
+            <a:endParaRPr lang="en-US" sz="1220" dirty="0"/>
           </a:p>
         </p:txBody>
       </p:sp>
@@ -6519,8 +6519,8 @@
         </p:nvSpPr>
         <p:spPr>
           <a:xfrm>
-            <a:off x="7818120" y="3182112"/>
-            <a:ext cx="3090672" cy="877824"/>
+            <a:off x="7726680" y="3182112"/>
+            <a:ext cx="3227832" cy="960120"/>
           </a:xfrm>
           <a:prstGeom prst="rect">
             <a:avLst/>
@@ -6538,7 +6538,7 @@
               <a:buNone/>
             </a:pPr>
             <a:r>
-              <a:rPr lang="en-US" sz="1220" dirty="0">
+              <a:rPr lang="en-US" sz="1140" dirty="0">
                 <a:solidFill>
                   <a:srgbClr val="17364A"/>
                 </a:solidFill>
@@ -6548,14 +6548,14 @@
               </a:rPr>
               <a:t>Supply chain risk.</a:t>
             </a:r>
-            <a:endParaRPr lang="en-US" sz="1220" dirty="0"/>
-          </a:p>
-          <a:p>
-            <a:pPr indent="0" marL="0">
-              <a:buNone/>
-            </a:pPr>
-            <a:r>
-              <a:rPr lang="en-US" sz="1220" dirty="0">
+            <a:endParaRPr lang="en-US" sz="1140" dirty="0"/>
+          </a:p>
+          <a:p>
+            <a:pPr indent="0" marL="0">
+              <a:buNone/>
+            </a:pPr>
+            <a:r>
+              <a:rPr lang="en-US" sz="1140" dirty="0">
                 <a:solidFill>
                   <a:srgbClr val="17364A"/>
                 </a:solidFill>
@@ -6563,16 +6563,16 @@
                 <a:ea typeface="Aptos" pitchFamily="34" charset="-122"/>
                 <a:cs typeface="Aptos" pitchFamily="34" charset="-120"/>
               </a:rPr>
-              <a:t>AI tools may depend on vendors, plugins, models, or libraries with.</a:t>
-            </a:r>
-            <a:endParaRPr lang="en-US" sz="1220" dirty="0"/>
-          </a:p>
-          <a:p>
-            <a:pPr indent="0" marL="0">
-              <a:buNone/>
-            </a:pPr>
-            <a:r>
-              <a:rPr lang="en-US" sz="1220" dirty="0">
+              <a:t>AI tools may depend on vendors, plugins, models,.</a:t>
+            </a:r>
+            <a:endParaRPr lang="en-US" sz="1140" dirty="0"/>
+          </a:p>
+          <a:p>
+            <a:pPr indent="0" marL="0">
+              <a:buNone/>
+            </a:pPr>
+            <a:r>
+              <a:rPr lang="en-US" sz="1140" dirty="0">
                 <a:solidFill>
                   <a:srgbClr val="17364A"/>
                 </a:solidFill>
@@ -6580,9 +6580,9 @@
                 <a:ea typeface="Aptos" pitchFamily="34" charset="-122"/>
                 <a:cs typeface="Aptos" pitchFamily="34" charset="-120"/>
               </a:rPr>
-              <a:t>Guardrails include vendor review, security documentation,.</a:t>
-            </a:r>
-            <a:endParaRPr lang="en-US" sz="1220" dirty="0"/>
+              <a:t>Guardrails include vendor review, security.</a:t>
+            </a:r>
+            <a:endParaRPr lang="en-US" sz="1140" dirty="0"/>
           </a:p>
         </p:txBody>
       </p:sp>
@@ -6594,12 +6594,12 @@
         </p:nvSpPr>
         <p:spPr>
           <a:xfrm>
-            <a:off x="7635240" y="4343400"/>
-            <a:ext cx="3474720" cy="1255471"/>
+            <a:off x="7543800" y="4389120"/>
+            <a:ext cx="3611880" cy="1261872"/>
           </a:xfrm>
           <a:prstGeom prst="roundRect">
             <a:avLst>
-              <a:gd name="adj" fmla="val 8740"/>
+              <a:gd name="adj" fmla="val 8696"/>
             </a:avLst>
           </a:prstGeom>
           <a:solidFill>
@@ -6621,8 +6621,8 @@
         </p:nvSpPr>
         <p:spPr>
           <a:xfrm>
-            <a:off x="7799832" y="4489704"/>
-            <a:ext cx="3145536" cy="256032"/>
+            <a:off x="7708392" y="4517136"/>
+            <a:ext cx="3282696" cy="228600"/>
           </a:xfrm>
           <a:prstGeom prst="rect">
             <a:avLst/>
@@ -6638,7 +6638,7 @@
               <a:buNone/>
             </a:pPr>
             <a:r>
-              <a:rPr lang="en-US" sz="1300" b="1" dirty="0">
+              <a:rPr lang="en-US" sz="1220" b="1" dirty="0">
                 <a:solidFill>
                   <a:srgbClr val="0068B7"/>
                 </a:solidFill>
@@ -6648,7 +6648,7 @@
               </a:rPr>
               <a:t>Safeguard to plan</a:t>
             </a:r>
-            <a:endParaRPr lang="en-US" sz="1300" dirty="0"/>
+            <a:endParaRPr lang="en-US" sz="1220" dirty="0"/>
           </a:p>
         </p:txBody>
       </p:sp>
@@ -6660,8 +6660,8 @@
         </p:nvSpPr>
         <p:spPr>
           <a:xfrm>
-            <a:off x="7799832" y="4818888"/>
-            <a:ext cx="3145536" cy="688543"/>
+            <a:off x="7708392" y="4828032"/>
+            <a:ext cx="3282696" cy="749808"/>
           </a:xfrm>
           <a:prstGeom prst="rect">
             <a:avLst/>
@@ -6679,7 +6679,7 @@
               <a:buNone/>
             </a:pPr>
             <a:r>
-              <a:rPr lang="en-US" sz="1320" dirty="0">
+              <a:rPr lang="en-US" sz="1220" dirty="0">
                 <a:solidFill>
                   <a:srgbClr val="17364A"/>
                 </a:solidFill>
@@ -6687,9 +6687,9 @@
                 <a:ea typeface="Aptos" pitchFamily="34" charset="-122"/>
                 <a:cs typeface="Aptos" pitchFamily="34" charset="-120"/>
               </a:rPr>
-              <a:t>Identify what could go wrong, who could be affected, what safeguards are needed, and what evidence should be reviewed before use.</a:t>
-            </a:r>
-            <a:endParaRPr lang="en-US" sz="1320" dirty="0"/>
+              <a:t>Identify what could go wrong, who could be affected, what safeguards are needed,.</a:t>
+            </a:r>
+            <a:endParaRPr lang="en-US" sz="1220" dirty="0"/>
           </a:p>
         </p:txBody>
       </p:sp>
@@ -6980,8 +6980,8 @@
         </p:nvSpPr>
         <p:spPr>
           <a:xfrm>
-            <a:off x="868680" y="1508760"/>
-            <a:ext cx="6309360" cy="4160520"/>
+            <a:off x="822960" y="1463040"/>
+            <a:ext cx="6565392" cy="4343400"/>
           </a:xfrm>
           <a:prstGeom prst="rect">
             <a:avLst/>
@@ -6999,7 +6999,7 @@
               <a:buNone/>
             </a:pPr>
             <a:r>
-              <a:rPr lang="en-US" sz="2100" dirty="0">
+              <a:rPr lang="en-US" sz="1920" dirty="0">
                 <a:solidFill>
                   <a:srgbClr val="003A63"/>
                 </a:solidFill>
@@ -7009,14 +7009,14 @@
               </a:rPr>
               <a:t>• AI security applies to generative AI, RAG, NLP, APIs, and agentic workflows.</a:t>
             </a:r>
-            <a:endParaRPr lang="en-US" sz="2100" dirty="0"/>
-          </a:p>
-          <a:p>
-            <a:pPr indent="0" marL="0">
-              <a:buNone/>
-            </a:pPr>
-            <a:r>
-              <a:rPr lang="en-US" sz="2100" dirty="0">
+            <a:endParaRPr lang="en-US" sz="1920" dirty="0"/>
+          </a:p>
+          <a:p>
+            <a:pPr indent="0" marL="0">
+              <a:buNone/>
+            </a:pPr>
+            <a:r>
+              <a:rPr lang="en-US" sz="1920" dirty="0">
                 <a:solidFill>
                   <a:srgbClr val="003A63"/>
                 </a:solidFill>
@@ -7024,16 +7024,16 @@
                 <a:ea typeface="Aptos" pitchFamily="34" charset="-122"/>
                 <a:cs typeface="Aptos" pitchFamily="34" charset="-120"/>
               </a:rPr>
-              <a:t>• RAG systems need document-level permissions and protections against unauthorized retrieval.</a:t>
-            </a:r>
-            <a:endParaRPr lang="en-US" sz="2100" dirty="0"/>
-          </a:p>
-          <a:p>
-            <a:pPr indent="0" marL="0">
-              <a:buNone/>
-            </a:pPr>
-            <a:r>
-              <a:rPr lang="en-US" sz="2100" dirty="0">
+              <a:t>• RAG systems need document-level permissions and protections against.</a:t>
+            </a:r>
+            <a:endParaRPr lang="en-US" sz="1920" dirty="0"/>
+          </a:p>
+          <a:p>
+            <a:pPr indent="0" marL="0">
+              <a:buNone/>
+            </a:pPr>
+            <a:r>
+              <a:rPr lang="en-US" sz="1920" dirty="0">
                 <a:solidFill>
                   <a:srgbClr val="003A63"/>
                 </a:solidFill>
@@ -7043,7 +7043,7 @@
               </a:rPr>
               <a:t>• Agentic systems need tool restrictions and action approval.</a:t>
             </a:r>
-            <a:endParaRPr lang="en-US" sz="2100" dirty="0"/>
+            <a:endParaRPr lang="en-US" sz="1920" dirty="0"/>
           </a:p>
         </p:txBody>
       </p:sp>
@@ -7055,12 +7055,12 @@
         </p:nvSpPr>
         <p:spPr>
           <a:xfrm>
-            <a:off x="7635240" y="1325880"/>
-            <a:ext cx="3474720" cy="1207008"/>
+            <a:off x="7543800" y="1325880"/>
+            <a:ext cx="3611880" cy="1261872"/>
           </a:xfrm>
           <a:prstGeom prst="roundRect">
             <a:avLst>
-              <a:gd name="adj" fmla="val 9091"/>
+              <a:gd name="adj" fmla="val 8696"/>
             </a:avLst>
           </a:prstGeom>
           <a:solidFill>
@@ -7082,8 +7082,8 @@
         </p:nvSpPr>
         <p:spPr>
           <a:xfrm>
-            <a:off x="7799832" y="1472184"/>
-            <a:ext cx="3145536" cy="256032"/>
+            <a:off x="7708392" y="1453896"/>
+            <a:ext cx="3282696" cy="228600"/>
           </a:xfrm>
           <a:prstGeom prst="rect">
             <a:avLst/>
@@ -7099,7 +7099,7 @@
               <a:buNone/>
             </a:pPr>
             <a:r>
-              <a:rPr lang="en-US" sz="1300" b="1" dirty="0">
+              <a:rPr lang="en-US" sz="1220" b="1" dirty="0">
                 <a:solidFill>
                   <a:srgbClr val="0068B7"/>
                 </a:solidFill>
@@ -7109,7 +7109,7 @@
               </a:rPr>
               <a:t>Risk check</a:t>
             </a:r>
-            <a:endParaRPr lang="en-US" sz="1300" dirty="0"/>
+            <a:endParaRPr lang="en-US" sz="1220" dirty="0"/>
           </a:p>
         </p:txBody>
       </p:sp>
@@ -7121,8 +7121,8 @@
         </p:nvSpPr>
         <p:spPr>
           <a:xfrm>
-            <a:off x="7799832" y="1801368"/>
-            <a:ext cx="3145536" cy="640080"/>
+            <a:off x="7708392" y="1764792"/>
+            <a:ext cx="3282696" cy="749808"/>
           </a:xfrm>
           <a:prstGeom prst="rect">
             <a:avLst/>
@@ -7140,7 +7140,7 @@
               <a:buNone/>
             </a:pPr>
             <a:r>
-              <a:rPr lang="en-US" sz="1320" dirty="0">
+              <a:rPr lang="en-US" sz="1220" dirty="0">
                 <a:solidFill>
                   <a:srgbClr val="17364A"/>
                 </a:solidFill>
@@ -7150,7 +7150,7 @@
               </a:rPr>
               <a:t>AI security applies to generative AI, RAG, NLP, APIs, and agentic workflows.</a:t>
             </a:r>
-            <a:endParaRPr lang="en-US" sz="1320" dirty="0"/>
+            <a:endParaRPr lang="en-US" sz="1220" dirty="0"/>
           </a:p>
         </p:txBody>
       </p:sp>
@@ -7162,12 +7162,12 @@
         </p:nvSpPr>
         <p:spPr>
           <a:xfrm>
-            <a:off x="7635240" y="2670048"/>
-            <a:ext cx="3474720" cy="1536192"/>
+            <a:off x="7543800" y="2724912"/>
+            <a:ext cx="3611880" cy="1527048"/>
           </a:xfrm>
           <a:prstGeom prst="roundRect">
             <a:avLst>
-              <a:gd name="adj" fmla="val 7143"/>
+              <a:gd name="adj" fmla="val 7186"/>
             </a:avLst>
           </a:prstGeom>
           <a:solidFill>
@@ -7189,8 +7189,8 @@
         </p:nvSpPr>
         <p:spPr>
           <a:xfrm>
-            <a:off x="7799832" y="2816352"/>
-            <a:ext cx="3145536" cy="256032"/>
+            <a:off x="7708392" y="2852928"/>
+            <a:ext cx="3282696" cy="228600"/>
           </a:xfrm>
           <a:prstGeom prst="rect">
             <a:avLst/>
@@ -7206,7 +7206,7 @@
               <a:buNone/>
             </a:pPr>
             <a:r>
-              <a:rPr lang="en-US" sz="1300" b="1" dirty="0">
+              <a:rPr lang="en-US" sz="1220" b="1" dirty="0">
                 <a:solidFill>
                   <a:srgbClr val="0068B7"/>
                 </a:solidFill>
@@ -7216,7 +7216,7 @@
               </a:rPr>
               <a:t>Concept checkpoints</a:t>
             </a:r>
-            <a:endParaRPr lang="en-US" sz="1300" dirty="0"/>
+            <a:endParaRPr lang="en-US" sz="1220" dirty="0"/>
           </a:p>
         </p:txBody>
       </p:sp>
@@ -7228,8 +7228,8 @@
         </p:nvSpPr>
         <p:spPr>
           <a:xfrm>
-            <a:off x="7818120" y="3182112"/>
-            <a:ext cx="3090672" cy="877824"/>
+            <a:off x="7726680" y="3182112"/>
+            <a:ext cx="3227832" cy="960120"/>
           </a:xfrm>
           <a:prstGeom prst="rect">
             <a:avLst/>
@@ -7247,7 +7247,7 @@
               <a:buNone/>
             </a:pPr>
             <a:r>
-              <a:rPr lang="en-US" sz="1220" dirty="0">
+              <a:rPr lang="en-US" sz="1140" dirty="0">
                 <a:solidFill>
                   <a:srgbClr val="17364A"/>
                 </a:solidFill>
@@ -7255,16 +7255,16 @@
                 <a:ea typeface="Aptos" pitchFamily="34" charset="-122"/>
                 <a:cs typeface="Aptos" pitchFamily="34" charset="-120"/>
               </a:rPr>
-              <a:t>Prompt templates should include data boundaries, and technical.</a:t>
-            </a:r>
-            <a:endParaRPr lang="en-US" sz="1220" dirty="0"/>
-          </a:p>
-          <a:p>
-            <a:pPr indent="0" marL="0">
-              <a:buNone/>
-            </a:pPr>
-            <a:r>
-              <a:rPr lang="en-US" sz="1220" dirty="0">
+              <a:t>Prompt templates should include data boundaries,.</a:t>
+            </a:r>
+            <a:endParaRPr lang="en-US" sz="1140" dirty="0"/>
+          </a:p>
+          <a:p>
+            <a:pPr indent="0" marL="0">
+              <a:buNone/>
+            </a:pPr>
+            <a:r>
+              <a:rPr lang="en-US" sz="1140" dirty="0">
                 <a:solidFill>
                   <a:srgbClr val="17364A"/>
                 </a:solidFill>
@@ -7274,14 +7274,14 @@
               </a:rPr>
               <a:t>Security should be designed as part of the workflow.</a:t>
             </a:r>
-            <a:endParaRPr lang="en-US" sz="1220" dirty="0"/>
-          </a:p>
-          <a:p>
-            <a:pPr indent="0" marL="0">
-              <a:buNone/>
-            </a:pPr>
-            <a:r>
-              <a:rPr lang="en-US" sz="1220" dirty="0">
+            <a:endParaRPr lang="en-US" sz="1140" dirty="0"/>
+          </a:p>
+          <a:p>
+            <a:pPr indent="0" marL="0">
+              <a:buNone/>
+            </a:pPr>
+            <a:r>
+              <a:rPr lang="en-US" sz="1140" dirty="0">
                 <a:solidFill>
                   <a:srgbClr val="17364A"/>
                 </a:solidFill>
@@ -7289,9 +7289,9 @@
                 <a:ea typeface="Aptos" pitchFamily="34" charset="-122"/>
                 <a:cs typeface="Aptos" pitchFamily="34" charset="-120"/>
               </a:rPr>
-              <a:t>Public health users should know which tools are approved, what.</a:t>
-            </a:r>
-            <a:endParaRPr lang="en-US" sz="1220" dirty="0"/>
+              <a:t>Public health users should know which tools are.</a:t>
+            </a:r>
+            <a:endParaRPr lang="en-US" sz="1140" dirty="0"/>
           </a:p>
         </p:txBody>
       </p:sp>
@@ -7303,12 +7303,12 @@
         </p:nvSpPr>
         <p:spPr>
           <a:xfrm>
-            <a:off x="7635240" y="4343400"/>
-            <a:ext cx="3474720" cy="1255471"/>
+            <a:off x="7543800" y="4389120"/>
+            <a:ext cx="3611880" cy="1261872"/>
           </a:xfrm>
           <a:prstGeom prst="roundRect">
             <a:avLst>
-              <a:gd name="adj" fmla="val 8740"/>
+              <a:gd name="adj" fmla="val 8696"/>
             </a:avLst>
           </a:prstGeom>
           <a:solidFill>
@@ -7330,8 +7330,8 @@
         </p:nvSpPr>
         <p:spPr>
           <a:xfrm>
-            <a:off x="7799832" y="4489704"/>
-            <a:ext cx="3145536" cy="256032"/>
+            <a:off x="7708392" y="4517136"/>
+            <a:ext cx="3282696" cy="228600"/>
           </a:xfrm>
           <a:prstGeom prst="rect">
             <a:avLst/>
@@ -7347,7 +7347,7 @@
               <a:buNone/>
             </a:pPr>
             <a:r>
-              <a:rPr lang="en-US" sz="1300" b="1" dirty="0">
+              <a:rPr lang="en-US" sz="1220" b="1" dirty="0">
                 <a:solidFill>
                   <a:srgbClr val="0068B7"/>
                 </a:solidFill>
@@ -7357,7 +7357,7 @@
               </a:rPr>
               <a:t>Safeguard to plan</a:t>
             </a:r>
-            <a:endParaRPr lang="en-US" sz="1300" dirty="0"/>
+            <a:endParaRPr lang="en-US" sz="1220" dirty="0"/>
           </a:p>
         </p:txBody>
       </p:sp>
@@ -7369,8 +7369,8 @@
         </p:nvSpPr>
         <p:spPr>
           <a:xfrm>
-            <a:off x="7799832" y="4818888"/>
-            <a:ext cx="3145536" cy="688543"/>
+            <a:off x="7708392" y="4828032"/>
+            <a:ext cx="3282696" cy="749808"/>
           </a:xfrm>
           <a:prstGeom prst="rect">
             <a:avLst/>
@@ -7388,7 +7388,7 @@
               <a:buNone/>
             </a:pPr>
             <a:r>
-              <a:rPr lang="en-US" sz="1320" dirty="0">
+              <a:rPr lang="en-US" sz="1220" dirty="0">
                 <a:solidFill>
                   <a:srgbClr val="17364A"/>
                 </a:solidFill>
@@ -7396,9 +7396,9 @@
                 <a:ea typeface="Aptos" pitchFamily="34" charset="-122"/>
                 <a:cs typeface="Aptos" pitchFamily="34" charset="-120"/>
               </a:rPr>
-              <a:t>Identify what could go wrong, who could be affected, what safeguards are needed, and what evidence should be reviewed before use.</a:t>
-            </a:r>
-            <a:endParaRPr lang="en-US" sz="1320" dirty="0"/>
+              <a:t>Identify what could go wrong, who could be affected, what safeguards are needed,.</a:t>
+            </a:r>
+            <a:endParaRPr lang="en-US" sz="1220" dirty="0"/>
           </a:p>
         </p:txBody>
       </p:sp>
@@ -7689,8 +7689,8 @@
         </p:nvSpPr>
         <p:spPr>
           <a:xfrm>
-            <a:off x="868680" y="1508760"/>
-            <a:ext cx="6309360" cy="4160520"/>
+            <a:off x="822960" y="1463040"/>
+            <a:ext cx="6565392" cy="4343400"/>
           </a:xfrm>
           <a:prstGeom prst="rect">
             <a:avLst/>
@@ -7708,7 +7708,7 @@
               <a:buNone/>
             </a:pPr>
             <a:r>
-              <a:rPr lang="en-US" sz="2100" dirty="0">
+              <a:rPr lang="en-US" sz="1920" dirty="0">
                 <a:solidFill>
                   <a:srgbClr val="003A63"/>
                 </a:solidFill>
@@ -7718,14 +7718,14 @@
               </a:rPr>
               <a:t>• What sensitive data or systems would the AI workflow touch?</a:t>
             </a:r>
-            <a:endParaRPr lang="en-US" sz="2100" dirty="0"/>
-          </a:p>
-          <a:p>
-            <a:pPr indent="0" marL="0">
-              <a:buNone/>
-            </a:pPr>
-            <a:r>
-              <a:rPr lang="en-US" sz="2100" dirty="0">
+            <a:endParaRPr lang="en-US" sz="1920" dirty="0"/>
+          </a:p>
+          <a:p>
+            <a:pPr indent="0" marL="0">
+              <a:buNone/>
+            </a:pPr>
+            <a:r>
+              <a:rPr lang="en-US" sz="1920" dirty="0">
                 <a:solidFill>
                   <a:srgbClr val="003A63"/>
                 </a:solidFill>
@@ -7735,14 +7735,14 @@
               </a:rPr>
               <a:t>• Could the AI tool access more information or actions than necessary?</a:t>
             </a:r>
-            <a:endParaRPr lang="en-US" sz="2100" dirty="0"/>
-          </a:p>
-          <a:p>
-            <a:pPr indent="0" marL="0">
-              <a:buNone/>
-            </a:pPr>
-            <a:r>
-              <a:rPr lang="en-US" sz="2100" dirty="0">
+            <a:endParaRPr lang="en-US" sz="1920" dirty="0"/>
+          </a:p>
+          <a:p>
+            <a:pPr indent="0" marL="0">
+              <a:buNone/>
+            </a:pPr>
+            <a:r>
+              <a:rPr lang="en-US" sz="1920" dirty="0">
                 <a:solidFill>
                   <a:srgbClr val="003A63"/>
                 </a:solidFill>
@@ -7752,7 +7752,7 @@
               </a:rPr>
               <a:t>• What untrusted content might the tool process?</a:t>
             </a:r>
-            <a:endParaRPr lang="en-US" sz="2100" dirty="0"/>
+            <a:endParaRPr lang="en-US" sz="1920" dirty="0"/>
           </a:p>
         </p:txBody>
       </p:sp>
@@ -7764,12 +7764,12 @@
         </p:nvSpPr>
         <p:spPr>
           <a:xfrm>
-            <a:off x="7635240" y="1325880"/>
-            <a:ext cx="3474720" cy="1207008"/>
+            <a:off x="7543800" y="1325880"/>
+            <a:ext cx="3611880" cy="1261872"/>
           </a:xfrm>
           <a:prstGeom prst="roundRect">
             <a:avLst>
-              <a:gd name="adj" fmla="val 9091"/>
+              <a:gd name="adj" fmla="val 8696"/>
             </a:avLst>
           </a:prstGeom>
           <a:solidFill>
@@ -7791,8 +7791,8 @@
         </p:nvSpPr>
         <p:spPr>
           <a:xfrm>
-            <a:off x="7799832" y="1472184"/>
-            <a:ext cx="3145536" cy="256032"/>
+            <a:off x="7708392" y="1453896"/>
+            <a:ext cx="3282696" cy="228600"/>
           </a:xfrm>
           <a:prstGeom prst="rect">
             <a:avLst/>
@@ -7808,7 +7808,7 @@
               <a:buNone/>
             </a:pPr>
             <a:r>
-              <a:rPr lang="en-US" sz="1300" b="1" dirty="0">
+              <a:rPr lang="en-US" sz="1220" b="1" dirty="0">
                 <a:solidFill>
                   <a:srgbClr val="0068B7"/>
                 </a:solidFill>
@@ -7818,7 +7818,7 @@
               </a:rPr>
               <a:t>Risk check</a:t>
             </a:r>
-            <a:endParaRPr lang="en-US" sz="1300" dirty="0"/>
+            <a:endParaRPr lang="en-US" sz="1220" dirty="0"/>
           </a:p>
         </p:txBody>
       </p:sp>
@@ -7830,8 +7830,8 @@
         </p:nvSpPr>
         <p:spPr>
           <a:xfrm>
-            <a:off x="7799832" y="1801368"/>
-            <a:ext cx="3145536" cy="640080"/>
+            <a:off x="7708392" y="1764792"/>
+            <a:ext cx="3282696" cy="749808"/>
           </a:xfrm>
           <a:prstGeom prst="rect">
             <a:avLst/>
@@ -7849,7 +7849,7 @@
               <a:buNone/>
             </a:pPr>
             <a:r>
-              <a:rPr lang="en-US" sz="1320" dirty="0">
+              <a:rPr lang="en-US" sz="1220" dirty="0">
                 <a:solidFill>
                   <a:srgbClr val="17364A"/>
                 </a:solidFill>
@@ -7859,7 +7859,7 @@
               </a:rPr>
               <a:t>What sensitive data or systems would the AI workflow touch?</a:t>
             </a:r>
-            <a:endParaRPr lang="en-US" sz="1320" dirty="0"/>
+            <a:endParaRPr lang="en-US" sz="1220" dirty="0"/>
           </a:p>
         </p:txBody>
       </p:sp>
@@ -7871,12 +7871,12 @@
         </p:nvSpPr>
         <p:spPr>
           <a:xfrm>
-            <a:off x="7635240" y="2670048"/>
-            <a:ext cx="3474720" cy="1536192"/>
+            <a:off x="7543800" y="2724912"/>
+            <a:ext cx="3611880" cy="1527048"/>
           </a:xfrm>
           <a:prstGeom prst="roundRect">
             <a:avLst>
-              <a:gd name="adj" fmla="val 7143"/>
+              <a:gd name="adj" fmla="val 7186"/>
             </a:avLst>
           </a:prstGeom>
           <a:solidFill>
@@ -7898,8 +7898,8 @@
         </p:nvSpPr>
         <p:spPr>
           <a:xfrm>
-            <a:off x="7799832" y="2816352"/>
-            <a:ext cx="3145536" cy="256032"/>
+            <a:off x="7708392" y="2852928"/>
+            <a:ext cx="3282696" cy="228600"/>
           </a:xfrm>
           <a:prstGeom prst="rect">
             <a:avLst/>
@@ -7915,7 +7915,7 @@
               <a:buNone/>
             </a:pPr>
             <a:r>
-              <a:rPr lang="en-US" sz="1300" b="1" dirty="0">
+              <a:rPr lang="en-US" sz="1220" b="1" dirty="0">
                 <a:solidFill>
                   <a:srgbClr val="0068B7"/>
                 </a:solidFill>
@@ -7925,7 +7925,7 @@
               </a:rPr>
               <a:t>Concept checkpoints</a:t>
             </a:r>
-            <a:endParaRPr lang="en-US" sz="1300" dirty="0"/>
+            <a:endParaRPr lang="en-US" sz="1220" dirty="0"/>
           </a:p>
         </p:txBody>
       </p:sp>
@@ -7937,8 +7937,8 @@
         </p:nvSpPr>
         <p:spPr>
           <a:xfrm>
-            <a:off x="7818120" y="3182112"/>
-            <a:ext cx="3090672" cy="877824"/>
+            <a:off x="7726680" y="3182112"/>
+            <a:ext cx="3227832" cy="960120"/>
           </a:xfrm>
           <a:prstGeom prst="rect">
             <a:avLst/>
@@ -7956,7 +7956,7 @@
               <a:buNone/>
             </a:pPr>
             <a:r>
-              <a:rPr lang="en-US" sz="1220" dirty="0">
+              <a:rPr lang="en-US" sz="1140" dirty="0">
                 <a:solidFill>
                   <a:srgbClr val="17364A"/>
                 </a:solidFill>
@@ -7964,16 +7964,16 @@
                 <a:ea typeface="Aptos" pitchFamily="34" charset="-122"/>
                 <a:cs typeface="Aptos" pitchFamily="34" charset="-120"/>
               </a:rPr>
-              <a:t>What sensitive data or systems would the AI workflow touch?</a:t>
-            </a:r>
-            <a:endParaRPr lang="en-US" sz="1220" dirty="0"/>
-          </a:p>
-          <a:p>
-            <a:pPr indent="0" marL="0">
-              <a:buNone/>
-            </a:pPr>
-            <a:r>
-              <a:rPr lang="en-US" sz="1220" dirty="0">
+              <a:t>What sensitive data or systems would the AI.</a:t>
+            </a:r>
+            <a:endParaRPr lang="en-US" sz="1140" dirty="0"/>
+          </a:p>
+          <a:p>
+            <a:pPr indent="0" marL="0">
+              <a:buNone/>
+            </a:pPr>
+            <a:r>
+              <a:rPr lang="en-US" sz="1140" dirty="0">
                 <a:solidFill>
                   <a:srgbClr val="17364A"/>
                 </a:solidFill>
@@ -7981,16 +7981,16 @@
                 <a:ea typeface="Aptos" pitchFamily="34" charset="-122"/>
                 <a:cs typeface="Aptos" pitchFamily="34" charset="-120"/>
               </a:rPr>
-              <a:t>Could the AI tool access more information or actions than necessary?</a:t>
-            </a:r>
-            <a:endParaRPr lang="en-US" sz="1220" dirty="0"/>
-          </a:p>
-          <a:p>
-            <a:pPr indent="0" marL="0">
-              <a:buNone/>
-            </a:pPr>
-            <a:r>
-              <a:rPr lang="en-US" sz="1220" dirty="0">
+              <a:t>Could the AI tool access more information or.</a:t>
+            </a:r>
+            <a:endParaRPr lang="en-US" sz="1140" dirty="0"/>
+          </a:p>
+          <a:p>
+            <a:pPr indent="0" marL="0">
+              <a:buNone/>
+            </a:pPr>
+            <a:r>
+              <a:rPr lang="en-US" sz="1140" dirty="0">
                 <a:solidFill>
                   <a:srgbClr val="17364A"/>
                 </a:solidFill>
@@ -8000,7 +8000,7 @@
               </a:rPr>
               <a:t>What untrusted content might the tool process?</a:t>
             </a:r>
-            <a:endParaRPr lang="en-US" sz="1220" dirty="0"/>
+            <a:endParaRPr lang="en-US" sz="1140" dirty="0"/>
           </a:p>
         </p:txBody>
       </p:sp>
@@ -8012,12 +8012,12 @@
         </p:nvSpPr>
         <p:spPr>
           <a:xfrm>
-            <a:off x="7635240" y="4343400"/>
-            <a:ext cx="3474720" cy="1255471"/>
+            <a:off x="7543800" y="4389120"/>
+            <a:ext cx="3611880" cy="1261872"/>
           </a:xfrm>
           <a:prstGeom prst="roundRect">
             <a:avLst>
-              <a:gd name="adj" fmla="val 8740"/>
+              <a:gd name="adj" fmla="val 8696"/>
             </a:avLst>
           </a:prstGeom>
           <a:solidFill>
@@ -8039,8 +8039,8 @@
         </p:nvSpPr>
         <p:spPr>
           <a:xfrm>
-            <a:off x="7799832" y="4489704"/>
-            <a:ext cx="3145536" cy="256032"/>
+            <a:off x="7708392" y="4517136"/>
+            <a:ext cx="3282696" cy="228600"/>
           </a:xfrm>
           <a:prstGeom prst="rect">
             <a:avLst/>
@@ -8056,7 +8056,7 @@
               <a:buNone/>
             </a:pPr>
             <a:r>
-              <a:rPr lang="en-US" sz="1300" b="1" dirty="0">
+              <a:rPr lang="en-US" sz="1220" b="1" dirty="0">
                 <a:solidFill>
                   <a:srgbClr val="0068B7"/>
                 </a:solidFill>
@@ -8066,7 +8066,7 @@
               </a:rPr>
               <a:t>Safeguard to plan</a:t>
             </a:r>
-            <a:endParaRPr lang="en-US" sz="1300" dirty="0"/>
+            <a:endParaRPr lang="en-US" sz="1220" dirty="0"/>
           </a:p>
         </p:txBody>
       </p:sp>
@@ -8078,8 +8078,8 @@
         </p:nvSpPr>
         <p:spPr>
           <a:xfrm>
-            <a:off x="7799832" y="4818888"/>
-            <a:ext cx="3145536" cy="688543"/>
+            <a:off x="7708392" y="4828032"/>
+            <a:ext cx="3282696" cy="749808"/>
           </a:xfrm>
           <a:prstGeom prst="rect">
             <a:avLst/>
@@ -8097,7 +8097,7 @@
               <a:buNone/>
             </a:pPr>
             <a:r>
-              <a:rPr lang="en-US" sz="1320" dirty="0">
+              <a:rPr lang="en-US" sz="1220" dirty="0">
                 <a:solidFill>
                   <a:srgbClr val="17364A"/>
                 </a:solidFill>
@@ -8105,9 +8105,9 @@
                 <a:ea typeface="Aptos" pitchFamily="34" charset="-122"/>
                 <a:cs typeface="Aptos" pitchFamily="34" charset="-120"/>
               </a:rPr>
-              <a:t>Identify what could go wrong, who could be affected, what safeguards are needed, and what evidence should be reviewed before use.</a:t>
-            </a:r>
-            <a:endParaRPr lang="en-US" sz="1320" dirty="0"/>
+              <a:t>Identify what could go wrong, who could be affected, what safeguards are needed,.</a:t>
+            </a:r>
+            <a:endParaRPr lang="en-US" sz="1220" dirty="0"/>
           </a:p>
         </p:txBody>
       </p:sp>
@@ -8398,8 +8398,8 @@
         </p:nvSpPr>
         <p:spPr>
           <a:xfrm>
-            <a:off x="868680" y="1508760"/>
-            <a:ext cx="6309360" cy="4160520"/>
+            <a:off x="822960" y="1463040"/>
+            <a:ext cx="6565392" cy="4343400"/>
           </a:xfrm>
           <a:prstGeom prst="rect">
             <a:avLst/>
@@ -8417,7 +8417,7 @@
               <a:buNone/>
             </a:pPr>
             <a:r>
-              <a:rPr lang="en-US" sz="2100" dirty="0">
+              <a:rPr lang="en-US" sz="1920" dirty="0">
                 <a:solidFill>
                   <a:srgbClr val="003A63"/>
                 </a:solidFill>
@@ -8427,14 +8427,14 @@
               </a:rPr>
               <a:t>• How will prompt injection attempts or unsafe outputs be detected?</a:t>
             </a:r>
-            <a:endParaRPr lang="en-US" sz="2100" dirty="0"/>
-          </a:p>
-          <a:p>
-            <a:pPr indent="0" marL="0">
-              <a:buNone/>
-            </a:pPr>
-            <a:r>
-              <a:rPr lang="en-US" sz="2100" dirty="0">
+            <a:endParaRPr lang="en-US" sz="1920" dirty="0"/>
+          </a:p>
+          <a:p>
+            <a:pPr indent="0" marL="0">
+              <a:buNone/>
+            </a:pPr>
+            <a:r>
+              <a:rPr lang="en-US" sz="1920" dirty="0">
                 <a:solidFill>
                   <a:srgbClr val="003A63"/>
                 </a:solidFill>
@@ -8444,7 +8444,7 @@
               </a:rPr>
               <a:t>• What logs and incident response steps are required?</a:t>
             </a:r>
-            <a:endParaRPr lang="en-US" sz="2100" dirty="0"/>
+            <a:endParaRPr lang="en-US" sz="1920" dirty="0"/>
           </a:p>
         </p:txBody>
       </p:sp>
@@ -8456,12 +8456,12 @@
         </p:nvSpPr>
         <p:spPr>
           <a:xfrm>
-            <a:off x="7635240" y="1325880"/>
-            <a:ext cx="3474720" cy="1207008"/>
+            <a:off x="7543800" y="1325880"/>
+            <a:ext cx="3611880" cy="1261872"/>
           </a:xfrm>
           <a:prstGeom prst="roundRect">
             <a:avLst>
-              <a:gd name="adj" fmla="val 9091"/>
+              <a:gd name="adj" fmla="val 8696"/>
             </a:avLst>
           </a:prstGeom>
           <a:solidFill>
@@ -8483,8 +8483,8 @@
         </p:nvSpPr>
         <p:spPr>
           <a:xfrm>
-            <a:off x="7799832" y="1472184"/>
-            <a:ext cx="3145536" cy="256032"/>
+            <a:off x="7708392" y="1453896"/>
+            <a:ext cx="3282696" cy="228600"/>
           </a:xfrm>
           <a:prstGeom prst="rect">
             <a:avLst/>
@@ -8500,7 +8500,7 @@
               <a:buNone/>
             </a:pPr>
             <a:r>
-              <a:rPr lang="en-US" sz="1300" b="1" dirty="0">
+              <a:rPr lang="en-US" sz="1220" b="1" dirty="0">
                 <a:solidFill>
                   <a:srgbClr val="0068B7"/>
                 </a:solidFill>
@@ -8510,7 +8510,7 @@
               </a:rPr>
               <a:t>Risk check</a:t>
             </a:r>
-            <a:endParaRPr lang="en-US" sz="1300" dirty="0"/>
+            <a:endParaRPr lang="en-US" sz="1220" dirty="0"/>
           </a:p>
         </p:txBody>
       </p:sp>
@@ -8522,8 +8522,8 @@
         </p:nvSpPr>
         <p:spPr>
           <a:xfrm>
-            <a:off x="7799832" y="1801368"/>
-            <a:ext cx="3145536" cy="640080"/>
+            <a:off x="7708392" y="1764792"/>
+            <a:ext cx="3282696" cy="749808"/>
           </a:xfrm>
           <a:prstGeom prst="rect">
             <a:avLst/>
@@ -8541,7 +8541,7 @@
               <a:buNone/>
             </a:pPr>
             <a:r>
-              <a:rPr lang="en-US" sz="1320" dirty="0">
+              <a:rPr lang="en-US" sz="1220" dirty="0">
                 <a:solidFill>
                   <a:srgbClr val="17364A"/>
                 </a:solidFill>
@@ -8551,7 +8551,7 @@
               </a:rPr>
               <a:t>How will prompt injection attempts or unsafe outputs be detected?</a:t>
             </a:r>
-            <a:endParaRPr lang="en-US" sz="1320" dirty="0"/>
+            <a:endParaRPr lang="en-US" sz="1220" dirty="0"/>
           </a:p>
         </p:txBody>
       </p:sp>
@@ -8563,12 +8563,12 @@
         </p:nvSpPr>
         <p:spPr>
           <a:xfrm>
-            <a:off x="7635240" y="2670048"/>
-            <a:ext cx="3474720" cy="1536192"/>
+            <a:off x="7543800" y="2724912"/>
+            <a:ext cx="3611880" cy="1527048"/>
           </a:xfrm>
           <a:prstGeom prst="roundRect">
             <a:avLst>
-              <a:gd name="adj" fmla="val 7143"/>
+              <a:gd name="adj" fmla="val 7186"/>
             </a:avLst>
           </a:prstGeom>
           <a:solidFill>
@@ -8590,8 +8590,8 @@
         </p:nvSpPr>
         <p:spPr>
           <a:xfrm>
-            <a:off x="7799832" y="2816352"/>
-            <a:ext cx="3145536" cy="256032"/>
+            <a:off x="7708392" y="2852928"/>
+            <a:ext cx="3282696" cy="228600"/>
           </a:xfrm>
           <a:prstGeom prst="rect">
             <a:avLst/>
@@ -8607,7 +8607,7 @@
               <a:buNone/>
             </a:pPr>
             <a:r>
-              <a:rPr lang="en-US" sz="1300" b="1" dirty="0">
+              <a:rPr lang="en-US" sz="1220" b="1" dirty="0">
                 <a:solidFill>
                   <a:srgbClr val="0068B7"/>
                 </a:solidFill>
@@ -8617,7 +8617,7 @@
               </a:rPr>
               <a:t>Concept checkpoints</a:t>
             </a:r>
-            <a:endParaRPr lang="en-US" sz="1300" dirty="0"/>
+            <a:endParaRPr lang="en-US" sz="1220" dirty="0"/>
           </a:p>
         </p:txBody>
       </p:sp>
@@ -8629,8 +8629,8 @@
         </p:nvSpPr>
         <p:spPr>
           <a:xfrm>
-            <a:off x="7818120" y="3182112"/>
-            <a:ext cx="3090672" cy="877824"/>
+            <a:off x="7726680" y="3182112"/>
+            <a:ext cx="3227832" cy="960120"/>
           </a:xfrm>
           <a:prstGeom prst="rect">
             <a:avLst/>
@@ -8648,7 +8648,7 @@
               <a:buNone/>
             </a:pPr>
             <a:r>
-              <a:rPr lang="en-US" sz="1220" dirty="0">
+              <a:rPr lang="en-US" sz="1140" dirty="0">
                 <a:solidFill>
                   <a:srgbClr val="17364A"/>
                 </a:solidFill>
@@ -8656,16 +8656,16 @@
                 <a:ea typeface="Aptos" pitchFamily="34" charset="-122"/>
                 <a:cs typeface="Aptos" pitchFamily="34" charset="-120"/>
               </a:rPr>
-              <a:t>How will prompt injection attempts or unsafe outputs be detected?</a:t>
-            </a:r>
-            <a:endParaRPr lang="en-US" sz="1220" dirty="0"/>
-          </a:p>
-          <a:p>
-            <a:pPr indent="0" marL="0">
-              <a:buNone/>
-            </a:pPr>
-            <a:r>
-              <a:rPr lang="en-US" sz="1220" dirty="0">
+              <a:t>How will prompt injection attempts or unsafe.</a:t>
+            </a:r>
+            <a:endParaRPr lang="en-US" sz="1140" dirty="0"/>
+          </a:p>
+          <a:p>
+            <a:pPr indent="0" marL="0">
+              <a:buNone/>
+            </a:pPr>
+            <a:r>
+              <a:rPr lang="en-US" sz="1140" dirty="0">
                 <a:solidFill>
                   <a:srgbClr val="17364A"/>
                 </a:solidFill>
@@ -8675,7 +8675,7 @@
               </a:rPr>
               <a:t>What logs and incident response steps are required?</a:t>
             </a:r>
-            <a:endParaRPr lang="en-US" sz="1220" dirty="0"/>
+            <a:endParaRPr lang="en-US" sz="1140" dirty="0"/>
           </a:p>
         </p:txBody>
       </p:sp>
@@ -8687,12 +8687,12 @@
         </p:nvSpPr>
         <p:spPr>
           <a:xfrm>
-            <a:off x="7635240" y="4343400"/>
-            <a:ext cx="3474720" cy="1255471"/>
+            <a:off x="7543800" y="4389120"/>
+            <a:ext cx="3611880" cy="1261872"/>
           </a:xfrm>
           <a:prstGeom prst="roundRect">
             <a:avLst>
-              <a:gd name="adj" fmla="val 8740"/>
+              <a:gd name="adj" fmla="val 8696"/>
             </a:avLst>
           </a:prstGeom>
           <a:solidFill>
@@ -8714,8 +8714,8 @@
         </p:nvSpPr>
         <p:spPr>
           <a:xfrm>
-            <a:off x="7799832" y="4489704"/>
-            <a:ext cx="3145536" cy="256032"/>
+            <a:off x="7708392" y="4517136"/>
+            <a:ext cx="3282696" cy="228600"/>
           </a:xfrm>
           <a:prstGeom prst="rect">
             <a:avLst/>
@@ -8731,7 +8731,7 @@
               <a:buNone/>
             </a:pPr>
             <a:r>
-              <a:rPr lang="en-US" sz="1300" b="1" dirty="0">
+              <a:rPr lang="en-US" sz="1220" b="1" dirty="0">
                 <a:solidFill>
                   <a:srgbClr val="0068B7"/>
                 </a:solidFill>
@@ -8741,7 +8741,7 @@
               </a:rPr>
               <a:t>Safeguard to plan</a:t>
             </a:r>
-            <a:endParaRPr lang="en-US" sz="1300" dirty="0"/>
+            <a:endParaRPr lang="en-US" sz="1220" dirty="0"/>
           </a:p>
         </p:txBody>
       </p:sp>
@@ -8753,8 +8753,8 @@
         </p:nvSpPr>
         <p:spPr>
           <a:xfrm>
-            <a:off x="7799832" y="4818888"/>
-            <a:ext cx="3145536" cy="688543"/>
+            <a:off x="7708392" y="4828032"/>
+            <a:ext cx="3282696" cy="749808"/>
           </a:xfrm>
           <a:prstGeom prst="rect">
             <a:avLst/>
@@ -8772,7 +8772,7 @@
               <a:buNone/>
             </a:pPr>
             <a:r>
-              <a:rPr lang="en-US" sz="1320" dirty="0">
+              <a:rPr lang="en-US" sz="1220" dirty="0">
                 <a:solidFill>
                   <a:srgbClr val="17364A"/>
                 </a:solidFill>
@@ -8780,9 +8780,9 @@
                 <a:ea typeface="Aptos" pitchFamily="34" charset="-122"/>
                 <a:cs typeface="Aptos" pitchFamily="34" charset="-120"/>
               </a:rPr>
-              <a:t>Identify what could go wrong, who could be affected, what safeguards are needed, and what evidence should be reviewed before use.</a:t>
-            </a:r>
-            <a:endParaRPr lang="en-US" sz="1320" dirty="0"/>
+              <a:t>Identify what could go wrong, who could be affected, what safeguards are needed,.</a:t>
+            </a:r>
+            <a:endParaRPr lang="en-US" sz="1220" dirty="0"/>
           </a:p>
         </p:txBody>
       </p:sp>
@@ -9073,8 +9073,8 @@
         </p:nvSpPr>
         <p:spPr>
           <a:xfrm>
-            <a:off x="868680" y="1508760"/>
-            <a:ext cx="6309360" cy="4160520"/>
+            <a:off x="822960" y="1463040"/>
+            <a:ext cx="6565392" cy="4343400"/>
           </a:xfrm>
           <a:prstGeom prst="rect">
             <a:avLst/>
@@ -9092,7 +9092,7 @@
               <a:buNone/>
             </a:pPr>
             <a:r>
-              <a:rPr lang="en-US" sz="2100" dirty="0">
+              <a:rPr lang="en-US" sz="1920" dirty="0">
                 <a:solidFill>
                   <a:srgbClr val="003A63"/>
                 </a:solidFill>
@@ -9102,14 +9102,14 @@
               </a:rPr>
               <a:t>• Create a secure AI workflow checklist for one public health use case.</a:t>
             </a:r>
-            <a:endParaRPr lang="en-US" sz="2100" dirty="0"/>
-          </a:p>
-          <a:p>
-            <a:pPr indent="0" marL="0">
-              <a:buNone/>
-            </a:pPr>
-            <a:r>
-              <a:rPr lang="en-US" sz="2100" dirty="0">
+            <a:endParaRPr lang="en-US" sz="1920" dirty="0"/>
+          </a:p>
+          <a:p>
+            <a:pPr indent="0" marL="0">
+              <a:buNone/>
+            </a:pPr>
+            <a:r>
+              <a:rPr lang="en-US" sz="1920" dirty="0">
                 <a:solidFill>
                   <a:srgbClr val="003A63"/>
                 </a:solidFill>
@@ -9117,16 +9117,16 @@
                 <a:ea typeface="Aptos" pitchFamily="34" charset="-122"/>
                 <a:cs typeface="Aptos" pitchFamily="34" charset="-120"/>
               </a:rPr>
-              <a:t>• Include data sensitivity, approved tools, access controls, least-privilege review, prompt.</a:t>
-            </a:r>
-            <a:endParaRPr lang="en-US" sz="2100" dirty="0"/>
-          </a:p>
-          <a:p>
-            <a:pPr indent="0" marL="0">
-              <a:buNone/>
-            </a:pPr>
-            <a:r>
-              <a:rPr lang="en-US" sz="2100" dirty="0">
+              <a:t>• Include data sensitivity, approved tools, access controls, least-privilege.</a:t>
+            </a:r>
+            <a:endParaRPr lang="en-US" sz="1920" dirty="0"/>
+          </a:p>
+          <a:p>
+            <a:pPr indent="0" marL="0">
+              <a:buNone/>
+            </a:pPr>
+            <a:r>
+              <a:rPr lang="en-US" sz="1920" dirty="0">
                 <a:solidFill>
                   <a:srgbClr val="003A63"/>
                 </a:solidFill>
@@ -9134,9 +9134,9 @@
                 <a:ea typeface="Aptos" pitchFamily="34" charset="-122"/>
                 <a:cs typeface="Aptos" pitchFamily="34" charset="-120"/>
               </a:rPr>
-              <a:t>• The checklist should identify which controls must be in place before pilot testing and which.</a:t>
-            </a:r>
-            <a:endParaRPr lang="en-US" sz="2100" dirty="0"/>
+              <a:t>• The checklist should identify which controls must be in place before pilot.</a:t>
+            </a:r>
+            <a:endParaRPr lang="en-US" sz="1920" dirty="0"/>
           </a:p>
         </p:txBody>
       </p:sp>
@@ -9148,12 +9148,12 @@
         </p:nvSpPr>
         <p:spPr>
           <a:xfrm>
-            <a:off x="7635240" y="1325880"/>
-            <a:ext cx="3474720" cy="1207008"/>
+            <a:off x="7543800" y="1325880"/>
+            <a:ext cx="3611880" cy="1261872"/>
           </a:xfrm>
           <a:prstGeom prst="roundRect">
             <a:avLst>
-              <a:gd name="adj" fmla="val 9091"/>
+              <a:gd name="adj" fmla="val 8696"/>
             </a:avLst>
           </a:prstGeom>
           <a:solidFill>
@@ -9175,8 +9175,8 @@
         </p:nvSpPr>
         <p:spPr>
           <a:xfrm>
-            <a:off x="7799832" y="1472184"/>
-            <a:ext cx="3145536" cy="256032"/>
+            <a:off x="7708392" y="1453896"/>
+            <a:ext cx="3282696" cy="228600"/>
           </a:xfrm>
           <a:prstGeom prst="rect">
             <a:avLst/>
@@ -9192,7 +9192,7 @@
               <a:buNone/>
             </a:pPr>
             <a:r>
-              <a:rPr lang="en-US" sz="1300" b="1" dirty="0">
+              <a:rPr lang="en-US" sz="1220" b="1" dirty="0">
                 <a:solidFill>
                   <a:srgbClr val="0068B7"/>
                 </a:solidFill>
@@ -9202,7 +9202,7 @@
               </a:rPr>
               <a:t>Risk check</a:t>
             </a:r>
-            <a:endParaRPr lang="en-US" sz="1300" dirty="0"/>
+            <a:endParaRPr lang="en-US" sz="1220" dirty="0"/>
           </a:p>
         </p:txBody>
       </p:sp>
@@ -9214,8 +9214,8 @@
         </p:nvSpPr>
         <p:spPr>
           <a:xfrm>
-            <a:off x="7799832" y="1801368"/>
-            <a:ext cx="3145536" cy="640080"/>
+            <a:off x="7708392" y="1764792"/>
+            <a:ext cx="3282696" cy="749808"/>
           </a:xfrm>
           <a:prstGeom prst="rect">
             <a:avLst/>
@@ -9233,7 +9233,7 @@
               <a:buNone/>
             </a:pPr>
             <a:r>
-              <a:rPr lang="en-US" sz="1320" dirty="0">
+              <a:rPr lang="en-US" sz="1220" dirty="0">
                 <a:solidFill>
                   <a:srgbClr val="17364A"/>
                 </a:solidFill>
@@ -9243,7 +9243,7 @@
               </a:rPr>
               <a:t>Create a secure AI workflow checklist for one public health use case.</a:t>
             </a:r>
-            <a:endParaRPr lang="en-US" sz="1320" dirty="0"/>
+            <a:endParaRPr lang="en-US" sz="1220" dirty="0"/>
           </a:p>
         </p:txBody>
       </p:sp>
@@ -9255,12 +9255,12 @@
         </p:nvSpPr>
         <p:spPr>
           <a:xfrm>
-            <a:off x="7635240" y="2670048"/>
-            <a:ext cx="3474720" cy="1377086"/>
+            <a:off x="7543800" y="2724912"/>
+            <a:ext cx="3611880" cy="1527048"/>
           </a:xfrm>
           <a:prstGeom prst="roundRect">
             <a:avLst>
-              <a:gd name="adj" fmla="val 7968"/>
+              <a:gd name="adj" fmla="val 7186"/>
             </a:avLst>
           </a:prstGeom>
           <a:solidFill>
@@ -9282,8 +9282,8 @@
         </p:nvSpPr>
         <p:spPr>
           <a:xfrm>
-            <a:off x="7799832" y="2816352"/>
-            <a:ext cx="3145536" cy="256032"/>
+            <a:off x="7708392" y="2852928"/>
+            <a:ext cx="3282696" cy="228600"/>
           </a:xfrm>
           <a:prstGeom prst="rect">
             <a:avLst/>
@@ -9299,7 +9299,7 @@
               <a:buNone/>
             </a:pPr>
             <a:r>
-              <a:rPr lang="en-US" sz="1300" b="1" dirty="0">
+              <a:rPr lang="en-US" sz="1220" b="1" dirty="0">
                 <a:solidFill>
                   <a:srgbClr val="0068B7"/>
                 </a:solidFill>
@@ -9309,7 +9309,7 @@
               </a:rPr>
               <a:t>Concept checkpoints</a:t>
             </a:r>
-            <a:endParaRPr lang="en-US" sz="1300" dirty="0"/>
+            <a:endParaRPr lang="en-US" sz="1220" dirty="0"/>
           </a:p>
         </p:txBody>
       </p:sp>
@@ -9321,8 +9321,8 @@
         </p:nvSpPr>
         <p:spPr>
           <a:xfrm>
-            <a:off x="7818120" y="3182112"/>
-            <a:ext cx="3090672" cy="718718"/>
+            <a:off x="7726680" y="3182112"/>
+            <a:ext cx="3227832" cy="960120"/>
           </a:xfrm>
           <a:prstGeom prst="rect">
             <a:avLst/>
@@ -9340,7 +9340,7 @@
               <a:buNone/>
             </a:pPr>
             <a:r>
-              <a:rPr lang="en-US" sz="1220" dirty="0">
+              <a:rPr lang="en-US" sz="1140" dirty="0">
                 <a:solidFill>
                   <a:srgbClr val="17364A"/>
                 </a:solidFill>
@@ -9348,16 +9348,16 @@
                 <a:ea typeface="Aptos" pitchFamily="34" charset="-122"/>
                 <a:cs typeface="Aptos" pitchFamily="34" charset="-120"/>
               </a:rPr>
-              <a:t>Include data sensitivity, approved tools, access controls,.</a:t>
-            </a:r>
-            <a:endParaRPr lang="en-US" sz="1220" dirty="0"/>
-          </a:p>
-          <a:p>
-            <a:pPr indent="0" marL="0">
-              <a:buNone/>
-            </a:pPr>
-            <a:r>
-              <a:rPr lang="en-US" sz="1220" dirty="0">
+              <a:t>Include data sensitivity, approved tools, access.</a:t>
+            </a:r>
+            <a:endParaRPr lang="en-US" sz="1140" dirty="0"/>
+          </a:p>
+          <a:p>
+            <a:pPr indent="0" marL="0">
+              <a:buNone/>
+            </a:pPr>
+            <a:r>
+              <a:rPr lang="en-US" sz="1140" dirty="0">
                 <a:solidFill>
                   <a:srgbClr val="17364A"/>
                 </a:solidFill>
@@ -9365,9 +9365,9 @@
                 <a:ea typeface="Aptos" pitchFamily="34" charset="-122"/>
                 <a:cs typeface="Aptos" pitchFamily="34" charset="-120"/>
               </a:rPr>
-              <a:t>The checklist should identify which controls must be in place.</a:t>
-            </a:r>
-            <a:endParaRPr lang="en-US" sz="1220" dirty="0"/>
+              <a:t>The checklist should identify which controls must.</a:t>
+            </a:r>
+            <a:endParaRPr lang="en-US" sz="1140" dirty="0"/>
           </a:p>
         </p:txBody>
       </p:sp>
@@ -9379,12 +9379,12 @@
         </p:nvSpPr>
         <p:spPr>
           <a:xfrm>
-            <a:off x="7635240" y="4184294"/>
-            <a:ext cx="3474720" cy="1466698"/>
+            <a:off x="7543800" y="4389120"/>
+            <a:ext cx="3611880" cy="1261872"/>
           </a:xfrm>
           <a:prstGeom prst="roundRect">
             <a:avLst>
-              <a:gd name="adj" fmla="val 7481"/>
+              <a:gd name="adj" fmla="val 8696"/>
             </a:avLst>
           </a:prstGeom>
           <a:solidFill>
@@ -9406,8 +9406,8 @@
         </p:nvSpPr>
         <p:spPr>
           <a:xfrm>
-            <a:off x="7799832" y="4330598"/>
-            <a:ext cx="3145536" cy="256032"/>
+            <a:off x="7708392" y="4517136"/>
+            <a:ext cx="3282696" cy="228600"/>
           </a:xfrm>
           <a:prstGeom prst="rect">
             <a:avLst/>
@@ -9423,7 +9423,7 @@
               <a:buNone/>
             </a:pPr>
             <a:r>
-              <a:rPr lang="en-US" sz="1300" b="1" dirty="0">
+              <a:rPr lang="en-US" sz="1220" b="1" dirty="0">
                 <a:solidFill>
                   <a:srgbClr val="0068B7"/>
                 </a:solidFill>
@@ -9433,7 +9433,7 @@
               </a:rPr>
               <a:t>Safeguard to plan</a:t>
             </a:r>
-            <a:endParaRPr lang="en-US" sz="1300" dirty="0"/>
+            <a:endParaRPr lang="en-US" sz="1220" dirty="0"/>
           </a:p>
         </p:txBody>
       </p:sp>
@@ -9445,8 +9445,8 @@
         </p:nvSpPr>
         <p:spPr>
           <a:xfrm>
-            <a:off x="7799832" y="4659782"/>
-            <a:ext cx="3145536" cy="899770"/>
+            <a:off x="7708392" y="4828032"/>
+            <a:ext cx="3282696" cy="749808"/>
           </a:xfrm>
           <a:prstGeom prst="rect">
             <a:avLst/>
@@ -9464,7 +9464,7 @@
               <a:buNone/>
             </a:pPr>
             <a:r>
-              <a:rPr lang="en-US" sz="1320" dirty="0">
+              <a:rPr lang="en-US" sz="1220" dirty="0">
                 <a:solidFill>
                   <a:srgbClr val="17364A"/>
                 </a:solidFill>
@@ -9472,9 +9472,9 @@
                 <a:ea typeface="Aptos" pitchFamily="34" charset="-122"/>
                 <a:cs typeface="Aptos" pitchFamily="34" charset="-120"/>
               </a:rPr>
-              <a:t>Use the assignment to test whether you can explain the concept, apply it to a realistic public health situation, and identify what would need review before the work moves forward.</a:t>
-            </a:r>
-            <a:endParaRPr lang="en-US" sz="1320" dirty="0"/>
+              <a:t>Use the assignment to test whether you can explain the concept, apply it to a.</a:t>
+            </a:r>
+            <a:endParaRPr lang="en-US" sz="1220" dirty="0"/>
           </a:p>
         </p:txBody>
       </p:sp>
@@ -9765,8 +9765,8 @@
         </p:nvSpPr>
         <p:spPr>
           <a:xfrm>
-            <a:off x="868680" y="1508760"/>
-            <a:ext cx="6309360" cy="4160520"/>
+            <a:off x="822960" y="1463040"/>
+            <a:ext cx="6565392" cy="4343400"/>
           </a:xfrm>
           <a:prstGeom prst="rect">
             <a:avLst/>
@@ -9784,7 +9784,7 @@
               <a:buNone/>
             </a:pPr>
             <a:r>
-              <a:rPr lang="en-US" sz="2100" dirty="0">
+              <a:rPr lang="en-US" sz="1920" dirty="0">
                 <a:solidFill>
                   <a:srgbClr val="003A63"/>
                 </a:solidFill>
@@ -9794,14 +9794,14 @@
               </a:rPr>
               <a:t>• Secure AI workflow checklist</a:t>
             </a:r>
-            <a:endParaRPr lang="en-US" sz="2100" dirty="0"/>
-          </a:p>
-          <a:p>
-            <a:pPr indent="0" marL="0">
-              <a:buNone/>
-            </a:pPr>
-            <a:r>
-              <a:rPr lang="en-US" sz="2100" dirty="0">
+            <a:endParaRPr lang="en-US" sz="1920" dirty="0"/>
+          </a:p>
+          <a:p>
+            <a:pPr indent="0" marL="0">
+              <a:buNone/>
+            </a:pPr>
+            <a:r>
+              <a:rPr lang="en-US" sz="1920" dirty="0">
                 <a:solidFill>
                   <a:srgbClr val="003A63"/>
                 </a:solidFill>
@@ -9811,14 +9811,14 @@
               </a:rPr>
               <a:t>• Vendor and implementation security questions</a:t>
             </a:r>
-            <a:endParaRPr lang="en-US" sz="2100" dirty="0"/>
-          </a:p>
-          <a:p>
-            <a:pPr indent="0" marL="0">
-              <a:buNone/>
-            </a:pPr>
-            <a:r>
-              <a:rPr lang="en-US" sz="2100" dirty="0">
+            <a:endParaRPr lang="en-US" sz="1920" dirty="0"/>
+          </a:p>
+          <a:p>
+            <a:pPr indent="0" marL="0">
+              <a:buNone/>
+            </a:pPr>
+            <a:r>
+              <a:rPr lang="en-US" sz="1920" dirty="0">
                 <a:solidFill>
                   <a:srgbClr val="003A63"/>
                 </a:solidFill>
@@ -9828,7 +9828,7 @@
               </a:rPr>
               <a:t>• Prompt injection risk notes</a:t>
             </a:r>
-            <a:endParaRPr lang="en-US" sz="2100" dirty="0"/>
+            <a:endParaRPr lang="en-US" sz="1920" dirty="0"/>
           </a:p>
         </p:txBody>
       </p:sp>
@@ -9840,12 +9840,12 @@
         </p:nvSpPr>
         <p:spPr>
           <a:xfrm>
-            <a:off x="7635240" y="1325880"/>
-            <a:ext cx="3474720" cy="1207008"/>
+            <a:off x="7543800" y="1325880"/>
+            <a:ext cx="3611880" cy="1261872"/>
           </a:xfrm>
           <a:prstGeom prst="roundRect">
             <a:avLst>
-              <a:gd name="adj" fmla="val 9091"/>
+              <a:gd name="adj" fmla="val 8696"/>
             </a:avLst>
           </a:prstGeom>
           <a:solidFill>
@@ -9867,8 +9867,8 @@
         </p:nvSpPr>
         <p:spPr>
           <a:xfrm>
-            <a:off x="7799832" y="1472184"/>
-            <a:ext cx="3145536" cy="256032"/>
+            <a:off x="7708392" y="1453896"/>
+            <a:ext cx="3282696" cy="228600"/>
           </a:xfrm>
           <a:prstGeom prst="rect">
             <a:avLst/>
@@ -9884,7 +9884,7 @@
               <a:buNone/>
             </a:pPr>
             <a:r>
-              <a:rPr lang="en-US" sz="1300" b="1" dirty="0">
+              <a:rPr lang="en-US" sz="1220" b="1" dirty="0">
                 <a:solidFill>
                   <a:srgbClr val="0068B7"/>
                 </a:solidFill>
@@ -9894,7 +9894,7 @@
               </a:rPr>
               <a:t>Risk check</a:t>
             </a:r>
-            <a:endParaRPr lang="en-US" sz="1300" dirty="0"/>
+            <a:endParaRPr lang="en-US" sz="1220" dirty="0"/>
           </a:p>
         </p:txBody>
       </p:sp>
@@ -9906,8 +9906,8 @@
         </p:nvSpPr>
         <p:spPr>
           <a:xfrm>
-            <a:off x="7799832" y="1801368"/>
-            <a:ext cx="3145536" cy="640080"/>
+            <a:off x="7708392" y="1764792"/>
+            <a:ext cx="3282696" cy="749808"/>
           </a:xfrm>
           <a:prstGeom prst="rect">
             <a:avLst/>
@@ -9925,7 +9925,7 @@
               <a:buNone/>
             </a:pPr>
             <a:r>
-              <a:rPr lang="en-US" sz="1320" dirty="0">
+              <a:rPr lang="en-US" sz="1220" dirty="0">
                 <a:solidFill>
                   <a:srgbClr val="17364A"/>
                 </a:solidFill>
@@ -9935,7 +9935,7 @@
               </a:rPr>
               <a:t>Secure AI workflow checklist</a:t>
             </a:r>
-            <a:endParaRPr lang="en-US" sz="1320" dirty="0"/>
+            <a:endParaRPr lang="en-US" sz="1220" dirty="0"/>
           </a:p>
         </p:txBody>
       </p:sp>
@@ -9947,12 +9947,12 @@
         </p:nvSpPr>
         <p:spPr>
           <a:xfrm>
-            <a:off x="7635240" y="2670048"/>
-            <a:ext cx="3474720" cy="1536192"/>
+            <a:off x="7543800" y="2724912"/>
+            <a:ext cx="3611880" cy="1527048"/>
           </a:xfrm>
           <a:prstGeom prst="roundRect">
             <a:avLst>
-              <a:gd name="adj" fmla="val 7143"/>
+              <a:gd name="adj" fmla="val 7186"/>
             </a:avLst>
           </a:prstGeom>
           <a:solidFill>
@@ -9974,8 +9974,8 @@
         </p:nvSpPr>
         <p:spPr>
           <a:xfrm>
-            <a:off x="7799832" y="2816352"/>
-            <a:ext cx="3145536" cy="256032"/>
+            <a:off x="7708392" y="2852928"/>
+            <a:ext cx="3282696" cy="228600"/>
           </a:xfrm>
           <a:prstGeom prst="rect">
             <a:avLst/>
@@ -9991,7 +9991,7 @@
               <a:buNone/>
             </a:pPr>
             <a:r>
-              <a:rPr lang="en-US" sz="1300" b="1" dirty="0">
+              <a:rPr lang="en-US" sz="1220" b="1" dirty="0">
                 <a:solidFill>
                   <a:srgbClr val="0068B7"/>
                 </a:solidFill>
@@ -10001,7 +10001,7 @@
               </a:rPr>
               <a:t>Concept checkpoints</a:t>
             </a:r>
-            <a:endParaRPr lang="en-US" sz="1300" dirty="0"/>
+            <a:endParaRPr lang="en-US" sz="1220" dirty="0"/>
           </a:p>
         </p:txBody>
       </p:sp>
@@ -10013,8 +10013,8 @@
         </p:nvSpPr>
         <p:spPr>
           <a:xfrm>
-            <a:off x="7818120" y="3182112"/>
-            <a:ext cx="3090672" cy="877824"/>
+            <a:off x="7726680" y="3182112"/>
+            <a:ext cx="3227832" cy="960120"/>
           </a:xfrm>
           <a:prstGeom prst="rect">
             <a:avLst/>
@@ -10032,7 +10032,7 @@
               <a:buNone/>
             </a:pPr>
             <a:r>
-              <a:rPr lang="en-US" sz="1220" dirty="0">
+              <a:rPr lang="en-US" sz="1140" dirty="0">
                 <a:solidFill>
                   <a:srgbClr val="17364A"/>
                 </a:solidFill>
@@ -10042,14 +10042,14 @@
               </a:rPr>
               <a:t>Secure AI workflow checklist</a:t>
             </a:r>
-            <a:endParaRPr lang="en-US" sz="1220" dirty="0"/>
-          </a:p>
-          <a:p>
-            <a:pPr indent="0" marL="0">
-              <a:buNone/>
-            </a:pPr>
-            <a:r>
-              <a:rPr lang="en-US" sz="1220" dirty="0">
+            <a:endParaRPr lang="en-US" sz="1140" dirty="0"/>
+          </a:p>
+          <a:p>
+            <a:pPr indent="0" marL="0">
+              <a:buNone/>
+            </a:pPr>
+            <a:r>
+              <a:rPr lang="en-US" sz="1140" dirty="0">
                 <a:solidFill>
                   <a:srgbClr val="17364A"/>
                 </a:solidFill>
@@ -10059,14 +10059,14 @@
               </a:rPr>
               <a:t>Vendor and implementation security questions</a:t>
             </a:r>
-            <a:endParaRPr lang="en-US" sz="1220" dirty="0"/>
-          </a:p>
-          <a:p>
-            <a:pPr indent="0" marL="0">
-              <a:buNone/>
-            </a:pPr>
-            <a:r>
-              <a:rPr lang="en-US" sz="1220" dirty="0">
+            <a:endParaRPr lang="en-US" sz="1140" dirty="0"/>
+          </a:p>
+          <a:p>
+            <a:pPr indent="0" marL="0">
+              <a:buNone/>
+            </a:pPr>
+            <a:r>
+              <a:rPr lang="en-US" sz="1140" dirty="0">
                 <a:solidFill>
                   <a:srgbClr val="17364A"/>
                 </a:solidFill>
@@ -10076,7 +10076,7 @@
               </a:rPr>
               <a:t>Prompt injection risk notes</a:t>
             </a:r>
-            <a:endParaRPr lang="en-US" sz="1220" dirty="0"/>
+            <a:endParaRPr lang="en-US" sz="1140" dirty="0"/>
           </a:p>
         </p:txBody>
       </p:sp>
@@ -10088,12 +10088,12 @@
         </p:nvSpPr>
         <p:spPr>
           <a:xfrm>
-            <a:off x="7635240" y="4343400"/>
-            <a:ext cx="3474720" cy="1255471"/>
+            <a:off x="7543800" y="4389120"/>
+            <a:ext cx="3611880" cy="1261872"/>
           </a:xfrm>
           <a:prstGeom prst="roundRect">
             <a:avLst>
-              <a:gd name="adj" fmla="val 8740"/>
+              <a:gd name="adj" fmla="val 8696"/>
             </a:avLst>
           </a:prstGeom>
           <a:solidFill>
@@ -10115,8 +10115,8 @@
         </p:nvSpPr>
         <p:spPr>
           <a:xfrm>
-            <a:off x="7799832" y="4489704"/>
-            <a:ext cx="3145536" cy="256032"/>
+            <a:off x="7708392" y="4517136"/>
+            <a:ext cx="3282696" cy="228600"/>
           </a:xfrm>
           <a:prstGeom prst="rect">
             <a:avLst/>
@@ -10132,7 +10132,7 @@
               <a:buNone/>
             </a:pPr>
             <a:r>
-              <a:rPr lang="en-US" sz="1300" b="1" dirty="0">
+              <a:rPr lang="en-US" sz="1220" b="1" dirty="0">
                 <a:solidFill>
                   <a:srgbClr val="0068B7"/>
                 </a:solidFill>
@@ -10142,7 +10142,7 @@
               </a:rPr>
               <a:t>Safeguard to plan</a:t>
             </a:r>
-            <a:endParaRPr lang="en-US" sz="1300" dirty="0"/>
+            <a:endParaRPr lang="en-US" sz="1220" dirty="0"/>
           </a:p>
         </p:txBody>
       </p:sp>
@@ -10154,8 +10154,8 @@
         </p:nvSpPr>
         <p:spPr>
           <a:xfrm>
-            <a:off x="7799832" y="4818888"/>
-            <a:ext cx="3145536" cy="688543"/>
+            <a:off x="7708392" y="4828032"/>
+            <a:ext cx="3282696" cy="749808"/>
           </a:xfrm>
           <a:prstGeom prst="rect">
             <a:avLst/>
@@ -10173,7 +10173,7 @@
               <a:buNone/>
             </a:pPr>
             <a:r>
-              <a:rPr lang="en-US" sz="1320" dirty="0">
+              <a:rPr lang="en-US" sz="1220" dirty="0">
                 <a:solidFill>
                   <a:srgbClr val="17364A"/>
                 </a:solidFill>
@@ -10181,9 +10181,9 @@
                 <a:ea typeface="Aptos" pitchFamily="34" charset="-122"/>
                 <a:cs typeface="Aptos" pitchFamily="34" charset="-120"/>
               </a:rPr>
-              <a:t>Identify what could go wrong, who could be affected, what safeguards are needed, and what evidence should be reviewed before use.</a:t>
-            </a:r>
-            <a:endParaRPr lang="en-US" sz="1320" dirty="0"/>
+              <a:t>Identify what could go wrong, who could be affected, what safeguards are needed,.</a:t>
+            </a:r>
+            <a:endParaRPr lang="en-US" sz="1220" dirty="0"/>
           </a:p>
         </p:txBody>
       </p:sp>
@@ -10501,7 +10501,7 @@
                 <a:ea typeface="Aptos" pitchFamily="34" charset="-122"/>
                 <a:cs typeface="Aptos" pitchFamily="34" charset="-120"/>
               </a:rPr>
-              <a:t>• AI security focuses on protecting AI systems, integrations, prompts, outputs, data, users, and.</a:t>
+              <a:t>• AI security focuses on protecting AI systems, integrations, prompts,.</a:t>
             </a:r>
             <a:endParaRPr lang="en-US" sz="2100" dirty="0"/>
           </a:p>
@@ -10518,7 +10518,7 @@
                 <a:ea typeface="Aptos" pitchFamily="34" charset="-122"/>
                 <a:cs typeface="Aptos" pitchFamily="34" charset="-120"/>
               </a:rPr>
-              <a:t>• Public health agencies handle sensitive health, demographic, legal, operational, and community.</a:t>
+              <a:t>• Public health agencies handle sensitive health, demographic, legal,.</a:t>
             </a:r>
             <a:endParaRPr lang="en-US" sz="2100" dirty="0"/>
           </a:p>
@@ -10535,7 +10535,7 @@
                 <a:ea typeface="Aptos" pitchFamily="34" charset="-122"/>
                 <a:cs typeface="Aptos" pitchFamily="34" charset="-120"/>
               </a:rPr>
-              <a:t>• AI security is therefore a core public health safeguard, not only an IT responsibility.</a:t>
+              <a:t>• AI security is therefore a core public health safeguard, not only an IT.</a:t>
             </a:r>
             <a:endParaRPr lang="en-US" sz="2100" dirty="0"/>
           </a:p>
@@ -10576,8 +10576,8 @@
         </p:nvSpPr>
         <p:spPr>
           <a:xfrm>
-            <a:off x="8074152" y="1563624"/>
-            <a:ext cx="2825496" cy="256032"/>
+            <a:off x="8074152" y="1545336"/>
+            <a:ext cx="2825496" cy="228600"/>
           </a:xfrm>
           <a:prstGeom prst="rect">
             <a:avLst/>
@@ -10593,7 +10593,7 @@
               <a:buNone/>
             </a:pPr>
             <a:r>
-              <a:rPr lang="en-US" sz="1300" b="1" dirty="0">
+              <a:rPr lang="en-US" sz="1220" b="1" dirty="0">
                 <a:solidFill>
                   <a:srgbClr val="0068B7"/>
                 </a:solidFill>
@@ -10603,7 +10603,7 @@
               </a:rPr>
               <a:t>Module details</a:t>
             </a:r>
-            <a:endParaRPr lang="en-US" sz="1300" dirty="0"/>
+            <a:endParaRPr lang="en-US" sz="1220" dirty="0"/>
           </a:p>
         </p:txBody>
       </p:sp>
@@ -10615,8 +10615,8 @@
         </p:nvSpPr>
         <p:spPr>
           <a:xfrm>
-            <a:off x="8074152" y="1892808"/>
-            <a:ext cx="2825496" cy="1353312"/>
+            <a:off x="8074152" y="1856232"/>
+            <a:ext cx="2825496" cy="1408176"/>
           </a:xfrm>
           <a:prstGeom prst="rect">
             <a:avLst/>
@@ -10634,7 +10634,7 @@
               <a:buNone/>
             </a:pPr>
             <a:r>
-              <a:rPr lang="en-US" sz="1320" dirty="0">
+              <a:rPr lang="en-US" sz="1220" dirty="0">
                 <a:solidFill>
                   <a:srgbClr val="17364A"/>
                 </a:solidFill>
@@ -10642,9 +10642,9 @@
                 <a:ea typeface="Aptos" pitchFamily="34" charset="-122"/>
                 <a:cs typeface="Aptos" pitchFamily="34" charset="-120"/>
               </a:rPr>
-              <a:t>Level: intermediate/practitioner Primary track: Governance and Security Track Appears in tracks: analytics-modeling</a:t>
-            </a:r>
-            <a:endParaRPr lang="en-US" sz="1320" dirty="0"/>
+              <a:t>Level: intermediate/practitioner Primary track: Governance and Security Track.</a:t>
+            </a:r>
+            <a:endParaRPr lang="en-US" sz="1220" dirty="0"/>
           </a:p>
         </p:txBody>
       </p:sp>
@@ -10683,8 +10683,8 @@
         </p:nvSpPr>
         <p:spPr>
           <a:xfrm>
-            <a:off x="8074152" y="3822192"/>
-            <a:ext cx="2825496" cy="256032"/>
+            <a:off x="8074152" y="3803904"/>
+            <a:ext cx="2825496" cy="228600"/>
           </a:xfrm>
           <a:prstGeom prst="rect">
             <a:avLst/>
@@ -10700,7 +10700,7 @@
               <a:buNone/>
             </a:pPr>
             <a:r>
-              <a:rPr lang="en-US" sz="1300" b="1" dirty="0">
+              <a:rPr lang="en-US" sz="1220" b="1" dirty="0">
                 <a:solidFill>
                   <a:srgbClr val="0068B7"/>
                 </a:solidFill>
@@ -10710,7 +10710,7 @@
               </a:rPr>
               <a:t>Learning sequence</a:t>
             </a:r>
-            <a:endParaRPr lang="en-US" sz="1300" dirty="0"/>
+            <a:endParaRPr lang="en-US" sz="1220" dirty="0"/>
           </a:p>
         </p:txBody>
       </p:sp>
@@ -10722,8 +10722,8 @@
         </p:nvSpPr>
         <p:spPr>
           <a:xfrm>
-            <a:off x="8092440" y="4187952"/>
-            <a:ext cx="2770632" cy="1033272"/>
+            <a:off x="8092440" y="4133088"/>
+            <a:ext cx="2770632" cy="1124712"/>
           </a:xfrm>
           <a:prstGeom prst="rect">
             <a:avLst/>
@@ -10741,7 +10741,7 @@
               <a:buNone/>
             </a:pPr>
             <a:r>
-              <a:rPr lang="en-US" sz="1220" dirty="0">
+              <a:rPr lang="en-US" sz="1140" dirty="0">
                 <a:solidFill>
                   <a:srgbClr val="17364A"/>
                 </a:solidFill>
@@ -10751,14 +10751,14 @@
               </a:rPr>
               <a:t>Read the module for shared vocabulary and context.</a:t>
             </a:r>
-            <a:endParaRPr lang="en-US" sz="1220" dirty="0"/>
-          </a:p>
-          <a:p>
-            <a:pPr indent="0" marL="0">
-              <a:buNone/>
-            </a:pPr>
-            <a:r>
-              <a:rPr lang="en-US" sz="1220" dirty="0">
+            <a:endParaRPr lang="en-US" sz="1140" dirty="0"/>
+          </a:p>
+          <a:p>
+            <a:pPr indent="0" marL="0">
+              <a:buNone/>
+            </a:pPr>
+            <a:r>
+              <a:rPr lang="en-US" sz="1140" dirty="0">
                 <a:solidFill>
                   <a:srgbClr val="17364A"/>
                 </a:solidFill>
@@ -10766,16 +10766,16 @@
                 <a:ea typeface="Aptos" pitchFamily="34" charset="-122"/>
                 <a:cs typeface="Aptos" pitchFamily="34" charset="-120"/>
               </a:rPr>
-              <a:t>Complete the practical exercise to apply the concept.</a:t>
-            </a:r>
-            <a:endParaRPr lang="en-US" sz="1220" dirty="0"/>
-          </a:p>
-          <a:p>
-            <a:pPr indent="0" marL="0">
-              <a:buNone/>
-            </a:pPr>
-            <a:r>
-              <a:rPr lang="en-US" sz="1220" dirty="0">
+              <a:t>Complete the practical exercise to apply the.</a:t>
+            </a:r>
+            <a:endParaRPr lang="en-US" sz="1140" dirty="0"/>
+          </a:p>
+          <a:p>
+            <a:pPr indent="0" marL="0">
+              <a:buNone/>
+            </a:pPr>
+            <a:r>
+              <a:rPr lang="en-US" sz="1140" dirty="0">
                 <a:solidFill>
                   <a:srgbClr val="17364A"/>
                 </a:solidFill>
@@ -10785,7 +10785,7 @@
               </a:rPr>
               <a:t>Use the notes and references for deeper review.</a:t>
             </a:r>
-            <a:endParaRPr lang="en-US" sz="1220" dirty="0"/>
+            <a:endParaRPr lang="en-US" sz="1140" dirty="0"/>
           </a:p>
         </p:txBody>
       </p:sp>
@@ -11076,8 +11076,8 @@
         </p:nvSpPr>
         <p:spPr>
           <a:xfrm>
-            <a:off x="868680" y="1508760"/>
-            <a:ext cx="6309360" cy="4160520"/>
+            <a:off x="822960" y="1463040"/>
+            <a:ext cx="6565392" cy="4343400"/>
           </a:xfrm>
           <a:prstGeom prst="rect">
             <a:avLst/>
@@ -11095,7 +11095,7 @@
               <a:buNone/>
             </a:pPr>
             <a:r>
-              <a:rPr lang="en-US" sz="2100" dirty="0">
+              <a:rPr lang="en-US" sz="1920" dirty="0">
                 <a:solidFill>
                   <a:srgbClr val="003A63"/>
                 </a:solidFill>
@@ -11105,7 +11105,7 @@
               </a:rPr>
               <a:t>• AI incident trigger and escalation plan</a:t>
             </a:r>
-            <a:endParaRPr lang="en-US" sz="2100" dirty="0"/>
+            <a:endParaRPr lang="en-US" sz="1920" dirty="0"/>
           </a:p>
         </p:txBody>
       </p:sp>
@@ -11117,12 +11117,12 @@
         </p:nvSpPr>
         <p:spPr>
           <a:xfrm>
-            <a:off x="7635240" y="1325880"/>
-            <a:ext cx="3474720" cy="1207008"/>
+            <a:off x="7543800" y="1325880"/>
+            <a:ext cx="3611880" cy="1261872"/>
           </a:xfrm>
           <a:prstGeom prst="roundRect">
             <a:avLst>
-              <a:gd name="adj" fmla="val 9091"/>
+              <a:gd name="adj" fmla="val 8696"/>
             </a:avLst>
           </a:prstGeom>
           <a:solidFill>
@@ -11144,8 +11144,8 @@
         </p:nvSpPr>
         <p:spPr>
           <a:xfrm>
-            <a:off x="7799832" y="1472184"/>
-            <a:ext cx="3145536" cy="256032"/>
+            <a:off x="7708392" y="1453896"/>
+            <a:ext cx="3282696" cy="228600"/>
           </a:xfrm>
           <a:prstGeom prst="rect">
             <a:avLst/>
@@ -11161,7 +11161,7 @@
               <a:buNone/>
             </a:pPr>
             <a:r>
-              <a:rPr lang="en-US" sz="1300" b="1" dirty="0">
+              <a:rPr lang="en-US" sz="1220" b="1" dirty="0">
                 <a:solidFill>
                   <a:srgbClr val="0068B7"/>
                 </a:solidFill>
@@ -11171,7 +11171,7 @@
               </a:rPr>
               <a:t>Risk check</a:t>
             </a:r>
-            <a:endParaRPr lang="en-US" sz="1300" dirty="0"/>
+            <a:endParaRPr lang="en-US" sz="1220" dirty="0"/>
           </a:p>
         </p:txBody>
       </p:sp>
@@ -11183,8 +11183,8 @@
         </p:nvSpPr>
         <p:spPr>
           <a:xfrm>
-            <a:off x="7799832" y="1801368"/>
-            <a:ext cx="3145536" cy="640080"/>
+            <a:off x="7708392" y="1764792"/>
+            <a:ext cx="3282696" cy="749808"/>
           </a:xfrm>
           <a:prstGeom prst="rect">
             <a:avLst/>
@@ -11202,7 +11202,7 @@
               <a:buNone/>
             </a:pPr>
             <a:r>
-              <a:rPr lang="en-US" sz="1320" dirty="0">
+              <a:rPr lang="en-US" sz="1220" dirty="0">
                 <a:solidFill>
                   <a:srgbClr val="17364A"/>
                 </a:solidFill>
@@ -11212,7 +11212,7 @@
               </a:rPr>
               <a:t>AI incident trigger and escalation plan</a:t>
             </a:r>
-            <a:endParaRPr lang="en-US" sz="1320" dirty="0"/>
+            <a:endParaRPr lang="en-US" sz="1220" dirty="0"/>
           </a:p>
         </p:txBody>
       </p:sp>
@@ -11224,12 +11224,12 @@
         </p:nvSpPr>
         <p:spPr>
           <a:xfrm>
-            <a:off x="7635240" y="2670048"/>
-            <a:ext cx="3474720" cy="1536192"/>
+            <a:off x="7543800" y="2724912"/>
+            <a:ext cx="3611880" cy="1527048"/>
           </a:xfrm>
           <a:prstGeom prst="roundRect">
             <a:avLst>
-              <a:gd name="adj" fmla="val 7143"/>
+              <a:gd name="adj" fmla="val 7186"/>
             </a:avLst>
           </a:prstGeom>
           <a:solidFill>
@@ -11251,8 +11251,8 @@
         </p:nvSpPr>
         <p:spPr>
           <a:xfrm>
-            <a:off x="7799832" y="2816352"/>
-            <a:ext cx="3145536" cy="256032"/>
+            <a:off x="7708392" y="2852928"/>
+            <a:ext cx="3282696" cy="228600"/>
           </a:xfrm>
           <a:prstGeom prst="rect">
             <a:avLst/>
@@ -11268,7 +11268,7 @@
               <a:buNone/>
             </a:pPr>
             <a:r>
-              <a:rPr lang="en-US" sz="1300" b="1" dirty="0">
+              <a:rPr lang="en-US" sz="1220" b="1" dirty="0">
                 <a:solidFill>
                   <a:srgbClr val="0068B7"/>
                 </a:solidFill>
@@ -11278,7 +11278,7 @@
               </a:rPr>
               <a:t>Concept checkpoints</a:t>
             </a:r>
-            <a:endParaRPr lang="en-US" sz="1300" dirty="0"/>
+            <a:endParaRPr lang="en-US" sz="1220" dirty="0"/>
           </a:p>
         </p:txBody>
       </p:sp>
@@ -11290,8 +11290,8 @@
         </p:nvSpPr>
         <p:spPr>
           <a:xfrm>
-            <a:off x="7818120" y="3182112"/>
-            <a:ext cx="3090672" cy="877824"/>
+            <a:off x="7726680" y="3182112"/>
+            <a:ext cx="3227832" cy="960120"/>
           </a:xfrm>
           <a:prstGeom prst="rect">
             <a:avLst/>
@@ -11309,7 +11309,7 @@
               <a:buNone/>
             </a:pPr>
             <a:r>
-              <a:rPr lang="en-US" sz="1220" dirty="0">
+              <a:rPr lang="en-US" sz="1140" dirty="0">
                 <a:solidFill>
                   <a:srgbClr val="17364A"/>
                 </a:solidFill>
@@ -11319,7 +11319,7 @@
               </a:rPr>
               <a:t>AI incident trigger and escalation plan</a:t>
             </a:r>
-            <a:endParaRPr lang="en-US" sz="1220" dirty="0"/>
+            <a:endParaRPr lang="en-US" sz="1140" dirty="0"/>
           </a:p>
         </p:txBody>
       </p:sp>
@@ -11331,12 +11331,12 @@
         </p:nvSpPr>
         <p:spPr>
           <a:xfrm>
-            <a:off x="7635240" y="4343400"/>
-            <a:ext cx="3474720" cy="1255471"/>
+            <a:off x="7543800" y="4389120"/>
+            <a:ext cx="3611880" cy="1261872"/>
           </a:xfrm>
           <a:prstGeom prst="roundRect">
             <a:avLst>
-              <a:gd name="adj" fmla="val 8740"/>
+              <a:gd name="adj" fmla="val 8696"/>
             </a:avLst>
           </a:prstGeom>
           <a:solidFill>
@@ -11358,8 +11358,8 @@
         </p:nvSpPr>
         <p:spPr>
           <a:xfrm>
-            <a:off x="7799832" y="4489704"/>
-            <a:ext cx="3145536" cy="256032"/>
+            <a:off x="7708392" y="4517136"/>
+            <a:ext cx="3282696" cy="228600"/>
           </a:xfrm>
           <a:prstGeom prst="rect">
             <a:avLst/>
@@ -11375,7 +11375,7 @@
               <a:buNone/>
             </a:pPr>
             <a:r>
-              <a:rPr lang="en-US" sz="1300" b="1" dirty="0">
+              <a:rPr lang="en-US" sz="1220" b="1" dirty="0">
                 <a:solidFill>
                   <a:srgbClr val="0068B7"/>
                 </a:solidFill>
@@ -11385,7 +11385,7 @@
               </a:rPr>
               <a:t>Safeguard to plan</a:t>
             </a:r>
-            <a:endParaRPr lang="en-US" sz="1300" dirty="0"/>
+            <a:endParaRPr lang="en-US" sz="1220" dirty="0"/>
           </a:p>
         </p:txBody>
       </p:sp>
@@ -11397,8 +11397,8 @@
         </p:nvSpPr>
         <p:spPr>
           <a:xfrm>
-            <a:off x="7799832" y="4818888"/>
-            <a:ext cx="3145536" cy="688543"/>
+            <a:off x="7708392" y="4828032"/>
+            <a:ext cx="3282696" cy="749808"/>
           </a:xfrm>
           <a:prstGeom prst="rect">
             <a:avLst/>
@@ -11416,7 +11416,7 @@
               <a:buNone/>
             </a:pPr>
             <a:r>
-              <a:rPr lang="en-US" sz="1320" dirty="0">
+              <a:rPr lang="en-US" sz="1220" dirty="0">
                 <a:solidFill>
                   <a:srgbClr val="17364A"/>
                 </a:solidFill>
@@ -11424,9 +11424,9 @@
                 <a:ea typeface="Aptos" pitchFamily="34" charset="-122"/>
                 <a:cs typeface="Aptos" pitchFamily="34" charset="-120"/>
               </a:rPr>
-              <a:t>Identify what could go wrong, who could be affected, what safeguards are needed, and what evidence should be reviewed before use.</a:t>
-            </a:r>
-            <a:endParaRPr lang="en-US" sz="1320" dirty="0"/>
+              <a:t>Identify what could go wrong, who could be affected, what safeguards are needed,.</a:t>
+            </a:r>
+            <a:endParaRPr lang="en-US" sz="1220" dirty="0"/>
           </a:p>
         </p:txBody>
       </p:sp>
@@ -11717,8 +11717,8 @@
         </p:nvSpPr>
         <p:spPr>
           <a:xfrm>
-            <a:off x="868680" y="1508760"/>
-            <a:ext cx="6309360" cy="4160520"/>
+            <a:off x="822960" y="1463040"/>
+            <a:ext cx="6565392" cy="4343400"/>
           </a:xfrm>
           <a:prstGeom prst="rect">
             <a:avLst/>
@@ -11736,7 +11736,7 @@
               <a:buNone/>
             </a:pPr>
             <a:r>
-              <a:rPr lang="en-US" sz="2100" dirty="0">
+              <a:rPr lang="en-US" sz="1920" dirty="0">
                 <a:solidFill>
                   <a:srgbClr val="003A63"/>
                 </a:solidFill>
@@ -11746,14 +11746,14 @@
               </a:rPr>
               <a:t>• Secure AI workflow checklist</a:t>
             </a:r>
-            <a:endParaRPr lang="en-US" sz="2100" dirty="0"/>
-          </a:p>
-          <a:p>
-            <a:pPr indent="0" marL="0">
-              <a:buNone/>
-            </a:pPr>
-            <a:r>
-              <a:rPr lang="en-US" sz="2100" dirty="0">
+            <a:endParaRPr lang="en-US" sz="1920" dirty="0"/>
+          </a:p>
+          <a:p>
+            <a:pPr indent="0" marL="0">
+              <a:buNone/>
+            </a:pPr>
+            <a:r>
+              <a:rPr lang="en-US" sz="1920" dirty="0">
                 <a:solidFill>
                   <a:srgbClr val="003A63"/>
                 </a:solidFill>
@@ -11763,14 +11763,14 @@
               </a:rPr>
               <a:t>• Vendor and implementation security questions</a:t>
             </a:r>
-            <a:endParaRPr lang="en-US" sz="2100" dirty="0"/>
-          </a:p>
-          <a:p>
-            <a:pPr indent="0" marL="0">
-              <a:buNone/>
-            </a:pPr>
-            <a:r>
-              <a:rPr lang="en-US" sz="2100" dirty="0">
+            <a:endParaRPr lang="en-US" sz="1920" dirty="0"/>
+          </a:p>
+          <a:p>
+            <a:pPr indent="0" marL="0">
+              <a:buNone/>
+            </a:pPr>
+            <a:r>
+              <a:rPr lang="en-US" sz="1920" dirty="0">
                 <a:solidFill>
                   <a:srgbClr val="003A63"/>
                 </a:solidFill>
@@ -11780,7 +11780,7 @@
               </a:rPr>
               <a:t>• Prompt injection risk notes</a:t>
             </a:r>
-            <a:endParaRPr lang="en-US" sz="2100" dirty="0"/>
+            <a:endParaRPr lang="en-US" sz="1920" dirty="0"/>
           </a:p>
         </p:txBody>
       </p:sp>
@@ -11792,12 +11792,12 @@
         </p:nvSpPr>
         <p:spPr>
           <a:xfrm>
-            <a:off x="7635240" y="1325880"/>
-            <a:ext cx="3474720" cy="1207008"/>
+            <a:off x="7543800" y="1325880"/>
+            <a:ext cx="3611880" cy="1261872"/>
           </a:xfrm>
           <a:prstGeom prst="roundRect">
             <a:avLst>
-              <a:gd name="adj" fmla="val 9091"/>
+              <a:gd name="adj" fmla="val 8696"/>
             </a:avLst>
           </a:prstGeom>
           <a:solidFill>
@@ -11819,8 +11819,8 @@
         </p:nvSpPr>
         <p:spPr>
           <a:xfrm>
-            <a:off x="7799832" y="1472184"/>
-            <a:ext cx="3145536" cy="256032"/>
+            <a:off x="7708392" y="1453896"/>
+            <a:ext cx="3282696" cy="228600"/>
           </a:xfrm>
           <a:prstGeom prst="rect">
             <a:avLst/>
@@ -11836,7 +11836,7 @@
               <a:buNone/>
             </a:pPr>
             <a:r>
-              <a:rPr lang="en-US" sz="1300" b="1" dirty="0">
+              <a:rPr lang="en-US" sz="1220" b="1" dirty="0">
                 <a:solidFill>
                   <a:srgbClr val="0068B7"/>
                 </a:solidFill>
@@ -11846,7 +11846,7 @@
               </a:rPr>
               <a:t>Risk check</a:t>
             </a:r>
-            <a:endParaRPr lang="en-US" sz="1300" dirty="0"/>
+            <a:endParaRPr lang="en-US" sz="1220" dirty="0"/>
           </a:p>
         </p:txBody>
       </p:sp>
@@ -11858,8 +11858,8 @@
         </p:nvSpPr>
         <p:spPr>
           <a:xfrm>
-            <a:off x="7799832" y="1801368"/>
-            <a:ext cx="3145536" cy="640080"/>
+            <a:off x="7708392" y="1764792"/>
+            <a:ext cx="3282696" cy="749808"/>
           </a:xfrm>
           <a:prstGeom prst="rect">
             <a:avLst/>
@@ -11877,7 +11877,7 @@
               <a:buNone/>
             </a:pPr>
             <a:r>
-              <a:rPr lang="en-US" sz="1320" dirty="0">
+              <a:rPr lang="en-US" sz="1220" dirty="0">
                 <a:solidFill>
                   <a:srgbClr val="17364A"/>
                 </a:solidFill>
@@ -11887,7 +11887,7 @@
               </a:rPr>
               <a:t>Secure AI workflow checklist</a:t>
             </a:r>
-            <a:endParaRPr lang="en-US" sz="1320" dirty="0"/>
+            <a:endParaRPr lang="en-US" sz="1220" dirty="0"/>
           </a:p>
         </p:txBody>
       </p:sp>
@@ -11899,12 +11899,12 @@
         </p:nvSpPr>
         <p:spPr>
           <a:xfrm>
-            <a:off x="7635240" y="2670048"/>
-            <a:ext cx="3474720" cy="1377086"/>
+            <a:off x="7543800" y="2724912"/>
+            <a:ext cx="3611880" cy="1527048"/>
           </a:xfrm>
           <a:prstGeom prst="roundRect">
             <a:avLst>
-              <a:gd name="adj" fmla="val 7968"/>
+              <a:gd name="adj" fmla="val 7186"/>
             </a:avLst>
           </a:prstGeom>
           <a:solidFill>
@@ -11926,8 +11926,8 @@
         </p:nvSpPr>
         <p:spPr>
           <a:xfrm>
-            <a:off x="7799832" y="2816352"/>
-            <a:ext cx="3145536" cy="256032"/>
+            <a:off x="7708392" y="2852928"/>
+            <a:ext cx="3282696" cy="228600"/>
           </a:xfrm>
           <a:prstGeom prst="rect">
             <a:avLst/>
@@ -11943,7 +11943,7 @@
               <a:buNone/>
             </a:pPr>
             <a:r>
-              <a:rPr lang="en-US" sz="1300" b="1" dirty="0">
+              <a:rPr lang="en-US" sz="1220" b="1" dirty="0">
                 <a:solidFill>
                   <a:srgbClr val="0068B7"/>
                 </a:solidFill>
@@ -11953,7 +11953,7 @@
               </a:rPr>
               <a:t>Concept checkpoints</a:t>
             </a:r>
-            <a:endParaRPr lang="en-US" sz="1300" dirty="0"/>
+            <a:endParaRPr lang="en-US" sz="1220" dirty="0"/>
           </a:p>
         </p:txBody>
       </p:sp>
@@ -11965,8 +11965,8 @@
         </p:nvSpPr>
         <p:spPr>
           <a:xfrm>
-            <a:off x="7818120" y="3182112"/>
-            <a:ext cx="3090672" cy="718718"/>
+            <a:off x="7726680" y="3182112"/>
+            <a:ext cx="3227832" cy="960120"/>
           </a:xfrm>
           <a:prstGeom prst="rect">
             <a:avLst/>
@@ -11984,7 +11984,7 @@
               <a:buNone/>
             </a:pPr>
             <a:r>
-              <a:rPr lang="en-US" sz="1220" dirty="0">
+              <a:rPr lang="en-US" sz="1140" dirty="0">
                 <a:solidFill>
                   <a:srgbClr val="17364A"/>
                 </a:solidFill>
@@ -11994,14 +11994,14 @@
               </a:rPr>
               <a:t>Secure AI workflow checklist</a:t>
             </a:r>
-            <a:endParaRPr lang="en-US" sz="1220" dirty="0"/>
-          </a:p>
-          <a:p>
-            <a:pPr indent="0" marL="0">
-              <a:buNone/>
-            </a:pPr>
-            <a:r>
-              <a:rPr lang="en-US" sz="1220" dirty="0">
+            <a:endParaRPr lang="en-US" sz="1140" dirty="0"/>
+          </a:p>
+          <a:p>
+            <a:pPr indent="0" marL="0">
+              <a:buNone/>
+            </a:pPr>
+            <a:r>
+              <a:rPr lang="en-US" sz="1140" dirty="0">
                 <a:solidFill>
                   <a:srgbClr val="17364A"/>
                 </a:solidFill>
@@ -12011,14 +12011,14 @@
               </a:rPr>
               <a:t>Vendor and implementation security questions</a:t>
             </a:r>
-            <a:endParaRPr lang="en-US" sz="1220" dirty="0"/>
-          </a:p>
-          <a:p>
-            <a:pPr indent="0" marL="0">
-              <a:buNone/>
-            </a:pPr>
-            <a:r>
-              <a:rPr lang="en-US" sz="1220" dirty="0">
+            <a:endParaRPr lang="en-US" sz="1140" dirty="0"/>
+          </a:p>
+          <a:p>
+            <a:pPr indent="0" marL="0">
+              <a:buNone/>
+            </a:pPr>
+            <a:r>
+              <a:rPr lang="en-US" sz="1140" dirty="0">
                 <a:solidFill>
                   <a:srgbClr val="17364A"/>
                 </a:solidFill>
@@ -12028,7 +12028,7 @@
               </a:rPr>
               <a:t>Prompt injection risk notes</a:t>
             </a:r>
-            <a:endParaRPr lang="en-US" sz="1220" dirty="0"/>
+            <a:endParaRPr lang="en-US" sz="1140" dirty="0"/>
           </a:p>
         </p:txBody>
       </p:sp>
@@ -12040,12 +12040,12 @@
         </p:nvSpPr>
         <p:spPr>
           <a:xfrm>
-            <a:off x="7635240" y="4184294"/>
-            <a:ext cx="3474720" cy="1466698"/>
+            <a:off x="7543800" y="4389120"/>
+            <a:ext cx="3611880" cy="1261872"/>
           </a:xfrm>
           <a:prstGeom prst="roundRect">
             <a:avLst>
-              <a:gd name="adj" fmla="val 7481"/>
+              <a:gd name="adj" fmla="val 8696"/>
             </a:avLst>
           </a:prstGeom>
           <a:solidFill>
@@ -12067,8 +12067,8 @@
         </p:nvSpPr>
         <p:spPr>
           <a:xfrm>
-            <a:off x="7799832" y="4330598"/>
-            <a:ext cx="3145536" cy="256032"/>
+            <a:off x="7708392" y="4517136"/>
+            <a:ext cx="3282696" cy="228600"/>
           </a:xfrm>
           <a:prstGeom prst="rect">
             <a:avLst/>
@@ -12084,7 +12084,7 @@
               <a:buNone/>
             </a:pPr>
             <a:r>
-              <a:rPr lang="en-US" sz="1300" b="1" dirty="0">
+              <a:rPr lang="en-US" sz="1220" b="1" dirty="0">
                 <a:solidFill>
                   <a:srgbClr val="0068B7"/>
                 </a:solidFill>
@@ -12094,7 +12094,7 @@
               </a:rPr>
               <a:t>Safeguard to plan</a:t>
             </a:r>
-            <a:endParaRPr lang="en-US" sz="1300" dirty="0"/>
+            <a:endParaRPr lang="en-US" sz="1220" dirty="0"/>
           </a:p>
         </p:txBody>
       </p:sp>
@@ -12106,8 +12106,8 @@
         </p:nvSpPr>
         <p:spPr>
           <a:xfrm>
-            <a:off x="7799832" y="4659782"/>
-            <a:ext cx="3145536" cy="899770"/>
+            <a:off x="7708392" y="4828032"/>
+            <a:ext cx="3282696" cy="749808"/>
           </a:xfrm>
           <a:prstGeom prst="rect">
             <a:avLst/>
@@ -12125,7 +12125,7 @@
               <a:buNone/>
             </a:pPr>
             <a:r>
-              <a:rPr lang="en-US" sz="1320" dirty="0">
+              <a:rPr lang="en-US" sz="1220" dirty="0">
                 <a:solidFill>
                   <a:srgbClr val="17364A"/>
                 </a:solidFill>
@@ -12133,9 +12133,9 @@
                 <a:ea typeface="Aptos" pitchFamily="34" charset="-122"/>
                 <a:cs typeface="Aptos" pitchFamily="34" charset="-120"/>
               </a:rPr>
-              <a:t>Use the assignment to test whether you can explain the concept, apply it to a realistic public health situation, and identify what would need review before the work moves forward.</a:t>
-            </a:r>
-            <a:endParaRPr lang="en-US" sz="1320" dirty="0"/>
+              <a:t>Use the assignment to test whether you can explain the concept, apply it to a.</a:t>
+            </a:r>
+            <a:endParaRPr lang="en-US" sz="1220" dirty="0"/>
           </a:p>
         </p:txBody>
       </p:sp>
@@ -12426,8 +12426,8 @@
         </p:nvSpPr>
         <p:spPr>
           <a:xfrm>
-            <a:off x="868680" y="1508760"/>
-            <a:ext cx="6309360" cy="4160520"/>
+            <a:off x="822960" y="1463040"/>
+            <a:ext cx="6565392" cy="4343400"/>
           </a:xfrm>
           <a:prstGeom prst="rect">
             <a:avLst/>
@@ -12445,7 +12445,7 @@
               <a:buNone/>
             </a:pPr>
             <a:r>
-              <a:rPr lang="en-US" sz="2100" dirty="0">
+              <a:rPr lang="en-US" sz="1920" dirty="0">
                 <a:solidFill>
                   <a:srgbClr val="003A63"/>
                 </a:solidFill>
@@ -12455,14 +12455,14 @@
               </a:rPr>
               <a:t>• 1. What is prompt injection?</a:t>
             </a:r>
-            <a:endParaRPr lang="en-US" sz="2100" dirty="0"/>
-          </a:p>
-          <a:p>
-            <a:pPr indent="0" marL="0">
-              <a:buNone/>
-            </a:pPr>
-            <a:r>
-              <a:rPr lang="en-US" sz="2100" dirty="0">
+            <a:endParaRPr lang="en-US" sz="1920" dirty="0"/>
+          </a:p>
+          <a:p>
+            <a:pPr indent="0" marL="0">
+              <a:buNone/>
+            </a:pPr>
+            <a:r>
+              <a:rPr lang="en-US" sz="1920" dirty="0">
                 <a:solidFill>
                   <a:srgbClr val="003A63"/>
                 </a:solidFill>
@@ -12472,14 +12472,14 @@
               </a:rPr>
               <a:t>• 2. What does least privilege mean?</a:t>
             </a:r>
-            <a:endParaRPr lang="en-US" sz="2100" dirty="0"/>
-          </a:p>
-          <a:p>
-            <a:pPr indent="0" marL="0">
-              <a:buNone/>
-            </a:pPr>
-            <a:r>
-              <a:rPr lang="en-US" sz="2100" dirty="0">
+            <a:endParaRPr lang="en-US" sz="1920" dirty="0"/>
+          </a:p>
+          <a:p>
+            <a:pPr indent="0" marL="0">
+              <a:buNone/>
+            </a:pPr>
+            <a:r>
+              <a:rPr lang="en-US" sz="1920" dirty="0">
                 <a:solidFill>
                   <a:srgbClr val="003A63"/>
                 </a:solidFill>
@@ -12489,7 +12489,7 @@
               </a:rPr>
               <a:t>• 3. Why does agentic AI increase security risk?</a:t>
             </a:r>
-            <a:endParaRPr lang="en-US" sz="2100" dirty="0"/>
+            <a:endParaRPr lang="en-US" sz="1920" dirty="0"/>
           </a:p>
         </p:txBody>
       </p:sp>
@@ -12501,12 +12501,12 @@
         </p:nvSpPr>
         <p:spPr>
           <a:xfrm>
-            <a:off x="7635240" y="1325880"/>
-            <a:ext cx="3474720" cy="1207008"/>
+            <a:off x="7543800" y="1325880"/>
+            <a:ext cx="3611880" cy="1261872"/>
           </a:xfrm>
           <a:prstGeom prst="roundRect">
             <a:avLst>
-              <a:gd name="adj" fmla="val 9091"/>
+              <a:gd name="adj" fmla="val 8696"/>
             </a:avLst>
           </a:prstGeom>
           <a:solidFill>
@@ -12528,8 +12528,8 @@
         </p:nvSpPr>
         <p:spPr>
           <a:xfrm>
-            <a:off x="7799832" y="1472184"/>
-            <a:ext cx="3145536" cy="256032"/>
+            <a:off x="7708392" y="1453896"/>
+            <a:ext cx="3282696" cy="228600"/>
           </a:xfrm>
           <a:prstGeom prst="rect">
             <a:avLst/>
@@ -12545,7 +12545,7 @@
               <a:buNone/>
             </a:pPr>
             <a:r>
-              <a:rPr lang="en-US" sz="1300" b="1" dirty="0">
+              <a:rPr lang="en-US" sz="1220" b="1" dirty="0">
                 <a:solidFill>
                   <a:srgbClr val="0068B7"/>
                 </a:solidFill>
@@ -12555,7 +12555,7 @@
               </a:rPr>
               <a:t>Risk check</a:t>
             </a:r>
-            <a:endParaRPr lang="en-US" sz="1300" dirty="0"/>
+            <a:endParaRPr lang="en-US" sz="1220" dirty="0"/>
           </a:p>
         </p:txBody>
       </p:sp>
@@ -12567,8 +12567,8 @@
         </p:nvSpPr>
         <p:spPr>
           <a:xfrm>
-            <a:off x="7799832" y="1801368"/>
-            <a:ext cx="3145536" cy="640080"/>
+            <a:off x="7708392" y="1764792"/>
+            <a:ext cx="3282696" cy="749808"/>
           </a:xfrm>
           <a:prstGeom prst="rect">
             <a:avLst/>
@@ -12586,7 +12586,7 @@
               <a:buNone/>
             </a:pPr>
             <a:r>
-              <a:rPr lang="en-US" sz="1320" dirty="0">
+              <a:rPr lang="en-US" sz="1220" dirty="0">
                 <a:solidFill>
                   <a:srgbClr val="17364A"/>
                 </a:solidFill>
@@ -12596,7 +12596,7 @@
               </a:rPr>
               <a:t>1. What is prompt injection?</a:t>
             </a:r>
-            <a:endParaRPr lang="en-US" sz="1320" dirty="0"/>
+            <a:endParaRPr lang="en-US" sz="1220" dirty="0"/>
           </a:p>
         </p:txBody>
       </p:sp>
@@ -12608,12 +12608,12 @@
         </p:nvSpPr>
         <p:spPr>
           <a:xfrm>
-            <a:off x="7635240" y="2670048"/>
-            <a:ext cx="3474720" cy="1377086"/>
+            <a:off x="7543800" y="2724912"/>
+            <a:ext cx="3611880" cy="1527048"/>
           </a:xfrm>
           <a:prstGeom prst="roundRect">
             <a:avLst>
-              <a:gd name="adj" fmla="val 7968"/>
+              <a:gd name="adj" fmla="val 7186"/>
             </a:avLst>
           </a:prstGeom>
           <a:solidFill>
@@ -12635,8 +12635,8 @@
         </p:nvSpPr>
         <p:spPr>
           <a:xfrm>
-            <a:off x="7799832" y="2816352"/>
-            <a:ext cx="3145536" cy="256032"/>
+            <a:off x="7708392" y="2852928"/>
+            <a:ext cx="3282696" cy="228600"/>
           </a:xfrm>
           <a:prstGeom prst="rect">
             <a:avLst/>
@@ -12652,7 +12652,7 @@
               <a:buNone/>
             </a:pPr>
             <a:r>
-              <a:rPr lang="en-US" sz="1300" b="1" dirty="0">
+              <a:rPr lang="en-US" sz="1220" b="1" dirty="0">
                 <a:solidFill>
                   <a:srgbClr val="0068B7"/>
                 </a:solidFill>
@@ -12662,7 +12662,7 @@
               </a:rPr>
               <a:t>Concept checkpoints</a:t>
             </a:r>
-            <a:endParaRPr lang="en-US" sz="1300" dirty="0"/>
+            <a:endParaRPr lang="en-US" sz="1220" dirty="0"/>
           </a:p>
         </p:txBody>
       </p:sp>
@@ -12674,8 +12674,8 @@
         </p:nvSpPr>
         <p:spPr>
           <a:xfrm>
-            <a:off x="7818120" y="3182112"/>
-            <a:ext cx="3090672" cy="718718"/>
+            <a:off x="7726680" y="3182112"/>
+            <a:ext cx="3227832" cy="960120"/>
           </a:xfrm>
           <a:prstGeom prst="rect">
             <a:avLst/>
@@ -12693,7 +12693,7 @@
               <a:buNone/>
             </a:pPr>
             <a:r>
-              <a:rPr lang="en-US" sz="1220" dirty="0">
+              <a:rPr lang="en-US" sz="1140" dirty="0">
                 <a:solidFill>
                   <a:srgbClr val="17364A"/>
                 </a:solidFill>
@@ -12703,14 +12703,14 @@
               </a:rPr>
               <a:t>1.</a:t>
             </a:r>
-            <a:endParaRPr lang="en-US" sz="1220" dirty="0"/>
-          </a:p>
-          <a:p>
-            <a:pPr indent="0" marL="0">
-              <a:buNone/>
-            </a:pPr>
-            <a:r>
-              <a:rPr lang="en-US" sz="1220" dirty="0">
+            <a:endParaRPr lang="en-US" sz="1140" dirty="0"/>
+          </a:p>
+          <a:p>
+            <a:pPr indent="0" marL="0">
+              <a:buNone/>
+            </a:pPr>
+            <a:r>
+              <a:rPr lang="en-US" sz="1140" dirty="0">
                 <a:solidFill>
                   <a:srgbClr val="17364A"/>
                 </a:solidFill>
@@ -12720,14 +12720,14 @@
               </a:rPr>
               <a:t>What is prompt injection?</a:t>
             </a:r>
-            <a:endParaRPr lang="en-US" sz="1220" dirty="0"/>
-          </a:p>
-          <a:p>
-            <a:pPr indent="0" marL="0">
-              <a:buNone/>
-            </a:pPr>
-            <a:r>
-              <a:rPr lang="en-US" sz="1220" dirty="0">
+            <a:endParaRPr lang="en-US" sz="1140" dirty="0"/>
+          </a:p>
+          <a:p>
+            <a:pPr indent="0" marL="0">
+              <a:buNone/>
+            </a:pPr>
+            <a:r>
+              <a:rPr lang="en-US" sz="1140" dirty="0">
                 <a:solidFill>
                   <a:srgbClr val="17364A"/>
                 </a:solidFill>
@@ -12737,7 +12737,7 @@
               </a:rPr>
               <a:t>2.</a:t>
             </a:r>
-            <a:endParaRPr lang="en-US" sz="1220" dirty="0"/>
+            <a:endParaRPr lang="en-US" sz="1140" dirty="0"/>
           </a:p>
         </p:txBody>
       </p:sp>
@@ -12749,12 +12749,12 @@
         </p:nvSpPr>
         <p:spPr>
           <a:xfrm>
-            <a:off x="7635240" y="4184294"/>
-            <a:ext cx="3474720" cy="1466698"/>
+            <a:off x="7543800" y="4389120"/>
+            <a:ext cx="3611880" cy="1261872"/>
           </a:xfrm>
           <a:prstGeom prst="roundRect">
             <a:avLst>
-              <a:gd name="adj" fmla="val 7481"/>
+              <a:gd name="adj" fmla="val 8696"/>
             </a:avLst>
           </a:prstGeom>
           <a:solidFill>
@@ -12776,8 +12776,8 @@
         </p:nvSpPr>
         <p:spPr>
           <a:xfrm>
-            <a:off x="7799832" y="4330598"/>
-            <a:ext cx="3145536" cy="256032"/>
+            <a:off x="7708392" y="4517136"/>
+            <a:ext cx="3282696" cy="228600"/>
           </a:xfrm>
           <a:prstGeom prst="rect">
             <a:avLst/>
@@ -12793,7 +12793,7 @@
               <a:buNone/>
             </a:pPr>
             <a:r>
-              <a:rPr lang="en-US" sz="1300" b="1" dirty="0">
+              <a:rPr lang="en-US" sz="1220" b="1" dirty="0">
                 <a:solidFill>
                   <a:srgbClr val="0068B7"/>
                 </a:solidFill>
@@ -12803,7 +12803,7 @@
               </a:rPr>
               <a:t>Safeguard to plan</a:t>
             </a:r>
-            <a:endParaRPr lang="en-US" sz="1300" dirty="0"/>
+            <a:endParaRPr lang="en-US" sz="1220" dirty="0"/>
           </a:p>
         </p:txBody>
       </p:sp>
@@ -12815,8 +12815,8 @@
         </p:nvSpPr>
         <p:spPr>
           <a:xfrm>
-            <a:off x="7799832" y="4659782"/>
-            <a:ext cx="3145536" cy="899770"/>
+            <a:off x="7708392" y="4828032"/>
+            <a:ext cx="3282696" cy="749808"/>
           </a:xfrm>
           <a:prstGeom prst="rect">
             <a:avLst/>
@@ -12834,7 +12834,7 @@
               <a:buNone/>
             </a:pPr>
             <a:r>
-              <a:rPr lang="en-US" sz="1320" dirty="0">
+              <a:rPr lang="en-US" sz="1220" dirty="0">
                 <a:solidFill>
                   <a:srgbClr val="17364A"/>
                 </a:solidFill>
@@ -12842,9 +12842,9 @@
                 <a:ea typeface="Aptos" pitchFamily="34" charset="-122"/>
                 <a:cs typeface="Aptos" pitchFamily="34" charset="-120"/>
               </a:rPr>
-              <a:t>Use the assignment to test whether you can explain the concept, apply it to a realistic public health situation, and identify what would need review before the work moves forward.</a:t>
-            </a:r>
-            <a:endParaRPr lang="en-US" sz="1320" dirty="0"/>
+              <a:t>Use the assignment to test whether you can explain the concept, apply it to a.</a:t>
+            </a:r>
+            <a:endParaRPr lang="en-US" sz="1220" dirty="0"/>
           </a:p>
         </p:txBody>
       </p:sp>
@@ -13135,8 +13135,8 @@
         </p:nvSpPr>
         <p:spPr>
           <a:xfrm>
-            <a:off x="868680" y="1508760"/>
-            <a:ext cx="6309360" cy="4160520"/>
+            <a:off x="822960" y="1463040"/>
+            <a:ext cx="6565392" cy="4343400"/>
           </a:xfrm>
           <a:prstGeom prst="rect">
             <a:avLst/>
@@ -13154,7 +13154,7 @@
               <a:buNone/>
             </a:pPr>
             <a:r>
-              <a:rPr lang="en-US" sz="2100" dirty="0">
+              <a:rPr lang="en-US" sz="1920" dirty="0">
                 <a:solidFill>
                   <a:srgbClr val="003A63"/>
                 </a:solidFill>
@@ -13164,14 +13164,14 @@
               </a:rPr>
               <a:t>• OWASP Top 10 for Large Language Model Applications:.</a:t>
             </a:r>
-            <a:endParaRPr lang="en-US" sz="2100" dirty="0"/>
-          </a:p>
-          <a:p>
-            <a:pPr indent="0" marL="0">
-              <a:buNone/>
-            </a:pPr>
-            <a:r>
-              <a:rPr lang="en-US" sz="2100" dirty="0">
+            <a:endParaRPr lang="en-US" sz="1920" dirty="0"/>
+          </a:p>
+          <a:p>
+            <a:pPr indent="0" marL="0">
+              <a:buNone/>
+            </a:pPr>
+            <a:r>
+              <a:rPr lang="en-US" sz="1920" dirty="0">
                 <a:solidFill>
                   <a:srgbClr val="003A63"/>
                 </a:solidFill>
@@ -13181,14 +13181,14 @@
               </a:rPr>
               <a:t>• NIST Artificial Intelligence Risk Management Framework:.</a:t>
             </a:r>
-            <a:endParaRPr lang="en-US" sz="2100" dirty="0"/>
-          </a:p>
-          <a:p>
-            <a:pPr indent="0" marL="0">
-              <a:buNone/>
-            </a:pPr>
-            <a:r>
-              <a:rPr lang="en-US" sz="2100" dirty="0">
+            <a:endParaRPr lang="en-US" sz="1920" dirty="0"/>
+          </a:p>
+          <a:p>
+            <a:pPr indent="0" marL="0">
+              <a:buNone/>
+            </a:pPr>
+            <a:r>
+              <a:rPr lang="en-US" sz="1920" dirty="0">
                 <a:solidFill>
                   <a:srgbClr val="003A63"/>
                 </a:solidFill>
@@ -13198,7 +13198,7 @@
               </a:rPr>
               <a:t>• NIST AI RMF Generative AI Profile:.</a:t>
             </a:r>
-            <a:endParaRPr lang="en-US" sz="2100" dirty="0"/>
+            <a:endParaRPr lang="en-US" sz="1920" dirty="0"/>
           </a:p>
         </p:txBody>
       </p:sp>
@@ -13210,12 +13210,12 @@
         </p:nvSpPr>
         <p:spPr>
           <a:xfrm>
-            <a:off x="7635240" y="1325880"/>
-            <a:ext cx="3474720" cy="1207008"/>
+            <a:off x="7543800" y="1325880"/>
+            <a:ext cx="3611880" cy="1261872"/>
           </a:xfrm>
           <a:prstGeom prst="roundRect">
             <a:avLst>
-              <a:gd name="adj" fmla="val 9091"/>
+              <a:gd name="adj" fmla="val 8696"/>
             </a:avLst>
           </a:prstGeom>
           <a:solidFill>
@@ -13237,8 +13237,8 @@
         </p:nvSpPr>
         <p:spPr>
           <a:xfrm>
-            <a:off x="7799832" y="1472184"/>
-            <a:ext cx="3145536" cy="256032"/>
+            <a:off x="7708392" y="1453896"/>
+            <a:ext cx="3282696" cy="228600"/>
           </a:xfrm>
           <a:prstGeom prst="rect">
             <a:avLst/>
@@ -13254,7 +13254,7 @@
               <a:buNone/>
             </a:pPr>
             <a:r>
-              <a:rPr lang="en-US" sz="1300" b="1" dirty="0">
+              <a:rPr lang="en-US" sz="1220" b="1" dirty="0">
                 <a:solidFill>
                   <a:srgbClr val="0068B7"/>
                 </a:solidFill>
@@ -13264,7 +13264,7 @@
               </a:rPr>
               <a:t>Risk check</a:t>
             </a:r>
-            <a:endParaRPr lang="en-US" sz="1300" dirty="0"/>
+            <a:endParaRPr lang="en-US" sz="1220" dirty="0"/>
           </a:p>
         </p:txBody>
       </p:sp>
@@ -13276,8 +13276,8 @@
         </p:nvSpPr>
         <p:spPr>
           <a:xfrm>
-            <a:off x="7799832" y="1801368"/>
-            <a:ext cx="3145536" cy="640080"/>
+            <a:off x="7708392" y="1764792"/>
+            <a:ext cx="3282696" cy="749808"/>
           </a:xfrm>
           <a:prstGeom prst="rect">
             <a:avLst/>
@@ -13295,7 +13295,7 @@
               <a:buNone/>
             </a:pPr>
             <a:r>
-              <a:rPr lang="en-US" sz="1320" dirty="0">
+              <a:rPr lang="en-US" sz="1220" dirty="0">
                 <a:solidFill>
                   <a:srgbClr val="17364A"/>
                 </a:solidFill>
@@ -13305,7 +13305,7 @@
               </a:rPr>
               <a:t>OWASP Top 10 for Large Language Model Applications:.</a:t>
             </a:r>
-            <a:endParaRPr lang="en-US" sz="1320" dirty="0"/>
+            <a:endParaRPr lang="en-US" sz="1220" dirty="0"/>
           </a:p>
         </p:txBody>
       </p:sp>
@@ -13317,12 +13317,12 @@
         </p:nvSpPr>
         <p:spPr>
           <a:xfrm>
-            <a:off x="7635240" y="2670048"/>
-            <a:ext cx="3474720" cy="1536192"/>
+            <a:off x="7543800" y="2724912"/>
+            <a:ext cx="3611880" cy="1527048"/>
           </a:xfrm>
           <a:prstGeom prst="roundRect">
             <a:avLst>
-              <a:gd name="adj" fmla="val 7143"/>
+              <a:gd name="adj" fmla="val 7186"/>
             </a:avLst>
           </a:prstGeom>
           <a:solidFill>
@@ -13344,8 +13344,8 @@
         </p:nvSpPr>
         <p:spPr>
           <a:xfrm>
-            <a:off x="7799832" y="2816352"/>
-            <a:ext cx="3145536" cy="256032"/>
+            <a:off x="7708392" y="2852928"/>
+            <a:ext cx="3282696" cy="228600"/>
           </a:xfrm>
           <a:prstGeom prst="rect">
             <a:avLst/>
@@ -13361,7 +13361,7 @@
               <a:buNone/>
             </a:pPr>
             <a:r>
-              <a:rPr lang="en-US" sz="1300" b="1" dirty="0">
+              <a:rPr lang="en-US" sz="1220" b="1" dirty="0">
                 <a:solidFill>
                   <a:srgbClr val="0068B7"/>
                 </a:solidFill>
@@ -13371,7 +13371,7 @@
               </a:rPr>
               <a:t>Concept checkpoints</a:t>
             </a:r>
-            <a:endParaRPr lang="en-US" sz="1300" dirty="0"/>
+            <a:endParaRPr lang="en-US" sz="1220" dirty="0"/>
           </a:p>
         </p:txBody>
       </p:sp>
@@ -13383,8 +13383,8 @@
         </p:nvSpPr>
         <p:spPr>
           <a:xfrm>
-            <a:off x="7818120" y="3182112"/>
-            <a:ext cx="3090672" cy="877824"/>
+            <a:off x="7726680" y="3182112"/>
+            <a:ext cx="3227832" cy="960120"/>
           </a:xfrm>
           <a:prstGeom prst="rect">
             <a:avLst/>
@@ -13402,7 +13402,7 @@
               <a:buNone/>
             </a:pPr>
             <a:r>
-              <a:rPr lang="en-US" sz="1220" dirty="0">
+              <a:rPr lang="en-US" sz="1140" dirty="0">
                 <a:solidFill>
                   <a:srgbClr val="17364A"/>
                 </a:solidFill>
@@ -13410,16 +13410,16 @@
                 <a:ea typeface="Aptos" pitchFamily="34" charset="-122"/>
                 <a:cs typeface="Aptos" pitchFamily="34" charset="-120"/>
               </a:rPr>
-              <a:t>NIST Artificial Intelligence Risk Management Framework:.</a:t>
-            </a:r>
-            <a:endParaRPr lang="en-US" sz="1220" dirty="0"/>
-          </a:p>
-          <a:p>
-            <a:pPr indent="0" marL="0">
-              <a:buNone/>
-            </a:pPr>
-            <a:r>
-              <a:rPr lang="en-US" sz="1220" dirty="0">
+              <a:t>NIST Artificial Intelligence Risk Management.</a:t>
+            </a:r>
+            <a:endParaRPr lang="en-US" sz="1140" dirty="0"/>
+          </a:p>
+          <a:p>
+            <a:pPr indent="0" marL="0">
+              <a:buNone/>
+            </a:pPr>
+            <a:r>
+              <a:rPr lang="en-US" sz="1140" dirty="0">
                 <a:solidFill>
                   <a:srgbClr val="17364A"/>
                 </a:solidFill>
@@ -13427,16 +13427,16 @@
                 <a:ea typeface="Aptos" pitchFamily="34" charset="-122"/>
                 <a:cs typeface="Aptos" pitchFamily="34" charset="-120"/>
               </a:rPr>
-              <a:t>NIST Privacy Framework: https://www.nist.gov/privacy-framework</a:t>
-            </a:r>
-            <a:endParaRPr lang="en-US" sz="1220" dirty="0"/>
-          </a:p>
-          <a:p>
-            <a:pPr indent="0" marL="0">
-              <a:buNone/>
-            </a:pPr>
-            <a:r>
-              <a:rPr lang="en-US" sz="1220" dirty="0">
+              <a:t>NIST Privacy Framework:.</a:t>
+            </a:r>
+            <a:endParaRPr lang="en-US" sz="1140" dirty="0"/>
+          </a:p>
+          <a:p>
+            <a:pPr indent="0" marL="0">
+              <a:buNone/>
+            </a:pPr>
+            <a:r>
+              <a:rPr lang="en-US" sz="1140" dirty="0">
                 <a:solidFill>
                   <a:srgbClr val="17364A"/>
                 </a:solidFill>
@@ -13444,9 +13444,9 @@
                 <a:ea typeface="Aptos" pitchFamily="34" charset="-122"/>
                 <a:cs typeface="Aptos" pitchFamily="34" charset="-120"/>
               </a:rPr>
-              <a:t>Agency cybersecurity, identity/access management, privacy,.</a:t>
-            </a:r>
-            <a:endParaRPr lang="en-US" sz="1220" dirty="0"/>
+              <a:t>Agency cybersecurity, identity/access management,.</a:t>
+            </a:r>
+            <a:endParaRPr lang="en-US" sz="1140" dirty="0"/>
           </a:p>
         </p:txBody>
       </p:sp>
@@ -13458,12 +13458,12 @@
         </p:nvSpPr>
         <p:spPr>
           <a:xfrm>
-            <a:off x="7635240" y="4343400"/>
-            <a:ext cx="3474720" cy="1255471"/>
+            <a:off x="7543800" y="4389120"/>
+            <a:ext cx="3611880" cy="1261872"/>
           </a:xfrm>
           <a:prstGeom prst="roundRect">
             <a:avLst>
-              <a:gd name="adj" fmla="val 8740"/>
+              <a:gd name="adj" fmla="val 8696"/>
             </a:avLst>
           </a:prstGeom>
           <a:solidFill>
@@ -13485,8 +13485,8 @@
         </p:nvSpPr>
         <p:spPr>
           <a:xfrm>
-            <a:off x="7799832" y="4489704"/>
-            <a:ext cx="3145536" cy="256032"/>
+            <a:off x="7708392" y="4517136"/>
+            <a:ext cx="3282696" cy="228600"/>
           </a:xfrm>
           <a:prstGeom prst="rect">
             <a:avLst/>
@@ -13502,7 +13502,7 @@
               <a:buNone/>
             </a:pPr>
             <a:r>
-              <a:rPr lang="en-US" sz="1300" b="1" dirty="0">
+              <a:rPr lang="en-US" sz="1220" b="1" dirty="0">
                 <a:solidFill>
                   <a:srgbClr val="0068B7"/>
                 </a:solidFill>
@@ -13512,7 +13512,7 @@
               </a:rPr>
               <a:t>Safeguard to plan</a:t>
             </a:r>
-            <a:endParaRPr lang="en-US" sz="1300" dirty="0"/>
+            <a:endParaRPr lang="en-US" sz="1220" dirty="0"/>
           </a:p>
         </p:txBody>
       </p:sp>
@@ -13524,8 +13524,8 @@
         </p:nvSpPr>
         <p:spPr>
           <a:xfrm>
-            <a:off x="7799832" y="4818888"/>
-            <a:ext cx="3145536" cy="688543"/>
+            <a:off x="7708392" y="4828032"/>
+            <a:ext cx="3282696" cy="749808"/>
           </a:xfrm>
           <a:prstGeom prst="rect">
             <a:avLst/>
@@ -13543,7 +13543,7 @@
               <a:buNone/>
             </a:pPr>
             <a:r>
-              <a:rPr lang="en-US" sz="1320" dirty="0">
+              <a:rPr lang="en-US" sz="1220" dirty="0">
                 <a:solidFill>
                   <a:srgbClr val="17364A"/>
                 </a:solidFill>
@@ -13551,9 +13551,9 @@
                 <a:ea typeface="Aptos" pitchFamily="34" charset="-122"/>
                 <a:cs typeface="Aptos" pitchFamily="34" charset="-120"/>
               </a:rPr>
-              <a:t>Identify what could go wrong, who could be affected, what safeguards are needed, and what evidence should be reviewed before use.</a:t>
-            </a:r>
-            <a:endParaRPr lang="en-US" sz="1320" dirty="0"/>
+              <a:t>Identify what could go wrong, who could be affected, what safeguards are needed,.</a:t>
+            </a:r>
+            <a:endParaRPr lang="en-US" sz="1220" dirty="0"/>
           </a:p>
         </p:txBody>
       </p:sp>
@@ -13871,7 +13871,7 @@
                 <a:ea typeface="Aptos" pitchFamily="34" charset="-122"/>
                 <a:cs typeface="Aptos" pitchFamily="34" charset="-120"/>
               </a:rPr>
-              <a:t>• Play 11: Build and Deploy AI Solutions - This lesson informs Play 11 by helping learners.</a:t>
+              <a:t>• Play 11: Build and Deploy AI Solutions - This lesson informs Play 11 by.</a:t>
             </a:r>
             <a:endParaRPr lang="en-US" sz="1900" dirty="0"/>
           </a:p>
@@ -13888,7 +13888,7 @@
                 <a:ea typeface="Aptos" pitchFamily="34" charset="-122"/>
                 <a:cs typeface="Aptos" pitchFamily="34" charset="-120"/>
               </a:rPr>
-              <a:t>• Play 1: Vision &amp; Guardrails - This lesson informs Play 1 by helping learners connect the.</a:t>
+              <a:t>• Play 1: Vision &amp; Guardrails - This lesson informs Play 1 by helping learners.</a:t>
             </a:r>
             <a:endParaRPr lang="en-US" sz="1900" dirty="0"/>
           </a:p>
@@ -13905,7 +13905,7 @@
                 <a:ea typeface="Aptos" pitchFamily="34" charset="-122"/>
                 <a:cs typeface="Aptos" pitchFamily="34" charset="-120"/>
               </a:rPr>
-              <a:t>• Play 7: Prioritize Use Cases - This lesson informs Play 7 by helping learners connect the.</a:t>
+              <a:t>• Play 7: Prioritize Use Cases - This lesson informs Play 7 by helping.</a:t>
             </a:r>
             <a:endParaRPr lang="en-US" sz="1900" dirty="0"/>
           </a:p>
@@ -13922,7 +13922,7 @@
                 <a:ea typeface="Aptos" pitchFamily="34" charset="-122"/>
                 <a:cs typeface="Aptos" pitchFamily="34" charset="-120"/>
               </a:rPr>
-              <a:t>• Play 8: Develop a Funding Strategy - This lesson informs Play 8 by helping learners connect.</a:t>
+              <a:t>• Play 8: Develop a Funding Strategy - This lesson informs Play 8 by helping.</a:t>
             </a:r>
             <a:endParaRPr lang="en-US" sz="1900" dirty="0"/>
           </a:p>
@@ -13963,8 +13963,8 @@
         </p:nvSpPr>
         <p:spPr>
           <a:xfrm>
-            <a:off x="8211312" y="1563624"/>
-            <a:ext cx="2734056" cy="256032"/>
+            <a:off x="8211312" y="1545336"/>
+            <a:ext cx="2734056" cy="228600"/>
           </a:xfrm>
           <a:prstGeom prst="rect">
             <a:avLst/>
@@ -13980,7 +13980,7 @@
               <a:buNone/>
             </a:pPr>
             <a:r>
-              <a:rPr lang="en-US" sz="1300" b="1" dirty="0">
+              <a:rPr lang="en-US" sz="1220" b="1" dirty="0">
                 <a:solidFill>
                   <a:srgbClr val="0068B7"/>
                 </a:solidFill>
@@ -13990,7 +13990,7 @@
               </a:rPr>
               <a:t>Apply the lesson</a:t>
             </a:r>
-            <a:endParaRPr lang="en-US" sz="1300" dirty="0"/>
+            <a:endParaRPr lang="en-US" sz="1220" dirty="0"/>
           </a:p>
         </p:txBody>
       </p:sp>
@@ -14002,8 +14002,8 @@
         </p:nvSpPr>
         <p:spPr>
           <a:xfrm>
-            <a:off x="8211312" y="1892808"/>
-            <a:ext cx="2734056" cy="1536192"/>
+            <a:off x="8211312" y="1856232"/>
+            <a:ext cx="2734056" cy="1591056"/>
           </a:xfrm>
           <a:prstGeom prst="rect">
             <a:avLst/>
@@ -14021,7 +14021,7 @@
               <a:buNone/>
             </a:pPr>
             <a:r>
-              <a:rPr lang="en-US" sz="1320" dirty="0">
+              <a:rPr lang="en-US" sz="1220" dirty="0">
                 <a:solidFill>
                   <a:srgbClr val="17364A"/>
                 </a:solidFill>
@@ -14029,9 +14029,9 @@
                 <a:ea typeface="Aptos" pitchFamily="34" charset="-122"/>
                 <a:cs typeface="Aptos" pitchFamily="34" charset="-120"/>
               </a:rPr>
-              <a:t>Use the related plays to identify decisions, participants, timing, approvals, and documentation needed for responsible implementation.</a:t>
-            </a:r>
-            <a:endParaRPr lang="en-US" sz="1320" dirty="0"/>
+              <a:t>Use the related plays to identify decisions, participants, timing, approvals,.</a:t>
+            </a:r>
+            <a:endParaRPr lang="en-US" sz="1220" dirty="0"/>
           </a:p>
         </p:txBody>
       </p:sp>
@@ -14070,8 +14070,8 @@
         </p:nvSpPr>
         <p:spPr>
           <a:xfrm>
-            <a:off x="8211312" y="3941064"/>
-            <a:ext cx="2734056" cy="256032"/>
+            <a:off x="8211312" y="3922776"/>
+            <a:ext cx="2734056" cy="228600"/>
           </a:xfrm>
           <a:prstGeom prst="rect">
             <a:avLst/>
@@ -14087,7 +14087,7 @@
               <a:buNone/>
             </a:pPr>
             <a:r>
-              <a:rPr lang="en-US" sz="1300" b="1" dirty="0">
+              <a:rPr lang="en-US" sz="1220" b="1" dirty="0">
                 <a:solidFill>
                   <a:srgbClr val="0068B7"/>
                 </a:solidFill>
@@ -14097,7 +14097,7 @@
               </a:rPr>
               <a:t>Use the play links to</a:t>
             </a:r>
-            <a:endParaRPr lang="en-US" sz="1300" dirty="0"/>
+            <a:endParaRPr lang="en-US" sz="1220" dirty="0"/>
           </a:p>
         </p:txBody>
       </p:sp>
@@ -14109,8 +14109,8 @@
         </p:nvSpPr>
         <p:spPr>
           <a:xfrm>
-            <a:off x="8229600" y="4306824"/>
-            <a:ext cx="2679192" cy="941832"/>
+            <a:off x="8229600" y="4251960"/>
+            <a:ext cx="2679192" cy="1033272"/>
           </a:xfrm>
           <a:prstGeom prst="rect">
             <a:avLst/>
@@ -14128,7 +14128,7 @@
               <a:buNone/>
             </a:pPr>
             <a:r>
-              <a:rPr lang="en-US" sz="1220" dirty="0">
+              <a:rPr lang="en-US" sz="1140" dirty="0">
                 <a:solidFill>
                   <a:srgbClr val="17364A"/>
                 </a:solidFill>
@@ -14138,14 +14138,14 @@
               </a:rPr>
               <a:t>Locate the decision point in the playbook sequence.</a:t>
             </a:r>
-            <a:endParaRPr lang="en-US" sz="1220" dirty="0"/>
-          </a:p>
-          <a:p>
-            <a:pPr indent="0" marL="0">
-              <a:buNone/>
-            </a:pPr>
-            <a:r>
-              <a:rPr lang="en-US" sz="1220" dirty="0">
+            <a:endParaRPr lang="en-US" sz="1140" dirty="0"/>
+          </a:p>
+          <a:p>
+            <a:pPr indent="0" marL="0">
+              <a:buNone/>
+            </a:pPr>
+            <a:r>
+              <a:rPr lang="en-US" sz="1140" dirty="0">
                 <a:solidFill>
                   <a:srgbClr val="17364A"/>
                 </a:solidFill>
@@ -14155,14 +14155,14 @@
               </a:rPr>
               <a:t>Identify who should participate in the work.</a:t>
             </a:r>
-            <a:endParaRPr lang="en-US" sz="1220" dirty="0"/>
-          </a:p>
-          <a:p>
-            <a:pPr indent="0" marL="0">
-              <a:buNone/>
-            </a:pPr>
-            <a:r>
-              <a:rPr lang="en-US" sz="1220" dirty="0">
+            <a:endParaRPr lang="en-US" sz="1140" dirty="0"/>
+          </a:p>
+          <a:p>
+            <a:pPr indent="0" marL="0">
+              <a:buNone/>
+            </a:pPr>
+            <a:r>
+              <a:rPr lang="en-US" sz="1140" dirty="0">
                 <a:solidFill>
                   <a:srgbClr val="17364A"/>
                 </a:solidFill>
@@ -14170,9 +14170,9 @@
                 <a:ea typeface="Aptos" pitchFamily="34" charset="-122"/>
                 <a:cs typeface="Aptos" pitchFamily="34" charset="-120"/>
               </a:rPr>
-              <a:t>Document the review, approval, or implementation step.</a:t>
-            </a:r>
-            <a:endParaRPr lang="en-US" sz="1220" dirty="0"/>
+              <a:t>Document the review, approval, or implementation.</a:t>
+            </a:r>
+            <a:endParaRPr lang="en-US" sz="1140" dirty="0"/>
           </a:p>
         </p:txBody>
       </p:sp>
@@ -14490,7 +14490,7 @@
                 <a:ea typeface="Aptos" pitchFamily="34" charset="-122"/>
                 <a:cs typeface="Aptos" pitchFamily="34" charset="-120"/>
               </a:rPr>
-              <a:t>• Tool 32: Vendor Evaluation Checklist (Checklist) - Use this tool to complete or strengthen the.</a:t>
+              <a:t>• Tool 32: Vendor Evaluation Checklist (Checklist) - Use this tool to complete.</a:t>
             </a:r>
             <a:endParaRPr lang="en-US" sz="1850" dirty="0"/>
           </a:p>
@@ -14507,7 +14507,7 @@
                 <a:ea typeface="Aptos" pitchFamily="34" charset="-122"/>
                 <a:cs typeface="Aptos" pitchFamily="34" charset="-120"/>
               </a:rPr>
-              <a:t>• Tool 34: STLT AI Procurement and Vendor Addendum (Checklist) - Use this tool to complete or.</a:t>
+              <a:t>• Tool 34: STLT AI Procurement and Vendor Addendum (Checklist) - Use this tool.</a:t>
             </a:r>
             <a:endParaRPr lang="en-US" sz="1850" dirty="0"/>
           </a:p>
@@ -14524,7 +14524,7 @@
                 <a:ea typeface="Aptos" pitchFamily="34" charset="-122"/>
                 <a:cs typeface="Aptos" pitchFamily="34" charset="-120"/>
               </a:rPr>
-              <a:t>• Tool 4: AI Policy Landscape Scan (Worksheet) - Use AI Policy Landscape Scan to translate this.</a:t>
+              <a:t>• Tool 4: AI Policy Landscape Scan (Worksheet) - Use AI Policy Landscape Scan.</a:t>
             </a:r>
             <a:endParaRPr lang="en-US" sz="1850" dirty="0"/>
           </a:p>
@@ -14541,7 +14541,7 @@
                 <a:ea typeface="Aptos" pitchFamily="34" charset="-122"/>
                 <a:cs typeface="Aptos" pitchFamily="34" charset="-120"/>
               </a:rPr>
-              <a:t>• Tool 5: AI Environmental and Resource Impact Review (Checklist) - Use AI Environmental and.</a:t>
+              <a:t>• Tool 5: AI Environmental and Resource Impact Review (Checklist) - Use AI.</a:t>
             </a:r>
             <a:endParaRPr lang="en-US" sz="1850" dirty="0"/>
           </a:p>
@@ -14582,8 +14582,8 @@
         </p:nvSpPr>
         <p:spPr>
           <a:xfrm>
-            <a:off x="8211312" y="1563624"/>
-            <a:ext cx="2734056" cy="256032"/>
+            <a:off x="8211312" y="1545336"/>
+            <a:ext cx="2734056" cy="228600"/>
           </a:xfrm>
           <a:prstGeom prst="rect">
             <a:avLst/>
@@ -14599,7 +14599,7 @@
               <a:buNone/>
             </a:pPr>
             <a:r>
-              <a:rPr lang="en-US" sz="1300" b="1" dirty="0">
+              <a:rPr lang="en-US" sz="1220" b="1" dirty="0">
                 <a:solidFill>
                   <a:srgbClr val="0068B7"/>
                 </a:solidFill>
@@ -14609,7 +14609,7 @@
               </a:rPr>
               <a:t>Use the tools</a:t>
             </a:r>
-            <a:endParaRPr lang="en-US" sz="1300" dirty="0"/>
+            <a:endParaRPr lang="en-US" sz="1220" dirty="0"/>
           </a:p>
         </p:txBody>
       </p:sp>
@@ -14621,8 +14621,8 @@
         </p:nvSpPr>
         <p:spPr>
           <a:xfrm>
-            <a:off x="8211312" y="1892808"/>
-            <a:ext cx="2734056" cy="1536192"/>
+            <a:off x="8211312" y="1856232"/>
+            <a:ext cx="2734056" cy="1591056"/>
           </a:xfrm>
           <a:prstGeom prst="rect">
             <a:avLst/>
@@ -14640,7 +14640,7 @@
               <a:buNone/>
             </a:pPr>
             <a:r>
-              <a:rPr lang="en-US" sz="1320" dirty="0">
+              <a:rPr lang="en-US" sz="1220" dirty="0">
                 <a:solidFill>
                   <a:srgbClr val="17364A"/>
                 </a:solidFill>
@@ -14648,9 +14648,9 @@
                 <a:ea typeface="Aptos" pitchFamily="34" charset="-122"/>
                 <a:cs typeface="Aptos" pitchFamily="34" charset="-120"/>
               </a:rPr>
-              <a:t>Use linked tools when your department needs a structured worksheet, template, checklist, review process, or documentation artifact.</a:t>
-            </a:r>
-            <a:endParaRPr lang="en-US" sz="1320" dirty="0"/>
+              <a:t>Use linked tools when your department needs a structured worksheet, template,.</a:t>
+            </a:r>
+            <a:endParaRPr lang="en-US" sz="1220" dirty="0"/>
           </a:p>
         </p:txBody>
       </p:sp>
@@ -14689,8 +14689,8 @@
         </p:nvSpPr>
         <p:spPr>
           <a:xfrm>
-            <a:off x="8211312" y="3941064"/>
-            <a:ext cx="2734056" cy="256032"/>
+            <a:off x="8211312" y="3922776"/>
+            <a:ext cx="2734056" cy="228600"/>
           </a:xfrm>
           <a:prstGeom prst="rect">
             <a:avLst/>
@@ -14706,7 +14706,7 @@
               <a:buNone/>
             </a:pPr>
             <a:r>
-              <a:rPr lang="en-US" sz="1300" b="1" dirty="0">
+              <a:rPr lang="en-US" sz="1220" b="1" dirty="0">
                 <a:solidFill>
                   <a:srgbClr val="0068B7"/>
                 </a:solidFill>
@@ -14716,7 +14716,7 @@
               </a:rPr>
               <a:t>Tool selection cues</a:t>
             </a:r>
-            <a:endParaRPr lang="en-US" sz="1300" dirty="0"/>
+            <a:endParaRPr lang="en-US" sz="1220" dirty="0"/>
           </a:p>
         </p:txBody>
       </p:sp>
@@ -14728,8 +14728,8 @@
         </p:nvSpPr>
         <p:spPr>
           <a:xfrm>
-            <a:off x="8229600" y="4306824"/>
-            <a:ext cx="2679192" cy="941832"/>
+            <a:off x="8229600" y="4251960"/>
+            <a:ext cx="2679192" cy="1033272"/>
           </a:xfrm>
           <a:prstGeom prst="rect">
             <a:avLst/>
@@ -14747,7 +14747,7 @@
               <a:buNone/>
             </a:pPr>
             <a:r>
-              <a:rPr lang="en-US" sz="1220" dirty="0">
+              <a:rPr lang="en-US" sz="1140" dirty="0">
                 <a:solidFill>
                   <a:srgbClr val="17364A"/>
                 </a:solidFill>
@@ -14757,14 +14757,14 @@
               </a:rPr>
               <a:t>Use a tool when no comparable local process exists.</a:t>
             </a:r>
-            <a:endParaRPr lang="en-US" sz="1220" dirty="0"/>
-          </a:p>
-          <a:p>
-            <a:pPr indent="0" marL="0">
-              <a:buNone/>
-            </a:pPr>
-            <a:r>
-              <a:rPr lang="en-US" sz="1220" dirty="0">
+            <a:endParaRPr lang="en-US" sz="1140" dirty="0"/>
+          </a:p>
+          <a:p>
+            <a:pPr indent="0" marL="0">
+              <a:buNone/>
+            </a:pPr>
+            <a:r>
+              <a:rPr lang="en-US" sz="1140" dirty="0">
                 <a:solidFill>
                   <a:srgbClr val="17364A"/>
                 </a:solidFill>
@@ -14772,16 +14772,16 @@
                 <a:ea typeface="Aptos" pitchFamily="34" charset="-122"/>
                 <a:cs typeface="Aptos" pitchFamily="34" charset="-120"/>
               </a:rPr>
-              <a:t>Adapt existing department templates when they already fit the.</a:t>
-            </a:r>
-            <a:endParaRPr lang="en-US" sz="1220" dirty="0"/>
-          </a:p>
-          <a:p>
-            <a:pPr indent="0" marL="0">
-              <a:buNone/>
-            </a:pPr>
-            <a:r>
-              <a:rPr lang="en-US" sz="1220" dirty="0">
+              <a:t>Adapt existing department templates when they.</a:t>
+            </a:r>
+            <a:endParaRPr lang="en-US" sz="1140" dirty="0"/>
+          </a:p>
+          <a:p>
+            <a:pPr indent="0" marL="0">
+              <a:buNone/>
+            </a:pPr>
+            <a:r>
+              <a:rPr lang="en-US" sz="1140" dirty="0">
                 <a:solidFill>
                   <a:srgbClr val="17364A"/>
                 </a:solidFill>
@@ -14789,9 +14789,9 @@
                 <a:ea typeface="Aptos" pitchFamily="34" charset="-122"/>
                 <a:cs typeface="Aptos" pitchFamily="34" charset="-120"/>
               </a:rPr>
-              <a:t>Save the completed artifact as evidence of the decision.</a:t>
-            </a:r>
-            <a:endParaRPr lang="en-US" sz="1220" dirty="0"/>
+              <a:t>Save the completed artifact as evidence of the.</a:t>
+            </a:r>
+            <a:endParaRPr lang="en-US" sz="1140" dirty="0"/>
           </a:p>
         </p:txBody>
       </p:sp>
@@ -15082,8 +15082,8 @@
         </p:nvSpPr>
         <p:spPr>
           <a:xfrm>
-            <a:off x="868680" y="1508760"/>
-            <a:ext cx="6309360" cy="4160520"/>
+            <a:off x="822960" y="1463040"/>
+            <a:ext cx="6565392" cy="4343400"/>
           </a:xfrm>
           <a:prstGeom prst="rect">
             <a:avLst/>
@@ -15101,7 +15101,7 @@
               <a:buNone/>
             </a:pPr>
             <a:r>
-              <a:rPr lang="en-US" sz="2100" dirty="0">
+              <a:rPr lang="en-US" sz="1920" dirty="0">
                 <a:solidFill>
                   <a:srgbClr val="003A63"/>
                 </a:solidFill>
@@ -15111,14 +15111,14 @@
               </a:rPr>
               <a:t>• Define AI security in public health operational terms.</a:t>
             </a:r>
-            <a:endParaRPr lang="en-US" sz="2100" dirty="0"/>
-          </a:p>
-          <a:p>
-            <a:pPr indent="0" marL="0">
-              <a:buNone/>
-            </a:pPr>
-            <a:r>
-              <a:rPr lang="en-US" sz="2100" dirty="0">
+            <a:endParaRPr lang="en-US" sz="1920" dirty="0"/>
+          </a:p>
+          <a:p>
+            <a:pPr indent="0" marL="0">
+              <a:buNone/>
+            </a:pPr>
+            <a:r>
+              <a:rPr lang="en-US" sz="1920" dirty="0">
                 <a:solidFill>
                   <a:srgbClr val="003A63"/>
                 </a:solidFill>
@@ -15126,16 +15126,16 @@
                 <a:ea typeface="Aptos" pitchFamily="34" charset="-122"/>
                 <a:cs typeface="Aptos" pitchFamily="34" charset="-120"/>
               </a:rPr>
-              <a:t>• Identify prompt injection, data leakage, sensitive information disclosure, insecure output.</a:t>
-            </a:r>
-            <a:endParaRPr lang="en-US" sz="2100" dirty="0"/>
-          </a:p>
-          <a:p>
-            <a:pPr indent="0" marL="0">
-              <a:buNone/>
-            </a:pPr>
-            <a:r>
-              <a:rPr lang="en-US" sz="2100" dirty="0">
+              <a:t>• Identify prompt injection, data leakage, sensitive information disclosure,.</a:t>
+            </a:r>
+            <a:endParaRPr lang="en-US" sz="1920" dirty="0"/>
+          </a:p>
+          <a:p>
+            <a:pPr indent="0" marL="0">
+              <a:buNone/>
+            </a:pPr>
+            <a:r>
+              <a:rPr lang="en-US" sz="1920" dirty="0">
                 <a:solidFill>
                   <a:srgbClr val="003A63"/>
                 </a:solidFill>
@@ -15143,9 +15143,9 @@
                 <a:ea typeface="Aptos" pitchFamily="34" charset="-122"/>
                 <a:cs typeface="Aptos" pitchFamily="34" charset="-120"/>
               </a:rPr>
-              <a:t>• Explain why RAG, plugins, APIs, and agentic workflows increase the need for security controls.</a:t>
-            </a:r>
-            <a:endParaRPr lang="en-US" sz="2100" dirty="0"/>
+              <a:t>• Explain why RAG, plugins, APIs, and agentic workflows increase the need for.</a:t>
+            </a:r>
+            <a:endParaRPr lang="en-US" sz="1920" dirty="0"/>
           </a:p>
         </p:txBody>
       </p:sp>
@@ -15157,12 +15157,12 @@
         </p:nvSpPr>
         <p:spPr>
           <a:xfrm>
-            <a:off x="7635240" y="1325880"/>
-            <a:ext cx="3474720" cy="1207008"/>
+            <a:off x="7543800" y="1325880"/>
+            <a:ext cx="3611880" cy="1261872"/>
           </a:xfrm>
           <a:prstGeom prst="roundRect">
             <a:avLst>
-              <a:gd name="adj" fmla="val 9091"/>
+              <a:gd name="adj" fmla="val 8696"/>
             </a:avLst>
           </a:prstGeom>
           <a:solidFill>
@@ -15184,8 +15184,8 @@
         </p:nvSpPr>
         <p:spPr>
           <a:xfrm>
-            <a:off x="7799832" y="1472184"/>
-            <a:ext cx="3145536" cy="256032"/>
+            <a:off x="7708392" y="1453896"/>
+            <a:ext cx="3282696" cy="228600"/>
           </a:xfrm>
           <a:prstGeom prst="rect">
             <a:avLst/>
@@ -15201,7 +15201,7 @@
               <a:buNone/>
             </a:pPr>
             <a:r>
-              <a:rPr lang="en-US" sz="1300" b="1" dirty="0">
+              <a:rPr lang="en-US" sz="1220" b="1" dirty="0">
                 <a:solidFill>
                   <a:srgbClr val="0068B7"/>
                 </a:solidFill>
@@ -15211,7 +15211,7 @@
               </a:rPr>
               <a:t>Risk check</a:t>
             </a:r>
-            <a:endParaRPr lang="en-US" sz="1300" dirty="0"/>
+            <a:endParaRPr lang="en-US" sz="1220" dirty="0"/>
           </a:p>
         </p:txBody>
       </p:sp>
@@ -15223,8 +15223,8 @@
         </p:nvSpPr>
         <p:spPr>
           <a:xfrm>
-            <a:off x="7799832" y="1801368"/>
-            <a:ext cx="3145536" cy="640080"/>
+            <a:off x="7708392" y="1764792"/>
+            <a:ext cx="3282696" cy="749808"/>
           </a:xfrm>
           <a:prstGeom prst="rect">
             <a:avLst/>
@@ -15242,7 +15242,7 @@
               <a:buNone/>
             </a:pPr>
             <a:r>
-              <a:rPr lang="en-US" sz="1320" dirty="0">
+              <a:rPr lang="en-US" sz="1220" dirty="0">
                 <a:solidFill>
                   <a:srgbClr val="17364A"/>
                 </a:solidFill>
@@ -15252,7 +15252,7 @@
               </a:rPr>
               <a:t>Define AI security in public health operational terms.</a:t>
             </a:r>
-            <a:endParaRPr lang="en-US" sz="1320" dirty="0"/>
+            <a:endParaRPr lang="en-US" sz="1220" dirty="0"/>
           </a:p>
         </p:txBody>
       </p:sp>
@@ -15264,12 +15264,12 @@
         </p:nvSpPr>
         <p:spPr>
           <a:xfrm>
-            <a:off x="7635240" y="2670048"/>
-            <a:ext cx="3474720" cy="1377086"/>
+            <a:off x="7543800" y="2724912"/>
+            <a:ext cx="3611880" cy="1527048"/>
           </a:xfrm>
           <a:prstGeom prst="roundRect">
             <a:avLst>
-              <a:gd name="adj" fmla="val 7968"/>
+              <a:gd name="adj" fmla="val 7186"/>
             </a:avLst>
           </a:prstGeom>
           <a:solidFill>
@@ -15291,8 +15291,8 @@
         </p:nvSpPr>
         <p:spPr>
           <a:xfrm>
-            <a:off x="7799832" y="2816352"/>
-            <a:ext cx="3145536" cy="256032"/>
+            <a:off x="7708392" y="2852928"/>
+            <a:ext cx="3282696" cy="228600"/>
           </a:xfrm>
           <a:prstGeom prst="rect">
             <a:avLst/>
@@ -15308,7 +15308,7 @@
               <a:buNone/>
             </a:pPr>
             <a:r>
-              <a:rPr lang="en-US" sz="1300" b="1" dirty="0">
+              <a:rPr lang="en-US" sz="1220" b="1" dirty="0">
                 <a:solidFill>
                   <a:srgbClr val="0068B7"/>
                 </a:solidFill>
@@ -15318,7 +15318,7 @@
               </a:rPr>
               <a:t>Concept checkpoints</a:t>
             </a:r>
-            <a:endParaRPr lang="en-US" sz="1300" dirty="0"/>
+            <a:endParaRPr lang="en-US" sz="1220" dirty="0"/>
           </a:p>
         </p:txBody>
       </p:sp>
@@ -15330,8 +15330,8 @@
         </p:nvSpPr>
         <p:spPr>
           <a:xfrm>
-            <a:off x="7818120" y="3182112"/>
-            <a:ext cx="3090672" cy="718718"/>
+            <a:off x="7726680" y="3182112"/>
+            <a:ext cx="3227832" cy="960120"/>
           </a:xfrm>
           <a:prstGeom prst="rect">
             <a:avLst/>
@@ -15349,7 +15349,7 @@
               <a:buNone/>
             </a:pPr>
             <a:r>
-              <a:rPr lang="en-US" sz="1220" dirty="0">
+              <a:rPr lang="en-US" sz="1140" dirty="0">
                 <a:solidFill>
                   <a:srgbClr val="17364A"/>
                 </a:solidFill>
@@ -15357,16 +15357,16 @@
                 <a:ea typeface="Aptos" pitchFamily="34" charset="-122"/>
                 <a:cs typeface="Aptos" pitchFamily="34" charset="-120"/>
               </a:rPr>
-              <a:t>Identify prompt injection, data leakage, sensitive information.</a:t>
-            </a:r>
-            <a:endParaRPr lang="en-US" sz="1220" dirty="0"/>
-          </a:p>
-          <a:p>
-            <a:pPr indent="0" marL="0">
-              <a:buNone/>
-            </a:pPr>
-            <a:r>
-              <a:rPr lang="en-US" sz="1220" dirty="0">
+              <a:t>Identify prompt injection, data leakage, sensitive.</a:t>
+            </a:r>
+            <a:endParaRPr lang="en-US" sz="1140" dirty="0"/>
+          </a:p>
+          <a:p>
+            <a:pPr indent="0" marL="0">
+              <a:buNone/>
+            </a:pPr>
+            <a:r>
+              <a:rPr lang="en-US" sz="1140" dirty="0">
                 <a:solidFill>
                   <a:srgbClr val="17364A"/>
                 </a:solidFill>
@@ -15374,16 +15374,16 @@
                 <a:ea typeface="Aptos" pitchFamily="34" charset="-122"/>
                 <a:cs typeface="Aptos" pitchFamily="34" charset="-120"/>
               </a:rPr>
-              <a:t>Apply least privilege, approved-tool use, access controls,.</a:t>
-            </a:r>
-            <a:endParaRPr lang="en-US" sz="1220" dirty="0"/>
-          </a:p>
-          <a:p>
-            <a:pPr indent="0" marL="0">
-              <a:buNone/>
-            </a:pPr>
-            <a:r>
-              <a:rPr lang="en-US" sz="1220" dirty="0">
+              <a:t>Apply least privilege, approved-tool use, access.</a:t>
+            </a:r>
+            <a:endParaRPr lang="en-US" sz="1140" dirty="0"/>
+          </a:p>
+          <a:p>
+            <a:pPr indent="0" marL="0">
+              <a:buNone/>
+            </a:pPr>
+            <a:r>
+              <a:rPr lang="en-US" sz="1140" dirty="0">
                 <a:solidFill>
                   <a:srgbClr val="17364A"/>
                 </a:solidFill>
@@ -15391,9 +15391,9 @@
                 <a:ea typeface="Aptos" pitchFamily="34" charset="-122"/>
                 <a:cs typeface="Aptos" pitchFamily="34" charset="-120"/>
               </a:rPr>
-              <a:t>Develop security questions for AI procurement, implementation, and.</a:t>
-            </a:r>
-            <a:endParaRPr lang="en-US" sz="1220" dirty="0"/>
+              <a:t>Develop security questions for AI procurement,.</a:t>
+            </a:r>
+            <a:endParaRPr lang="en-US" sz="1140" dirty="0"/>
           </a:p>
         </p:txBody>
       </p:sp>
@@ -15405,12 +15405,12 @@
         </p:nvSpPr>
         <p:spPr>
           <a:xfrm>
-            <a:off x="7635240" y="4184294"/>
-            <a:ext cx="3474720" cy="1466698"/>
+            <a:off x="7543800" y="4389120"/>
+            <a:ext cx="3611880" cy="1261872"/>
           </a:xfrm>
           <a:prstGeom prst="roundRect">
             <a:avLst>
-              <a:gd name="adj" fmla="val 7481"/>
+              <a:gd name="adj" fmla="val 8696"/>
             </a:avLst>
           </a:prstGeom>
           <a:solidFill>
@@ -15432,8 +15432,8 @@
         </p:nvSpPr>
         <p:spPr>
           <a:xfrm>
-            <a:off x="7799832" y="4330598"/>
-            <a:ext cx="3145536" cy="256032"/>
+            <a:off x="7708392" y="4517136"/>
+            <a:ext cx="3282696" cy="228600"/>
           </a:xfrm>
           <a:prstGeom prst="rect">
             <a:avLst/>
@@ -15449,7 +15449,7 @@
               <a:buNone/>
             </a:pPr>
             <a:r>
-              <a:rPr lang="en-US" sz="1300" b="1" dirty="0">
+              <a:rPr lang="en-US" sz="1220" b="1" dirty="0">
                 <a:solidFill>
                   <a:srgbClr val="0068B7"/>
                 </a:solidFill>
@@ -15459,7 +15459,7 @@
               </a:rPr>
               <a:t>Safeguard to plan</a:t>
             </a:r>
-            <a:endParaRPr lang="en-US" sz="1300" dirty="0"/>
+            <a:endParaRPr lang="en-US" sz="1220" dirty="0"/>
           </a:p>
         </p:txBody>
       </p:sp>
@@ -15471,8 +15471,8 @@
         </p:nvSpPr>
         <p:spPr>
           <a:xfrm>
-            <a:off x="7799832" y="4659782"/>
-            <a:ext cx="3145536" cy="899770"/>
+            <a:off x="7708392" y="4828032"/>
+            <a:ext cx="3282696" cy="749808"/>
           </a:xfrm>
           <a:prstGeom prst="rect">
             <a:avLst/>
@@ -15490,7 +15490,7 @@
               <a:buNone/>
             </a:pPr>
             <a:r>
-              <a:rPr lang="en-US" sz="1320" dirty="0">
+              <a:rPr lang="en-US" sz="1220" dirty="0">
                 <a:solidFill>
                   <a:srgbClr val="17364A"/>
                 </a:solidFill>
@@ -15498,9 +15498,9 @@
                 <a:ea typeface="Aptos" pitchFamily="34" charset="-122"/>
                 <a:cs typeface="Aptos" pitchFamily="34" charset="-120"/>
               </a:rPr>
-              <a:t>Use the assignment to test whether you can explain the concept, apply it to a realistic public health situation, and identify what would need review before the work moves forward.</a:t>
-            </a:r>
-            <a:endParaRPr lang="en-US" sz="1320" dirty="0"/>
+              <a:t>Use the assignment to test whether you can explain the concept, apply it to a.</a:t>
+            </a:r>
+            <a:endParaRPr lang="en-US" sz="1220" dirty="0"/>
           </a:p>
         </p:txBody>
       </p:sp>
@@ -15791,8 +15791,8 @@
         </p:nvSpPr>
         <p:spPr>
           <a:xfrm>
-            <a:off x="868680" y="1508760"/>
-            <a:ext cx="6309360" cy="4160520"/>
+            <a:off x="822960" y="1463040"/>
+            <a:ext cx="6565392" cy="4343400"/>
           </a:xfrm>
           <a:prstGeom prst="rect">
             <a:avLst/>
@@ -15810,7 +15810,7 @@
               <a:buNone/>
             </a:pPr>
             <a:r>
-              <a:rPr lang="en-US" sz="2100" dirty="0">
+              <a:rPr lang="en-US" sz="1920" dirty="0">
                 <a:solidFill>
                   <a:srgbClr val="003A63"/>
                 </a:solidFill>
@@ -15820,7 +15820,7 @@
               </a:rPr>
               <a:t>• Produce a secure AI workflow checklist.</a:t>
             </a:r>
-            <a:endParaRPr lang="en-US" sz="2100" dirty="0"/>
+            <a:endParaRPr lang="en-US" sz="1920" dirty="0"/>
           </a:p>
         </p:txBody>
       </p:sp>
@@ -15832,12 +15832,12 @@
         </p:nvSpPr>
         <p:spPr>
           <a:xfrm>
-            <a:off x="7635240" y="1325880"/>
-            <a:ext cx="3474720" cy="1207008"/>
+            <a:off x="7543800" y="1325880"/>
+            <a:ext cx="3611880" cy="1261872"/>
           </a:xfrm>
           <a:prstGeom prst="roundRect">
             <a:avLst>
-              <a:gd name="adj" fmla="val 9091"/>
+              <a:gd name="adj" fmla="val 8696"/>
             </a:avLst>
           </a:prstGeom>
           <a:solidFill>
@@ -15859,8 +15859,8 @@
         </p:nvSpPr>
         <p:spPr>
           <a:xfrm>
-            <a:off x="7799832" y="1472184"/>
-            <a:ext cx="3145536" cy="256032"/>
+            <a:off x="7708392" y="1453896"/>
+            <a:ext cx="3282696" cy="228600"/>
           </a:xfrm>
           <a:prstGeom prst="rect">
             <a:avLst/>
@@ -15876,7 +15876,7 @@
               <a:buNone/>
             </a:pPr>
             <a:r>
-              <a:rPr lang="en-US" sz="1300" b="1" dirty="0">
+              <a:rPr lang="en-US" sz="1220" b="1" dirty="0">
                 <a:solidFill>
                   <a:srgbClr val="0068B7"/>
                 </a:solidFill>
@@ -15886,7 +15886,7 @@
               </a:rPr>
               <a:t>Risk check</a:t>
             </a:r>
-            <a:endParaRPr lang="en-US" sz="1300" dirty="0"/>
+            <a:endParaRPr lang="en-US" sz="1220" dirty="0"/>
           </a:p>
         </p:txBody>
       </p:sp>
@@ -15898,8 +15898,8 @@
         </p:nvSpPr>
         <p:spPr>
           <a:xfrm>
-            <a:off x="7799832" y="1801368"/>
-            <a:ext cx="3145536" cy="640080"/>
+            <a:off x="7708392" y="1764792"/>
+            <a:ext cx="3282696" cy="749808"/>
           </a:xfrm>
           <a:prstGeom prst="rect">
             <a:avLst/>
@@ -15917,7 +15917,7 @@
               <a:buNone/>
             </a:pPr>
             <a:r>
-              <a:rPr lang="en-US" sz="1320" dirty="0">
+              <a:rPr lang="en-US" sz="1220" dirty="0">
                 <a:solidFill>
                   <a:srgbClr val="17364A"/>
                 </a:solidFill>
@@ -15927,7 +15927,7 @@
               </a:rPr>
               <a:t>Produce a secure AI workflow checklist.</a:t>
             </a:r>
-            <a:endParaRPr lang="en-US" sz="1320" dirty="0"/>
+            <a:endParaRPr lang="en-US" sz="1220" dirty="0"/>
           </a:p>
         </p:txBody>
       </p:sp>
@@ -15939,12 +15939,12 @@
         </p:nvSpPr>
         <p:spPr>
           <a:xfrm>
-            <a:off x="7635240" y="2670048"/>
-            <a:ext cx="3474720" cy="1377086"/>
+            <a:off x="7543800" y="2724912"/>
+            <a:ext cx="3611880" cy="1527048"/>
           </a:xfrm>
           <a:prstGeom prst="roundRect">
             <a:avLst>
-              <a:gd name="adj" fmla="val 7968"/>
+              <a:gd name="adj" fmla="val 7186"/>
             </a:avLst>
           </a:prstGeom>
           <a:solidFill>
@@ -15966,8 +15966,8 @@
         </p:nvSpPr>
         <p:spPr>
           <a:xfrm>
-            <a:off x="7799832" y="2816352"/>
-            <a:ext cx="3145536" cy="256032"/>
+            <a:off x="7708392" y="2852928"/>
+            <a:ext cx="3282696" cy="228600"/>
           </a:xfrm>
           <a:prstGeom prst="rect">
             <a:avLst/>
@@ -15983,7 +15983,7 @@
               <a:buNone/>
             </a:pPr>
             <a:r>
-              <a:rPr lang="en-US" sz="1300" b="1" dirty="0">
+              <a:rPr lang="en-US" sz="1220" b="1" dirty="0">
                 <a:solidFill>
                   <a:srgbClr val="0068B7"/>
                 </a:solidFill>
@@ -15993,7 +15993,7 @@
               </a:rPr>
               <a:t>Concept checkpoints</a:t>
             </a:r>
-            <a:endParaRPr lang="en-US" sz="1300" dirty="0"/>
+            <a:endParaRPr lang="en-US" sz="1220" dirty="0"/>
           </a:p>
         </p:txBody>
       </p:sp>
@@ -16005,8 +16005,8 @@
         </p:nvSpPr>
         <p:spPr>
           <a:xfrm>
-            <a:off x="7818120" y="3182112"/>
-            <a:ext cx="3090672" cy="718718"/>
+            <a:off x="7726680" y="3182112"/>
+            <a:ext cx="3227832" cy="960120"/>
           </a:xfrm>
           <a:prstGeom prst="rect">
             <a:avLst/>
@@ -16024,7 +16024,7 @@
               <a:buNone/>
             </a:pPr>
             <a:r>
-              <a:rPr lang="en-US" sz="1220" dirty="0">
+              <a:rPr lang="en-US" sz="1140" dirty="0">
                 <a:solidFill>
                   <a:srgbClr val="17364A"/>
                 </a:solidFill>
@@ -16034,7 +16034,7 @@
               </a:rPr>
               <a:t>Produce a secure AI workflow checklist.</a:t>
             </a:r>
-            <a:endParaRPr lang="en-US" sz="1220" dirty="0"/>
+            <a:endParaRPr lang="en-US" sz="1140" dirty="0"/>
           </a:p>
         </p:txBody>
       </p:sp>
@@ -16046,12 +16046,12 @@
         </p:nvSpPr>
         <p:spPr>
           <a:xfrm>
-            <a:off x="7635240" y="4184294"/>
-            <a:ext cx="3474720" cy="1466698"/>
+            <a:off x="7543800" y="4389120"/>
+            <a:ext cx="3611880" cy="1261872"/>
           </a:xfrm>
           <a:prstGeom prst="roundRect">
             <a:avLst>
-              <a:gd name="adj" fmla="val 7481"/>
+              <a:gd name="adj" fmla="val 8696"/>
             </a:avLst>
           </a:prstGeom>
           <a:solidFill>
@@ -16073,8 +16073,8 @@
         </p:nvSpPr>
         <p:spPr>
           <a:xfrm>
-            <a:off x="7799832" y="4330598"/>
-            <a:ext cx="3145536" cy="256032"/>
+            <a:off x="7708392" y="4517136"/>
+            <a:ext cx="3282696" cy="228600"/>
           </a:xfrm>
           <a:prstGeom prst="rect">
             <a:avLst/>
@@ -16090,7 +16090,7 @@
               <a:buNone/>
             </a:pPr>
             <a:r>
-              <a:rPr lang="en-US" sz="1300" b="1" dirty="0">
+              <a:rPr lang="en-US" sz="1220" b="1" dirty="0">
                 <a:solidFill>
                   <a:srgbClr val="0068B7"/>
                 </a:solidFill>
@@ -16100,7 +16100,7 @@
               </a:rPr>
               <a:t>Safeguard to plan</a:t>
             </a:r>
-            <a:endParaRPr lang="en-US" sz="1300" dirty="0"/>
+            <a:endParaRPr lang="en-US" sz="1220" dirty="0"/>
           </a:p>
         </p:txBody>
       </p:sp>
@@ -16112,8 +16112,8 @@
         </p:nvSpPr>
         <p:spPr>
           <a:xfrm>
-            <a:off x="7799832" y="4659782"/>
-            <a:ext cx="3145536" cy="899770"/>
+            <a:off x="7708392" y="4828032"/>
+            <a:ext cx="3282696" cy="749808"/>
           </a:xfrm>
           <a:prstGeom prst="rect">
             <a:avLst/>
@@ -16131,7 +16131,7 @@
               <a:buNone/>
             </a:pPr>
             <a:r>
-              <a:rPr lang="en-US" sz="1320" dirty="0">
+              <a:rPr lang="en-US" sz="1220" dirty="0">
                 <a:solidFill>
                   <a:srgbClr val="17364A"/>
                 </a:solidFill>
@@ -16139,9 +16139,9 @@
                 <a:ea typeface="Aptos" pitchFamily="34" charset="-122"/>
                 <a:cs typeface="Aptos" pitchFamily="34" charset="-120"/>
               </a:rPr>
-              <a:t>Use the assignment to test whether you can explain the concept, apply it to a realistic public health situation, and identify what would need review before the work moves forward.</a:t>
-            </a:r>
-            <a:endParaRPr lang="en-US" sz="1320" dirty="0"/>
+              <a:t>Use the assignment to test whether you can explain the concept, apply it to a.</a:t>
+            </a:r>
+            <a:endParaRPr lang="en-US" sz="1220" dirty="0"/>
           </a:p>
         </p:txBody>
       </p:sp>
@@ -16432,8 +16432,8 @@
         </p:nvSpPr>
         <p:spPr>
           <a:xfrm>
-            <a:off x="868680" y="1508760"/>
-            <a:ext cx="6309360" cy="4160520"/>
+            <a:off x="822960" y="1463040"/>
+            <a:ext cx="6565392" cy="4343400"/>
           </a:xfrm>
           <a:prstGeom prst="rect">
             <a:avLst/>
@@ -16451,7 +16451,7 @@
               <a:buNone/>
             </a:pPr>
             <a:r>
-              <a:rPr lang="en-US" sz="2100" dirty="0">
+              <a:rPr lang="en-US" sz="1920" dirty="0">
                 <a:solidFill>
                   <a:srgbClr val="003A63"/>
                 </a:solidFill>
@@ -16459,16 +16459,16 @@
                 <a:ea typeface="Aptos" pitchFamily="34" charset="-122"/>
                 <a:cs typeface="Aptos" pitchFamily="34" charset="-120"/>
               </a:rPr>
-              <a:t>• AI security focuses on protecting AI systems, integrations, prompts, outputs, data, users, and.</a:t>
-            </a:r>
-            <a:endParaRPr lang="en-US" sz="2100" dirty="0"/>
-          </a:p>
-          <a:p>
-            <a:pPr indent="0" marL="0">
-              <a:buNone/>
-            </a:pPr>
-            <a:r>
-              <a:rPr lang="en-US" sz="2100" dirty="0">
+              <a:t>• AI security focuses on protecting AI systems, integrations, prompts,.</a:t>
+            </a:r>
+            <a:endParaRPr lang="en-US" sz="1920" dirty="0"/>
+          </a:p>
+          <a:p>
+            <a:pPr indent="0" marL="0">
+              <a:buNone/>
+            </a:pPr>
+            <a:r>
+              <a:rPr lang="en-US" sz="1920" dirty="0">
                 <a:solidFill>
                   <a:srgbClr val="003A63"/>
                 </a:solidFill>
@@ -16476,16 +16476,16 @@
                 <a:ea typeface="Aptos" pitchFamily="34" charset="-122"/>
                 <a:cs typeface="Aptos" pitchFamily="34" charset="-120"/>
               </a:rPr>
-              <a:t>• Public health agencies handle sensitive health, demographic, legal, operational, and community.</a:t>
-            </a:r>
-            <a:endParaRPr lang="en-US" sz="2100" dirty="0"/>
-          </a:p>
-          <a:p>
-            <a:pPr indent="0" marL="0">
-              <a:buNone/>
-            </a:pPr>
-            <a:r>
-              <a:rPr lang="en-US" sz="2100" dirty="0">
+              <a:t>• Public health agencies handle sensitive health, demographic, legal,.</a:t>
+            </a:r>
+            <a:endParaRPr lang="en-US" sz="1920" dirty="0"/>
+          </a:p>
+          <a:p>
+            <a:pPr indent="0" marL="0">
+              <a:buNone/>
+            </a:pPr>
+            <a:r>
+              <a:rPr lang="en-US" sz="1920" dirty="0">
                 <a:solidFill>
                   <a:srgbClr val="003A63"/>
                 </a:solidFill>
@@ -16493,9 +16493,9 @@
                 <a:ea typeface="Aptos" pitchFamily="34" charset="-122"/>
                 <a:cs typeface="Aptos" pitchFamily="34" charset="-120"/>
               </a:rPr>
-              <a:t>• AI security is therefore a core public health safeguard, not only an IT responsibility.</a:t>
-            </a:r>
-            <a:endParaRPr lang="en-US" sz="2100" dirty="0"/>
+              <a:t>• AI security is therefore a core public health safeguard, not only an IT.</a:t>
+            </a:r>
+            <a:endParaRPr lang="en-US" sz="1920" dirty="0"/>
           </a:p>
         </p:txBody>
       </p:sp>
@@ -16507,12 +16507,12 @@
         </p:nvSpPr>
         <p:spPr>
           <a:xfrm>
-            <a:off x="7635240" y="1325880"/>
-            <a:ext cx="3474720" cy="1255471"/>
+            <a:off x="7543800" y="1325880"/>
+            <a:ext cx="3611880" cy="1261872"/>
           </a:xfrm>
           <a:prstGeom prst="roundRect">
             <a:avLst>
-              <a:gd name="adj" fmla="val 8740"/>
+              <a:gd name="adj" fmla="val 8696"/>
             </a:avLst>
           </a:prstGeom>
           <a:solidFill>
@@ -16534,8 +16534,8 @@
         </p:nvSpPr>
         <p:spPr>
           <a:xfrm>
-            <a:off x="7799832" y="1472184"/>
-            <a:ext cx="3145536" cy="256032"/>
+            <a:off x="7708392" y="1453896"/>
+            <a:ext cx="3282696" cy="228600"/>
           </a:xfrm>
           <a:prstGeom prst="rect">
             <a:avLst/>
@@ -16551,7 +16551,7 @@
               <a:buNone/>
             </a:pPr>
             <a:r>
-              <a:rPr lang="en-US" sz="1300" b="1" dirty="0">
+              <a:rPr lang="en-US" sz="1220" b="1" dirty="0">
                 <a:solidFill>
                   <a:srgbClr val="0068B7"/>
                 </a:solidFill>
@@ -16561,7 +16561,7 @@
               </a:rPr>
               <a:t>Risk check</a:t>
             </a:r>
-            <a:endParaRPr lang="en-US" sz="1300" dirty="0"/>
+            <a:endParaRPr lang="en-US" sz="1220" dirty="0"/>
           </a:p>
         </p:txBody>
       </p:sp>
@@ -16573,8 +16573,8 @@
         </p:nvSpPr>
         <p:spPr>
           <a:xfrm>
-            <a:off x="7799832" y="1801368"/>
-            <a:ext cx="3145536" cy="688543"/>
+            <a:off x="7708392" y="1764792"/>
+            <a:ext cx="3282696" cy="749808"/>
           </a:xfrm>
           <a:prstGeom prst="rect">
             <a:avLst/>
@@ -16592,7 +16592,7 @@
               <a:buNone/>
             </a:pPr>
             <a:r>
-              <a:rPr lang="en-US" sz="1320" dirty="0">
+              <a:rPr lang="en-US" sz="1220" dirty="0">
                 <a:solidFill>
                   <a:srgbClr val="17364A"/>
                 </a:solidFill>
@@ -16600,9 +16600,9 @@
                 <a:ea typeface="Aptos" pitchFamily="34" charset="-122"/>
                 <a:cs typeface="Aptos" pitchFamily="34" charset="-120"/>
               </a:rPr>
-              <a:t>AI security focuses on protecting AI systems, integrations, prompts, outputs, data, users, and.</a:t>
-            </a:r>
-            <a:endParaRPr lang="en-US" sz="1320" dirty="0"/>
+              <a:t>AI security focuses on protecting AI systems, integrations, prompts, outputs,.</a:t>
+            </a:r>
+            <a:endParaRPr lang="en-US" sz="1220" dirty="0"/>
           </a:p>
         </p:txBody>
       </p:sp>
@@ -16614,12 +16614,12 @@
         </p:nvSpPr>
         <p:spPr>
           <a:xfrm>
-            <a:off x="7635240" y="2718511"/>
-            <a:ext cx="3474720" cy="1536192"/>
+            <a:off x="7543800" y="2724912"/>
+            <a:ext cx="3611880" cy="1527048"/>
           </a:xfrm>
           <a:prstGeom prst="roundRect">
             <a:avLst>
-              <a:gd name="adj" fmla="val 7143"/>
+              <a:gd name="adj" fmla="val 7186"/>
             </a:avLst>
           </a:prstGeom>
           <a:solidFill>
@@ -16641,24 +16641,26 @@
         </p:nvSpPr>
         <p:spPr>
           <a:xfrm>
-            <a:off x="7799832" y="2846527"/>
-            <a:ext cx="3145536" cy="237744"/>
-          </a:xfrm>
-          <a:prstGeom prst="rect">
-            <a:avLst/>
-          </a:prstGeom>
-          <a:noFill/>
-          <a:ln/>
-        </p:spPr>
-        <p:txBody>
-          <a:bodyPr wrap="square" lIns="0" tIns="0" rIns="0" bIns="0" rtlCol="0" anchor="ctr"/>
-          <a:lstStyle/>
-          <a:p>
-            <a:pPr indent="0" marL="0">
-              <a:buNone/>
-            </a:pPr>
-            <a:r>
-              <a:rPr lang="en-US" sz="1250" b="1" dirty="0">
+            <a:off x="7708392" y="2852928"/>
+            <a:ext cx="3282696" cy="219456"/>
+          </a:xfrm>
+          <a:prstGeom prst="rect">
+            <a:avLst/>
+          </a:prstGeom>
+          <a:noFill/>
+          <a:ln/>
+        </p:spPr>
+        <p:txBody>
+          <a:bodyPr wrap="square" lIns="0" tIns="0" rIns="0" bIns="0" rtlCol="0" anchor="ctr">
+            <a:normAutofit/>
+          </a:bodyPr>
+          <a:lstStyle/>
+          <a:p>
+            <a:pPr indent="0" marL="0">
+              <a:buNone/>
+            </a:pPr>
+            <a:r>
+              <a:rPr lang="en-US" sz="1160" b="1" dirty="0">
                 <a:solidFill>
                   <a:srgbClr val="0068B7"/>
                 </a:solidFill>
@@ -16668,7 +16670,7 @@
               </a:rPr>
               <a:t>Risk control loop</a:t>
             </a:r>
-            <a:endParaRPr lang="en-US" sz="1250" dirty="0"/>
+            <a:endParaRPr lang="en-US" sz="1160" dirty="0"/>
           </a:p>
         </p:txBody>
       </p:sp>
@@ -16680,7 +16682,7 @@
         </p:nvSpPr>
         <p:spPr>
           <a:xfrm>
-            <a:off x="8763000" y="3399739"/>
+            <a:off x="8717280" y="3406140"/>
             <a:ext cx="164592" cy="0"/>
           </a:xfrm>
           <a:prstGeom prst="line">
@@ -16703,8 +16705,8 @@
         </p:nvSpPr>
         <p:spPr>
           <a:xfrm>
-            <a:off x="7872984" y="3248863"/>
-            <a:ext cx="890016" cy="301752"/>
+            <a:off x="7781544" y="3255264"/>
+            <a:ext cx="935736" cy="301752"/>
           </a:xfrm>
           <a:prstGeom prst="roundRect">
             <a:avLst>
@@ -16730,8 +16732,8 @@
         </p:nvSpPr>
         <p:spPr>
           <a:xfrm>
-            <a:off x="7909560" y="3322015"/>
-            <a:ext cx="816864" cy="146304"/>
+            <a:off x="7818120" y="3328416"/>
+            <a:ext cx="862584" cy="146304"/>
           </a:xfrm>
           <a:prstGeom prst="rect">
             <a:avLst/>
@@ -16771,7 +16773,7 @@
         </p:nvSpPr>
         <p:spPr>
           <a:xfrm>
-            <a:off x="9817608" y="3399739"/>
+            <a:off x="9817608" y="3406140"/>
             <a:ext cx="164592" cy="0"/>
           </a:xfrm>
           <a:prstGeom prst="line">
@@ -16794,8 +16796,8 @@
         </p:nvSpPr>
         <p:spPr>
           <a:xfrm>
-            <a:off x="8927592" y="3248863"/>
-            <a:ext cx="890016" cy="301752"/>
+            <a:off x="8881872" y="3255264"/>
+            <a:ext cx="935736" cy="301752"/>
           </a:xfrm>
           <a:prstGeom prst="roundRect">
             <a:avLst>
@@ -16821,8 +16823,8 @@
         </p:nvSpPr>
         <p:spPr>
           <a:xfrm>
-            <a:off x="8964168" y="3322015"/>
-            <a:ext cx="816864" cy="146304"/>
+            <a:off x="8918448" y="3328416"/>
+            <a:ext cx="862584" cy="146304"/>
           </a:xfrm>
           <a:prstGeom prst="rect">
             <a:avLst/>
@@ -16862,8 +16864,8 @@
         </p:nvSpPr>
         <p:spPr>
           <a:xfrm>
-            <a:off x="9982200" y="3248863"/>
-            <a:ext cx="890016" cy="301752"/>
+            <a:off x="9982200" y="3255264"/>
+            <a:ext cx="935736" cy="301752"/>
           </a:xfrm>
           <a:prstGeom prst="roundRect">
             <a:avLst>
@@ -16889,8 +16891,8 @@
         </p:nvSpPr>
         <p:spPr>
           <a:xfrm>
-            <a:off x="10018776" y="3322015"/>
-            <a:ext cx="816864" cy="146304"/>
+            <a:off x="10018776" y="3328416"/>
+            <a:ext cx="862584" cy="146304"/>
           </a:xfrm>
           <a:prstGeom prst="rect">
             <a:avLst/>
@@ -16930,8 +16932,8 @@
         </p:nvSpPr>
         <p:spPr>
           <a:xfrm>
-            <a:off x="7854696" y="3742639"/>
-            <a:ext cx="3035808" cy="365760"/>
+            <a:off x="7763256" y="3749040"/>
+            <a:ext cx="3172968" cy="356616"/>
           </a:xfrm>
           <a:prstGeom prst="rect">
             <a:avLst/>
@@ -16949,7 +16951,7 @@
               <a:buNone/>
             </a:pPr>
             <a:r>
-              <a:rPr lang="en-US" sz="1120" dirty="0">
+              <a:rPr lang="en-US" sz="1040" dirty="0">
                 <a:solidFill>
                   <a:srgbClr val="17364A"/>
                 </a:solidFill>
@@ -16957,9 +16959,9 @@
                 <a:ea typeface="Aptos" pitchFamily="34" charset="-122"/>
                 <a:cs typeface="Aptos" pitchFamily="34" charset="-120"/>
               </a:rPr>
-              <a:t>Responsible use depends on finding risks early, applying safeguards, and watching for drift or harm over time.</a:t>
-            </a:r>
-            <a:endParaRPr lang="en-US" sz="1120" dirty="0"/>
+              <a:t>Responsible use depends on finding risks early, applying safeguards,.</a:t>
+            </a:r>
+            <a:endParaRPr lang="en-US" sz="1040" dirty="0"/>
           </a:p>
         </p:txBody>
       </p:sp>
@@ -16971,12 +16973,12 @@
         </p:nvSpPr>
         <p:spPr>
           <a:xfrm>
-            <a:off x="7635240" y="4391863"/>
-            <a:ext cx="3474720" cy="1255471"/>
+            <a:off x="7543800" y="4389120"/>
+            <a:ext cx="3611880" cy="1261872"/>
           </a:xfrm>
           <a:prstGeom prst="roundRect">
             <a:avLst>
-              <a:gd name="adj" fmla="val 8740"/>
+              <a:gd name="adj" fmla="val 8696"/>
             </a:avLst>
           </a:prstGeom>
           <a:solidFill>
@@ -16998,8 +17000,8 @@
         </p:nvSpPr>
         <p:spPr>
           <a:xfrm>
-            <a:off x="7799832" y="4538167"/>
-            <a:ext cx="3145536" cy="256032"/>
+            <a:off x="7708392" y="4517136"/>
+            <a:ext cx="3282696" cy="228600"/>
           </a:xfrm>
           <a:prstGeom prst="rect">
             <a:avLst/>
@@ -17015,7 +17017,7 @@
               <a:buNone/>
             </a:pPr>
             <a:r>
-              <a:rPr lang="en-US" sz="1300" b="1" dirty="0">
+              <a:rPr lang="en-US" sz="1220" b="1" dirty="0">
                 <a:solidFill>
                   <a:srgbClr val="0068B7"/>
                 </a:solidFill>
@@ -17025,7 +17027,7 @@
               </a:rPr>
               <a:t>Safeguard to plan</a:t>
             </a:r>
-            <a:endParaRPr lang="en-US" sz="1300" dirty="0"/>
+            <a:endParaRPr lang="en-US" sz="1220" dirty="0"/>
           </a:p>
         </p:txBody>
       </p:sp>
@@ -17037,8 +17039,8 @@
         </p:nvSpPr>
         <p:spPr>
           <a:xfrm>
-            <a:off x="7799832" y="4867351"/>
-            <a:ext cx="3145536" cy="688543"/>
+            <a:off x="7708392" y="4828032"/>
+            <a:ext cx="3282696" cy="749808"/>
           </a:xfrm>
           <a:prstGeom prst="rect">
             <a:avLst/>
@@ -17056,7 +17058,7 @@
               <a:buNone/>
             </a:pPr>
             <a:r>
-              <a:rPr lang="en-US" sz="1320" dirty="0">
+              <a:rPr lang="en-US" sz="1220" dirty="0">
                 <a:solidFill>
                   <a:srgbClr val="17364A"/>
                 </a:solidFill>
@@ -17064,9 +17066,9 @@
                 <a:ea typeface="Aptos" pitchFamily="34" charset="-122"/>
                 <a:cs typeface="Aptos" pitchFamily="34" charset="-120"/>
               </a:rPr>
-              <a:t>Identify what could go wrong, who could be affected, what safeguards are needed, and what evidence should be reviewed before use.</a:t>
-            </a:r>
-            <a:endParaRPr lang="en-US" sz="1320" dirty="0"/>
+              <a:t>Identify what could go wrong, who could be affected, what safeguards are needed,.</a:t>
+            </a:r>
+            <a:endParaRPr lang="en-US" sz="1220" dirty="0"/>
           </a:p>
         </p:txBody>
       </p:sp>
@@ -17357,8 +17359,8 @@
         </p:nvSpPr>
         <p:spPr>
           <a:xfrm>
-            <a:off x="868680" y="1508760"/>
-            <a:ext cx="6309360" cy="4160520"/>
+            <a:off x="822960" y="1463040"/>
+            <a:ext cx="6565392" cy="4343400"/>
           </a:xfrm>
           <a:prstGeom prst="rect">
             <a:avLst/>
@@ -17376,7 +17378,7 @@
               <a:buNone/>
             </a:pPr>
             <a:r>
-              <a:rPr lang="en-US" sz="2100" dirty="0">
+              <a:rPr lang="en-US" sz="1920" dirty="0">
                 <a:solidFill>
                   <a:srgbClr val="003A63"/>
                 </a:solidFill>
@@ -17384,16 +17386,16 @@
                 <a:ea typeface="Aptos" pitchFamily="34" charset="-122"/>
                 <a:cs typeface="Aptos" pitchFamily="34" charset="-120"/>
               </a:rPr>
-              <a:t>• This module provides national-level training guidance for public health agencies and partners.</a:t>
-            </a:r>
-            <a:endParaRPr lang="en-US" sz="2100" dirty="0"/>
-          </a:p>
-          <a:p>
-            <a:pPr indent="0" marL="0">
-              <a:buNone/>
-            </a:pPr>
-            <a:r>
-              <a:rPr lang="en-US" sz="2100" dirty="0">
+              <a:t>• This module provides national-level training guidance for public health.</a:t>
+            </a:r>
+            <a:endParaRPr lang="en-US" sz="1920" dirty="0"/>
+          </a:p>
+          <a:p>
+            <a:pPr indent="0" marL="0">
+              <a:buNone/>
+            </a:pPr>
+            <a:r>
+              <a:rPr lang="en-US" sz="1920" dirty="0">
                 <a:solidFill>
                   <a:srgbClr val="003A63"/>
                 </a:solidFill>
@@ -17401,16 +17403,16 @@
                 <a:ea typeface="Aptos" pitchFamily="34" charset="-122"/>
                 <a:cs typeface="Aptos" pitchFamily="34" charset="-120"/>
               </a:rPr>
-              <a:t>• It is not legal advice and does not replace review by agency legal counsel, privacy officers,.</a:t>
-            </a:r>
-            <a:endParaRPr lang="en-US" sz="2100" dirty="0"/>
-          </a:p>
-          <a:p>
-            <a:pPr indent="0" marL="0">
-              <a:buNone/>
-            </a:pPr>
-            <a:r>
-              <a:rPr lang="en-US" sz="2100" dirty="0">
+              <a:t>• It is not legal advice and does not replace review by agency legal counsel,.</a:t>
+            </a:r>
+            <a:endParaRPr lang="en-US" sz="1920" dirty="0"/>
+          </a:p>
+          <a:p>
+            <a:pPr indent="0" marL="0">
+              <a:buNone/>
+            </a:pPr>
+            <a:r>
+              <a:rPr lang="en-US" sz="1920" dirty="0">
                 <a:solidFill>
                   <a:srgbClr val="003A63"/>
                 </a:solidFill>
@@ -17418,9 +17420,9 @@
                 <a:ea typeface="Aptos" pitchFamily="34" charset="-122"/>
                 <a:cs typeface="Aptos" pitchFamily="34" charset="-120"/>
               </a:rPr>
-              <a:t>• Requirements may vary by state, locality, territory, Tribe, agency, funding source,.</a:t>
-            </a:r>
-            <a:endParaRPr lang="en-US" sz="2100" dirty="0"/>
+              <a:t>• Requirements may vary by state, locality, territory, Tribe, agency, funding.</a:t>
+            </a:r>
+            <a:endParaRPr lang="en-US" sz="1920" dirty="0"/>
           </a:p>
         </p:txBody>
       </p:sp>
@@ -17432,12 +17434,12 @@
         </p:nvSpPr>
         <p:spPr>
           <a:xfrm>
-            <a:off x="7635240" y="1325880"/>
-            <a:ext cx="3474720" cy="1207008"/>
+            <a:off x="7543800" y="1325880"/>
+            <a:ext cx="3611880" cy="1261872"/>
           </a:xfrm>
           <a:prstGeom prst="roundRect">
             <a:avLst>
-              <a:gd name="adj" fmla="val 9091"/>
+              <a:gd name="adj" fmla="val 8696"/>
             </a:avLst>
           </a:prstGeom>
           <a:solidFill>
@@ -17459,8 +17461,8 @@
         </p:nvSpPr>
         <p:spPr>
           <a:xfrm>
-            <a:off x="7799832" y="1472184"/>
-            <a:ext cx="3145536" cy="256032"/>
+            <a:off x="7708392" y="1453896"/>
+            <a:ext cx="3282696" cy="228600"/>
           </a:xfrm>
           <a:prstGeom prst="rect">
             <a:avLst/>
@@ -17476,7 +17478,7 @@
               <a:buNone/>
             </a:pPr>
             <a:r>
-              <a:rPr lang="en-US" sz="1300" b="1" dirty="0">
+              <a:rPr lang="en-US" sz="1220" b="1" dirty="0">
                 <a:solidFill>
                   <a:srgbClr val="0068B7"/>
                 </a:solidFill>
@@ -17486,7 +17488,7 @@
               </a:rPr>
               <a:t>Governance lens</a:t>
             </a:r>
-            <a:endParaRPr lang="en-US" sz="1300" dirty="0"/>
+            <a:endParaRPr lang="en-US" sz="1220" dirty="0"/>
           </a:p>
         </p:txBody>
       </p:sp>
@@ -17498,8 +17500,8 @@
         </p:nvSpPr>
         <p:spPr>
           <a:xfrm>
-            <a:off x="7799832" y="1801368"/>
-            <a:ext cx="3145536" cy="640080"/>
+            <a:off x="7708392" y="1764792"/>
+            <a:ext cx="3282696" cy="749808"/>
           </a:xfrm>
           <a:prstGeom prst="rect">
             <a:avLst/>
@@ -17517,7 +17519,7 @@
               <a:buNone/>
             </a:pPr>
             <a:r>
-              <a:rPr lang="en-US" sz="1320" dirty="0">
+              <a:rPr lang="en-US" sz="1220" dirty="0">
                 <a:solidFill>
                   <a:srgbClr val="17364A"/>
                 </a:solidFill>
@@ -17525,9 +17527,9 @@
                 <a:ea typeface="Aptos" pitchFamily="34" charset="-122"/>
                 <a:cs typeface="Aptos" pitchFamily="34" charset="-120"/>
               </a:rPr>
-              <a:t>This module provides national-level training guidance for public health agencies and.</a:t>
-            </a:r>
-            <a:endParaRPr lang="en-US" sz="1320" dirty="0"/>
+              <a:t>This module provides national-level training guidance for public health agencies.</a:t>
+            </a:r>
+            <a:endParaRPr lang="en-US" sz="1220" dirty="0"/>
           </a:p>
         </p:txBody>
       </p:sp>
@@ -17539,12 +17541,12 @@
         </p:nvSpPr>
         <p:spPr>
           <a:xfrm>
-            <a:off x="7635240" y="2670048"/>
-            <a:ext cx="3474720" cy="1377086"/>
+            <a:off x="7543800" y="2724912"/>
+            <a:ext cx="3611880" cy="1527048"/>
           </a:xfrm>
           <a:prstGeom prst="roundRect">
             <a:avLst>
-              <a:gd name="adj" fmla="val 7968"/>
+              <a:gd name="adj" fmla="val 7186"/>
             </a:avLst>
           </a:prstGeom>
           <a:solidFill>
@@ -17566,24 +17568,26 @@
         </p:nvSpPr>
         <p:spPr>
           <a:xfrm>
-            <a:off x="7799832" y="2798064"/>
-            <a:ext cx="3145536" cy="237744"/>
-          </a:xfrm>
-          <a:prstGeom prst="rect">
-            <a:avLst/>
-          </a:prstGeom>
-          <a:noFill/>
-          <a:ln/>
-        </p:spPr>
-        <p:txBody>
-          <a:bodyPr wrap="square" lIns="0" tIns="0" rIns="0" bIns="0" rtlCol="0" anchor="ctr"/>
-          <a:lstStyle/>
-          <a:p>
-            <a:pPr indent="0" marL="0">
-              <a:buNone/>
-            </a:pPr>
-            <a:r>
-              <a:rPr lang="en-US" sz="1250" b="1" dirty="0">
+            <a:off x="7708392" y="2852928"/>
+            <a:ext cx="3282696" cy="219456"/>
+          </a:xfrm>
+          <a:prstGeom prst="rect">
+            <a:avLst/>
+          </a:prstGeom>
+          <a:noFill/>
+          <a:ln/>
+        </p:spPr>
+        <p:txBody>
+          <a:bodyPr wrap="square" lIns="0" tIns="0" rIns="0" bIns="0" rtlCol="0" anchor="ctr">
+            <a:normAutofit/>
+          </a:bodyPr>
+          <a:lstStyle/>
+          <a:p>
+            <a:pPr indent="0" marL="0">
+              <a:buNone/>
+            </a:pPr>
+            <a:r>
+              <a:rPr lang="en-US" sz="1160" b="1" dirty="0">
                 <a:solidFill>
                   <a:srgbClr val="0068B7"/>
                 </a:solidFill>
@@ -17593,7 +17597,7 @@
               </a:rPr>
               <a:t>Governance pathway</a:t>
             </a:r>
-            <a:endParaRPr lang="en-US" sz="1250" dirty="0"/>
+            <a:endParaRPr lang="en-US" sz="1160" dirty="0"/>
           </a:p>
         </p:txBody>
       </p:sp>
@@ -17605,7 +17609,7 @@
         </p:nvSpPr>
         <p:spPr>
           <a:xfrm>
-            <a:off x="8763000" y="3351276"/>
+            <a:off x="8717280" y="3406140"/>
             <a:ext cx="164592" cy="0"/>
           </a:xfrm>
           <a:prstGeom prst="line">
@@ -17628,8 +17632,8 @@
         </p:nvSpPr>
         <p:spPr>
           <a:xfrm>
-            <a:off x="7872984" y="3200400"/>
-            <a:ext cx="890016" cy="301752"/>
+            <a:off x="7781544" y="3255264"/>
+            <a:ext cx="935736" cy="301752"/>
           </a:xfrm>
           <a:prstGeom prst="roundRect">
             <a:avLst>
@@ -17655,8 +17659,8 @@
         </p:nvSpPr>
         <p:spPr>
           <a:xfrm>
-            <a:off x="7909560" y="3273552"/>
-            <a:ext cx="816864" cy="146304"/>
+            <a:off x="7818120" y="3328416"/>
+            <a:ext cx="862584" cy="146304"/>
           </a:xfrm>
           <a:prstGeom prst="rect">
             <a:avLst/>
@@ -17696,7 +17700,7 @@
         </p:nvSpPr>
         <p:spPr>
           <a:xfrm>
-            <a:off x="9817608" y="3351276"/>
+            <a:off x="9817608" y="3406140"/>
             <a:ext cx="164592" cy="0"/>
           </a:xfrm>
           <a:prstGeom prst="line">
@@ -17719,8 +17723,8 @@
         </p:nvSpPr>
         <p:spPr>
           <a:xfrm>
-            <a:off x="8927592" y="3200400"/>
-            <a:ext cx="890016" cy="301752"/>
+            <a:off x="8881872" y="3255264"/>
+            <a:ext cx="935736" cy="301752"/>
           </a:xfrm>
           <a:prstGeom prst="roundRect">
             <a:avLst>
@@ -17746,8 +17750,8 @@
         </p:nvSpPr>
         <p:spPr>
           <a:xfrm>
-            <a:off x="8964168" y="3273552"/>
-            <a:ext cx="816864" cy="146304"/>
+            <a:off x="8918448" y="3328416"/>
+            <a:ext cx="862584" cy="146304"/>
           </a:xfrm>
           <a:prstGeom prst="rect">
             <a:avLst/>
@@ -17787,8 +17791,8 @@
         </p:nvSpPr>
         <p:spPr>
           <a:xfrm>
-            <a:off x="9982200" y="3200400"/>
-            <a:ext cx="890016" cy="301752"/>
+            <a:off x="9982200" y="3255264"/>
+            <a:ext cx="935736" cy="301752"/>
           </a:xfrm>
           <a:prstGeom prst="roundRect">
             <a:avLst>
@@ -17814,8 +17818,8 @@
         </p:nvSpPr>
         <p:spPr>
           <a:xfrm>
-            <a:off x="10018776" y="3273552"/>
-            <a:ext cx="816864" cy="146304"/>
+            <a:off x="10018776" y="3328416"/>
+            <a:ext cx="862584" cy="146304"/>
           </a:xfrm>
           <a:prstGeom prst="rect">
             <a:avLst/>
@@ -17855,8 +17859,8 @@
         </p:nvSpPr>
         <p:spPr>
           <a:xfrm>
-            <a:off x="7854696" y="3694176"/>
-            <a:ext cx="3035808" cy="206654"/>
+            <a:off x="7763256" y="3749040"/>
+            <a:ext cx="3172968" cy="356616"/>
           </a:xfrm>
           <a:prstGeom prst="rect">
             <a:avLst/>
@@ -17874,7 +17878,7 @@
               <a:buNone/>
             </a:pPr>
             <a:r>
-              <a:rPr lang="en-US" sz="1120" dirty="0">
+              <a:rPr lang="en-US" sz="1040" dirty="0">
                 <a:solidFill>
                   <a:srgbClr val="17364A"/>
                 </a:solidFill>
@@ -17882,9 +17886,9 @@
                 <a:ea typeface="Aptos" pitchFamily="34" charset="-122"/>
                 <a:cs typeface="Aptos" pitchFamily="34" charset="-120"/>
               </a:rPr>
-              <a:t>A proposed AI use should move through documented review before it becomes an operational workflow.</a:t>
-            </a:r>
-            <a:endParaRPr lang="en-US" sz="1120" dirty="0"/>
+              <a:t>A proposed AI use should move through documented review before it.</a:t>
+            </a:r>
+            <a:endParaRPr lang="en-US" sz="1040" dirty="0"/>
           </a:p>
         </p:txBody>
       </p:sp>
@@ -17896,12 +17900,12 @@
         </p:nvSpPr>
         <p:spPr>
           <a:xfrm>
-            <a:off x="7635240" y="4184294"/>
-            <a:ext cx="3474720" cy="1466698"/>
+            <a:off x="7543800" y="4389120"/>
+            <a:ext cx="3611880" cy="1261872"/>
           </a:xfrm>
           <a:prstGeom prst="roundRect">
             <a:avLst>
-              <a:gd name="adj" fmla="val 7481"/>
+              <a:gd name="adj" fmla="val 8696"/>
             </a:avLst>
           </a:prstGeom>
           <a:solidFill>
@@ -17923,8 +17927,8 @@
         </p:nvSpPr>
         <p:spPr>
           <a:xfrm>
-            <a:off x="7799832" y="4330598"/>
-            <a:ext cx="3145536" cy="256032"/>
+            <a:off x="7708392" y="4517136"/>
+            <a:ext cx="3282696" cy="228600"/>
           </a:xfrm>
           <a:prstGeom prst="rect">
             <a:avLst/>
@@ -17940,7 +17944,7 @@
               <a:buNone/>
             </a:pPr>
             <a:r>
-              <a:rPr lang="en-US" sz="1300" b="1" dirty="0">
+              <a:rPr lang="en-US" sz="1220" b="1" dirty="0">
                 <a:solidFill>
                   <a:srgbClr val="0068B7"/>
                 </a:solidFill>
@@ -17950,7 +17954,7 @@
               </a:rPr>
               <a:t>What to document</a:t>
             </a:r>
-            <a:endParaRPr lang="en-US" sz="1300" dirty="0"/>
+            <a:endParaRPr lang="en-US" sz="1220" dirty="0"/>
           </a:p>
         </p:txBody>
       </p:sp>
@@ -17962,8 +17966,8 @@
         </p:nvSpPr>
         <p:spPr>
           <a:xfrm>
-            <a:off x="7799832" y="4659782"/>
-            <a:ext cx="3145536" cy="899770"/>
+            <a:off x="7708392" y="4828032"/>
+            <a:ext cx="3282696" cy="749808"/>
           </a:xfrm>
           <a:prstGeom prst="rect">
             <a:avLst/>
@@ -17981,7 +17985,7 @@
               <a:buNone/>
             </a:pPr>
             <a:r>
-              <a:rPr lang="en-US" sz="1320" dirty="0">
+              <a:rPr lang="en-US" sz="1220" dirty="0">
                 <a:solidFill>
                   <a:srgbClr val="17364A"/>
                 </a:solidFill>
@@ -17989,9 +17993,9 @@
                 <a:ea typeface="Aptos" pitchFamily="34" charset="-122"/>
                 <a:cs typeface="Aptos" pitchFamily="34" charset="-120"/>
               </a:rPr>
-              <a:t>Translate this concept into clear decision rights, review steps, documentation expectations, and escalation paths before an AI-supported workflow is approved.</a:t>
-            </a:r>
-            <a:endParaRPr lang="en-US" sz="1320" dirty="0"/>
+              <a:t>Translate this concept into clear decision rights, review steps, documentation.</a:t>
+            </a:r>
+            <a:endParaRPr lang="en-US" sz="1220" dirty="0"/>
           </a:p>
         </p:txBody>
       </p:sp>
@@ -18282,8 +18286,8 @@
         </p:nvSpPr>
         <p:spPr>
           <a:xfrm>
-            <a:off x="868680" y="1508760"/>
-            <a:ext cx="6309360" cy="4160520"/>
+            <a:off x="822960" y="1463040"/>
+            <a:ext cx="6565392" cy="4343400"/>
           </a:xfrm>
           <a:prstGeom prst="rect">
             <a:avLst/>
@@ -18301,7 +18305,7 @@
               <a:buNone/>
             </a:pPr>
             <a:r>
-              <a:rPr lang="en-US" sz="2100" dirty="0">
+              <a:rPr lang="en-US" sz="1920" dirty="0">
                 <a:solidFill>
                   <a:srgbClr val="003A63"/>
                 </a:solidFill>
@@ -18309,16 +18313,16 @@
                 <a:ea typeface="Aptos" pitchFamily="34" charset="-122"/>
                 <a:cs typeface="Aptos" pitchFamily="34" charset="-120"/>
               </a:rPr>
-              <a:t>• AI security matters because public health AI tools may process sensitive records, internal.</a:t>
-            </a:r>
-            <a:endParaRPr lang="en-US" sz="2100" dirty="0"/>
-          </a:p>
-          <a:p>
-            <a:pPr indent="0" marL="0">
-              <a:buNone/>
-            </a:pPr>
-            <a:r>
-              <a:rPr lang="en-US" sz="2100" dirty="0">
+              <a:t>• AI security matters because public health AI tools may process sensitive.</a:t>
+            </a:r>
+            <a:endParaRPr lang="en-US" sz="1920" dirty="0"/>
+          </a:p>
+          <a:p>
+            <a:pPr indent="0" marL="0">
+              <a:buNone/>
+            </a:pPr>
+            <a:r>
+              <a:rPr lang="en-US" sz="1920" dirty="0">
                 <a:solidFill>
                   <a:srgbClr val="003A63"/>
                 </a:solidFill>
@@ -18326,16 +18330,16 @@
                 <a:ea typeface="Aptos" pitchFamily="34" charset="-122"/>
                 <a:cs typeface="Aptos" pitchFamily="34" charset="-120"/>
               </a:rPr>
-              <a:t>• The risks increase when AI tools are connected to email, calendars, case systems, data.</a:t>
-            </a:r>
-            <a:endParaRPr lang="en-US" sz="2100" dirty="0"/>
-          </a:p>
-          <a:p>
-            <a:pPr indent="0" marL="0">
-              <a:buNone/>
-            </a:pPr>
-            <a:r>
-              <a:rPr lang="en-US" sz="2100" dirty="0">
+              <a:t>• The risks increase when AI tools are connected to email, calendars, case.</a:t>
+            </a:r>
+            <a:endParaRPr lang="en-US" sz="1920" dirty="0"/>
+          </a:p>
+          <a:p>
+            <a:pPr indent="0" marL="0">
+              <a:buNone/>
+            </a:pPr>
+            <a:r>
+              <a:rPr lang="en-US" sz="1920" dirty="0">
                 <a:solidFill>
                   <a:srgbClr val="003A63"/>
                 </a:solidFill>
@@ -18343,9 +18347,9 @@
                 <a:ea typeface="Aptos" pitchFamily="34" charset="-122"/>
                 <a:cs typeface="Aptos" pitchFamily="34" charset="-120"/>
               </a:rPr>
-              <a:t>• A security weakness can become a privacy breach, operational disruption, public trust problem,.</a:t>
-            </a:r>
-            <a:endParaRPr lang="en-US" sz="2100" dirty="0"/>
+              <a:t>• A security weakness can become a privacy breach, operational disruption,.</a:t>
+            </a:r>
+            <a:endParaRPr lang="en-US" sz="1920" dirty="0"/>
           </a:p>
         </p:txBody>
       </p:sp>
@@ -18357,12 +18361,12 @@
         </p:nvSpPr>
         <p:spPr>
           <a:xfrm>
-            <a:off x="7635240" y="1325880"/>
-            <a:ext cx="3474720" cy="1255471"/>
+            <a:off x="7543800" y="1325880"/>
+            <a:ext cx="3611880" cy="1261872"/>
           </a:xfrm>
           <a:prstGeom prst="roundRect">
             <a:avLst>
-              <a:gd name="adj" fmla="val 8740"/>
+              <a:gd name="adj" fmla="val 8696"/>
             </a:avLst>
           </a:prstGeom>
           <a:solidFill>
@@ -18384,8 +18388,8 @@
         </p:nvSpPr>
         <p:spPr>
           <a:xfrm>
-            <a:off x="7799832" y="1472184"/>
-            <a:ext cx="3145536" cy="256032"/>
+            <a:off x="7708392" y="1453896"/>
+            <a:ext cx="3282696" cy="228600"/>
           </a:xfrm>
           <a:prstGeom prst="rect">
             <a:avLst/>
@@ -18401,7 +18405,7 @@
               <a:buNone/>
             </a:pPr>
             <a:r>
-              <a:rPr lang="en-US" sz="1300" b="1" dirty="0">
+              <a:rPr lang="en-US" sz="1220" b="1" dirty="0">
                 <a:solidFill>
                   <a:srgbClr val="0068B7"/>
                 </a:solidFill>
@@ -18411,7 +18415,7 @@
               </a:rPr>
               <a:t>Risk check</a:t>
             </a:r>
-            <a:endParaRPr lang="en-US" sz="1300" dirty="0"/>
+            <a:endParaRPr lang="en-US" sz="1220" dirty="0"/>
           </a:p>
         </p:txBody>
       </p:sp>
@@ -18423,8 +18427,8 @@
         </p:nvSpPr>
         <p:spPr>
           <a:xfrm>
-            <a:off x="7799832" y="1801368"/>
-            <a:ext cx="3145536" cy="688543"/>
+            <a:off x="7708392" y="1764792"/>
+            <a:ext cx="3282696" cy="749808"/>
           </a:xfrm>
           <a:prstGeom prst="rect">
             <a:avLst/>
@@ -18442,7 +18446,7 @@
               <a:buNone/>
             </a:pPr>
             <a:r>
-              <a:rPr lang="en-US" sz="1320" dirty="0">
+              <a:rPr lang="en-US" sz="1220" dirty="0">
                 <a:solidFill>
                   <a:srgbClr val="17364A"/>
                 </a:solidFill>
@@ -18450,9 +18454,9 @@
                 <a:ea typeface="Aptos" pitchFamily="34" charset="-122"/>
                 <a:cs typeface="Aptos" pitchFamily="34" charset="-120"/>
               </a:rPr>
-              <a:t>AI security matters because public health AI tools may process sensitive records, internal protocols,.</a:t>
-            </a:r>
-            <a:endParaRPr lang="en-US" sz="1320" dirty="0"/>
+              <a:t>AI security matters because public health AI tools may process sensitive.</a:t>
+            </a:r>
+            <a:endParaRPr lang="en-US" sz="1220" dirty="0"/>
           </a:p>
         </p:txBody>
       </p:sp>
@@ -18464,12 +18468,12 @@
         </p:nvSpPr>
         <p:spPr>
           <a:xfrm>
-            <a:off x="7635240" y="2718511"/>
-            <a:ext cx="3474720" cy="1536192"/>
+            <a:off x="7543800" y="2724912"/>
+            <a:ext cx="3611880" cy="1527048"/>
           </a:xfrm>
           <a:prstGeom prst="roundRect">
             <a:avLst>
-              <a:gd name="adj" fmla="val 7143"/>
+              <a:gd name="adj" fmla="val 7186"/>
             </a:avLst>
           </a:prstGeom>
           <a:solidFill>
@@ -18491,24 +18495,26 @@
         </p:nvSpPr>
         <p:spPr>
           <a:xfrm>
-            <a:off x="7799832" y="2846527"/>
-            <a:ext cx="3145536" cy="237744"/>
-          </a:xfrm>
-          <a:prstGeom prst="rect">
-            <a:avLst/>
-          </a:prstGeom>
-          <a:noFill/>
-          <a:ln/>
-        </p:spPr>
-        <p:txBody>
-          <a:bodyPr wrap="square" lIns="0" tIns="0" rIns="0" bIns="0" rtlCol="0" anchor="ctr"/>
-          <a:lstStyle/>
-          <a:p>
-            <a:pPr indent="0" marL="0">
-              <a:buNone/>
-            </a:pPr>
-            <a:r>
-              <a:rPr lang="en-US" sz="1250" b="1" dirty="0">
+            <a:off x="7708392" y="2852928"/>
+            <a:ext cx="3282696" cy="219456"/>
+          </a:xfrm>
+          <a:prstGeom prst="rect">
+            <a:avLst/>
+          </a:prstGeom>
+          <a:noFill/>
+          <a:ln/>
+        </p:spPr>
+        <p:txBody>
+          <a:bodyPr wrap="square" lIns="0" tIns="0" rIns="0" bIns="0" rtlCol="0" anchor="ctr">
+            <a:normAutofit/>
+          </a:bodyPr>
+          <a:lstStyle/>
+          <a:p>
+            <a:pPr indent="0" marL="0">
+              <a:buNone/>
+            </a:pPr>
+            <a:r>
+              <a:rPr lang="en-US" sz="1160" b="1" dirty="0">
                 <a:solidFill>
                   <a:srgbClr val="0068B7"/>
                 </a:solidFill>
@@ -18518,7 +18524,7 @@
               </a:rPr>
               <a:t>Risk control loop</a:t>
             </a:r>
-            <a:endParaRPr lang="en-US" sz="1250" dirty="0"/>
+            <a:endParaRPr lang="en-US" sz="1160" dirty="0"/>
           </a:p>
         </p:txBody>
       </p:sp>
@@ -18530,7 +18536,7 @@
         </p:nvSpPr>
         <p:spPr>
           <a:xfrm>
-            <a:off x="8763000" y="3399739"/>
+            <a:off x="8717280" y="3406140"/>
             <a:ext cx="164592" cy="0"/>
           </a:xfrm>
           <a:prstGeom prst="line">
@@ -18553,8 +18559,8 @@
         </p:nvSpPr>
         <p:spPr>
           <a:xfrm>
-            <a:off x="7872984" y="3248863"/>
-            <a:ext cx="890016" cy="301752"/>
+            <a:off x="7781544" y="3255264"/>
+            <a:ext cx="935736" cy="301752"/>
           </a:xfrm>
           <a:prstGeom prst="roundRect">
             <a:avLst>
@@ -18580,8 +18586,8 @@
         </p:nvSpPr>
         <p:spPr>
           <a:xfrm>
-            <a:off x="7909560" y="3322015"/>
-            <a:ext cx="816864" cy="146304"/>
+            <a:off x="7818120" y="3328416"/>
+            <a:ext cx="862584" cy="146304"/>
           </a:xfrm>
           <a:prstGeom prst="rect">
             <a:avLst/>
@@ -18621,7 +18627,7 @@
         </p:nvSpPr>
         <p:spPr>
           <a:xfrm>
-            <a:off x="9817608" y="3399739"/>
+            <a:off x="9817608" y="3406140"/>
             <a:ext cx="164592" cy="0"/>
           </a:xfrm>
           <a:prstGeom prst="line">
@@ -18644,8 +18650,8 @@
         </p:nvSpPr>
         <p:spPr>
           <a:xfrm>
-            <a:off x="8927592" y="3248863"/>
-            <a:ext cx="890016" cy="301752"/>
+            <a:off x="8881872" y="3255264"/>
+            <a:ext cx="935736" cy="301752"/>
           </a:xfrm>
           <a:prstGeom prst="roundRect">
             <a:avLst>
@@ -18671,8 +18677,8 @@
         </p:nvSpPr>
         <p:spPr>
           <a:xfrm>
-            <a:off x="8964168" y="3322015"/>
-            <a:ext cx="816864" cy="146304"/>
+            <a:off x="8918448" y="3328416"/>
+            <a:ext cx="862584" cy="146304"/>
           </a:xfrm>
           <a:prstGeom prst="rect">
             <a:avLst/>
@@ -18712,8 +18718,8 @@
         </p:nvSpPr>
         <p:spPr>
           <a:xfrm>
-            <a:off x="9982200" y="3248863"/>
-            <a:ext cx="890016" cy="301752"/>
+            <a:off x="9982200" y="3255264"/>
+            <a:ext cx="935736" cy="301752"/>
           </a:xfrm>
           <a:prstGeom prst="roundRect">
             <a:avLst>
@@ -18739,8 +18745,8 @@
         </p:nvSpPr>
         <p:spPr>
           <a:xfrm>
-            <a:off x="10018776" y="3322015"/>
-            <a:ext cx="816864" cy="146304"/>
+            <a:off x="10018776" y="3328416"/>
+            <a:ext cx="862584" cy="146304"/>
           </a:xfrm>
           <a:prstGeom prst="rect">
             <a:avLst/>
@@ -18780,8 +18786,8 @@
         </p:nvSpPr>
         <p:spPr>
           <a:xfrm>
-            <a:off x="7854696" y="3742639"/>
-            <a:ext cx="3035808" cy="365760"/>
+            <a:off x="7763256" y="3749040"/>
+            <a:ext cx="3172968" cy="356616"/>
           </a:xfrm>
           <a:prstGeom prst="rect">
             <a:avLst/>
@@ -18799,7 +18805,7 @@
               <a:buNone/>
             </a:pPr>
             <a:r>
-              <a:rPr lang="en-US" sz="1120" dirty="0">
+              <a:rPr lang="en-US" sz="1040" dirty="0">
                 <a:solidFill>
                   <a:srgbClr val="17364A"/>
                 </a:solidFill>
@@ -18807,9 +18813,9 @@
                 <a:ea typeface="Aptos" pitchFamily="34" charset="-122"/>
                 <a:cs typeface="Aptos" pitchFamily="34" charset="-120"/>
               </a:rPr>
-              <a:t>Responsible use depends on finding risks early, applying safeguards, and watching for drift or harm over time.</a:t>
-            </a:r>
-            <a:endParaRPr lang="en-US" sz="1120" dirty="0"/>
+              <a:t>Responsible use depends on finding risks early, applying safeguards,.</a:t>
+            </a:r>
+            <a:endParaRPr lang="en-US" sz="1040" dirty="0"/>
           </a:p>
         </p:txBody>
       </p:sp>
@@ -18821,12 +18827,12 @@
         </p:nvSpPr>
         <p:spPr>
           <a:xfrm>
-            <a:off x="7635240" y="4391863"/>
-            <a:ext cx="3474720" cy="1255471"/>
+            <a:off x="7543800" y="4389120"/>
+            <a:ext cx="3611880" cy="1261872"/>
           </a:xfrm>
           <a:prstGeom prst="roundRect">
             <a:avLst>
-              <a:gd name="adj" fmla="val 8740"/>
+              <a:gd name="adj" fmla="val 8696"/>
             </a:avLst>
           </a:prstGeom>
           <a:solidFill>
@@ -18848,8 +18854,8 @@
         </p:nvSpPr>
         <p:spPr>
           <a:xfrm>
-            <a:off x="7799832" y="4538167"/>
-            <a:ext cx="3145536" cy="256032"/>
+            <a:off x="7708392" y="4517136"/>
+            <a:ext cx="3282696" cy="228600"/>
           </a:xfrm>
           <a:prstGeom prst="rect">
             <a:avLst/>
@@ -18865,7 +18871,7 @@
               <a:buNone/>
             </a:pPr>
             <a:r>
-              <a:rPr lang="en-US" sz="1300" b="1" dirty="0">
+              <a:rPr lang="en-US" sz="1220" b="1" dirty="0">
                 <a:solidFill>
                   <a:srgbClr val="0068B7"/>
                 </a:solidFill>
@@ -18875,7 +18881,7 @@
               </a:rPr>
               <a:t>Safeguard to plan</a:t>
             </a:r>
-            <a:endParaRPr lang="en-US" sz="1300" dirty="0"/>
+            <a:endParaRPr lang="en-US" sz="1220" dirty="0"/>
           </a:p>
         </p:txBody>
       </p:sp>
@@ -18887,8 +18893,8 @@
         </p:nvSpPr>
         <p:spPr>
           <a:xfrm>
-            <a:off x="7799832" y="4867351"/>
-            <a:ext cx="3145536" cy="688543"/>
+            <a:off x="7708392" y="4828032"/>
+            <a:ext cx="3282696" cy="749808"/>
           </a:xfrm>
           <a:prstGeom prst="rect">
             <a:avLst/>
@@ -18906,7 +18912,7 @@
               <a:buNone/>
             </a:pPr>
             <a:r>
-              <a:rPr lang="en-US" sz="1320" dirty="0">
+              <a:rPr lang="en-US" sz="1220" dirty="0">
                 <a:solidFill>
                   <a:srgbClr val="17364A"/>
                 </a:solidFill>
@@ -18914,9 +18920,9 @@
                 <a:ea typeface="Aptos" pitchFamily="34" charset="-122"/>
                 <a:cs typeface="Aptos" pitchFamily="34" charset="-120"/>
               </a:rPr>
-              <a:t>Identify what could go wrong, who could be affected, what safeguards are needed, and what evidence should be reviewed before use.</a:t>
-            </a:r>
-            <a:endParaRPr lang="en-US" sz="1320" dirty="0"/>
+              <a:t>Identify what could go wrong, who could be affected, what safeguards are needed,.</a:t>
+            </a:r>
+            <a:endParaRPr lang="en-US" sz="1220" dirty="0"/>
           </a:p>
         </p:txBody>
       </p:sp>

--- a/downloads/presentations/modules/gov-300.pptx
+++ b/downloads/presentations/modules/gov-300.pptx
@@ -12453,7 +12453,7 @@
                 <a:ea typeface="Aptos" pitchFamily="34" charset="-122"/>
                 <a:cs typeface="Aptos" pitchFamily="34" charset="-120"/>
               </a:rPr>
-              <a:t>• 1. What is prompt injection?</a:t>
+              <a:t>1. What is prompt injection?</a:t>
             </a:r>
             <a:endParaRPr lang="en-US" sz="1920" dirty="0"/>
           </a:p>
@@ -12470,7 +12470,7 @@
                 <a:ea typeface="Aptos" pitchFamily="34" charset="-122"/>
                 <a:cs typeface="Aptos" pitchFamily="34" charset="-120"/>
               </a:rPr>
-              <a:t>• 2. What does least privilege mean?</a:t>
+              <a:t>2. What does least privilege mean?</a:t>
             </a:r>
             <a:endParaRPr lang="en-US" sz="1920" dirty="0"/>
           </a:p>
@@ -12487,7 +12487,7 @@
                 <a:ea typeface="Aptos" pitchFamily="34" charset="-122"/>
                 <a:cs typeface="Aptos" pitchFamily="34" charset="-120"/>
               </a:rPr>
-              <a:t>• 3. Why does agentic AI increase security risk?</a:t>
+              <a:t>3. Why does agentic AI increase security risk?</a:t>
             </a:r>
             <a:endParaRPr lang="en-US" sz="1920" dirty="0"/>
           </a:p>
@@ -12594,7 +12594,7 @@
                 <a:ea typeface="Aptos" pitchFamily="34" charset="-122"/>
                 <a:cs typeface="Aptos" pitchFamily="34" charset="-120"/>
               </a:rPr>
-              <a:t>1. What is prompt injection?</a:t>
+              <a:t>What is prompt injection?</a:t>
             </a:r>
             <a:endParaRPr lang="en-US" sz="1220" dirty="0"/>
           </a:p>
@@ -12701,41 +12701,7 @@
                 <a:ea typeface="Aptos" pitchFamily="34" charset="-122"/>
                 <a:cs typeface="Aptos" pitchFamily="34" charset="-120"/>
               </a:rPr>
-              <a:t>1.</a:t>
-            </a:r>
-            <a:endParaRPr lang="en-US" sz="1140" dirty="0"/>
-          </a:p>
-          <a:p>
-            <a:pPr indent="0" marL="0">
-              <a:buNone/>
-            </a:pPr>
-            <a:r>
-              <a:rPr lang="en-US" sz="1140" dirty="0">
-                <a:solidFill>
-                  <a:srgbClr val="17364A"/>
-                </a:solidFill>
-                <a:latin typeface="Aptos" pitchFamily="34" charset="0"/>
-                <a:ea typeface="Aptos" pitchFamily="34" charset="-122"/>
-                <a:cs typeface="Aptos" pitchFamily="34" charset="-120"/>
-              </a:rPr>
               <a:t>What is prompt injection?</a:t>
-            </a:r>
-            <a:endParaRPr lang="en-US" sz="1140" dirty="0"/>
-          </a:p>
-          <a:p>
-            <a:pPr indent="0" marL="0">
-              <a:buNone/>
-            </a:pPr>
-            <a:r>
-              <a:rPr lang="en-US" sz="1140" dirty="0">
-                <a:solidFill>
-                  <a:srgbClr val="17364A"/>
-                </a:solidFill>
-                <a:latin typeface="Aptos" pitchFamily="34" charset="0"/>
-                <a:ea typeface="Aptos" pitchFamily="34" charset="-122"/>
-                <a:cs typeface="Aptos" pitchFamily="34" charset="-120"/>
-              </a:rPr>
-              <a:t>2.</a:t>
             </a:r>
             <a:endParaRPr lang="en-US" sz="1140" dirty="0"/>
           </a:p>
